--- a/bio-it-agent.pptx
+++ b/bio-it-agent.pptx
@@ -12,12 +12,12 @@
   </p:handoutMasterIdLst>
   <p:sldIdLst>
     <p:sldId id="3459" r:id="rId2"/>
-    <p:sldId id="3472" r:id="rId3"/>
-    <p:sldId id="3518" r:id="rId4"/>
-    <p:sldId id="3521" r:id="rId5"/>
-    <p:sldId id="3519" r:id="rId6"/>
-    <p:sldId id="3520" r:id="rId7"/>
-    <p:sldId id="3517" r:id="rId8"/>
+    <p:sldId id="3517" r:id="rId3"/>
+    <p:sldId id="3472" r:id="rId4"/>
+    <p:sldId id="3518" r:id="rId5"/>
+    <p:sldId id="3521" r:id="rId6"/>
+    <p:sldId id="3519" r:id="rId7"/>
+    <p:sldId id="3520" r:id="rId8"/>
   </p:sldIdLst>
   <p:sldSz cx="9144000" cy="6858000" type="screen4x3"/>
   <p:notesSz cx="6797675" cy="9925050"/>
@@ -122,12 +122,12 @@
         <p14:section name="Gemm 3 Technical Report" id="{30F6892D-1922-4A88-A82D-8CD0653C5411}">
           <p14:sldIdLst>
             <p14:sldId id="3459"/>
+            <p14:sldId id="3517"/>
             <p14:sldId id="3472"/>
             <p14:sldId id="3518"/>
             <p14:sldId id="3521"/>
             <p14:sldId id="3519"/>
             <p14:sldId id="3520"/>
-            <p14:sldId id="3517"/>
           </p14:sldIdLst>
         </p14:section>
       </p14:sectionLst>
@@ -253,7 +253,7 @@
           <a:p>
             <a:fld id="{982F7CBC-87DD-4F69-8F50-7ED68F7FF790}" type="datetimeFigureOut">
               <a:rPr lang="zh-TW" altLang="en-US" smtClean="0"/>
-              <a:t>2026/7/17</a:t>
+              <a:t>2026/7/22</a:t>
             </a:fld>
             <a:endParaRPr lang="zh-TW" altLang="en-US"/>
           </a:p>
@@ -430,7 +430,7 @@
           <a:p>
             <a:fld id="{863167AA-796B-4B6A-95ED-1C0BCB3E5802}" type="datetimeFigureOut">
               <a:rPr lang="zh-TW" altLang="en-US" smtClean="0"/>
-              <a:t>2026/7/17</a:t>
+              <a:t>2026/7/22</a:t>
             </a:fld>
             <a:endParaRPr lang="zh-TW" altLang="en-US"/>
           </a:p>
@@ -916,7 +916,7 @@
           <a:p>
             <a:fld id="{E3A6CE5E-F349-486D-8749-82EF2AD71FA8}" type="slidenum">
               <a:rPr lang="zh-TW" altLang="en-US" smtClean="0"/>
-              <a:t>2</a:t>
+              <a:t>3</a:t>
             </a:fld>
             <a:endParaRPr lang="zh-TW" altLang="en-US"/>
           </a:p>
@@ -1707,6 +1707,426 @@
   <p:cSld>
     <p:spTree>
       <p:nvGrpSpPr>
+        <p:cNvPr id="1" name=""/>
+        <p:cNvGrpSpPr/>
+        <p:nvPr/>
+      </p:nvGrpSpPr>
+      <p:grpSpPr>
+        <a:xfrm>
+          <a:off x="0" y="0"/>
+          <a:ext cx="0" cy="0"/>
+          <a:chOff x="0" y="0"/>
+          <a:chExt cx="0" cy="0"/>
+        </a:xfrm>
+      </p:grpSpPr>
+      <p:sp>
+        <p:nvSpPr>
+          <p:cNvPr id="3" name="文字方塊 2">
+            <a:extLst>
+              <a:ext uri="{FF2B5EF4-FFF2-40B4-BE49-F238E27FC236}">
+                <a16:creationId xmlns:a16="http://schemas.microsoft.com/office/drawing/2014/main" id="{EB19A21F-439B-649C-1202-64BBA3D06DB7}"/>
+              </a:ext>
+            </a:extLst>
+          </p:cNvPr>
+          <p:cNvSpPr txBox="1"/>
+          <p:nvPr/>
+        </p:nvSpPr>
+        <p:spPr>
+          <a:xfrm>
+            <a:off x="251520" y="2852936"/>
+            <a:ext cx="8640960" cy="3285515"/>
+          </a:xfrm>
+          <a:prstGeom prst="rect">
+            <a:avLst/>
+          </a:prstGeom>
+          <a:noFill/>
+        </p:spPr>
+        <p:txBody>
+          <a:bodyPr wrap="square">
+            <a:spAutoFit/>
+          </a:bodyPr>
+          <a:lstStyle/>
+          <a:p>
+            <a:pPr marL="0" marR="0">
+              <a:spcBef>
+                <a:spcPts val="1800"/>
+              </a:spcBef>
+              <a:spcAft>
+                <a:spcPts val="900"/>
+              </a:spcAft>
+              <a:buNone/>
+            </a:pPr>
+            <a:r>
+              <a:rPr lang="zh-TW" altLang="zh-TW" sz="1000" b="1" u="none" strike="noStrike" dirty="0">
+                <a:effectLst/>
+                <a:latin typeface="微軟正黑體" panose="020B0604030504040204" pitchFamily="34" charset="-120"/>
+                <a:ea typeface="微軟正黑體" panose="020B0604030504040204" pitchFamily="34" charset="-120"/>
+              </a:rPr>
+              <a:t>STAgent 的四大核心運作機制</a:t>
+            </a:r>
+          </a:p>
+          <a:p>
+            <a:pPr marL="0" marR="0">
+              <a:spcBef>
+                <a:spcPts val="900"/>
+              </a:spcBef>
+              <a:spcAft>
+                <a:spcPts val="1200"/>
+              </a:spcAft>
+              <a:buNone/>
+            </a:pPr>
+            <a:r>
+              <a:rPr lang="zh-TW" altLang="zh-TW" sz="1000" b="0" u="none" strike="noStrike" dirty="0">
+                <a:effectLst/>
+                <a:latin typeface="微軟正黑體" panose="020B0604030504040204" pitchFamily="34" charset="-120"/>
+                <a:ea typeface="微軟正黑體" panose="020B0604030504040204" pitchFamily="34" charset="-120"/>
+              </a:rPr>
+              <a:t>STAgent 之所以強大，在於它不是一個單純的聊天機器人，而是一個具備「眼、腦、手、智庫」的完整科學助手：</a:t>
+            </a:r>
+          </a:p>
+          <a:p>
+            <a:pPr marL="0" marR="0">
+              <a:spcBef>
+                <a:spcPts val="900"/>
+              </a:spcBef>
+              <a:spcAft>
+                <a:spcPts val="900"/>
+              </a:spcAft>
+              <a:buFont typeface="+mj-lt"/>
+              <a:buAutoNum type="arabicPeriod"/>
+            </a:pPr>
+            <a:r>
+              <a:rPr lang="zh-TW" altLang="zh-TW" sz="1000" b="1" u="none" strike="noStrike" dirty="0">
+                <a:effectLst/>
+                <a:latin typeface="微軟正黑體" panose="020B0604030504040204" pitchFamily="34" charset="-120"/>
+                <a:ea typeface="微軟正黑體" panose="020B0604030504040204" pitchFamily="34" charset="-120"/>
+              </a:rPr>
+              <a:t>視覺推理（眼 - Visual Reasoning）：</a:t>
+            </a:r>
+            <a:br>
+              <a:rPr lang="zh-TW" altLang="zh-TW" sz="1000" b="0" u="none" strike="noStrike" dirty="0">
+                <a:effectLst/>
+                <a:latin typeface="微軟正黑體" panose="020B0604030504040204" pitchFamily="34" charset="-120"/>
+                <a:ea typeface="微軟正黑體" panose="020B0604030504040204" pitchFamily="34" charset="-120"/>
+              </a:rPr>
+            </a:br>
+            <a:r>
+              <a:rPr lang="zh-TW" altLang="zh-TW" sz="1000" b="0" u="none" strike="noStrike" dirty="0">
+                <a:effectLst/>
+                <a:latin typeface="微軟正黑體" panose="020B0604030504040204" pitchFamily="34" charset="-120"/>
+                <a:ea typeface="微軟正黑體" panose="020B0604030504040204" pitchFamily="34" charset="-120"/>
+              </a:rPr>
+              <a:t>內建多模態視覺大模型（VLM），它能直接「看懂」空間聚類圖、高解析 H&amp;E 組織照片或細胞分布圖。它能自主識別出圖像中細胞的空間特徵（例如：早期細胞呈散落未組織狀，而後期會緊密聚集成群，重塑成熟的組織結構）。</a:t>
+            </a:r>
+          </a:p>
+          <a:p>
+            <a:pPr marL="0" marR="0">
+              <a:spcBef>
+                <a:spcPts val="900"/>
+              </a:spcBef>
+              <a:spcAft>
+                <a:spcPts val="900"/>
+              </a:spcAft>
+              <a:buFont typeface="+mj-lt"/>
+              <a:buAutoNum type="arabicPeriod"/>
+            </a:pPr>
+            <a:r>
+              <a:rPr lang="zh-TW" altLang="zh-TW" sz="1000" b="1" u="none" strike="noStrike" dirty="0">
+                <a:effectLst/>
+                <a:latin typeface="微軟正黑體" panose="020B0604030504040204" pitchFamily="34" charset="-120"/>
+                <a:ea typeface="微軟正黑體" panose="020B0604030504040204" pitchFamily="34" charset="-120"/>
+              </a:rPr>
+              <a:t>動態程式碼生成與工具呼叫（手 - Code Generation &amp; Tool-Use）：</a:t>
+            </a:r>
+            <a:br>
+              <a:rPr lang="zh-TW" altLang="zh-TW" sz="1000" b="0" u="none" strike="noStrike" dirty="0">
+                <a:effectLst/>
+                <a:latin typeface="微軟正黑體" panose="020B0604030504040204" pitchFamily="34" charset="-120"/>
+                <a:ea typeface="微軟正黑體" panose="020B0604030504040204" pitchFamily="34" charset="-120"/>
+              </a:rPr>
+            </a:br>
+            <a:r>
+              <a:rPr lang="zh-TW" altLang="zh-TW" sz="1000" b="0" u="none" strike="noStrike" dirty="0">
+                <a:effectLst/>
+                <a:latin typeface="微軟正黑體" panose="020B0604030504040204" pitchFamily="34" charset="-120"/>
+                <a:ea typeface="微軟正黑體" panose="020B0604030504040204" pitchFamily="34" charset="-120"/>
+              </a:rPr>
+              <a:t>當面臨複雜的生物信息任務（如數據預處理、空間鄰近度計算或基因插補）時，它會</a:t>
+            </a:r>
+            <a:r>
+              <a:rPr lang="zh-TW" altLang="zh-TW" sz="1000" b="1" u="none" strike="noStrike" dirty="0">
+                <a:effectLst/>
+                <a:latin typeface="微軟正黑體" panose="020B0604030504040204" pitchFamily="34" charset="-120"/>
+                <a:ea typeface="微軟正黑體" panose="020B0604030504040204" pitchFamily="34" charset="-120"/>
+              </a:rPr>
+              <a:t>自主編寫 Python 程式碼</a:t>
+            </a:r>
+            <a:r>
+              <a:rPr lang="zh-TW" altLang="zh-TW" sz="1000" b="0" u="none" strike="noStrike" dirty="0">
+                <a:effectLst/>
+                <a:latin typeface="微軟正黑體" panose="020B0604030504040204" pitchFamily="34" charset="-120"/>
+                <a:ea typeface="微軟正黑體" panose="020B0604030504040204" pitchFamily="34" charset="-120"/>
+              </a:rPr>
+              <a:t>（調用 Scanpy、Squidpy、Tangram、STAligner 等專業生物資訊工具庫），直接在本機運行分析並產出圖表。 [</a:t>
+            </a:r>
+            <a:r>
+              <a:rPr lang="zh-TW" altLang="zh-TW" sz="1000" b="0" u="none" strike="noStrike" dirty="0">
+                <a:effectLst/>
+                <a:latin typeface="微軟正黑體" panose="020B0604030504040204" pitchFamily="34" charset="-120"/>
+                <a:ea typeface="微軟正黑體" panose="020B0604030504040204" pitchFamily="34" charset="-120"/>
+                <a:hlinkClick r:id="rId2"/>
+              </a:rPr>
+              <a:t>1</a:t>
+            </a:r>
+            <a:r>
+              <a:rPr lang="zh-TW" altLang="zh-TW" sz="1000" b="0" u="none" strike="noStrike" dirty="0">
+                <a:effectLst/>
+                <a:latin typeface="微軟正黑體" panose="020B0604030504040204" pitchFamily="34" charset="-120"/>
+                <a:ea typeface="微軟正黑體" panose="020B0604030504040204" pitchFamily="34" charset="-120"/>
+              </a:rPr>
+              <a:t>, </a:t>
+            </a:r>
+            <a:r>
+              <a:rPr lang="zh-TW" altLang="zh-TW" sz="1000" b="0" u="none" strike="noStrike" dirty="0">
+                <a:effectLst/>
+                <a:latin typeface="微軟正黑體" panose="020B0604030504040204" pitchFamily="34" charset="-120"/>
+                <a:ea typeface="微軟正黑體" panose="020B0604030504040204" pitchFamily="34" charset="-120"/>
+                <a:hlinkClick r:id="rId3"/>
+              </a:rPr>
+              <a:t>2</a:t>
+            </a:r>
+            <a:r>
+              <a:rPr lang="zh-TW" altLang="zh-TW" sz="1000" b="0" u="none" strike="noStrike" dirty="0">
+                <a:effectLst/>
+                <a:latin typeface="微軟正黑體" panose="020B0604030504040204" pitchFamily="34" charset="-120"/>
+                <a:ea typeface="微軟正黑體" panose="020B0604030504040204" pitchFamily="34" charset="-120"/>
+              </a:rPr>
+              <a:t>]</a:t>
+            </a:r>
+          </a:p>
+          <a:p>
+            <a:pPr marL="0" marR="0">
+              <a:spcBef>
+                <a:spcPts val="900"/>
+              </a:spcBef>
+              <a:spcAft>
+                <a:spcPts val="900"/>
+              </a:spcAft>
+              <a:buFont typeface="+mj-lt"/>
+              <a:buAutoNum type="arabicPeriod"/>
+            </a:pPr>
+            <a:r>
+              <a:rPr lang="zh-TW" altLang="zh-TW" sz="1000" b="1" u="none" strike="noStrike" dirty="0">
+                <a:effectLst/>
+                <a:latin typeface="微軟正黑體" panose="020B0604030504040204" pitchFamily="34" charset="-120"/>
+                <a:ea typeface="微軟正黑體" panose="020B0604030504040204" pitchFamily="34" charset="-120"/>
+              </a:rPr>
+              <a:t>實時文獻檢索與知識對齊（智庫 - Literature Retrieval &amp; RAG）：</a:t>
+            </a:r>
+            <a:br>
+              <a:rPr lang="zh-TW" altLang="zh-TW" sz="1000" b="0" u="none" strike="noStrike" dirty="0">
+                <a:effectLst/>
+                <a:latin typeface="微軟正黑體" panose="020B0604030504040204" pitchFamily="34" charset="-120"/>
+                <a:ea typeface="微軟正黑體" panose="020B0604030504040204" pitchFamily="34" charset="-120"/>
+              </a:rPr>
+            </a:br>
+            <a:r>
+              <a:rPr lang="zh-TW" altLang="zh-TW" sz="1000" b="0" u="none" strike="noStrike" dirty="0">
+                <a:effectLst/>
+                <a:latin typeface="微軟正黑體" panose="020B0604030504040204" pitchFamily="34" charset="-120"/>
+                <a:ea typeface="微軟正黑體" panose="020B0604030504040204" pitchFamily="34" charset="-120"/>
+              </a:rPr>
+              <a:t>AI 發現某個空間特徵後，會動態連線至權威醫學資料庫，檢索同行評審（Peer-reviewed）的科學文獻。它能把實驗數據（如某個配體-受體的空間高度集中）與真實世界的醫學研究進行交叉比對，給出具備科學文獻支持的</a:t>
+            </a:r>
+            <a:r>
+              <a:rPr lang="zh-TW" altLang="zh-TW" sz="1000" b="1" u="none" strike="noStrike" dirty="0">
+                <a:effectLst/>
+                <a:latin typeface="微軟正黑體" panose="020B0604030504040204" pitchFamily="34" charset="-120"/>
+                <a:ea typeface="微軟正黑體" panose="020B0604030504040204" pitchFamily="34" charset="-120"/>
+              </a:rPr>
+              <a:t>機制性解釋</a:t>
+            </a:r>
+            <a:r>
+              <a:rPr lang="zh-TW" altLang="zh-TW" sz="1000" b="0" u="none" strike="noStrike" dirty="0">
+                <a:effectLst/>
+                <a:latin typeface="微軟正黑體" panose="020B0604030504040204" pitchFamily="34" charset="-120"/>
+                <a:ea typeface="微軟正黑體" panose="020B0604030504040204" pitchFamily="34" charset="-120"/>
+              </a:rPr>
+              <a:t>。 [</a:t>
+            </a:r>
+            <a:r>
+              <a:rPr lang="zh-TW" altLang="zh-TW" sz="1000" b="0" u="none" strike="noStrike" dirty="0">
+                <a:effectLst/>
+                <a:latin typeface="微軟正黑體" panose="020B0604030504040204" pitchFamily="34" charset="-120"/>
+                <a:ea typeface="微軟正黑體" panose="020B0604030504040204" pitchFamily="34" charset="-120"/>
+                <a:hlinkClick r:id="rId4"/>
+              </a:rPr>
+              <a:t>1</a:t>
+            </a:r>
+            <a:r>
+              <a:rPr lang="zh-TW" altLang="zh-TW" sz="1000" b="0" u="none" strike="noStrike" dirty="0">
+                <a:effectLst/>
+                <a:latin typeface="微軟正黑體" panose="020B0604030504040204" pitchFamily="34" charset="-120"/>
+                <a:ea typeface="微軟正黑體" panose="020B0604030504040204" pitchFamily="34" charset="-120"/>
+              </a:rPr>
+              <a:t>, </a:t>
+            </a:r>
+            <a:r>
+              <a:rPr lang="zh-TW" altLang="zh-TW" sz="1000" b="0" u="none" strike="noStrike" dirty="0">
+                <a:effectLst/>
+                <a:latin typeface="微軟正黑體" panose="020B0604030504040204" pitchFamily="34" charset="-120"/>
+                <a:ea typeface="微軟正黑體" panose="020B0604030504040204" pitchFamily="34" charset="-120"/>
+                <a:hlinkClick r:id="rId5"/>
+              </a:rPr>
+              <a:t>2</a:t>
+            </a:r>
+            <a:r>
+              <a:rPr lang="zh-TW" altLang="zh-TW" sz="1000" b="0" u="none" strike="noStrike" dirty="0">
+                <a:effectLst/>
+                <a:latin typeface="微軟正黑體" panose="020B0604030504040204" pitchFamily="34" charset="-120"/>
+                <a:ea typeface="微軟正黑體" panose="020B0604030504040204" pitchFamily="34" charset="-120"/>
+              </a:rPr>
+              <a:t>]</a:t>
+            </a:r>
+          </a:p>
+          <a:p>
+            <a:pPr marL="0" marR="0">
+              <a:spcBef>
+                <a:spcPts val="900"/>
+              </a:spcBef>
+              <a:spcAft>
+                <a:spcPts val="900"/>
+              </a:spcAft>
+              <a:buFont typeface="+mj-lt"/>
+              <a:buAutoNum type="arabicPeriod"/>
+            </a:pPr>
+            <a:r>
+              <a:rPr lang="zh-TW" altLang="zh-TW" sz="1000" b="1" u="none" strike="noStrike" dirty="0">
+                <a:effectLst/>
+                <a:latin typeface="微軟正黑體" panose="020B0604030504040204" pitchFamily="34" charset="-120"/>
+                <a:ea typeface="微軟正黑體" panose="020B0604030504040204" pitchFamily="34" charset="-120"/>
+              </a:rPr>
+              <a:t>端到端報告與決策生成（腦 - End-to-End Automation）：</a:t>
+            </a:r>
+            <a:br>
+              <a:rPr lang="zh-TW" altLang="zh-TW" sz="1000" b="0" u="none" strike="noStrike" dirty="0">
+                <a:effectLst/>
+                <a:latin typeface="微軟正黑體" panose="020B0604030504040204" pitchFamily="34" charset="-120"/>
+                <a:ea typeface="微軟正黑體" panose="020B0604030504040204" pitchFamily="34" charset="-120"/>
+              </a:rPr>
+            </a:br>
+            <a:r>
+              <a:rPr lang="zh-TW" altLang="zh-TW" sz="1000" b="0" u="none" strike="noStrike" dirty="0">
+                <a:effectLst/>
+                <a:latin typeface="微軟正黑體" panose="020B0604030504040204" pitchFamily="34" charset="-120"/>
+                <a:ea typeface="微軟正黑體" panose="020B0604030504040204" pitchFamily="34" charset="-120"/>
+              </a:rPr>
+              <a:t>最終，它會將上述的影像發現、數據分析圖表、文獻依據，整合提煉成一份具備高度可解釋性的完整科學或臨床診斷報告</a:t>
+            </a:r>
+          </a:p>
+        </p:txBody>
+      </p:sp>
+      <p:sp>
+        <p:nvSpPr>
+          <p:cNvPr id="6" name="標題 1">
+            <a:extLst>
+              <a:ext uri="{FF2B5EF4-FFF2-40B4-BE49-F238E27FC236}">
+                <a16:creationId xmlns:a16="http://schemas.microsoft.com/office/drawing/2014/main" id="{D0FCB7C8-D55B-C23C-EBA3-E4239EBFE35F}"/>
+              </a:ext>
+            </a:extLst>
+          </p:cNvPr>
+          <p:cNvSpPr txBox="1">
+            <a:spLocks/>
+          </p:cNvSpPr>
+          <p:nvPr/>
+        </p:nvSpPr>
+        <p:spPr>
+          <a:xfrm>
+            <a:off x="179512" y="116632"/>
+            <a:ext cx="7713554" cy="612186"/>
+          </a:xfrm>
+          <a:prstGeom prst="rect">
+            <a:avLst/>
+          </a:prstGeom>
+        </p:spPr>
+        <p:txBody>
+          <a:bodyPr/>
+          <a:lstStyle>
+            <a:lvl1pPr algn="l" defTabSz="914400" rtl="0" eaLnBrk="1" latinLnBrk="0" hangingPunct="1">
+              <a:spcBef>
+                <a:spcPct val="0"/>
+              </a:spcBef>
+              <a:buNone/>
+              <a:defRPr sz="2400" kern="1200">
+                <a:solidFill>
+                  <a:schemeClr val="tx1"/>
+                </a:solidFill>
+                <a:latin typeface="+mj-lt"/>
+                <a:ea typeface="+mj-ea"/>
+                <a:cs typeface="+mj-cs"/>
+              </a:defRPr>
+            </a:lvl1pPr>
+          </a:lstStyle>
+          <a:p>
+            <a:r>
+              <a:rPr lang="en-US" altLang="zh-TW" sz="2800">
+                <a:latin typeface="Noto Sans HK" panose="020B0200000000000000" pitchFamily="34" charset="-120"/>
+                <a:ea typeface="Noto Sans HK" panose="020B0200000000000000" pitchFamily="34" charset="-120"/>
+                <a:cs typeface="Aharoni" panose="020F0502020204030204" pitchFamily="2" charset="-79"/>
+                <a:sym typeface="Wingdings" panose="05000000000000000000" pitchFamily="2" charset="2"/>
+              </a:rPr>
+              <a:t>Architecture</a:t>
+            </a:r>
+            <a:endParaRPr lang="en-US" altLang="zh-TW" sz="2800" dirty="0">
+              <a:latin typeface="Noto Sans HK" panose="020B0200000000000000" pitchFamily="34" charset="-120"/>
+              <a:ea typeface="Noto Sans HK" panose="020B0200000000000000" pitchFamily="34" charset="-120"/>
+              <a:cs typeface="Aharoni" panose="020F0502020204030204" pitchFamily="2" charset="-79"/>
+              <a:sym typeface="Wingdings" panose="05000000000000000000" pitchFamily="2" charset="2"/>
+            </a:endParaRPr>
+          </a:p>
+          <a:p>
+            <a:pPr marL="285750" indent="-285750">
+              <a:buFontTx/>
+              <a:buChar char="-"/>
+            </a:pPr>
+            <a:endParaRPr lang="en-US" altLang="zh-TW" sz="1400" dirty="0">
+              <a:latin typeface="Noto Sans HK" panose="020B0200000000000000" pitchFamily="34" charset="-120"/>
+              <a:ea typeface="Noto Sans HK" panose="020B0200000000000000" pitchFamily="34" charset="-120"/>
+              <a:cs typeface="Arial" panose="020B0604020202020204" pitchFamily="34" charset="0"/>
+            </a:endParaRPr>
+          </a:p>
+        </p:txBody>
+      </p:sp>
+    </p:spTree>
+    <p:extLst>
+      <p:ext uri="{BB962C8B-B14F-4D97-AF65-F5344CB8AC3E}">
+        <p14:creationId xmlns:p14="http://schemas.microsoft.com/office/powerpoint/2010/main" val="1913671186"/>
+      </p:ext>
+    </p:extLst>
+  </p:cSld>
+  <p:clrMapOvr>
+    <a:masterClrMapping/>
+  </p:clrMapOvr>
+  <mc:AlternateContent xmlns:mc="http://schemas.openxmlformats.org/markup-compatibility/2006" xmlns:p159="http://schemas.microsoft.com/office/powerpoint/2015/09/main">
+    <mc:Choice Requires="p159">
+      <p:transition xmlns:p14="http://schemas.microsoft.com/office/powerpoint/2010/main" spd="slow" p14:dur="2000" advClick="0">
+        <p159:morph option="byObject"/>
+      </p:transition>
+    </mc:Choice>
+    <mc:Fallback xmlns="">
+      <p:transition spd="slow" advClick="0">
+        <p:fade/>
+      </p:transition>
+    </mc:Fallback>
+  </mc:AlternateContent>
+</p:sld>
+</file>
+
+<file path=ppt/slides/slide3.xml><?xml version="1.0" encoding="utf-8"?>
+<p:sld xmlns:a="http://schemas.openxmlformats.org/drawingml/2006/main" xmlns:r="http://schemas.openxmlformats.org/officeDocument/2006/relationships" xmlns:p="http://schemas.openxmlformats.org/presentationml/2006/main">
+  <p:cSld>
+    <p:spTree>
+      <p:nvGrpSpPr>
         <p:cNvPr id="1" name="">
           <a:extLst>
             <a:ext uri="{FF2B5EF4-FFF2-40B4-BE49-F238E27FC236}">
@@ -1740,7 +2160,7 @@
         <p:spPr>
           <a:xfrm>
             <a:off x="845586" y="1120676"/>
-            <a:ext cx="7452828" cy="1292662"/>
+            <a:ext cx="7452828" cy="1661993"/>
           </a:xfrm>
           <a:prstGeom prst="rect">
             <a:avLst/>
@@ -1765,25 +2185,7 @@
                 <a:latin typeface="Noto Sans HK" panose="020B0200000000000000" pitchFamily="34" charset="-120"/>
                 <a:ea typeface="Noto Sans HK" panose="020B0200000000000000" pitchFamily="34" charset="-120"/>
               </a:rPr>
-              <a:t>AI Runtime </a:t>
-            </a:r>
-            <a:r>
-              <a:rPr kumimoji="0" lang="en-US" altLang="zh-TW" sz="1200" b="0" i="0" u="none" strike="noStrike" kern="1200" cap="none" spc="0" normalizeH="0" baseline="0" noProof="0" dirty="0">
-                <a:ln>
-                  <a:noFill/>
-                </a:ln>
-                <a:solidFill>
-                  <a:schemeClr val="bg1">
-                    <a:lumMod val="75000"/>
-                  </a:schemeClr>
-                </a:solidFill>
-                <a:effectLst/>
-                <a:uLnTx/>
-                <a:uFillTx/>
-                <a:latin typeface="Noto Sans HK" panose="020B0200000000000000" pitchFamily="34" charset="-120"/>
-                <a:ea typeface="Noto Sans HK" panose="020B0200000000000000" pitchFamily="34" charset="-120"/>
-              </a:rPr>
-              <a:t>(Environment of AI Agent, SLM, LLM, RAG and MCP)</a:t>
+              <a:t>Fine-Tunning</a:t>
             </a:r>
           </a:p>
           <a:p>
@@ -1792,23 +2194,11 @@
               <a:buChar char="•"/>
             </a:pPr>
             <a:r>
-              <a:rPr lang="en-US" altLang="zh-TW" dirty="0">
+              <a:rPr lang="en-US" altLang="zh-TW" sz="1400" dirty="0">
                 <a:latin typeface="Noto Sans HK" panose="020B0200000000000000" pitchFamily="34" charset="-120"/>
                 <a:ea typeface="Noto Sans HK" panose="020B0200000000000000" pitchFamily="34" charset="-120"/>
               </a:rPr>
-              <a:t>MCP </a:t>
-            </a:r>
-            <a:r>
-              <a:rPr lang="en-US" altLang="zh-TW" sz="1200" dirty="0">
-                <a:solidFill>
-                  <a:schemeClr val="bg1">
-                    <a:lumMod val="75000"/>
-                  </a:schemeClr>
-                </a:solidFill>
-                <a:latin typeface="Noto Sans HK" panose="020B0200000000000000" pitchFamily="34" charset="-120"/>
-                <a:ea typeface="Noto Sans HK" panose="020B0200000000000000" pitchFamily="34" charset="-120"/>
-              </a:rPr>
-              <a:t>(Model Context Protocol)</a:t>
+              <a:t>Q&amp;A content: General Medical and Genotyping-Related Consultation.</a:t>
             </a:r>
           </a:p>
           <a:p>
@@ -1817,64 +2207,47 @@
               <a:buChar char="•"/>
             </a:pPr>
             <a:r>
-              <a:rPr lang="en-US" altLang="zh-TW" dirty="0">
+              <a:rPr lang="en-US" altLang="zh-TW" sz="1400" dirty="0">
                 <a:latin typeface="Noto Sans HK" panose="020B0200000000000000" pitchFamily="34" charset="-120"/>
                 <a:ea typeface="Noto Sans HK" panose="020B0200000000000000" pitchFamily="34" charset="-120"/>
               </a:rPr>
-              <a:t>RAG </a:t>
-            </a:r>
-            <a:r>
-              <a:rPr lang="en-US" altLang="zh-TW" sz="1200" dirty="0">
-                <a:solidFill>
-                  <a:schemeClr val="bg1">
-                    <a:lumMod val="75000"/>
-                  </a:schemeClr>
-                </a:solidFill>
-                <a:latin typeface="Noto Sans HK" panose="020B0200000000000000" pitchFamily="34" charset="-120"/>
-                <a:ea typeface="Noto Sans HK" panose="020B0200000000000000" pitchFamily="34" charset="-120"/>
-              </a:rPr>
-              <a:t>(Retrieval Augmented Generation )</a:t>
-            </a:r>
-            <a:r>
-              <a:rPr lang="en-US" altLang="zh-TW" sz="1400" dirty="0">
-                <a:solidFill>
-                  <a:schemeClr val="bg1">
-                    <a:lumMod val="50000"/>
-                  </a:schemeClr>
-                </a:solidFill>
-                <a:latin typeface="Noto Sans HK" panose="020B0200000000000000" pitchFamily="34" charset="-120"/>
-                <a:ea typeface="Noto Sans HK" panose="020B0200000000000000" pitchFamily="34" charset="-120"/>
-              </a:rPr>
-              <a:t> </a:t>
-            </a:r>
+              <a:t>Format: </a:t>
+            </a:r>
+            <a:endParaRPr lang="en-US" altLang="zh-TW" dirty="0">
+              <a:latin typeface="Noto Sans HK" panose="020B0200000000000000" pitchFamily="34" charset="-120"/>
+              <a:ea typeface="Noto Sans HK" panose="020B0200000000000000" pitchFamily="34" charset="-120"/>
+            </a:endParaRPr>
           </a:p>
           <a:p>
             <a:pPr marL="742950" lvl="1" indent="-285750">
               <a:buFont typeface="Arial" panose="020B0604020202020204" pitchFamily="34" charset="0"/>
               <a:buChar char="•"/>
             </a:pPr>
-            <a:r>
-              <a:rPr lang="en-US" altLang="zh-TW" dirty="0">
-                <a:solidFill>
-                  <a:prstClr val="black"/>
-                </a:solidFill>
-                <a:latin typeface="Noto Sans HK" panose="020B0200000000000000" pitchFamily="34" charset="-120"/>
-                <a:ea typeface="Noto Sans HK" panose="020B0200000000000000" pitchFamily="34" charset="-120"/>
-              </a:rPr>
-              <a:t>SLM </a:t>
-            </a:r>
-            <a:r>
-              <a:rPr lang="en-US" altLang="zh-TW" sz="1200" dirty="0">
-                <a:solidFill>
-                  <a:prstClr val="white">
-                    <a:lumMod val="75000"/>
-                  </a:prstClr>
-                </a:solidFill>
-                <a:latin typeface="Noto Sans HK" panose="020B0200000000000000" pitchFamily="34" charset="-120"/>
-                <a:ea typeface="Noto Sans HK" panose="020B0200000000000000" pitchFamily="34" charset="-120"/>
-              </a:rPr>
-              <a:t>(Small Language Model)</a:t>
-            </a:r>
+            <a:endParaRPr lang="en-US" altLang="zh-TW" dirty="0">
+              <a:latin typeface="Noto Sans HK" panose="020B0200000000000000" pitchFamily="34" charset="-120"/>
+              <a:ea typeface="Noto Sans HK" panose="020B0200000000000000" pitchFamily="34" charset="-120"/>
+            </a:endParaRPr>
+          </a:p>
+          <a:p>
+            <a:pPr marL="742950" lvl="1" indent="-285750">
+              <a:buFont typeface="Arial" panose="020B0604020202020204" pitchFamily="34" charset="0"/>
+              <a:buChar char="•"/>
+            </a:pPr>
+            <a:endParaRPr lang="en-US" altLang="zh-TW" sz="1400" dirty="0">
+              <a:solidFill>
+                <a:schemeClr val="bg1">
+                  <a:lumMod val="50000"/>
+                </a:schemeClr>
+              </a:solidFill>
+              <a:latin typeface="Noto Sans HK" panose="020B0200000000000000" pitchFamily="34" charset="-120"/>
+              <a:ea typeface="Noto Sans HK" panose="020B0200000000000000" pitchFamily="34" charset="-120"/>
+            </a:endParaRPr>
+          </a:p>
+          <a:p>
+            <a:pPr marL="742950" lvl="1" indent="-285750">
+              <a:buFont typeface="Arial" panose="020B0604020202020204" pitchFamily="34" charset="0"/>
+              <a:buChar char="•"/>
+            </a:pPr>
             <a:endParaRPr kumimoji="0" lang="en-US" altLang="zh-TW" sz="1800" b="0" i="0" u="none" strike="noStrike" kern="1200" cap="none" spc="0" normalizeH="0" baseline="0" noProof="0" dirty="0">
               <a:ln>
                 <a:noFill/>
@@ -1938,15 +2311,28 @@
                 <a:latin typeface="Noto Sans HK" panose="020B0200000000000000" pitchFamily="34" charset="-120"/>
                 <a:ea typeface="Noto Sans HK" panose="020B0200000000000000" pitchFamily="34" charset="-120"/>
                 <a:cs typeface="Aharoni" panose="020F0502020204030204" pitchFamily="2" charset="-79"/>
-              </a:rPr>
-              <a:t>Agenda</a:t>
-            </a:r>
-            <a:endParaRPr lang="en-US" altLang="zh-TW" sz="2800" dirty="0">
-              <a:latin typeface="Noto Sans HK" panose="020B0200000000000000" pitchFamily="34" charset="-120"/>
-              <a:ea typeface="Noto Sans HK" panose="020B0200000000000000" pitchFamily="34" charset="-120"/>
-              <a:cs typeface="Aharoni" panose="020F0502020204030204" pitchFamily="2" charset="-79"/>
-              <a:sym typeface="Wingdings" panose="05000000000000000000" pitchFamily="2" charset="2"/>
-            </a:endParaRPr>
+                <a:sym typeface="Wingdings" panose="05000000000000000000" pitchFamily="2" charset="2"/>
+              </a:rPr>
+              <a:t>Bio-IT AI Agent (</a:t>
+            </a:r>
+            <a:r>
+              <a:rPr lang="en-US" altLang="zh-TW" sz="2800" dirty="0" err="1">
+                <a:latin typeface="Noto Sans HK" panose="020B0200000000000000" pitchFamily="34" charset="-120"/>
+                <a:ea typeface="Noto Sans HK" panose="020B0200000000000000" pitchFamily="34" charset="-120"/>
+                <a:cs typeface="Aharoni" panose="020F0502020204030204" pitchFamily="2" charset="-79"/>
+                <a:sym typeface="Wingdings" panose="05000000000000000000" pitchFamily="2" charset="2"/>
+              </a:rPr>
+              <a:t>Dr.BioByte</a:t>
+            </a:r>
+            <a:r>
+              <a:rPr lang="en-US" altLang="zh-TW" sz="2800" dirty="0">
+                <a:latin typeface="Noto Sans HK" panose="020B0200000000000000" pitchFamily="34" charset="-120"/>
+                <a:ea typeface="Noto Sans HK" panose="020B0200000000000000" pitchFamily="34" charset="-120"/>
+                <a:cs typeface="Aharoni" panose="020F0502020204030204" pitchFamily="2" charset="-79"/>
+                <a:sym typeface="Wingdings" panose="05000000000000000000" pitchFamily="2" charset="2"/>
+              </a:rPr>
+              <a:t>)</a:t>
+            </a:r>
           </a:p>
           <a:p>
             <a:pPr marL="285750" indent="-285750">
@@ -2050,14 +2436,59 @@
                                 </p:cTn>
                               </p:par>
                               <p:par>
-                                <p:cTn id="7" presetID="3" presetClass="emph" presetSubtype="2" fill="hold" grpId="0" nodeType="withEffect">
+                                <p:cTn id="7" presetID="3" presetClass="emph" presetSubtype="2" fill="hold" grpId="1" nodeType="withEffect">
                                   <p:stCondLst>
                                     <p:cond delay="0"/>
                                   </p:stCondLst>
                                   <p:childTnLst>
                                     <p:animClr clrSpc="rgb" dir="cw">
                                       <p:cBhvr override="childStyle">
-                                        <p:cTn id="8" dur="500" fill="hold"/>
+                                        <p:cTn id="8" dur="2000" fill="hold"/>
+                                        <p:tgtEl>
+                                          <p:spTgt spid="2">
+                                            <p:txEl>
+                                              <p:pRg st="0" end="0"/>
+                                            </p:txEl>
+                                          </p:spTgt>
+                                        </p:tgtEl>
+                                        <p:attrNameLst>
+                                          <p:attrName>style.color</p:attrName>
+                                        </p:attrNameLst>
+                                      </p:cBhvr>
+                                      <p:to>
+                                        <a:srgbClr val="D8A09C"/>
+                                      </p:to>
+                                    </p:animClr>
+                                  </p:childTnLst>
+                                </p:cTn>
+                              </p:par>
+                            </p:childTnLst>
+                          </p:cTn>
+                        </p:par>
+                      </p:childTnLst>
+                    </p:cTn>
+                  </p:par>
+                  <p:par>
+                    <p:cTn id="9" fill="hold">
+                      <p:stCondLst>
+                        <p:cond delay="indefinite"/>
+                      </p:stCondLst>
+                      <p:childTnLst>
+                        <p:par>
+                          <p:cTn id="10" fill="hold">
+                            <p:stCondLst>
+                              <p:cond delay="0"/>
+                            </p:stCondLst>
+                            <p:childTnLst>
+                              <p:par>
+                                <p:cTn id="11" presetID="3" presetClass="emph" presetSubtype="2" fill="hold" grpId="0" nodeType="clickEffect">
+                                  <p:stCondLst>
+                                    <p:cond delay="0"/>
+                                  </p:stCondLst>
+                                  <p:childTnLst>
+                                    <p:animClr clrSpc="rgb" dir="cw">
+                                      <p:cBhvr override="childStyle">
+                                        <p:cTn id="12" dur="500" fill="hold"/>
                                         <p:tgtEl>
                                           <p:spTgt spid="2">
                                             <p:txEl>
@@ -2080,7 +2511,7 @@
                                         <p:cTn display="0" masterRel="sameClick">
                                           <p:stCondLst>
                                             <p:cond evt="begin" delay="0">
-                                              <p:tn val="7"/>
+                                              <p:tn val="11"/>
                                             </p:cond>
                                           </p:stCondLst>
                                           <p:endCondLst>
@@ -2100,86 +2531,14 @@
                                 </p:cTn>
                               </p:par>
                               <p:par>
-                                <p:cTn id="9" presetID="3" presetClass="emph" presetSubtype="2" fill="hold" grpId="1" nodeType="withEffect">
+                                <p:cTn id="13" presetID="3" presetClass="emph" presetSubtype="2" fill="hold" grpId="0" nodeType="withEffect">
                                   <p:stCondLst>
                                     <p:cond delay="0"/>
                                   </p:stCondLst>
                                   <p:childTnLst>
                                     <p:animClr clrSpc="rgb" dir="cw">
                                       <p:cBhvr override="childStyle">
-                                        <p:cTn id="10" dur="2000" fill="hold"/>
-                                        <p:tgtEl>
-                                          <p:spTgt spid="2">
-                                            <p:txEl>
-                                              <p:pRg st="0" end="0"/>
-                                            </p:txEl>
-                                          </p:spTgt>
-                                        </p:tgtEl>
-                                        <p:attrNameLst>
-                                          <p:attrName>style.color</p:attrName>
-                                        </p:attrNameLst>
-                                      </p:cBhvr>
-                                      <p:to>
-                                        <a:srgbClr val="D8A09C"/>
-                                      </p:to>
-                                    </p:animClr>
-                                  </p:childTnLst>
-                                </p:cTn>
-                              </p:par>
-                              <p:par>
-                                <p:cTn id="11" presetID="3" presetClass="emph" presetSubtype="2" fill="hold" grpId="1" nodeType="withEffect">
-                                  <p:stCondLst>
-                                    <p:cond delay="0"/>
-                                  </p:stCondLst>
-                                  <p:childTnLst>
-                                    <p:animClr clrSpc="rgb" dir="cw">
-                                      <p:cBhvr override="childStyle">
-                                        <p:cTn id="12" dur="2000" fill="hold"/>
-                                        <p:tgtEl>
-                                          <p:spTgt spid="2">
-                                            <p:txEl>
-                                              <p:pRg st="1" end="1"/>
-                                            </p:txEl>
-                                          </p:spTgt>
-                                        </p:tgtEl>
-                                        <p:attrNameLst>
-                                          <p:attrName>style.color</p:attrName>
-                                        </p:attrNameLst>
-                                      </p:cBhvr>
-                                      <p:to>
-                                        <a:srgbClr val="D8A09C"/>
-                                      </p:to>
-                                    </p:animClr>
-                                  </p:childTnLst>
-                                </p:cTn>
-                              </p:par>
-                            </p:childTnLst>
-                          </p:cTn>
-                        </p:par>
-                      </p:childTnLst>
-                    </p:cTn>
-                  </p:par>
-                  <p:par>
-                    <p:cTn id="13" fill="hold">
-                      <p:stCondLst>
-                        <p:cond delay="indefinite"/>
-                      </p:stCondLst>
-                      <p:childTnLst>
-                        <p:par>
-                          <p:cTn id="14" fill="hold">
-                            <p:stCondLst>
-                              <p:cond delay="0"/>
-                            </p:stCondLst>
-                            <p:childTnLst>
-                              <p:par>
-                                <p:cTn id="15" presetID="3" presetClass="emph" presetSubtype="2" fill="hold" grpId="0" nodeType="clickEffect">
-                                  <p:stCondLst>
-                                    <p:cond delay="0"/>
-                                  </p:stCondLst>
-                                  <p:childTnLst>
-                                    <p:animClr clrSpc="rgb" dir="cw">
-                                      <p:cBhvr override="childStyle">
-                                        <p:cTn id="16" dur="500" fill="hold"/>
+                                        <p:cTn id="14" dur="500" fill="hold"/>
                                         <p:tgtEl>
                                           <p:spTgt spid="2">
                                             <p:txEl>
@@ -2202,7 +2561,7 @@
                                         <p:cTn display="0" masterRel="sameClick">
                                           <p:stCondLst>
                                             <p:cond evt="begin" delay="0">
-                                              <p:tn val="15"/>
+                                              <p:tn val="13"/>
                                             </p:cond>
                                           </p:stCondLst>
                                           <p:endCondLst>
@@ -2222,68 +2581,18 @@
                                 </p:cTn>
                               </p:par>
                               <p:par>
-                                <p:cTn id="17" presetID="3" presetClass="emph" presetSubtype="2" fill="hold" grpId="0" nodeType="withEffect">
+                                <p:cTn id="15" presetID="3" presetClass="emph" presetSubtype="2" fill="hold" grpId="1" nodeType="withEffect">
                                   <p:stCondLst>
                                     <p:cond delay="0"/>
                                   </p:stCondLst>
                                   <p:childTnLst>
                                     <p:animClr clrSpc="rgb" dir="cw">
                                       <p:cBhvr override="childStyle">
-                                        <p:cTn id="18" dur="500" fill="hold"/>
+                                        <p:cTn id="16" dur="2000" fill="hold"/>
                                         <p:tgtEl>
                                           <p:spTgt spid="2">
                                             <p:txEl>
-                                              <p:pRg st="3" end="3"/>
-                                            </p:txEl>
-                                          </p:spTgt>
-                                        </p:tgtEl>
-                                        <p:attrNameLst>
-                                          <p:attrName>style.color</p:attrName>
-                                        </p:attrNameLst>
-                                      </p:cBhvr>
-                                      <p:to>
-                                        <a:srgbClr val="FF0000"/>
-                                      </p:to>
-                                    </p:animClr>
-                                  </p:childTnLst>
-                                  <p:subTnLst>
-                                    <p:audio>
-                                      <p:cMediaNode>
-                                        <p:cTn display="0" masterRel="sameClick">
-                                          <p:stCondLst>
-                                            <p:cond evt="begin" delay="0">
-                                              <p:tn val="17"/>
-                                            </p:cond>
-                                          </p:stCondLst>
-                                          <p:endCondLst>
-                                            <p:cond evt="onStopAudio" delay="0">
-                                              <p:tgtEl>
-                                                <p:sldTgt/>
-                                              </p:tgtEl>
-                                            </p:cond>
-                                          </p:endCondLst>
-                                        </p:cTn>
-                                        <p:tgtEl>
-                                          <p:sndTgt r:embed="rId3" name="type.wav"/>
-                                        </p:tgtEl>
-                                      </p:cMediaNode>
-                                    </p:audio>
-                                  </p:subTnLst>
-                                </p:cTn>
-                              </p:par>
-                              <p:par>
-                                <p:cTn id="19" presetID="3" presetClass="emph" presetSubtype="2" fill="hold" grpId="1" nodeType="withEffect">
-                                  <p:stCondLst>
-                                    <p:cond delay="0"/>
-                                  </p:stCondLst>
-                                  <p:childTnLst>
-                                    <p:animClr clrSpc="rgb" dir="cw">
-                                      <p:cBhvr override="childStyle">
-                                        <p:cTn id="20" dur="2000" fill="hold"/>
-                                        <p:tgtEl>
-                                          <p:spTgt spid="2">
-                                            <p:txEl>
-                                              <p:pRg st="2" end="2"/>
+                                              <p:pRg st="1" end="1"/>
                                             </p:txEl>
                                           </p:spTgt>
                                         </p:tgtEl>
@@ -2299,18 +2608,18 @@
                                 </p:cTn>
                               </p:par>
                               <p:par>
-                                <p:cTn id="21" presetID="3" presetClass="emph" presetSubtype="2" fill="hold" grpId="1" nodeType="withEffect">
+                                <p:cTn id="17" presetID="3" presetClass="emph" presetSubtype="2" fill="hold" grpId="1" nodeType="withEffect">
                                   <p:stCondLst>
                                     <p:cond delay="0"/>
                                   </p:stCondLst>
                                   <p:childTnLst>
                                     <p:animClr clrSpc="rgb" dir="cw">
                                       <p:cBhvr override="childStyle">
-                                        <p:cTn id="22" dur="2000" fill="hold"/>
+                                        <p:cTn id="18" dur="2000" fill="hold"/>
                                         <p:tgtEl>
                                           <p:spTgt spid="2">
                                             <p:txEl>
-                                              <p:pRg st="3" end="3"/>
+                                              <p:pRg st="2" end="2"/>
                                             </p:txEl>
                                           </p:spTgt>
                                         </p:tgtEl>
@@ -2332,26 +2641,26 @@
                     </p:cTn>
                   </p:par>
                   <p:par>
-                    <p:cTn id="23" fill="hold">
+                    <p:cTn id="19" fill="hold">
                       <p:stCondLst>
                         <p:cond delay="indefinite"/>
                       </p:stCondLst>
                       <p:childTnLst>
                         <p:par>
-                          <p:cTn id="24" fill="hold">
+                          <p:cTn id="20" fill="hold">
                             <p:stCondLst>
                               <p:cond delay="0"/>
                             </p:stCondLst>
                             <p:childTnLst>
                               <p:par>
-                                <p:cTn id="25" presetID="1" presetClass="exit" presetSubtype="0" fill="hold" grpId="2" nodeType="clickEffect">
+                                <p:cTn id="21" presetID="1" presetClass="exit" presetSubtype="0" fill="hold" grpId="2" nodeType="clickEffect">
                                   <p:stCondLst>
                                     <p:cond delay="0"/>
                                   </p:stCondLst>
                                   <p:childTnLst>
                                     <p:set>
                                       <p:cBhvr>
-                                        <p:cTn id="26" dur="1" fill="hold">
+                                        <p:cTn id="22" dur="1" fill="hold">
                                           <p:stCondLst>
                                             <p:cond delay="0"/>
                                           </p:stCondLst>
@@ -2408,7 +2717,7 @@
 </p:sld>
 </file>
 
-<file path=ppt/slides/slide3.xml><?xml version="1.0" encoding="utf-8"?>
+<file path=ppt/slides/slide4.xml><?xml version="1.0" encoding="utf-8"?>
 <p:sld xmlns:a="http://schemas.openxmlformats.org/drawingml/2006/main" xmlns:r="http://schemas.openxmlformats.org/officeDocument/2006/relationships" xmlns:p="http://schemas.openxmlformats.org/presentationml/2006/main">
   <p:cSld>
     <p:spTree>
@@ -3154,7 +3463,7 @@
 </p:sld>
 </file>
 
-<file path=ppt/slides/slide4.xml><?xml version="1.0" encoding="utf-8"?>
+<file path=ppt/slides/slide5.xml><?xml version="1.0" encoding="utf-8"?>
 <p:sld xmlns:a="http://schemas.openxmlformats.org/drawingml/2006/main" xmlns:r="http://schemas.openxmlformats.org/officeDocument/2006/relationships" xmlns:p="http://schemas.openxmlformats.org/presentationml/2006/main">
   <p:cSld>
     <p:spTree>
@@ -3418,7 +3727,7 @@
 </p:sld>
 </file>
 
-<file path=ppt/slides/slide5.xml><?xml version="1.0" encoding="utf-8"?>
+<file path=ppt/slides/slide6.xml><?xml version="1.0" encoding="utf-8"?>
 <p:sld xmlns:a="http://schemas.openxmlformats.org/drawingml/2006/main" xmlns:r="http://schemas.openxmlformats.org/officeDocument/2006/relationships" xmlns:p="http://schemas.openxmlformats.org/presentationml/2006/main">
   <p:cSld>
     <p:spTree>
@@ -3829,7 +4138,7 @@
 </p:sld>
 </file>
 
-<file path=ppt/slides/slide6.xml><?xml version="1.0" encoding="utf-8"?>
+<file path=ppt/slides/slide7.xml><?xml version="1.0" encoding="utf-8"?>
 <p:sld xmlns:a="http://schemas.openxmlformats.org/drawingml/2006/main" xmlns:r="http://schemas.openxmlformats.org/officeDocument/2006/relationships" xmlns:p="http://schemas.openxmlformats.org/presentationml/2006/main">
   <p:cSld>
     <p:spTree>
@@ -3860,8 +4169,8 @@
         </p:nvSpPr>
         <p:spPr>
           <a:xfrm>
-            <a:off x="395536" y="1198535"/>
-            <a:ext cx="8424936" cy="3547125"/>
+            <a:off x="179512" y="260648"/>
+            <a:ext cx="4176464" cy="4966769"/>
           </a:xfrm>
           <a:prstGeom prst="rect">
             <a:avLst/>
@@ -4129,355 +4438,6 @@
     <p:extLst>
       <p:ext uri="{BB962C8B-B14F-4D97-AF65-F5344CB8AC3E}">
         <p14:creationId xmlns:p14="http://schemas.microsoft.com/office/powerpoint/2010/main" val="3237840861"/>
-      </p:ext>
-    </p:extLst>
-  </p:cSld>
-  <p:clrMapOvr>
-    <a:masterClrMapping/>
-  </p:clrMapOvr>
-  <mc:AlternateContent xmlns:mc="http://schemas.openxmlformats.org/markup-compatibility/2006" xmlns:p159="http://schemas.microsoft.com/office/powerpoint/2015/09/main">
-    <mc:Choice Requires="p159">
-      <p:transition xmlns:p14="http://schemas.microsoft.com/office/powerpoint/2010/main" spd="slow" p14:dur="2000" advClick="0">
-        <p159:morph option="byObject"/>
-      </p:transition>
-    </mc:Choice>
-    <mc:Fallback xmlns="">
-      <p:transition spd="slow" advClick="0">
-        <p:fade/>
-      </p:transition>
-    </mc:Fallback>
-  </mc:AlternateContent>
-</p:sld>
-</file>
-
-<file path=ppt/slides/slide7.xml><?xml version="1.0" encoding="utf-8"?>
-<p:sld xmlns:a="http://schemas.openxmlformats.org/drawingml/2006/main" xmlns:r="http://schemas.openxmlformats.org/officeDocument/2006/relationships" xmlns:p="http://schemas.openxmlformats.org/presentationml/2006/main">
-  <p:cSld>
-    <p:spTree>
-      <p:nvGrpSpPr>
-        <p:cNvPr id="1" name=""/>
-        <p:cNvGrpSpPr/>
-        <p:nvPr/>
-      </p:nvGrpSpPr>
-      <p:grpSpPr>
-        <a:xfrm>
-          <a:off x="0" y="0"/>
-          <a:ext cx="0" cy="0"/>
-          <a:chOff x="0" y="0"/>
-          <a:chExt cx="0" cy="0"/>
-        </a:xfrm>
-      </p:grpSpPr>
-      <p:sp>
-        <p:nvSpPr>
-          <p:cNvPr id="3" name="文字方塊 2">
-            <a:extLst>
-              <a:ext uri="{FF2B5EF4-FFF2-40B4-BE49-F238E27FC236}">
-                <a16:creationId xmlns:a16="http://schemas.microsoft.com/office/drawing/2014/main" id="{EB19A21F-439B-649C-1202-64BBA3D06DB7}"/>
-              </a:ext>
-            </a:extLst>
-          </p:cNvPr>
-          <p:cNvSpPr txBox="1"/>
-          <p:nvPr/>
-        </p:nvSpPr>
-        <p:spPr>
-          <a:xfrm>
-            <a:off x="251520" y="836712"/>
-            <a:ext cx="8640960" cy="3285515"/>
-          </a:xfrm>
-          <a:prstGeom prst="rect">
-            <a:avLst/>
-          </a:prstGeom>
-          <a:noFill/>
-        </p:spPr>
-        <p:txBody>
-          <a:bodyPr wrap="square">
-            <a:spAutoFit/>
-          </a:bodyPr>
-          <a:lstStyle/>
-          <a:p>
-            <a:pPr marL="0" marR="0">
-              <a:spcBef>
-                <a:spcPts val="1800"/>
-              </a:spcBef>
-              <a:spcAft>
-                <a:spcPts val="900"/>
-              </a:spcAft>
-              <a:buNone/>
-            </a:pPr>
-            <a:r>
-              <a:rPr lang="zh-TW" altLang="zh-TW" sz="1000" b="1" u="none" strike="noStrike" dirty="0">
-                <a:effectLst/>
-                <a:latin typeface="微軟正黑體" panose="020B0604030504040204" pitchFamily="34" charset="-120"/>
-                <a:ea typeface="微軟正黑體" panose="020B0604030504040204" pitchFamily="34" charset="-120"/>
-              </a:rPr>
-              <a:t>STAgent 的四大核心運作機制</a:t>
-            </a:r>
-          </a:p>
-          <a:p>
-            <a:pPr marL="0" marR="0">
-              <a:spcBef>
-                <a:spcPts val="900"/>
-              </a:spcBef>
-              <a:spcAft>
-                <a:spcPts val="1200"/>
-              </a:spcAft>
-              <a:buNone/>
-            </a:pPr>
-            <a:r>
-              <a:rPr lang="zh-TW" altLang="zh-TW" sz="1000" b="0" u="none" strike="noStrike" dirty="0">
-                <a:effectLst/>
-                <a:latin typeface="微軟正黑體" panose="020B0604030504040204" pitchFamily="34" charset="-120"/>
-                <a:ea typeface="微軟正黑體" panose="020B0604030504040204" pitchFamily="34" charset="-120"/>
-              </a:rPr>
-              <a:t>STAgent 之所以強大，在於它不是一個單純的聊天機器人，而是一個具備「眼、腦、手、智庫」的完整科學助手：</a:t>
-            </a:r>
-          </a:p>
-          <a:p>
-            <a:pPr marL="0" marR="0">
-              <a:spcBef>
-                <a:spcPts val="900"/>
-              </a:spcBef>
-              <a:spcAft>
-                <a:spcPts val="900"/>
-              </a:spcAft>
-              <a:buFont typeface="+mj-lt"/>
-              <a:buAutoNum type="arabicPeriod"/>
-            </a:pPr>
-            <a:r>
-              <a:rPr lang="zh-TW" altLang="zh-TW" sz="1000" b="1" u="none" strike="noStrike" dirty="0">
-                <a:effectLst/>
-                <a:latin typeface="微軟正黑體" panose="020B0604030504040204" pitchFamily="34" charset="-120"/>
-                <a:ea typeface="微軟正黑體" panose="020B0604030504040204" pitchFamily="34" charset="-120"/>
-              </a:rPr>
-              <a:t>視覺推理（眼 - Visual Reasoning）：</a:t>
-            </a:r>
-            <a:br>
-              <a:rPr lang="zh-TW" altLang="zh-TW" sz="1000" b="0" u="none" strike="noStrike" dirty="0">
-                <a:effectLst/>
-                <a:latin typeface="微軟正黑體" panose="020B0604030504040204" pitchFamily="34" charset="-120"/>
-                <a:ea typeface="微軟正黑體" panose="020B0604030504040204" pitchFamily="34" charset="-120"/>
-              </a:rPr>
-            </a:br>
-            <a:r>
-              <a:rPr lang="zh-TW" altLang="zh-TW" sz="1000" b="0" u="none" strike="noStrike" dirty="0">
-                <a:effectLst/>
-                <a:latin typeface="微軟正黑體" panose="020B0604030504040204" pitchFamily="34" charset="-120"/>
-                <a:ea typeface="微軟正黑體" panose="020B0604030504040204" pitchFamily="34" charset="-120"/>
-              </a:rPr>
-              <a:t>內建多模態視覺大模型（VLM），它能直接「看懂」空間聚類圖、高解析 H&amp;E 組織照片或細胞分布圖。它能自主識別出圖像中細胞的空間特徵（例如：早期細胞呈散落未組織狀，而後期會緊密聚集成群，重塑成熟的組織結構）。</a:t>
-            </a:r>
-          </a:p>
-          <a:p>
-            <a:pPr marL="0" marR="0">
-              <a:spcBef>
-                <a:spcPts val="900"/>
-              </a:spcBef>
-              <a:spcAft>
-                <a:spcPts val="900"/>
-              </a:spcAft>
-              <a:buFont typeface="+mj-lt"/>
-              <a:buAutoNum type="arabicPeriod"/>
-            </a:pPr>
-            <a:r>
-              <a:rPr lang="zh-TW" altLang="zh-TW" sz="1000" b="1" u="none" strike="noStrike" dirty="0">
-                <a:effectLst/>
-                <a:latin typeface="微軟正黑體" panose="020B0604030504040204" pitchFamily="34" charset="-120"/>
-                <a:ea typeface="微軟正黑體" panose="020B0604030504040204" pitchFamily="34" charset="-120"/>
-              </a:rPr>
-              <a:t>動態程式碼生成與工具呼叫（手 - Code Generation &amp; Tool-Use）：</a:t>
-            </a:r>
-            <a:br>
-              <a:rPr lang="zh-TW" altLang="zh-TW" sz="1000" b="0" u="none" strike="noStrike" dirty="0">
-                <a:effectLst/>
-                <a:latin typeface="微軟正黑體" panose="020B0604030504040204" pitchFamily="34" charset="-120"/>
-                <a:ea typeface="微軟正黑體" panose="020B0604030504040204" pitchFamily="34" charset="-120"/>
-              </a:rPr>
-            </a:br>
-            <a:r>
-              <a:rPr lang="zh-TW" altLang="zh-TW" sz="1000" b="0" u="none" strike="noStrike" dirty="0">
-                <a:effectLst/>
-                <a:latin typeface="微軟正黑體" panose="020B0604030504040204" pitchFamily="34" charset="-120"/>
-                <a:ea typeface="微軟正黑體" panose="020B0604030504040204" pitchFamily="34" charset="-120"/>
-              </a:rPr>
-              <a:t>當面臨複雜的生物信息任務（如數據預處理、空間鄰近度計算或基因插補）時，它會</a:t>
-            </a:r>
-            <a:r>
-              <a:rPr lang="zh-TW" altLang="zh-TW" sz="1000" b="1" u="none" strike="noStrike" dirty="0">
-                <a:effectLst/>
-                <a:latin typeface="微軟正黑體" panose="020B0604030504040204" pitchFamily="34" charset="-120"/>
-                <a:ea typeface="微軟正黑體" panose="020B0604030504040204" pitchFamily="34" charset="-120"/>
-              </a:rPr>
-              <a:t>自主編寫 Python 程式碼</a:t>
-            </a:r>
-            <a:r>
-              <a:rPr lang="zh-TW" altLang="zh-TW" sz="1000" b="0" u="none" strike="noStrike" dirty="0">
-                <a:effectLst/>
-                <a:latin typeface="微軟正黑體" panose="020B0604030504040204" pitchFamily="34" charset="-120"/>
-                <a:ea typeface="微軟正黑體" panose="020B0604030504040204" pitchFamily="34" charset="-120"/>
-              </a:rPr>
-              <a:t>（調用 Scanpy、Squidpy、Tangram、STAligner 等專業生物資訊工具庫），直接在本機運行分析並產出圖表。 [</a:t>
-            </a:r>
-            <a:r>
-              <a:rPr lang="zh-TW" altLang="zh-TW" sz="1000" b="0" u="none" strike="noStrike" dirty="0">
-                <a:effectLst/>
-                <a:latin typeface="微軟正黑體" panose="020B0604030504040204" pitchFamily="34" charset="-120"/>
-                <a:ea typeface="微軟正黑體" panose="020B0604030504040204" pitchFamily="34" charset="-120"/>
-                <a:hlinkClick r:id="rId2"/>
-              </a:rPr>
-              <a:t>1</a:t>
-            </a:r>
-            <a:r>
-              <a:rPr lang="zh-TW" altLang="zh-TW" sz="1000" b="0" u="none" strike="noStrike" dirty="0">
-                <a:effectLst/>
-                <a:latin typeface="微軟正黑體" panose="020B0604030504040204" pitchFamily="34" charset="-120"/>
-                <a:ea typeface="微軟正黑體" panose="020B0604030504040204" pitchFamily="34" charset="-120"/>
-              </a:rPr>
-              <a:t>, </a:t>
-            </a:r>
-            <a:r>
-              <a:rPr lang="zh-TW" altLang="zh-TW" sz="1000" b="0" u="none" strike="noStrike" dirty="0">
-                <a:effectLst/>
-                <a:latin typeface="微軟正黑體" panose="020B0604030504040204" pitchFamily="34" charset="-120"/>
-                <a:ea typeface="微軟正黑體" panose="020B0604030504040204" pitchFamily="34" charset="-120"/>
-                <a:hlinkClick r:id="rId3"/>
-              </a:rPr>
-              <a:t>2</a:t>
-            </a:r>
-            <a:r>
-              <a:rPr lang="zh-TW" altLang="zh-TW" sz="1000" b="0" u="none" strike="noStrike" dirty="0">
-                <a:effectLst/>
-                <a:latin typeface="微軟正黑體" panose="020B0604030504040204" pitchFamily="34" charset="-120"/>
-                <a:ea typeface="微軟正黑體" panose="020B0604030504040204" pitchFamily="34" charset="-120"/>
-              </a:rPr>
-              <a:t>]</a:t>
-            </a:r>
-          </a:p>
-          <a:p>
-            <a:pPr marL="0" marR="0">
-              <a:spcBef>
-                <a:spcPts val="900"/>
-              </a:spcBef>
-              <a:spcAft>
-                <a:spcPts val="900"/>
-              </a:spcAft>
-              <a:buFont typeface="+mj-lt"/>
-              <a:buAutoNum type="arabicPeriod"/>
-            </a:pPr>
-            <a:r>
-              <a:rPr lang="zh-TW" altLang="zh-TW" sz="1000" b="1" u="none" strike="noStrike" dirty="0">
-                <a:effectLst/>
-                <a:latin typeface="微軟正黑體" panose="020B0604030504040204" pitchFamily="34" charset="-120"/>
-                <a:ea typeface="微軟正黑體" panose="020B0604030504040204" pitchFamily="34" charset="-120"/>
-              </a:rPr>
-              <a:t>實時文獻檢索與知識對齊（智庫 - Literature Retrieval &amp; RAG）：</a:t>
-            </a:r>
-            <a:br>
-              <a:rPr lang="zh-TW" altLang="zh-TW" sz="1000" b="0" u="none" strike="noStrike" dirty="0">
-                <a:effectLst/>
-                <a:latin typeface="微軟正黑體" panose="020B0604030504040204" pitchFamily="34" charset="-120"/>
-                <a:ea typeface="微軟正黑體" panose="020B0604030504040204" pitchFamily="34" charset="-120"/>
-              </a:rPr>
-            </a:br>
-            <a:r>
-              <a:rPr lang="zh-TW" altLang="zh-TW" sz="1000" b="0" u="none" strike="noStrike" dirty="0">
-                <a:effectLst/>
-                <a:latin typeface="微軟正黑體" panose="020B0604030504040204" pitchFamily="34" charset="-120"/>
-                <a:ea typeface="微軟正黑體" panose="020B0604030504040204" pitchFamily="34" charset="-120"/>
-              </a:rPr>
-              <a:t>AI 發現某個空間特徵後，會動態連線至權威醫學資料庫，檢索同行評審（Peer-reviewed）的科學文獻。它能把實驗數據（如某個配體-受體的空間高度集中）與真實世界的醫學研究進行交叉比對，給出具備科學文獻支持的</a:t>
-            </a:r>
-            <a:r>
-              <a:rPr lang="zh-TW" altLang="zh-TW" sz="1000" b="1" u="none" strike="noStrike" dirty="0">
-                <a:effectLst/>
-                <a:latin typeface="微軟正黑體" panose="020B0604030504040204" pitchFamily="34" charset="-120"/>
-                <a:ea typeface="微軟正黑體" panose="020B0604030504040204" pitchFamily="34" charset="-120"/>
-              </a:rPr>
-              <a:t>機制性解釋</a:t>
-            </a:r>
-            <a:r>
-              <a:rPr lang="zh-TW" altLang="zh-TW" sz="1000" b="0" u="none" strike="noStrike" dirty="0">
-                <a:effectLst/>
-                <a:latin typeface="微軟正黑體" panose="020B0604030504040204" pitchFamily="34" charset="-120"/>
-                <a:ea typeface="微軟正黑體" panose="020B0604030504040204" pitchFamily="34" charset="-120"/>
-              </a:rPr>
-              <a:t>。 [</a:t>
-            </a:r>
-            <a:r>
-              <a:rPr lang="zh-TW" altLang="zh-TW" sz="1000" b="0" u="none" strike="noStrike" dirty="0">
-                <a:effectLst/>
-                <a:latin typeface="微軟正黑體" panose="020B0604030504040204" pitchFamily="34" charset="-120"/>
-                <a:ea typeface="微軟正黑體" panose="020B0604030504040204" pitchFamily="34" charset="-120"/>
-                <a:hlinkClick r:id="rId4"/>
-              </a:rPr>
-              <a:t>1</a:t>
-            </a:r>
-            <a:r>
-              <a:rPr lang="zh-TW" altLang="zh-TW" sz="1000" b="0" u="none" strike="noStrike" dirty="0">
-                <a:effectLst/>
-                <a:latin typeface="微軟正黑體" panose="020B0604030504040204" pitchFamily="34" charset="-120"/>
-                <a:ea typeface="微軟正黑體" panose="020B0604030504040204" pitchFamily="34" charset="-120"/>
-              </a:rPr>
-              <a:t>, </a:t>
-            </a:r>
-            <a:r>
-              <a:rPr lang="zh-TW" altLang="zh-TW" sz="1000" b="0" u="none" strike="noStrike" dirty="0">
-                <a:effectLst/>
-                <a:latin typeface="微軟正黑體" panose="020B0604030504040204" pitchFamily="34" charset="-120"/>
-                <a:ea typeface="微軟正黑體" panose="020B0604030504040204" pitchFamily="34" charset="-120"/>
-                <a:hlinkClick r:id="rId5"/>
-              </a:rPr>
-              <a:t>2</a:t>
-            </a:r>
-            <a:r>
-              <a:rPr lang="zh-TW" altLang="zh-TW" sz="1000" b="0" u="none" strike="noStrike" dirty="0">
-                <a:effectLst/>
-                <a:latin typeface="微軟正黑體" panose="020B0604030504040204" pitchFamily="34" charset="-120"/>
-                <a:ea typeface="微軟正黑體" panose="020B0604030504040204" pitchFamily="34" charset="-120"/>
-              </a:rPr>
-              <a:t>]</a:t>
-            </a:r>
-          </a:p>
-          <a:p>
-            <a:pPr marL="0" marR="0">
-              <a:spcBef>
-                <a:spcPts val="900"/>
-              </a:spcBef>
-              <a:spcAft>
-                <a:spcPts val="900"/>
-              </a:spcAft>
-              <a:buFont typeface="+mj-lt"/>
-              <a:buAutoNum type="arabicPeriod"/>
-            </a:pPr>
-            <a:r>
-              <a:rPr lang="zh-TW" altLang="zh-TW" sz="1000" b="1" u="none" strike="noStrike" dirty="0">
-                <a:effectLst/>
-                <a:latin typeface="微軟正黑體" panose="020B0604030504040204" pitchFamily="34" charset="-120"/>
-                <a:ea typeface="微軟正黑體" panose="020B0604030504040204" pitchFamily="34" charset="-120"/>
-              </a:rPr>
-              <a:t>端到端報告與決策生成（腦 - End-to-End Automation）：</a:t>
-            </a:r>
-            <a:br>
-              <a:rPr lang="zh-TW" altLang="zh-TW" sz="1000" b="0" u="none" strike="noStrike" dirty="0">
-                <a:effectLst/>
-                <a:latin typeface="微軟正黑體" panose="020B0604030504040204" pitchFamily="34" charset="-120"/>
-                <a:ea typeface="微軟正黑體" panose="020B0604030504040204" pitchFamily="34" charset="-120"/>
-              </a:rPr>
-            </a:br>
-            <a:r>
-              <a:rPr lang="zh-TW" altLang="zh-TW" sz="1000" b="0" u="none" strike="noStrike" dirty="0">
-                <a:effectLst/>
-                <a:latin typeface="微軟正黑體" panose="020B0604030504040204" pitchFamily="34" charset="-120"/>
-                <a:ea typeface="微軟正黑體" panose="020B0604030504040204" pitchFamily="34" charset="-120"/>
-              </a:rPr>
-              <a:t>最終，它會將上述的影像發現、數據分析圖表、文獻依據，整合提煉成一份具備高度可解釋性的完整科學或臨床診斷報告</a:t>
-            </a:r>
-          </a:p>
-        </p:txBody>
-      </p:sp>
-    </p:spTree>
-    <p:extLst>
-      <p:ext uri="{BB962C8B-B14F-4D97-AF65-F5344CB8AC3E}">
-        <p14:creationId xmlns:p14="http://schemas.microsoft.com/office/powerpoint/2010/main" val="1913671186"/>
       </p:ext>
     </p:extLst>
   </p:cSld>

--- a/bio-it-agent.pptx
+++ b/bio-it-agent.pptx
@@ -12,12 +12,12 @@
   </p:handoutMasterIdLst>
   <p:sldIdLst>
     <p:sldId id="3459" r:id="rId2"/>
-    <p:sldId id="3517" r:id="rId3"/>
-    <p:sldId id="3472" r:id="rId4"/>
-    <p:sldId id="3518" r:id="rId5"/>
-    <p:sldId id="3521" r:id="rId6"/>
-    <p:sldId id="3519" r:id="rId7"/>
-    <p:sldId id="3520" r:id="rId8"/>
+    <p:sldId id="3472" r:id="rId3"/>
+    <p:sldId id="3517" r:id="rId4"/>
+    <p:sldId id="3528" r:id="rId5"/>
+    <p:sldId id="3527" r:id="rId6"/>
+    <p:sldId id="3518" r:id="rId7"/>
+    <p:sldId id="3519" r:id="rId8"/>
   </p:sldIdLst>
   <p:sldSz cx="9144000" cy="6858000" type="screen4x3"/>
   <p:notesSz cx="6797675" cy="9925050"/>
@@ -122,12 +122,12 @@
         <p14:section name="Gemm 3 Technical Report" id="{30F6892D-1922-4A88-A82D-8CD0653C5411}">
           <p14:sldIdLst>
             <p14:sldId id="3459"/>
+            <p14:sldId id="3472"/>
             <p14:sldId id="3517"/>
-            <p14:sldId id="3472"/>
+            <p14:sldId id="3528"/>
+            <p14:sldId id="3527"/>
             <p14:sldId id="3518"/>
-            <p14:sldId id="3521"/>
             <p14:sldId id="3519"/>
-            <p14:sldId id="3520"/>
           </p14:sldIdLst>
         </p14:section>
       </p14:sectionLst>
@@ -253,7 +253,7 @@
           <a:p>
             <a:fld id="{982F7CBC-87DD-4F69-8F50-7ED68F7FF790}" type="datetimeFigureOut">
               <a:rPr lang="zh-TW" altLang="en-US" smtClean="0"/>
-              <a:t>2026/7/22</a:t>
+              <a:t>2026/7/26</a:t>
             </a:fld>
             <a:endParaRPr lang="zh-TW" altLang="en-US"/>
           </a:p>
@@ -430,7 +430,7 @@
           <a:p>
             <a:fld id="{863167AA-796B-4B6A-95ED-1C0BCB3E5802}" type="datetimeFigureOut">
               <a:rPr lang="zh-TW" altLang="en-US" smtClean="0"/>
-              <a:t>2026/7/22</a:t>
+              <a:t>2026/7/26</a:t>
             </a:fld>
             <a:endParaRPr lang="zh-TW" altLang="en-US"/>
           </a:p>
@@ -916,7 +916,7 @@
           <a:p>
             <a:fld id="{E3A6CE5E-F349-486D-8749-82EF2AD71FA8}" type="slidenum">
               <a:rPr lang="zh-TW" altLang="en-US" smtClean="0"/>
-              <a:t>3</a:t>
+              <a:t>2</a:t>
             </a:fld>
             <a:endParaRPr lang="zh-TW" altLang="en-US"/>
           </a:p>
@@ -1654,16 +1654,10 @@
               <a:t>	</a:t>
             </a:r>
             <a:r>
-              <a:rPr lang="en-US" altLang="zh-TW" sz="1200" b="1" dirty="0" err="1">
-                <a:sym typeface="Wingdings" panose="05000000000000000000" pitchFamily="2" charset="2"/>
-              </a:rPr>
-              <a:t>Centrillion</a:t>
-            </a:r>
-            <a:r>
               <a:rPr lang="en-US" altLang="zh-TW" sz="1200" b="1" dirty="0">
                 <a:sym typeface="Wingdings" panose="05000000000000000000" pitchFamily="2" charset="2"/>
               </a:rPr>
-              <a:t> Tech	</a:t>
+              <a:t>Centrillion Tech	</a:t>
             </a:r>
             <a:r>
               <a:rPr lang="en-US" altLang="zh-TW" sz="1000" dirty="0">
@@ -1707,6 +1701,1239 @@
   <p:cSld>
     <p:spTree>
       <p:nvGrpSpPr>
+        <p:cNvPr id="1" name="">
+          <a:extLst>
+            <a:ext uri="{FF2B5EF4-FFF2-40B4-BE49-F238E27FC236}">
+              <a16:creationId xmlns:a16="http://schemas.microsoft.com/office/drawing/2014/main" id="{1BC20B80-B722-2523-9202-3F21EBB146DE}"/>
+            </a:ext>
+          </a:extLst>
+        </p:cNvPr>
+        <p:cNvGrpSpPr/>
+        <p:nvPr/>
+      </p:nvGrpSpPr>
+      <p:grpSpPr>
+        <a:xfrm>
+          <a:off x="0" y="0"/>
+          <a:ext cx="0" cy="0"/>
+          <a:chOff x="0" y="0"/>
+          <a:chExt cx="0" cy="0"/>
+        </a:xfrm>
+      </p:grpSpPr>
+      <p:sp>
+        <p:nvSpPr>
+          <p:cNvPr id="64" name="標題 1">
+            <a:extLst>
+              <a:ext uri="{FF2B5EF4-FFF2-40B4-BE49-F238E27FC236}">
+                <a16:creationId xmlns:a16="http://schemas.microsoft.com/office/drawing/2014/main" id="{94909093-0BFB-B658-A42D-64D3192A2420}"/>
+              </a:ext>
+            </a:extLst>
+          </p:cNvPr>
+          <p:cNvSpPr txBox="1">
+            <a:spLocks/>
+          </p:cNvSpPr>
+          <p:nvPr/>
+        </p:nvSpPr>
+        <p:spPr>
+          <a:xfrm>
+            <a:off x="179512" y="116632"/>
+            <a:ext cx="7713554" cy="612186"/>
+          </a:xfrm>
+          <a:prstGeom prst="rect">
+            <a:avLst/>
+          </a:prstGeom>
+        </p:spPr>
+        <p:txBody>
+          <a:bodyPr/>
+          <a:lstStyle>
+            <a:lvl1pPr algn="l" defTabSz="914400" rtl="0" eaLnBrk="1" latinLnBrk="0" hangingPunct="1">
+              <a:spcBef>
+                <a:spcPct val="0"/>
+              </a:spcBef>
+              <a:buNone/>
+              <a:defRPr sz="2400" kern="1200">
+                <a:solidFill>
+                  <a:schemeClr val="tx1"/>
+                </a:solidFill>
+                <a:latin typeface="+mj-lt"/>
+                <a:ea typeface="+mj-ea"/>
+                <a:cs typeface="+mj-cs"/>
+              </a:defRPr>
+            </a:lvl1pPr>
+          </a:lstStyle>
+          <a:p>
+            <a:r>
+              <a:rPr lang="en-US" altLang="zh-TW" sz="2800" dirty="0">
+                <a:latin typeface="Noto Sans HK" panose="020B0200000000000000" pitchFamily="34" charset="-120"/>
+                <a:ea typeface="Noto Sans HK" panose="020B0200000000000000" pitchFamily="34" charset="-120"/>
+                <a:cs typeface="Aharoni" panose="020F0502020204030204" pitchFamily="2" charset="-79"/>
+                <a:sym typeface="Wingdings" panose="05000000000000000000" pitchFamily="2" charset="2"/>
+              </a:rPr>
+              <a:t>Goal: Bio-IT AI Agent (Dr. Bio-Byte)</a:t>
+            </a:r>
+          </a:p>
+          <a:p>
+            <a:pPr marL="285750" indent="-285750">
+              <a:buFontTx/>
+              <a:buChar char="-"/>
+            </a:pPr>
+            <a:endParaRPr lang="en-US" altLang="zh-TW" sz="1400" dirty="0">
+              <a:latin typeface="Noto Sans HK" panose="020B0200000000000000" pitchFamily="34" charset="-120"/>
+              <a:ea typeface="Noto Sans HK" panose="020B0200000000000000" pitchFamily="34" charset="-120"/>
+              <a:cs typeface="Arial" panose="020B0604020202020204" pitchFamily="34" charset="0"/>
+            </a:endParaRPr>
+          </a:p>
+        </p:txBody>
+      </p:sp>
+      <p:sp>
+        <p:nvSpPr>
+          <p:cNvPr id="4" name="文字方塊 3">
+            <a:extLst>
+              <a:ext uri="{FF2B5EF4-FFF2-40B4-BE49-F238E27FC236}">
+                <a16:creationId xmlns:a16="http://schemas.microsoft.com/office/drawing/2014/main" id="{3FBE37F5-82E5-A69A-2496-4479A9FEA39E}"/>
+              </a:ext>
+            </a:extLst>
+          </p:cNvPr>
+          <p:cNvSpPr txBox="1"/>
+          <p:nvPr/>
+        </p:nvSpPr>
+        <p:spPr>
+          <a:xfrm>
+            <a:off x="2987824" y="972945"/>
+            <a:ext cx="5760639" cy="2223686"/>
+          </a:xfrm>
+          <a:prstGeom prst="rect">
+            <a:avLst/>
+          </a:prstGeom>
+          <a:noFill/>
+        </p:spPr>
+        <p:txBody>
+          <a:bodyPr wrap="square">
+            <a:spAutoFit/>
+          </a:bodyPr>
+          <a:lstStyle/>
+          <a:p>
+            <a:pPr>
+              <a:spcBef>
+                <a:spcPts val="900"/>
+              </a:spcBef>
+              <a:spcAft>
+                <a:spcPts val="1200"/>
+              </a:spcAft>
+            </a:pPr>
+            <a:r>
+              <a:rPr lang="en-US" altLang="zh-TW" sz="1100" b="0" u="none" strike="noStrike" dirty="0">
+                <a:effectLst/>
+                <a:latin typeface="微軟正黑體" panose="020B0604030504040204" pitchFamily="34" charset="-120"/>
+                <a:ea typeface="微軟正黑體" panose="020B0604030504040204" pitchFamily="34" charset="-120"/>
+              </a:rPr>
+              <a:t>BIO-</a:t>
+            </a:r>
+            <a:r>
+              <a:rPr lang="zh-TW" altLang="zh-TW" sz="1100" b="0" u="none" strike="noStrike" dirty="0">
+                <a:effectLst/>
+                <a:latin typeface="微軟正黑體" panose="020B0604030504040204" pitchFamily="34" charset="-120"/>
+                <a:ea typeface="微軟正黑體" panose="020B0604030504040204" pitchFamily="34" charset="-120"/>
+              </a:rPr>
+              <a:t>Agent 是一個</a:t>
+            </a:r>
+            <a:r>
+              <a:rPr lang="zh-TW" altLang="en-US" sz="1100" b="0" u="none" strike="noStrike" dirty="0">
+                <a:effectLst/>
+                <a:latin typeface="微軟正黑體" panose="020B0604030504040204" pitchFamily="34" charset="-120"/>
+                <a:ea typeface="微軟正黑體" panose="020B0604030504040204" pitchFamily="34" charset="-120"/>
+              </a:rPr>
+              <a:t>多模態的生物醫學</a:t>
+            </a:r>
+            <a:r>
+              <a:rPr lang="en-US" altLang="zh-TW" sz="1100" b="0" u="none" strike="noStrike" dirty="0">
+                <a:effectLst/>
+                <a:latin typeface="微軟正黑體" panose="020B0604030504040204" pitchFamily="34" charset="-120"/>
+                <a:ea typeface="微軟正黑體" panose="020B0604030504040204" pitchFamily="34" charset="-120"/>
+              </a:rPr>
+              <a:t>AI</a:t>
+            </a:r>
+            <a:r>
+              <a:rPr lang="zh-TW" altLang="en-US" sz="1100" b="0" u="none" strike="noStrike" dirty="0">
+                <a:effectLst/>
+                <a:latin typeface="微軟正黑體" panose="020B0604030504040204" pitchFamily="34" charset="-120"/>
+                <a:ea typeface="微軟正黑體" panose="020B0604030504040204" pitchFamily="34" charset="-120"/>
+              </a:rPr>
+              <a:t> </a:t>
+            </a:r>
+            <a:r>
+              <a:rPr lang="en-US" altLang="zh-TW" sz="1100" b="0" u="none" strike="noStrike" dirty="0">
+                <a:effectLst/>
+                <a:latin typeface="微軟正黑體" panose="020B0604030504040204" pitchFamily="34" charset="-120"/>
+                <a:ea typeface="微軟正黑體" panose="020B0604030504040204" pitchFamily="34" charset="-120"/>
+              </a:rPr>
+              <a:t>Agent, </a:t>
+            </a:r>
+            <a:r>
+              <a:rPr lang="zh-TW" altLang="en-US" sz="1100" b="0" u="none" strike="noStrike" dirty="0">
+                <a:effectLst/>
+                <a:latin typeface="微軟正黑體" panose="020B0604030504040204" pitchFamily="34" charset="-120"/>
+                <a:ea typeface="微軟正黑體" panose="020B0604030504040204" pitchFamily="34" charset="-120"/>
+              </a:rPr>
+              <a:t>分析輸入的資料</a:t>
+            </a:r>
+            <a:r>
+              <a:rPr lang="en-US" altLang="zh-TW" sz="1100" b="0" u="none" strike="noStrike" dirty="0">
+                <a:effectLst/>
+                <a:latin typeface="微軟正黑體" panose="020B0604030504040204" pitchFamily="34" charset="-120"/>
+                <a:ea typeface="微軟正黑體" panose="020B0604030504040204" pitchFamily="34" charset="-120"/>
+              </a:rPr>
+              <a:t>, </a:t>
+            </a:r>
+            <a:r>
+              <a:rPr lang="zh-TW" altLang="en-US" sz="1100" dirty="0">
+                <a:latin typeface="微軟正黑體" panose="020B0604030504040204" pitchFamily="34" charset="-120"/>
+                <a:ea typeface="微軟正黑體" panose="020B0604030504040204" pitchFamily="34" charset="-120"/>
+              </a:rPr>
+              <a:t>查詢遠端文獻</a:t>
+            </a:r>
+            <a:r>
+              <a:rPr lang="en-US" altLang="zh-TW" sz="1100" dirty="0">
+                <a:latin typeface="微軟正黑體" panose="020B0604030504040204" pitchFamily="34" charset="-120"/>
+                <a:ea typeface="微軟正黑體" panose="020B0604030504040204" pitchFamily="34" charset="-120"/>
+              </a:rPr>
+              <a:t>,</a:t>
+            </a:r>
+            <a:r>
+              <a:rPr lang="zh-TW" altLang="en-US" sz="1100" dirty="0">
+                <a:latin typeface="微軟正黑體" panose="020B0604030504040204" pitchFamily="34" charset="-120"/>
+                <a:ea typeface="微軟正黑體" panose="020B0604030504040204" pitchFamily="34" charset="-120"/>
+              </a:rPr>
+              <a:t> 進而整理出對應報告</a:t>
+            </a:r>
+            <a:r>
+              <a:rPr lang="en-US" altLang="zh-TW" sz="1100" dirty="0">
+                <a:latin typeface="微軟正黑體" panose="020B0604030504040204" pitchFamily="34" charset="-120"/>
+                <a:ea typeface="微軟正黑體" panose="020B0604030504040204" pitchFamily="34" charset="-120"/>
+              </a:rPr>
+              <a:t>.</a:t>
+            </a:r>
+          </a:p>
+          <a:p>
+            <a:pPr>
+              <a:spcBef>
+                <a:spcPts val="900"/>
+              </a:spcBef>
+              <a:spcAft>
+                <a:spcPts val="1200"/>
+              </a:spcAft>
+            </a:pPr>
+            <a:r>
+              <a:rPr lang="zh-TW" altLang="en-US" sz="1100" dirty="0">
+                <a:latin typeface="微軟正黑體" panose="020B0604030504040204" pitchFamily="34" charset="-120"/>
+                <a:ea typeface="微軟正黑體" panose="020B0604030504040204" pitchFamily="34" charset="-120"/>
+              </a:rPr>
+              <a:t>解讀基因分型數據，簡單來說，就是將枯燥的「</a:t>
+            </a:r>
+            <a:r>
+              <a:rPr lang="en-US" altLang="zh-TW" sz="1100" dirty="0">
+                <a:latin typeface="微軟正黑體" panose="020B0604030504040204" pitchFamily="34" charset="-120"/>
+                <a:ea typeface="微軟正黑體" panose="020B0604030504040204" pitchFamily="34" charset="-120"/>
+              </a:rPr>
+              <a:t>DNA </a:t>
+            </a:r>
+            <a:r>
+              <a:rPr lang="zh-TW" altLang="en-US" sz="1100" dirty="0">
+                <a:latin typeface="微軟正黑體" panose="020B0604030504040204" pitchFamily="34" charset="-120"/>
+                <a:ea typeface="微軟正黑體" panose="020B0604030504040204" pitchFamily="34" charset="-120"/>
+              </a:rPr>
+              <a:t>字母組合」，翻譯成你看得懂的「健康與生理說明書」。在實驗室完成基因分型（</a:t>
+            </a:r>
+            <a:r>
+              <a:rPr lang="en-US" altLang="zh-TW" sz="1100" dirty="0">
+                <a:latin typeface="微軟正黑體" panose="020B0604030504040204" pitchFamily="34" charset="-120"/>
+                <a:ea typeface="微軟正黑體" panose="020B0604030504040204" pitchFamily="34" charset="-120"/>
+              </a:rPr>
+              <a:t>Genotyping</a:t>
+            </a:r>
+            <a:r>
+              <a:rPr lang="zh-TW" altLang="en-US" sz="1100" dirty="0">
+                <a:latin typeface="微軟正黑體" panose="020B0604030504040204" pitchFamily="34" charset="-120"/>
+                <a:ea typeface="微軟正黑體" panose="020B0604030504040204" pitchFamily="34" charset="-120"/>
+              </a:rPr>
+              <a:t>）後，你會拿到一張包含成千上萬個點位、類似「</a:t>
+            </a:r>
+            <a:r>
+              <a:rPr lang="en-US" altLang="zh-TW" sz="1100" dirty="0">
+                <a:latin typeface="微軟正黑體" panose="020B0604030504040204" pitchFamily="34" charset="-120"/>
+                <a:ea typeface="微軟正黑體" panose="020B0604030504040204" pitchFamily="34" charset="-120"/>
+              </a:rPr>
+              <a:t>rs1057910: CC</a:t>
+            </a:r>
+            <a:r>
+              <a:rPr lang="zh-TW" altLang="en-US" sz="1100" dirty="0">
+                <a:latin typeface="微軟正黑體" panose="020B0604030504040204" pitchFamily="34" charset="-120"/>
+                <a:ea typeface="微軟正黑體" panose="020B0604030504040204" pitchFamily="34" charset="-120"/>
+              </a:rPr>
+              <a:t>」或「</a:t>
+            </a:r>
+            <a:r>
+              <a:rPr lang="en-US" altLang="zh-TW" sz="1100" dirty="0">
+                <a:latin typeface="微軟正黑體" panose="020B0604030504040204" pitchFamily="34" charset="-120"/>
+                <a:ea typeface="微軟正黑體" panose="020B0604030504040204" pitchFamily="34" charset="-120"/>
+              </a:rPr>
+              <a:t>rs334: AT</a:t>
+            </a:r>
+            <a:r>
+              <a:rPr lang="zh-TW" altLang="en-US" sz="1100" dirty="0">
+                <a:latin typeface="微軟正黑體" panose="020B0604030504040204" pitchFamily="34" charset="-120"/>
+                <a:ea typeface="微軟正黑體" panose="020B0604030504040204" pitchFamily="34" charset="-120"/>
+              </a:rPr>
+              <a:t>」的基因密碼清單。這些代碼本身沒有意義，而「解讀」就是利用 </a:t>
+            </a:r>
+            <a:r>
+              <a:rPr lang="en-US" altLang="zh-TW" sz="1100" dirty="0">
+                <a:latin typeface="微軟正黑體" panose="020B0604030504040204" pitchFamily="34" charset="-120"/>
+                <a:ea typeface="微軟正黑體" panose="020B0604030504040204" pitchFamily="34" charset="-120"/>
+              </a:rPr>
+              <a:t>AI </a:t>
+            </a:r>
+            <a:r>
+              <a:rPr lang="zh-TW" altLang="en-US" sz="1100" dirty="0">
+                <a:latin typeface="微軟正黑體" panose="020B0604030504040204" pitchFamily="34" charset="-120"/>
+                <a:ea typeface="微軟正黑體" panose="020B0604030504040204" pitchFamily="34" charset="-120"/>
+              </a:rPr>
+              <a:t>或生物資訊工具，去翻閱國際醫學字典與資料庫，查明這些密碼對你的身體代表什麼：看疾病風險：查出哪些變異會增加你罹患心臟病、糖尿病或特定癌症的機率。看用藥反應：查出你的體質對某些藥物（如抗凝血劑、標靶藥）是代謝太快還是太慢，以便醫生調整精準劑量，避免過敏副作用。看調控特徵：查明這些變異是否會悄悄改變你體內某些基因的表達量。這項工作的本質，就是把冰冷的生物數據，轉化為具備臨床價值的精準醫療指引。 </a:t>
+            </a:r>
+            <a:endParaRPr lang="en-US" altLang="zh-TW" sz="1100" dirty="0">
+              <a:latin typeface="微軟正黑體" panose="020B0604030504040204" pitchFamily="34" charset="-120"/>
+              <a:ea typeface="微軟正黑體" panose="020B0604030504040204" pitchFamily="34" charset="-120"/>
+            </a:endParaRPr>
+          </a:p>
+        </p:txBody>
+      </p:sp>
+      <p:sp>
+        <p:nvSpPr>
+          <p:cNvPr id="3" name="矩形 2">
+            <a:extLst>
+              <a:ext uri="{FF2B5EF4-FFF2-40B4-BE49-F238E27FC236}">
+                <a16:creationId xmlns:a16="http://schemas.microsoft.com/office/drawing/2014/main" id="{A9193AD6-7790-74B9-25AF-6FA2590D3D97}"/>
+              </a:ext>
+            </a:extLst>
+          </p:cNvPr>
+          <p:cNvSpPr/>
+          <p:nvPr/>
+        </p:nvSpPr>
+        <p:spPr>
+          <a:xfrm>
+            <a:off x="323529" y="1304646"/>
+            <a:ext cx="1152128" cy="612186"/>
+          </a:xfrm>
+          <a:prstGeom prst="rect">
+            <a:avLst/>
+          </a:prstGeom>
+          <a:noFill/>
+          <a:ln w="38100">
+            <a:solidFill>
+              <a:schemeClr val="tx2">
+                <a:lumMod val="20000"/>
+                <a:lumOff val="80000"/>
+              </a:schemeClr>
+            </a:solidFill>
+          </a:ln>
+        </p:spPr>
+        <p:style>
+          <a:lnRef idx="2">
+            <a:schemeClr val="accent1">
+              <a:shade val="15000"/>
+            </a:schemeClr>
+          </a:lnRef>
+          <a:fillRef idx="1">
+            <a:schemeClr val="accent1"/>
+          </a:fillRef>
+          <a:effectRef idx="0">
+            <a:schemeClr val="accent1"/>
+          </a:effectRef>
+          <a:fontRef idx="minor">
+            <a:schemeClr val="lt1"/>
+          </a:fontRef>
+        </p:style>
+        <p:txBody>
+          <a:bodyPr wrap="none" lIns="36000" tIns="0" rIns="0" bIns="0" rtlCol="0" anchor="ctr" anchorCtr="0"/>
+          <a:lstStyle/>
+          <a:p>
+            <a:pPr>
+              <a:lnSpc>
+                <a:spcPts val="1200"/>
+              </a:lnSpc>
+            </a:pPr>
+            <a:r>
+              <a:rPr lang="zh-TW" altLang="en-US" sz="1200" dirty="0">
+                <a:solidFill>
+                  <a:schemeClr val="tx2"/>
+                </a:solidFill>
+                <a:latin typeface="微軟正黑體" panose="020B0604030504040204" pitchFamily="34" charset="-120"/>
+                <a:ea typeface="微軟正黑體" panose="020B0604030504040204" pitchFamily="34" charset="-120"/>
+              </a:rPr>
+              <a:t>功能摘要</a:t>
+            </a:r>
+            <a:endParaRPr lang="en-US" altLang="zh-TW" sz="1200" dirty="0">
+              <a:solidFill>
+                <a:schemeClr val="tx2"/>
+              </a:solidFill>
+              <a:latin typeface="微軟正黑體" panose="020B0604030504040204" pitchFamily="34" charset="-120"/>
+              <a:ea typeface="微軟正黑體" panose="020B0604030504040204" pitchFamily="34" charset="-120"/>
+            </a:endParaRPr>
+          </a:p>
+          <a:p>
+            <a:pPr>
+              <a:lnSpc>
+                <a:spcPts val="1200"/>
+              </a:lnSpc>
+            </a:pPr>
+            <a:r>
+              <a:rPr lang="en-US" altLang="zh-TW" sz="1200" dirty="0">
+                <a:solidFill>
+                  <a:schemeClr val="tx2"/>
+                </a:solidFill>
+                <a:latin typeface="微軟正黑體" panose="020B0604030504040204" pitchFamily="34" charset="-120"/>
+                <a:ea typeface="微軟正黑體" panose="020B0604030504040204" pitchFamily="34" charset="-120"/>
+              </a:rPr>
+              <a:t>(Agent</a:t>
+            </a:r>
+            <a:r>
+              <a:rPr lang="zh-TW" altLang="en-US" sz="1200" dirty="0">
+                <a:solidFill>
+                  <a:schemeClr val="tx2"/>
+                </a:solidFill>
+                <a:latin typeface="微軟正黑體" panose="020B0604030504040204" pitchFamily="34" charset="-120"/>
+                <a:ea typeface="微軟正黑體" panose="020B0604030504040204" pitchFamily="34" charset="-120"/>
+              </a:rPr>
+              <a:t>詢答</a:t>
+            </a:r>
+            <a:r>
+              <a:rPr lang="en-US" altLang="zh-TW" sz="1200" dirty="0">
+                <a:solidFill>
+                  <a:schemeClr val="tx2"/>
+                </a:solidFill>
+                <a:latin typeface="微軟正黑體" panose="020B0604030504040204" pitchFamily="34" charset="-120"/>
+                <a:ea typeface="微軟正黑體" panose="020B0604030504040204" pitchFamily="34" charset="-120"/>
+              </a:rPr>
+              <a:t>)</a:t>
+            </a:r>
+            <a:endParaRPr lang="zh-TW" altLang="en-US" sz="1200" dirty="0">
+              <a:solidFill>
+                <a:schemeClr val="tx2"/>
+              </a:solidFill>
+              <a:latin typeface="微軟正黑體" panose="020B0604030504040204" pitchFamily="34" charset="-120"/>
+              <a:ea typeface="微軟正黑體" panose="020B0604030504040204" pitchFamily="34" charset="-120"/>
+            </a:endParaRPr>
+          </a:p>
+        </p:txBody>
+      </p:sp>
+      <p:sp>
+        <p:nvSpPr>
+          <p:cNvPr id="5" name="矩形 4">
+            <a:extLst>
+              <a:ext uri="{FF2B5EF4-FFF2-40B4-BE49-F238E27FC236}">
+                <a16:creationId xmlns:a16="http://schemas.microsoft.com/office/drawing/2014/main" id="{A7425320-EC34-31E3-4B3E-7BE529921AA4}"/>
+              </a:ext>
+            </a:extLst>
+          </p:cNvPr>
+          <p:cNvSpPr/>
+          <p:nvPr/>
+        </p:nvSpPr>
+        <p:spPr>
+          <a:xfrm>
+            <a:off x="323529" y="2252745"/>
+            <a:ext cx="1152128" cy="960231"/>
+          </a:xfrm>
+          <a:prstGeom prst="rect">
+            <a:avLst/>
+          </a:prstGeom>
+          <a:noFill/>
+          <a:ln w="38100">
+            <a:solidFill>
+              <a:schemeClr val="tx2">
+                <a:lumMod val="20000"/>
+                <a:lumOff val="80000"/>
+              </a:schemeClr>
+            </a:solidFill>
+          </a:ln>
+        </p:spPr>
+        <p:style>
+          <a:lnRef idx="2">
+            <a:schemeClr val="accent1">
+              <a:shade val="15000"/>
+            </a:schemeClr>
+          </a:lnRef>
+          <a:fillRef idx="1">
+            <a:schemeClr val="accent1"/>
+          </a:fillRef>
+          <a:effectRef idx="0">
+            <a:schemeClr val="accent1"/>
+          </a:effectRef>
+          <a:fontRef idx="minor">
+            <a:schemeClr val="lt1"/>
+          </a:fontRef>
+        </p:style>
+        <p:txBody>
+          <a:bodyPr wrap="none" lIns="36000" tIns="0" rIns="0" bIns="0" rtlCol="0" anchor="ctr" anchorCtr="0"/>
+          <a:lstStyle/>
+          <a:p>
+            <a:pPr>
+              <a:lnSpc>
+                <a:spcPts val="1200"/>
+              </a:lnSpc>
+            </a:pPr>
+            <a:r>
+              <a:rPr lang="zh-TW" altLang="en-US" sz="1200" dirty="0">
+                <a:solidFill>
+                  <a:schemeClr val="tx2"/>
+                </a:solidFill>
+                <a:latin typeface="微軟正黑體" panose="020B0604030504040204" pitchFamily="34" charset="-120"/>
+                <a:ea typeface="微軟正黑體" panose="020B0604030504040204" pitchFamily="34" charset="-120"/>
+              </a:rPr>
+              <a:t>系統架構</a:t>
+            </a:r>
+            <a:endParaRPr lang="en-US" altLang="zh-TW" sz="1200" dirty="0">
+              <a:solidFill>
+                <a:schemeClr val="tx2"/>
+              </a:solidFill>
+              <a:latin typeface="微軟正黑體" panose="020B0604030504040204" pitchFamily="34" charset="-120"/>
+              <a:ea typeface="微軟正黑體" panose="020B0604030504040204" pitchFamily="34" charset="-120"/>
+            </a:endParaRPr>
+          </a:p>
+          <a:p>
+            <a:pPr>
+              <a:lnSpc>
+                <a:spcPts val="1200"/>
+              </a:lnSpc>
+            </a:pPr>
+            <a:r>
+              <a:rPr lang="en-US" altLang="zh-TW" sz="1200" dirty="0">
+                <a:solidFill>
+                  <a:schemeClr val="tx2"/>
+                </a:solidFill>
+                <a:latin typeface="微軟正黑體" panose="020B0604030504040204" pitchFamily="34" charset="-120"/>
+                <a:ea typeface="微軟正黑體" panose="020B0604030504040204" pitchFamily="34" charset="-120"/>
+              </a:rPr>
+              <a:t>(</a:t>
+            </a:r>
+            <a:r>
+              <a:rPr lang="zh-TW" altLang="en-US" sz="1200" dirty="0">
+                <a:solidFill>
+                  <a:schemeClr val="tx2"/>
+                </a:solidFill>
+                <a:latin typeface="微軟正黑體" panose="020B0604030504040204" pitchFamily="34" charset="-120"/>
+                <a:ea typeface="微軟正黑體" panose="020B0604030504040204" pitchFamily="34" charset="-120"/>
+              </a:rPr>
+              <a:t>方案</a:t>
+            </a:r>
+            <a:r>
+              <a:rPr lang="en-US" altLang="zh-TW" sz="1200" dirty="0">
+                <a:solidFill>
+                  <a:schemeClr val="tx2"/>
+                </a:solidFill>
+                <a:latin typeface="微軟正黑體" panose="020B0604030504040204" pitchFamily="34" charset="-120"/>
+                <a:ea typeface="微軟正黑體" panose="020B0604030504040204" pitchFamily="34" charset="-120"/>
+              </a:rPr>
+              <a:t>/</a:t>
+            </a:r>
+            <a:r>
+              <a:rPr lang="zh-TW" altLang="en-US" sz="1200" dirty="0">
+                <a:solidFill>
+                  <a:schemeClr val="tx2"/>
+                </a:solidFill>
+                <a:latin typeface="微軟正黑體" panose="020B0604030504040204" pitchFamily="34" charset="-120"/>
+                <a:ea typeface="微軟正黑體" panose="020B0604030504040204" pitchFamily="34" charset="-120"/>
+              </a:rPr>
+              <a:t>做法</a:t>
+            </a:r>
+            <a:r>
+              <a:rPr lang="en-US" altLang="zh-TW" sz="1200" dirty="0">
+                <a:solidFill>
+                  <a:schemeClr val="tx2"/>
+                </a:solidFill>
+                <a:latin typeface="微軟正黑體" panose="020B0604030504040204" pitchFamily="34" charset="-120"/>
+                <a:ea typeface="微軟正黑體" panose="020B0604030504040204" pitchFamily="34" charset="-120"/>
+              </a:rPr>
+              <a:t>)</a:t>
+            </a:r>
+          </a:p>
+          <a:p>
+            <a:pPr>
+              <a:lnSpc>
+                <a:spcPts val="1200"/>
+              </a:lnSpc>
+            </a:pPr>
+            <a:endParaRPr lang="en-US" altLang="zh-TW" sz="1200" dirty="0">
+              <a:solidFill>
+                <a:schemeClr val="tx2"/>
+              </a:solidFill>
+              <a:latin typeface="微軟正黑體" panose="020B0604030504040204" pitchFamily="34" charset="-120"/>
+              <a:ea typeface="微軟正黑體" panose="020B0604030504040204" pitchFamily="34" charset="-120"/>
+            </a:endParaRPr>
+          </a:p>
+          <a:p>
+            <a:pPr>
+              <a:lnSpc>
+                <a:spcPts val="1200"/>
+              </a:lnSpc>
+            </a:pPr>
+            <a:r>
+              <a:rPr lang="zh-TW" altLang="en-US" sz="1200" dirty="0">
+                <a:solidFill>
+                  <a:schemeClr val="tx2"/>
+                </a:solidFill>
+                <a:latin typeface="微軟正黑體" panose="020B0604030504040204" pitchFamily="34" charset="-120"/>
+                <a:ea typeface="微軟正黑體" panose="020B0604030504040204" pitchFamily="34" charset="-120"/>
+              </a:rPr>
+              <a:t>微調內容</a:t>
+            </a:r>
+            <a:endParaRPr lang="en-US" altLang="zh-TW" sz="1200" dirty="0">
+              <a:solidFill>
+                <a:schemeClr val="tx2"/>
+              </a:solidFill>
+              <a:latin typeface="微軟正黑體" panose="020B0604030504040204" pitchFamily="34" charset="-120"/>
+              <a:ea typeface="微軟正黑體" panose="020B0604030504040204" pitchFamily="34" charset="-120"/>
+            </a:endParaRPr>
+          </a:p>
+          <a:p>
+            <a:pPr>
+              <a:lnSpc>
+                <a:spcPts val="1200"/>
+              </a:lnSpc>
+            </a:pPr>
+            <a:r>
+              <a:rPr lang="en-US" altLang="zh-TW" sz="1200" dirty="0">
+                <a:solidFill>
+                  <a:schemeClr val="tx2"/>
+                </a:solidFill>
+                <a:latin typeface="微軟正黑體" panose="020B0604030504040204" pitchFamily="34" charset="-120"/>
+                <a:ea typeface="微軟正黑體" panose="020B0604030504040204" pitchFamily="34" charset="-120"/>
+              </a:rPr>
+              <a:t>(</a:t>
+            </a:r>
+            <a:r>
+              <a:rPr lang="zh-TW" altLang="en-US" sz="1200" dirty="0">
+                <a:solidFill>
+                  <a:schemeClr val="tx2"/>
+                </a:solidFill>
+                <a:latin typeface="微軟正黑體" panose="020B0604030504040204" pitchFamily="34" charset="-120"/>
+                <a:ea typeface="微軟正黑體" panose="020B0604030504040204" pitchFamily="34" charset="-120"/>
+              </a:rPr>
+              <a:t>資料</a:t>
+            </a:r>
+            <a:r>
+              <a:rPr lang="en-US" altLang="zh-TW" sz="1200" dirty="0">
+                <a:solidFill>
+                  <a:schemeClr val="tx2"/>
+                </a:solidFill>
+                <a:latin typeface="微軟正黑體" panose="020B0604030504040204" pitchFamily="34" charset="-120"/>
+                <a:ea typeface="微軟正黑體" panose="020B0604030504040204" pitchFamily="34" charset="-120"/>
+              </a:rPr>
+              <a:t>/</a:t>
+            </a:r>
+            <a:r>
+              <a:rPr lang="zh-TW" altLang="en-US" sz="1200" dirty="0">
+                <a:solidFill>
+                  <a:schemeClr val="tx2"/>
+                </a:solidFill>
+                <a:latin typeface="微軟正黑體" panose="020B0604030504040204" pitchFamily="34" charset="-120"/>
+                <a:ea typeface="微軟正黑體" panose="020B0604030504040204" pitchFamily="34" charset="-120"/>
+              </a:rPr>
+              <a:t>來源</a:t>
+            </a:r>
+            <a:r>
+              <a:rPr lang="en-US" altLang="zh-TW" sz="1200" dirty="0">
+                <a:solidFill>
+                  <a:schemeClr val="tx2"/>
+                </a:solidFill>
+                <a:latin typeface="微軟正黑體" panose="020B0604030504040204" pitchFamily="34" charset="-120"/>
+                <a:ea typeface="微軟正黑體" panose="020B0604030504040204" pitchFamily="34" charset="-120"/>
+              </a:rPr>
+              <a:t>)</a:t>
+            </a:r>
+            <a:endParaRPr lang="zh-TW" altLang="en-US" sz="1200" dirty="0">
+              <a:solidFill>
+                <a:schemeClr val="tx2"/>
+              </a:solidFill>
+              <a:latin typeface="微軟正黑體" panose="020B0604030504040204" pitchFamily="34" charset="-120"/>
+              <a:ea typeface="微軟正黑體" panose="020B0604030504040204" pitchFamily="34" charset="-120"/>
+            </a:endParaRPr>
+          </a:p>
+        </p:txBody>
+      </p:sp>
+      <p:sp>
+        <p:nvSpPr>
+          <p:cNvPr id="6" name="矩形 5">
+            <a:extLst>
+              <a:ext uri="{FF2B5EF4-FFF2-40B4-BE49-F238E27FC236}">
+                <a16:creationId xmlns:a16="http://schemas.microsoft.com/office/drawing/2014/main" id="{D8F0E374-031C-6D04-154D-D5C2744BF69D}"/>
+              </a:ext>
+            </a:extLst>
+          </p:cNvPr>
+          <p:cNvSpPr/>
+          <p:nvPr/>
+        </p:nvSpPr>
+        <p:spPr>
+          <a:xfrm>
+            <a:off x="323529" y="3581132"/>
+            <a:ext cx="1152128" cy="612187"/>
+          </a:xfrm>
+          <a:prstGeom prst="rect">
+            <a:avLst/>
+          </a:prstGeom>
+          <a:noFill/>
+          <a:ln w="38100">
+            <a:solidFill>
+              <a:schemeClr val="tx2">
+                <a:lumMod val="20000"/>
+                <a:lumOff val="80000"/>
+              </a:schemeClr>
+            </a:solidFill>
+          </a:ln>
+        </p:spPr>
+        <p:style>
+          <a:lnRef idx="2">
+            <a:schemeClr val="accent1">
+              <a:shade val="15000"/>
+            </a:schemeClr>
+          </a:lnRef>
+          <a:fillRef idx="1">
+            <a:schemeClr val="accent1"/>
+          </a:fillRef>
+          <a:effectRef idx="0">
+            <a:schemeClr val="accent1"/>
+          </a:effectRef>
+          <a:fontRef idx="minor">
+            <a:schemeClr val="lt1"/>
+          </a:fontRef>
+        </p:style>
+        <p:txBody>
+          <a:bodyPr wrap="none" lIns="36000" tIns="0" rIns="0" bIns="0" rtlCol="0" anchor="ctr" anchorCtr="0"/>
+          <a:lstStyle/>
+          <a:p>
+            <a:pPr>
+              <a:lnSpc>
+                <a:spcPts val="1200"/>
+              </a:lnSpc>
+            </a:pPr>
+            <a:r>
+              <a:rPr lang="zh-TW" altLang="en-US" sz="1200" dirty="0">
+                <a:solidFill>
+                  <a:schemeClr val="tx2"/>
+                </a:solidFill>
+                <a:latin typeface="微軟正黑體" panose="020B0604030504040204" pitchFamily="34" charset="-120"/>
+                <a:ea typeface="微軟正黑體" panose="020B0604030504040204" pitchFamily="34" charset="-120"/>
+              </a:rPr>
+              <a:t>研究方法</a:t>
+            </a:r>
+            <a:endParaRPr lang="en-US" altLang="zh-TW" sz="1200" dirty="0">
+              <a:solidFill>
+                <a:schemeClr val="tx2"/>
+              </a:solidFill>
+              <a:latin typeface="微軟正黑體" panose="020B0604030504040204" pitchFamily="34" charset="-120"/>
+              <a:ea typeface="微軟正黑體" panose="020B0604030504040204" pitchFamily="34" charset="-120"/>
+            </a:endParaRPr>
+          </a:p>
+          <a:p>
+            <a:pPr>
+              <a:lnSpc>
+                <a:spcPts val="1200"/>
+              </a:lnSpc>
+            </a:pPr>
+            <a:r>
+              <a:rPr lang="en-US" altLang="zh-TW" sz="1200" dirty="0">
+                <a:solidFill>
+                  <a:schemeClr val="tx2"/>
+                </a:solidFill>
+                <a:latin typeface="微軟正黑體" panose="020B0604030504040204" pitchFamily="34" charset="-120"/>
+                <a:ea typeface="微軟正黑體" panose="020B0604030504040204" pitchFamily="34" charset="-120"/>
+              </a:rPr>
+              <a:t>(</a:t>
+            </a:r>
+            <a:r>
+              <a:rPr lang="zh-TW" altLang="en-US" sz="1200" dirty="0">
+                <a:solidFill>
+                  <a:schemeClr val="tx2"/>
+                </a:solidFill>
+                <a:latin typeface="微軟正黑體" panose="020B0604030504040204" pitchFamily="34" charset="-120"/>
+                <a:ea typeface="微軟正黑體" panose="020B0604030504040204" pitchFamily="34" charset="-120"/>
+              </a:rPr>
+              <a:t>評估標準</a:t>
+            </a:r>
+            <a:r>
+              <a:rPr lang="en-US" altLang="zh-TW" sz="1200" dirty="0">
+                <a:solidFill>
+                  <a:schemeClr val="tx2"/>
+                </a:solidFill>
+                <a:latin typeface="微軟正黑體" panose="020B0604030504040204" pitchFamily="34" charset="-120"/>
+                <a:ea typeface="微軟正黑體" panose="020B0604030504040204" pitchFamily="34" charset="-120"/>
+              </a:rPr>
+              <a:t>) </a:t>
+            </a:r>
+            <a:endParaRPr lang="zh-TW" altLang="en-US" sz="1200" dirty="0">
+              <a:solidFill>
+                <a:schemeClr val="tx2"/>
+              </a:solidFill>
+              <a:latin typeface="微軟正黑體" panose="020B0604030504040204" pitchFamily="34" charset="-120"/>
+              <a:ea typeface="微軟正黑體" panose="020B0604030504040204" pitchFamily="34" charset="-120"/>
+            </a:endParaRPr>
+          </a:p>
+        </p:txBody>
+      </p:sp>
+      <p:cxnSp>
+        <p:nvCxnSpPr>
+          <p:cNvPr id="7" name="直線單箭頭接點 6">
+            <a:extLst>
+              <a:ext uri="{FF2B5EF4-FFF2-40B4-BE49-F238E27FC236}">
+                <a16:creationId xmlns:a16="http://schemas.microsoft.com/office/drawing/2014/main" id="{6A12B706-1D5F-BC8C-6A88-B1F33BE9AA9B}"/>
+              </a:ext>
+            </a:extLst>
+          </p:cNvPr>
+          <p:cNvCxnSpPr>
+            <a:cxnSpLocks/>
+            <a:stCxn id="3" idx="2"/>
+            <a:endCxn id="5" idx="0"/>
+          </p:cNvCxnSpPr>
+          <p:nvPr/>
+        </p:nvCxnSpPr>
+        <p:spPr>
+          <a:xfrm>
+            <a:off x="899593" y="1916832"/>
+            <a:ext cx="0" cy="335913"/>
+          </a:xfrm>
+          <a:prstGeom prst="straightConnector1">
+            <a:avLst/>
+          </a:prstGeom>
+          <a:ln w="25400">
+            <a:solidFill>
+              <a:schemeClr val="accent1">
+                <a:lumMod val="75000"/>
+              </a:schemeClr>
+            </a:solidFill>
+            <a:tailEnd type="triangle"/>
+          </a:ln>
+        </p:spPr>
+        <p:style>
+          <a:lnRef idx="1">
+            <a:schemeClr val="accent1"/>
+          </a:lnRef>
+          <a:fillRef idx="0">
+            <a:schemeClr val="accent1"/>
+          </a:fillRef>
+          <a:effectRef idx="0">
+            <a:schemeClr val="accent1"/>
+          </a:effectRef>
+          <a:fontRef idx="minor">
+            <a:schemeClr val="tx1"/>
+          </a:fontRef>
+        </p:style>
+      </p:cxnSp>
+      <p:cxnSp>
+        <p:nvCxnSpPr>
+          <p:cNvPr id="8" name="直線單箭頭接點 7">
+            <a:extLst>
+              <a:ext uri="{FF2B5EF4-FFF2-40B4-BE49-F238E27FC236}">
+                <a16:creationId xmlns:a16="http://schemas.microsoft.com/office/drawing/2014/main" id="{A43E5657-DB10-F6AE-CFC3-017685DF86AD}"/>
+              </a:ext>
+            </a:extLst>
+          </p:cNvPr>
+          <p:cNvCxnSpPr>
+            <a:cxnSpLocks/>
+            <a:stCxn id="5" idx="2"/>
+            <a:endCxn id="6" idx="0"/>
+          </p:cNvCxnSpPr>
+          <p:nvPr/>
+        </p:nvCxnSpPr>
+        <p:spPr>
+          <a:xfrm>
+            <a:off x="899593" y="3212976"/>
+            <a:ext cx="0" cy="368156"/>
+          </a:xfrm>
+          <a:prstGeom prst="straightConnector1">
+            <a:avLst/>
+          </a:prstGeom>
+          <a:ln w="25400">
+            <a:solidFill>
+              <a:schemeClr val="accent1">
+                <a:lumMod val="75000"/>
+              </a:schemeClr>
+            </a:solidFill>
+            <a:tailEnd type="triangle"/>
+          </a:ln>
+        </p:spPr>
+        <p:style>
+          <a:lnRef idx="1">
+            <a:schemeClr val="accent1"/>
+          </a:lnRef>
+          <a:fillRef idx="0">
+            <a:schemeClr val="accent1"/>
+          </a:fillRef>
+          <a:effectRef idx="0">
+            <a:schemeClr val="accent1"/>
+          </a:effectRef>
+          <a:fontRef idx="minor">
+            <a:schemeClr val="tx1"/>
+          </a:fontRef>
+        </p:style>
+      </p:cxnSp>
+      <p:sp>
+        <p:nvSpPr>
+          <p:cNvPr id="9" name="矩形 8">
+            <a:extLst>
+              <a:ext uri="{FF2B5EF4-FFF2-40B4-BE49-F238E27FC236}">
+                <a16:creationId xmlns:a16="http://schemas.microsoft.com/office/drawing/2014/main" id="{52AA70ED-0E51-1FA1-7862-0F92488BFF5B}"/>
+              </a:ext>
+            </a:extLst>
+          </p:cNvPr>
+          <p:cNvSpPr/>
+          <p:nvPr/>
+        </p:nvSpPr>
+        <p:spPr>
+          <a:xfrm>
+            <a:off x="1331641" y="2252744"/>
+            <a:ext cx="1509774" cy="960231"/>
+          </a:xfrm>
+          <a:prstGeom prst="rect">
+            <a:avLst/>
+          </a:prstGeom>
+          <a:solidFill>
+            <a:schemeClr val="accent3">
+              <a:lumMod val="20000"/>
+              <a:lumOff val="80000"/>
+            </a:schemeClr>
+          </a:solidFill>
+          <a:ln w="38100">
+            <a:solidFill>
+              <a:schemeClr val="accent3">
+                <a:lumMod val="75000"/>
+              </a:schemeClr>
+            </a:solidFill>
+          </a:ln>
+        </p:spPr>
+        <p:style>
+          <a:lnRef idx="2">
+            <a:schemeClr val="accent1">
+              <a:shade val="15000"/>
+            </a:schemeClr>
+          </a:lnRef>
+          <a:fillRef idx="1">
+            <a:schemeClr val="accent1"/>
+          </a:fillRef>
+          <a:effectRef idx="0">
+            <a:schemeClr val="accent1"/>
+          </a:effectRef>
+          <a:fontRef idx="minor">
+            <a:schemeClr val="lt1"/>
+          </a:fontRef>
+        </p:style>
+        <p:txBody>
+          <a:bodyPr wrap="none" lIns="36000" tIns="0" rIns="0" bIns="0" rtlCol="0" anchor="ctr" anchorCtr="0"/>
+          <a:lstStyle/>
+          <a:p>
+            <a:pPr>
+              <a:lnSpc>
+                <a:spcPts val="1200"/>
+              </a:lnSpc>
+            </a:pPr>
+            <a:r>
+              <a:rPr lang="zh-TW" altLang="en-US" sz="1200" dirty="0">
+                <a:solidFill>
+                  <a:schemeClr val="accent3">
+                    <a:lumMod val="50000"/>
+                  </a:schemeClr>
+                </a:solidFill>
+                <a:latin typeface="微軟正黑體" panose="020B0604030504040204" pitchFamily="34" charset="-120"/>
+                <a:ea typeface="微軟正黑體" panose="020B0604030504040204" pitchFamily="34" charset="-120"/>
+              </a:rPr>
+              <a:t>目標</a:t>
+            </a:r>
+            <a:r>
+              <a:rPr lang="en-US" altLang="zh-TW" sz="1200" dirty="0">
+                <a:solidFill>
+                  <a:schemeClr val="accent3">
+                    <a:lumMod val="50000"/>
+                  </a:schemeClr>
+                </a:solidFill>
+                <a:latin typeface="微軟正黑體" panose="020B0604030504040204" pitchFamily="34" charset="-120"/>
+                <a:ea typeface="微軟正黑體" panose="020B0604030504040204" pitchFamily="34" charset="-120"/>
+              </a:rPr>
+              <a:t>:</a:t>
+            </a:r>
+            <a:r>
+              <a:rPr lang="zh-TW" altLang="en-US" sz="1200" dirty="0">
+                <a:solidFill>
+                  <a:schemeClr val="accent3">
+                    <a:lumMod val="50000"/>
+                  </a:schemeClr>
+                </a:solidFill>
+                <a:latin typeface="微軟正黑體" panose="020B0604030504040204" pitchFamily="34" charset="-120"/>
+                <a:ea typeface="微軟正黑體" panose="020B0604030504040204" pitchFamily="34" charset="-120"/>
+              </a:rPr>
+              <a:t> 基因分型</a:t>
+            </a:r>
+            <a:endParaRPr lang="en-US" altLang="zh-TW" sz="1200" dirty="0">
+              <a:solidFill>
+                <a:schemeClr val="accent3">
+                  <a:lumMod val="50000"/>
+                </a:schemeClr>
+              </a:solidFill>
+              <a:latin typeface="微軟正黑體" panose="020B0604030504040204" pitchFamily="34" charset="-120"/>
+              <a:ea typeface="微軟正黑體" panose="020B0604030504040204" pitchFamily="34" charset="-120"/>
+            </a:endParaRPr>
+          </a:p>
+          <a:p>
+            <a:pPr>
+              <a:lnSpc>
+                <a:spcPts val="1200"/>
+              </a:lnSpc>
+            </a:pPr>
+            <a:endParaRPr lang="en-US" altLang="zh-TW" sz="1200" dirty="0">
+              <a:solidFill>
+                <a:schemeClr val="accent3">
+                  <a:lumMod val="50000"/>
+                </a:schemeClr>
+              </a:solidFill>
+              <a:latin typeface="微軟正黑體" panose="020B0604030504040204" pitchFamily="34" charset="-120"/>
+              <a:ea typeface="微軟正黑體" panose="020B0604030504040204" pitchFamily="34" charset="-120"/>
+            </a:endParaRPr>
+          </a:p>
+          <a:p>
+            <a:pPr>
+              <a:lnSpc>
+                <a:spcPts val="1200"/>
+              </a:lnSpc>
+            </a:pPr>
+            <a:r>
+              <a:rPr lang="zh-TW" altLang="en-US" sz="1200" dirty="0">
+                <a:solidFill>
+                  <a:schemeClr val="accent3">
+                    <a:lumMod val="50000"/>
+                  </a:schemeClr>
+                </a:solidFill>
+                <a:latin typeface="微軟正黑體" panose="020B0604030504040204" pitchFamily="34" charset="-120"/>
+                <a:ea typeface="微軟正黑體" panose="020B0604030504040204" pitchFamily="34" charset="-120"/>
+              </a:rPr>
+              <a:t>微調</a:t>
+            </a:r>
+            <a:r>
+              <a:rPr lang="en-US" altLang="zh-TW" sz="1200" dirty="0">
+                <a:solidFill>
+                  <a:schemeClr val="accent3">
+                    <a:lumMod val="50000"/>
+                  </a:schemeClr>
+                </a:solidFill>
+                <a:latin typeface="微軟正黑體" panose="020B0604030504040204" pitchFamily="34" charset="-120"/>
+                <a:ea typeface="微軟正黑體" panose="020B0604030504040204" pitchFamily="34" charset="-120"/>
+              </a:rPr>
+              <a:t>:</a:t>
+            </a:r>
+            <a:r>
+              <a:rPr lang="zh-TW" altLang="en-US" sz="1200" dirty="0">
+                <a:solidFill>
+                  <a:schemeClr val="accent3">
+                    <a:lumMod val="50000"/>
+                  </a:schemeClr>
+                </a:solidFill>
+                <a:latin typeface="微軟正黑體" panose="020B0604030504040204" pitchFamily="34" charset="-120"/>
+                <a:ea typeface="微軟正黑體" panose="020B0604030504040204" pitchFamily="34" charset="-120"/>
+              </a:rPr>
+              <a:t> 資料來源</a:t>
+            </a:r>
+            <a:endParaRPr lang="en-US" altLang="zh-TW" sz="1200" dirty="0">
+              <a:solidFill>
+                <a:schemeClr val="accent3">
+                  <a:lumMod val="50000"/>
+                </a:schemeClr>
+              </a:solidFill>
+              <a:latin typeface="微軟正黑體" panose="020B0604030504040204" pitchFamily="34" charset="-120"/>
+              <a:ea typeface="微軟正黑體" panose="020B0604030504040204" pitchFamily="34" charset="-120"/>
+            </a:endParaRPr>
+          </a:p>
+        </p:txBody>
+      </p:sp>
+      <p:sp>
+        <p:nvSpPr>
+          <p:cNvPr id="11" name="矩形 10">
+            <a:extLst>
+              <a:ext uri="{FF2B5EF4-FFF2-40B4-BE49-F238E27FC236}">
+                <a16:creationId xmlns:a16="http://schemas.microsoft.com/office/drawing/2014/main" id="{173404AA-552F-AAA0-CDF0-7E739E907927}"/>
+              </a:ext>
+            </a:extLst>
+          </p:cNvPr>
+          <p:cNvSpPr/>
+          <p:nvPr/>
+        </p:nvSpPr>
+        <p:spPr>
+          <a:xfrm>
+            <a:off x="1331640" y="1304646"/>
+            <a:ext cx="1509777" cy="612186"/>
+          </a:xfrm>
+          <a:prstGeom prst="rect">
+            <a:avLst/>
+          </a:prstGeom>
+          <a:solidFill>
+            <a:schemeClr val="accent3">
+              <a:lumMod val="20000"/>
+              <a:lumOff val="80000"/>
+            </a:schemeClr>
+          </a:solidFill>
+          <a:ln w="38100">
+            <a:solidFill>
+              <a:schemeClr val="accent3">
+                <a:lumMod val="75000"/>
+              </a:schemeClr>
+            </a:solidFill>
+          </a:ln>
+        </p:spPr>
+        <p:style>
+          <a:lnRef idx="2">
+            <a:schemeClr val="accent1">
+              <a:shade val="15000"/>
+            </a:schemeClr>
+          </a:lnRef>
+          <a:fillRef idx="1">
+            <a:schemeClr val="accent1"/>
+          </a:fillRef>
+          <a:effectRef idx="0">
+            <a:schemeClr val="accent1"/>
+          </a:effectRef>
+          <a:fontRef idx="minor">
+            <a:schemeClr val="lt1"/>
+          </a:fontRef>
+        </p:style>
+        <p:txBody>
+          <a:bodyPr wrap="none" lIns="36000" tIns="0" rIns="0" bIns="0" rtlCol="0" anchor="ctr" anchorCtr="0"/>
+          <a:lstStyle/>
+          <a:p>
+            <a:pPr>
+              <a:lnSpc>
+                <a:spcPts val="1200"/>
+              </a:lnSpc>
+            </a:pPr>
+            <a:r>
+              <a:rPr lang="zh-TW" altLang="en-US" sz="1000" dirty="0">
+                <a:solidFill>
+                  <a:schemeClr val="accent3">
+                    <a:lumMod val="50000"/>
+                  </a:schemeClr>
+                </a:solidFill>
+                <a:latin typeface="微軟正黑體" panose="020B0604030504040204" pitchFamily="34" charset="-120"/>
+                <a:ea typeface="微軟正黑體" panose="020B0604030504040204" pitchFamily="34" charset="-120"/>
+              </a:rPr>
+              <a:t>* </a:t>
+            </a:r>
+            <a:r>
+              <a:rPr lang="en-US" altLang="zh-TW" sz="1000" dirty="0">
+                <a:solidFill>
+                  <a:schemeClr val="accent3">
+                    <a:lumMod val="50000"/>
+                  </a:schemeClr>
+                </a:solidFill>
+                <a:latin typeface="微軟正黑體" panose="020B0604030504040204" pitchFamily="34" charset="-120"/>
+                <a:ea typeface="微軟正黑體" panose="020B0604030504040204" pitchFamily="34" charset="-120"/>
+              </a:rPr>
+              <a:t>BIO-AI</a:t>
+            </a:r>
+            <a:r>
+              <a:rPr lang="zh-TW" altLang="en-US" sz="1000" dirty="0">
+                <a:solidFill>
+                  <a:schemeClr val="accent3">
+                    <a:lumMod val="50000"/>
+                  </a:schemeClr>
+                </a:solidFill>
+                <a:latin typeface="微軟正黑體" panose="020B0604030504040204" pitchFamily="34" charset="-120"/>
+                <a:ea typeface="微軟正黑體" panose="020B0604030504040204" pitchFamily="34" charset="-120"/>
+              </a:rPr>
+              <a:t> </a:t>
+            </a:r>
+            <a:r>
+              <a:rPr lang="en-US" altLang="zh-TW" sz="1000" dirty="0">
+                <a:solidFill>
+                  <a:schemeClr val="accent3">
+                    <a:lumMod val="50000"/>
+                  </a:schemeClr>
+                </a:solidFill>
+                <a:latin typeface="微軟正黑體" panose="020B0604030504040204" pitchFamily="34" charset="-120"/>
+                <a:ea typeface="微軟正黑體" panose="020B0604030504040204" pitchFamily="34" charset="-120"/>
+              </a:rPr>
+              <a:t>Agent</a:t>
+            </a:r>
+            <a:r>
+              <a:rPr lang="zh-TW" altLang="en-US" sz="1000" dirty="0">
+                <a:solidFill>
+                  <a:schemeClr val="accent3">
+                    <a:lumMod val="50000"/>
+                  </a:schemeClr>
+                </a:solidFill>
+                <a:latin typeface="微軟正黑體" panose="020B0604030504040204" pitchFamily="34" charset="-120"/>
+                <a:ea typeface="微軟正黑體" panose="020B0604030504040204" pitchFamily="34" charset="-120"/>
+              </a:rPr>
+              <a:t>智能體</a:t>
+            </a:r>
+            <a:endParaRPr lang="en-US" altLang="zh-TW" sz="1000" dirty="0">
+              <a:solidFill>
+                <a:schemeClr val="accent3">
+                  <a:lumMod val="50000"/>
+                </a:schemeClr>
+              </a:solidFill>
+              <a:latin typeface="微軟正黑體" panose="020B0604030504040204" pitchFamily="34" charset="-120"/>
+              <a:ea typeface="微軟正黑體" panose="020B0604030504040204" pitchFamily="34" charset="-120"/>
+            </a:endParaRPr>
+          </a:p>
+          <a:p>
+            <a:pPr>
+              <a:lnSpc>
+                <a:spcPts val="1200"/>
+              </a:lnSpc>
+            </a:pPr>
+            <a:r>
+              <a:rPr lang="zh-TW" altLang="en-US" sz="1000" dirty="0">
+                <a:solidFill>
+                  <a:schemeClr val="accent3">
+                    <a:lumMod val="50000"/>
+                  </a:schemeClr>
+                </a:solidFill>
+                <a:latin typeface="微軟正黑體" panose="020B0604030504040204" pitchFamily="34" charset="-120"/>
+                <a:ea typeface="微軟正黑體" panose="020B0604030504040204" pitchFamily="34" charset="-120"/>
+              </a:rPr>
+              <a:t>* 基因分型對醫學的功用</a:t>
+            </a:r>
+            <a:endParaRPr lang="en-US" altLang="zh-TW" sz="1000" dirty="0">
+              <a:solidFill>
+                <a:schemeClr val="accent3">
+                  <a:lumMod val="50000"/>
+                </a:schemeClr>
+              </a:solidFill>
+              <a:latin typeface="微軟正黑體" panose="020B0604030504040204" pitchFamily="34" charset="-120"/>
+              <a:ea typeface="微軟正黑體" panose="020B0604030504040204" pitchFamily="34" charset="-120"/>
+            </a:endParaRPr>
+          </a:p>
+        </p:txBody>
+      </p:sp>
+    </p:spTree>
+    <p:extLst>
+      <p:ext uri="{BB962C8B-B14F-4D97-AF65-F5344CB8AC3E}">
+        <p14:creationId xmlns:p14="http://schemas.microsoft.com/office/powerpoint/2010/main" val="450648465"/>
+      </p:ext>
+    </p:extLst>
+  </p:cSld>
+  <p:clrMapOvr>
+    <a:masterClrMapping/>
+  </p:clrMapOvr>
+  <mc:AlternateContent xmlns:mc="http://schemas.openxmlformats.org/markup-compatibility/2006" xmlns:p14="http://schemas.microsoft.com/office/powerpoint/2010/main">
+    <mc:Choice Requires="p14">
+      <p:transition p14:dur="10" advClick="0"/>
+    </mc:Choice>
+    <mc:Fallback xmlns="">
+      <p:transition advClick="0"/>
+    </mc:Fallback>
+  </mc:AlternateContent>
+</p:sld>
+</file>
+
+<file path=ppt/slides/slide3.xml><?xml version="1.0" encoding="utf-8"?>
+<p:sld xmlns:a="http://schemas.openxmlformats.org/drawingml/2006/main" xmlns:r="http://schemas.openxmlformats.org/officeDocument/2006/relationships" xmlns:p="http://schemas.openxmlformats.org/presentationml/2006/main">
+  <p:cSld>
+    <p:spTree>
+      <p:nvGrpSpPr>
         <p:cNvPr id="1" name=""/>
         <p:cNvGrpSpPr/>
         <p:nvPr/>
@@ -1721,307 +2948,120 @@
       </p:grpSpPr>
       <p:sp>
         <p:nvSpPr>
-          <p:cNvPr id="3" name="文字方塊 2">
+          <p:cNvPr id="37" name="矩形 36">
             <a:extLst>
               <a:ext uri="{FF2B5EF4-FFF2-40B4-BE49-F238E27FC236}">
-                <a16:creationId xmlns:a16="http://schemas.microsoft.com/office/drawing/2014/main" id="{EB19A21F-439B-649C-1202-64BBA3D06DB7}"/>
+                <a16:creationId xmlns:a16="http://schemas.microsoft.com/office/drawing/2014/main" id="{933EB4AF-4853-9400-B2B9-C3FC20DF31C7}"/>
               </a:ext>
             </a:extLst>
           </p:cNvPr>
-          <p:cNvSpPr txBox="1"/>
+          <p:cNvSpPr/>
           <p:nvPr/>
         </p:nvSpPr>
         <p:spPr>
           <a:xfrm>
-            <a:off x="251520" y="2852936"/>
-            <a:ext cx="8640960" cy="3285515"/>
+            <a:off x="4826476" y="1790611"/>
+            <a:ext cx="3033034" cy="1185267"/>
           </a:xfrm>
           <a:prstGeom prst="rect">
             <a:avLst/>
           </a:prstGeom>
           <a:noFill/>
+          <a:ln w="38100">
+            <a:solidFill>
+              <a:schemeClr val="tx2">
+                <a:lumMod val="20000"/>
+                <a:lumOff val="80000"/>
+              </a:schemeClr>
+            </a:solidFill>
+          </a:ln>
         </p:spPr>
+        <p:style>
+          <a:lnRef idx="2">
+            <a:schemeClr val="accent1">
+              <a:shade val="15000"/>
+            </a:schemeClr>
+          </a:lnRef>
+          <a:fillRef idx="1">
+            <a:schemeClr val="accent1"/>
+          </a:fillRef>
+          <a:effectRef idx="0">
+            <a:schemeClr val="accent1"/>
+          </a:effectRef>
+          <a:fontRef idx="minor">
+            <a:schemeClr val="lt1"/>
+          </a:fontRef>
+        </p:style>
         <p:txBody>
-          <a:bodyPr wrap="square">
-            <a:spAutoFit/>
-          </a:bodyPr>
+          <a:bodyPr wrap="none" lIns="36000" tIns="0" rIns="0" bIns="0" rtlCol="0" anchor="ctr" anchorCtr="0"/>
           <a:lstStyle/>
           <a:p>
-            <a:pPr marL="0" marR="0">
-              <a:spcBef>
-                <a:spcPts val="1800"/>
-              </a:spcBef>
-              <a:spcAft>
-                <a:spcPts val="900"/>
-              </a:spcAft>
-              <a:buNone/>
+            <a:pPr>
+              <a:lnSpc>
+                <a:spcPts val="1600"/>
+              </a:lnSpc>
             </a:pPr>
             <a:r>
-              <a:rPr lang="zh-TW" altLang="zh-TW" sz="1000" b="1" u="none" strike="noStrike" dirty="0">
-                <a:effectLst/>
-                <a:latin typeface="微軟正黑體" panose="020B0604030504040204" pitchFamily="34" charset="-120"/>
-                <a:ea typeface="微軟正黑體" panose="020B0604030504040204" pitchFamily="34" charset="-120"/>
-              </a:rPr>
-              <a:t>STAgent 的四大核心運作機制</a:t>
-            </a:r>
-          </a:p>
-          <a:p>
-            <a:pPr marL="0" marR="0">
-              <a:spcBef>
-                <a:spcPts val="900"/>
-              </a:spcBef>
-              <a:spcAft>
-                <a:spcPts val="1200"/>
-              </a:spcAft>
-              <a:buNone/>
+              <a:rPr lang="en-US" altLang="zh-TW" sz="1200" dirty="0">
+                <a:solidFill>
+                  <a:schemeClr val="tx2"/>
+                </a:solidFill>
+                <a:latin typeface="ADLaM Display" panose="02010000000000000000" pitchFamily="2" charset="0"/>
+                <a:ea typeface="ADLaM Display" panose="02010000000000000000" pitchFamily="2" charset="0"/>
+                <a:cs typeface="ADLaM Display" panose="02010000000000000000" pitchFamily="2" charset="0"/>
+              </a:rPr>
+              <a:t>Call Function</a:t>
+            </a:r>
+          </a:p>
+          <a:p>
+            <a:pPr>
+              <a:lnSpc>
+                <a:spcPts val="1600"/>
+              </a:lnSpc>
             </a:pPr>
             <a:r>
-              <a:rPr lang="zh-TW" altLang="zh-TW" sz="1000" b="0" u="none" strike="noStrike" dirty="0">
-                <a:effectLst/>
-                <a:latin typeface="微軟正黑體" panose="020B0604030504040204" pitchFamily="34" charset="-120"/>
-                <a:ea typeface="微軟正黑體" panose="020B0604030504040204" pitchFamily="34" charset="-120"/>
-              </a:rPr>
-              <a:t>STAgent 之所以強大，在於它不是一個單純的聊天機器人，而是一個具備「眼、腦、手、智庫」的完整科學助手：</a:t>
-            </a:r>
-          </a:p>
-          <a:p>
-            <a:pPr marL="0" marR="0">
-              <a:spcBef>
-                <a:spcPts val="900"/>
-              </a:spcBef>
-              <a:spcAft>
-                <a:spcPts val="900"/>
-              </a:spcAft>
-              <a:buFont typeface="+mj-lt"/>
-              <a:buAutoNum type="arabicPeriod"/>
+              <a:rPr lang="en-US" altLang="zh-TW" sz="1200" dirty="0">
+                <a:solidFill>
+                  <a:schemeClr val="tx2"/>
+                </a:solidFill>
+                <a:ea typeface="ADLaM Display" panose="02010000000000000000" pitchFamily="2" charset="0"/>
+                <a:cs typeface="ADLaM Display" panose="02010000000000000000" pitchFamily="2" charset="0"/>
+              </a:rPr>
+              <a:t>* RegulomeDB (Stanford University)</a:t>
+            </a:r>
+          </a:p>
+          <a:p>
+            <a:pPr>
+              <a:lnSpc>
+                <a:spcPts val="1600"/>
+              </a:lnSpc>
             </a:pPr>
             <a:r>
-              <a:rPr lang="zh-TW" altLang="zh-TW" sz="1000" b="1" u="none" strike="noStrike" dirty="0">
-                <a:effectLst/>
-                <a:latin typeface="微軟正黑體" panose="020B0604030504040204" pitchFamily="34" charset="-120"/>
-                <a:ea typeface="微軟正黑體" panose="020B0604030504040204" pitchFamily="34" charset="-120"/>
-              </a:rPr>
-              <a:t>視覺推理（眼 - Visual Reasoning）：</a:t>
-            </a:r>
-            <a:br>
-              <a:rPr lang="zh-TW" altLang="zh-TW" sz="1000" b="0" u="none" strike="noStrike" dirty="0">
-                <a:effectLst/>
-                <a:latin typeface="微軟正黑體" panose="020B0604030504040204" pitchFamily="34" charset="-120"/>
-                <a:ea typeface="微軟正黑體" panose="020B0604030504040204" pitchFamily="34" charset="-120"/>
-              </a:rPr>
-            </a:br>
-            <a:r>
-              <a:rPr lang="zh-TW" altLang="zh-TW" sz="1000" b="0" u="none" strike="noStrike" dirty="0">
-                <a:effectLst/>
-                <a:latin typeface="微軟正黑體" panose="020B0604030504040204" pitchFamily="34" charset="-120"/>
-                <a:ea typeface="微軟正黑體" panose="020B0604030504040204" pitchFamily="34" charset="-120"/>
-              </a:rPr>
-              <a:t>內建多模態視覺大模型（VLM），它能直接「看懂」空間聚類圖、高解析 H&amp;E 組織照片或細胞分布圖。它能自主識別出圖像中細胞的空間特徵（例如：早期細胞呈散落未組織狀，而後期會緊密聚集成群，重塑成熟的組織結構）。</a:t>
-            </a:r>
-          </a:p>
-          <a:p>
-            <a:pPr marL="0" marR="0">
-              <a:spcBef>
-                <a:spcPts val="900"/>
-              </a:spcBef>
-              <a:spcAft>
-                <a:spcPts val="900"/>
-              </a:spcAft>
-              <a:buFont typeface="+mj-lt"/>
-              <a:buAutoNum type="arabicPeriod"/>
+              <a:rPr lang="en-US" altLang="zh-TW" sz="1200" dirty="0">
+                <a:solidFill>
+                  <a:schemeClr val="tx2"/>
+                </a:solidFill>
+                <a:ea typeface="ADLaM Display" panose="02010000000000000000" pitchFamily="2" charset="0"/>
+                <a:cs typeface="ADLaM Display" panose="02010000000000000000" pitchFamily="2" charset="0"/>
+              </a:rPr>
+              <a:t>* GTEx Portal (Single-Cell Gene Expression Data)</a:t>
+            </a:r>
+          </a:p>
+          <a:p>
+            <a:pPr>
+              <a:lnSpc>
+                <a:spcPts val="1600"/>
+              </a:lnSpc>
             </a:pPr>
             <a:r>
-              <a:rPr lang="zh-TW" altLang="zh-TW" sz="1000" b="1" u="none" strike="noStrike" dirty="0">
-                <a:effectLst/>
-                <a:latin typeface="微軟正黑體" panose="020B0604030504040204" pitchFamily="34" charset="-120"/>
-                <a:ea typeface="微軟正黑體" panose="020B0604030504040204" pitchFamily="34" charset="-120"/>
-              </a:rPr>
-              <a:t>動態程式碼生成與工具呼叫（手 - Code Generation &amp; Tool-Use）：</a:t>
-            </a:r>
-            <a:br>
-              <a:rPr lang="zh-TW" altLang="zh-TW" sz="1000" b="0" u="none" strike="noStrike" dirty="0">
-                <a:effectLst/>
-                <a:latin typeface="微軟正黑體" panose="020B0604030504040204" pitchFamily="34" charset="-120"/>
-                <a:ea typeface="微軟正黑體" panose="020B0604030504040204" pitchFamily="34" charset="-120"/>
-              </a:rPr>
-            </a:br>
-            <a:r>
-              <a:rPr lang="zh-TW" altLang="zh-TW" sz="1000" b="0" u="none" strike="noStrike" dirty="0">
-                <a:effectLst/>
-                <a:latin typeface="微軟正黑體" panose="020B0604030504040204" pitchFamily="34" charset="-120"/>
-                <a:ea typeface="微軟正黑體" panose="020B0604030504040204" pitchFamily="34" charset="-120"/>
-              </a:rPr>
-              <a:t>當面臨複雜的生物信息任務（如數據預處理、空間鄰近度計算或基因插補）時，它會</a:t>
-            </a:r>
-            <a:r>
-              <a:rPr lang="zh-TW" altLang="zh-TW" sz="1000" b="1" u="none" strike="noStrike" dirty="0">
-                <a:effectLst/>
-                <a:latin typeface="微軟正黑體" panose="020B0604030504040204" pitchFamily="34" charset="-120"/>
-                <a:ea typeface="微軟正黑體" panose="020B0604030504040204" pitchFamily="34" charset="-120"/>
-              </a:rPr>
-              <a:t>自主編寫 Python 程式碼</a:t>
-            </a:r>
-            <a:r>
-              <a:rPr lang="zh-TW" altLang="zh-TW" sz="1000" b="0" u="none" strike="noStrike" dirty="0">
-                <a:effectLst/>
-                <a:latin typeface="微軟正黑體" panose="020B0604030504040204" pitchFamily="34" charset="-120"/>
-                <a:ea typeface="微軟正黑體" panose="020B0604030504040204" pitchFamily="34" charset="-120"/>
-              </a:rPr>
-              <a:t>（調用 Scanpy、Squidpy、Tangram、STAligner 等專業生物資訊工具庫），直接在本機運行分析並產出圖表。 [</a:t>
-            </a:r>
-            <a:r>
-              <a:rPr lang="zh-TW" altLang="zh-TW" sz="1000" b="0" u="none" strike="noStrike" dirty="0">
-                <a:effectLst/>
-                <a:latin typeface="微軟正黑體" panose="020B0604030504040204" pitchFamily="34" charset="-120"/>
-                <a:ea typeface="微軟正黑體" panose="020B0604030504040204" pitchFamily="34" charset="-120"/>
-                <a:hlinkClick r:id="rId2"/>
-              </a:rPr>
-              <a:t>1</a:t>
-            </a:r>
-            <a:r>
-              <a:rPr lang="zh-TW" altLang="zh-TW" sz="1000" b="0" u="none" strike="noStrike" dirty="0">
-                <a:effectLst/>
-                <a:latin typeface="微軟正黑體" panose="020B0604030504040204" pitchFamily="34" charset="-120"/>
-                <a:ea typeface="微軟正黑體" panose="020B0604030504040204" pitchFamily="34" charset="-120"/>
-              </a:rPr>
-              <a:t>, </a:t>
-            </a:r>
-            <a:r>
-              <a:rPr lang="zh-TW" altLang="zh-TW" sz="1000" b="0" u="none" strike="noStrike" dirty="0">
-                <a:effectLst/>
-                <a:latin typeface="微軟正黑體" panose="020B0604030504040204" pitchFamily="34" charset="-120"/>
-                <a:ea typeface="微軟正黑體" panose="020B0604030504040204" pitchFamily="34" charset="-120"/>
-                <a:hlinkClick r:id="rId3"/>
-              </a:rPr>
-              <a:t>2</a:t>
-            </a:r>
-            <a:r>
-              <a:rPr lang="zh-TW" altLang="zh-TW" sz="1000" b="0" u="none" strike="noStrike" dirty="0">
-                <a:effectLst/>
-                <a:latin typeface="微軟正黑體" panose="020B0604030504040204" pitchFamily="34" charset="-120"/>
-                <a:ea typeface="微軟正黑體" panose="020B0604030504040204" pitchFamily="34" charset="-120"/>
-              </a:rPr>
-              <a:t>]</a:t>
-            </a:r>
-          </a:p>
-          <a:p>
-            <a:pPr marL="0" marR="0">
-              <a:spcBef>
-                <a:spcPts val="900"/>
-              </a:spcBef>
-              <a:spcAft>
-                <a:spcPts val="900"/>
-              </a:spcAft>
-              <a:buFont typeface="+mj-lt"/>
-              <a:buAutoNum type="arabicPeriod"/>
-            </a:pPr>
-            <a:r>
-              <a:rPr lang="zh-TW" altLang="zh-TW" sz="1000" b="1" u="none" strike="noStrike" dirty="0">
-                <a:effectLst/>
-                <a:latin typeface="微軟正黑體" panose="020B0604030504040204" pitchFamily="34" charset="-120"/>
-                <a:ea typeface="微軟正黑體" panose="020B0604030504040204" pitchFamily="34" charset="-120"/>
-              </a:rPr>
-              <a:t>實時文獻檢索與知識對齊（智庫 - Literature Retrieval &amp; RAG）：</a:t>
-            </a:r>
-            <a:br>
-              <a:rPr lang="zh-TW" altLang="zh-TW" sz="1000" b="0" u="none" strike="noStrike" dirty="0">
-                <a:effectLst/>
-                <a:latin typeface="微軟正黑體" panose="020B0604030504040204" pitchFamily="34" charset="-120"/>
-                <a:ea typeface="微軟正黑體" panose="020B0604030504040204" pitchFamily="34" charset="-120"/>
-              </a:rPr>
-            </a:br>
-            <a:r>
-              <a:rPr lang="zh-TW" altLang="zh-TW" sz="1000" b="0" u="none" strike="noStrike" dirty="0">
-                <a:effectLst/>
-                <a:latin typeface="微軟正黑體" panose="020B0604030504040204" pitchFamily="34" charset="-120"/>
-                <a:ea typeface="微軟正黑體" panose="020B0604030504040204" pitchFamily="34" charset="-120"/>
-              </a:rPr>
-              <a:t>AI 發現某個空間特徵後，會動態連線至權威醫學資料庫，檢索同行評審（Peer-reviewed）的科學文獻。它能把實驗數據（如某個配體-受體的空間高度集中）與真實世界的醫學研究進行交叉比對，給出具備科學文獻支持的</a:t>
-            </a:r>
-            <a:r>
-              <a:rPr lang="zh-TW" altLang="zh-TW" sz="1000" b="1" u="none" strike="noStrike" dirty="0">
-                <a:effectLst/>
-                <a:latin typeface="微軟正黑體" panose="020B0604030504040204" pitchFamily="34" charset="-120"/>
-                <a:ea typeface="微軟正黑體" panose="020B0604030504040204" pitchFamily="34" charset="-120"/>
-              </a:rPr>
-              <a:t>機制性解釋</a:t>
-            </a:r>
-            <a:r>
-              <a:rPr lang="zh-TW" altLang="zh-TW" sz="1000" b="0" u="none" strike="noStrike" dirty="0">
-                <a:effectLst/>
-                <a:latin typeface="微軟正黑體" panose="020B0604030504040204" pitchFamily="34" charset="-120"/>
-                <a:ea typeface="微軟正黑體" panose="020B0604030504040204" pitchFamily="34" charset="-120"/>
-              </a:rPr>
-              <a:t>。 [</a:t>
-            </a:r>
-            <a:r>
-              <a:rPr lang="zh-TW" altLang="zh-TW" sz="1000" b="0" u="none" strike="noStrike" dirty="0">
-                <a:effectLst/>
-                <a:latin typeface="微軟正黑體" panose="020B0604030504040204" pitchFamily="34" charset="-120"/>
-                <a:ea typeface="微軟正黑體" panose="020B0604030504040204" pitchFamily="34" charset="-120"/>
-                <a:hlinkClick r:id="rId4"/>
-              </a:rPr>
-              <a:t>1</a:t>
-            </a:r>
-            <a:r>
-              <a:rPr lang="zh-TW" altLang="zh-TW" sz="1000" b="0" u="none" strike="noStrike" dirty="0">
-                <a:effectLst/>
-                <a:latin typeface="微軟正黑體" panose="020B0604030504040204" pitchFamily="34" charset="-120"/>
-                <a:ea typeface="微軟正黑體" panose="020B0604030504040204" pitchFamily="34" charset="-120"/>
-              </a:rPr>
-              <a:t>, </a:t>
-            </a:r>
-            <a:r>
-              <a:rPr lang="zh-TW" altLang="zh-TW" sz="1000" b="0" u="none" strike="noStrike" dirty="0">
-                <a:effectLst/>
-                <a:latin typeface="微軟正黑體" panose="020B0604030504040204" pitchFamily="34" charset="-120"/>
-                <a:ea typeface="微軟正黑體" panose="020B0604030504040204" pitchFamily="34" charset="-120"/>
-                <a:hlinkClick r:id="rId5"/>
-              </a:rPr>
-              <a:t>2</a:t>
-            </a:r>
-            <a:r>
-              <a:rPr lang="zh-TW" altLang="zh-TW" sz="1000" b="0" u="none" strike="noStrike" dirty="0">
-                <a:effectLst/>
-                <a:latin typeface="微軟正黑體" panose="020B0604030504040204" pitchFamily="34" charset="-120"/>
-                <a:ea typeface="微軟正黑體" panose="020B0604030504040204" pitchFamily="34" charset="-120"/>
-              </a:rPr>
-              <a:t>]</a:t>
-            </a:r>
-          </a:p>
-          <a:p>
-            <a:pPr marL="0" marR="0">
-              <a:spcBef>
-                <a:spcPts val="900"/>
-              </a:spcBef>
-              <a:spcAft>
-                <a:spcPts val="900"/>
-              </a:spcAft>
-              <a:buFont typeface="+mj-lt"/>
-              <a:buAutoNum type="arabicPeriod"/>
-            </a:pPr>
-            <a:r>
-              <a:rPr lang="zh-TW" altLang="zh-TW" sz="1000" b="1" u="none" strike="noStrike" dirty="0">
-                <a:effectLst/>
-                <a:latin typeface="微軟正黑體" panose="020B0604030504040204" pitchFamily="34" charset="-120"/>
-                <a:ea typeface="微軟正黑體" panose="020B0604030504040204" pitchFamily="34" charset="-120"/>
-              </a:rPr>
-              <a:t>端到端報告與決策生成（腦 - End-to-End Automation）：</a:t>
-            </a:r>
-            <a:br>
-              <a:rPr lang="zh-TW" altLang="zh-TW" sz="1000" b="0" u="none" strike="noStrike" dirty="0">
-                <a:effectLst/>
-                <a:latin typeface="微軟正黑體" panose="020B0604030504040204" pitchFamily="34" charset="-120"/>
-                <a:ea typeface="微軟正黑體" panose="020B0604030504040204" pitchFamily="34" charset="-120"/>
-              </a:rPr>
-            </a:br>
-            <a:r>
-              <a:rPr lang="zh-TW" altLang="zh-TW" sz="1000" b="0" u="none" strike="noStrike" dirty="0">
-                <a:effectLst/>
-                <a:latin typeface="微軟正黑體" panose="020B0604030504040204" pitchFamily="34" charset="-120"/>
-                <a:ea typeface="微軟正黑體" panose="020B0604030504040204" pitchFamily="34" charset="-120"/>
-              </a:rPr>
-              <a:t>最終，它會將上述的影像發現、數據分析圖表、文獻依據，整合提煉成一份具備高度可解釋性的完整科學或臨床診斷報告</a:t>
+              <a:rPr lang="en-US" altLang="zh-TW" sz="1200" dirty="0">
+                <a:solidFill>
+                  <a:schemeClr val="tx2"/>
+                </a:solidFill>
+                <a:ea typeface="ADLaM Display" panose="02010000000000000000" pitchFamily="2" charset="0"/>
+                <a:cs typeface="ADLaM Display" panose="02010000000000000000" pitchFamily="2" charset="0"/>
+              </a:rPr>
+              <a:t>* Ensembl Regulation (EBI/Sanger)</a:t>
             </a:r>
           </a:p>
         </p:txBody>
@@ -2069,7 +3109,7 @@
           </a:lstStyle>
           <a:p>
             <a:r>
-              <a:rPr lang="en-US" altLang="zh-TW" sz="2800">
+              <a:rPr lang="en-US" altLang="zh-TW" sz="2800" dirty="0">
                 <a:latin typeface="Noto Sans HK" panose="020B0200000000000000" pitchFamily="34" charset="-120"/>
                 <a:ea typeface="Noto Sans HK" panose="020B0200000000000000" pitchFamily="34" charset="-120"/>
                 <a:cs typeface="Aharoni" panose="020F0502020204030204" pitchFamily="2" charset="-79"/>
@@ -2077,12 +3117,6 @@
               </a:rPr>
               <a:t>Architecture</a:t>
             </a:r>
-            <a:endParaRPr lang="en-US" altLang="zh-TW" sz="2800" dirty="0">
-              <a:latin typeface="Noto Sans HK" panose="020B0200000000000000" pitchFamily="34" charset="-120"/>
-              <a:ea typeface="Noto Sans HK" panose="020B0200000000000000" pitchFamily="34" charset="-120"/>
-              <a:cs typeface="Aharoni" panose="020F0502020204030204" pitchFamily="2" charset="-79"/>
-              <a:sym typeface="Wingdings" panose="05000000000000000000" pitchFamily="2" charset="2"/>
-            </a:endParaRPr>
           </a:p>
           <a:p>
             <a:pPr marL="285750" indent="-285750">
@@ -2094,6 +3128,1572 @@
               <a:ea typeface="Noto Sans HK" panose="020B0200000000000000" pitchFamily="34" charset="-120"/>
               <a:cs typeface="Arial" panose="020B0604020202020204" pitchFamily="34" charset="0"/>
             </a:endParaRPr>
+          </a:p>
+        </p:txBody>
+      </p:sp>
+      <p:graphicFrame>
+        <p:nvGraphicFramePr>
+          <p:cNvPr id="2" name="表格 1">
+            <a:extLst>
+              <a:ext uri="{FF2B5EF4-FFF2-40B4-BE49-F238E27FC236}">
+                <a16:creationId xmlns:a16="http://schemas.microsoft.com/office/drawing/2014/main" id="{DB1F8FA5-669F-FAFF-FA6E-54EBC5D8B577}"/>
+              </a:ext>
+            </a:extLst>
+          </p:cNvPr>
+          <p:cNvGraphicFramePr>
+            <a:graphicFrameLocks noGrp="1"/>
+          </p:cNvGraphicFramePr>
+          <p:nvPr>
+            <p:extLst>
+              <p:ext uri="{D42A27DB-BD31-4B8C-83A1-F6EECF244321}">
+                <p14:modId xmlns:p14="http://schemas.microsoft.com/office/powerpoint/2010/main" val="545364047"/>
+              </p:ext>
+            </p:extLst>
+          </p:nvPr>
+        </p:nvGraphicFramePr>
+        <p:xfrm>
+          <a:off x="910206" y="1929586"/>
+          <a:ext cx="1432386" cy="1425017"/>
+        </p:xfrm>
+        <a:graphic>
+          <a:graphicData uri="http://schemas.openxmlformats.org/drawingml/2006/table">
+            <a:tbl>
+              <a:tblPr firstRow="1" bandRow="1">
+                <a:tableStyleId>{5C22544A-7EE6-4342-B048-85BDC9FD1C3A}</a:tableStyleId>
+              </a:tblPr>
+              <a:tblGrid>
+                <a:gridCol w="1432386">
+                  <a:extLst>
+                    <a:ext uri="{9D8B030D-6E8A-4147-A177-3AD203B41FA5}">
+                      <a16:colId xmlns:a16="http://schemas.microsoft.com/office/drawing/2014/main" val="2211145501"/>
+                    </a:ext>
+                  </a:extLst>
+                </a:gridCol>
+              </a:tblGrid>
+              <a:tr h="1208993">
+                <a:tc>
+                  <a:txBody>
+                    <a:bodyPr/>
+                    <a:lstStyle/>
+                    <a:p>
+                      <a:pPr marL="0" marR="0" lvl="0" indent="0" algn="r" defTabSz="914400" rtl="0" eaLnBrk="1" fontAlgn="auto" latinLnBrk="0" hangingPunct="1">
+                        <a:lnSpc>
+                          <a:spcPct val="100000"/>
+                        </a:lnSpc>
+                        <a:spcBef>
+                          <a:spcPts val="0"/>
+                        </a:spcBef>
+                        <a:spcAft>
+                          <a:spcPts val="0"/>
+                        </a:spcAft>
+                        <a:buClrTx/>
+                        <a:buSzTx/>
+                        <a:buFontTx/>
+                        <a:buNone/>
+                        <a:tabLst/>
+                        <a:defRPr/>
+                      </a:pPr>
+                      <a:endParaRPr kumimoji="0" lang="en-US" altLang="zh-TW" sz="1200" b="1" i="0" u="none" strike="noStrike" kern="1200" cap="none" spc="0" normalizeH="0" baseline="0" noProof="0" dirty="0">
+                        <a:ln>
+                          <a:noFill/>
+                        </a:ln>
+                        <a:solidFill>
+                          <a:schemeClr val="tx1"/>
+                        </a:solidFill>
+                        <a:effectLst/>
+                        <a:uLnTx/>
+                        <a:uFillTx/>
+                        <a:latin typeface="+mn-lt"/>
+                        <a:ea typeface="+mn-ea"/>
+                        <a:cs typeface="+mn-cs"/>
+                      </a:endParaRPr>
+                    </a:p>
+                    <a:p>
+                      <a:pPr marL="0" marR="0" lvl="0" indent="0" algn="r" defTabSz="914400" rtl="0" eaLnBrk="1" fontAlgn="auto" latinLnBrk="0" hangingPunct="1">
+                        <a:lnSpc>
+                          <a:spcPct val="100000"/>
+                        </a:lnSpc>
+                        <a:spcBef>
+                          <a:spcPts val="0"/>
+                        </a:spcBef>
+                        <a:spcAft>
+                          <a:spcPts val="0"/>
+                        </a:spcAft>
+                        <a:buClrTx/>
+                        <a:buSzTx/>
+                        <a:buFontTx/>
+                        <a:buNone/>
+                        <a:tabLst/>
+                        <a:defRPr/>
+                      </a:pPr>
+                      <a:r>
+                        <a:rPr kumimoji="0" lang="en-US" altLang="zh-TW" sz="1200" b="1" i="0" u="none" strike="noStrike" kern="1200" cap="none" spc="0" normalizeH="0" baseline="0" noProof="0" dirty="0">
+                          <a:ln>
+                            <a:noFill/>
+                          </a:ln>
+                          <a:solidFill>
+                            <a:schemeClr val="accent6">
+                              <a:lumMod val="75000"/>
+                            </a:schemeClr>
+                          </a:solidFill>
+                          <a:effectLst/>
+                          <a:uLnTx/>
+                          <a:uFillTx/>
+                          <a:latin typeface="+mn-lt"/>
+                          <a:ea typeface="+mn-ea"/>
+                          <a:cs typeface="+mn-cs"/>
+                        </a:rPr>
+                        <a:t>Fine-Tunning</a:t>
+                      </a:r>
+                    </a:p>
+                    <a:p>
+                      <a:pPr marL="0" marR="0" lvl="0" indent="0" algn="r" defTabSz="914400" rtl="0" eaLnBrk="1" fontAlgn="auto" latinLnBrk="0" hangingPunct="1">
+                        <a:lnSpc>
+                          <a:spcPct val="100000"/>
+                        </a:lnSpc>
+                        <a:spcBef>
+                          <a:spcPts val="0"/>
+                        </a:spcBef>
+                        <a:spcAft>
+                          <a:spcPts val="0"/>
+                        </a:spcAft>
+                        <a:buClrTx/>
+                        <a:buSzTx/>
+                        <a:buFontTx/>
+                        <a:buNone/>
+                        <a:tabLst/>
+                        <a:defRPr/>
+                      </a:pPr>
+                      <a:r>
+                        <a:rPr kumimoji="0" lang="en-US" altLang="zh-TW" sz="1200" b="1" i="0" u="none" strike="noStrike" kern="1200" cap="none" spc="0" normalizeH="0" baseline="0" noProof="0" dirty="0">
+                          <a:ln>
+                            <a:noFill/>
+                          </a:ln>
+                          <a:solidFill>
+                            <a:schemeClr val="accent6">
+                              <a:lumMod val="75000"/>
+                            </a:schemeClr>
+                          </a:solidFill>
+                          <a:effectLst/>
+                          <a:uLnTx/>
+                          <a:uFillTx/>
+                          <a:latin typeface="+mn-lt"/>
+                          <a:ea typeface="+mn-ea"/>
+                          <a:cs typeface="+mn-cs"/>
+                        </a:rPr>
+                        <a:t>Environment</a:t>
+                      </a:r>
+                    </a:p>
+                  </a:txBody>
+                  <a:tcPr marL="0" marR="72000" marT="0" marB="72000" anchor="b">
+                    <a:lnL w="28575" cap="flat" cmpd="sng" algn="ctr">
+                      <a:solidFill>
+                        <a:schemeClr val="bg1">
+                          <a:lumMod val="85000"/>
+                        </a:schemeClr>
+                      </a:solidFill>
+                      <a:prstDash val="solid"/>
+                      <a:round/>
+                      <a:headEnd type="none" w="med" len="med"/>
+                      <a:tailEnd type="none" w="med" len="med"/>
+                    </a:lnL>
+                    <a:lnR w="28575" cap="flat" cmpd="sng" algn="ctr">
+                      <a:solidFill>
+                        <a:schemeClr val="bg1">
+                          <a:lumMod val="85000"/>
+                        </a:schemeClr>
+                      </a:solidFill>
+                      <a:prstDash val="solid"/>
+                      <a:round/>
+                      <a:headEnd type="none" w="med" len="med"/>
+                      <a:tailEnd type="none" w="med" len="med"/>
+                    </a:lnR>
+                    <a:lnT w="28575" cap="flat" cmpd="sng" algn="ctr">
+                      <a:solidFill>
+                        <a:schemeClr val="bg1">
+                          <a:lumMod val="85000"/>
+                        </a:schemeClr>
+                      </a:solidFill>
+                      <a:prstDash val="solid"/>
+                      <a:round/>
+                      <a:headEnd type="none" w="med" len="med"/>
+                      <a:tailEnd type="none" w="med" len="med"/>
+                    </a:lnT>
+                    <a:lnB w="28575" cap="flat" cmpd="sng" algn="ctr">
+                      <a:solidFill>
+                        <a:schemeClr val="bg1">
+                          <a:lumMod val="85000"/>
+                        </a:schemeClr>
+                      </a:solidFill>
+                      <a:prstDash val="solid"/>
+                      <a:round/>
+                      <a:headEnd type="none" w="med" len="med"/>
+                      <a:tailEnd type="none" w="med" len="med"/>
+                    </a:lnB>
+                    <a:lnTlToBr w="12700" cmpd="sng">
+                      <a:noFill/>
+                      <a:prstDash val="solid"/>
+                    </a:lnTlToBr>
+                    <a:lnBlToTr w="12700" cmpd="sng">
+                      <a:noFill/>
+                      <a:prstDash val="solid"/>
+                    </a:lnBlToTr>
+                    <a:solidFill>
+                      <a:schemeClr val="accent6">
+                        <a:lumMod val="20000"/>
+                        <a:lumOff val="80000"/>
+                      </a:schemeClr>
+                    </a:solidFill>
+                  </a:tcPr>
+                </a:tc>
+                <a:extLst>
+                  <a:ext uri="{0D108BD9-81ED-4DB2-BD59-A6C34878D82A}">
+                    <a16:rowId xmlns:a16="http://schemas.microsoft.com/office/drawing/2014/main" val="128507786"/>
+                  </a:ext>
+                </a:extLst>
+              </a:tr>
+              <a:tr h="216024">
+                <a:tc>
+                  <a:txBody>
+                    <a:bodyPr/>
+                    <a:lstStyle/>
+                    <a:p>
+                      <a:pPr marL="0" marR="0" lvl="0" indent="0" algn="ctr" defTabSz="914400" rtl="0" eaLnBrk="1" fontAlgn="auto" latinLnBrk="0" hangingPunct="1">
+                        <a:lnSpc>
+                          <a:spcPct val="100000"/>
+                        </a:lnSpc>
+                        <a:spcBef>
+                          <a:spcPts val="0"/>
+                        </a:spcBef>
+                        <a:spcAft>
+                          <a:spcPts val="0"/>
+                        </a:spcAft>
+                        <a:buClrTx/>
+                        <a:buSzTx/>
+                        <a:buFontTx/>
+                        <a:buNone/>
+                        <a:tabLst/>
+                        <a:defRPr/>
+                      </a:pPr>
+                      <a:r>
+                        <a:rPr kumimoji="0" lang="en-US" altLang="zh-TW" sz="1200" b="1" i="0" u="none" strike="noStrike" kern="1200" cap="none" spc="0" normalizeH="0" baseline="0" noProof="0" dirty="0">
+                          <a:ln>
+                            <a:noFill/>
+                          </a:ln>
+                          <a:solidFill>
+                            <a:prstClr val="black"/>
+                          </a:solidFill>
+                          <a:effectLst/>
+                          <a:uLnTx/>
+                          <a:uFillTx/>
+                          <a:latin typeface="+mn-lt"/>
+                          <a:ea typeface="+mn-ea"/>
+                          <a:cs typeface="+mn-cs"/>
+                        </a:rPr>
+                        <a:t>GPU</a:t>
+                      </a:r>
+                    </a:p>
+                  </a:txBody>
+                  <a:tcPr marL="0" marR="0" marT="0" marB="0" anchor="ctr" anchorCtr="1">
+                    <a:lnL w="28575" cap="flat" cmpd="sng" algn="ctr">
+                      <a:solidFill>
+                        <a:schemeClr val="bg1">
+                          <a:lumMod val="85000"/>
+                        </a:schemeClr>
+                      </a:solidFill>
+                      <a:prstDash val="solid"/>
+                      <a:round/>
+                      <a:headEnd type="none" w="med" len="med"/>
+                      <a:tailEnd type="none" w="med" len="med"/>
+                    </a:lnL>
+                    <a:lnR w="28575" cap="flat" cmpd="sng" algn="ctr">
+                      <a:solidFill>
+                        <a:schemeClr val="bg1">
+                          <a:lumMod val="85000"/>
+                        </a:schemeClr>
+                      </a:solidFill>
+                      <a:prstDash val="solid"/>
+                      <a:round/>
+                      <a:headEnd type="none" w="med" len="med"/>
+                      <a:tailEnd type="none" w="med" len="med"/>
+                    </a:lnR>
+                    <a:lnT w="28575" cap="flat" cmpd="sng" algn="ctr">
+                      <a:solidFill>
+                        <a:schemeClr val="bg1">
+                          <a:lumMod val="85000"/>
+                        </a:schemeClr>
+                      </a:solidFill>
+                      <a:prstDash val="solid"/>
+                      <a:round/>
+                      <a:headEnd type="none" w="med" len="med"/>
+                      <a:tailEnd type="none" w="med" len="med"/>
+                    </a:lnT>
+                    <a:lnB w="28575" cap="flat" cmpd="sng" algn="ctr">
+                      <a:solidFill>
+                        <a:schemeClr val="bg1">
+                          <a:lumMod val="85000"/>
+                        </a:schemeClr>
+                      </a:solidFill>
+                      <a:prstDash val="solid"/>
+                      <a:round/>
+                      <a:headEnd type="none" w="med" len="med"/>
+                      <a:tailEnd type="none" w="med" len="med"/>
+                    </a:lnB>
+                    <a:lnTlToBr w="12700" cmpd="sng">
+                      <a:noFill/>
+                      <a:prstDash val="solid"/>
+                    </a:lnTlToBr>
+                    <a:lnBlToTr w="12700" cmpd="sng">
+                      <a:noFill/>
+                      <a:prstDash val="solid"/>
+                    </a:lnBlToTr>
+                    <a:solidFill>
+                      <a:schemeClr val="bg1">
+                        <a:lumMod val="95000"/>
+                        <a:alpha val="60000"/>
+                      </a:schemeClr>
+                    </a:solidFill>
+                  </a:tcPr>
+                </a:tc>
+                <a:extLst>
+                  <a:ext uri="{0D108BD9-81ED-4DB2-BD59-A6C34878D82A}">
+                    <a16:rowId xmlns:a16="http://schemas.microsoft.com/office/drawing/2014/main" val="1228831162"/>
+                  </a:ext>
+                </a:extLst>
+              </a:tr>
+            </a:tbl>
+          </a:graphicData>
+        </a:graphic>
+      </p:graphicFrame>
+      <p:graphicFrame>
+        <p:nvGraphicFramePr>
+          <p:cNvPr id="4" name="表格 3">
+            <a:extLst>
+              <a:ext uri="{FF2B5EF4-FFF2-40B4-BE49-F238E27FC236}">
+                <a16:creationId xmlns:a16="http://schemas.microsoft.com/office/drawing/2014/main" id="{40A6737D-2318-2B46-8BAC-55963F25B48D}"/>
+              </a:ext>
+            </a:extLst>
+          </p:cNvPr>
+          <p:cNvGraphicFramePr>
+            <a:graphicFrameLocks noGrp="1"/>
+          </p:cNvGraphicFramePr>
+          <p:nvPr>
+            <p:extLst>
+              <p:ext uri="{D42A27DB-BD31-4B8C-83A1-F6EECF244321}">
+                <p14:modId xmlns:p14="http://schemas.microsoft.com/office/powerpoint/2010/main" val="500752209"/>
+              </p:ext>
+            </p:extLst>
+          </p:nvPr>
+        </p:nvGraphicFramePr>
+        <p:xfrm>
+          <a:off x="3402369" y="1914444"/>
+          <a:ext cx="1217339" cy="1407015"/>
+        </p:xfrm>
+        <a:graphic>
+          <a:graphicData uri="http://schemas.openxmlformats.org/drawingml/2006/table">
+            <a:tbl>
+              <a:tblPr firstRow="1" bandRow="1">
+                <a:tableStyleId>{5C22544A-7EE6-4342-B048-85BDC9FD1C3A}</a:tableStyleId>
+              </a:tblPr>
+              <a:tblGrid>
+                <a:gridCol w="1217339">
+                  <a:extLst>
+                    <a:ext uri="{9D8B030D-6E8A-4147-A177-3AD203B41FA5}">
+                      <a16:colId xmlns:a16="http://schemas.microsoft.com/office/drawing/2014/main" val="2211145501"/>
+                    </a:ext>
+                  </a:extLst>
+                </a:gridCol>
+              </a:tblGrid>
+              <a:tr h="316769">
+                <a:tc>
+                  <a:txBody>
+                    <a:bodyPr/>
+                    <a:lstStyle/>
+                    <a:p>
+                      <a:pPr marL="0" marR="0" lvl="0" indent="0" algn="r" defTabSz="914400" rtl="0" eaLnBrk="1" fontAlgn="auto" latinLnBrk="0" hangingPunct="1">
+                        <a:lnSpc>
+                          <a:spcPct val="100000"/>
+                        </a:lnSpc>
+                        <a:spcBef>
+                          <a:spcPts val="0"/>
+                        </a:spcBef>
+                        <a:spcAft>
+                          <a:spcPts val="0"/>
+                        </a:spcAft>
+                        <a:buClrTx/>
+                        <a:buSzTx/>
+                        <a:buFontTx/>
+                        <a:buNone/>
+                        <a:tabLst/>
+                        <a:defRPr/>
+                      </a:pPr>
+                      <a:r>
+                        <a:rPr kumimoji="0" lang="en-US" altLang="zh-TW" sz="1200" b="1" i="0" u="none" strike="noStrike" kern="1200" cap="none" spc="0" normalizeH="0" baseline="0" noProof="0" dirty="0">
+                          <a:ln>
+                            <a:noFill/>
+                          </a:ln>
+                          <a:solidFill>
+                            <a:schemeClr val="tx1"/>
+                          </a:solidFill>
+                          <a:effectLst/>
+                          <a:uLnTx/>
+                          <a:uFillTx/>
+                          <a:latin typeface="+mn-lt"/>
+                          <a:ea typeface="+mn-ea"/>
+                          <a:cs typeface="+mn-cs"/>
+                        </a:rPr>
+                        <a:t> </a:t>
+                      </a:r>
+                    </a:p>
+                  </a:txBody>
+                  <a:tcPr marL="0" marR="72000" marT="0" marB="36000" anchor="b">
+                    <a:lnL w="28575" cap="flat" cmpd="sng" algn="ctr">
+                      <a:solidFill>
+                        <a:schemeClr val="accent1">
+                          <a:lumMod val="20000"/>
+                          <a:lumOff val="80000"/>
+                        </a:schemeClr>
+                      </a:solidFill>
+                      <a:prstDash val="solid"/>
+                      <a:round/>
+                      <a:headEnd type="none" w="med" len="med"/>
+                      <a:tailEnd type="none" w="med" len="med"/>
+                    </a:lnL>
+                    <a:lnR w="28575" cap="flat" cmpd="sng" algn="ctr">
+                      <a:solidFill>
+                        <a:schemeClr val="accent1">
+                          <a:lumMod val="20000"/>
+                          <a:lumOff val="80000"/>
+                        </a:schemeClr>
+                      </a:solidFill>
+                      <a:prstDash val="solid"/>
+                      <a:round/>
+                      <a:headEnd type="none" w="med" len="med"/>
+                      <a:tailEnd type="none" w="med" len="med"/>
+                    </a:lnR>
+                    <a:lnT w="28575" cap="flat" cmpd="sng" algn="ctr">
+                      <a:solidFill>
+                        <a:schemeClr val="accent1">
+                          <a:lumMod val="20000"/>
+                          <a:lumOff val="80000"/>
+                        </a:schemeClr>
+                      </a:solidFill>
+                      <a:prstDash val="solid"/>
+                      <a:round/>
+                      <a:headEnd type="none" w="med" len="med"/>
+                      <a:tailEnd type="none" w="med" len="med"/>
+                    </a:lnT>
+                    <a:lnB w="6350" cap="flat" cmpd="sng" algn="ctr">
+                      <a:solidFill>
+                        <a:schemeClr val="tx2">
+                          <a:lumMod val="40000"/>
+                          <a:lumOff val="60000"/>
+                        </a:schemeClr>
+                      </a:solidFill>
+                      <a:prstDash val="solid"/>
+                      <a:round/>
+                      <a:headEnd type="none" w="med" len="med"/>
+                      <a:tailEnd type="none" w="med" len="med"/>
+                    </a:lnB>
+                    <a:lnTlToBr w="12700" cmpd="sng">
+                      <a:noFill/>
+                      <a:prstDash val="solid"/>
+                    </a:lnTlToBr>
+                    <a:lnBlToTr w="12700" cmpd="sng">
+                      <a:noFill/>
+                      <a:prstDash val="solid"/>
+                    </a:lnBlToTr>
+                    <a:solidFill>
+                      <a:schemeClr val="bg1">
+                        <a:lumMod val="95000"/>
+                      </a:schemeClr>
+                    </a:solidFill>
+                  </a:tcPr>
+                </a:tc>
+                <a:extLst>
+                  <a:ext uri="{0D108BD9-81ED-4DB2-BD59-A6C34878D82A}">
+                    <a16:rowId xmlns:a16="http://schemas.microsoft.com/office/drawing/2014/main" val="128507786"/>
+                  </a:ext>
+                </a:extLst>
+              </a:tr>
+              <a:tr h="907366">
+                <a:tc>
+                  <a:txBody>
+                    <a:bodyPr/>
+                    <a:lstStyle/>
+                    <a:p>
+                      <a:pPr marL="0" marR="0" lvl="0" indent="0" algn="r" defTabSz="914400" rtl="0" eaLnBrk="1" fontAlgn="auto" latinLnBrk="0" hangingPunct="1">
+                        <a:lnSpc>
+                          <a:spcPct val="100000"/>
+                        </a:lnSpc>
+                        <a:spcBef>
+                          <a:spcPts val="0"/>
+                        </a:spcBef>
+                        <a:spcAft>
+                          <a:spcPts val="0"/>
+                        </a:spcAft>
+                        <a:buClrTx/>
+                        <a:buSzTx/>
+                        <a:buFontTx/>
+                        <a:buNone/>
+                        <a:tabLst/>
+                        <a:defRPr/>
+                      </a:pPr>
+                      <a:r>
+                        <a:rPr kumimoji="0" lang="en-US" altLang="zh-TW" sz="1200" b="1" i="0" u="none" strike="noStrike" kern="1200" cap="none" spc="0" normalizeH="0" baseline="0" noProof="0" dirty="0">
+                          <a:ln>
+                            <a:noFill/>
+                          </a:ln>
+                          <a:solidFill>
+                            <a:schemeClr val="accent1"/>
+                          </a:solidFill>
+                          <a:effectLst/>
+                          <a:uLnTx/>
+                          <a:uFillTx/>
+                          <a:latin typeface="+mn-lt"/>
+                          <a:ea typeface="+mn-ea"/>
+                          <a:cs typeface="+mn-cs"/>
+                        </a:rPr>
+                        <a:t>Inference</a:t>
+                      </a:r>
+                    </a:p>
+                    <a:p>
+                      <a:pPr marL="0" marR="0" lvl="0" indent="0" algn="r" defTabSz="914400" rtl="0" eaLnBrk="1" fontAlgn="auto" latinLnBrk="0" hangingPunct="1">
+                        <a:lnSpc>
+                          <a:spcPct val="100000"/>
+                        </a:lnSpc>
+                        <a:spcBef>
+                          <a:spcPts val="0"/>
+                        </a:spcBef>
+                        <a:spcAft>
+                          <a:spcPts val="0"/>
+                        </a:spcAft>
+                        <a:buClrTx/>
+                        <a:buSzTx/>
+                        <a:buFontTx/>
+                        <a:buNone/>
+                        <a:tabLst/>
+                        <a:defRPr/>
+                      </a:pPr>
+                      <a:r>
+                        <a:rPr kumimoji="0" lang="en-US" altLang="zh-TW" sz="1200" b="1" i="0" u="none" strike="noStrike" kern="1200" cap="none" spc="0" normalizeH="0" baseline="0" noProof="0" dirty="0">
+                          <a:ln>
+                            <a:noFill/>
+                          </a:ln>
+                          <a:solidFill>
+                            <a:schemeClr val="accent1"/>
+                          </a:solidFill>
+                          <a:effectLst/>
+                          <a:uLnTx/>
+                          <a:uFillTx/>
+                          <a:latin typeface="+mn-lt"/>
+                          <a:ea typeface="+mn-ea"/>
+                          <a:cs typeface="+mn-cs"/>
+                        </a:rPr>
+                        <a:t>Environment</a:t>
+                      </a:r>
+                    </a:p>
+                  </a:txBody>
+                  <a:tcPr marL="0" marR="72000" marT="0" marB="72000" anchor="b">
+                    <a:lnL w="28575" cap="flat" cmpd="sng" algn="ctr">
+                      <a:solidFill>
+                        <a:schemeClr val="accent1">
+                          <a:lumMod val="20000"/>
+                          <a:lumOff val="80000"/>
+                        </a:schemeClr>
+                      </a:solidFill>
+                      <a:prstDash val="solid"/>
+                      <a:round/>
+                      <a:headEnd type="none" w="med" len="med"/>
+                      <a:tailEnd type="none" w="med" len="med"/>
+                    </a:lnL>
+                    <a:lnR w="28575" cap="flat" cmpd="sng" algn="ctr">
+                      <a:solidFill>
+                        <a:schemeClr val="accent1">
+                          <a:lumMod val="20000"/>
+                          <a:lumOff val="80000"/>
+                        </a:schemeClr>
+                      </a:solidFill>
+                      <a:prstDash val="solid"/>
+                      <a:round/>
+                      <a:headEnd type="none" w="med" len="med"/>
+                      <a:tailEnd type="none" w="med" len="med"/>
+                    </a:lnR>
+                    <a:lnT w="6350" cap="flat" cmpd="sng" algn="ctr">
+                      <a:solidFill>
+                        <a:schemeClr val="tx2">
+                          <a:lumMod val="40000"/>
+                          <a:lumOff val="60000"/>
+                        </a:schemeClr>
+                      </a:solidFill>
+                      <a:prstDash val="solid"/>
+                      <a:round/>
+                      <a:headEnd type="none" w="med" len="med"/>
+                      <a:tailEnd type="none" w="med" len="med"/>
+                    </a:lnT>
+                    <a:lnB w="6350" cap="flat" cmpd="sng" algn="ctr">
+                      <a:solidFill>
+                        <a:schemeClr val="tx2">
+                          <a:lumMod val="40000"/>
+                          <a:lumOff val="60000"/>
+                        </a:schemeClr>
+                      </a:solidFill>
+                      <a:prstDash val="solid"/>
+                      <a:round/>
+                      <a:headEnd type="none" w="med" len="med"/>
+                      <a:tailEnd type="none" w="med" len="med"/>
+                    </a:lnB>
+                    <a:lnTlToBr w="12700" cmpd="sng">
+                      <a:noFill/>
+                      <a:prstDash val="solid"/>
+                    </a:lnTlToBr>
+                    <a:lnBlToTr w="12700" cmpd="sng">
+                      <a:noFill/>
+                      <a:prstDash val="solid"/>
+                    </a:lnBlToTr>
+                    <a:noFill/>
+                  </a:tcPr>
+                </a:tc>
+                <a:extLst>
+                  <a:ext uri="{0D108BD9-81ED-4DB2-BD59-A6C34878D82A}">
+                    <a16:rowId xmlns:a16="http://schemas.microsoft.com/office/drawing/2014/main" val="1638426438"/>
+                  </a:ext>
+                </a:extLst>
+              </a:tr>
+              <a:tr h="144016">
+                <a:tc>
+                  <a:txBody>
+                    <a:bodyPr/>
+                    <a:lstStyle/>
+                    <a:p>
+                      <a:pPr marL="0" marR="0" lvl="0" indent="0" algn="ctr" defTabSz="914400" rtl="0" eaLnBrk="1" fontAlgn="auto" latinLnBrk="0" hangingPunct="1">
+                        <a:lnSpc>
+                          <a:spcPct val="100000"/>
+                        </a:lnSpc>
+                        <a:spcBef>
+                          <a:spcPts val="0"/>
+                        </a:spcBef>
+                        <a:spcAft>
+                          <a:spcPts val="0"/>
+                        </a:spcAft>
+                        <a:buClrTx/>
+                        <a:buSzTx/>
+                        <a:buFontTx/>
+                        <a:buNone/>
+                        <a:tabLst/>
+                        <a:defRPr/>
+                      </a:pPr>
+                      <a:r>
+                        <a:rPr kumimoji="0" lang="en-US" altLang="zh-TW" sz="1200" b="1" i="0" u="none" strike="noStrike" kern="1200" cap="none" spc="0" normalizeH="0" baseline="0" noProof="0" dirty="0">
+                          <a:ln>
+                            <a:noFill/>
+                          </a:ln>
+                          <a:solidFill>
+                            <a:prstClr val="black"/>
+                          </a:solidFill>
+                          <a:effectLst/>
+                          <a:uLnTx/>
+                          <a:uFillTx/>
+                          <a:latin typeface="+mn-lt"/>
+                          <a:ea typeface="+mn-ea"/>
+                          <a:cs typeface="+mn-cs"/>
+                        </a:rPr>
+                        <a:t>PC/NB</a:t>
+                      </a:r>
+                    </a:p>
+                  </a:txBody>
+                  <a:tcPr marL="0" marR="0" marT="0" marB="0" anchor="ctr" anchorCtr="1">
+                    <a:lnL w="28575" cap="flat" cmpd="sng" algn="ctr">
+                      <a:solidFill>
+                        <a:schemeClr val="accent1">
+                          <a:lumMod val="20000"/>
+                          <a:lumOff val="80000"/>
+                        </a:schemeClr>
+                      </a:solidFill>
+                      <a:prstDash val="solid"/>
+                      <a:round/>
+                      <a:headEnd type="none" w="med" len="med"/>
+                      <a:tailEnd type="none" w="med" len="med"/>
+                    </a:lnL>
+                    <a:lnR w="28575" cap="flat" cmpd="sng" algn="ctr">
+                      <a:solidFill>
+                        <a:schemeClr val="accent1">
+                          <a:lumMod val="20000"/>
+                          <a:lumOff val="80000"/>
+                        </a:schemeClr>
+                      </a:solidFill>
+                      <a:prstDash val="solid"/>
+                      <a:round/>
+                      <a:headEnd type="none" w="med" len="med"/>
+                      <a:tailEnd type="none" w="med" len="med"/>
+                    </a:lnR>
+                    <a:lnT w="6350" cap="flat" cmpd="sng" algn="ctr">
+                      <a:solidFill>
+                        <a:schemeClr val="tx2">
+                          <a:lumMod val="40000"/>
+                          <a:lumOff val="60000"/>
+                        </a:schemeClr>
+                      </a:solidFill>
+                      <a:prstDash val="solid"/>
+                      <a:round/>
+                      <a:headEnd type="none" w="med" len="med"/>
+                      <a:tailEnd type="none" w="med" len="med"/>
+                    </a:lnT>
+                    <a:lnB w="28575" cap="flat" cmpd="sng" algn="ctr">
+                      <a:solidFill>
+                        <a:schemeClr val="accent1">
+                          <a:lumMod val="20000"/>
+                          <a:lumOff val="80000"/>
+                        </a:schemeClr>
+                      </a:solidFill>
+                      <a:prstDash val="solid"/>
+                      <a:round/>
+                      <a:headEnd type="none" w="med" len="med"/>
+                      <a:tailEnd type="none" w="med" len="med"/>
+                    </a:lnB>
+                    <a:lnTlToBr w="12700" cmpd="sng">
+                      <a:noFill/>
+                      <a:prstDash val="solid"/>
+                    </a:lnTlToBr>
+                    <a:solidFill>
+                      <a:schemeClr val="bg1">
+                        <a:lumMod val="95000"/>
+                        <a:alpha val="60000"/>
+                      </a:schemeClr>
+                    </a:solidFill>
+                  </a:tcPr>
+                </a:tc>
+                <a:extLst>
+                  <a:ext uri="{0D108BD9-81ED-4DB2-BD59-A6C34878D82A}">
+                    <a16:rowId xmlns:a16="http://schemas.microsoft.com/office/drawing/2014/main" val="4002830567"/>
+                  </a:ext>
+                </a:extLst>
+              </a:tr>
+            </a:tbl>
+          </a:graphicData>
+        </a:graphic>
+      </p:graphicFrame>
+      <p:pic>
+        <p:nvPicPr>
+          <p:cNvPr id="5" name="圖片 4">
+            <a:extLst>
+              <a:ext uri="{FF2B5EF4-FFF2-40B4-BE49-F238E27FC236}">
+                <a16:creationId xmlns:a16="http://schemas.microsoft.com/office/drawing/2014/main" id="{1AE1465A-57AB-C852-BB9C-E6ADA5CC7FC0}"/>
+              </a:ext>
+            </a:extLst>
+          </p:cNvPr>
+          <p:cNvPicPr>
+            <a:picLocks noChangeAspect="1"/>
+          </p:cNvPicPr>
+          <p:nvPr/>
+        </p:nvPicPr>
+        <p:blipFill>
+          <a:blip r:embed="rId2"/>
+          <a:stretch>
+            <a:fillRect/>
+          </a:stretch>
+        </p:blipFill>
+        <p:spPr>
+          <a:xfrm>
+            <a:off x="3690401" y="1740554"/>
+            <a:ext cx="432048" cy="432048"/>
+          </a:xfrm>
+          <a:prstGeom prst="rect">
+            <a:avLst/>
+          </a:prstGeom>
+          <a:effectLst>
+            <a:glow rad="25400">
+              <a:schemeClr val="accent1">
+                <a:lumMod val="20000"/>
+                <a:lumOff val="80000"/>
+                <a:alpha val="40000"/>
+              </a:schemeClr>
+            </a:glow>
+            <a:softEdge rad="50800"/>
+          </a:effectLst>
+        </p:spPr>
+      </p:pic>
+      <p:cxnSp>
+        <p:nvCxnSpPr>
+          <p:cNvPr id="7" name="接點: 肘形 6">
+            <a:extLst>
+              <a:ext uri="{FF2B5EF4-FFF2-40B4-BE49-F238E27FC236}">
+                <a16:creationId xmlns:a16="http://schemas.microsoft.com/office/drawing/2014/main" id="{31B2BDD8-0CDC-7F98-2502-AA1B5489ED3F}"/>
+              </a:ext>
+            </a:extLst>
+          </p:cNvPr>
+          <p:cNvCxnSpPr>
+            <a:cxnSpLocks/>
+            <a:stCxn id="20" idx="2"/>
+            <a:endCxn id="8" idx="1"/>
+          </p:cNvCxnSpPr>
+          <p:nvPr/>
+        </p:nvCxnSpPr>
+        <p:spPr>
+          <a:xfrm rot="16200000" flipH="1">
+            <a:off x="2095631" y="1859824"/>
+            <a:ext cx="262708" cy="1206994"/>
+          </a:xfrm>
+          <a:prstGeom prst="bentConnector2">
+            <a:avLst/>
+          </a:prstGeom>
+          <a:ln w="50800">
+            <a:solidFill>
+              <a:schemeClr val="bg1">
+                <a:lumMod val="75000"/>
+              </a:schemeClr>
+            </a:solidFill>
+            <a:prstDash val="solid"/>
+            <a:headEnd type="none" w="med" len="med"/>
+            <a:tailEnd type="triangle" w="med" len="med"/>
+          </a:ln>
+        </p:spPr>
+        <p:style>
+          <a:lnRef idx="1">
+            <a:schemeClr val="accent1"/>
+          </a:lnRef>
+          <a:fillRef idx="0">
+            <a:schemeClr val="accent1"/>
+          </a:fillRef>
+          <a:effectRef idx="0">
+            <a:schemeClr val="accent1"/>
+          </a:effectRef>
+          <a:fontRef idx="minor">
+            <a:schemeClr val="tx1"/>
+          </a:fontRef>
+        </p:style>
+      </p:cxnSp>
+      <p:sp>
+        <p:nvSpPr>
+          <p:cNvPr id="8" name="矩形 7">
+            <a:extLst>
+              <a:ext uri="{FF2B5EF4-FFF2-40B4-BE49-F238E27FC236}">
+                <a16:creationId xmlns:a16="http://schemas.microsoft.com/office/drawing/2014/main" id="{7A5C6EA7-6D54-4902-EDE7-26C790AFF4B4}"/>
+              </a:ext>
+            </a:extLst>
+          </p:cNvPr>
+          <p:cNvSpPr/>
+          <p:nvPr/>
+        </p:nvSpPr>
+        <p:spPr>
+          <a:xfrm>
+            <a:off x="2830482" y="2440683"/>
+            <a:ext cx="859919" cy="307983"/>
+          </a:xfrm>
+          <a:prstGeom prst="rect">
+            <a:avLst/>
+          </a:prstGeom>
+          <a:solidFill>
+            <a:schemeClr val="accent1">
+              <a:lumMod val="20000"/>
+              <a:lumOff val="80000"/>
+              <a:alpha val="40000"/>
+            </a:schemeClr>
+          </a:solidFill>
+          <a:ln w="38100">
+            <a:solidFill>
+              <a:schemeClr val="tx2">
+                <a:lumMod val="60000"/>
+                <a:lumOff val="40000"/>
+                <a:alpha val="40000"/>
+              </a:schemeClr>
+            </a:solidFill>
+          </a:ln>
+        </p:spPr>
+        <p:style>
+          <a:lnRef idx="2">
+            <a:schemeClr val="accent1">
+              <a:shade val="15000"/>
+            </a:schemeClr>
+          </a:lnRef>
+          <a:fillRef idx="1">
+            <a:schemeClr val="accent1"/>
+          </a:fillRef>
+          <a:effectRef idx="0">
+            <a:schemeClr val="accent1"/>
+          </a:effectRef>
+          <a:fontRef idx="minor">
+            <a:schemeClr val="lt1"/>
+          </a:fontRef>
+        </p:style>
+        <p:txBody>
+          <a:bodyPr wrap="none" lIns="0" tIns="0" rIns="0" bIns="0" rtlCol="0" anchor="ctr" anchorCtr="1"/>
+          <a:lstStyle/>
+          <a:p>
+            <a:pPr algn="ctr"/>
+            <a:r>
+              <a:rPr lang="en-US" altLang="zh-TW" sz="1400" b="1" dirty="0">
+                <a:solidFill>
+                  <a:schemeClr val="tx2"/>
+                </a:solidFill>
+              </a:rPr>
+              <a:t>Gemma 4</a:t>
+            </a:r>
+            <a:endParaRPr lang="zh-TW" altLang="en-US" dirty="0"/>
+          </a:p>
+        </p:txBody>
+      </p:sp>
+      <p:grpSp>
+        <p:nvGrpSpPr>
+          <p:cNvPr id="9" name="群組 8">
+            <a:extLst>
+              <a:ext uri="{FF2B5EF4-FFF2-40B4-BE49-F238E27FC236}">
+                <a16:creationId xmlns:a16="http://schemas.microsoft.com/office/drawing/2014/main" id="{5C52DA3A-73E2-5C45-B124-B126F7341A19}"/>
+              </a:ext>
+            </a:extLst>
+          </p:cNvPr>
+          <p:cNvGrpSpPr/>
+          <p:nvPr/>
+        </p:nvGrpSpPr>
+        <p:grpSpPr>
+          <a:xfrm>
+            <a:off x="3060717" y="2676658"/>
+            <a:ext cx="396274" cy="465099"/>
+            <a:chOff x="283951" y="1194723"/>
+            <a:chExt cx="487696" cy="626385"/>
+          </a:xfrm>
+          <a:effectLst>
+            <a:glow rad="76200">
+              <a:schemeClr val="accent1">
+                <a:lumMod val="20000"/>
+                <a:lumOff val="80000"/>
+                <a:alpha val="20000"/>
+              </a:schemeClr>
+            </a:glow>
+          </a:effectLst>
+        </p:grpSpPr>
+        <p:sp>
+          <p:nvSpPr>
+            <p:cNvPr id="10" name="文字方塊 9">
+              <a:extLst>
+                <a:ext uri="{FF2B5EF4-FFF2-40B4-BE49-F238E27FC236}">
+                  <a16:creationId xmlns:a16="http://schemas.microsoft.com/office/drawing/2014/main" id="{ABF06599-2BD0-1813-4939-5A5A4C75B9B4}"/>
+                </a:ext>
+              </a:extLst>
+            </p:cNvPr>
+            <p:cNvSpPr txBox="1"/>
+            <p:nvPr/>
+          </p:nvSpPr>
+          <p:spPr>
+            <a:xfrm>
+              <a:off x="283951" y="1573740"/>
+              <a:ext cx="487696" cy="247368"/>
+            </a:xfrm>
+            <a:prstGeom prst="rect">
+              <a:avLst/>
+            </a:prstGeom>
+            <a:solidFill>
+              <a:schemeClr val="bg1">
+                <a:lumMod val="95000"/>
+                <a:alpha val="40000"/>
+              </a:schemeClr>
+            </a:solidFill>
+            <a:ln>
+              <a:noFill/>
+            </a:ln>
+            <a:effectLst>
+              <a:glow rad="25400">
+                <a:schemeClr val="bg1">
+                  <a:lumMod val="95000"/>
+                  <a:alpha val="40000"/>
+                </a:schemeClr>
+              </a:glow>
+              <a:softEdge rad="50800"/>
+            </a:effectLst>
+          </p:spPr>
+          <p:txBody>
+            <a:bodyPr wrap="none" lIns="0" tIns="0" rIns="0" bIns="0" anchor="ctr" anchorCtr="1">
+              <a:noAutofit/>
+            </a:bodyPr>
+            <a:lstStyle/>
+            <a:p>
+              <a:r>
+                <a:rPr lang="en-US" altLang="zh-TW" sz="1200" dirty="0">
+                  <a:ln w="0"/>
+                  <a:solidFill>
+                    <a:schemeClr val="accent1">
+                      <a:lumMod val="75000"/>
+                    </a:schemeClr>
+                  </a:solidFill>
+                  <a:latin typeface="Calibri"/>
+                  <a:ea typeface="新細明體" panose="02020500000000000000" pitchFamily="18" charset="-120"/>
+                </a:rPr>
+                <a:t>O</a:t>
+              </a:r>
+              <a:r>
+                <a:rPr lang="en-US" altLang="zh-TW" sz="1200" dirty="0">
+                  <a:ln w="0"/>
+                  <a:solidFill>
+                    <a:schemeClr val="tx1">
+                      <a:lumMod val="95000"/>
+                      <a:lumOff val="5000"/>
+                    </a:schemeClr>
+                  </a:solidFill>
+                  <a:latin typeface="Calibri"/>
+                  <a:ea typeface="新細明體" panose="02020500000000000000" pitchFamily="18" charset="-120"/>
+                </a:rPr>
+                <a:t>llama</a:t>
+              </a:r>
+            </a:p>
+          </p:txBody>
+        </p:sp>
+        <p:pic>
+          <p:nvPicPr>
+            <p:cNvPr id="11" name="圖片 10">
+              <a:extLst>
+                <a:ext uri="{FF2B5EF4-FFF2-40B4-BE49-F238E27FC236}">
+                  <a16:creationId xmlns:a16="http://schemas.microsoft.com/office/drawing/2014/main" id="{5E5876E1-2AD1-481F-0AE7-98C9C92AED65}"/>
+                </a:ext>
+              </a:extLst>
+            </p:cNvPr>
+            <p:cNvPicPr>
+              <a:picLocks noChangeAspect="1"/>
+            </p:cNvPicPr>
+            <p:nvPr/>
+          </p:nvPicPr>
+          <p:blipFill>
+            <a:blip r:embed="rId3"/>
+            <a:stretch>
+              <a:fillRect/>
+            </a:stretch>
+          </p:blipFill>
+          <p:spPr>
+            <a:xfrm>
+              <a:off x="355960" y="1194723"/>
+              <a:ext cx="337951" cy="390669"/>
+            </a:xfrm>
+            <a:prstGeom prst="rect">
+              <a:avLst/>
+            </a:prstGeom>
+            <a:solidFill>
+              <a:schemeClr val="bg1">
+                <a:alpha val="20000"/>
+              </a:schemeClr>
+            </a:solidFill>
+            <a:effectLst>
+              <a:glow rad="76200">
+                <a:schemeClr val="accent1">
+                  <a:lumMod val="20000"/>
+                  <a:lumOff val="80000"/>
+                  <a:alpha val="40000"/>
+                </a:schemeClr>
+              </a:glow>
+              <a:softEdge rad="25400"/>
+            </a:effectLst>
+          </p:spPr>
+        </p:pic>
+      </p:grpSp>
+      <p:sp>
+        <p:nvSpPr>
+          <p:cNvPr id="13" name="文字方塊 12">
+            <a:extLst>
+              <a:ext uri="{FF2B5EF4-FFF2-40B4-BE49-F238E27FC236}">
+                <a16:creationId xmlns:a16="http://schemas.microsoft.com/office/drawing/2014/main" id="{E5ADE032-C306-9696-54D2-4EA4994F6034}"/>
+              </a:ext>
+            </a:extLst>
+          </p:cNvPr>
+          <p:cNvSpPr txBox="1"/>
+          <p:nvPr/>
+        </p:nvSpPr>
+        <p:spPr>
+          <a:xfrm>
+            <a:off x="3583344" y="1318481"/>
+            <a:ext cx="646161" cy="284703"/>
+          </a:xfrm>
+          <a:prstGeom prst="rect">
+            <a:avLst/>
+          </a:prstGeom>
+          <a:noFill/>
+        </p:spPr>
+        <p:txBody>
+          <a:bodyPr wrap="none" lIns="0" tIns="0" rIns="0" bIns="0" anchor="ctr" anchorCtr="1">
+            <a:noAutofit/>
+          </a:bodyPr>
+          <a:lstStyle/>
+          <a:p>
+            <a:pPr algn="ctr">
+              <a:lnSpc>
+                <a:spcPts val="2000"/>
+              </a:lnSpc>
+              <a:buNone/>
+            </a:pPr>
+            <a:r>
+              <a:rPr lang="en-US" altLang="zh-TW" sz="2000" b="1" u="none" strike="noStrike" dirty="0">
+                <a:effectLst/>
+              </a:rPr>
+              <a:t>User</a:t>
+            </a:r>
+          </a:p>
+        </p:txBody>
+      </p:sp>
+      <p:cxnSp>
+        <p:nvCxnSpPr>
+          <p:cNvPr id="14" name="直線單箭頭接點 13">
+            <a:extLst>
+              <a:ext uri="{FF2B5EF4-FFF2-40B4-BE49-F238E27FC236}">
+                <a16:creationId xmlns:a16="http://schemas.microsoft.com/office/drawing/2014/main" id="{CAA31234-478F-6B09-B023-CBC177553873}"/>
+              </a:ext>
+            </a:extLst>
+          </p:cNvPr>
+          <p:cNvCxnSpPr>
+            <a:cxnSpLocks/>
+            <a:stCxn id="13" idx="2"/>
+            <a:endCxn id="5" idx="0"/>
+          </p:cNvCxnSpPr>
+          <p:nvPr/>
+        </p:nvCxnSpPr>
+        <p:spPr>
+          <a:xfrm>
+            <a:off x="3906425" y="1603184"/>
+            <a:ext cx="0" cy="137370"/>
+          </a:xfrm>
+          <a:prstGeom prst="straightConnector1">
+            <a:avLst/>
+          </a:prstGeom>
+          <a:ln w="25400">
+            <a:solidFill>
+              <a:schemeClr val="accent1">
+                <a:lumMod val="75000"/>
+              </a:schemeClr>
+            </a:solidFill>
+            <a:tailEnd type="triangle"/>
+          </a:ln>
+        </p:spPr>
+        <p:style>
+          <a:lnRef idx="1">
+            <a:schemeClr val="accent1"/>
+          </a:lnRef>
+          <a:fillRef idx="0">
+            <a:schemeClr val="accent1"/>
+          </a:fillRef>
+          <a:effectRef idx="0">
+            <a:schemeClr val="accent1"/>
+          </a:effectRef>
+          <a:fontRef idx="minor">
+            <a:schemeClr val="tx1"/>
+          </a:fontRef>
+        </p:style>
+      </p:cxnSp>
+      <p:cxnSp>
+        <p:nvCxnSpPr>
+          <p:cNvPr id="15" name="直線單箭頭接點 14">
+            <a:extLst>
+              <a:ext uri="{FF2B5EF4-FFF2-40B4-BE49-F238E27FC236}">
+                <a16:creationId xmlns:a16="http://schemas.microsoft.com/office/drawing/2014/main" id="{8C6F0AE6-D1A7-B1CE-B27E-05D7A3EEA827}"/>
+              </a:ext>
+            </a:extLst>
+          </p:cNvPr>
+          <p:cNvCxnSpPr>
+            <a:cxnSpLocks/>
+            <a:stCxn id="5" idx="3"/>
+            <a:endCxn id="16" idx="0"/>
+          </p:cNvCxnSpPr>
+          <p:nvPr/>
+        </p:nvCxnSpPr>
+        <p:spPr>
+          <a:xfrm flipV="1">
+            <a:off x="4122449" y="1956577"/>
+            <a:ext cx="288033" cy="1"/>
+          </a:xfrm>
+          <a:prstGeom prst="straightConnector1">
+            <a:avLst/>
+          </a:prstGeom>
+          <a:ln w="25400">
+            <a:solidFill>
+              <a:schemeClr val="accent1">
+                <a:lumMod val="75000"/>
+              </a:schemeClr>
+            </a:solidFill>
+            <a:prstDash val="sysDash"/>
+            <a:tailEnd type="triangle"/>
+          </a:ln>
+        </p:spPr>
+        <p:style>
+          <a:lnRef idx="1">
+            <a:schemeClr val="accent1"/>
+          </a:lnRef>
+          <a:fillRef idx="0">
+            <a:schemeClr val="accent1"/>
+          </a:fillRef>
+          <a:effectRef idx="0">
+            <a:schemeClr val="accent1"/>
+          </a:effectRef>
+          <a:fontRef idx="minor">
+            <a:schemeClr val="tx1"/>
+          </a:fontRef>
+        </p:style>
+      </p:cxnSp>
+      <p:sp>
+        <p:nvSpPr>
+          <p:cNvPr id="16" name="箭號: 向下 15">
+            <a:extLst>
+              <a:ext uri="{FF2B5EF4-FFF2-40B4-BE49-F238E27FC236}">
+                <a16:creationId xmlns:a16="http://schemas.microsoft.com/office/drawing/2014/main" id="{7D0722E7-3E2B-E75E-AA03-7172B9D76EBA}"/>
+              </a:ext>
+            </a:extLst>
+          </p:cNvPr>
+          <p:cNvSpPr/>
+          <p:nvPr/>
+        </p:nvSpPr>
+        <p:spPr>
+          <a:xfrm rot="16200000">
+            <a:off x="4477494" y="1726640"/>
+            <a:ext cx="325849" cy="459874"/>
+          </a:xfrm>
+          <a:prstGeom prst="downArrow">
+            <a:avLst>
+              <a:gd name="adj1" fmla="val 62892"/>
+              <a:gd name="adj2" fmla="val 52184"/>
+            </a:avLst>
+          </a:prstGeom>
+          <a:solidFill>
+            <a:schemeClr val="accent4">
+              <a:lumMod val="20000"/>
+              <a:lumOff val="80000"/>
+            </a:schemeClr>
+          </a:solidFill>
+          <a:ln w="25400">
+            <a:solidFill>
+              <a:schemeClr val="accent4">
+                <a:lumMod val="60000"/>
+                <a:lumOff val="40000"/>
+              </a:schemeClr>
+            </a:solidFill>
+          </a:ln>
+        </p:spPr>
+        <p:style>
+          <a:lnRef idx="2">
+            <a:schemeClr val="accent1">
+              <a:shade val="15000"/>
+            </a:schemeClr>
+          </a:lnRef>
+          <a:fillRef idx="1">
+            <a:schemeClr val="accent1"/>
+          </a:fillRef>
+          <a:effectRef idx="0">
+            <a:schemeClr val="accent1"/>
+          </a:effectRef>
+          <a:fontRef idx="minor">
+            <a:schemeClr val="lt1"/>
+          </a:fontRef>
+        </p:style>
+        <p:txBody>
+          <a:bodyPr vert="eaVert" wrap="none" lIns="0" tIns="72000" rIns="0" bIns="0" rtlCol="0" anchor="ctr" anchorCtr="1"/>
+          <a:lstStyle/>
+          <a:p>
+            <a:pPr algn="ctr"/>
+            <a:r>
+              <a:rPr lang="en-US" altLang="zh-TW" sz="1200" b="1" dirty="0">
+                <a:solidFill>
+                  <a:schemeClr val="accent4">
+                    <a:lumMod val="75000"/>
+                  </a:schemeClr>
+                </a:solidFill>
+              </a:rPr>
+              <a:t>MCP</a:t>
+            </a:r>
+            <a:endParaRPr lang="zh-TW" altLang="en-US" sz="1200" b="1" dirty="0">
+              <a:solidFill>
+                <a:schemeClr val="accent4">
+                  <a:lumMod val="75000"/>
+                </a:schemeClr>
+              </a:solidFill>
+            </a:endParaRPr>
+          </a:p>
+        </p:txBody>
+      </p:sp>
+      <p:cxnSp>
+        <p:nvCxnSpPr>
+          <p:cNvPr id="17" name="接點: 肘形 16">
+            <a:extLst>
+              <a:ext uri="{FF2B5EF4-FFF2-40B4-BE49-F238E27FC236}">
+                <a16:creationId xmlns:a16="http://schemas.microsoft.com/office/drawing/2014/main" id="{3FF0AA03-13D7-FC95-EC01-D24C42965E41}"/>
+              </a:ext>
+            </a:extLst>
+          </p:cNvPr>
+          <p:cNvCxnSpPr>
+            <a:cxnSpLocks/>
+            <a:stCxn id="5" idx="2"/>
+            <a:endCxn id="8" idx="3"/>
+          </p:cNvCxnSpPr>
+          <p:nvPr/>
+        </p:nvCxnSpPr>
+        <p:spPr>
+          <a:xfrm rot="5400000">
+            <a:off x="3587377" y="2275626"/>
+            <a:ext cx="422073" cy="216024"/>
+          </a:xfrm>
+          <a:prstGeom prst="bentConnector2">
+            <a:avLst/>
+          </a:prstGeom>
+          <a:ln w="25400">
+            <a:solidFill>
+              <a:schemeClr val="accent1">
+                <a:lumMod val="75000"/>
+              </a:schemeClr>
+            </a:solidFill>
+            <a:prstDash val="sysDash"/>
+            <a:tailEnd type="triangle"/>
+          </a:ln>
+        </p:spPr>
+        <p:style>
+          <a:lnRef idx="1">
+            <a:schemeClr val="accent1"/>
+          </a:lnRef>
+          <a:fillRef idx="0">
+            <a:schemeClr val="accent1"/>
+          </a:fillRef>
+          <a:effectRef idx="0">
+            <a:schemeClr val="accent1"/>
+          </a:effectRef>
+          <a:fontRef idx="minor">
+            <a:schemeClr val="tx1"/>
+          </a:fontRef>
+        </p:style>
+      </p:cxnSp>
+      <p:pic>
+        <p:nvPicPr>
+          <p:cNvPr id="20" name="圖片 19">
+            <a:extLst>
+              <a:ext uri="{FF2B5EF4-FFF2-40B4-BE49-F238E27FC236}">
+                <a16:creationId xmlns:a16="http://schemas.microsoft.com/office/drawing/2014/main" id="{0BB06E71-32EA-03E7-346A-AEB63F3F28D0}"/>
+              </a:ext>
+            </a:extLst>
+          </p:cNvPr>
+          <p:cNvPicPr>
+            <a:picLocks noChangeAspect="1"/>
+          </p:cNvPicPr>
+          <p:nvPr/>
+        </p:nvPicPr>
+        <p:blipFill>
+          <a:blip r:embed="rId4" cstate="print">
+            <a:extLst>
+              <a:ext uri="{28A0092B-C50C-407E-A947-70E740481C1C}">
+                <a14:useLocalDpi xmlns:a14="http://schemas.microsoft.com/office/drawing/2010/main" val="0"/>
+              </a:ext>
+            </a:extLst>
+          </a:blip>
+          <a:stretch>
+            <a:fillRect/>
+          </a:stretch>
+        </p:blipFill>
+        <p:spPr>
+          <a:xfrm>
+            <a:off x="1407464" y="1899920"/>
+            <a:ext cx="432048" cy="432047"/>
+          </a:xfrm>
+          <a:prstGeom prst="rect">
+            <a:avLst/>
+          </a:prstGeom>
+          <a:effectLst>
+            <a:glow rad="76200">
+              <a:srgbClr val="00B050">
+                <a:alpha val="40000"/>
+              </a:srgbClr>
+            </a:glow>
+          </a:effectLst>
+        </p:spPr>
+      </p:pic>
+      <p:sp>
+        <p:nvSpPr>
+          <p:cNvPr id="21" name="文字方塊 20">
+            <a:extLst>
+              <a:ext uri="{FF2B5EF4-FFF2-40B4-BE49-F238E27FC236}">
+                <a16:creationId xmlns:a16="http://schemas.microsoft.com/office/drawing/2014/main" id="{101BE5B7-93B4-6DCE-D32E-FA5623F11642}"/>
+              </a:ext>
+            </a:extLst>
+          </p:cNvPr>
+          <p:cNvSpPr txBox="1"/>
+          <p:nvPr/>
+        </p:nvSpPr>
+        <p:spPr>
+          <a:xfrm>
+            <a:off x="1419758" y="2372632"/>
+            <a:ext cx="432048" cy="247368"/>
+          </a:xfrm>
+          <a:prstGeom prst="rect">
+            <a:avLst/>
+          </a:prstGeom>
+          <a:solidFill>
+            <a:schemeClr val="bg1">
+              <a:lumMod val="95000"/>
+              <a:alpha val="40000"/>
+            </a:schemeClr>
+          </a:solidFill>
+          <a:ln>
+            <a:noFill/>
+          </a:ln>
+          <a:effectLst/>
+        </p:spPr>
+        <p:txBody>
+          <a:bodyPr wrap="none" lIns="0" tIns="0" rIns="0" bIns="0" anchor="ctr" anchorCtr="1">
+            <a:noAutofit/>
+          </a:bodyPr>
+          <a:lstStyle/>
+          <a:p>
+            <a:r>
+              <a:rPr lang="en-US" altLang="zh-TW" sz="1200" dirty="0">
+                <a:ln w="0"/>
+                <a:latin typeface="Calibri"/>
+                <a:ea typeface="新細明體" panose="02020500000000000000" pitchFamily="18" charset="-120"/>
+              </a:rPr>
+              <a:t>Unsloth</a:t>
+            </a:r>
+            <a:endParaRPr lang="en-US" altLang="zh-TW" sz="1200" dirty="0">
+              <a:ln w="0"/>
+              <a:solidFill>
+                <a:schemeClr val="tx1">
+                  <a:lumMod val="95000"/>
+                  <a:lumOff val="5000"/>
+                </a:schemeClr>
+              </a:solidFill>
+              <a:latin typeface="Calibri"/>
+              <a:ea typeface="新細明體" panose="02020500000000000000" pitchFamily="18" charset="-120"/>
+            </a:endParaRPr>
+          </a:p>
+        </p:txBody>
+      </p:sp>
+      <p:pic>
+        <p:nvPicPr>
+          <p:cNvPr id="22" name="圖片 21">
+            <a:extLst>
+              <a:ext uri="{FF2B5EF4-FFF2-40B4-BE49-F238E27FC236}">
+                <a16:creationId xmlns:a16="http://schemas.microsoft.com/office/drawing/2014/main" id="{C1823606-DE97-1F54-9BDE-7AE26A6C4966}"/>
+              </a:ext>
+            </a:extLst>
+          </p:cNvPr>
+          <p:cNvPicPr>
+            <a:picLocks noChangeAspect="1"/>
+          </p:cNvPicPr>
+          <p:nvPr/>
+        </p:nvPicPr>
+        <p:blipFill>
+          <a:blip r:embed="rId5"/>
+          <a:stretch>
+            <a:fillRect/>
+          </a:stretch>
+        </p:blipFill>
+        <p:spPr>
+          <a:xfrm>
+            <a:off x="978052" y="2706564"/>
+            <a:ext cx="411308" cy="386908"/>
+          </a:xfrm>
+          <a:prstGeom prst="rect">
+            <a:avLst/>
+          </a:prstGeom>
+          <a:effectLst>
+            <a:glow rad="76200">
+              <a:schemeClr val="accent6">
+                <a:lumMod val="20000"/>
+                <a:lumOff val="80000"/>
+              </a:schemeClr>
+            </a:glow>
+            <a:softEdge rad="50800"/>
+          </a:effectLst>
+        </p:spPr>
+      </p:pic>
+      <p:sp>
+        <p:nvSpPr>
+          <p:cNvPr id="35" name="矩形 34">
+            <a:extLst>
+              <a:ext uri="{FF2B5EF4-FFF2-40B4-BE49-F238E27FC236}">
+                <a16:creationId xmlns:a16="http://schemas.microsoft.com/office/drawing/2014/main" id="{6279E747-9DBA-AD9F-63D2-8B62A2813FB7}"/>
+              </a:ext>
+            </a:extLst>
+          </p:cNvPr>
+          <p:cNvSpPr/>
+          <p:nvPr/>
+        </p:nvSpPr>
+        <p:spPr>
+          <a:xfrm>
+            <a:off x="904601" y="851724"/>
+            <a:ext cx="1437774" cy="786305"/>
+          </a:xfrm>
+          <a:prstGeom prst="rect">
+            <a:avLst/>
+          </a:prstGeom>
+          <a:noFill/>
+          <a:ln w="38100">
+            <a:solidFill>
+              <a:schemeClr val="tx2">
+                <a:lumMod val="20000"/>
+                <a:lumOff val="80000"/>
+              </a:schemeClr>
+            </a:solidFill>
+          </a:ln>
+        </p:spPr>
+        <p:style>
+          <a:lnRef idx="2">
+            <a:schemeClr val="accent1">
+              <a:shade val="15000"/>
+            </a:schemeClr>
+          </a:lnRef>
+          <a:fillRef idx="1">
+            <a:schemeClr val="accent1"/>
+          </a:fillRef>
+          <a:effectRef idx="0">
+            <a:schemeClr val="accent1"/>
+          </a:effectRef>
+          <a:fontRef idx="minor">
+            <a:schemeClr val="lt1"/>
+          </a:fontRef>
+        </p:style>
+        <p:txBody>
+          <a:bodyPr wrap="none" lIns="0" tIns="0" rIns="0" bIns="0" rtlCol="0" anchor="ctr" anchorCtr="1"/>
+          <a:lstStyle/>
+          <a:p>
+            <a:pPr algn="ctr">
+              <a:lnSpc>
+                <a:spcPts val="1600"/>
+              </a:lnSpc>
+            </a:pPr>
+            <a:r>
+              <a:rPr lang="en-US" altLang="zh-TW" sz="1200" dirty="0">
+                <a:solidFill>
+                  <a:schemeClr val="tx2"/>
+                </a:solidFill>
+                <a:latin typeface="ADLaM Display" panose="02010000000000000000" pitchFamily="2" charset="0"/>
+                <a:ea typeface="ADLaM Display" panose="02010000000000000000" pitchFamily="2" charset="0"/>
+                <a:cs typeface="ADLaM Display" panose="02010000000000000000" pitchFamily="2" charset="0"/>
+              </a:rPr>
+              <a:t>Bio-Medical</a:t>
+            </a:r>
+          </a:p>
+          <a:p>
+            <a:pPr algn="ctr">
+              <a:lnSpc>
+                <a:spcPts val="1600"/>
+              </a:lnSpc>
+            </a:pPr>
+            <a:r>
+              <a:rPr lang="en-US" altLang="zh-TW" sz="1200" dirty="0">
+                <a:solidFill>
+                  <a:schemeClr val="tx2"/>
+                </a:solidFill>
+                <a:latin typeface="ADLaM Display" panose="02010000000000000000" pitchFamily="2" charset="0"/>
+                <a:ea typeface="ADLaM Display" panose="02010000000000000000" pitchFamily="2" charset="0"/>
+                <a:cs typeface="ADLaM Display" panose="02010000000000000000" pitchFamily="2" charset="0"/>
+              </a:rPr>
+              <a:t>and Geomatics</a:t>
+            </a:r>
+          </a:p>
+          <a:p>
+            <a:pPr algn="ctr">
+              <a:lnSpc>
+                <a:spcPts val="1600"/>
+              </a:lnSpc>
+            </a:pPr>
+            <a:r>
+              <a:rPr lang="en-US" altLang="zh-TW" sz="1200" dirty="0">
+                <a:solidFill>
+                  <a:schemeClr val="tx2"/>
+                </a:solidFill>
+                <a:latin typeface="ADLaM Display" panose="02010000000000000000" pitchFamily="2" charset="0"/>
+                <a:ea typeface="ADLaM Display" panose="02010000000000000000" pitchFamily="2" charset="0"/>
+                <a:cs typeface="ADLaM Display" panose="02010000000000000000" pitchFamily="2" charset="0"/>
+              </a:rPr>
+              <a:t>Q&amp;A</a:t>
+            </a:r>
           </a:p>
         </p:txBody>
       </p:sp>
@@ -2122,18 +4722,12 @@
 </p:sld>
 </file>
 
-<file path=ppt/slides/slide3.xml><?xml version="1.0" encoding="utf-8"?>
+<file path=ppt/slides/slide4.xml><?xml version="1.0" encoding="utf-8"?>
 <p:sld xmlns:a="http://schemas.openxmlformats.org/drawingml/2006/main" xmlns:r="http://schemas.openxmlformats.org/officeDocument/2006/relationships" xmlns:p="http://schemas.openxmlformats.org/presentationml/2006/main">
   <p:cSld>
     <p:spTree>
       <p:nvGrpSpPr>
-        <p:cNvPr id="1" name="">
-          <a:extLst>
-            <a:ext uri="{FF2B5EF4-FFF2-40B4-BE49-F238E27FC236}">
-              <a16:creationId xmlns:a16="http://schemas.microsoft.com/office/drawing/2014/main" id="{1BC20B80-B722-2523-9202-3F21EBB146DE}"/>
-            </a:ext>
-          </a:extLst>
-        </p:cNvPr>
+        <p:cNvPr id="1" name=""/>
         <p:cNvGrpSpPr/>
         <p:nvPr/>
       </p:nvGrpSpPr>
@@ -2147,129 +4741,10 @@
       </p:grpSpPr>
       <p:sp>
         <p:nvSpPr>
-          <p:cNvPr id="2" name="文字方塊 1">
+          <p:cNvPr id="5" name="標題 1">
             <a:extLst>
               <a:ext uri="{FF2B5EF4-FFF2-40B4-BE49-F238E27FC236}">
-                <a16:creationId xmlns:a16="http://schemas.microsoft.com/office/drawing/2014/main" id="{5B9CD27E-9C1A-3219-6A05-1CA47876AE20}"/>
-              </a:ext>
-            </a:extLst>
-          </p:cNvPr>
-          <p:cNvSpPr txBox="1"/>
-          <p:nvPr/>
-        </p:nvSpPr>
-        <p:spPr>
-          <a:xfrm>
-            <a:off x="845586" y="1120676"/>
-            <a:ext cx="7452828" cy="1661993"/>
-          </a:xfrm>
-          <a:prstGeom prst="rect">
-            <a:avLst/>
-          </a:prstGeom>
-          <a:solidFill>
-            <a:schemeClr val="bg1"/>
-          </a:solidFill>
-        </p:spPr>
-        <p:txBody>
-          <a:bodyPr wrap="square" rtlCol="0">
-            <a:spAutoFit/>
-          </a:bodyPr>
-          <a:lstStyle/>
-          <a:p>
-            <a:pPr marL="285750" indent="-285750">
-              <a:buFont typeface="Wingdings" panose="05000000000000000000" pitchFamily="2" charset="2"/>
-              <a:buChar char="Ø"/>
-              <a:defRPr/>
-            </a:pPr>
-            <a:r>
-              <a:rPr lang="en-US" altLang="zh-TW" sz="2400" dirty="0">
-                <a:latin typeface="Noto Sans HK" panose="020B0200000000000000" pitchFamily="34" charset="-120"/>
-                <a:ea typeface="Noto Sans HK" panose="020B0200000000000000" pitchFamily="34" charset="-120"/>
-              </a:rPr>
-              <a:t>Fine-Tunning</a:t>
-            </a:r>
-          </a:p>
-          <a:p>
-            <a:pPr marL="742950" lvl="1" indent="-285750">
-              <a:buFont typeface="Arial" panose="020B0604020202020204" pitchFamily="34" charset="0"/>
-              <a:buChar char="•"/>
-            </a:pPr>
-            <a:r>
-              <a:rPr lang="en-US" altLang="zh-TW" sz="1400" dirty="0">
-                <a:latin typeface="Noto Sans HK" panose="020B0200000000000000" pitchFamily="34" charset="-120"/>
-                <a:ea typeface="Noto Sans HK" panose="020B0200000000000000" pitchFamily="34" charset="-120"/>
-              </a:rPr>
-              <a:t>Q&amp;A content: General Medical and Genotyping-Related Consultation.</a:t>
-            </a:r>
-          </a:p>
-          <a:p>
-            <a:pPr marL="742950" lvl="1" indent="-285750">
-              <a:buFont typeface="Arial" panose="020B0604020202020204" pitchFamily="34" charset="0"/>
-              <a:buChar char="•"/>
-            </a:pPr>
-            <a:r>
-              <a:rPr lang="en-US" altLang="zh-TW" sz="1400" dirty="0">
-                <a:latin typeface="Noto Sans HK" panose="020B0200000000000000" pitchFamily="34" charset="-120"/>
-                <a:ea typeface="Noto Sans HK" panose="020B0200000000000000" pitchFamily="34" charset="-120"/>
-              </a:rPr>
-              <a:t>Format: </a:t>
-            </a:r>
-            <a:endParaRPr lang="en-US" altLang="zh-TW" dirty="0">
-              <a:latin typeface="Noto Sans HK" panose="020B0200000000000000" pitchFamily="34" charset="-120"/>
-              <a:ea typeface="Noto Sans HK" panose="020B0200000000000000" pitchFamily="34" charset="-120"/>
-            </a:endParaRPr>
-          </a:p>
-          <a:p>
-            <a:pPr marL="742950" lvl="1" indent="-285750">
-              <a:buFont typeface="Arial" panose="020B0604020202020204" pitchFamily="34" charset="0"/>
-              <a:buChar char="•"/>
-            </a:pPr>
-            <a:endParaRPr lang="en-US" altLang="zh-TW" dirty="0">
-              <a:latin typeface="Noto Sans HK" panose="020B0200000000000000" pitchFamily="34" charset="-120"/>
-              <a:ea typeface="Noto Sans HK" panose="020B0200000000000000" pitchFamily="34" charset="-120"/>
-            </a:endParaRPr>
-          </a:p>
-          <a:p>
-            <a:pPr marL="742950" lvl="1" indent="-285750">
-              <a:buFont typeface="Arial" panose="020B0604020202020204" pitchFamily="34" charset="0"/>
-              <a:buChar char="•"/>
-            </a:pPr>
-            <a:endParaRPr lang="en-US" altLang="zh-TW" sz="1400" dirty="0">
-              <a:solidFill>
-                <a:schemeClr val="bg1">
-                  <a:lumMod val="50000"/>
-                </a:schemeClr>
-              </a:solidFill>
-              <a:latin typeface="Noto Sans HK" panose="020B0200000000000000" pitchFamily="34" charset="-120"/>
-              <a:ea typeface="Noto Sans HK" panose="020B0200000000000000" pitchFamily="34" charset="-120"/>
-            </a:endParaRPr>
-          </a:p>
-          <a:p>
-            <a:pPr marL="742950" lvl="1" indent="-285750">
-              <a:buFont typeface="Arial" panose="020B0604020202020204" pitchFamily="34" charset="0"/>
-              <a:buChar char="•"/>
-            </a:pPr>
-            <a:endParaRPr kumimoji="0" lang="en-US" altLang="zh-TW" sz="1800" b="0" i="0" u="none" strike="noStrike" kern="1200" cap="none" spc="0" normalizeH="0" baseline="0" noProof="0" dirty="0">
-              <a:ln>
-                <a:noFill/>
-              </a:ln>
-              <a:solidFill>
-                <a:prstClr val="black"/>
-              </a:solidFill>
-              <a:effectLst/>
-              <a:uLnTx/>
-              <a:uFillTx/>
-              <a:latin typeface="Noto Sans HK" panose="020B0200000000000000" pitchFamily="34" charset="-120"/>
-              <a:ea typeface="Noto Sans HK" panose="020B0200000000000000" pitchFamily="34" charset="-120"/>
-            </a:endParaRPr>
-          </a:p>
-        </p:txBody>
-      </p:sp>
-      <p:sp>
-        <p:nvSpPr>
-          <p:cNvPr id="64" name="標題 1">
-            <a:extLst>
-              <a:ext uri="{FF2B5EF4-FFF2-40B4-BE49-F238E27FC236}">
-                <a16:creationId xmlns:a16="http://schemas.microsoft.com/office/drawing/2014/main" id="{94909093-0BFB-B658-A42D-64D3192A2420}"/>
+                <a16:creationId xmlns:a16="http://schemas.microsoft.com/office/drawing/2014/main" id="{CDA888E0-E178-CA85-DA6A-537E21CE2145}"/>
               </a:ext>
             </a:extLst>
           </p:cNvPr>
@@ -2313,25 +4788,7 @@
                 <a:cs typeface="Aharoni" panose="020F0502020204030204" pitchFamily="2" charset="-79"/>
                 <a:sym typeface="Wingdings" panose="05000000000000000000" pitchFamily="2" charset="2"/>
               </a:rPr>
-              <a:t>Bio-IT AI Agent (</a:t>
-            </a:r>
-            <a:r>
-              <a:rPr lang="en-US" altLang="zh-TW" sz="2800" dirty="0" err="1">
-                <a:latin typeface="Noto Sans HK" panose="020B0200000000000000" pitchFamily="34" charset="-120"/>
-                <a:ea typeface="Noto Sans HK" panose="020B0200000000000000" pitchFamily="34" charset="-120"/>
-                <a:cs typeface="Aharoni" panose="020F0502020204030204" pitchFamily="2" charset="-79"/>
-                <a:sym typeface="Wingdings" panose="05000000000000000000" pitchFamily="2" charset="2"/>
-              </a:rPr>
-              <a:t>Dr.BioByte</a:t>
-            </a:r>
-            <a:r>
-              <a:rPr lang="en-US" altLang="zh-TW" sz="2800" dirty="0">
-                <a:latin typeface="Noto Sans HK" panose="020B0200000000000000" pitchFamily="34" charset="-120"/>
-                <a:ea typeface="Noto Sans HK" panose="020B0200000000000000" pitchFamily="34" charset="-120"/>
-                <a:cs typeface="Aharoni" panose="020F0502020204030204" pitchFamily="2" charset="-79"/>
-                <a:sym typeface="Wingdings" panose="05000000000000000000" pitchFamily="2" charset="2"/>
-              </a:rPr>
-              <a:t>)</a:t>
+              <a:t>VCF Example</a:t>
             </a:r>
           </a:p>
           <a:p>
@@ -2347,399 +4804,12 @@
           </a:p>
         </p:txBody>
       </p:sp>
-    </p:spTree>
-    <p:extLst>
-      <p:ext uri="{BB962C8B-B14F-4D97-AF65-F5344CB8AC3E}">
-        <p14:creationId xmlns:p14="http://schemas.microsoft.com/office/powerpoint/2010/main" val="450648465"/>
-      </p:ext>
-    </p:extLst>
-  </p:cSld>
-  <p:clrMapOvr>
-    <a:masterClrMapping/>
-  </p:clrMapOvr>
-  <mc:AlternateContent xmlns:mc="http://schemas.openxmlformats.org/markup-compatibility/2006" xmlns:p14="http://schemas.microsoft.com/office/powerpoint/2010/main">
-    <mc:Choice Requires="p14">
-      <p:transition p14:dur="10" advClick="0"/>
-    </mc:Choice>
-    <mc:Fallback xmlns="">
-      <p:transition advClick="0"/>
-    </mc:Fallback>
-  </mc:AlternateContent>
-  <p:timing>
-    <p:tnLst>
-      <p:par>
-        <p:cTn id="1" dur="indefinite" restart="never" nodeType="tmRoot">
-          <p:childTnLst>
-            <p:seq concurrent="1" nextAc="seek">
-              <p:cTn id="2" dur="indefinite" nodeType="mainSeq">
-                <p:childTnLst>
-                  <p:par>
-                    <p:cTn id="3" fill="hold">
-                      <p:stCondLst>
-                        <p:cond delay="indefinite"/>
-                      </p:stCondLst>
-                      <p:childTnLst>
-                        <p:par>
-                          <p:cTn id="4" fill="hold">
-                            <p:stCondLst>
-                              <p:cond delay="0"/>
-                            </p:stCondLst>
-                            <p:childTnLst>
-                              <p:par>
-                                <p:cTn id="5" presetID="3" presetClass="emph" presetSubtype="2" fill="hold" grpId="0" nodeType="clickEffect">
-                                  <p:stCondLst>
-                                    <p:cond delay="0"/>
-                                  </p:stCondLst>
-                                  <p:childTnLst>
-                                    <p:animClr clrSpc="rgb" dir="cw">
-                                      <p:cBhvr override="childStyle">
-                                        <p:cTn id="6" dur="500" fill="hold"/>
-                                        <p:tgtEl>
-                                          <p:spTgt spid="2">
-                                            <p:txEl>
-                                              <p:pRg st="0" end="0"/>
-                                            </p:txEl>
-                                          </p:spTgt>
-                                        </p:tgtEl>
-                                        <p:attrNameLst>
-                                          <p:attrName>style.color</p:attrName>
-                                        </p:attrNameLst>
-                                      </p:cBhvr>
-                                      <p:to>
-                                        <a:srgbClr val="FF0000"/>
-                                      </p:to>
-                                    </p:animClr>
-                                  </p:childTnLst>
-                                  <p:subTnLst>
-                                    <p:audio>
-                                      <p:cMediaNode>
-                                        <p:cTn display="0" masterRel="sameClick">
-                                          <p:stCondLst>
-                                            <p:cond evt="begin" delay="0">
-                                              <p:tn val="5"/>
-                                            </p:cond>
-                                          </p:stCondLst>
-                                          <p:endCondLst>
-                                            <p:cond evt="onStopAudio" delay="0">
-                                              <p:tgtEl>
-                                                <p:sldTgt/>
-                                              </p:tgtEl>
-                                            </p:cond>
-                                          </p:endCondLst>
-                                        </p:cTn>
-                                        <p:tgtEl>
-                                          <p:sndTgt r:embed="rId3" name="type.wav"/>
-                                        </p:tgtEl>
-                                      </p:cMediaNode>
-                                    </p:audio>
-                                  </p:subTnLst>
-                                </p:cTn>
-                              </p:par>
-                              <p:par>
-                                <p:cTn id="7" presetID="3" presetClass="emph" presetSubtype="2" fill="hold" grpId="1" nodeType="withEffect">
-                                  <p:stCondLst>
-                                    <p:cond delay="0"/>
-                                  </p:stCondLst>
-                                  <p:childTnLst>
-                                    <p:animClr clrSpc="rgb" dir="cw">
-                                      <p:cBhvr override="childStyle">
-                                        <p:cTn id="8" dur="2000" fill="hold"/>
-                                        <p:tgtEl>
-                                          <p:spTgt spid="2">
-                                            <p:txEl>
-                                              <p:pRg st="0" end="0"/>
-                                            </p:txEl>
-                                          </p:spTgt>
-                                        </p:tgtEl>
-                                        <p:attrNameLst>
-                                          <p:attrName>style.color</p:attrName>
-                                        </p:attrNameLst>
-                                      </p:cBhvr>
-                                      <p:to>
-                                        <a:srgbClr val="D8A09C"/>
-                                      </p:to>
-                                    </p:animClr>
-                                  </p:childTnLst>
-                                </p:cTn>
-                              </p:par>
-                            </p:childTnLst>
-                          </p:cTn>
-                        </p:par>
-                      </p:childTnLst>
-                    </p:cTn>
-                  </p:par>
-                  <p:par>
-                    <p:cTn id="9" fill="hold">
-                      <p:stCondLst>
-                        <p:cond delay="indefinite"/>
-                      </p:stCondLst>
-                      <p:childTnLst>
-                        <p:par>
-                          <p:cTn id="10" fill="hold">
-                            <p:stCondLst>
-                              <p:cond delay="0"/>
-                            </p:stCondLst>
-                            <p:childTnLst>
-                              <p:par>
-                                <p:cTn id="11" presetID="3" presetClass="emph" presetSubtype="2" fill="hold" grpId="0" nodeType="clickEffect">
-                                  <p:stCondLst>
-                                    <p:cond delay="0"/>
-                                  </p:stCondLst>
-                                  <p:childTnLst>
-                                    <p:animClr clrSpc="rgb" dir="cw">
-                                      <p:cBhvr override="childStyle">
-                                        <p:cTn id="12" dur="500" fill="hold"/>
-                                        <p:tgtEl>
-                                          <p:spTgt spid="2">
-                                            <p:txEl>
-                                              <p:pRg st="1" end="1"/>
-                                            </p:txEl>
-                                          </p:spTgt>
-                                        </p:tgtEl>
-                                        <p:attrNameLst>
-                                          <p:attrName>style.color</p:attrName>
-                                        </p:attrNameLst>
-                                      </p:cBhvr>
-                                      <p:to>
-                                        <a:srgbClr val="FF0000"/>
-                                      </p:to>
-                                    </p:animClr>
-                                  </p:childTnLst>
-                                  <p:subTnLst>
-                                    <p:audio>
-                                      <p:cMediaNode>
-                                        <p:cTn display="0" masterRel="sameClick">
-                                          <p:stCondLst>
-                                            <p:cond evt="begin" delay="0">
-                                              <p:tn val="11"/>
-                                            </p:cond>
-                                          </p:stCondLst>
-                                          <p:endCondLst>
-                                            <p:cond evt="onStopAudio" delay="0">
-                                              <p:tgtEl>
-                                                <p:sldTgt/>
-                                              </p:tgtEl>
-                                            </p:cond>
-                                          </p:endCondLst>
-                                        </p:cTn>
-                                        <p:tgtEl>
-                                          <p:sndTgt r:embed="rId3" name="type.wav"/>
-                                        </p:tgtEl>
-                                      </p:cMediaNode>
-                                    </p:audio>
-                                  </p:subTnLst>
-                                </p:cTn>
-                              </p:par>
-                              <p:par>
-                                <p:cTn id="13" presetID="3" presetClass="emph" presetSubtype="2" fill="hold" grpId="0" nodeType="withEffect">
-                                  <p:stCondLst>
-                                    <p:cond delay="0"/>
-                                  </p:stCondLst>
-                                  <p:childTnLst>
-                                    <p:animClr clrSpc="rgb" dir="cw">
-                                      <p:cBhvr override="childStyle">
-                                        <p:cTn id="14" dur="500" fill="hold"/>
-                                        <p:tgtEl>
-                                          <p:spTgt spid="2">
-                                            <p:txEl>
-                                              <p:pRg st="2" end="2"/>
-                                            </p:txEl>
-                                          </p:spTgt>
-                                        </p:tgtEl>
-                                        <p:attrNameLst>
-                                          <p:attrName>style.color</p:attrName>
-                                        </p:attrNameLst>
-                                      </p:cBhvr>
-                                      <p:to>
-                                        <a:srgbClr val="FF0000"/>
-                                      </p:to>
-                                    </p:animClr>
-                                  </p:childTnLst>
-                                  <p:subTnLst>
-                                    <p:audio>
-                                      <p:cMediaNode>
-                                        <p:cTn display="0" masterRel="sameClick">
-                                          <p:stCondLst>
-                                            <p:cond evt="begin" delay="0">
-                                              <p:tn val="13"/>
-                                            </p:cond>
-                                          </p:stCondLst>
-                                          <p:endCondLst>
-                                            <p:cond evt="onStopAudio" delay="0">
-                                              <p:tgtEl>
-                                                <p:sldTgt/>
-                                              </p:tgtEl>
-                                            </p:cond>
-                                          </p:endCondLst>
-                                        </p:cTn>
-                                        <p:tgtEl>
-                                          <p:sndTgt r:embed="rId3" name="type.wav"/>
-                                        </p:tgtEl>
-                                      </p:cMediaNode>
-                                    </p:audio>
-                                  </p:subTnLst>
-                                </p:cTn>
-                              </p:par>
-                              <p:par>
-                                <p:cTn id="15" presetID="3" presetClass="emph" presetSubtype="2" fill="hold" grpId="1" nodeType="withEffect">
-                                  <p:stCondLst>
-                                    <p:cond delay="0"/>
-                                  </p:stCondLst>
-                                  <p:childTnLst>
-                                    <p:animClr clrSpc="rgb" dir="cw">
-                                      <p:cBhvr override="childStyle">
-                                        <p:cTn id="16" dur="2000" fill="hold"/>
-                                        <p:tgtEl>
-                                          <p:spTgt spid="2">
-                                            <p:txEl>
-                                              <p:pRg st="1" end="1"/>
-                                            </p:txEl>
-                                          </p:spTgt>
-                                        </p:tgtEl>
-                                        <p:attrNameLst>
-                                          <p:attrName>style.color</p:attrName>
-                                        </p:attrNameLst>
-                                      </p:cBhvr>
-                                      <p:to>
-                                        <a:srgbClr val="D8A09C"/>
-                                      </p:to>
-                                    </p:animClr>
-                                  </p:childTnLst>
-                                </p:cTn>
-                              </p:par>
-                              <p:par>
-                                <p:cTn id="17" presetID="3" presetClass="emph" presetSubtype="2" fill="hold" grpId="1" nodeType="withEffect">
-                                  <p:stCondLst>
-                                    <p:cond delay="0"/>
-                                  </p:stCondLst>
-                                  <p:childTnLst>
-                                    <p:animClr clrSpc="rgb" dir="cw">
-                                      <p:cBhvr override="childStyle">
-                                        <p:cTn id="18" dur="2000" fill="hold"/>
-                                        <p:tgtEl>
-                                          <p:spTgt spid="2">
-                                            <p:txEl>
-                                              <p:pRg st="2" end="2"/>
-                                            </p:txEl>
-                                          </p:spTgt>
-                                        </p:tgtEl>
-                                        <p:attrNameLst>
-                                          <p:attrName>style.color</p:attrName>
-                                        </p:attrNameLst>
-                                      </p:cBhvr>
-                                      <p:to>
-                                        <a:srgbClr val="D8A09C"/>
-                                      </p:to>
-                                    </p:animClr>
-                                  </p:childTnLst>
-                                </p:cTn>
-                              </p:par>
-                            </p:childTnLst>
-                          </p:cTn>
-                        </p:par>
-                      </p:childTnLst>
-                    </p:cTn>
-                  </p:par>
-                  <p:par>
-                    <p:cTn id="19" fill="hold">
-                      <p:stCondLst>
-                        <p:cond delay="indefinite"/>
-                      </p:stCondLst>
-                      <p:childTnLst>
-                        <p:par>
-                          <p:cTn id="20" fill="hold">
-                            <p:stCondLst>
-                              <p:cond delay="0"/>
-                            </p:stCondLst>
-                            <p:childTnLst>
-                              <p:par>
-                                <p:cTn id="21" presetID="1" presetClass="exit" presetSubtype="0" fill="hold" grpId="2" nodeType="clickEffect">
-                                  <p:stCondLst>
-                                    <p:cond delay="0"/>
-                                  </p:stCondLst>
-                                  <p:childTnLst>
-                                    <p:set>
-                                      <p:cBhvr>
-                                        <p:cTn id="22" dur="1" fill="hold">
-                                          <p:stCondLst>
-                                            <p:cond delay="0"/>
-                                          </p:stCondLst>
-                                        </p:cTn>
-                                        <p:tgtEl>
-                                          <p:spTgt spid="2">
-                                            <p:bg/>
-                                          </p:spTgt>
-                                        </p:tgtEl>
-                                        <p:attrNameLst>
-                                          <p:attrName>style.visibility</p:attrName>
-                                        </p:attrNameLst>
-                                      </p:cBhvr>
-                                      <p:to>
-                                        <p:strVal val="hidden"/>
-                                      </p:to>
-                                    </p:set>
-                                  </p:childTnLst>
-                                </p:cTn>
-                              </p:par>
-                            </p:childTnLst>
-                          </p:cTn>
-                        </p:par>
-                      </p:childTnLst>
-                    </p:cTn>
-                  </p:par>
-                </p:childTnLst>
-              </p:cTn>
-              <p:prevCondLst>
-                <p:cond evt="onPrev" delay="0">
-                  <p:tgtEl>
-                    <p:sldTgt/>
-                  </p:tgtEl>
-                </p:cond>
-              </p:prevCondLst>
-              <p:nextCondLst>
-                <p:cond evt="onNext" delay="0">
-                  <p:tgtEl>
-                    <p:sldTgt/>
-                  </p:tgtEl>
-                </p:cond>
-              </p:nextCondLst>
-            </p:seq>
-          </p:childTnLst>
-        </p:cTn>
-      </p:par>
-    </p:tnLst>
-    <p:bldLst>
-      <p:bldP spid="2" grpId="0" uiExpand="1" build="allAtOnce"/>
-      <p:bldP spid="2" grpId="1" uiExpand="1" build="allAtOnce"/>
-      <p:bldP spid="2" grpId="2" uiExpand="1" build="allAtOnce" animBg="1"/>
-    </p:bldLst>
-  </p:timing>
-</p:sld>
-</file>
-
-<file path=ppt/slides/slide4.xml><?xml version="1.0" encoding="utf-8"?>
-<p:sld xmlns:a="http://schemas.openxmlformats.org/drawingml/2006/main" xmlns:r="http://schemas.openxmlformats.org/officeDocument/2006/relationships" xmlns:p="http://schemas.openxmlformats.org/presentationml/2006/main">
-  <p:cSld>
-    <p:spTree>
-      <p:nvGrpSpPr>
-        <p:cNvPr id="1" name=""/>
-        <p:cNvGrpSpPr/>
-        <p:nvPr/>
-      </p:nvGrpSpPr>
-      <p:grpSpPr>
-        <a:xfrm>
-          <a:off x="0" y="0"/>
-          <a:ext cx="0" cy="0"/>
-          <a:chOff x="0" y="0"/>
-          <a:chExt cx="0" cy="0"/>
-        </a:xfrm>
-      </p:grpSpPr>
       <p:sp>
         <p:nvSpPr>
           <p:cNvPr id="3" name="文字方塊 2">
             <a:extLst>
               <a:ext uri="{FF2B5EF4-FFF2-40B4-BE49-F238E27FC236}">
-                <a16:creationId xmlns:a16="http://schemas.microsoft.com/office/drawing/2014/main" id="{47373A5A-8B35-4E4C-4D4B-0AA5B5D35F64}"/>
+                <a16:creationId xmlns:a16="http://schemas.microsoft.com/office/drawing/2014/main" id="{8ED4A5CD-D275-F3CD-78FF-2A57763D2B22}"/>
               </a:ext>
             </a:extLst>
           </p:cNvPr>
@@ -2748,8 +4818,147 @@
         </p:nvSpPr>
         <p:spPr>
           <a:xfrm>
-            <a:off x="16396" y="0"/>
-            <a:ext cx="4572000" cy="1284967"/>
+            <a:off x="179512" y="764704"/>
+            <a:ext cx="8184624" cy="1938992"/>
+          </a:xfrm>
+          <a:prstGeom prst="rect">
+            <a:avLst/>
+          </a:prstGeom>
+          <a:solidFill>
+            <a:schemeClr val="bg1">
+              <a:lumMod val="95000"/>
+            </a:schemeClr>
+          </a:solidFill>
+        </p:spPr>
+        <p:txBody>
+          <a:bodyPr wrap="square">
+            <a:spAutoFit/>
+          </a:bodyPr>
+          <a:lstStyle/>
+          <a:p>
+            <a:r>
+              <a:rPr lang="en-US" altLang="zh-TW" sz="1200" b="1" dirty="0">
+                <a:latin typeface="Consolas" panose="020B0609020204030204" pitchFamily="49" charset="0"/>
+              </a:rPr>
+              <a:t>text</a:t>
+            </a:r>
+          </a:p>
+          <a:p>
+            <a:endParaRPr lang="en-US" altLang="zh-TW" sz="1000" dirty="0">
+              <a:latin typeface="Consolas" panose="020B0609020204030204" pitchFamily="49" charset="0"/>
+            </a:endParaRPr>
+          </a:p>
+          <a:p>
+            <a:r>
+              <a:rPr lang="zh-TW" altLang="en-US" sz="1100" dirty="0">
+                <a:latin typeface="Consolas" panose="020B0609020204030204" pitchFamily="49" charset="0"/>
+              </a:rPr>
+              <a:t>##fileformat=VCFv4.2</a:t>
+            </a:r>
+            <a:endParaRPr lang="en-US" altLang="zh-TW" sz="1100" dirty="0">
+              <a:latin typeface="Consolas" panose="020B0609020204030204" pitchFamily="49" charset="0"/>
+            </a:endParaRPr>
+          </a:p>
+          <a:p>
+            <a:r>
+              <a:rPr lang="zh-TW" altLang="en-US" sz="1100" dirty="0">
+                <a:latin typeface="Consolas" panose="020B0609020204030204" pitchFamily="49" charset="0"/>
+              </a:rPr>
+              <a:t>##FILTER=&lt;ID=PASS,Description="All filters passed"&gt;</a:t>
+            </a:r>
+            <a:endParaRPr lang="en-US" altLang="zh-TW" sz="1100" dirty="0">
+              <a:latin typeface="Consolas" panose="020B0609020204030204" pitchFamily="49" charset="0"/>
+            </a:endParaRPr>
+          </a:p>
+          <a:p>
+            <a:r>
+              <a:rPr lang="zh-TW" altLang="en-US" sz="1100" dirty="0">
+                <a:latin typeface="Consolas" panose="020B0609020204030204" pitchFamily="49" charset="0"/>
+              </a:rPr>
+              <a:t>##INFO=&lt;ID=DP,Number=1,Type=Integer,Description="Total Depth"&gt;</a:t>
+            </a:r>
+            <a:endParaRPr lang="en-US" altLang="zh-TW" sz="1100" dirty="0">
+              <a:latin typeface="Consolas" panose="020B0609020204030204" pitchFamily="49" charset="0"/>
+            </a:endParaRPr>
+          </a:p>
+          <a:p>
+            <a:r>
+              <a:rPr lang="zh-TW" altLang="en-US" sz="1100" dirty="0">
+                <a:latin typeface="Consolas" panose="020B0609020204030204" pitchFamily="49" charset="0"/>
+              </a:rPr>
+              <a:t>##FORMAT=&lt;ID=GT,Number=1,Type=String,Description="Genotype"&gt;</a:t>
+            </a:r>
+            <a:endParaRPr lang="en-US" altLang="zh-TW" sz="1100" dirty="0">
+              <a:latin typeface="Consolas" panose="020B0609020204030204" pitchFamily="49" charset="0"/>
+            </a:endParaRPr>
+          </a:p>
+          <a:p>
+            <a:r>
+              <a:rPr lang="zh-TW" altLang="en-US" sz="1100" dirty="0">
+                <a:latin typeface="Consolas" panose="020B0609020204030204" pitchFamily="49" charset="0"/>
+              </a:rPr>
+              <a:t>#CHROM   POS       ID         REF  ALT  QUAL  FILTER  INFO    FORMAT  SAMPLE_001</a:t>
+            </a:r>
+            <a:endParaRPr lang="en-US" altLang="zh-TW" sz="1100" dirty="0">
+              <a:latin typeface="Consolas" panose="020B0609020204030204" pitchFamily="49" charset="0"/>
+            </a:endParaRPr>
+          </a:p>
+          <a:p>
+            <a:r>
+              <a:rPr lang="zh-TW" altLang="en-US" sz="1100" dirty="0">
+                <a:latin typeface="Consolas" panose="020B0609020204030204" pitchFamily="49" charset="0"/>
+              </a:rPr>
+              <a:t>chr1     10177     rs20177    A    G    60    PASS    DP=25   GT      0/1</a:t>
+            </a:r>
+            <a:endParaRPr lang="en-US" altLang="zh-TW" sz="1100" dirty="0">
+              <a:latin typeface="Consolas" panose="020B0609020204030204" pitchFamily="49" charset="0"/>
+            </a:endParaRPr>
+          </a:p>
+          <a:p>
+            <a:r>
+              <a:rPr lang="zh-TW" altLang="en-US" sz="1100" dirty="0">
+                <a:latin typeface="Consolas" panose="020B0609020204030204" pitchFamily="49" charset="0"/>
+              </a:rPr>
+              <a:t>chr1     10352     rs11221    T    C    58    PASS    DP=32   GT      1/1</a:t>
+            </a:r>
+            <a:endParaRPr lang="en-US" altLang="zh-TW" sz="1100" dirty="0">
+              <a:latin typeface="Consolas" panose="020B0609020204030204" pitchFamily="49" charset="0"/>
+            </a:endParaRPr>
+          </a:p>
+          <a:p>
+            <a:r>
+              <a:rPr lang="zh-TW" altLang="en-US" sz="1100" dirty="0">
+                <a:latin typeface="Consolas" panose="020B0609020204030204" pitchFamily="49" charset="0"/>
+              </a:rPr>
+              <a:t>chr2     24194     .          C    T    50    PASS    DP=18   GT      0/0</a:t>
+            </a:r>
+            <a:endParaRPr lang="en-US" altLang="zh-TW" sz="1100" dirty="0">
+              <a:latin typeface="Consolas" panose="020B0609020204030204" pitchFamily="49" charset="0"/>
+            </a:endParaRPr>
+          </a:p>
+          <a:p>
+            <a:endParaRPr lang="zh-TW" altLang="en-US" sz="1000" dirty="0">
+              <a:latin typeface="Consolas" panose="020B0609020204030204" pitchFamily="49" charset="0"/>
+            </a:endParaRPr>
+          </a:p>
+        </p:txBody>
+      </p:sp>
+      <p:sp>
+        <p:nvSpPr>
+          <p:cNvPr id="13" name="文字方塊 12">
+            <a:extLst>
+              <a:ext uri="{FF2B5EF4-FFF2-40B4-BE49-F238E27FC236}">
+                <a16:creationId xmlns:a16="http://schemas.microsoft.com/office/drawing/2014/main" id="{2B952942-4FE4-5020-2256-165B3E4BFAFA}"/>
+              </a:ext>
+            </a:extLst>
+          </p:cNvPr>
+          <p:cNvSpPr txBox="1"/>
+          <p:nvPr/>
+        </p:nvSpPr>
+        <p:spPr>
+          <a:xfrm>
+            <a:off x="323528" y="2846546"/>
+            <a:ext cx="8040608" cy="1878271"/>
           </a:xfrm>
           <a:prstGeom prst="rect">
             <a:avLst/>
@@ -2762,678 +4971,568 @@
           </a:bodyPr>
           <a:lstStyle/>
           <a:p>
-            <a:pPr marL="0" marR="0">
-              <a:spcBef>
-                <a:spcPts val="900"/>
-              </a:spcBef>
-              <a:spcAft>
-                <a:spcPts val="1200"/>
-              </a:spcAft>
-              <a:buNone/>
+            <a:pPr>
+              <a:lnSpc>
+                <a:spcPts val="1400"/>
+              </a:lnSpc>
             </a:pPr>
             <a:r>
-              <a:rPr lang="zh-TW" altLang="zh-TW" sz="1200" b="0" u="none" strike="noStrike" dirty="0">
-                <a:effectLst/>
-                <a:latin typeface="Google Sans"/>
-              </a:rPr>
-              <a:t>2025 年起，科學界已陸續發表了如 </a:t>
-            </a:r>
-            <a:r>
-              <a:rPr lang="zh-TW" altLang="zh-TW" sz="1200" b="0" u="none" strike="noStrike" dirty="0">
-                <a:effectLst/>
-                <a:latin typeface="Google Sans"/>
-                <a:hlinkClick r:id="rId2"/>
-              </a:rPr>
-              <a:t>STAgent</a:t>
-            </a:r>
-            <a:r>
-              <a:rPr lang="zh-TW" altLang="zh-TW" sz="1200" b="0" u="none" strike="noStrike" dirty="0">
-                <a:effectLst/>
-                <a:latin typeface="Google Sans"/>
-              </a:rPr>
-              <a:t>、</a:t>
-            </a:r>
-            <a:r>
-              <a:rPr lang="zh-TW" altLang="zh-TW" sz="1200" b="0" u="none" strike="noStrike" dirty="0">
-                <a:effectLst/>
-                <a:latin typeface="Google Sans"/>
-                <a:hlinkClick r:id="rId3"/>
-              </a:rPr>
-              <a:t>SpaCellAgent</a:t>
-            </a:r>
-            <a:r>
-              <a:rPr lang="zh-TW" altLang="zh-TW" sz="1200" b="0" u="none" strike="noStrike" dirty="0">
-                <a:effectLst/>
-                <a:latin typeface="Google Sans"/>
-              </a:rPr>
-              <a:t> 等突破性模型，證明了利用 AI Agent 自動化分析組織影像與空間定序數據、並給出臨床解讀的架構是完全走得通的。 [</a:t>
-            </a:r>
-            <a:r>
-              <a:rPr lang="zh-TW" altLang="zh-TW" sz="1200" b="0" u="none" strike="noStrike" dirty="0">
-                <a:effectLst/>
-                <a:latin typeface="Google Sans"/>
-                <a:hlinkClick r:id="rId2"/>
-              </a:rPr>
-              <a:t>1</a:t>
-            </a:r>
-            <a:r>
-              <a:rPr lang="zh-TW" altLang="zh-TW" sz="1200" b="0" u="none" strike="noStrike" dirty="0">
-                <a:effectLst/>
-                <a:latin typeface="Google Sans"/>
-              </a:rPr>
-              <a:t>, </a:t>
-            </a:r>
-            <a:r>
-              <a:rPr lang="zh-TW" altLang="zh-TW" sz="1200" b="0" u="none" strike="noStrike" dirty="0">
-                <a:effectLst/>
-                <a:latin typeface="Google Sans"/>
-                <a:hlinkClick r:id="rId3"/>
-              </a:rPr>
-              <a:t>2</a:t>
-            </a:r>
-            <a:r>
-              <a:rPr lang="zh-TW" altLang="zh-TW" sz="1200" b="0" u="none" strike="noStrike" dirty="0">
-                <a:effectLst/>
-                <a:latin typeface="Google Sans"/>
-              </a:rPr>
-              <a:t>]</a:t>
-            </a:r>
-          </a:p>
-          <a:p>
-            <a:pPr marL="0" marR="0">
-              <a:spcBef>
-                <a:spcPts val="900"/>
-              </a:spcBef>
-              <a:spcAft>
-                <a:spcPts val="1200"/>
-              </a:spcAft>
-              <a:buNone/>
-            </a:pPr>
-            <a:r>
-              <a:rPr lang="zh-TW" altLang="zh-TW" sz="1200" b="0" u="none" strike="noStrike" dirty="0">
-                <a:effectLst/>
-                <a:latin typeface="Google Sans"/>
-              </a:rPr>
-              <a:t>要實現這個極具潛力的構想，您的 AI Agent 需要具備以下底層架構，同時也必須克服相應的技術挑戰：</a:t>
-            </a:r>
-          </a:p>
-        </p:txBody>
-      </p:sp>
-      <p:sp>
-        <p:nvSpPr>
-          <p:cNvPr id="5" name="文字方塊 4">
-            <a:extLst>
-              <a:ext uri="{FF2B5EF4-FFF2-40B4-BE49-F238E27FC236}">
-                <a16:creationId xmlns:a16="http://schemas.microsoft.com/office/drawing/2014/main" id="{7E52BC1B-AF24-9BC0-A0BC-F8E96F42D463}"/>
-              </a:ext>
-            </a:extLst>
-          </p:cNvPr>
-          <p:cNvSpPr txBox="1"/>
-          <p:nvPr/>
-        </p:nvSpPr>
-        <p:spPr>
-          <a:xfrm>
-            <a:off x="395536" y="1518027"/>
-            <a:ext cx="4572000" cy="1831271"/>
-          </a:xfrm>
-          <a:prstGeom prst="rect">
-            <a:avLst/>
-          </a:prstGeom>
-          <a:noFill/>
-        </p:spPr>
-        <p:txBody>
-          <a:bodyPr wrap="square">
-            <a:spAutoFit/>
-          </a:bodyPr>
-          <a:lstStyle/>
-          <a:p>
-            <a:pPr marL="0" marR="0">
-              <a:spcBef>
-                <a:spcPts val="1800"/>
-              </a:spcBef>
-              <a:spcAft>
-                <a:spcPts val="900"/>
-              </a:spcAft>
-              <a:buNone/>
-            </a:pPr>
-            <a:r>
-              <a:rPr lang="zh-TW" altLang="zh-TW" sz="1500" b="1" u="none" strike="noStrike" dirty="0">
-                <a:effectLst/>
-                <a:latin typeface="Google Sans"/>
-              </a:rPr>
-              <a:t>核心架構：AI Agent 如何運作？</a:t>
-            </a:r>
-          </a:p>
-          <a:p>
-            <a:pPr marL="0" marR="0">
-              <a:spcBef>
-                <a:spcPts val="900"/>
-              </a:spcBef>
-              <a:spcAft>
-                <a:spcPts val="1200"/>
-              </a:spcAft>
-              <a:buNone/>
-            </a:pPr>
-            <a:r>
-              <a:rPr lang="zh-TW" altLang="zh-TW" sz="1200" b="0" u="none" strike="noStrike" dirty="0">
-                <a:effectLst/>
-                <a:latin typeface="Google Sans"/>
-              </a:rPr>
-              <a:t>您的問診 AI Agent 不能只靠一個 ChatGPT 類型的純文字模型，它必須是一個</a:t>
-            </a:r>
-            <a:r>
-              <a:rPr lang="zh-TW" altLang="zh-TW" sz="1200" b="1" u="none" strike="noStrike" dirty="0">
-                <a:effectLst/>
-                <a:latin typeface="Google Sans"/>
-              </a:rPr>
-              <a:t>多模態的複合系統</a:t>
-            </a:r>
-            <a:r>
-              <a:rPr lang="zh-TW" altLang="zh-TW" sz="1200" b="0" u="none" strike="noStrike" dirty="0">
-                <a:effectLst/>
-                <a:latin typeface="Google Sans"/>
-              </a:rPr>
-              <a:t>，通常包含以下三個核心層級</a:t>
-            </a:r>
-            <a:endParaRPr lang="en-US" altLang="zh-TW" sz="1200" b="0" u="none" strike="noStrike" dirty="0">
-              <a:effectLst/>
-              <a:latin typeface="Google Sans"/>
-            </a:endParaRPr>
-          </a:p>
-          <a:p>
-            <a:pPr marL="0" marR="0">
-              <a:spcBef>
-                <a:spcPts val="900"/>
-              </a:spcBef>
-              <a:spcAft>
-                <a:spcPts val="1200"/>
-              </a:spcAft>
-              <a:buNone/>
-            </a:pPr>
-            <a:endParaRPr lang="en-US" altLang="zh-TW" sz="1200" dirty="0">
-              <a:latin typeface="Google Sans"/>
-            </a:endParaRPr>
-          </a:p>
-          <a:p>
-            <a:pPr marL="0" marR="0">
-              <a:spcBef>
-                <a:spcPts val="900"/>
-              </a:spcBef>
-              <a:spcAft>
-                <a:spcPts val="1200"/>
-              </a:spcAft>
-              <a:buNone/>
-            </a:pPr>
-            <a:r>
-              <a:rPr lang="zh-TW" altLang="en-US" sz="1200" b="0" u="none" strike="noStrike">
-                <a:effectLst/>
-                <a:latin typeface="Google Sans"/>
-              </a:rPr>
-              <a:t>已經有的系統</a:t>
-            </a:r>
-            <a:endParaRPr lang="zh-TW" altLang="zh-TW" sz="1200" b="0" u="none" strike="noStrike" dirty="0">
-              <a:effectLst/>
-              <a:latin typeface="Google Sans"/>
-            </a:endParaRPr>
-          </a:p>
-        </p:txBody>
-      </p:sp>
-      <p:sp>
-        <p:nvSpPr>
-          <p:cNvPr id="11" name="文字方塊 10">
-            <a:extLst>
-              <a:ext uri="{FF2B5EF4-FFF2-40B4-BE49-F238E27FC236}">
-                <a16:creationId xmlns:a16="http://schemas.microsoft.com/office/drawing/2014/main" id="{678FD5A1-81A3-FADA-268B-9B17C5FF48ED}"/>
-              </a:ext>
-            </a:extLst>
-          </p:cNvPr>
-          <p:cNvSpPr txBox="1"/>
-          <p:nvPr/>
-        </p:nvSpPr>
-        <p:spPr>
-          <a:xfrm>
-            <a:off x="251520" y="4093403"/>
-            <a:ext cx="3445024" cy="646331"/>
-          </a:xfrm>
-          <a:prstGeom prst="rect">
-            <a:avLst/>
-          </a:prstGeom>
-          <a:solidFill>
-            <a:schemeClr val="accent6">
-              <a:lumMod val="20000"/>
-              <a:lumOff val="80000"/>
-            </a:schemeClr>
-          </a:solidFill>
-        </p:spPr>
-        <p:txBody>
-          <a:bodyPr wrap="square">
-            <a:spAutoFit/>
-          </a:bodyPr>
-          <a:lstStyle/>
-          <a:p>
-            <a:r>
-              <a:rPr lang="en-US" altLang="zh-TW" sz="1200" dirty="0">
-                <a:latin typeface="微軟正黑體" panose="020B0604030504040204" pitchFamily="34" charset="-120"/>
-                <a:ea typeface="微軟正黑體" panose="020B0604030504040204" pitchFamily="34" charset="-120"/>
-              </a:rPr>
-              <a:t>*</a:t>
-            </a:r>
-            <a:r>
-              <a:rPr lang="zh-TW" altLang="zh-TW" sz="1200" dirty="0">
-                <a:latin typeface="微軟正黑體" panose="020B0604030504040204" pitchFamily="34" charset="-120"/>
-                <a:ea typeface="微軟正黑體" panose="020B0604030504040204" pitchFamily="34" charset="-120"/>
-              </a:rPr>
-              <a:t> 感知與特徵提取層 (Perception Layer) </a:t>
-            </a:r>
-            <a:br>
-              <a:rPr lang="en-US" altLang="zh-TW" sz="1200" dirty="0">
-                <a:latin typeface="微軟正黑體" panose="020B0604030504040204" pitchFamily="34" charset="-120"/>
-                <a:ea typeface="微軟正黑體" panose="020B0604030504040204" pitchFamily="34" charset="-120"/>
-              </a:rPr>
-            </a:br>
-            <a:r>
-              <a:rPr lang="en-US" altLang="zh-TW" sz="1200" dirty="0">
-                <a:latin typeface="微軟正黑體" panose="020B0604030504040204" pitchFamily="34" charset="-120"/>
-                <a:ea typeface="微軟正黑體" panose="020B0604030504040204" pitchFamily="34" charset="-120"/>
-              </a:rPr>
-              <a:t>*</a:t>
-            </a:r>
-            <a:r>
-              <a:rPr lang="zh-TW" altLang="zh-TW" sz="1200" dirty="0">
-                <a:latin typeface="微軟正黑體" panose="020B0604030504040204" pitchFamily="34" charset="-120"/>
-                <a:ea typeface="微軟正黑體" panose="020B0604030504040204" pitchFamily="34" charset="-120"/>
-              </a:rPr>
-              <a:t> 病理大模型 </a:t>
-            </a:r>
-            <a:r>
-              <a:rPr lang="en-US" altLang="zh-TW" sz="1200" dirty="0">
-                <a:latin typeface="微軟正黑體" panose="020B0604030504040204" pitchFamily="34" charset="-120"/>
-                <a:ea typeface="微軟正黑體" panose="020B0604030504040204" pitchFamily="34" charset="-120"/>
-              </a:rPr>
-              <a:t>(</a:t>
-            </a:r>
-            <a:r>
-              <a:rPr lang="zh-TW" altLang="zh-TW" sz="1200" dirty="0">
-                <a:latin typeface="微軟正黑體" panose="020B0604030504040204" pitchFamily="34" charset="-120"/>
-                <a:ea typeface="微軟正黑體" panose="020B0604030504040204" pitchFamily="34" charset="-120"/>
-              </a:rPr>
-              <a:t>視覺</a:t>
-            </a:r>
-            <a:r>
-              <a:rPr lang="en-US" altLang="zh-TW" sz="1200" dirty="0">
-                <a:latin typeface="微軟正黑體" panose="020B0604030504040204" pitchFamily="34" charset="-120"/>
-                <a:ea typeface="微軟正黑體" panose="020B0604030504040204" pitchFamily="34" charset="-120"/>
-              </a:rPr>
-              <a:t>): </a:t>
-            </a:r>
-            <a:r>
-              <a:rPr lang="zh-TW" altLang="zh-TW" sz="1200" dirty="0">
-                <a:latin typeface="微軟正黑體" panose="020B0604030504040204" pitchFamily="34" charset="-120"/>
-                <a:ea typeface="微軟正黑體" panose="020B0604030504040204" pitchFamily="34" charset="-120"/>
-              </a:rPr>
-              <a:t>提取 H&amp;E 切片微環境特徵</a:t>
-            </a:r>
-            <a:br>
-              <a:rPr lang="en-US" altLang="zh-TW" sz="1200" dirty="0">
-                <a:latin typeface="微軟正黑體" panose="020B0604030504040204" pitchFamily="34" charset="-120"/>
-                <a:ea typeface="微軟正黑體" panose="020B0604030504040204" pitchFamily="34" charset="-120"/>
-              </a:rPr>
-            </a:br>
-            <a:r>
-              <a:rPr lang="en-US" altLang="zh-TW" sz="1200" dirty="0">
-                <a:latin typeface="微軟正黑體" panose="020B0604030504040204" pitchFamily="34" charset="-120"/>
-                <a:ea typeface="微軟正黑體" panose="020B0604030504040204" pitchFamily="34" charset="-120"/>
-              </a:rPr>
-              <a:t>*</a:t>
-            </a:r>
-            <a:r>
-              <a:rPr lang="zh-TW" altLang="zh-TW" sz="1200" dirty="0">
-                <a:latin typeface="微軟正黑體" panose="020B0604030504040204" pitchFamily="34" charset="-120"/>
-                <a:ea typeface="微軟正黑體" panose="020B0604030504040204" pitchFamily="34" charset="-120"/>
-              </a:rPr>
-              <a:t> 空間組學模型</a:t>
-            </a:r>
-            <a:r>
-              <a:rPr lang="en-US" altLang="zh-TW" sz="1200" dirty="0">
-                <a:latin typeface="微軟正黑體" panose="020B0604030504040204" pitchFamily="34" charset="-120"/>
-                <a:ea typeface="微軟正黑體" panose="020B0604030504040204" pitchFamily="34" charset="-120"/>
-              </a:rPr>
-              <a:t>(</a:t>
-            </a:r>
-            <a:r>
-              <a:rPr lang="zh-TW" altLang="zh-TW" sz="1200" dirty="0">
-                <a:latin typeface="微軟正黑體" panose="020B0604030504040204" pitchFamily="34" charset="-120"/>
-                <a:ea typeface="微軟正黑體" panose="020B0604030504040204" pitchFamily="34" charset="-120"/>
-              </a:rPr>
-              <a:t>數據): 識別細胞聚類與基因矩陣</a:t>
-            </a:r>
-            <a:endParaRPr lang="zh-TW" altLang="en-US" sz="1200" dirty="0">
-              <a:latin typeface="微軟正黑體" panose="020B0604030504040204" pitchFamily="34" charset="-120"/>
+              <a:rPr lang="zh-TW" altLang="en-US" sz="1100" dirty="0">
+                <a:latin typeface="微軟正黑體" panose="020B0604030504040204" pitchFamily="34" charset="-120"/>
+                <a:ea typeface="微軟正黑體" panose="020B0604030504040204" pitchFamily="34" charset="-120"/>
+              </a:rPr>
+              <a:t>🔍 </a:t>
+            </a:r>
+            <a:r>
+              <a:rPr lang="zh-TW" altLang="en-US" sz="1100" dirty="0">
+                <a:latin typeface="Consolas" panose="020B0609020204030204" pitchFamily="49" charset="0"/>
+                <a:ea typeface="微軟正黑體" panose="020B0604030504040204" pitchFamily="34" charset="-120"/>
+              </a:rPr>
+              <a:t>核心欄位白話拆解（表格每列代表一個 </a:t>
+            </a:r>
+            <a:r>
+              <a:rPr lang="en-US" altLang="zh-TW" sz="1100" dirty="0">
+                <a:latin typeface="Consolas" panose="020B0609020204030204" pitchFamily="49" charset="0"/>
+                <a:ea typeface="微軟正黑體" panose="020B0604030504040204" pitchFamily="34" charset="-120"/>
+              </a:rPr>
+              <a:t>SNP</a:t>
+            </a:r>
+            <a:r>
+              <a:rPr lang="zh-TW" altLang="en-US" sz="1100" dirty="0">
+                <a:latin typeface="Consolas" panose="020B0609020204030204" pitchFamily="49" charset="0"/>
+                <a:ea typeface="微軟正黑體" panose="020B0604030504040204" pitchFamily="34" charset="-120"/>
+              </a:rPr>
+              <a:t>）</a:t>
+            </a:r>
+            <a:endParaRPr lang="en-US" altLang="zh-TW" sz="1100" dirty="0">
+              <a:latin typeface="Consolas" panose="020B0609020204030204" pitchFamily="49" charset="0"/>
               <a:ea typeface="微軟正黑體" panose="020B0604030504040204" pitchFamily="34" charset="-120"/>
             </a:endParaRPr>
           </a:p>
-        </p:txBody>
-      </p:sp>
-      <p:sp>
-        <p:nvSpPr>
-          <p:cNvPr id="13" name="文字方塊 12">
-            <a:extLst>
-              <a:ext uri="{FF2B5EF4-FFF2-40B4-BE49-F238E27FC236}">
-                <a16:creationId xmlns:a16="http://schemas.microsoft.com/office/drawing/2014/main" id="{B0F4FF4A-5E78-A356-45BB-108C224742C8}"/>
-              </a:ext>
-            </a:extLst>
-          </p:cNvPr>
-          <p:cNvSpPr txBox="1"/>
-          <p:nvPr/>
-        </p:nvSpPr>
-        <p:spPr>
-          <a:xfrm>
-            <a:off x="251520" y="5054560"/>
-            <a:ext cx="3445024" cy="646331"/>
-          </a:xfrm>
-          <a:prstGeom prst="rect">
-            <a:avLst/>
-          </a:prstGeom>
-          <a:solidFill>
-            <a:schemeClr val="accent6">
-              <a:lumMod val="20000"/>
-              <a:lumOff val="80000"/>
-            </a:schemeClr>
-          </a:solidFill>
-        </p:spPr>
-        <p:txBody>
-          <a:bodyPr wrap="square">
-            <a:spAutoFit/>
-          </a:bodyPr>
-          <a:lstStyle/>
-          <a:p>
-            <a:r>
-              <a:rPr lang="en-US" altLang="zh-TW" sz="1200" dirty="0">
-                <a:latin typeface="微軟正黑體" panose="020B0604030504040204" pitchFamily="34" charset="-120"/>
-                <a:ea typeface="微軟正黑體" panose="020B0604030504040204" pitchFamily="34" charset="-120"/>
-              </a:rPr>
-              <a:t>* </a:t>
-            </a:r>
-            <a:r>
-              <a:rPr lang="zh-TW" altLang="zh-TW" sz="1200" dirty="0">
-                <a:latin typeface="微軟正黑體" panose="020B0604030504040204" pitchFamily="34" charset="-120"/>
-                <a:ea typeface="微軟正黑體" panose="020B0604030504040204" pitchFamily="34" charset="-120"/>
-              </a:rPr>
-              <a:t>思考與規劃大腦 (LLM Agent Brain)</a:t>
-            </a:r>
-            <a:endParaRPr lang="en-US" altLang="zh-TW" sz="1200" dirty="0">
-              <a:latin typeface="微軟正黑體" panose="020B0604030504040204" pitchFamily="34" charset="-120"/>
+          <a:p>
+            <a:pPr marL="228600" indent="-228600">
+              <a:lnSpc>
+                <a:spcPts val="1400"/>
+              </a:lnSpc>
+              <a:buAutoNum type="arabicPeriod"/>
+            </a:pPr>
+            <a:r>
+              <a:rPr lang="en-US" altLang="zh-TW" sz="1100" dirty="0">
+                <a:latin typeface="Consolas" panose="020B0609020204030204" pitchFamily="49" charset="0"/>
+                <a:ea typeface="微軟正黑體" panose="020B0604030504040204" pitchFamily="34" charset="-120"/>
+              </a:rPr>
+              <a:t>#CHROM (</a:t>
+            </a:r>
+            <a:r>
+              <a:rPr lang="zh-TW" altLang="en-US" sz="1100" dirty="0">
+                <a:latin typeface="Consolas" panose="020B0609020204030204" pitchFamily="49" charset="0"/>
+                <a:ea typeface="微軟正黑體" panose="020B0604030504040204" pitchFamily="34" charset="-120"/>
+              </a:rPr>
+              <a:t>染色體</a:t>
+            </a:r>
+            <a:r>
+              <a:rPr lang="en-US" altLang="zh-TW" sz="1100" dirty="0">
+                <a:latin typeface="Consolas" panose="020B0609020204030204" pitchFamily="49" charset="0"/>
+                <a:ea typeface="微軟正黑體" panose="020B0604030504040204" pitchFamily="34" charset="-120"/>
+              </a:rPr>
+              <a:t>)</a:t>
+            </a:r>
+            <a:r>
+              <a:rPr lang="zh-TW" altLang="en-US" sz="1100" dirty="0">
+                <a:latin typeface="Consolas" panose="020B0609020204030204" pitchFamily="49" charset="0"/>
+                <a:ea typeface="微軟正黑體" panose="020B0604030504040204" pitchFamily="34" charset="-120"/>
+              </a:rPr>
+              <a:t>：變異位在第幾號染色體（例如：</a:t>
+            </a:r>
+            <a:r>
+              <a:rPr lang="en-US" altLang="zh-TW" sz="1100" dirty="0">
+                <a:latin typeface="Consolas" panose="020B0609020204030204" pitchFamily="49" charset="0"/>
+                <a:ea typeface="微軟正黑體" panose="020B0604030504040204" pitchFamily="34" charset="-120"/>
+              </a:rPr>
+              <a:t>chr1</a:t>
+            </a:r>
+            <a:r>
+              <a:rPr lang="zh-TW" altLang="en-US" sz="1100" dirty="0">
+                <a:latin typeface="Consolas" panose="020B0609020204030204" pitchFamily="49" charset="0"/>
+                <a:ea typeface="微軟正黑體" panose="020B0604030504040204" pitchFamily="34" charset="-120"/>
+              </a:rPr>
+              <a:t>）。</a:t>
+            </a:r>
+            <a:endParaRPr lang="en-US" altLang="zh-TW" sz="1100" dirty="0">
+              <a:latin typeface="Consolas" panose="020B0609020204030204" pitchFamily="49" charset="0"/>
               <a:ea typeface="微軟正黑體" panose="020B0604030504040204" pitchFamily="34" charset="-120"/>
             </a:endParaRPr>
           </a:p>
           <a:p>
-            <a:r>
-              <a:rPr lang="en-US" altLang="zh-TW" sz="1200" dirty="0">
-                <a:latin typeface="微軟正黑體" panose="020B0604030504040204" pitchFamily="34" charset="-120"/>
-                <a:ea typeface="微軟正黑體" panose="020B0604030504040204" pitchFamily="34" charset="-120"/>
-              </a:rPr>
-              <a:t>* </a:t>
-            </a:r>
-            <a:r>
-              <a:rPr lang="zh-TW" altLang="zh-TW" sz="1200" dirty="0">
-                <a:latin typeface="微軟正黑體" panose="020B0604030504040204" pitchFamily="34" charset="-120"/>
-                <a:ea typeface="微軟正黑體" panose="020B0604030504040204" pitchFamily="34" charset="-120"/>
-              </a:rPr>
-              <a:t>呼叫計算工具 (如 Scanpy / Seurat 跑分析)</a:t>
-            </a:r>
-            <a:br>
-              <a:rPr lang="en-US" altLang="zh-TW" sz="1200" dirty="0">
-                <a:latin typeface="微軟正黑體" panose="020B0604030504040204" pitchFamily="34" charset="-120"/>
-                <a:ea typeface="微軟正黑體" panose="020B0604030504040204" pitchFamily="34" charset="-120"/>
-              </a:rPr>
-            </a:br>
-            <a:r>
-              <a:rPr lang="en-US" altLang="zh-TW" sz="1200" dirty="0">
-                <a:latin typeface="微軟正黑體" panose="020B0604030504040204" pitchFamily="34" charset="-120"/>
-                <a:ea typeface="微軟正黑體" panose="020B0604030504040204" pitchFamily="34" charset="-120"/>
-              </a:rPr>
-              <a:t>*</a:t>
-            </a:r>
-            <a:r>
-              <a:rPr lang="zh-TW" altLang="zh-TW" sz="1200" dirty="0">
-                <a:latin typeface="微軟正黑體" panose="020B0604030504040204" pitchFamily="34" charset="-120"/>
-                <a:ea typeface="微軟正黑體" panose="020B0604030504040204" pitchFamily="34" charset="-120"/>
-              </a:rPr>
-              <a:t> 檢索醫學文獻 (RAG) 尋找特定突變與藥物關係 </a:t>
-            </a:r>
-            <a:endParaRPr lang="zh-TW" altLang="en-US" sz="1200" dirty="0">
-              <a:latin typeface="微軟正黑體" panose="020B0604030504040204" pitchFamily="34" charset="-120"/>
+            <a:pPr marL="228600" indent="-228600">
+              <a:lnSpc>
+                <a:spcPts val="1400"/>
+              </a:lnSpc>
+              <a:buAutoNum type="arabicPeriod"/>
+            </a:pPr>
+            <a:r>
+              <a:rPr lang="en-US" altLang="zh-TW" sz="1100" dirty="0">
+                <a:latin typeface="Consolas" panose="020B0609020204030204" pitchFamily="49" charset="0"/>
+                <a:ea typeface="微軟正黑體" panose="020B0604030504040204" pitchFamily="34" charset="-120"/>
+              </a:rPr>
+              <a:t>POS (</a:t>
+            </a:r>
+            <a:r>
+              <a:rPr lang="zh-TW" altLang="en-US" sz="1100" dirty="0">
+                <a:latin typeface="Consolas" panose="020B0609020204030204" pitchFamily="49" charset="0"/>
+                <a:ea typeface="微軟正黑體" panose="020B0604030504040204" pitchFamily="34" charset="-120"/>
+              </a:rPr>
+              <a:t>基因座標</a:t>
+            </a:r>
+            <a:r>
+              <a:rPr lang="en-US" altLang="zh-TW" sz="1100" dirty="0">
+                <a:latin typeface="Consolas" panose="020B0609020204030204" pitchFamily="49" charset="0"/>
+                <a:ea typeface="微軟正黑體" panose="020B0604030504040204" pitchFamily="34" charset="-120"/>
+              </a:rPr>
+              <a:t>)</a:t>
+            </a:r>
+            <a:r>
+              <a:rPr lang="zh-TW" altLang="en-US" sz="1100" dirty="0">
+                <a:latin typeface="Consolas" panose="020B0609020204030204" pitchFamily="49" charset="0"/>
+                <a:ea typeface="微軟正黑體" panose="020B0604030504040204" pitchFamily="34" charset="-120"/>
+              </a:rPr>
+              <a:t>：該變異在染色體上的精確位置（例如：第 </a:t>
+            </a:r>
+            <a:r>
+              <a:rPr lang="en-US" altLang="zh-TW" sz="1100" dirty="0">
+                <a:latin typeface="Consolas" panose="020B0609020204030204" pitchFamily="49" charset="0"/>
+                <a:ea typeface="微軟正黑體" panose="020B0604030504040204" pitchFamily="34" charset="-120"/>
+              </a:rPr>
+              <a:t>10177 </a:t>
+            </a:r>
+            <a:r>
+              <a:rPr lang="zh-TW" altLang="en-US" sz="1100" dirty="0">
+                <a:latin typeface="Consolas" panose="020B0609020204030204" pitchFamily="49" charset="0"/>
+                <a:ea typeface="微軟正黑體" panose="020B0604030504040204" pitchFamily="34" charset="-120"/>
+              </a:rPr>
+              <a:t>個鹼基）。</a:t>
+            </a:r>
+            <a:endParaRPr lang="en-US" altLang="zh-TW" sz="1100" dirty="0">
+              <a:latin typeface="Consolas" panose="020B0609020204030204" pitchFamily="49" charset="0"/>
               <a:ea typeface="微軟正黑體" panose="020B0604030504040204" pitchFamily="34" charset="-120"/>
             </a:endParaRPr>
           </a:p>
-        </p:txBody>
-      </p:sp>
-      <p:sp>
-        <p:nvSpPr>
-          <p:cNvPr id="15" name="文字方塊 14">
-            <a:extLst>
-              <a:ext uri="{FF2B5EF4-FFF2-40B4-BE49-F238E27FC236}">
-                <a16:creationId xmlns:a16="http://schemas.microsoft.com/office/drawing/2014/main" id="{BDE8CB52-CE31-2E02-2A59-3B2DE2F0888F}"/>
-              </a:ext>
-            </a:extLst>
-          </p:cNvPr>
-          <p:cNvSpPr txBox="1"/>
-          <p:nvPr/>
-        </p:nvSpPr>
-        <p:spPr>
-          <a:xfrm>
-            <a:off x="713334" y="5848727"/>
-            <a:ext cx="2281758" cy="461665"/>
-          </a:xfrm>
-          <a:prstGeom prst="rect">
-            <a:avLst/>
-          </a:prstGeom>
-          <a:noFill/>
-          <a:ln>
-            <a:solidFill>
-              <a:schemeClr val="accent6"/>
-            </a:solidFill>
-          </a:ln>
-        </p:spPr>
-        <p:txBody>
-          <a:bodyPr wrap="square">
-            <a:spAutoFit/>
-          </a:bodyPr>
-          <a:lstStyle/>
-          <a:p>
-            <a:r>
-              <a:rPr lang="zh-TW" altLang="zh-TW" sz="1200" dirty="0">
-                <a:latin typeface="微軟正黑體" panose="020B0604030504040204" pitchFamily="34" charset="-120"/>
-                <a:ea typeface="微軟正黑體" panose="020B0604030504040204" pitchFamily="34" charset="-120"/>
-              </a:rPr>
-              <a:t>精準醫療問診解答、腫瘤微環境圖表、治療建議</a:t>
-            </a:r>
-            <a:endParaRPr lang="zh-TW" altLang="en-US" sz="1200" dirty="0">
-              <a:latin typeface="微軟正黑體" panose="020B0604030504040204" pitchFamily="34" charset="-120"/>
+          <a:p>
+            <a:pPr marL="228600" indent="-228600">
+              <a:lnSpc>
+                <a:spcPts val="1400"/>
+              </a:lnSpc>
+              <a:buAutoNum type="arabicPeriod"/>
+            </a:pPr>
+            <a:r>
+              <a:rPr lang="en-US" altLang="zh-TW" sz="1100" dirty="0">
+                <a:latin typeface="Consolas" panose="020B0609020204030204" pitchFamily="49" charset="0"/>
+                <a:ea typeface="微軟正黑體" panose="020B0604030504040204" pitchFamily="34" charset="-120"/>
+              </a:rPr>
+              <a:t>ID (</a:t>
+            </a:r>
+            <a:r>
+              <a:rPr lang="zh-TW" altLang="en-US" sz="1100" dirty="0">
+                <a:latin typeface="Consolas" panose="020B0609020204030204" pitchFamily="49" charset="0"/>
+                <a:ea typeface="微軟正黑體" panose="020B0604030504040204" pitchFamily="34" charset="-120"/>
+              </a:rPr>
+              <a:t>識別碼</a:t>
+            </a:r>
+            <a:r>
+              <a:rPr lang="en-US" altLang="zh-TW" sz="1100" dirty="0">
+                <a:latin typeface="Consolas" panose="020B0609020204030204" pitchFamily="49" charset="0"/>
+                <a:ea typeface="微軟正黑體" panose="020B0604030504040204" pitchFamily="34" charset="-120"/>
+              </a:rPr>
+              <a:t>)</a:t>
+            </a:r>
+            <a:r>
+              <a:rPr lang="zh-TW" altLang="en-US" sz="1100" dirty="0">
+                <a:latin typeface="Consolas" panose="020B0609020204030204" pitchFamily="49" charset="0"/>
+                <a:ea typeface="微軟正黑體" panose="020B0604030504040204" pitchFamily="34" charset="-120"/>
+              </a:rPr>
+              <a:t>：通常是國際標準的 </a:t>
+            </a:r>
+            <a:r>
+              <a:rPr lang="en-US" altLang="zh-TW" sz="1100" dirty="0">
+                <a:latin typeface="Consolas" panose="020B0609020204030204" pitchFamily="49" charset="0"/>
+                <a:ea typeface="微軟正黑體" panose="020B0604030504040204" pitchFamily="34" charset="-120"/>
+              </a:rPr>
+              <a:t>SNP </a:t>
+            </a:r>
+            <a:r>
+              <a:rPr lang="zh-TW" altLang="en-US" sz="1100" dirty="0">
+                <a:latin typeface="Consolas" panose="020B0609020204030204" pitchFamily="49" charset="0"/>
+                <a:ea typeface="微軟正黑體" panose="020B0604030504040204" pitchFamily="34" charset="-120"/>
+              </a:rPr>
+              <a:t>編號（例如：</a:t>
+            </a:r>
+            <a:r>
+              <a:rPr lang="en-US" altLang="zh-TW" sz="1100" dirty="0">
+                <a:latin typeface="Consolas" panose="020B0609020204030204" pitchFamily="49" charset="0"/>
+                <a:ea typeface="微軟正黑體" panose="020B0604030504040204" pitchFamily="34" charset="-120"/>
+              </a:rPr>
+              <a:t>rs20177</a:t>
+            </a:r>
+            <a:r>
+              <a:rPr lang="zh-TW" altLang="en-US" sz="1100" dirty="0">
+                <a:latin typeface="Consolas" panose="020B0609020204030204" pitchFamily="49" charset="0"/>
+                <a:ea typeface="微軟正黑體" panose="020B0604030504040204" pitchFamily="34" charset="-120"/>
+              </a:rPr>
+              <a:t>）。如果是尚未被記錄的全新突變，則顯示為一個點 </a:t>
+            </a:r>
+            <a:r>
+              <a:rPr lang="en-US" altLang="zh-TW" sz="1100" dirty="0">
+                <a:latin typeface="Consolas" panose="020B0609020204030204" pitchFamily="49" charset="0"/>
+                <a:ea typeface="微軟正黑體" panose="020B0604030504040204" pitchFamily="34" charset="-120"/>
+              </a:rPr>
+              <a:t>.</a:t>
+            </a:r>
+            <a:r>
+              <a:rPr lang="zh-TW" altLang="en-US" sz="1100" dirty="0">
+                <a:latin typeface="Consolas" panose="020B0609020204030204" pitchFamily="49" charset="0"/>
+                <a:ea typeface="微軟正黑體" panose="020B0604030504040204" pitchFamily="34" charset="-120"/>
+              </a:rPr>
+              <a:t>。</a:t>
+            </a:r>
+            <a:endParaRPr lang="en-US" altLang="zh-TW" sz="1100" dirty="0">
+              <a:latin typeface="Consolas" panose="020B0609020204030204" pitchFamily="49" charset="0"/>
               <a:ea typeface="微軟正黑體" panose="020B0604030504040204" pitchFamily="34" charset="-120"/>
             </a:endParaRPr>
           </a:p>
-        </p:txBody>
-      </p:sp>
-      <p:sp>
-        <p:nvSpPr>
-          <p:cNvPr id="17" name="文字方塊 16">
-            <a:extLst>
-              <a:ext uri="{FF2B5EF4-FFF2-40B4-BE49-F238E27FC236}">
-                <a16:creationId xmlns:a16="http://schemas.microsoft.com/office/drawing/2014/main" id="{30D8ED11-C401-96A3-079D-669C4D65EE49}"/>
-              </a:ext>
-            </a:extLst>
-          </p:cNvPr>
-          <p:cNvSpPr txBox="1"/>
-          <p:nvPr/>
-        </p:nvSpPr>
-        <p:spPr>
-          <a:xfrm>
-            <a:off x="745754" y="4768224"/>
-            <a:ext cx="1612404" cy="276999"/>
-          </a:xfrm>
-          <a:prstGeom prst="rect">
-            <a:avLst/>
-          </a:prstGeom>
-          <a:noFill/>
-        </p:spPr>
-        <p:txBody>
-          <a:bodyPr wrap="square">
-            <a:spAutoFit/>
-          </a:bodyPr>
-          <a:lstStyle/>
-          <a:p>
-            <a:pPr algn="ctr"/>
-            <a:r>
-              <a:rPr lang="zh-TW" altLang="zh-TW" sz="1200" dirty="0"/>
-              <a:t> (多模態特徵對齊) </a:t>
-            </a:r>
-            <a:endParaRPr lang="en-US" altLang="zh-TW" sz="1200" dirty="0"/>
-          </a:p>
-        </p:txBody>
-      </p:sp>
-      <p:sp>
-        <p:nvSpPr>
-          <p:cNvPr id="19" name="文字方塊 18">
-            <a:extLst>
-              <a:ext uri="{FF2B5EF4-FFF2-40B4-BE49-F238E27FC236}">
-                <a16:creationId xmlns:a16="http://schemas.microsoft.com/office/drawing/2014/main" id="{D371D88D-D6D1-AB1B-14E0-25D37481F646}"/>
-              </a:ext>
-            </a:extLst>
-          </p:cNvPr>
-          <p:cNvSpPr txBox="1"/>
-          <p:nvPr/>
-        </p:nvSpPr>
-        <p:spPr>
-          <a:xfrm>
-            <a:off x="716807" y="3328447"/>
-            <a:ext cx="2278285" cy="461665"/>
-          </a:xfrm>
-          <a:prstGeom prst="rect">
-            <a:avLst/>
-          </a:prstGeom>
-          <a:noFill/>
-          <a:ln>
-            <a:solidFill>
-              <a:schemeClr val="accent6"/>
-            </a:solidFill>
-          </a:ln>
-        </p:spPr>
-        <p:txBody>
-          <a:bodyPr wrap="square">
-            <a:spAutoFit/>
-          </a:bodyPr>
-          <a:lstStyle/>
-          <a:p>
-            <a:r>
-              <a:rPr lang="zh-TW" altLang="zh-TW" sz="1200" dirty="0">
-                <a:latin typeface="微軟正黑體" panose="020B0604030504040204" pitchFamily="34" charset="-120"/>
-                <a:ea typeface="微軟正黑體" panose="020B0604030504040204" pitchFamily="34" charset="-120"/>
-              </a:rPr>
-              <a:t>病理圖片</a:t>
-            </a:r>
-            <a:r>
-              <a:rPr lang="en-US" altLang="zh-TW" sz="1200" dirty="0">
-                <a:latin typeface="微軟正黑體" panose="020B0604030504040204" pitchFamily="34" charset="-120"/>
-                <a:ea typeface="微軟正黑體" panose="020B0604030504040204" pitchFamily="34" charset="-120"/>
-              </a:rPr>
-              <a:t>, </a:t>
-            </a:r>
-            <a:r>
-              <a:rPr lang="zh-TW" altLang="zh-TW" sz="1200" dirty="0">
-                <a:latin typeface="微軟正黑體" panose="020B0604030504040204" pitchFamily="34" charset="-120"/>
-                <a:ea typeface="微軟正黑體" panose="020B0604030504040204" pitchFamily="34" charset="-120"/>
-              </a:rPr>
-              <a:t>空間定序 CSV/BAM</a:t>
-            </a:r>
-            <a:r>
-              <a:rPr lang="en-US" altLang="zh-TW" sz="1200" dirty="0">
-                <a:latin typeface="微軟正黑體" panose="020B0604030504040204" pitchFamily="34" charset="-120"/>
-                <a:ea typeface="微軟正黑體" panose="020B0604030504040204" pitchFamily="34" charset="-120"/>
-              </a:rPr>
-              <a:t>,</a:t>
-            </a:r>
-            <a:r>
-              <a:rPr lang="zh-TW" altLang="zh-TW" sz="1200" dirty="0">
-                <a:latin typeface="微軟正黑體" panose="020B0604030504040204" pitchFamily="34" charset="-120"/>
-                <a:ea typeface="微軟正黑體" panose="020B0604030504040204" pitchFamily="34" charset="-120"/>
-              </a:rPr>
-              <a:t>臨床問題</a:t>
-            </a:r>
-            <a:endParaRPr lang="zh-TW" altLang="en-US" sz="1200" dirty="0">
-              <a:latin typeface="微軟正黑體" panose="020B0604030504040204" pitchFamily="34" charset="-120"/>
+          <a:p>
+            <a:pPr marL="228600" indent="-228600">
+              <a:lnSpc>
+                <a:spcPts val="1400"/>
+              </a:lnSpc>
+              <a:buAutoNum type="arabicPeriod"/>
+            </a:pPr>
+            <a:r>
+              <a:rPr lang="en-US" altLang="zh-TW" sz="1100" dirty="0">
+                <a:latin typeface="Consolas" panose="020B0609020204030204" pitchFamily="49" charset="0"/>
+                <a:ea typeface="微軟正黑體" panose="020B0604030504040204" pitchFamily="34" charset="-120"/>
+              </a:rPr>
+              <a:t>REF (</a:t>
+            </a:r>
+            <a:r>
+              <a:rPr lang="zh-TW" altLang="en-US" sz="1100" dirty="0">
+                <a:latin typeface="Consolas" panose="020B0609020204030204" pitchFamily="49" charset="0"/>
+                <a:ea typeface="微軟正黑體" panose="020B0604030504040204" pitchFamily="34" charset="-120"/>
+              </a:rPr>
+              <a:t>參考鹼基</a:t>
+            </a:r>
+            <a:r>
+              <a:rPr lang="en-US" altLang="zh-TW" sz="1100" dirty="0">
+                <a:latin typeface="Consolas" panose="020B0609020204030204" pitchFamily="49" charset="0"/>
+                <a:ea typeface="微軟正黑體" panose="020B0604030504040204" pitchFamily="34" charset="-120"/>
+              </a:rPr>
+              <a:t>)</a:t>
+            </a:r>
+            <a:r>
+              <a:rPr lang="zh-TW" altLang="en-US" sz="1100" dirty="0">
+                <a:latin typeface="Consolas" panose="020B0609020204030204" pitchFamily="49" charset="0"/>
+                <a:ea typeface="微軟正黑體" panose="020B0604030504040204" pitchFamily="34" charset="-120"/>
+              </a:rPr>
+              <a:t>：正常人類基因組在該位置的標準英文字母（例如：</a:t>
+            </a:r>
+            <a:r>
+              <a:rPr lang="en-US" altLang="zh-TW" sz="1100" dirty="0">
+                <a:latin typeface="Consolas" panose="020B0609020204030204" pitchFamily="49" charset="0"/>
+                <a:ea typeface="微軟正黑體" panose="020B0604030504040204" pitchFamily="34" charset="-120"/>
+              </a:rPr>
+              <a:t>A</a:t>
+            </a:r>
+            <a:r>
+              <a:rPr lang="zh-TW" altLang="en-US" sz="1100" dirty="0">
+                <a:latin typeface="Consolas" panose="020B0609020204030204" pitchFamily="49" charset="0"/>
+                <a:ea typeface="微軟正黑體" panose="020B0604030504040204" pitchFamily="34" charset="-120"/>
+              </a:rPr>
+              <a:t>）。</a:t>
+            </a:r>
+            <a:endParaRPr lang="en-US" altLang="zh-TW" sz="1100" dirty="0">
+              <a:latin typeface="Consolas" panose="020B0609020204030204" pitchFamily="49" charset="0"/>
               <a:ea typeface="微軟正黑體" panose="020B0604030504040204" pitchFamily="34" charset="-120"/>
             </a:endParaRPr>
           </a:p>
-        </p:txBody>
-      </p:sp>
-      <p:sp>
-        <p:nvSpPr>
-          <p:cNvPr id="21" name="文字方塊 20">
-            <a:extLst>
-              <a:ext uri="{FF2B5EF4-FFF2-40B4-BE49-F238E27FC236}">
-                <a16:creationId xmlns:a16="http://schemas.microsoft.com/office/drawing/2014/main" id="{0300F95D-991D-C471-C060-F16E57122A6A}"/>
-              </a:ext>
-            </a:extLst>
-          </p:cNvPr>
-          <p:cNvSpPr txBox="1"/>
-          <p:nvPr/>
-        </p:nvSpPr>
-        <p:spPr>
-          <a:xfrm>
-            <a:off x="2843808" y="2726055"/>
-            <a:ext cx="4576762" cy="369332"/>
-          </a:xfrm>
-          <a:prstGeom prst="rect">
-            <a:avLst/>
-          </a:prstGeom>
-          <a:noFill/>
-        </p:spPr>
-        <p:txBody>
-          <a:bodyPr wrap="square">
-            <a:spAutoFit/>
-          </a:bodyPr>
-          <a:lstStyle/>
-          <a:p>
-            <a:r>
-              <a:rPr lang="zh-TW" altLang="en-US"/>
-              <a:t>https://pubmed.ncbi.nlm.nih.gov/40236029/</a:t>
-            </a:r>
-            <a:endParaRPr lang="zh-TW" altLang="en-US" dirty="0"/>
-          </a:p>
-        </p:txBody>
-      </p:sp>
-      <p:sp>
-        <p:nvSpPr>
-          <p:cNvPr id="23" name="文字方塊 22">
-            <a:extLst>
-              <a:ext uri="{FF2B5EF4-FFF2-40B4-BE49-F238E27FC236}">
-                <a16:creationId xmlns:a16="http://schemas.microsoft.com/office/drawing/2014/main" id="{61E43B6B-E35B-6BDF-36C9-A4EBF6B0DB38}"/>
-              </a:ext>
-            </a:extLst>
-          </p:cNvPr>
-          <p:cNvSpPr txBox="1"/>
-          <p:nvPr/>
-        </p:nvSpPr>
-        <p:spPr>
-          <a:xfrm>
-            <a:off x="3203848" y="3244334"/>
-            <a:ext cx="4576762" cy="369332"/>
-          </a:xfrm>
-          <a:prstGeom prst="rect">
-            <a:avLst/>
-          </a:prstGeom>
-          <a:noFill/>
-        </p:spPr>
-        <p:txBody>
-          <a:bodyPr wrap="square">
-            <a:spAutoFit/>
-          </a:bodyPr>
-          <a:lstStyle/>
-          <a:p>
-            <a:r>
-              <a:rPr lang="zh-TW" altLang="en-US" dirty="0"/>
-              <a:t>https://arxiv.org/html/2607.07467v1</a:t>
+          <a:p>
+            <a:pPr marL="228600" indent="-228600">
+              <a:lnSpc>
+                <a:spcPts val="1400"/>
+              </a:lnSpc>
+              <a:buAutoNum type="arabicPeriod"/>
+            </a:pPr>
+            <a:r>
+              <a:rPr lang="en-US" altLang="zh-TW" sz="1100" dirty="0">
+                <a:latin typeface="Consolas" panose="020B0609020204030204" pitchFamily="49" charset="0"/>
+                <a:ea typeface="微軟正黑體" panose="020B0604030504040204" pitchFamily="34" charset="-120"/>
+              </a:rPr>
+              <a:t>ALT (</a:t>
+            </a:r>
+            <a:r>
+              <a:rPr lang="zh-TW" altLang="en-US" sz="1100" dirty="0">
+                <a:latin typeface="Consolas" panose="020B0609020204030204" pitchFamily="49" charset="0"/>
+                <a:ea typeface="微軟正黑體" panose="020B0604030504040204" pitchFamily="34" charset="-120"/>
+              </a:rPr>
+              <a:t>變異鹼基</a:t>
+            </a:r>
+            <a:r>
+              <a:rPr lang="en-US" altLang="zh-TW" sz="1100" dirty="0">
+                <a:latin typeface="Consolas" panose="020B0609020204030204" pitchFamily="49" charset="0"/>
+                <a:ea typeface="微軟正黑體" panose="020B0604030504040204" pitchFamily="34" charset="-120"/>
+              </a:rPr>
+              <a:t>)</a:t>
+            </a:r>
+            <a:r>
+              <a:rPr lang="zh-TW" altLang="en-US" sz="1100" dirty="0">
+                <a:latin typeface="Consolas" panose="020B0609020204030204" pitchFamily="49" charset="0"/>
+                <a:ea typeface="微軟正黑體" panose="020B0604030504040204" pitchFamily="34" charset="-120"/>
+              </a:rPr>
+              <a:t>：這個病患在該位置發生的突變英文字母（例如：變成了 </a:t>
+            </a:r>
+            <a:r>
+              <a:rPr lang="en-US" altLang="zh-TW" sz="1100" dirty="0">
+                <a:latin typeface="Consolas" panose="020B0609020204030204" pitchFamily="49" charset="0"/>
+                <a:ea typeface="微軟正黑體" panose="020B0604030504040204" pitchFamily="34" charset="-120"/>
+              </a:rPr>
+              <a:t>G</a:t>
+            </a:r>
+            <a:r>
+              <a:rPr lang="zh-TW" altLang="en-US" sz="1100" dirty="0">
+                <a:latin typeface="Consolas" panose="020B0609020204030204" pitchFamily="49" charset="0"/>
+                <a:ea typeface="微軟正黑體" panose="020B0604030504040204" pitchFamily="34" charset="-120"/>
+              </a:rPr>
+              <a:t>）。</a:t>
+            </a:r>
+            <a:endParaRPr lang="en-US" altLang="zh-TW" sz="1100" dirty="0">
+              <a:latin typeface="Consolas" panose="020B0609020204030204" pitchFamily="49" charset="0"/>
+              <a:ea typeface="微軟正黑體" panose="020B0604030504040204" pitchFamily="34" charset="-120"/>
+            </a:endParaRPr>
+          </a:p>
+          <a:p>
+            <a:pPr marL="228600" indent="-228600">
+              <a:lnSpc>
+                <a:spcPts val="1400"/>
+              </a:lnSpc>
+              <a:buAutoNum type="arabicPeriod"/>
+            </a:pPr>
+            <a:r>
+              <a:rPr lang="en-US" altLang="zh-TW" sz="1100" dirty="0">
+                <a:latin typeface="Consolas" panose="020B0609020204030204" pitchFamily="49" charset="0"/>
+                <a:ea typeface="微軟正黑體" panose="020B0604030504040204" pitchFamily="34" charset="-120"/>
+              </a:rPr>
+              <a:t>QUAL &amp; FILTER (</a:t>
+            </a:r>
+            <a:r>
+              <a:rPr lang="zh-TW" altLang="en-US" sz="1100" dirty="0">
+                <a:latin typeface="Consolas" panose="020B0609020204030204" pitchFamily="49" charset="0"/>
+                <a:ea typeface="微軟正黑體" panose="020B0604030504040204" pitchFamily="34" charset="-120"/>
+              </a:rPr>
+              <a:t>品質與過濾</a:t>
+            </a:r>
+            <a:r>
+              <a:rPr lang="en-US" altLang="zh-TW" sz="1100" dirty="0">
+                <a:latin typeface="Consolas" panose="020B0609020204030204" pitchFamily="49" charset="0"/>
+                <a:ea typeface="微軟正黑體" panose="020B0604030504040204" pitchFamily="34" charset="-120"/>
+              </a:rPr>
+              <a:t>)</a:t>
+            </a:r>
+            <a:r>
+              <a:rPr lang="zh-TW" altLang="en-US" sz="1100" dirty="0">
+                <a:latin typeface="Consolas" panose="020B0609020204030204" pitchFamily="49" charset="0"/>
+                <a:ea typeface="微軟正黑體" panose="020B0604030504040204" pitchFamily="34" charset="-120"/>
+              </a:rPr>
+              <a:t>：代表這次定序或晶片檢測的精確度。</a:t>
+            </a:r>
+            <a:r>
+              <a:rPr lang="en-US" altLang="zh-TW" sz="1100" dirty="0">
+                <a:latin typeface="Consolas" panose="020B0609020204030204" pitchFamily="49" charset="0"/>
+                <a:ea typeface="微軟正黑體" panose="020B0604030504040204" pitchFamily="34" charset="-120"/>
+              </a:rPr>
+              <a:t>PASS </a:t>
+            </a:r>
+            <a:r>
+              <a:rPr lang="zh-TW" altLang="en-US" sz="1100" dirty="0">
+                <a:latin typeface="Consolas" panose="020B0609020204030204" pitchFamily="49" charset="0"/>
+                <a:ea typeface="微軟正黑體" panose="020B0604030504040204" pitchFamily="34" charset="-120"/>
+              </a:rPr>
+              <a:t>代表這是一個高可信度、沒有雜訊的真實變異。</a:t>
+            </a:r>
+            <a:endParaRPr lang="en-US" altLang="zh-TW" sz="1100" dirty="0">
+              <a:latin typeface="Consolas" panose="020B0609020204030204" pitchFamily="49" charset="0"/>
+              <a:ea typeface="微軟正黑體" panose="020B0604030504040204" pitchFamily="34" charset="-120"/>
+            </a:endParaRPr>
+          </a:p>
+          <a:p>
+            <a:pPr marL="228600" indent="-228600">
+              <a:lnSpc>
+                <a:spcPts val="1400"/>
+              </a:lnSpc>
+              <a:buAutoNum type="arabicPeriod"/>
+            </a:pPr>
+            <a:r>
+              <a:rPr lang="en-US" altLang="zh-TW" sz="1100" dirty="0">
+                <a:latin typeface="Consolas" panose="020B0609020204030204" pitchFamily="49" charset="0"/>
+                <a:ea typeface="微軟正黑體" panose="020B0604030504040204" pitchFamily="34" charset="-120"/>
+              </a:rPr>
+              <a:t>INFO (</a:t>
+            </a:r>
+            <a:r>
+              <a:rPr lang="zh-TW" altLang="en-US" sz="1100" dirty="0">
+                <a:latin typeface="Consolas" panose="020B0609020204030204" pitchFamily="49" charset="0"/>
+                <a:ea typeface="微軟正黑體" panose="020B0604030504040204" pitchFamily="34" charset="-120"/>
+              </a:rPr>
+              <a:t>附加資訊</a:t>
+            </a:r>
+            <a:r>
+              <a:rPr lang="en-US" altLang="zh-TW" sz="1100" dirty="0">
+                <a:latin typeface="Consolas" panose="020B0609020204030204" pitchFamily="49" charset="0"/>
+                <a:ea typeface="微軟正黑體" panose="020B0604030504040204" pitchFamily="34" charset="-120"/>
+              </a:rPr>
+              <a:t>)</a:t>
+            </a:r>
+            <a:r>
+              <a:rPr lang="zh-TW" altLang="en-US" sz="1100" dirty="0">
+                <a:latin typeface="Consolas" panose="020B0609020204030204" pitchFamily="49" charset="0"/>
+                <a:ea typeface="微軟正黑體" panose="020B0604030504040204" pitchFamily="34" charset="-120"/>
+              </a:rPr>
+              <a:t>：記錄檢測時的技術參數。例如 </a:t>
+            </a:r>
+            <a:r>
+              <a:rPr lang="en-US" altLang="zh-TW" sz="1100" dirty="0">
+                <a:latin typeface="Consolas" panose="020B0609020204030204" pitchFamily="49" charset="0"/>
+                <a:ea typeface="微軟正黑體" panose="020B0604030504040204" pitchFamily="34" charset="-120"/>
+              </a:rPr>
+              <a:t>DP=25 </a:t>
+            </a:r>
+            <a:r>
+              <a:rPr lang="zh-TW" altLang="en-US" sz="1100" dirty="0">
+                <a:latin typeface="Consolas" panose="020B0609020204030204" pitchFamily="49" charset="0"/>
+                <a:ea typeface="微軟正黑體" panose="020B0604030504040204" pitchFamily="34" charset="-120"/>
+              </a:rPr>
+              <a:t>代表這個點位被反覆讀取、覆蓋了 </a:t>
+            </a:r>
+            <a:r>
+              <a:rPr lang="en-US" altLang="zh-TW" sz="1100" dirty="0">
+                <a:latin typeface="Consolas" panose="020B0609020204030204" pitchFamily="49" charset="0"/>
+                <a:ea typeface="微軟正黑體" panose="020B0604030504040204" pitchFamily="34" charset="-120"/>
+              </a:rPr>
+              <a:t>25 </a:t>
+            </a:r>
+            <a:r>
+              <a:rPr lang="zh-TW" altLang="en-US" sz="1100" dirty="0">
+                <a:latin typeface="Consolas" panose="020B0609020204030204" pitchFamily="49" charset="0"/>
+                <a:ea typeface="微軟正黑體" panose="020B0604030504040204" pitchFamily="34" charset="-120"/>
+              </a:rPr>
+              <a:t>次。</a:t>
+            </a:r>
+            <a:endParaRPr lang="en-US" altLang="zh-TW" sz="1100" dirty="0">
+              <a:latin typeface="Consolas" panose="020B0609020204030204" pitchFamily="49" charset="0"/>
+              <a:ea typeface="微軟正黑體" panose="020B0604030504040204" pitchFamily="34" charset="-120"/>
+            </a:endParaRPr>
+          </a:p>
+          <a:p>
+            <a:pPr marL="228600" indent="-228600">
+              <a:lnSpc>
+                <a:spcPts val="1400"/>
+              </a:lnSpc>
+              <a:buAutoNum type="arabicPeriod"/>
+            </a:pPr>
+            <a:r>
+              <a:rPr lang="en-US" altLang="zh-TW" sz="1100" dirty="0">
+                <a:latin typeface="Consolas" panose="020B0609020204030204" pitchFamily="49" charset="0"/>
+                <a:ea typeface="微軟正黑體" panose="020B0604030504040204" pitchFamily="34" charset="-120"/>
+              </a:rPr>
+              <a:t>FORMAT &amp; SAMPLE (</a:t>
+            </a:r>
+            <a:r>
+              <a:rPr lang="zh-TW" altLang="en-US" sz="1100" dirty="0">
+                <a:latin typeface="Consolas" panose="020B0609020204030204" pitchFamily="49" charset="0"/>
+                <a:ea typeface="微軟正黑體" panose="020B0604030504040204" pitchFamily="34" charset="-120"/>
+              </a:rPr>
+              <a:t>基因型結果</a:t>
+            </a:r>
+            <a:r>
+              <a:rPr lang="en-US" altLang="zh-TW" sz="1100" dirty="0">
+                <a:latin typeface="Consolas" panose="020B0609020204030204" pitchFamily="49" charset="0"/>
+                <a:ea typeface="微軟正黑體" panose="020B0604030504040204" pitchFamily="34" charset="-120"/>
+              </a:rPr>
+              <a:t>)</a:t>
+            </a:r>
+            <a:r>
+              <a:rPr lang="zh-TW" altLang="en-US" sz="1100" dirty="0">
+                <a:latin typeface="Consolas" panose="020B0609020204030204" pitchFamily="49" charset="0"/>
+                <a:ea typeface="微軟正黑體" panose="020B0604030504040204" pitchFamily="34" charset="-120"/>
+              </a:rPr>
+              <a:t>：這是解讀最重要的核心！</a:t>
+            </a:r>
+            <a:r>
+              <a:rPr lang="en-US" altLang="zh-TW" sz="1100" dirty="0">
+                <a:latin typeface="Consolas" panose="020B0609020204030204" pitchFamily="49" charset="0"/>
+                <a:ea typeface="微軟正黑體" panose="020B0604030504040204" pitchFamily="34" charset="-120"/>
+              </a:rPr>
+              <a:t>0/0</a:t>
+            </a:r>
+            <a:r>
+              <a:rPr lang="zh-TW" altLang="en-US" sz="1100" dirty="0">
+                <a:latin typeface="Consolas" panose="020B0609020204030204" pitchFamily="49" charset="0"/>
+                <a:ea typeface="微軟正黑體" panose="020B0604030504040204" pitchFamily="34" charset="-120"/>
+              </a:rPr>
+              <a:t>：代表病患兩個染色體都是 </a:t>
+            </a:r>
+            <a:r>
+              <a:rPr lang="en-US" altLang="zh-TW" sz="1100" dirty="0">
+                <a:latin typeface="Consolas" panose="020B0609020204030204" pitchFamily="49" charset="0"/>
+                <a:ea typeface="微軟正黑體" panose="020B0604030504040204" pitchFamily="34" charset="-120"/>
+              </a:rPr>
+              <a:t>REF</a:t>
+            </a:r>
+            <a:r>
+              <a:rPr lang="zh-TW" altLang="en-US" sz="1100" dirty="0">
+                <a:latin typeface="Consolas" panose="020B0609020204030204" pitchFamily="49" charset="0"/>
+                <a:ea typeface="微軟正黑體" panose="020B0604030504040204" pitchFamily="34" charset="-120"/>
+              </a:rPr>
+              <a:t>（未突變，如 </a:t>
+            </a:r>
+            <a:r>
+              <a:rPr lang="en-US" altLang="zh-TW" sz="1100" dirty="0">
+                <a:latin typeface="Consolas" panose="020B0609020204030204" pitchFamily="49" charset="0"/>
+                <a:ea typeface="微軟正黑體" panose="020B0604030504040204" pitchFamily="34" charset="-120"/>
+              </a:rPr>
+              <a:t>AA</a:t>
+            </a:r>
+            <a:r>
+              <a:rPr lang="zh-TW" altLang="en-US" sz="1100" dirty="0">
+                <a:latin typeface="Consolas" panose="020B0609020204030204" pitchFamily="49" charset="0"/>
+                <a:ea typeface="微軟正黑體" panose="020B0604030504040204" pitchFamily="34" charset="-120"/>
+              </a:rPr>
+              <a:t>）。</a:t>
+            </a:r>
+            <a:r>
+              <a:rPr lang="en-US" altLang="zh-TW" sz="1100" dirty="0">
+                <a:latin typeface="Consolas" panose="020B0609020204030204" pitchFamily="49" charset="0"/>
+                <a:ea typeface="微軟正黑體" panose="020B0604030504040204" pitchFamily="34" charset="-120"/>
+              </a:rPr>
+              <a:t>0/1</a:t>
+            </a:r>
+            <a:r>
+              <a:rPr lang="zh-TW" altLang="en-US" sz="1100" dirty="0">
+                <a:latin typeface="Consolas" panose="020B0609020204030204" pitchFamily="49" charset="0"/>
+                <a:ea typeface="微軟正黑體" panose="020B0604030504040204" pitchFamily="34" charset="-120"/>
+              </a:rPr>
+              <a:t>：代表異型合子（雜合突變，一個正常一個突變，如 </a:t>
+            </a:r>
+            <a:r>
+              <a:rPr lang="en-US" altLang="zh-TW" sz="1100" dirty="0">
+                <a:latin typeface="Consolas" panose="020B0609020204030204" pitchFamily="49" charset="0"/>
+                <a:ea typeface="微軟正黑體" panose="020B0604030504040204" pitchFamily="34" charset="-120"/>
+              </a:rPr>
+              <a:t>AG</a:t>
+            </a:r>
+            <a:r>
+              <a:rPr lang="zh-TW" altLang="en-US" sz="1100" dirty="0">
+                <a:latin typeface="Consolas" panose="020B0609020204030204" pitchFamily="49" charset="0"/>
+                <a:ea typeface="微軟正黑體" panose="020B0604030504040204" pitchFamily="34" charset="-120"/>
+              </a:rPr>
+              <a:t>）。</a:t>
             </a:r>
           </a:p>
         </p:txBody>
@@ -3441,7 +5540,7 @@
     </p:spTree>
     <p:extLst>
       <p:ext uri="{BB962C8B-B14F-4D97-AF65-F5344CB8AC3E}">
-        <p14:creationId xmlns:p14="http://schemas.microsoft.com/office/powerpoint/2010/main" val="2359596451"/>
+        <p14:creationId xmlns:p14="http://schemas.microsoft.com/office/powerpoint/2010/main" val="3195498987"/>
       </p:ext>
     </p:extLst>
   </p:cSld>
@@ -3468,7 +5567,13 @@
   <p:cSld>
     <p:spTree>
       <p:nvGrpSpPr>
-        <p:cNvPr id="1" name=""/>
+        <p:cNvPr id="1" name="">
+          <a:extLst>
+            <a:ext uri="{FF2B5EF4-FFF2-40B4-BE49-F238E27FC236}">
+              <a16:creationId xmlns:a16="http://schemas.microsoft.com/office/drawing/2014/main" id="{D3D33158-F686-671C-2ABD-1B9BF719CC88}"/>
+            </a:ext>
+          </a:extLst>
+        </p:cNvPr>
         <p:cNvGrpSpPr/>
         <p:nvPr/>
       </p:nvGrpSpPr>
@@ -3482,10 +5587,10 @@
       </p:grpSpPr>
       <p:sp>
         <p:nvSpPr>
-          <p:cNvPr id="5" name="文字方塊 4">
+          <p:cNvPr id="6" name="文字方塊 5">
             <a:extLst>
               <a:ext uri="{FF2B5EF4-FFF2-40B4-BE49-F238E27FC236}">
-                <a16:creationId xmlns:a16="http://schemas.microsoft.com/office/drawing/2014/main" id="{B98FC580-18F7-3B6C-2674-F6724C62BCE7}"/>
+                <a16:creationId xmlns:a16="http://schemas.microsoft.com/office/drawing/2014/main" id="{3A4ABE55-8661-AC59-3A83-3125F3D55BD9}"/>
               </a:ext>
             </a:extLst>
           </p:cNvPr>
@@ -3494,8 +5599,777 @@
         </p:nvSpPr>
         <p:spPr>
           <a:xfrm>
-            <a:off x="251520" y="1586032"/>
-            <a:ext cx="8640960" cy="2585323"/>
+            <a:off x="179512" y="1196752"/>
+            <a:ext cx="8184624" cy="4248472"/>
+          </a:xfrm>
+          <a:prstGeom prst="rect">
+            <a:avLst/>
+          </a:prstGeom>
+          <a:solidFill>
+            <a:srgbClr val="EAEAEA"/>
+          </a:solidFill>
+        </p:spPr>
+        <p:txBody>
+          <a:bodyPr wrap="none">
+            <a:noAutofit/>
+          </a:bodyPr>
+          <a:lstStyle/>
+          <a:p>
+            <a:pPr marL="0" marR="0" rtl="0">
+              <a:lnSpc>
+                <a:spcPts val="1200"/>
+              </a:lnSpc>
+              <a:buNone/>
+            </a:pPr>
+            <a:r>
+              <a:rPr lang="zh-TW" altLang="zh-TW" sz="1000" b="0" u="none" strike="noStrike" dirty="0">
+                <a:solidFill>
+                  <a:srgbClr val="7030A0"/>
+                </a:solidFill>
+                <a:effectLst/>
+                <a:latin typeface="Consolas" panose="020B0609020204030204" pitchFamily="49" charset="0"/>
+              </a:rPr>
+              <a:t>import</a:t>
+            </a:r>
+            <a:r>
+              <a:rPr lang="zh-TW" altLang="zh-TW" sz="1000" b="0" u="none" strike="noStrike" dirty="0">
+                <a:effectLst/>
+                <a:latin typeface="Consolas" panose="020B0609020204030204" pitchFamily="49" charset="0"/>
+              </a:rPr>
+              <a:t> </a:t>
+            </a:r>
+            <a:r>
+              <a:rPr lang="en-US" altLang="zh-TW" sz="1000" b="0" u="none" strike="noStrike" dirty="0">
+                <a:solidFill>
+                  <a:schemeClr val="accent6">
+                    <a:lumMod val="50000"/>
+                  </a:schemeClr>
+                </a:solidFill>
+                <a:effectLst/>
+                <a:latin typeface="Consolas" panose="020B0609020204030204" pitchFamily="49" charset="0"/>
+              </a:rPr>
+              <a:t>requests</a:t>
+            </a:r>
+            <a:endParaRPr lang="zh-TW" altLang="zh-TW" sz="1000" b="0" u="none" strike="noStrike" dirty="0">
+              <a:solidFill>
+                <a:schemeClr val="accent6">
+                  <a:lumMod val="50000"/>
+                </a:schemeClr>
+              </a:solidFill>
+              <a:effectLst/>
+              <a:latin typeface="Consolas" panose="020B0609020204030204" pitchFamily="49" charset="0"/>
+            </a:endParaRPr>
+          </a:p>
+          <a:p>
+            <a:pPr marL="0" marR="0" rtl="0">
+              <a:lnSpc>
+                <a:spcPts val="1200"/>
+              </a:lnSpc>
+              <a:buNone/>
+            </a:pPr>
+            <a:endParaRPr lang="zh-TW" altLang="zh-TW" sz="1000" b="0" u="none" strike="noStrike" dirty="0">
+              <a:effectLst/>
+              <a:latin typeface="Consolas" panose="020B0609020204030204" pitchFamily="49" charset="0"/>
+            </a:endParaRPr>
+          </a:p>
+          <a:p>
+            <a:pPr>
+              <a:lnSpc>
+                <a:spcPts val="1200"/>
+              </a:lnSpc>
+            </a:pPr>
+            <a:r>
+              <a:rPr lang="en-US" altLang="zh-TW" sz="1000" dirty="0">
+                <a:solidFill>
+                  <a:srgbClr val="7030A0"/>
+                </a:solidFill>
+                <a:latin typeface="Consolas" panose="020B0609020204030204" pitchFamily="49" charset="0"/>
+              </a:rPr>
+              <a:t>Def </a:t>
+            </a:r>
+            <a:r>
+              <a:rPr lang="en-US" altLang="zh-TW" sz="1000" dirty="0">
+                <a:solidFill>
+                  <a:schemeClr val="accent6">
+                    <a:lumMod val="50000"/>
+                  </a:schemeClr>
+                </a:solidFill>
+                <a:latin typeface="Consolas" panose="020B0609020204030204" pitchFamily="49" charset="0"/>
+              </a:rPr>
+              <a:t>query_regulatory_features</a:t>
+            </a:r>
+            <a:r>
+              <a:rPr lang="en-US" altLang="zh-TW" sz="1000" b="0" u="none" strike="noStrike" dirty="0">
+                <a:effectLst/>
+                <a:latin typeface="Consolas" panose="020B0609020204030204" pitchFamily="49" charset="0"/>
+              </a:rPr>
+              <a:t>(</a:t>
+            </a:r>
+            <a:r>
+              <a:rPr lang="en-US" altLang="zh-TW" sz="1000" dirty="0">
+                <a:solidFill>
+                  <a:schemeClr val="accent6">
+                    <a:lumMod val="50000"/>
+                  </a:schemeClr>
+                </a:solidFill>
+                <a:latin typeface="Consolas" panose="020B0609020204030204" pitchFamily="49" charset="0"/>
+              </a:rPr>
+              <a:t>rsid</a:t>
+            </a:r>
+            <a:r>
+              <a:rPr lang="en-US" altLang="zh-TW" sz="1000" b="0" u="none" strike="noStrike" dirty="0">
+                <a:effectLst/>
+                <a:latin typeface="Consolas" panose="020B0609020204030204" pitchFamily="49" charset="0"/>
+              </a:rPr>
+              <a:t>: str):</a:t>
+            </a:r>
+            <a:endParaRPr lang="zh-TW" altLang="zh-TW" sz="1000" b="0" u="none" strike="noStrike" dirty="0">
+              <a:effectLst/>
+              <a:latin typeface="Consolas" panose="020B0609020204030204" pitchFamily="49" charset="0"/>
+            </a:endParaRPr>
+          </a:p>
+          <a:p>
+            <a:pPr>
+              <a:lnSpc>
+                <a:spcPts val="1200"/>
+              </a:lnSpc>
+            </a:pPr>
+            <a:r>
+              <a:rPr lang="en-US" altLang="zh-TW" sz="1000" dirty="0">
+                <a:solidFill>
+                  <a:srgbClr val="339933"/>
+                </a:solidFill>
+                <a:latin typeface="Consolas" panose="020B0609020204030204" pitchFamily="49" charset="0"/>
+              </a:rPr>
+              <a:t>"""</a:t>
+            </a:r>
+          </a:p>
+          <a:p>
+            <a:pPr>
+              <a:lnSpc>
+                <a:spcPts val="1200"/>
+              </a:lnSpc>
+            </a:pPr>
+            <a:r>
+              <a:rPr lang="en-US" altLang="zh-TW" sz="1000" dirty="0">
+                <a:solidFill>
+                  <a:srgbClr val="339933"/>
+                </a:solidFill>
+                <a:latin typeface="Consolas" panose="020B0609020204030204" pitchFamily="49" charset="0"/>
+              </a:rPr>
+              <a:t>Input the rsID of an SNP to query its regulatory feature score and details in RegulomeDB</a:t>
+            </a:r>
+          </a:p>
+          <a:p>
+            <a:pPr>
+              <a:lnSpc>
+                <a:spcPts val="1200"/>
+              </a:lnSpc>
+            </a:pPr>
+            <a:r>
+              <a:rPr lang="en-US" altLang="zh-TW" sz="1000" dirty="0">
+                <a:solidFill>
+                  <a:srgbClr val="339933"/>
+                </a:solidFill>
+                <a:latin typeface="Consolas" panose="020B0609020204030204" pitchFamily="49" charset="0"/>
+              </a:rPr>
+              <a:t>"""</a:t>
+            </a:r>
+          </a:p>
+          <a:p>
+            <a:pPr>
+              <a:lnSpc>
+                <a:spcPts val="1200"/>
+              </a:lnSpc>
+            </a:pPr>
+            <a:r>
+              <a:rPr lang="en-US" altLang="zh-TW" sz="1000" b="0" u="none" strike="noStrike" dirty="0">
+                <a:solidFill>
+                  <a:schemeClr val="tx1">
+                    <a:lumMod val="50000"/>
+                    <a:lumOff val="50000"/>
+                  </a:schemeClr>
+                </a:solidFill>
+                <a:effectLst/>
+                <a:latin typeface="Consolas" panose="020B0609020204030204" pitchFamily="49" charset="0"/>
+              </a:rPr>
+              <a:t>#</a:t>
+            </a:r>
+            <a:r>
+              <a:rPr lang="en-US" altLang="zh-TW" sz="1000" dirty="0">
+                <a:solidFill>
+                  <a:schemeClr val="tx1">
+                    <a:lumMod val="50000"/>
+                    <a:lumOff val="50000"/>
+                  </a:schemeClr>
+                </a:solidFill>
+                <a:latin typeface="Consolas" panose="020B0609020204030204" pitchFamily="49" charset="0"/>
+              </a:rPr>
+              <a:t> Using public API of MyVariant.info</a:t>
+            </a:r>
+            <a:endParaRPr lang="en-US" altLang="zh-TW" sz="1000" b="0" u="none" strike="noStrike" dirty="0">
+              <a:solidFill>
+                <a:schemeClr val="tx1">
+                  <a:lumMod val="50000"/>
+                  <a:lumOff val="50000"/>
+                </a:schemeClr>
+              </a:solidFill>
+              <a:effectLst/>
+              <a:latin typeface="Consolas" panose="020B0609020204030204" pitchFamily="49" charset="0"/>
+            </a:endParaRPr>
+          </a:p>
+          <a:p>
+            <a:r>
+              <a:rPr lang="en-US" altLang="zh-TW" sz="1000" dirty="0">
+                <a:latin typeface="Consolas" panose="020B0609020204030204" pitchFamily="49" charset="0"/>
+              </a:rPr>
+              <a:t>    </a:t>
+            </a:r>
+            <a:r>
+              <a:rPr lang="en-US" altLang="zh-TW" sz="1000" dirty="0">
+                <a:solidFill>
+                  <a:schemeClr val="accent6">
+                    <a:lumMod val="50000"/>
+                  </a:schemeClr>
+                </a:solidFill>
+                <a:latin typeface="Consolas" panose="020B0609020204030204" pitchFamily="49" charset="0"/>
+              </a:rPr>
+              <a:t>url</a:t>
+            </a:r>
+            <a:r>
+              <a:rPr lang="en-US" altLang="zh-TW" sz="1000" dirty="0">
+                <a:latin typeface="Consolas" panose="020B0609020204030204" pitchFamily="49" charset="0"/>
+              </a:rPr>
+              <a:t> = </a:t>
+            </a:r>
+            <a:r>
+              <a:rPr lang="en-US" altLang="zh-TW" sz="1000" dirty="0">
+                <a:solidFill>
+                  <a:srgbClr val="339933"/>
+                </a:solidFill>
+                <a:latin typeface="Consolas" panose="020B0609020204030204" pitchFamily="49" charset="0"/>
+              </a:rPr>
+              <a:t>f"https://myvariant.info</a:t>
+            </a:r>
+            <a:r>
+              <a:rPr lang="en-US" altLang="zh-TW" sz="1000" dirty="0">
+                <a:latin typeface="Consolas" panose="020B0609020204030204" pitchFamily="49" charset="0"/>
+              </a:rPr>
+              <a:t>{rsid}</a:t>
+            </a:r>
+            <a:r>
+              <a:rPr lang="en-US" altLang="zh-TW" sz="1000" dirty="0">
+                <a:solidFill>
+                  <a:srgbClr val="339933"/>
+                </a:solidFill>
+                <a:latin typeface="Consolas" panose="020B0609020204030204" pitchFamily="49" charset="0"/>
+              </a:rPr>
+              <a:t>"</a:t>
+            </a:r>
+          </a:p>
+          <a:p>
+            <a:r>
+              <a:rPr lang="en-US" altLang="zh-TW" sz="1000" dirty="0">
+                <a:latin typeface="Consolas" panose="020B0609020204030204" pitchFamily="49" charset="0"/>
+              </a:rPr>
+              <a:t>    </a:t>
+            </a:r>
+            <a:r>
+              <a:rPr lang="en-US" altLang="zh-TW" sz="1000" dirty="0">
+                <a:solidFill>
+                  <a:schemeClr val="accent6">
+                    <a:lumMod val="50000"/>
+                  </a:schemeClr>
+                </a:solidFill>
+                <a:latin typeface="Consolas" panose="020B0609020204030204" pitchFamily="49" charset="0"/>
+              </a:rPr>
+              <a:t>response</a:t>
+            </a:r>
+            <a:r>
+              <a:rPr lang="en-US" altLang="zh-TW" sz="1000" dirty="0">
+                <a:latin typeface="Consolas" panose="020B0609020204030204" pitchFamily="49" charset="0"/>
+              </a:rPr>
+              <a:t> = requests.get(url)</a:t>
+            </a:r>
+          </a:p>
+          <a:p>
+            <a:r>
+              <a:rPr lang="en-US" altLang="zh-TW" sz="1000" dirty="0">
+                <a:latin typeface="Consolas" panose="020B0609020204030204" pitchFamily="49" charset="0"/>
+              </a:rPr>
+              <a:t>    </a:t>
+            </a:r>
+          </a:p>
+          <a:p>
+            <a:r>
+              <a:rPr lang="en-US" altLang="zh-TW" sz="1000" dirty="0">
+                <a:latin typeface="Consolas" panose="020B0609020204030204" pitchFamily="49" charset="0"/>
+              </a:rPr>
+              <a:t>    </a:t>
+            </a:r>
+            <a:r>
+              <a:rPr lang="en-US" altLang="zh-TW" sz="1000" dirty="0">
+                <a:solidFill>
+                  <a:srgbClr val="7030A0"/>
+                </a:solidFill>
+                <a:latin typeface="Consolas" panose="020B0609020204030204" pitchFamily="49" charset="0"/>
+              </a:rPr>
+              <a:t>if</a:t>
+            </a:r>
+            <a:r>
+              <a:rPr lang="en-US" altLang="zh-TW" sz="1000" dirty="0">
+                <a:latin typeface="Consolas" panose="020B0609020204030204" pitchFamily="49" charset="0"/>
+              </a:rPr>
+              <a:t> response.status_code == </a:t>
+            </a:r>
+            <a:r>
+              <a:rPr lang="en-US" altLang="zh-TW" sz="1000" dirty="0">
+                <a:solidFill>
+                  <a:schemeClr val="accent6">
+                    <a:lumMod val="50000"/>
+                  </a:schemeClr>
+                </a:solidFill>
+                <a:latin typeface="Consolas" panose="020B0609020204030204" pitchFamily="49" charset="0"/>
+              </a:rPr>
+              <a:t>200</a:t>
+            </a:r>
+            <a:r>
+              <a:rPr lang="en-US" altLang="zh-TW" sz="1000" dirty="0">
+                <a:latin typeface="Consolas" panose="020B0609020204030204" pitchFamily="49" charset="0"/>
+              </a:rPr>
+              <a:t>:</a:t>
+            </a:r>
+          </a:p>
+          <a:p>
+            <a:r>
+              <a:rPr lang="en-US" altLang="zh-TW" sz="1000" dirty="0">
+                <a:latin typeface="Consolas" panose="020B0609020204030204" pitchFamily="49" charset="0"/>
+              </a:rPr>
+              <a:t>        </a:t>
+            </a:r>
+            <a:r>
+              <a:rPr lang="en-US" altLang="zh-TW" sz="1000" dirty="0">
+                <a:solidFill>
+                  <a:schemeClr val="accent6">
+                    <a:lumMod val="50000"/>
+                  </a:schemeClr>
+                </a:solidFill>
+                <a:latin typeface="Consolas" panose="020B0609020204030204" pitchFamily="49" charset="0"/>
+              </a:rPr>
+              <a:t>data</a:t>
+            </a:r>
+            <a:r>
+              <a:rPr lang="en-US" altLang="zh-TW" sz="1000" dirty="0">
+                <a:latin typeface="Consolas" panose="020B0609020204030204" pitchFamily="49" charset="0"/>
+              </a:rPr>
+              <a:t> = response.json()</a:t>
+            </a:r>
+          </a:p>
+          <a:p>
+            <a:r>
+              <a:rPr lang="en-US" altLang="zh-TW" sz="1000" dirty="0">
+                <a:latin typeface="Consolas" panose="020B0609020204030204" pitchFamily="49" charset="0"/>
+              </a:rPr>
+              <a:t>        </a:t>
+            </a:r>
+            <a:r>
+              <a:rPr lang="en-US" altLang="zh-TW" sz="1000" dirty="0">
+                <a:solidFill>
+                  <a:schemeClr val="tx1">
+                    <a:lumMod val="50000"/>
+                    <a:lumOff val="50000"/>
+                  </a:schemeClr>
+                </a:solidFill>
+                <a:latin typeface="Consolas" panose="020B0609020204030204" pitchFamily="49" charset="0"/>
+              </a:rPr>
+              <a:t># Extract the regulatory gene data from RegulomeDB</a:t>
+            </a:r>
+            <a:endParaRPr lang="en-US" altLang="zh-TW" sz="1000" dirty="0">
+              <a:latin typeface="Consolas" panose="020B0609020204030204" pitchFamily="49" charset="0"/>
+            </a:endParaRPr>
+          </a:p>
+          <a:p>
+            <a:r>
+              <a:rPr lang="zh-TW" altLang="en-US" sz="1000" dirty="0">
+                <a:latin typeface="Consolas" panose="020B0609020204030204" pitchFamily="49" charset="0"/>
+              </a:rPr>
+              <a:t>        </a:t>
+            </a:r>
+            <a:r>
+              <a:rPr lang="en-US" altLang="zh-TW" sz="1000" dirty="0">
+                <a:solidFill>
+                  <a:schemeClr val="accent6">
+                    <a:lumMod val="50000"/>
+                  </a:schemeClr>
+                </a:solidFill>
+                <a:latin typeface="Consolas" panose="020B0609020204030204" pitchFamily="49" charset="0"/>
+              </a:rPr>
+              <a:t>regulomedb_info</a:t>
+            </a:r>
+            <a:r>
+              <a:rPr lang="en-US" altLang="zh-TW" sz="1000" dirty="0">
+                <a:latin typeface="Consolas" panose="020B0609020204030204" pitchFamily="49" charset="0"/>
+              </a:rPr>
+              <a:t> = data.get(</a:t>
+            </a:r>
+            <a:r>
+              <a:rPr lang="en-US" altLang="zh-TW" sz="1000" dirty="0">
+                <a:solidFill>
+                  <a:srgbClr val="339933"/>
+                </a:solidFill>
+                <a:latin typeface="Consolas" panose="020B0609020204030204" pitchFamily="49" charset="0"/>
+              </a:rPr>
+              <a:t>"regulomedb"</a:t>
+            </a:r>
+            <a:r>
+              <a:rPr lang="en-US" altLang="zh-TW" sz="1000" dirty="0">
+                <a:latin typeface="Consolas" panose="020B0609020204030204" pitchFamily="49" charset="0"/>
+              </a:rPr>
+              <a:t>, {})</a:t>
+            </a:r>
+          </a:p>
+          <a:p>
+            <a:r>
+              <a:rPr lang="en-US" altLang="zh-TW" sz="1000" dirty="0">
+                <a:latin typeface="Consolas" panose="020B0609020204030204" pitchFamily="49" charset="0"/>
+              </a:rPr>
+              <a:t>        </a:t>
+            </a:r>
+            <a:r>
+              <a:rPr lang="en-US" altLang="zh-TW" sz="1000" dirty="0">
+                <a:solidFill>
+                  <a:schemeClr val="accent6">
+                    <a:lumMod val="50000"/>
+                  </a:schemeClr>
+                </a:solidFill>
+                <a:latin typeface="Consolas" panose="020B0609020204030204" pitchFamily="49" charset="0"/>
+              </a:rPr>
+              <a:t>score</a:t>
+            </a:r>
+            <a:r>
+              <a:rPr lang="en-US" altLang="zh-TW" sz="1000" dirty="0">
+                <a:latin typeface="Consolas" panose="020B0609020204030204" pitchFamily="49" charset="0"/>
+              </a:rPr>
+              <a:t> = regulomedb_info.get("score", </a:t>
+            </a:r>
+            <a:r>
+              <a:rPr lang="en-US" altLang="zh-TW" sz="1000" dirty="0">
+                <a:solidFill>
+                  <a:srgbClr val="339933"/>
+                </a:solidFill>
+                <a:latin typeface="Consolas" panose="020B0609020204030204" pitchFamily="49" charset="0"/>
+              </a:rPr>
+              <a:t>"None"</a:t>
+            </a:r>
+            <a:r>
+              <a:rPr lang="en-US" altLang="zh-TW" sz="1000" dirty="0">
+                <a:latin typeface="Consolas" panose="020B0609020204030204" pitchFamily="49" charset="0"/>
+              </a:rPr>
+              <a:t>)</a:t>
+            </a:r>
+          </a:p>
+          <a:p>
+            <a:r>
+              <a:rPr lang="en-US" altLang="zh-TW" sz="1000" dirty="0">
+                <a:latin typeface="Consolas" panose="020B0609020204030204" pitchFamily="49" charset="0"/>
+              </a:rPr>
+              <a:t>        </a:t>
+            </a:r>
+            <a:r>
+              <a:rPr lang="en-US" altLang="zh-TW" sz="1000" dirty="0">
+                <a:solidFill>
+                  <a:schemeClr val="accent6">
+                    <a:lumMod val="50000"/>
+                  </a:schemeClr>
+                </a:solidFill>
+                <a:latin typeface="Consolas" panose="020B0609020204030204" pitchFamily="49" charset="0"/>
+              </a:rPr>
+              <a:t>evidence</a:t>
+            </a:r>
+            <a:r>
+              <a:rPr lang="en-US" altLang="zh-TW" sz="1000" dirty="0">
+                <a:latin typeface="Consolas" panose="020B0609020204030204" pitchFamily="49" charset="0"/>
+              </a:rPr>
+              <a:t> = regulomedb_info.get("evidence", [])</a:t>
+            </a:r>
+          </a:p>
+          <a:p>
+            <a:r>
+              <a:rPr lang="en-US" altLang="zh-TW" sz="1000" dirty="0">
+                <a:latin typeface="Consolas" panose="020B0609020204030204" pitchFamily="49" charset="0"/>
+              </a:rPr>
+              <a:t>        </a:t>
+            </a:r>
+          </a:p>
+          <a:p>
+            <a:r>
+              <a:rPr lang="en-US" altLang="zh-TW" sz="1000" dirty="0">
+                <a:latin typeface="Consolas" panose="020B0609020204030204" pitchFamily="49" charset="0"/>
+              </a:rPr>
+              <a:t>        </a:t>
+            </a:r>
+            <a:r>
+              <a:rPr lang="en-US" altLang="zh-TW" sz="1000" dirty="0">
+                <a:solidFill>
+                  <a:srgbClr val="7030A0"/>
+                </a:solidFill>
+                <a:latin typeface="Consolas" panose="020B0609020204030204" pitchFamily="49" charset="0"/>
+              </a:rPr>
+              <a:t>return</a:t>
+            </a:r>
+            <a:r>
+              <a:rPr lang="en-US" altLang="zh-TW" sz="1000" dirty="0">
+                <a:latin typeface="Consolas" panose="020B0609020204030204" pitchFamily="49" charset="0"/>
+              </a:rPr>
+              <a:t> {</a:t>
+            </a:r>
+          </a:p>
+          <a:p>
+            <a:r>
+              <a:rPr lang="en-US" altLang="zh-TW" sz="1000" dirty="0">
+                <a:latin typeface="Consolas" panose="020B0609020204030204" pitchFamily="49" charset="0"/>
+              </a:rPr>
+              <a:t>            </a:t>
+            </a:r>
+            <a:r>
+              <a:rPr lang="en-US" altLang="zh-TW" sz="1000" dirty="0">
+                <a:solidFill>
+                  <a:srgbClr val="339933"/>
+                </a:solidFill>
+                <a:latin typeface="Consolas" panose="020B0609020204030204" pitchFamily="49" charset="0"/>
+              </a:rPr>
+              <a:t>"rsID"</a:t>
+            </a:r>
+            <a:r>
+              <a:rPr lang="en-US" altLang="zh-TW" sz="1000" dirty="0">
+                <a:latin typeface="Consolas" panose="020B0609020204030204" pitchFamily="49" charset="0"/>
+              </a:rPr>
+              <a:t>: rsid,</a:t>
+            </a:r>
+          </a:p>
+          <a:p>
+            <a:r>
+              <a:rPr lang="en-US" altLang="zh-TW" sz="1000" dirty="0">
+                <a:latin typeface="Consolas" panose="020B0609020204030204" pitchFamily="49" charset="0"/>
+              </a:rPr>
+              <a:t>            </a:t>
+            </a:r>
+            <a:r>
+              <a:rPr lang="en-US" altLang="zh-TW" sz="1000" dirty="0">
+                <a:solidFill>
+                  <a:srgbClr val="339933"/>
+                </a:solidFill>
+                <a:latin typeface="Consolas" panose="020B0609020204030204" pitchFamily="49" charset="0"/>
+              </a:rPr>
+              <a:t>"RegulomeDB_Score"</a:t>
+            </a:r>
+            <a:r>
+              <a:rPr lang="en-US" altLang="zh-TW" sz="1000" dirty="0">
+                <a:latin typeface="Consolas" panose="020B0609020204030204" pitchFamily="49" charset="0"/>
+              </a:rPr>
+              <a:t>: score,</a:t>
+            </a:r>
+          </a:p>
+          <a:p>
+            <a:r>
+              <a:rPr lang="en-US" altLang="zh-TW" sz="1000" dirty="0">
+                <a:latin typeface="Consolas" panose="020B0609020204030204" pitchFamily="49" charset="0"/>
+              </a:rPr>
+              <a:t>            </a:t>
+            </a:r>
+            <a:r>
+              <a:rPr lang="en-US" altLang="zh-TW" sz="1000" dirty="0">
+                <a:solidFill>
+                  <a:srgbClr val="339933"/>
+                </a:solidFill>
+                <a:latin typeface="Consolas" panose="020B0609020204030204" pitchFamily="49" charset="0"/>
+              </a:rPr>
+              <a:t>"Description"</a:t>
+            </a:r>
+            <a:r>
+              <a:rPr lang="en-US" altLang="zh-TW" sz="1000" dirty="0">
+                <a:latin typeface="Consolas" panose="020B0609020204030204" pitchFamily="49" charset="0"/>
+              </a:rPr>
+              <a:t>: </a:t>
+            </a:r>
+            <a:r>
+              <a:rPr lang="en-US" altLang="zh-TW" sz="1000" dirty="0">
+                <a:solidFill>
+                  <a:srgbClr val="339933"/>
+                </a:solidFill>
+                <a:latin typeface="Consolas" panose="020B0609020204030204" pitchFamily="49" charset="0"/>
+              </a:rPr>
+              <a:t>f"The regulatory potential score of an SNP is</a:t>
+            </a:r>
+            <a:r>
+              <a:rPr lang="zh-TW" altLang="en-US" sz="1000" dirty="0">
+                <a:solidFill>
+                  <a:srgbClr val="339933"/>
+                </a:solidFill>
+                <a:latin typeface="Consolas" panose="020B0609020204030204" pitchFamily="49" charset="0"/>
+              </a:rPr>
+              <a:t> </a:t>
+            </a:r>
+            <a:r>
+              <a:rPr lang="en-US" altLang="zh-TW" sz="1000" dirty="0">
+                <a:latin typeface="Consolas" panose="020B0609020204030204" pitchFamily="49" charset="0"/>
+              </a:rPr>
+              <a:t>{score}</a:t>
+            </a:r>
+            <a:r>
+              <a:rPr lang="en-US" altLang="zh-TW" sz="1000" dirty="0">
+                <a:solidFill>
+                  <a:srgbClr val="339933"/>
+                </a:solidFill>
+                <a:latin typeface="Consolas" panose="020B0609020204030204" pitchFamily="49" charset="0"/>
+              </a:rPr>
+              <a:t>."</a:t>
+            </a:r>
+          </a:p>
+          <a:p>
+            <a:r>
+              <a:rPr lang="en-US" altLang="zh-TW" sz="1000" dirty="0">
+                <a:latin typeface="Consolas" panose="020B0609020204030204" pitchFamily="49" charset="0"/>
+              </a:rPr>
+              <a:t>        }</a:t>
+            </a:r>
+          </a:p>
+          <a:p>
+            <a:r>
+              <a:rPr lang="en-US" altLang="zh-TW" sz="1000" dirty="0">
+                <a:latin typeface="Consolas" panose="020B0609020204030204" pitchFamily="49" charset="0"/>
+              </a:rPr>
+              <a:t>    </a:t>
+            </a:r>
+            <a:r>
+              <a:rPr lang="en-US" altLang="zh-TW" sz="1000" dirty="0">
+                <a:solidFill>
+                  <a:srgbClr val="7030A0"/>
+                </a:solidFill>
+                <a:latin typeface="Consolas" panose="020B0609020204030204" pitchFamily="49" charset="0"/>
+              </a:rPr>
+              <a:t>else</a:t>
+            </a:r>
+            <a:r>
+              <a:rPr lang="en-US" altLang="zh-TW" sz="1000" dirty="0">
+                <a:latin typeface="Consolas" panose="020B0609020204030204" pitchFamily="49" charset="0"/>
+              </a:rPr>
+              <a:t>:</a:t>
+            </a:r>
+          </a:p>
+          <a:p>
+            <a:r>
+              <a:rPr lang="en-US" altLang="zh-TW" sz="1000" dirty="0">
+                <a:latin typeface="Consolas" panose="020B0609020204030204" pitchFamily="49" charset="0"/>
+              </a:rPr>
+              <a:t>        </a:t>
+            </a:r>
+            <a:r>
+              <a:rPr lang="en-US" altLang="zh-TW" sz="1000" dirty="0">
+                <a:solidFill>
+                  <a:srgbClr val="7030A0"/>
+                </a:solidFill>
+                <a:latin typeface="Consolas" panose="020B0609020204030204" pitchFamily="49" charset="0"/>
+              </a:rPr>
+              <a:t>return</a:t>
+            </a:r>
+            <a:r>
+              <a:rPr lang="en-US" altLang="zh-TW" sz="1000" dirty="0">
+                <a:latin typeface="Consolas" panose="020B0609020204030204" pitchFamily="49" charset="0"/>
+              </a:rPr>
+              <a:t> {</a:t>
+            </a:r>
+            <a:r>
+              <a:rPr lang="en-US" altLang="zh-TW" sz="1000" dirty="0">
+                <a:solidFill>
+                  <a:srgbClr val="339933"/>
+                </a:solidFill>
+                <a:latin typeface="Consolas" panose="020B0609020204030204" pitchFamily="49" charset="0"/>
+              </a:rPr>
+              <a:t>"error"</a:t>
+            </a:r>
+            <a:r>
+              <a:rPr lang="en-US" altLang="zh-TW" sz="1000" dirty="0">
+                <a:latin typeface="Consolas" panose="020B0609020204030204" pitchFamily="49" charset="0"/>
+              </a:rPr>
+              <a:t>: </a:t>
+            </a:r>
+            <a:r>
+              <a:rPr lang="en-US" altLang="zh-TW" sz="1000" dirty="0">
+                <a:solidFill>
+                  <a:srgbClr val="339933"/>
+                </a:solidFill>
+                <a:latin typeface="Consolas" panose="020B0609020204030204" pitchFamily="49" charset="0"/>
+              </a:rPr>
+              <a:t>"Unable to connect to the database or SNP not found."</a:t>
+            </a:r>
+            <a:r>
+              <a:rPr lang="en-US" altLang="zh-TW" sz="1000" dirty="0">
+                <a:latin typeface="Consolas" panose="020B0609020204030204" pitchFamily="49" charset="0"/>
+              </a:rPr>
+              <a:t>}</a:t>
+            </a:r>
+          </a:p>
+          <a:p>
+            <a:endParaRPr lang="en-US" altLang="zh-TW" sz="1000" dirty="0">
+              <a:latin typeface="Consolas" panose="020B0609020204030204" pitchFamily="49" charset="0"/>
+            </a:endParaRPr>
+          </a:p>
+          <a:p>
+            <a:r>
+              <a:rPr lang="en-US" altLang="zh-TW" sz="1000" dirty="0">
+                <a:solidFill>
+                  <a:schemeClr val="tx1">
+                    <a:lumMod val="50000"/>
+                    <a:lumOff val="50000"/>
+                  </a:schemeClr>
+                </a:solidFill>
+                <a:latin typeface="Consolas" panose="020B0609020204030204" pitchFamily="49" charset="0"/>
+              </a:rPr>
+              <a:t># If Agent detects a user asking, "What regulatory function does the rs334 mutation have?".</a:t>
+            </a:r>
+          </a:p>
+          <a:p>
+            <a:r>
+              <a:rPr lang="en-US" altLang="zh-TW" sz="1000" dirty="0">
+                <a:solidFill>
+                  <a:schemeClr val="tx1">
+                    <a:lumMod val="50000"/>
+                    <a:lumOff val="50000"/>
+                  </a:schemeClr>
+                </a:solidFill>
+                <a:latin typeface="Consolas" panose="020B0609020204030204" pitchFamily="49" charset="0"/>
+              </a:rPr>
+              <a:t># it will automatically execute: query_regulatory_features("rs334")</a:t>
+            </a:r>
+            <a:endParaRPr lang="zh-TW" altLang="en-US" sz="1000" dirty="0">
+              <a:solidFill>
+                <a:schemeClr val="tx1">
+                  <a:lumMod val="50000"/>
+                  <a:lumOff val="50000"/>
+                </a:schemeClr>
+              </a:solidFill>
+              <a:latin typeface="Consolas" panose="020B0609020204030204" pitchFamily="49" charset="0"/>
+            </a:endParaRPr>
+          </a:p>
+        </p:txBody>
+      </p:sp>
+      <p:sp>
+        <p:nvSpPr>
+          <p:cNvPr id="15" name="文字方塊 14">
+            <a:extLst>
+              <a:ext uri="{FF2B5EF4-FFF2-40B4-BE49-F238E27FC236}">
+                <a16:creationId xmlns:a16="http://schemas.microsoft.com/office/drawing/2014/main" id="{F9FB3898-6948-1341-6B2F-D89FBC6C2750}"/>
+              </a:ext>
+            </a:extLst>
+          </p:cNvPr>
+          <p:cNvSpPr txBox="1"/>
+          <p:nvPr/>
+        </p:nvSpPr>
+        <p:spPr>
+          <a:xfrm>
+            <a:off x="179512" y="980728"/>
+            <a:ext cx="2304256" cy="247312"/>
           </a:xfrm>
           <a:prstGeom prst="rect">
             <a:avLst/>
@@ -3508,220 +6382,183 @@
           </a:bodyPr>
           <a:lstStyle/>
           <a:p>
-            <a:pPr marL="228600" indent="-228600">
-              <a:buAutoNum type="arabicPeriod"/>
+            <a:pPr marL="0" marR="0">
+              <a:lnSpc>
+                <a:spcPts val="1200"/>
+              </a:lnSpc>
+              <a:buNone/>
             </a:pPr>
             <a:r>
-              <a:rPr lang="zh-TW" altLang="zh-TW" sz="1200" b="1" u="none" strike="noStrike" dirty="0">
-                <a:effectLst/>
-                <a:latin typeface="Google Sans"/>
-              </a:rPr>
-              <a:t>視覺感知（Vision）：</a:t>
-            </a:r>
-            <a:r>
-              <a:rPr lang="zh-TW" altLang="zh-TW" sz="1200" b="0" u="none" strike="noStrike" dirty="0">
-                <a:effectLst/>
-                <a:latin typeface="Google Sans"/>
-              </a:rPr>
-              <a:t> 使用現成的</a:t>
-            </a:r>
-            <a:r>
-              <a:rPr lang="zh-TW" altLang="zh-TW" sz="1200" b="1" u="none" strike="noStrike" dirty="0">
-                <a:effectLst/>
-                <a:latin typeface="Google Sans"/>
-              </a:rPr>
-              <a:t>病理學基座大模型（Pathology Foundation Models）</a:t>
-            </a:r>
-            <a:r>
-              <a:rPr lang="zh-TW" altLang="zh-TW" sz="1200" b="0" u="none" strike="noStrike" dirty="0">
-                <a:effectLst/>
-                <a:latin typeface="Google Sans"/>
-              </a:rPr>
-              <a:t>（例如百萬級 H&amp;E 切片訓練出的 </a:t>
-            </a:r>
-            <a:r>
-              <a:rPr lang="zh-TW" altLang="zh-TW" sz="1200" b="0" u="none" strike="noStrike" dirty="0">
-                <a:effectLst/>
-                <a:latin typeface="Google Sans"/>
-                <a:hlinkClick r:id="rId2"/>
-              </a:rPr>
-              <a:t>SMMILe</a:t>
-            </a:r>
-            <a:r>
-              <a:rPr lang="zh-TW" altLang="zh-TW" sz="1200" b="0" u="none" strike="noStrike" dirty="0">
-                <a:effectLst/>
-                <a:latin typeface="Google Sans"/>
-              </a:rPr>
-              <a:t> 或 </a:t>
-            </a:r>
-            <a:r>
-              <a:rPr lang="zh-TW" altLang="zh-TW" sz="1200" b="0" u="none" strike="noStrike" dirty="0">
-                <a:effectLst/>
-                <a:latin typeface="Google Sans"/>
-                <a:hlinkClick r:id="rId3"/>
-              </a:rPr>
-              <a:t>TissueCraftAI</a:t>
-            </a:r>
-            <a:r>
-              <a:rPr lang="zh-TW" altLang="zh-TW" sz="1200" b="0" u="none" strike="noStrike" dirty="0">
-                <a:effectLst/>
-                <a:latin typeface="Google Sans"/>
-              </a:rPr>
-              <a:t>），自動辨識組織切片高解析照片中的腫瘤區域、浸潤免疫細胞（如 T 細胞、巨噬細胞）以及基質結構。</a:t>
-            </a:r>
-            <a:endParaRPr lang="en-US" altLang="zh-TW" dirty="0"/>
-          </a:p>
-          <a:p>
-            <a:pPr marL="228600" indent="-228600">
-              <a:buAutoNum type="arabicPeriod"/>
-            </a:pPr>
-            <a:endParaRPr lang="en-US" altLang="zh-TW" sz="1200" b="1" u="none" strike="noStrike" dirty="0">
+              <a:rPr lang="en-US" altLang="zh-TW" sz="1200" b="1" dirty="0">
+                <a:latin typeface="Consolas" panose="020B0609020204030204" pitchFamily="49" charset="0"/>
+              </a:rPr>
+              <a:t>Python and MyVariant.info</a:t>
+            </a:r>
+            <a:endParaRPr lang="zh-TW" altLang="zh-TW" sz="1200" b="1" u="none" strike="noStrike" dirty="0">
               <a:effectLst/>
-              <a:latin typeface="Google Sans"/>
+              <a:latin typeface="Consolas" panose="020B0609020204030204" pitchFamily="49" charset="0"/>
             </a:endParaRPr>
-          </a:p>
-          <a:p>
-            <a:pPr marL="228600" indent="-228600">
-              <a:buAutoNum type="arabicPeriod"/>
-            </a:pPr>
-            <a:r>
-              <a:rPr lang="zh-TW" altLang="zh-TW" sz="1200" b="1" u="none" strike="noStrike" dirty="0">
-                <a:effectLst/>
-                <a:latin typeface="Google Sans"/>
-              </a:rPr>
-              <a:t>空間數據對齊（Spatial Alignment）：</a:t>
-            </a:r>
-            <a:r>
-              <a:rPr lang="zh-TW" altLang="zh-TW" sz="1200" b="0" u="none" strike="noStrike" dirty="0">
-                <a:effectLst/>
-                <a:latin typeface="Google Sans"/>
-              </a:rPr>
-              <a:t> 將空間定序（Spatial Transcriptomics, ST）數據與高解析照片進行</a:t>
-            </a:r>
-            <a:r>
-              <a:rPr lang="zh-TW" altLang="zh-TW" sz="1200" b="1" u="none" strike="noStrike" dirty="0">
-                <a:effectLst/>
-                <a:latin typeface="Google Sans"/>
-              </a:rPr>
-              <a:t>空間座標對齊（Spatial Registration）</a:t>
-            </a:r>
-            <a:r>
-              <a:rPr lang="zh-TW" altLang="zh-TW" sz="1200" b="0" u="none" strike="noStrike" dirty="0">
-                <a:effectLst/>
-                <a:latin typeface="Google Sans"/>
-              </a:rPr>
-              <a:t>。AI 會知道這張照片的哪個細胞「精確對應」哪一組基因表現矩陣（RNA / 蛋白質表現量）。</a:t>
-            </a:r>
-            <a:endParaRPr lang="en-US" altLang="zh-TW" dirty="0"/>
-          </a:p>
-          <a:p>
-            <a:pPr marL="228600" indent="-228600">
-              <a:buAutoNum type="arabicPeriod"/>
-            </a:pPr>
-            <a:endParaRPr lang="en-US" altLang="zh-TW" sz="1200" b="1" u="none" strike="noStrike" dirty="0">
-              <a:effectLst/>
-              <a:latin typeface="Google Sans"/>
-            </a:endParaRPr>
-          </a:p>
-          <a:p>
-            <a:pPr marL="228600" indent="-228600">
-              <a:buAutoNum type="arabicPeriod"/>
-            </a:pPr>
-            <a:r>
-              <a:rPr lang="zh-TW" altLang="zh-TW" sz="1200" b="1" u="none" strike="noStrike" dirty="0">
-                <a:effectLst/>
-                <a:latin typeface="Google Sans"/>
-              </a:rPr>
-              <a:t>Agent 規劃與工具呼叫（Tool-Use）：</a:t>
-            </a:r>
-            <a:r>
-              <a:rPr lang="zh-TW" altLang="zh-TW" sz="1200" b="0" u="none" strike="noStrike" dirty="0">
-                <a:effectLst/>
-                <a:latin typeface="Google Sans"/>
-              </a:rPr>
-              <a:t> 當醫生問「該患者是否對 PD-1 免疫療法有耐藥性？」時，Agent 大腦會</a:t>
-            </a:r>
-            <a:r>
-              <a:rPr lang="zh-TW" altLang="zh-TW" sz="1200" b="1" u="none" strike="noStrike" dirty="0">
-                <a:effectLst/>
-                <a:latin typeface="Google Sans"/>
-              </a:rPr>
-              <a:t>自動生成並執行 R 或 Python 程式碼</a:t>
-            </a:r>
-            <a:r>
-              <a:rPr lang="zh-TW" altLang="zh-TW" sz="1200" b="0" u="none" strike="noStrike" dirty="0">
-                <a:effectLst/>
-                <a:latin typeface="Google Sans"/>
-              </a:rPr>
-              <a:t>（利用本機的生物信息工具如 Squidpy/Scanpy），分析腫瘤微環境（TME）中的配體-受體配對（如 PD-L1/PD-1 的空間鄰近距離），並將結果回傳給大模型。</a:t>
-            </a:r>
-            <a:endParaRPr lang="en-US" altLang="zh-TW" dirty="0"/>
-          </a:p>
-          <a:p>
-            <a:pPr marL="228600" indent="-228600">
-              <a:buAutoNum type="arabicPeriod"/>
-            </a:pPr>
-            <a:endParaRPr lang="en-US" altLang="zh-TW" sz="1200" b="1" u="none" strike="noStrike" dirty="0">
-              <a:effectLst/>
-              <a:latin typeface="Google Sans"/>
-            </a:endParaRPr>
-          </a:p>
-          <a:p>
-            <a:pPr marL="228600" indent="-228600">
-              <a:buAutoNum type="arabicPeriod"/>
-            </a:pPr>
-            <a:r>
-              <a:rPr lang="zh-TW" altLang="zh-TW" sz="1200" b="1" u="none" strike="noStrike" dirty="0">
-                <a:effectLst/>
-                <a:latin typeface="Google Sans"/>
-              </a:rPr>
-              <a:t>知識檢索（RAG）：</a:t>
-            </a:r>
-            <a:r>
-              <a:rPr lang="zh-TW" altLang="zh-TW" sz="1200" b="0" u="none" strike="noStrike" dirty="0">
-                <a:effectLst/>
-                <a:latin typeface="Google Sans"/>
-              </a:rPr>
-              <a:t> Agent 透過文獻檢索系統，比對 FDA 最新批准的靶向藥物與臨床指南，將定序發現的空間特徵（如特定的免疫逃逸生態位）轉化為人類醫生看得懂的</a:t>
-            </a:r>
-            <a:r>
-              <a:rPr lang="zh-TW" altLang="zh-TW" sz="1200" b="1" u="none" strike="noStrike" dirty="0">
-                <a:effectLst/>
-                <a:latin typeface="Google Sans"/>
-              </a:rPr>
-              <a:t>問診解答與治療建議</a:t>
-            </a:r>
-            <a:r>
-              <a:rPr lang="zh-TW" altLang="zh-TW" sz="1200" b="0" u="none" strike="noStrike" dirty="0">
-                <a:effectLst/>
-                <a:latin typeface="Google Sans"/>
-              </a:rPr>
-              <a:t>。</a:t>
-            </a:r>
-            <a:endParaRPr lang="zh-TW" altLang="en-US" dirty="0"/>
           </a:p>
         </p:txBody>
       </p:sp>
+      <p:sp>
+        <p:nvSpPr>
+          <p:cNvPr id="4" name="標題 1">
+            <a:extLst>
+              <a:ext uri="{FF2B5EF4-FFF2-40B4-BE49-F238E27FC236}">
+                <a16:creationId xmlns:a16="http://schemas.microsoft.com/office/drawing/2014/main" id="{580D9B33-C9E6-CBAA-8212-FEA78ABD82F3}"/>
+              </a:ext>
+            </a:extLst>
+          </p:cNvPr>
+          <p:cNvSpPr txBox="1">
+            <a:spLocks/>
+          </p:cNvSpPr>
+          <p:nvPr/>
+        </p:nvSpPr>
+        <p:spPr>
+          <a:xfrm>
+            <a:off x="179512" y="116632"/>
+            <a:ext cx="7713554" cy="612186"/>
+          </a:xfrm>
+          <a:prstGeom prst="rect">
+            <a:avLst/>
+          </a:prstGeom>
+        </p:spPr>
+        <p:txBody>
+          <a:bodyPr/>
+          <a:lstStyle>
+            <a:lvl1pPr algn="l" defTabSz="914400" rtl="0" eaLnBrk="1" latinLnBrk="0" hangingPunct="1">
+              <a:spcBef>
+                <a:spcPct val="0"/>
+              </a:spcBef>
+              <a:buNone/>
+              <a:defRPr sz="2400" kern="1200">
+                <a:solidFill>
+                  <a:schemeClr val="tx1"/>
+                </a:solidFill>
+                <a:latin typeface="+mj-lt"/>
+                <a:ea typeface="+mj-ea"/>
+                <a:cs typeface="+mj-cs"/>
+              </a:defRPr>
+            </a:lvl1pPr>
+          </a:lstStyle>
+          <a:p>
+            <a:r>
+              <a:rPr lang="en-US" altLang="zh-TW" sz="2800" dirty="0">
+                <a:latin typeface="Noto Sans HK" panose="020B0200000000000000" pitchFamily="34" charset="-120"/>
+                <a:ea typeface="Noto Sans HK" panose="020B0200000000000000" pitchFamily="34" charset="-120"/>
+                <a:cs typeface="Aharoni" panose="020F0502020204030204" pitchFamily="2" charset="-79"/>
+                <a:sym typeface="Wingdings" panose="05000000000000000000" pitchFamily="2" charset="2"/>
+              </a:rPr>
+              <a:t>Database</a:t>
+            </a:r>
+          </a:p>
+          <a:p>
+            <a:r>
+              <a:rPr lang="en-US" altLang="zh-TW" sz="1400" dirty="0">
+                <a:latin typeface="Noto Sans HK" panose="020B0200000000000000" pitchFamily="34" charset="-120"/>
+                <a:ea typeface="Noto Sans HK" panose="020B0200000000000000" pitchFamily="34" charset="-120"/>
+                <a:cs typeface="Arial" panose="020B0604020202020204" pitchFamily="34" charset="0"/>
+              </a:rPr>
+              <a:t>RegulomeDB</a:t>
+            </a:r>
+          </a:p>
+        </p:txBody>
+      </p:sp>
+      <p:pic>
+        <p:nvPicPr>
+          <p:cNvPr id="3" name="圖片 2">
+            <a:extLst>
+              <a:ext uri="{FF2B5EF4-FFF2-40B4-BE49-F238E27FC236}">
+                <a16:creationId xmlns:a16="http://schemas.microsoft.com/office/drawing/2014/main" id="{4755CC4A-AA49-61B7-EA2B-71166C677736}"/>
+              </a:ext>
+            </a:extLst>
+          </p:cNvPr>
+          <p:cNvPicPr>
+            <a:picLocks noChangeAspect="1"/>
+          </p:cNvPicPr>
+          <p:nvPr/>
+        </p:nvPicPr>
+        <p:blipFill>
+          <a:blip r:embed="rId2"/>
+          <a:stretch>
+            <a:fillRect/>
+          </a:stretch>
+        </p:blipFill>
+        <p:spPr>
+          <a:xfrm>
+            <a:off x="7754483" y="501948"/>
+            <a:ext cx="609653" cy="586791"/>
+          </a:xfrm>
+          <a:prstGeom prst="rect">
+            <a:avLst/>
+          </a:prstGeom>
+          <a:effectLst>
+            <a:glow rad="50800">
+              <a:schemeClr val="accent1">
+                <a:alpha val="60000"/>
+              </a:schemeClr>
+            </a:glow>
+            <a:softEdge rad="25400"/>
+          </a:effectLst>
+        </p:spPr>
+      </p:pic>
+      <p:pic>
+        <p:nvPicPr>
+          <p:cNvPr id="5" name="圖片 4">
+            <a:extLst>
+              <a:ext uri="{FF2B5EF4-FFF2-40B4-BE49-F238E27FC236}">
+                <a16:creationId xmlns:a16="http://schemas.microsoft.com/office/drawing/2014/main" id="{643F1054-967A-E1AF-34F4-8AFB34BC6923}"/>
+              </a:ext>
+            </a:extLst>
+          </p:cNvPr>
+          <p:cNvPicPr>
+            <a:picLocks noChangeAspect="1"/>
+          </p:cNvPicPr>
+          <p:nvPr/>
+        </p:nvPicPr>
+        <p:blipFill>
+          <a:blip r:embed="rId3"/>
+          <a:stretch>
+            <a:fillRect/>
+          </a:stretch>
+        </p:blipFill>
+        <p:spPr>
+          <a:xfrm>
+            <a:off x="7034403" y="501949"/>
+            <a:ext cx="540897" cy="586791"/>
+          </a:xfrm>
+          <a:prstGeom prst="rect">
+            <a:avLst/>
+          </a:prstGeom>
+          <a:effectLst>
+            <a:glow rad="50800">
+              <a:schemeClr val="tx1">
+                <a:lumMod val="95000"/>
+                <a:lumOff val="5000"/>
+                <a:alpha val="60000"/>
+              </a:schemeClr>
+            </a:glow>
+            <a:softEdge rad="25400"/>
+          </a:effectLst>
+        </p:spPr>
+      </p:pic>
     </p:spTree>
     <p:extLst>
       <p:ext uri="{BB962C8B-B14F-4D97-AF65-F5344CB8AC3E}">
-        <p14:creationId xmlns:p14="http://schemas.microsoft.com/office/powerpoint/2010/main" val="3704136726"/>
+        <p14:creationId xmlns:p14="http://schemas.microsoft.com/office/powerpoint/2010/main" val="1227921858"/>
       </p:ext>
     </p:extLst>
   </p:cSld>
   <p:clrMapOvr>
     <a:masterClrMapping/>
   </p:clrMapOvr>
-  <mc:AlternateContent xmlns:mc="http://schemas.openxmlformats.org/markup-compatibility/2006" xmlns:p159="http://schemas.microsoft.com/office/powerpoint/2015/09/main">
-    <mc:Choice Requires="p159">
-      <p:transition xmlns:p14="http://schemas.microsoft.com/office/powerpoint/2010/main" spd="slow" p14:dur="2000" advClick="0">
-        <p159:morph option="byObject"/>
-      </p:transition>
+  <mc:AlternateContent xmlns:mc="http://schemas.openxmlformats.org/markup-compatibility/2006" xmlns:p14="http://schemas.microsoft.com/office/powerpoint/2010/main">
+    <mc:Choice Requires="p14">
+      <p:transition p14:dur="0" advClick="0"/>
     </mc:Choice>
     <mc:Fallback xmlns="">
-      <p:transition spd="slow" advClick="0">
-        <p:fade/>
-      </p:transition>
+      <p:transition advClick="0"/>
     </mc:Fallback>
   </mc:AlternateContent>
 </p:sld>
@@ -3746,10 +6583,10 @@
       </p:grpSpPr>
       <p:sp>
         <p:nvSpPr>
-          <p:cNvPr id="3" name="文字方塊 2">
+          <p:cNvPr id="4" name="文字方塊 3">
             <a:extLst>
               <a:ext uri="{FF2B5EF4-FFF2-40B4-BE49-F238E27FC236}">
-                <a16:creationId xmlns:a16="http://schemas.microsoft.com/office/drawing/2014/main" id="{5EF5722E-A223-C66A-1248-5F2D626557BC}"/>
+                <a16:creationId xmlns:a16="http://schemas.microsoft.com/office/drawing/2014/main" id="{A9AE59F5-230E-F0C8-13CE-F4C0D87C0A57}"/>
               </a:ext>
             </a:extLst>
           </p:cNvPr>
@@ -3758,8 +6595,8 @@
         </p:nvSpPr>
         <p:spPr>
           <a:xfrm>
-            <a:off x="526579" y="2564904"/>
-            <a:ext cx="7992888" cy="3547125"/>
+            <a:off x="270892" y="2062879"/>
+            <a:ext cx="8712968" cy="1785104"/>
           </a:xfrm>
           <a:prstGeom prst="rect">
             <a:avLst/>
@@ -3773,194 +6610,369 @@
           <a:lstStyle/>
           <a:p>
             <a:pPr marL="0" marR="0">
-              <a:spcBef>
-                <a:spcPts val="1800"/>
-              </a:spcBef>
-              <a:spcAft>
-                <a:spcPts val="900"/>
-              </a:spcAft>
               <a:buNone/>
             </a:pPr>
             <a:r>
-              <a:rPr lang="zh-TW" altLang="zh-TW" sz="1500" b="1" u="none" strike="noStrike" dirty="0">
+              <a:rPr lang="zh-TW" altLang="zh-TW" sz="1000" b="1" u="none" strike="noStrike" dirty="0">
                 <a:effectLst/>
-                <a:latin typeface="Google Sans"/>
-              </a:rPr>
-              <a:t>三、 開發此系統面臨的重大挑戰</a:t>
+                <a:latin typeface="微軟正黑體" panose="020B0604030504040204" pitchFamily="34" charset="-120"/>
+                <a:ea typeface="微軟正黑體" panose="020B0604030504040204" pitchFamily="34" charset="-120"/>
+              </a:rPr>
+              <a:t>1. 最核心的公開調控特徵資料庫</a:t>
             </a:r>
           </a:p>
           <a:p>
             <a:pPr marL="0" marR="0">
-              <a:spcBef>
-                <a:spcPts val="900"/>
-              </a:spcBef>
-              <a:spcAft>
-                <a:spcPts val="1200"/>
-              </a:spcAft>
               <a:buNone/>
             </a:pPr>
             <a:r>
-              <a:rPr lang="zh-TW" altLang="zh-TW" sz="1200" b="0" u="none" strike="noStrike" dirty="0">
+              <a:rPr lang="zh-TW" altLang="zh-TW" sz="1000" b="0" u="none" strike="noStrike" dirty="0">
                 <a:effectLst/>
-                <a:latin typeface="Google Sans"/>
-              </a:rPr>
-              <a:t>雖然技術上可行，但在落地為「臨床問診 Agent」時，您必須解決以下四大瓶頸：</a:t>
-            </a:r>
+                <a:latin typeface="微軟正黑體" panose="020B0604030504040204" pitchFamily="34" charset="-120"/>
+                <a:ea typeface="微軟正黑體" panose="020B0604030504040204" pitchFamily="34" charset="-120"/>
+              </a:rPr>
+              <a:t>您可以將以下三個權威資料庫作為您 AI Agent 的後端查詢工具：</a:t>
+            </a:r>
+            <a:endParaRPr lang="en-US" altLang="zh-TW" sz="1000" b="0" u="none" strike="noStrike" dirty="0">
+              <a:effectLst/>
+              <a:latin typeface="微軟正黑體" panose="020B0604030504040204" pitchFamily="34" charset="-120"/>
+              <a:ea typeface="微軟正黑體" panose="020B0604030504040204" pitchFamily="34" charset="-120"/>
+            </a:endParaRPr>
           </a:p>
           <a:p>
             <a:pPr marL="0" marR="0">
-              <a:spcBef>
-                <a:spcPts val="900"/>
-              </a:spcBef>
-              <a:spcAft>
-                <a:spcPts val="900"/>
-              </a:spcAft>
+              <a:buNone/>
+            </a:pPr>
+            <a:endParaRPr lang="zh-TW" altLang="zh-TW" sz="1000" b="0" u="none" strike="noStrike" dirty="0">
+              <a:effectLst/>
+              <a:latin typeface="微軟正黑體" panose="020B0604030504040204" pitchFamily="34" charset="-120"/>
+              <a:ea typeface="微軟正黑體" panose="020B0604030504040204" pitchFamily="34" charset="-120"/>
+            </a:endParaRPr>
+          </a:p>
+          <a:p>
+            <a:pPr marL="0" marR="0">
               <a:buFont typeface="Arial" panose="020B0604020202020204" pitchFamily="34" charset="0"/>
               <a:buChar char="•"/>
             </a:pPr>
             <a:r>
-              <a:rPr lang="zh-TW" altLang="zh-TW" sz="1200" b="1" u="none" strike="noStrike" dirty="0">
+              <a:rPr lang="zh-TW" altLang="en-US" sz="1000" b="0" u="none" strike="noStrike" dirty="0">
                 <a:effectLst/>
-                <a:latin typeface="Google Sans"/>
-              </a:rPr>
-              <a:t>數據極度龐大與多模態對齊：</a:t>
-            </a:r>
-            <a:r>
-              <a:rPr lang="zh-TW" altLang="zh-TW" sz="1200" b="0" u="none" strike="noStrike" dirty="0">
+                <a:latin typeface="微軟正黑體" panose="020B0604030504040204" pitchFamily="34" charset="-120"/>
+                <a:ea typeface="微軟正黑體" panose="020B0604030504040204" pitchFamily="34" charset="-120"/>
+                <a:hlinkClick r:id="rId2"/>
+              </a:rPr>
+              <a:t> </a:t>
+            </a:r>
+            <a:r>
+              <a:rPr lang="zh-TW" altLang="zh-TW" sz="1000" b="0" u="none" strike="noStrike" dirty="0">
                 <a:effectLst/>
-                <a:latin typeface="Google Sans"/>
-              </a:rPr>
-              <a:t> 單張 WSI（全切片影像）高達數 GB，空間定序數據更是包含數萬個基因與百萬個空間座標。如何建立輕量化的嵌入向量（Embedding）讓大模型能夠同時「看圖」又「讀矩陣」，需要極高的運算資源與優秀的演算法。</a:t>
-            </a:r>
+                <a:latin typeface="微軟正黑體" panose="020B0604030504040204" pitchFamily="34" charset="-120"/>
+                <a:ea typeface="微軟正黑體" panose="020B0604030504040204" pitchFamily="34" charset="-120"/>
+                <a:hlinkClick r:id="rId2"/>
+              </a:rPr>
+              <a:t>RegulomeDB (史丹佛大學)</a:t>
+            </a:r>
+            <a:r>
+              <a:rPr lang="zh-TW" altLang="zh-TW" sz="1000" b="0" u="none" strike="noStrike" dirty="0">
+                <a:effectLst/>
+                <a:latin typeface="微軟正黑體" panose="020B0604030504040204" pitchFamily="34" charset="-120"/>
+                <a:ea typeface="微軟正黑體" panose="020B0604030504040204" pitchFamily="34" charset="-120"/>
+              </a:rPr>
+              <a:t>：這是專門用來查詢 </a:t>
+            </a:r>
+            <a:r>
+              <a:rPr lang="zh-TW" altLang="zh-TW" sz="1000" b="1" u="none" strike="noStrike" dirty="0">
+                <a:effectLst/>
+                <a:latin typeface="微軟正黑體" panose="020B0604030504040204" pitchFamily="34" charset="-120"/>
+                <a:ea typeface="微軟正黑體" panose="020B0604030504040204" pitchFamily="34" charset="-120"/>
+              </a:rPr>
+              <a:t>SNP 對調控元件影響</a:t>
+            </a:r>
+            <a:r>
+              <a:rPr lang="zh-TW" altLang="zh-TW" sz="1000" b="0" u="none" strike="noStrike" dirty="0">
+                <a:effectLst/>
+                <a:latin typeface="微軟正黑體" panose="020B0604030504040204" pitchFamily="34" charset="-120"/>
+                <a:ea typeface="微軟正黑體" panose="020B0604030504040204" pitchFamily="34" charset="-120"/>
+              </a:rPr>
+              <a:t>的黃金標準。它整合了 ENCODE 計畫的大量數據，能告訴您某個 SNP 是否位於</a:t>
+            </a:r>
+            <a:r>
+              <a:rPr lang="zh-TW" altLang="zh-TW" sz="1000" b="1" u="none" strike="noStrike" dirty="0">
+                <a:effectLst/>
+                <a:latin typeface="微軟正黑體" panose="020B0604030504040204" pitchFamily="34" charset="-120"/>
+                <a:ea typeface="微軟正黑體" panose="020B0604030504040204" pitchFamily="34" charset="-120"/>
+              </a:rPr>
+              <a:t>轉錄因子結合位點（TFBS）</a:t>
+            </a:r>
+            <a:r>
+              <a:rPr lang="zh-TW" altLang="zh-TW" sz="1000" b="0" u="none" strike="noStrike" dirty="0">
+                <a:effectLst/>
+                <a:latin typeface="微軟正黑體" panose="020B0604030504040204" pitchFamily="34" charset="-120"/>
+                <a:ea typeface="微軟正黑體" panose="020B0604030504040204" pitchFamily="34" charset="-120"/>
+              </a:rPr>
+              <a:t>、</a:t>
+            </a:r>
+            <a:r>
+              <a:rPr lang="zh-TW" altLang="zh-TW" sz="1000" b="1" u="none" strike="noStrike" dirty="0">
+                <a:effectLst/>
+                <a:latin typeface="微軟正黑體" panose="020B0604030504040204" pitchFamily="34" charset="-120"/>
+                <a:ea typeface="微軟正黑體" panose="020B0604030504040204" pitchFamily="34" charset="-120"/>
+              </a:rPr>
+              <a:t>DNA 敏感位點（DNase I）</a:t>
+            </a:r>
+            <a:r>
+              <a:rPr lang="zh-TW" altLang="zh-TW" sz="1000" b="0" u="none" strike="noStrike" dirty="0">
+                <a:effectLst/>
+                <a:latin typeface="微軟正黑體" panose="020B0604030504040204" pitchFamily="34" charset="-120"/>
+                <a:ea typeface="微軟正黑體" panose="020B0604030504040204" pitchFamily="34" charset="-120"/>
+              </a:rPr>
+              <a:t>或特定的</a:t>
+            </a:r>
+            <a:r>
+              <a:rPr lang="zh-TW" altLang="zh-TW" sz="1000" b="1" u="none" strike="noStrike" dirty="0">
+                <a:effectLst/>
+                <a:latin typeface="微軟正黑體" panose="020B0604030504040204" pitchFamily="34" charset="-120"/>
+                <a:ea typeface="微軟正黑體" panose="020B0604030504040204" pitchFamily="34" charset="-120"/>
+              </a:rPr>
+              <a:t>組蛋白修飾（Histone modifications）</a:t>
+            </a:r>
+            <a:r>
+              <a:rPr lang="zh-TW" altLang="zh-TW" sz="1000" b="0" u="none" strike="noStrike" dirty="0">
+                <a:effectLst/>
+                <a:latin typeface="微軟正黑體" panose="020B0604030504040204" pitchFamily="34" charset="-120"/>
+                <a:ea typeface="微軟正黑體" panose="020B0604030504040204" pitchFamily="34" charset="-120"/>
+              </a:rPr>
+              <a:t>區域，並給出一個預測影響力的評分（Score）。</a:t>
+            </a:r>
+            <a:endParaRPr lang="en-US" altLang="zh-TW" sz="1000" b="0" u="none" strike="noStrike" dirty="0">
+              <a:effectLst/>
+              <a:latin typeface="微軟正黑體" panose="020B0604030504040204" pitchFamily="34" charset="-120"/>
+              <a:ea typeface="微軟正黑體" panose="020B0604030504040204" pitchFamily="34" charset="-120"/>
+            </a:endParaRPr>
           </a:p>
           <a:p>
             <a:pPr marL="0" marR="0">
-              <a:spcBef>
-                <a:spcPts val="900"/>
-              </a:spcBef>
-              <a:spcAft>
-                <a:spcPts val="900"/>
-              </a:spcAft>
               <a:buFont typeface="Arial" panose="020B0604020202020204" pitchFamily="34" charset="0"/>
               <a:buChar char="•"/>
             </a:pPr>
-            <a:r>
-              <a:rPr lang="zh-TW" altLang="zh-TW" sz="1200" b="1" u="none" strike="noStrike" dirty="0">
-                <a:effectLst/>
-                <a:latin typeface="Google Sans"/>
-              </a:rPr>
-              <a:t>幻覺（Hallucination）與醫療安全：</a:t>
-            </a:r>
-            <a:r>
-              <a:rPr lang="zh-TW" altLang="zh-TW" sz="1200" b="0" u="none" strike="noStrike" dirty="0">
-                <a:effectLst/>
-                <a:latin typeface="Google Sans"/>
-              </a:rPr>
-              <a:t> 大語言模型常會胡言亂語（幻覺）。在精準醫療中，一個錯誤的基因解讀可能導致錯誤的用藥建議。系統必須設計</a:t>
-            </a:r>
-            <a:r>
-              <a:rPr lang="zh-TW" altLang="zh-TW" sz="1200" b="1" u="none" strike="noStrike" dirty="0">
-                <a:effectLst/>
-                <a:latin typeface="Google Sans"/>
-              </a:rPr>
-              <a:t>嚴格的確定性規則審查（Deterministic Guards）</a:t>
-            </a:r>
-            <a:r>
-              <a:rPr lang="zh-TW" altLang="zh-TW" sz="1200" b="0" u="none" strike="noStrike" dirty="0">
-                <a:effectLst/>
-                <a:latin typeface="Google Sans"/>
-              </a:rPr>
-              <a:t>，限制 Agent 只能基於真實分析數據與經核准的臨床指南（如 NCCN Guidelines）進行回答。</a:t>
-            </a:r>
+            <a:endParaRPr lang="zh-TW" altLang="zh-TW" sz="1000" b="0" u="none" strike="noStrike" dirty="0">
+              <a:effectLst/>
+              <a:latin typeface="微軟正黑體" panose="020B0604030504040204" pitchFamily="34" charset="-120"/>
+              <a:ea typeface="微軟正黑體" panose="020B0604030504040204" pitchFamily="34" charset="-120"/>
+            </a:endParaRPr>
           </a:p>
           <a:p>
             <a:pPr marL="0" marR="0">
-              <a:spcBef>
-                <a:spcPts val="900"/>
-              </a:spcBef>
-              <a:spcAft>
-                <a:spcPts val="900"/>
-              </a:spcAft>
               <a:buFont typeface="Arial" panose="020B0604020202020204" pitchFamily="34" charset="0"/>
               <a:buChar char="•"/>
             </a:pPr>
             <a:r>
-              <a:rPr lang="zh-TW" altLang="zh-TW" sz="1200" b="1" u="none" strike="noStrike" dirty="0">
+              <a:rPr lang="zh-TW" altLang="en-US" sz="1000" b="0" u="none" strike="noStrike" dirty="0">
                 <a:effectLst/>
-                <a:latin typeface="Google Sans"/>
-              </a:rPr>
-              <a:t>黑盒子與可解釋性（Explainability）：</a:t>
-            </a:r>
-            <a:r>
-              <a:rPr lang="zh-TW" altLang="zh-TW" sz="1200" b="0" u="none" strike="noStrike" dirty="0">
+                <a:latin typeface="微軟正黑體" panose="020B0604030504040204" pitchFamily="34" charset="-120"/>
+                <a:ea typeface="微軟正黑體" panose="020B0604030504040204" pitchFamily="34" charset="-120"/>
+                <a:hlinkClick r:id="rId3"/>
+              </a:rPr>
+              <a:t> </a:t>
+            </a:r>
+            <a:r>
+              <a:rPr lang="zh-TW" altLang="zh-TW" sz="1000" b="0" u="none" strike="noStrike" dirty="0">
                 <a:effectLst/>
-                <a:latin typeface="Google Sans"/>
-              </a:rPr>
-              <a:t> 醫生不會盲目相信 AI 給出的診斷。您的 Agent 在回答時，</a:t>
-            </a:r>
-            <a:r>
-              <a:rPr lang="zh-TW" altLang="zh-TW" sz="1200" b="1" u="none" strike="noStrike" dirty="0">
+                <a:latin typeface="微軟正黑體" panose="020B0604030504040204" pitchFamily="34" charset="-120"/>
+                <a:ea typeface="微軟正黑體" panose="020B0604030504040204" pitchFamily="34" charset="-120"/>
+                <a:hlinkClick r:id="rId3"/>
+              </a:rPr>
+              <a:t>GTEx Portal (型態組織基因表達計畫)</a:t>
+            </a:r>
+            <a:r>
+              <a:rPr lang="zh-TW" altLang="zh-TW" sz="1000" b="0" u="none" strike="noStrike" dirty="0">
                 <a:effectLst/>
-                <a:latin typeface="Google Sans"/>
-              </a:rPr>
-              <a:t>必須標註出「它是基於切片照片的哪一個像素區域」以及「哪一組空間基因群」得出此結論的</a:t>
-            </a:r>
-            <a:r>
-              <a:rPr lang="zh-TW" altLang="zh-TW" sz="1200" b="0" u="none" strike="noStrike" dirty="0">
+                <a:latin typeface="微軟正黑體" panose="020B0604030504040204" pitchFamily="34" charset="-120"/>
+                <a:ea typeface="微軟正黑體" panose="020B0604030504040204" pitchFamily="34" charset="-120"/>
+              </a:rPr>
+              <a:t>：提供最強大的 eQTL</a:t>
+            </a:r>
+            <a:r>
+              <a:rPr lang="en-US" altLang="zh-TW" sz="1000" b="0" u="none" strike="noStrike" dirty="0">
                 <a:effectLst/>
-                <a:latin typeface="Google Sans"/>
+                <a:latin typeface="微軟正黑體" panose="020B0604030504040204" pitchFamily="34" charset="-120"/>
+                <a:ea typeface="微軟正黑體" panose="020B0604030504040204" pitchFamily="34" charset="-120"/>
+              </a:rPr>
+              <a:t>(</a:t>
+            </a:r>
+            <a:r>
+              <a:rPr lang="zh-TW" altLang="zh-TW" sz="1000" b="0" u="none" strike="noStrike" dirty="0">
+                <a:effectLst/>
+                <a:latin typeface="微軟正黑體" panose="020B0604030504040204" pitchFamily="34" charset="-120"/>
+                <a:ea typeface="微軟正黑體" panose="020B0604030504040204" pitchFamily="34" charset="-120"/>
+              </a:rPr>
+              <a:t>表達量定量性狀基因座</a:t>
+            </a:r>
+            <a:r>
+              <a:rPr lang="en-US" altLang="zh-TW" sz="1000" b="0" u="none" strike="noStrike" dirty="0">
+                <a:effectLst/>
+                <a:latin typeface="微軟正黑體" panose="020B0604030504040204" pitchFamily="34" charset="-120"/>
+                <a:ea typeface="微軟正黑體" panose="020B0604030504040204" pitchFamily="34" charset="-120"/>
+              </a:rPr>
+              <a:t>)</a:t>
+            </a:r>
+            <a:r>
+              <a:rPr lang="zh-TW" altLang="zh-TW" sz="1000" b="0" u="none" strike="noStrike" dirty="0">
+                <a:effectLst/>
+                <a:latin typeface="微軟正黑體" panose="020B0604030504040204" pitchFamily="34" charset="-120"/>
+                <a:ea typeface="微軟正黑體" panose="020B0604030504040204" pitchFamily="34" charset="-120"/>
+              </a:rPr>
+              <a:t>數據。輸入一個 SNP，它能直接告訴您這個變異在哪些特定人體組織中（如心臟、肝臟、大腦），會顯著調控哪個鄰近基因的表達量</a:t>
+            </a:r>
+            <a:r>
+              <a:rPr lang="en-US" altLang="zh-TW" sz="1000" b="0" u="none" strike="noStrike" dirty="0">
+                <a:effectLst/>
+                <a:latin typeface="微軟正黑體" panose="020B0604030504040204" pitchFamily="34" charset="-120"/>
+                <a:ea typeface="微軟正黑體" panose="020B0604030504040204" pitchFamily="34" charset="-120"/>
+              </a:rPr>
+              <a:t>(</a:t>
+            </a:r>
+            <a:r>
+              <a:rPr lang="zh-TW" altLang="zh-TW" sz="1000" b="0" u="none" strike="noStrike" dirty="0">
+                <a:effectLst/>
+                <a:latin typeface="微軟正黑體" panose="020B0604030504040204" pitchFamily="34" charset="-120"/>
+                <a:ea typeface="微軟正黑體" panose="020B0604030504040204" pitchFamily="34" charset="-120"/>
+              </a:rPr>
+              <a:t>Expression level</a:t>
+            </a:r>
+            <a:r>
+              <a:rPr lang="en-US" altLang="zh-TW" sz="1000" b="0" u="none" strike="noStrike" dirty="0">
+                <a:effectLst/>
+                <a:latin typeface="微軟正黑體" panose="020B0604030504040204" pitchFamily="34" charset="-120"/>
+                <a:ea typeface="微軟正黑體" panose="020B0604030504040204" pitchFamily="34" charset="-120"/>
+              </a:rPr>
+              <a:t>)</a:t>
+            </a:r>
+            <a:r>
+              <a:rPr lang="zh-TW" altLang="zh-TW" sz="1000" b="0" u="none" strike="noStrike" dirty="0">
+                <a:effectLst/>
+                <a:latin typeface="微軟正黑體" panose="020B0604030504040204" pitchFamily="34" charset="-120"/>
+                <a:ea typeface="微軟正黑體" panose="020B0604030504040204" pitchFamily="34" charset="-120"/>
               </a:rPr>
               <a:t>。</a:t>
             </a:r>
+            <a:endParaRPr lang="en-US" altLang="zh-TW" sz="1000" b="0" u="none" strike="noStrike" dirty="0">
+              <a:effectLst/>
+              <a:latin typeface="微軟正黑體" panose="020B0604030504040204" pitchFamily="34" charset="-120"/>
+              <a:ea typeface="微軟正黑體" panose="020B0604030504040204" pitchFamily="34" charset="-120"/>
+            </a:endParaRPr>
           </a:p>
           <a:p>
             <a:pPr marL="0" marR="0">
-              <a:spcBef>
-                <a:spcPts val="900"/>
-              </a:spcBef>
-              <a:spcAft>
-                <a:spcPts val="900"/>
-              </a:spcAft>
               <a:buFont typeface="Arial" panose="020B0604020202020204" pitchFamily="34" charset="0"/>
               <a:buChar char="•"/>
             </a:pPr>
-            <a:r>
-              <a:rPr lang="zh-TW" altLang="zh-TW" sz="1200" b="1" u="none" strike="noStrike" dirty="0">
+            <a:endParaRPr lang="zh-TW" altLang="zh-TW" sz="1000" b="0" u="none" strike="noStrike" dirty="0">
+              <a:effectLst/>
+              <a:latin typeface="微軟正黑體" panose="020B0604030504040204" pitchFamily="34" charset="-120"/>
+              <a:ea typeface="微軟正黑體" panose="020B0604030504040204" pitchFamily="34" charset="-120"/>
+            </a:endParaRPr>
+          </a:p>
+          <a:p>
+            <a:pPr marL="0" marR="0">
+              <a:buFont typeface="Arial" panose="020B0604020202020204" pitchFamily="34" charset="0"/>
+              <a:buChar char="•"/>
+            </a:pPr>
+            <a:r>
+              <a:rPr lang="zh-TW" altLang="en-US" sz="1000" b="1" u="none" strike="noStrike" dirty="0">
                 <a:effectLst/>
-                <a:latin typeface="Google Sans"/>
-              </a:rPr>
-              <a:t>醫療隱私與法規（HIPAA / GDPR）：</a:t>
-            </a:r>
-            <a:r>
-              <a:rPr lang="zh-TW" altLang="zh-TW" sz="1200" b="0" u="none" strike="noStrike" dirty="0">
+                <a:latin typeface="微軟正黑體" panose="020B0604030504040204" pitchFamily="34" charset="-120"/>
+                <a:ea typeface="微軟正黑體" panose="020B0604030504040204" pitchFamily="34" charset="-120"/>
+              </a:rPr>
+              <a:t> </a:t>
+            </a:r>
+            <a:r>
+              <a:rPr lang="zh-TW" altLang="zh-TW" sz="1000" b="1" u="none" strike="noStrike" dirty="0">
                 <a:effectLst/>
-                <a:latin typeface="Google Sans"/>
-              </a:rPr>
-              <a:t> 基因與病理切片屬於最高級別的隱私。正如前文所述，這個 AI Agent </a:t>
-            </a:r>
-            <a:r>
-              <a:rPr lang="zh-TW" altLang="zh-TW" sz="1200" b="1" u="none" strike="noStrike" dirty="0">
+                <a:latin typeface="微軟正黑體" panose="020B0604030504040204" pitchFamily="34" charset="-120"/>
+                <a:ea typeface="微軟正黑體" panose="020B0604030504040204" pitchFamily="34" charset="-120"/>
+              </a:rPr>
+              <a:t>Ensembl Regulation (EBI/Sanger)</a:t>
+            </a:r>
+            <a:r>
+              <a:rPr lang="zh-TW" altLang="zh-TW" sz="1000" b="0" u="none" strike="noStrike" dirty="0">
                 <a:effectLst/>
-                <a:latin typeface="Google Sans"/>
-              </a:rPr>
-              <a:t>強烈建議部署在 Edge（邊緣端/醫院內網環境）</a:t>
-            </a:r>
-            <a:r>
-              <a:rPr lang="zh-TW" altLang="zh-TW" sz="1200" b="0" u="none" strike="noStrike" dirty="0">
+                <a:latin typeface="微軟正黑體" panose="020B0604030504040204" pitchFamily="34" charset="-120"/>
+                <a:ea typeface="微軟正黑體" panose="020B0604030504040204" pitchFamily="34" charset="-120"/>
+              </a:rPr>
+              <a:t>：收錄了豐富的「啟動子</a:t>
+            </a:r>
+            <a:r>
+              <a:rPr lang="en-US" altLang="zh-TW" sz="1000" dirty="0">
+                <a:latin typeface="微軟正黑體" panose="020B0604030504040204" pitchFamily="34" charset="-120"/>
+                <a:ea typeface="微軟正黑體" panose="020B0604030504040204" pitchFamily="34" charset="-120"/>
+              </a:rPr>
+              <a:t>(P</a:t>
+            </a:r>
+            <a:r>
+              <a:rPr lang="zh-TW" altLang="zh-TW" sz="1000" b="0" u="none" strike="noStrike" dirty="0">
                 <a:effectLst/>
-                <a:latin typeface="Google Sans"/>
-              </a:rPr>
-              <a:t>，不可將未去識別化的患者原始數據上傳至公共雲端 API。</a:t>
+                <a:latin typeface="微軟正黑體" panose="020B0604030504040204" pitchFamily="34" charset="-120"/>
+                <a:ea typeface="微軟正黑體" panose="020B0604030504040204" pitchFamily="34" charset="-120"/>
+              </a:rPr>
+              <a:t>romoters</a:t>
+            </a:r>
+            <a:r>
+              <a:rPr lang="en-US" altLang="zh-TW" sz="1000" b="0" u="none" strike="noStrike" dirty="0">
+                <a:effectLst/>
+                <a:latin typeface="微軟正黑體" panose="020B0604030504040204" pitchFamily="34" charset="-120"/>
+                <a:ea typeface="微軟正黑體" panose="020B0604030504040204" pitchFamily="34" charset="-120"/>
+              </a:rPr>
+              <a:t>)</a:t>
+            </a:r>
+            <a:r>
+              <a:rPr lang="zh-TW" altLang="zh-TW" sz="1000" b="0" u="none" strike="noStrike" dirty="0">
+                <a:effectLst/>
+                <a:latin typeface="微軟正黑體" panose="020B0604030504040204" pitchFamily="34" charset="-120"/>
+                <a:ea typeface="微軟正黑體" panose="020B0604030504040204" pitchFamily="34" charset="-120"/>
+              </a:rPr>
+              <a:t>」和「增強子</a:t>
+            </a:r>
+            <a:r>
+              <a:rPr lang="en-US" altLang="zh-TW" sz="1000" b="0" u="none" strike="noStrike" dirty="0">
+                <a:effectLst/>
+                <a:latin typeface="微軟正黑體" panose="020B0604030504040204" pitchFamily="34" charset="-120"/>
+                <a:ea typeface="微軟正黑體" panose="020B0604030504040204" pitchFamily="34" charset="-120"/>
+              </a:rPr>
+              <a:t>(</a:t>
+            </a:r>
+            <a:r>
+              <a:rPr lang="zh-TW" altLang="zh-TW" sz="1000" b="0" u="none" strike="noStrike" dirty="0">
+                <a:effectLst/>
+                <a:latin typeface="微軟正黑體" panose="020B0604030504040204" pitchFamily="34" charset="-120"/>
+                <a:ea typeface="微軟正黑體" panose="020B0604030504040204" pitchFamily="34" charset="-120"/>
+              </a:rPr>
+              <a:t>Enhancers</a:t>
+            </a:r>
+            <a:r>
+              <a:rPr lang="en-US" altLang="zh-TW" sz="1000" dirty="0">
+                <a:latin typeface="微軟正黑體" panose="020B0604030504040204" pitchFamily="34" charset="-120"/>
+                <a:ea typeface="微軟正黑體" panose="020B0604030504040204" pitchFamily="34" charset="-120"/>
+              </a:rPr>
+              <a:t>)</a:t>
+            </a:r>
+            <a:r>
+              <a:rPr lang="zh-TW" altLang="zh-TW" sz="1000" b="0" u="none" strike="noStrike" dirty="0">
+                <a:effectLst/>
+                <a:latin typeface="微軟正黑體" panose="020B0604030504040204" pitchFamily="34" charset="-120"/>
+                <a:ea typeface="微軟正黑體" panose="020B0604030504040204" pitchFamily="34" charset="-120"/>
+              </a:rPr>
+              <a:t>」基因體座標，支援 programmatic 批量查詢。</a:t>
             </a:r>
           </a:p>
         </p:txBody>
       </p:sp>
       <p:sp>
         <p:nvSpPr>
-          <p:cNvPr id="5" name="文字方塊 4">
+          <p:cNvPr id="7" name="文字方塊 6">
             <a:extLst>
               <a:ext uri="{FF2B5EF4-FFF2-40B4-BE49-F238E27FC236}">
-                <a16:creationId xmlns:a16="http://schemas.microsoft.com/office/drawing/2014/main" id="{A4039491-48B6-B08A-DD0A-FF7617DAEE2F}"/>
+                <a16:creationId xmlns:a16="http://schemas.microsoft.com/office/drawing/2014/main" id="{C8EB9EF8-8E47-D338-AE6B-F8AC1522266E}"/>
               </a:ext>
             </a:extLst>
           </p:cNvPr>
@@ -3969,8 +6981,8 @@
         </p:nvSpPr>
         <p:spPr>
           <a:xfrm>
-            <a:off x="539552" y="260648"/>
-            <a:ext cx="8352928" cy="1708160"/>
+            <a:off x="251520" y="764704"/>
+            <a:ext cx="8712968" cy="830997"/>
           </a:xfrm>
           <a:prstGeom prst="rect">
             <a:avLst/>
@@ -3984,131 +6996,161 @@
           <a:lstStyle/>
           <a:p>
             <a:pPr marL="0" marR="0">
-              <a:spcBef>
-                <a:spcPts val="1800"/>
-              </a:spcBef>
-              <a:spcAft>
-                <a:spcPts val="900"/>
-              </a:spcAft>
               <a:buNone/>
             </a:pPr>
             <a:r>
-              <a:rPr lang="zh-TW" altLang="zh-TW" sz="1500" b="1" u="none" strike="noStrike" dirty="0">
+              <a:rPr lang="zh-TW" altLang="zh-TW" sz="1200" b="0" u="none" strike="noStrike" dirty="0">
                 <a:effectLst/>
-                <a:latin typeface="Google Sans"/>
-              </a:rPr>
-              <a:t>二、 目前已實現的技術可行性（您的立足點）</a:t>
-            </a:r>
-          </a:p>
-          <a:p>
-            <a:pPr marL="0" marR="0">
-              <a:spcBef>
-                <a:spcPts val="900"/>
-              </a:spcBef>
-              <a:spcAft>
-                <a:spcPts val="900"/>
-              </a:spcAft>
-              <a:buFont typeface="Arial" panose="020B0604020202020204" pitchFamily="34" charset="0"/>
-              <a:buChar char="•"/>
-            </a:pPr>
+                <a:latin typeface="微軟正黑體" panose="020B0604030504040204" pitchFamily="34" charset="-120"/>
+                <a:ea typeface="微軟正黑體" panose="020B0604030504040204" pitchFamily="34" charset="-120"/>
+              </a:rPr>
+              <a:t>現今國際上有非常豐富且完全公開的</a:t>
+            </a:r>
             <a:r>
               <a:rPr lang="zh-TW" altLang="zh-TW" sz="1200" b="1" u="none" strike="noStrike" dirty="0">
                 <a:effectLst/>
-                <a:latin typeface="Google Sans"/>
-              </a:rPr>
-              <a:t>空間虛擬預測（Virtual Proteomics/Transcriptomics）：</a:t>
+                <a:latin typeface="微軟正黑體" panose="020B0604030504040204" pitchFamily="34" charset="-120"/>
+                <a:ea typeface="微軟正黑體" panose="020B0604030504040204" pitchFamily="34" charset="-120"/>
+              </a:rPr>
+              <a:t>非編碼區（Non-coding region）與功能基因體學資料庫</a:t>
             </a:r>
             <a:r>
               <a:rPr lang="zh-TW" altLang="zh-TW" sz="1200" b="0" u="none" strike="noStrike" dirty="0">
                 <a:effectLst/>
-                <a:latin typeface="Google Sans"/>
-              </a:rPr>
-              <a:t> 2026 最新技術如 Nature 發表的 </a:t>
-            </a:r>
+                <a:latin typeface="微軟正黑體" panose="020B0604030504040204" pitchFamily="34" charset="-120"/>
+                <a:ea typeface="微軟正黑體" panose="020B0604030504040204" pitchFamily="34" charset="-120"/>
+              </a:rPr>
+              <a:t>。</a:t>
+            </a:r>
+          </a:p>
+          <a:p>
+            <a:pPr marL="0" marR="0">
+              <a:buNone/>
+            </a:pPr>
             <a:r>
               <a:rPr lang="zh-TW" altLang="zh-TW" sz="1200" b="0" u="none" strike="noStrike" dirty="0">
                 <a:effectLst/>
-                <a:latin typeface="Google Sans"/>
-                <a:hlinkClick r:id="rId2"/>
-              </a:rPr>
-              <a:t>HEX 模型</a:t>
+                <a:latin typeface="微軟正黑體" panose="020B0604030504040204" pitchFamily="34" charset="-120"/>
+                <a:ea typeface="微軟正黑體" panose="020B0604030504040204" pitchFamily="34" charset="-120"/>
+              </a:rPr>
+              <a:t>由於絕大多數的 SNP 都位於不直接轉譯成蛋白質的非編碼區，它們主要是透過影響「轉錄因子結合」、「染色質結構」或「基因表達量」等</a:t>
+            </a:r>
+            <a:r>
+              <a:rPr lang="zh-TW" altLang="zh-TW" sz="1200" b="1" u="none" strike="noStrike" dirty="0">
+                <a:effectLst/>
+                <a:latin typeface="微軟正黑體" panose="020B0604030504040204" pitchFamily="34" charset="-120"/>
+                <a:ea typeface="微軟正黑體" panose="020B0604030504040204" pitchFamily="34" charset="-120"/>
+              </a:rPr>
+              <a:t>調控特徵（Regulatory Features）</a:t>
             </a:r>
             <a:r>
               <a:rPr lang="zh-TW" altLang="zh-TW" sz="1200" b="0" u="none" strike="noStrike" dirty="0">
                 <a:effectLst/>
-                <a:latin typeface="Google Sans"/>
-              </a:rPr>
-              <a:t>，已經能做到</a:t>
-            </a:r>
-            <a:r>
-              <a:rPr lang="zh-TW" altLang="zh-TW" sz="1200" b="1" u="none" strike="noStrike" dirty="0">
-                <a:effectLst/>
-                <a:latin typeface="Google Sans"/>
-              </a:rPr>
-              <a:t>光看 H&amp;E 影像就預測出 40 種空間蛋白質表現</a:t>
-            </a:r>
+                <a:latin typeface="微軟正黑體" panose="020B0604030504040204" pitchFamily="34" charset="-120"/>
+                <a:ea typeface="微軟正黑體" panose="020B0604030504040204" pitchFamily="34" charset="-120"/>
+              </a:rPr>
+              <a:t>來影響人體生理。</a:t>
+            </a:r>
+          </a:p>
+          <a:p>
             <a:r>
               <a:rPr lang="zh-TW" altLang="zh-TW" sz="1200" b="0" u="none" strike="noStrike" dirty="0">
                 <a:effectLst/>
-                <a:latin typeface="Google Sans"/>
-              </a:rPr>
-              <a:t>，並提升了 24% 的免疫治療效果預測準確率。這意味著影像與數據的跨模態互補性極高。 [</a:t>
-            </a:r>
-            <a:r>
-              <a:rPr lang="zh-TW" altLang="zh-TW" sz="1200" b="0" u="none" strike="noStrike" dirty="0">
+                <a:latin typeface="微軟正黑體" panose="020B0604030504040204" pitchFamily="34" charset="-120"/>
+                <a:ea typeface="微軟正黑體" panose="020B0604030504040204" pitchFamily="34" charset="-120"/>
+              </a:rPr>
+              <a:t>以下為您盤點如何利用公開資訊與 API，將您的「基因分型資料（SNP/VCF）」與「調控特徵」無縫串接</a:t>
+            </a:r>
+            <a:r>
+              <a:rPr lang="zh-TW" altLang="zh-TW" sz="1200" dirty="0">
+                <a:latin typeface="微軟正黑體" panose="020B0604030504040204" pitchFamily="34" charset="-120"/>
+                <a:ea typeface="微軟正黑體" panose="020B0604030504040204" pitchFamily="34" charset="-120"/>
+              </a:rPr>
+              <a:t>。</a:t>
+            </a:r>
+          </a:p>
+        </p:txBody>
+      </p:sp>
+      <p:sp>
+        <p:nvSpPr>
+          <p:cNvPr id="9" name="文字方塊 8">
+            <a:extLst>
+              <a:ext uri="{FF2B5EF4-FFF2-40B4-BE49-F238E27FC236}">
+                <a16:creationId xmlns:a16="http://schemas.microsoft.com/office/drawing/2014/main" id="{51E3A784-11F7-84EA-DB38-617A15DD03FA}"/>
+              </a:ext>
+            </a:extLst>
+          </p:cNvPr>
+          <p:cNvSpPr txBox="1"/>
+          <p:nvPr/>
+        </p:nvSpPr>
+        <p:spPr>
+          <a:xfrm>
+            <a:off x="251520" y="4315162"/>
+            <a:ext cx="8640960" cy="553998"/>
+          </a:xfrm>
+          <a:prstGeom prst="rect">
+            <a:avLst/>
+          </a:prstGeom>
+          <a:noFill/>
+        </p:spPr>
+        <p:txBody>
+          <a:bodyPr wrap="square">
+            <a:spAutoFit/>
+          </a:bodyPr>
+          <a:lstStyle/>
+          <a:p>
+            <a:pPr marL="0" marR="0">
+              <a:buNone/>
+            </a:pPr>
+            <a:r>
+              <a:rPr lang="zh-TW" altLang="zh-TW" sz="1000" b="1" u="none" strike="noStrike" dirty="0">
                 <a:effectLst/>
-                <a:latin typeface="Google Sans"/>
-                <a:hlinkClick r:id="rId2"/>
-              </a:rPr>
-              <a:t>1</a:t>
-            </a:r>
-            <a:r>
-              <a:rPr lang="zh-TW" altLang="zh-TW" sz="1200" b="0" u="none" strike="noStrike" dirty="0">
+                <a:latin typeface="微軟正黑體" panose="020B0604030504040204" pitchFamily="34" charset="-120"/>
+                <a:ea typeface="微軟正黑體" panose="020B0604030504040204" pitchFamily="34" charset="-120"/>
+              </a:rPr>
+              <a:t>2. AI Agent 如何自動化串接？（程式碼與 API 實作）</a:t>
+            </a:r>
+          </a:p>
+          <a:p>
+            <a:pPr marL="0" marR="0">
+              <a:buNone/>
+            </a:pPr>
+            <a:r>
+              <a:rPr lang="zh-TW" altLang="zh-TW" sz="1000" b="0" u="none" strike="noStrike" dirty="0">
                 <a:effectLst/>
-                <a:latin typeface="Google Sans"/>
-              </a:rPr>
-              <a:t>, </a:t>
-            </a:r>
-            <a:r>
-              <a:rPr lang="zh-TW" altLang="zh-TW" sz="1200" b="0" u="none" strike="noStrike" dirty="0">
+                <a:latin typeface="微軟正黑體" panose="020B0604030504040204" pitchFamily="34" charset="-120"/>
+                <a:ea typeface="微軟正黑體" panose="020B0604030504040204" pitchFamily="34" charset="-120"/>
+              </a:rPr>
+              <a:t>您不需要下載幾百 GB 的原始檔，這些資料庫多數提供免費的 </a:t>
+            </a:r>
+            <a:r>
+              <a:rPr lang="zh-TW" altLang="zh-TW" sz="1000" b="1" u="none" strike="noStrike" dirty="0">
                 <a:effectLst/>
-                <a:latin typeface="Google Sans"/>
-                <a:hlinkClick r:id="rId3"/>
-              </a:rPr>
-              <a:t>2</a:t>
-            </a:r>
-            <a:r>
-              <a:rPr lang="zh-TW" altLang="zh-TW" sz="1200" b="0" u="none" strike="noStrike" dirty="0">
+                <a:latin typeface="微軟正黑體" panose="020B0604030504040204" pitchFamily="34" charset="-120"/>
+                <a:ea typeface="微軟正黑體" panose="020B0604030504040204" pitchFamily="34" charset="-120"/>
+              </a:rPr>
+              <a:t>REST API</a:t>
+            </a:r>
+            <a:r>
+              <a:rPr lang="zh-TW" altLang="zh-TW" sz="1000" b="0" u="none" strike="noStrike" dirty="0">
                 <a:effectLst/>
-                <a:latin typeface="Google Sans"/>
-              </a:rPr>
-              <a:t>]</a:t>
+                <a:latin typeface="微軟正黑體" panose="020B0604030504040204" pitchFamily="34" charset="-120"/>
+                <a:ea typeface="微軟正黑體" panose="020B0604030504040204" pitchFamily="34" charset="-120"/>
+              </a:rPr>
+              <a:t> 或專門的 MyVariant.info 整合介面。</a:t>
             </a:r>
           </a:p>
           <a:p>
             <a:pPr marL="0" marR="0">
-              <a:spcBef>
-                <a:spcPts val="900"/>
-              </a:spcBef>
-              <a:spcAft>
-                <a:spcPts val="900"/>
-              </a:spcAft>
-              <a:buFont typeface="Arial" panose="020B0604020202020204" pitchFamily="34" charset="0"/>
-              <a:buChar char="•"/>
+              <a:buNone/>
             </a:pPr>
             <a:r>
-              <a:rPr lang="zh-TW" altLang="zh-TW" sz="1200" b="1" u="none" strike="noStrike" dirty="0">
+              <a:rPr lang="zh-TW" altLang="zh-TW" sz="1000" b="0" u="none" strike="noStrike" dirty="0">
                 <a:effectLst/>
-                <a:latin typeface="Google Sans"/>
-              </a:rPr>
-              <a:t>自動化科學研究助手：</a:t>
-            </a:r>
-            <a:r>
-              <a:rPr lang="zh-TW" altLang="zh-TW" sz="1200" b="0" u="none" strike="noStrike" dirty="0">
-                <a:effectLst/>
-                <a:latin typeface="Google Sans"/>
-              </a:rPr>
-              <a:t> STAgent 的實驗證明，AI Agent 能在幾分鐘內完成人類專家需要花費數週的空間生物學圖譜解讀、富集分析與文獻對齊，大大降低了高門檻數據的使用難度。</a:t>
+                <a:latin typeface="微軟正黑體" panose="020B0604030504040204" pitchFamily="34" charset="-120"/>
+                <a:ea typeface="微軟正黑體" panose="020B0604030504040204" pitchFamily="34" charset="-120"/>
+              </a:rPr>
+              <a:t>以下是訓練 AI Agent 時，您可以寫成 Python Tool（函式）供 Agent 自行呼叫的範例（以 MyVariant.info 查詢 RegulomeDB 調控分數為例）：</a:t>
             </a:r>
           </a:p>
         </p:txBody>
@@ -4116,7 +7158,7 @@
     </p:spTree>
     <p:extLst>
       <p:ext uri="{BB962C8B-B14F-4D97-AF65-F5344CB8AC3E}">
-        <p14:creationId xmlns:p14="http://schemas.microsoft.com/office/powerpoint/2010/main" val="392878567"/>
+        <p14:creationId xmlns:p14="http://schemas.microsoft.com/office/powerpoint/2010/main" val="2359596451"/>
       </p:ext>
     </p:extLst>
   </p:cSld>
@@ -4157,10 +7199,10 @@
       </p:grpSpPr>
       <p:sp>
         <p:nvSpPr>
-          <p:cNvPr id="39" name="文字方塊 38">
+          <p:cNvPr id="5" name="文字方塊 4">
             <a:extLst>
               <a:ext uri="{FF2B5EF4-FFF2-40B4-BE49-F238E27FC236}">
-                <a16:creationId xmlns:a16="http://schemas.microsoft.com/office/drawing/2014/main" id="{BC8BA039-385B-D587-79A1-F21AE63171E1}"/>
+                <a16:creationId xmlns:a16="http://schemas.microsoft.com/office/drawing/2014/main" id="{D783C646-7188-2C96-2E02-2B55441A6242}"/>
               </a:ext>
             </a:extLst>
           </p:cNvPr>
@@ -4169,8 +7211,8 @@
         </p:nvSpPr>
         <p:spPr>
           <a:xfrm>
-            <a:off x="179512" y="260648"/>
-            <a:ext cx="4176464" cy="4966769"/>
+            <a:off x="539552" y="980728"/>
+            <a:ext cx="8424936" cy="4247317"/>
           </a:xfrm>
           <a:prstGeom prst="rect">
             <a:avLst/>
@@ -4183,261 +7225,467 @@
           </a:bodyPr>
           <a:lstStyle/>
           <a:p>
-            <a:pPr marL="0" marR="0">
-              <a:spcBef>
-                <a:spcPts val="1800"/>
-              </a:spcBef>
-              <a:spcAft>
-                <a:spcPts val="900"/>
-              </a:spcAft>
-              <a:buNone/>
-            </a:pPr>
-            <a:r>
-              <a:rPr lang="zh-TW" altLang="zh-TW" sz="1500" b="1" u="none" strike="noStrike" dirty="0">
-                <a:effectLst/>
-                <a:latin typeface="Google Sans"/>
-              </a:rPr>
-              <a:t>四、 建議的切入步驟（How to Start?）</a:t>
-            </a:r>
-          </a:p>
-          <a:p>
-            <a:pPr marL="0" marR="0">
-              <a:spcBef>
-                <a:spcPts val="900"/>
-              </a:spcBef>
-              <a:spcAft>
-                <a:spcPts val="1200"/>
-              </a:spcAft>
-              <a:buNone/>
-            </a:pPr>
-            <a:r>
-              <a:rPr lang="zh-TW" altLang="zh-TW" sz="1200" b="0" u="none" strike="noStrike" dirty="0">
-                <a:effectLst/>
-                <a:latin typeface="Google Sans"/>
-              </a:rPr>
-              <a:t>如果您要動手建立這個 Agent，建議不要從頭訓練大模型，而是採取</a:t>
-            </a:r>
-            <a:r>
-              <a:rPr lang="zh-TW" altLang="zh-TW" sz="1200" b="1" u="none" strike="noStrike" dirty="0">
-                <a:effectLst/>
-                <a:latin typeface="Google Sans"/>
-              </a:rPr>
-              <a:t>組合拳策略</a:t>
-            </a:r>
-            <a:r>
-              <a:rPr lang="zh-TW" altLang="zh-TW" sz="1200" b="0" u="none" strike="noStrike" dirty="0">
-                <a:effectLst/>
-                <a:latin typeface="Google Sans"/>
-              </a:rPr>
-              <a:t>：</a:t>
-            </a:r>
-          </a:p>
-          <a:p>
-            <a:pPr marL="0" marR="0">
-              <a:spcBef>
-                <a:spcPts val="900"/>
-              </a:spcBef>
-              <a:spcAft>
-                <a:spcPts val="900"/>
-              </a:spcAft>
-              <a:buFont typeface="+mj-lt"/>
-              <a:buAutoNum type="arabicPeriod"/>
-            </a:pPr>
-            <a:r>
-              <a:rPr lang="zh-TW" altLang="zh-TW" sz="1200" b="1" u="none" strike="noStrike" dirty="0">
-                <a:effectLst/>
-                <a:latin typeface="Google Sans"/>
-              </a:rPr>
-              <a:t>第一步：選用開源病理基礎模型</a:t>
-            </a:r>
-            <a:br>
-              <a:rPr lang="zh-TW" altLang="zh-TW" sz="1200" b="0" u="none" strike="noStrike" dirty="0">
-                <a:effectLst/>
-                <a:latin typeface="Google Sans"/>
-              </a:rPr>
-            </a:br>
-            <a:r>
-              <a:rPr lang="zh-TW" altLang="zh-TW" sz="1200" b="0" u="none" strike="noStrike" dirty="0">
-                <a:effectLst/>
-                <a:latin typeface="Google Sans"/>
-              </a:rPr>
-              <a:t>先引入像是 PLAM 或其他醫學影像開源模型，負責將高解析組織照片轉化為 AI 看得懂的特徵向量。</a:t>
-            </a:r>
-          </a:p>
-          <a:p>
-            <a:pPr marL="0" marR="0">
-              <a:spcBef>
-                <a:spcPts val="900"/>
-              </a:spcBef>
-              <a:spcAft>
-                <a:spcPts val="900"/>
-              </a:spcAft>
-              <a:buFont typeface="+mj-lt"/>
-              <a:buAutoNum type="arabicPeriod"/>
-            </a:pPr>
-            <a:r>
-              <a:rPr lang="zh-TW" altLang="zh-TW" sz="1200" b="1" u="none" strike="noStrike" dirty="0">
-                <a:effectLst/>
-                <a:latin typeface="Google Sans"/>
-              </a:rPr>
-              <a:t>第二步：建立 Tool-Anvil（工具庫）</a:t>
-            </a:r>
-            <a:br>
-              <a:rPr lang="zh-TW" altLang="zh-TW" sz="1200" b="0" u="none" strike="noStrike" dirty="0">
-                <a:effectLst/>
-                <a:latin typeface="Google Sans"/>
-              </a:rPr>
-            </a:br>
-            <a:r>
-              <a:rPr lang="zh-TW" altLang="zh-TW" sz="1200" b="0" u="none" strike="noStrike" dirty="0">
-                <a:effectLst/>
-                <a:latin typeface="Google Sans"/>
-              </a:rPr>
-              <a:t>寫好分析空間定序常用的 Python 腳本範本（例如計算細胞鄰近度、空間聚類分析）。讓大模型作為 Agent，學會根據問題去「呼叫」這些腳本。</a:t>
-            </a:r>
-          </a:p>
-          <a:p>
-            <a:pPr marL="0" marR="0">
-              <a:spcBef>
-                <a:spcPts val="900"/>
-              </a:spcBef>
-              <a:spcAft>
-                <a:spcPts val="900"/>
-              </a:spcAft>
-              <a:buFont typeface="+mj-lt"/>
-              <a:buAutoNum type="arabicPeriod"/>
-            </a:pPr>
-            <a:r>
-              <a:rPr lang="zh-TW" altLang="zh-TW" sz="1200" b="1" u="none" strike="noStrike" dirty="0">
-                <a:effectLst/>
-                <a:latin typeface="Google Sans"/>
-              </a:rPr>
-              <a:t>第三步：精準醫療知識庫建置（RAG）</a:t>
-            </a:r>
-            <a:br>
-              <a:rPr lang="zh-TW" altLang="zh-TW" sz="1200" b="0" u="none" strike="noStrike" dirty="0">
-                <a:effectLst/>
-                <a:latin typeface="Google Sans"/>
-              </a:rPr>
-            </a:br>
-            <a:r>
-              <a:rPr lang="zh-TW" altLang="zh-TW" sz="1200" b="0" u="none" strike="noStrike" dirty="0">
-                <a:effectLst/>
-                <a:latin typeface="Google Sans"/>
-              </a:rPr>
-              <a:t>將 </a:t>
-            </a:r>
-            <a:r>
-              <a:rPr lang="zh-TW" altLang="zh-TW" sz="1200" b="0" u="none" strike="noStrike" dirty="0">
-                <a:effectLst/>
-                <a:latin typeface="Google Sans"/>
-                <a:hlinkClick r:id="rId2"/>
-              </a:rPr>
-              <a:t>OncoKB</a:t>
-            </a:r>
-            <a:r>
-              <a:rPr lang="zh-TW" altLang="zh-TW" sz="1200" b="0" u="none" strike="noStrike" dirty="0">
-                <a:effectLst/>
-                <a:latin typeface="Google Sans"/>
-              </a:rPr>
-              <a:t>、</a:t>
-            </a:r>
-            <a:r>
-              <a:rPr lang="zh-TW" altLang="zh-TW" sz="1200" b="0" u="none" strike="noStrike" dirty="0">
-                <a:effectLst/>
-                <a:latin typeface="Google Sans"/>
-                <a:hlinkClick r:id="rId3"/>
-              </a:rPr>
-              <a:t>Civic</a:t>
-            </a:r>
-            <a:r>
-              <a:rPr lang="zh-TW" altLang="zh-TW" sz="1200" b="0" u="none" strike="noStrike" dirty="0">
-                <a:effectLst/>
-                <a:latin typeface="Google Sans"/>
-              </a:rPr>
-              <a:t> 等權威癌症基因治療資料庫以及臨床指南向量化，作為 Agent 的專屬大腦智庫。</a:t>
-            </a:r>
-          </a:p>
-          <a:p>
-            <a:pPr marL="0" marR="0">
-              <a:spcBef>
-                <a:spcPts val="900"/>
-              </a:spcBef>
-              <a:spcAft>
-                <a:spcPts val="900"/>
-              </a:spcAft>
-              <a:buFont typeface="+mj-lt"/>
-              <a:buAutoNum type="arabicPeriod"/>
-            </a:pPr>
-            <a:r>
-              <a:rPr lang="zh-TW" altLang="zh-TW" sz="1200" b="1" u="none" strike="noStrike" dirty="0">
-                <a:effectLst/>
-                <a:latin typeface="Google Sans"/>
-              </a:rPr>
-              <a:t>第四步：提示詞工程（Prompt Engineering）與多 Agent 協同</a:t>
-            </a:r>
-            <a:br>
-              <a:rPr lang="zh-TW" altLang="zh-TW" sz="1200" b="0" u="none" strike="noStrike" dirty="0">
-                <a:effectLst/>
-                <a:latin typeface="Google Sans"/>
-              </a:rPr>
-            </a:br>
-            <a:r>
-              <a:rPr lang="zh-TW" altLang="zh-TW" sz="1200" b="0" u="none" strike="noStrike" dirty="0">
-                <a:effectLst/>
-                <a:latin typeface="Google Sans"/>
-              </a:rPr>
-              <a:t>採用類似 SpaCellAgent 的架構，設計三個 AI 角色互評：</a:t>
-            </a:r>
-            <a:r>
-              <a:rPr lang="zh-TW" altLang="zh-TW" sz="1200" b="1" u="none" strike="noStrike" dirty="0">
-                <a:effectLst/>
-                <a:latin typeface="Google Sans"/>
-              </a:rPr>
-              <a:t>「生信分析 Agent」</a:t>
-            </a:r>
-            <a:r>
-              <a:rPr lang="zh-TW" altLang="zh-TW" sz="1200" b="0" u="none" strike="noStrike" dirty="0">
-                <a:effectLst/>
-                <a:latin typeface="Google Sans"/>
-              </a:rPr>
-              <a:t>負責跑數據、</a:t>
-            </a:r>
-            <a:r>
-              <a:rPr lang="zh-TW" altLang="zh-TW" sz="1200" b="1" u="none" strike="noStrike" dirty="0">
-                <a:effectLst/>
-                <a:latin typeface="Google Sans"/>
-              </a:rPr>
-              <a:t>「病理影像 Agent」</a:t>
-            </a:r>
-            <a:r>
-              <a:rPr lang="zh-TW" altLang="zh-TW" sz="1200" b="0" u="none" strike="noStrike" dirty="0">
-                <a:effectLst/>
-                <a:latin typeface="Google Sans"/>
-              </a:rPr>
-              <a:t>負責看圖、</a:t>
-            </a:r>
-            <a:r>
-              <a:rPr lang="zh-TW" altLang="zh-TW" sz="1200" b="1" u="none" strike="noStrike" dirty="0">
-                <a:effectLst/>
-                <a:latin typeface="Google Sans"/>
-              </a:rPr>
-              <a:t>「臨床諮詢 Agent」</a:t>
-            </a:r>
-            <a:r>
-              <a:rPr lang="zh-TW" altLang="zh-TW" sz="1200" b="0" u="none" strike="noStrike" dirty="0">
-                <a:effectLst/>
-                <a:latin typeface="Google Sans"/>
-              </a:rPr>
-              <a:t>負責整合兩者並用溫和直白的語言回答問診。</a:t>
-            </a:r>
+            <a:r>
+              <a:rPr lang="en-US" altLang="zh-TW" sz="1000" dirty="0">
+                <a:latin typeface="Consolas" panose="020B0609020204030204" pitchFamily="49" charset="0"/>
+              </a:rPr>
+              <a:t>Python</a:t>
+            </a:r>
+          </a:p>
+          <a:p>
+            <a:r>
+              <a:rPr lang="en-US" altLang="zh-TW" sz="1000" dirty="0">
+                <a:latin typeface="Consolas" panose="020B0609020204030204" pitchFamily="49" charset="0"/>
+              </a:rPr>
+              <a:t>import requests</a:t>
+            </a:r>
+          </a:p>
+          <a:p>
+            <a:r>
+              <a:rPr lang="en-US" altLang="zh-TW" sz="1000" dirty="0">
+                <a:latin typeface="Consolas" panose="020B0609020204030204" pitchFamily="49" charset="0"/>
+              </a:rPr>
+              <a:t>def query_regulatory_features(rsid: str):</a:t>
+            </a:r>
+          </a:p>
+          <a:p>
+            <a:r>
+              <a:rPr lang="en-US" altLang="zh-TW" sz="1000" dirty="0">
+                <a:latin typeface="Consolas" panose="020B0609020204030204" pitchFamily="49" charset="0"/>
+              </a:rPr>
+              <a:t>    ""“</a:t>
+            </a:r>
+          </a:p>
+          <a:p>
+            <a:r>
+              <a:rPr lang="en-US" altLang="zh-TW" sz="1000" dirty="0">
+                <a:latin typeface="Consolas" panose="020B0609020204030204" pitchFamily="49" charset="0"/>
+              </a:rPr>
+              <a:t>    </a:t>
+            </a:r>
+            <a:r>
+              <a:rPr lang="zh-TW" altLang="en-US" sz="1000" dirty="0">
+                <a:latin typeface="Consolas" panose="020B0609020204030204" pitchFamily="49" charset="0"/>
+              </a:rPr>
+              <a:t>透過公開 </a:t>
+            </a:r>
+            <a:r>
+              <a:rPr lang="en-US" altLang="zh-TW" sz="1000" dirty="0">
+                <a:latin typeface="Consolas" panose="020B0609020204030204" pitchFamily="49" charset="0"/>
+              </a:rPr>
+              <a:t>API</a:t>
+            </a:r>
+            <a:r>
+              <a:rPr lang="zh-TW" altLang="en-US" sz="1000" dirty="0">
+                <a:latin typeface="Consolas" panose="020B0609020204030204" pitchFamily="49" charset="0"/>
+              </a:rPr>
+              <a:t>，輸入 </a:t>
+            </a:r>
+            <a:r>
+              <a:rPr lang="en-US" altLang="zh-TW" sz="1000" dirty="0">
+                <a:latin typeface="Consolas" panose="020B0609020204030204" pitchFamily="49" charset="0"/>
+              </a:rPr>
+              <a:t>SNP </a:t>
+            </a:r>
+            <a:r>
+              <a:rPr lang="zh-TW" altLang="en-US" sz="1000" dirty="0">
+                <a:latin typeface="Consolas" panose="020B0609020204030204" pitchFamily="49" charset="0"/>
+              </a:rPr>
+              <a:t>的 </a:t>
+            </a:r>
+            <a:r>
+              <a:rPr lang="en-US" altLang="zh-TW" sz="1000" dirty="0">
+                <a:latin typeface="Consolas" panose="020B0609020204030204" pitchFamily="49" charset="0"/>
+              </a:rPr>
+              <a:t>rsID</a:t>
+            </a:r>
+            <a:r>
+              <a:rPr lang="zh-TW" altLang="en-US" sz="1000" dirty="0">
+                <a:latin typeface="Consolas" panose="020B0609020204030204" pitchFamily="49" charset="0"/>
+              </a:rPr>
+              <a:t>，查詢其在 </a:t>
+            </a:r>
+            <a:r>
+              <a:rPr lang="en-US" altLang="zh-TW" sz="1000" dirty="0">
+                <a:latin typeface="Consolas" panose="020B0609020204030204" pitchFamily="49" charset="0"/>
+              </a:rPr>
+              <a:t>RegulomeDB </a:t>
+            </a:r>
+            <a:r>
+              <a:rPr lang="zh-TW" altLang="en-US" sz="1000" dirty="0">
+                <a:latin typeface="Consolas" panose="020B0609020204030204" pitchFamily="49" charset="0"/>
+              </a:rPr>
+              <a:t>的調控特徵評分與細節</a:t>
+            </a:r>
+            <a:endParaRPr lang="en-US" altLang="zh-TW" sz="1000" dirty="0">
+              <a:latin typeface="Consolas" panose="020B0609020204030204" pitchFamily="49" charset="0"/>
+            </a:endParaRPr>
+          </a:p>
+          <a:p>
+            <a:r>
+              <a:rPr lang="zh-TW" altLang="en-US" sz="1000" dirty="0">
+                <a:latin typeface="Consolas" panose="020B0609020204030204" pitchFamily="49" charset="0"/>
+              </a:rPr>
+              <a:t>    </a:t>
+            </a:r>
+            <a:r>
+              <a:rPr lang="en-US" altLang="zh-TW" sz="1000" dirty="0">
+                <a:latin typeface="Consolas" panose="020B0609020204030204" pitchFamily="49" charset="0"/>
+              </a:rPr>
+              <a:t>"""    # </a:t>
+            </a:r>
+            <a:r>
+              <a:rPr lang="zh-TW" altLang="en-US" sz="1000" dirty="0">
+                <a:latin typeface="Consolas" panose="020B0609020204030204" pitchFamily="49" charset="0"/>
+              </a:rPr>
+              <a:t>使用 </a:t>
+            </a:r>
+            <a:r>
+              <a:rPr lang="en-US" altLang="zh-TW" sz="1000" dirty="0">
+                <a:latin typeface="Consolas" panose="020B0609020204030204" pitchFamily="49" charset="0"/>
+              </a:rPr>
+              <a:t>MyVariant.info </a:t>
+            </a:r>
+            <a:r>
+              <a:rPr lang="zh-TW" altLang="en-US" sz="1000" dirty="0">
+                <a:latin typeface="Consolas" panose="020B0609020204030204" pitchFamily="49" charset="0"/>
+              </a:rPr>
+              <a:t>的公開 </a:t>
+            </a:r>
+            <a:r>
+              <a:rPr lang="en-US" altLang="zh-TW" sz="1000" dirty="0">
+                <a:latin typeface="Consolas" panose="020B0609020204030204" pitchFamily="49" charset="0"/>
+              </a:rPr>
+              <a:t>API</a:t>
+            </a:r>
+          </a:p>
+          <a:p>
+            <a:r>
+              <a:rPr lang="en-US" altLang="zh-TW" sz="1000" dirty="0">
+                <a:latin typeface="Consolas" panose="020B0609020204030204" pitchFamily="49" charset="0"/>
+              </a:rPr>
+              <a:t>    url = f"https://myvariant.info{rsid}“</a:t>
+            </a:r>
+          </a:p>
+          <a:p>
+            <a:r>
+              <a:rPr lang="en-US" altLang="zh-TW" sz="1000" dirty="0">
+                <a:latin typeface="Consolas" panose="020B0609020204030204" pitchFamily="49" charset="0"/>
+              </a:rPr>
+              <a:t>    response = requests.get(url)</a:t>
+            </a:r>
+          </a:p>
+          <a:p>
+            <a:r>
+              <a:rPr lang="en-US" altLang="zh-TW" sz="1000" dirty="0">
+                <a:latin typeface="Consolas" panose="020B0609020204030204" pitchFamily="49" charset="0"/>
+              </a:rPr>
+              <a:t>    </a:t>
+            </a:r>
+          </a:p>
+          <a:p>
+            <a:r>
+              <a:rPr lang="en-US" altLang="zh-TW" sz="1000" dirty="0">
+                <a:latin typeface="Consolas" panose="020B0609020204030204" pitchFamily="49" charset="0"/>
+              </a:rPr>
+              <a:t>    if response.status_code == 200:</a:t>
+            </a:r>
+          </a:p>
+          <a:p>
+            <a:r>
+              <a:rPr lang="en-US" altLang="zh-TW" sz="1000" dirty="0">
+                <a:latin typeface="Consolas" panose="020B0609020204030204" pitchFamily="49" charset="0"/>
+              </a:rPr>
+              <a:t>        data = response.json()</a:t>
+            </a:r>
+          </a:p>
+          <a:p>
+            <a:r>
+              <a:rPr lang="en-US" altLang="zh-TW" sz="1000" dirty="0">
+                <a:latin typeface="Consolas" panose="020B0609020204030204" pitchFamily="49" charset="0"/>
+              </a:rPr>
+              <a:t>        # </a:t>
+            </a:r>
+            <a:r>
+              <a:rPr lang="zh-TW" altLang="en-US" sz="1000" dirty="0">
+                <a:latin typeface="Consolas" panose="020B0609020204030204" pitchFamily="49" charset="0"/>
+              </a:rPr>
+              <a:t>提取 </a:t>
+            </a:r>
+            <a:r>
+              <a:rPr lang="en-US" altLang="zh-TW" sz="1000" dirty="0">
+                <a:latin typeface="Consolas" panose="020B0609020204030204" pitchFamily="49" charset="0"/>
+              </a:rPr>
+              <a:t>RegulomeDB </a:t>
+            </a:r>
+            <a:r>
+              <a:rPr lang="zh-TW" altLang="en-US" sz="1000" dirty="0">
+                <a:latin typeface="Consolas" panose="020B0609020204030204" pitchFamily="49" charset="0"/>
+              </a:rPr>
+              <a:t>的調控特徵數據</a:t>
+            </a:r>
+            <a:endParaRPr lang="en-US" altLang="zh-TW" sz="1000" dirty="0">
+              <a:latin typeface="Consolas" panose="020B0609020204030204" pitchFamily="49" charset="0"/>
+            </a:endParaRPr>
+          </a:p>
+          <a:p>
+            <a:r>
+              <a:rPr lang="zh-TW" altLang="en-US" sz="1000" dirty="0">
+                <a:latin typeface="Consolas" panose="020B0609020204030204" pitchFamily="49" charset="0"/>
+              </a:rPr>
+              <a:t>        </a:t>
+            </a:r>
+            <a:r>
+              <a:rPr lang="en-US" altLang="zh-TW" sz="1000" dirty="0">
+                <a:latin typeface="Consolas" panose="020B0609020204030204" pitchFamily="49" charset="0"/>
+              </a:rPr>
+              <a:t>regulomedb_info = data.get("regulomedb", {})</a:t>
+            </a:r>
+          </a:p>
+          <a:p>
+            <a:r>
+              <a:rPr lang="en-US" altLang="zh-TW" sz="1000" dirty="0">
+                <a:latin typeface="Consolas" panose="020B0609020204030204" pitchFamily="49" charset="0"/>
+              </a:rPr>
+              <a:t>        score = regulomedb_info.get("score", "</a:t>
+            </a:r>
+            <a:r>
+              <a:rPr lang="zh-TW" altLang="en-US" sz="1000" dirty="0">
+                <a:latin typeface="Consolas" panose="020B0609020204030204" pitchFamily="49" charset="0"/>
+              </a:rPr>
+              <a:t>無評分</a:t>
+            </a:r>
+            <a:r>
+              <a:rPr lang="en-US" altLang="zh-TW" sz="1000" dirty="0">
+                <a:latin typeface="Consolas" panose="020B0609020204030204" pitchFamily="49" charset="0"/>
+              </a:rPr>
+              <a:t>")</a:t>
+            </a:r>
+          </a:p>
+          <a:p>
+            <a:r>
+              <a:rPr lang="en-US" altLang="zh-TW" sz="1000" dirty="0">
+                <a:latin typeface="Consolas" panose="020B0609020204030204" pitchFamily="49" charset="0"/>
+              </a:rPr>
+              <a:t>        evidence = regulomedb_info.get("evidence", [])</a:t>
+            </a:r>
+          </a:p>
+          <a:p>
+            <a:r>
+              <a:rPr lang="en-US" altLang="zh-TW" sz="1000" dirty="0">
+                <a:latin typeface="Consolas" panose="020B0609020204030204" pitchFamily="49" charset="0"/>
+              </a:rPr>
+              <a:t>        </a:t>
+            </a:r>
+          </a:p>
+          <a:p>
+            <a:r>
+              <a:rPr lang="en-US" altLang="zh-TW" sz="1000" dirty="0">
+                <a:latin typeface="Consolas" panose="020B0609020204030204" pitchFamily="49" charset="0"/>
+              </a:rPr>
+              <a:t>        return {</a:t>
+            </a:r>
+          </a:p>
+          <a:p>
+            <a:r>
+              <a:rPr lang="en-US" altLang="zh-TW" sz="1000" dirty="0">
+                <a:latin typeface="Consolas" panose="020B0609020204030204" pitchFamily="49" charset="0"/>
+              </a:rPr>
+              <a:t>            "rsID": rsid,</a:t>
+            </a:r>
+          </a:p>
+          <a:p>
+            <a:r>
+              <a:rPr lang="en-US" altLang="zh-TW" sz="1000" dirty="0">
+                <a:latin typeface="Consolas" panose="020B0609020204030204" pitchFamily="49" charset="0"/>
+              </a:rPr>
+              <a:t>            "RegulomeDB_Score": score,</a:t>
+            </a:r>
+          </a:p>
+          <a:p>
+            <a:r>
+              <a:rPr lang="en-US" altLang="zh-TW" sz="1000" dirty="0">
+                <a:latin typeface="Consolas" panose="020B0609020204030204" pitchFamily="49" charset="0"/>
+              </a:rPr>
+              <a:t>            "Description": f"</a:t>
+            </a:r>
+            <a:r>
+              <a:rPr lang="zh-TW" altLang="en-US" sz="1000" dirty="0">
+                <a:latin typeface="Consolas" panose="020B0609020204030204" pitchFamily="49" charset="0"/>
+              </a:rPr>
+              <a:t>該 </a:t>
+            </a:r>
+            <a:r>
+              <a:rPr lang="en-US" altLang="zh-TW" sz="1000" dirty="0">
+                <a:latin typeface="Consolas" panose="020B0609020204030204" pitchFamily="49" charset="0"/>
+              </a:rPr>
+              <a:t>SNP </a:t>
+            </a:r>
+            <a:r>
+              <a:rPr lang="zh-TW" altLang="en-US" sz="1000" dirty="0">
+                <a:latin typeface="Consolas" panose="020B0609020204030204" pitchFamily="49" charset="0"/>
+              </a:rPr>
+              <a:t>的調控潛力分數為 </a:t>
+            </a:r>
+            <a:r>
+              <a:rPr lang="en-US" altLang="zh-TW" sz="1000" dirty="0">
+                <a:latin typeface="Consolas" panose="020B0609020204030204" pitchFamily="49" charset="0"/>
+              </a:rPr>
+              <a:t>{score}</a:t>
+            </a:r>
+            <a:r>
+              <a:rPr lang="zh-TW" altLang="en-US" sz="1000" dirty="0">
+                <a:latin typeface="Consolas" panose="020B0609020204030204" pitchFamily="49" charset="0"/>
+              </a:rPr>
+              <a:t>。</a:t>
+            </a:r>
+            <a:endParaRPr lang="en-US" altLang="zh-TW" sz="1000" dirty="0">
+              <a:latin typeface="Consolas" panose="020B0609020204030204" pitchFamily="49" charset="0"/>
+            </a:endParaRPr>
+          </a:p>
+          <a:p>
+            <a:r>
+              <a:rPr lang="en-US" altLang="zh-TW" sz="1000" dirty="0">
+                <a:latin typeface="Consolas" panose="020B0609020204030204" pitchFamily="49" charset="0"/>
+              </a:rPr>
+              <a:t>		</a:t>
+            </a:r>
+            <a:r>
+              <a:rPr lang="zh-TW" altLang="en-US" sz="1000" dirty="0">
+                <a:latin typeface="Consolas" panose="020B0609020204030204" pitchFamily="49" charset="0"/>
+              </a:rPr>
+              <a:t>分數越低（如 </a:t>
+            </a:r>
+            <a:r>
+              <a:rPr lang="en-US" altLang="zh-TW" sz="1000" dirty="0">
+                <a:latin typeface="Consolas" panose="020B0609020204030204" pitchFamily="49" charset="0"/>
+              </a:rPr>
+              <a:t>1a, 1b</a:t>
+            </a:r>
+            <a:r>
+              <a:rPr lang="zh-TW" altLang="en-US" sz="1000" dirty="0">
+                <a:latin typeface="Consolas" panose="020B0609020204030204" pitchFamily="49" charset="0"/>
+              </a:rPr>
+              <a:t>）代表有越強的轉錄因子結合或 </a:t>
+            </a:r>
+            <a:r>
+              <a:rPr lang="en-US" altLang="zh-TW" sz="1000" dirty="0">
+                <a:latin typeface="Consolas" panose="020B0609020204030204" pitchFamily="49" charset="0"/>
+              </a:rPr>
+              <a:t>eQTL </a:t>
+            </a:r>
+            <a:r>
+              <a:rPr lang="zh-TW" altLang="en-US" sz="1000" dirty="0">
+                <a:latin typeface="Consolas" panose="020B0609020204030204" pitchFamily="49" charset="0"/>
+              </a:rPr>
+              <a:t>實驗證據支撑。</a:t>
+            </a:r>
+            <a:r>
+              <a:rPr lang="en-US" altLang="zh-TW" sz="1000" dirty="0">
+                <a:latin typeface="Consolas" panose="020B0609020204030204" pitchFamily="49" charset="0"/>
+              </a:rPr>
+              <a:t>“</a:t>
+            </a:r>
+          </a:p>
+          <a:p>
+            <a:r>
+              <a:rPr lang="en-US" altLang="zh-TW" sz="1000" dirty="0">
+                <a:latin typeface="Consolas" panose="020B0609020204030204" pitchFamily="49" charset="0"/>
+              </a:rPr>
+              <a:t>        }</a:t>
+            </a:r>
+          </a:p>
+          <a:p>
+            <a:r>
+              <a:rPr lang="en-US" altLang="zh-TW" sz="1000" dirty="0">
+                <a:latin typeface="Consolas" panose="020B0609020204030204" pitchFamily="49" charset="0"/>
+              </a:rPr>
+              <a:t>    else:</a:t>
+            </a:r>
+          </a:p>
+          <a:p>
+            <a:r>
+              <a:rPr lang="en-US" altLang="zh-TW" sz="1000" dirty="0">
+                <a:latin typeface="Consolas" panose="020B0609020204030204" pitchFamily="49" charset="0"/>
+              </a:rPr>
+              <a:t>        return {"error": "</a:t>
+            </a:r>
+            <a:r>
+              <a:rPr lang="zh-TW" altLang="en-US" sz="1000" dirty="0">
+                <a:latin typeface="Consolas" panose="020B0609020204030204" pitchFamily="49" charset="0"/>
+              </a:rPr>
+              <a:t>無法連線至公開資料庫或找不到該 </a:t>
+            </a:r>
+            <a:r>
+              <a:rPr lang="en-US" altLang="zh-TW" sz="1000" dirty="0">
+                <a:latin typeface="Consolas" panose="020B0609020204030204" pitchFamily="49" charset="0"/>
+              </a:rPr>
+              <a:t>SNP"}</a:t>
+            </a:r>
+          </a:p>
+          <a:p>
+            <a:endParaRPr lang="en-US" altLang="zh-TW" sz="1000" dirty="0">
+              <a:latin typeface="Consolas" panose="020B0609020204030204" pitchFamily="49" charset="0"/>
+            </a:endParaRPr>
+          </a:p>
+          <a:p>
+            <a:r>
+              <a:rPr lang="en-US" altLang="zh-TW" sz="1000" dirty="0">
+                <a:latin typeface="Consolas" panose="020B0609020204030204" pitchFamily="49" charset="0"/>
+              </a:rPr>
+              <a:t># AI Agent </a:t>
+            </a:r>
+            <a:r>
+              <a:rPr lang="zh-TW" altLang="en-US" sz="1000" dirty="0">
+                <a:latin typeface="Consolas" panose="020B0609020204030204" pitchFamily="49" charset="0"/>
+              </a:rPr>
+              <a:t>在思考時，若發現使用者問：「</a:t>
+            </a:r>
+            <a:r>
+              <a:rPr lang="en-US" altLang="zh-TW" sz="1000" dirty="0">
+                <a:latin typeface="Consolas" panose="020B0609020204030204" pitchFamily="49" charset="0"/>
+              </a:rPr>
+              <a:t>rs334 </a:t>
+            </a:r>
+            <a:r>
+              <a:rPr lang="zh-TW" altLang="en-US" sz="1000" dirty="0">
+                <a:latin typeface="Consolas" panose="020B0609020204030204" pitchFamily="49" charset="0"/>
+              </a:rPr>
+              <a:t>這個突變有什麼調控功能？」</a:t>
+            </a:r>
+            <a:endParaRPr lang="en-US" altLang="zh-TW" sz="1000" dirty="0">
+              <a:latin typeface="Consolas" panose="020B0609020204030204" pitchFamily="49" charset="0"/>
+            </a:endParaRPr>
+          </a:p>
+          <a:p>
+            <a:r>
+              <a:rPr lang="en-US" altLang="zh-TW" sz="1000" dirty="0">
+                <a:latin typeface="Consolas" panose="020B0609020204030204" pitchFamily="49" charset="0"/>
+              </a:rPr>
+              <a:t># </a:t>
+            </a:r>
+            <a:r>
+              <a:rPr lang="zh-TW" altLang="en-US" sz="1000" dirty="0">
+                <a:latin typeface="Consolas" panose="020B0609020204030204" pitchFamily="49" charset="0"/>
+              </a:rPr>
+              <a:t>就會自動執行：</a:t>
+            </a:r>
+            <a:r>
+              <a:rPr lang="en-US" altLang="zh-TW" sz="1000" dirty="0">
+                <a:latin typeface="Consolas" panose="020B0609020204030204" pitchFamily="49" charset="0"/>
+              </a:rPr>
+              <a:t>query_regulatory_features("rs334")</a:t>
+            </a:r>
+            <a:endParaRPr lang="zh-TW" altLang="en-US" sz="1000" dirty="0">
+              <a:latin typeface="Consolas" panose="020B0609020204030204" pitchFamily="49" charset="0"/>
+            </a:endParaRPr>
           </a:p>
         </p:txBody>
       </p:sp>
     </p:spTree>
     <p:extLst>
       <p:ext uri="{BB962C8B-B14F-4D97-AF65-F5344CB8AC3E}">
-        <p14:creationId xmlns:p14="http://schemas.microsoft.com/office/powerpoint/2010/main" val="3237840861"/>
+        <p14:creationId xmlns:p14="http://schemas.microsoft.com/office/powerpoint/2010/main" val="2551416804"/>
       </p:ext>
     </p:extLst>
   </p:cSld>

--- a/bio-it-agent.pptx
+++ b/bio-it-agent.pptx
@@ -253,7 +253,7 @@
           <a:p>
             <a:fld id="{982F7CBC-87DD-4F69-8F50-7ED68F7FF790}" type="datetimeFigureOut">
               <a:rPr lang="zh-TW" altLang="en-US" smtClean="0"/>
-              <a:t>2026/7/26</a:t>
+              <a:t>2026/7/27</a:t>
             </a:fld>
             <a:endParaRPr lang="zh-TW" altLang="en-US"/>
           </a:p>
@@ -430,7 +430,7 @@
           <a:p>
             <a:fld id="{863167AA-796B-4B6A-95ED-1C0BCB3E5802}" type="datetimeFigureOut">
               <a:rPr lang="zh-TW" altLang="en-US" smtClean="0"/>
-              <a:t>2026/7/26</a:t>
+              <a:t>2026/7/27</a:t>
             </a:fld>
             <a:endParaRPr lang="zh-TW" altLang="en-US"/>
           </a:p>
@@ -1675,6 +1675,587 @@
           </a:p>
         </p:txBody>
       </p:sp>
+      <p:sp>
+        <p:nvSpPr>
+          <p:cNvPr id="5" name="矩形 4">
+            <a:extLst>
+              <a:ext uri="{FF2B5EF4-FFF2-40B4-BE49-F238E27FC236}">
+                <a16:creationId xmlns:a16="http://schemas.microsoft.com/office/drawing/2014/main" id="{EEA47C7B-38D5-FD2B-DAC1-C685C483C02A}"/>
+              </a:ext>
+            </a:extLst>
+          </p:cNvPr>
+          <p:cNvSpPr/>
+          <p:nvPr/>
+        </p:nvSpPr>
+        <p:spPr>
+          <a:xfrm>
+            <a:off x="6228184" y="4800246"/>
+            <a:ext cx="2808311" cy="1467069"/>
+          </a:xfrm>
+          <a:prstGeom prst="rect">
+            <a:avLst/>
+          </a:prstGeom>
+          <a:solidFill>
+            <a:schemeClr val="bg1">
+              <a:lumMod val="95000"/>
+              <a:alpha val="60000"/>
+            </a:schemeClr>
+          </a:solidFill>
+          <a:ln w="3175">
+            <a:solidFill>
+              <a:schemeClr val="bg1">
+                <a:lumMod val="85000"/>
+              </a:schemeClr>
+            </a:solidFill>
+          </a:ln>
+        </p:spPr>
+        <p:style>
+          <a:lnRef idx="2">
+            <a:schemeClr val="accent1">
+              <a:shade val="15000"/>
+            </a:schemeClr>
+          </a:lnRef>
+          <a:fillRef idx="1">
+            <a:schemeClr val="accent1"/>
+          </a:fillRef>
+          <a:effectRef idx="0">
+            <a:schemeClr val="accent1"/>
+          </a:effectRef>
+          <a:fontRef idx="minor">
+            <a:schemeClr val="lt1"/>
+          </a:fontRef>
+        </p:style>
+        <p:txBody>
+          <a:bodyPr wrap="none" lIns="36000" tIns="0" rIns="0" bIns="0" rtlCol="0" anchor="ctr" anchorCtr="0"/>
+          <a:lstStyle/>
+          <a:p>
+            <a:pPr>
+              <a:lnSpc>
+                <a:spcPts val="1600"/>
+              </a:lnSpc>
+            </a:pPr>
+            <a:r>
+              <a:rPr lang="zh-TW" altLang="en-US" sz="1100" dirty="0">
+                <a:solidFill>
+                  <a:schemeClr val="tx1"/>
+                </a:solidFill>
+                <a:latin typeface="微軟正黑體" panose="020B0604030504040204" pitchFamily="34" charset="-120"/>
+                <a:ea typeface="微軟正黑體" panose="020B0604030504040204" pitchFamily="34" charset="-120"/>
+              </a:rPr>
+              <a:t>三階段目標</a:t>
+            </a:r>
+            <a:r>
+              <a:rPr lang="en-US" altLang="zh-TW" sz="1100" dirty="0">
+                <a:solidFill>
+                  <a:schemeClr val="tx1"/>
+                </a:solidFill>
+                <a:latin typeface="微軟正黑體" panose="020B0604030504040204" pitchFamily="34" charset="-120"/>
+                <a:ea typeface="微軟正黑體" panose="020B0604030504040204" pitchFamily="34" charset="-120"/>
+              </a:rPr>
+              <a:t>:</a:t>
+            </a:r>
+          </a:p>
+          <a:p>
+            <a:pPr marL="228600" indent="-228600">
+              <a:lnSpc>
+                <a:spcPts val="1600"/>
+              </a:lnSpc>
+              <a:buAutoNum type="arabicPeriod"/>
+            </a:pPr>
+            <a:r>
+              <a:rPr lang="zh-TW" altLang="en-US" sz="1100" dirty="0">
+                <a:solidFill>
+                  <a:schemeClr val="tx1"/>
+                </a:solidFill>
+                <a:latin typeface="微軟正黑體" panose="020B0604030504040204" pitchFamily="34" charset="-120"/>
+                <a:ea typeface="微軟正黑體" panose="020B0604030504040204" pitchFamily="34" charset="-120"/>
+              </a:rPr>
+              <a:t>一般解說</a:t>
+            </a:r>
+            <a:r>
+              <a:rPr lang="en-US" altLang="zh-TW" sz="1100" dirty="0">
+                <a:solidFill>
+                  <a:schemeClr val="tx1"/>
+                </a:solidFill>
+                <a:latin typeface="微軟正黑體" panose="020B0604030504040204" pitchFamily="34" charset="-120"/>
+                <a:ea typeface="微軟正黑體" panose="020B0604030504040204" pitchFamily="34" charset="-120"/>
+              </a:rPr>
+              <a:t>(</a:t>
+            </a:r>
+            <a:r>
+              <a:rPr lang="zh-TW" altLang="en-US" sz="1100" dirty="0">
+                <a:solidFill>
+                  <a:schemeClr val="tx1"/>
+                </a:solidFill>
+                <a:latin typeface="微軟正黑體" panose="020B0604030504040204" pitchFamily="34" charset="-120"/>
+                <a:ea typeface="微軟正黑體" panose="020B0604030504040204" pitchFamily="34" charset="-120"/>
+              </a:rPr>
+              <a:t>存文字</a:t>
+            </a:r>
+            <a:r>
+              <a:rPr lang="en-US" altLang="zh-TW" sz="1100" dirty="0">
+                <a:solidFill>
+                  <a:schemeClr val="tx1"/>
+                </a:solidFill>
+                <a:latin typeface="微軟正黑體" panose="020B0604030504040204" pitchFamily="34" charset="-120"/>
+                <a:ea typeface="微軟正黑體" panose="020B0604030504040204" pitchFamily="34" charset="-120"/>
+              </a:rPr>
+              <a:t>):</a:t>
+            </a:r>
+            <a:r>
+              <a:rPr lang="zh-TW" altLang="en-US" sz="1100" dirty="0">
+                <a:solidFill>
+                  <a:schemeClr val="tx1"/>
+                </a:solidFill>
+                <a:latin typeface="微軟正黑體" panose="020B0604030504040204" pitchFamily="34" charset="-120"/>
+                <a:ea typeface="微軟正黑體" panose="020B0604030504040204" pitchFamily="34" charset="-120"/>
+              </a:rPr>
+              <a:t> 查詢</a:t>
+            </a:r>
+            <a:r>
+              <a:rPr lang="en-US" altLang="zh-TW" sz="1100" dirty="0">
+                <a:solidFill>
+                  <a:schemeClr val="tx1"/>
+                </a:solidFill>
+                <a:latin typeface="微軟正黑體" panose="020B0604030504040204" pitchFamily="34" charset="-120"/>
+                <a:ea typeface="微軟正黑體" panose="020B0604030504040204" pitchFamily="34" charset="-120"/>
+              </a:rPr>
+              <a:t>[</a:t>
+            </a:r>
+            <a:r>
+              <a:rPr lang="zh-TW" altLang="en-US" sz="1100" dirty="0">
+                <a:solidFill>
+                  <a:schemeClr val="tx1"/>
+                </a:solidFill>
+                <a:latin typeface="微軟正黑體" panose="020B0604030504040204" pitchFamily="34" charset="-120"/>
+                <a:ea typeface="微軟正黑體" panose="020B0604030504040204" pitchFamily="34" charset="-120"/>
+              </a:rPr>
+              <a:t>公開資料庫</a:t>
+            </a:r>
+            <a:r>
+              <a:rPr lang="en-US" altLang="zh-TW" sz="1100" dirty="0">
+                <a:solidFill>
+                  <a:schemeClr val="tx1"/>
+                </a:solidFill>
+                <a:latin typeface="微軟正黑體" panose="020B0604030504040204" pitchFamily="34" charset="-120"/>
+                <a:ea typeface="微軟正黑體" panose="020B0604030504040204" pitchFamily="34" charset="-120"/>
+              </a:rPr>
+              <a:t>],</a:t>
+            </a:r>
+            <a:r>
+              <a:rPr lang="zh-TW" altLang="en-US" sz="1100" dirty="0">
+                <a:solidFill>
+                  <a:schemeClr val="tx1"/>
+                </a:solidFill>
+                <a:latin typeface="微軟正黑體" panose="020B0604030504040204" pitchFamily="34" charset="-120"/>
+                <a:ea typeface="微軟正黑體" panose="020B0604030504040204" pitchFamily="34" charset="-120"/>
+              </a:rPr>
+              <a:t> </a:t>
+            </a:r>
+            <a:endParaRPr lang="en-US" altLang="zh-TW" sz="1100" dirty="0">
+              <a:solidFill>
+                <a:schemeClr val="tx1"/>
+              </a:solidFill>
+              <a:latin typeface="微軟正黑體" panose="020B0604030504040204" pitchFamily="34" charset="-120"/>
+              <a:ea typeface="微軟正黑體" panose="020B0604030504040204" pitchFamily="34" charset="-120"/>
+            </a:endParaRPr>
+          </a:p>
+          <a:p>
+            <a:pPr marL="0" lvl="1" indent="228600">
+              <a:lnSpc>
+                <a:spcPts val="1600"/>
+              </a:lnSpc>
+            </a:pPr>
+            <a:r>
+              <a:rPr lang="zh-TW" altLang="en-US" sz="1100" dirty="0">
+                <a:solidFill>
+                  <a:schemeClr val="tx1"/>
+                </a:solidFill>
+                <a:latin typeface="微軟正黑體" panose="020B0604030504040204" pitchFamily="34" charset="-120"/>
+                <a:ea typeface="微軟正黑體" panose="020B0604030504040204" pitchFamily="34" charset="-120"/>
+              </a:rPr>
+              <a:t>回答醫學</a:t>
+            </a:r>
+            <a:r>
+              <a:rPr lang="en-US" altLang="zh-TW" sz="1100" dirty="0">
+                <a:solidFill>
+                  <a:schemeClr val="tx1"/>
+                </a:solidFill>
+                <a:latin typeface="微軟正黑體" panose="020B0604030504040204" pitchFamily="34" charset="-120"/>
+                <a:ea typeface="微軟正黑體" panose="020B0604030504040204" pitchFamily="34" charset="-120"/>
+              </a:rPr>
+              <a:t>,</a:t>
+            </a:r>
+            <a:r>
+              <a:rPr lang="zh-TW" altLang="en-US" sz="1100" dirty="0">
+                <a:solidFill>
+                  <a:schemeClr val="tx1"/>
+                </a:solidFill>
+                <a:latin typeface="微軟正黑體" panose="020B0604030504040204" pitchFamily="34" charset="-120"/>
+                <a:ea typeface="微軟正黑體" panose="020B0604030504040204" pitchFamily="34" charset="-120"/>
+              </a:rPr>
+              <a:t> 基因</a:t>
+            </a:r>
+            <a:r>
+              <a:rPr lang="en-US" altLang="zh-TW" sz="1100" dirty="0">
+                <a:solidFill>
+                  <a:schemeClr val="tx1"/>
+                </a:solidFill>
+                <a:latin typeface="微軟正黑體" panose="020B0604030504040204" pitchFamily="34" charset="-120"/>
+                <a:ea typeface="微軟正黑體" panose="020B0604030504040204" pitchFamily="34" charset="-120"/>
+              </a:rPr>
+              <a:t>,</a:t>
+            </a:r>
+            <a:r>
+              <a:rPr lang="zh-TW" altLang="en-US" sz="1100" dirty="0">
+                <a:solidFill>
+                  <a:schemeClr val="tx1"/>
+                </a:solidFill>
+                <a:latin typeface="微軟正黑體" panose="020B0604030504040204" pitchFamily="34" charset="-120"/>
+                <a:ea typeface="微軟正黑體" panose="020B0604030504040204" pitchFamily="34" charset="-120"/>
+              </a:rPr>
+              <a:t> 生物資訊關問題</a:t>
+            </a:r>
+            <a:r>
+              <a:rPr lang="en-US" altLang="zh-TW" sz="1100" dirty="0">
+                <a:solidFill>
+                  <a:schemeClr val="tx1"/>
+                </a:solidFill>
+                <a:latin typeface="微軟正黑體" panose="020B0604030504040204" pitchFamily="34" charset="-120"/>
+                <a:ea typeface="微軟正黑體" panose="020B0604030504040204" pitchFamily="34" charset="-120"/>
+              </a:rPr>
+              <a:t>.</a:t>
+            </a:r>
+            <a:r>
+              <a:rPr lang="zh-TW" altLang="en-US" sz="1100" dirty="0">
+                <a:solidFill>
+                  <a:schemeClr val="tx1"/>
+                </a:solidFill>
+                <a:latin typeface="微軟正黑體" panose="020B0604030504040204" pitchFamily="34" charset="-120"/>
+                <a:ea typeface="微軟正黑體" panose="020B0604030504040204" pitchFamily="34" charset="-120"/>
+              </a:rPr>
+              <a:t>  </a:t>
+            </a:r>
+            <a:r>
+              <a:rPr lang="en-US" altLang="zh-TW" sz="1100" b="1" dirty="0">
+                <a:solidFill>
+                  <a:schemeClr val="tx1"/>
+                </a:solidFill>
+                <a:latin typeface="微軟正黑體" panose="020B0604030504040204" pitchFamily="34" charset="-120"/>
+                <a:ea typeface="微軟正黑體" panose="020B0604030504040204" pitchFamily="34" charset="-120"/>
+              </a:rPr>
+              <a:t>(</a:t>
+            </a:r>
+            <a:r>
+              <a:rPr lang="en-US" altLang="zh-TW" sz="1100" b="1" dirty="0">
+                <a:solidFill>
+                  <a:srgbClr val="FF0000"/>
+                </a:solidFill>
+                <a:latin typeface="微軟正黑體" panose="020B0604030504040204" pitchFamily="34" charset="-120"/>
+                <a:ea typeface="微軟正黑體" panose="020B0604030504040204" pitchFamily="34" charset="-120"/>
+              </a:rPr>
+              <a:t>2026</a:t>
+            </a:r>
+            <a:r>
+              <a:rPr lang="en-US" altLang="zh-TW" sz="1100" b="1" dirty="0">
+                <a:solidFill>
+                  <a:schemeClr val="tx1"/>
+                </a:solidFill>
+                <a:latin typeface="微軟正黑體" panose="020B0604030504040204" pitchFamily="34" charset="-120"/>
+                <a:ea typeface="微軟正黑體" panose="020B0604030504040204" pitchFamily="34" charset="-120"/>
+              </a:rPr>
+              <a:t>)</a:t>
+            </a:r>
+          </a:p>
+          <a:p>
+            <a:pPr marL="228600" indent="-228600">
+              <a:lnSpc>
+                <a:spcPts val="1600"/>
+              </a:lnSpc>
+              <a:buAutoNum type="arabicPeriod"/>
+            </a:pPr>
+            <a:r>
+              <a:rPr lang="zh-TW" altLang="en-US" sz="1100" dirty="0">
+                <a:solidFill>
+                  <a:schemeClr val="tx1"/>
+                </a:solidFill>
+                <a:latin typeface="微軟正黑體" panose="020B0604030504040204" pitchFamily="34" charset="-120"/>
+                <a:ea typeface="微軟正黑體" panose="020B0604030504040204" pitchFamily="34" charset="-120"/>
+              </a:rPr>
+              <a:t>讀取照片</a:t>
+            </a:r>
+            <a:r>
+              <a:rPr lang="en-US" altLang="zh-TW" sz="1100" dirty="0">
+                <a:solidFill>
+                  <a:schemeClr val="tx1"/>
+                </a:solidFill>
+                <a:latin typeface="微軟正黑體" panose="020B0604030504040204" pitchFamily="34" charset="-120"/>
+                <a:ea typeface="微軟正黑體" panose="020B0604030504040204" pitchFamily="34" charset="-120"/>
+              </a:rPr>
+              <a:t>(</a:t>
+            </a:r>
+            <a:r>
+              <a:rPr lang="zh-TW" altLang="en-US" sz="1100" dirty="0">
+                <a:solidFill>
+                  <a:schemeClr val="tx1"/>
+                </a:solidFill>
+                <a:latin typeface="微軟正黑體" panose="020B0604030504040204" pitchFamily="34" charset="-120"/>
+                <a:ea typeface="微軟正黑體" panose="020B0604030504040204" pitchFamily="34" charset="-120"/>
+              </a:rPr>
+              <a:t>多模態</a:t>
+            </a:r>
+            <a:r>
+              <a:rPr lang="en-US" altLang="zh-TW" sz="1100" dirty="0">
+                <a:solidFill>
+                  <a:schemeClr val="tx1"/>
+                </a:solidFill>
+                <a:latin typeface="微軟正黑體" panose="020B0604030504040204" pitchFamily="34" charset="-120"/>
+                <a:ea typeface="微軟正黑體" panose="020B0604030504040204" pitchFamily="34" charset="-120"/>
+              </a:rPr>
+              <a:t>) :</a:t>
+            </a:r>
+            <a:r>
+              <a:rPr lang="zh-TW" altLang="en-US" sz="1100" dirty="0">
+                <a:solidFill>
+                  <a:schemeClr val="tx1"/>
+                </a:solidFill>
+                <a:latin typeface="微軟正黑體" panose="020B0604030504040204" pitchFamily="34" charset="-120"/>
+                <a:ea typeface="微軟正黑體" panose="020B0604030504040204" pitchFamily="34" charset="-120"/>
+              </a:rPr>
+              <a:t> 分析</a:t>
+            </a:r>
+            <a:r>
+              <a:rPr lang="en-US" altLang="zh-TW" sz="1100" dirty="0">
+                <a:solidFill>
+                  <a:schemeClr val="tx1"/>
+                </a:solidFill>
+                <a:latin typeface="微軟正黑體" panose="020B0604030504040204" pitchFamily="34" charset="-120"/>
+                <a:ea typeface="微軟正黑體" panose="020B0604030504040204" pitchFamily="34" charset="-120"/>
+              </a:rPr>
+              <a:t>summit2</a:t>
+            </a:r>
+            <a:r>
+              <a:rPr lang="zh-TW" altLang="en-US" sz="1100" dirty="0">
+                <a:solidFill>
+                  <a:schemeClr val="tx1"/>
+                </a:solidFill>
+                <a:latin typeface="微軟正黑體" panose="020B0604030504040204" pitchFamily="34" charset="-120"/>
+                <a:ea typeface="微軟正黑體" panose="020B0604030504040204" pitchFamily="34" charset="-120"/>
+              </a:rPr>
+              <a:t>的照片</a:t>
+            </a:r>
+            <a:r>
+              <a:rPr lang="en-US" altLang="zh-TW" sz="1100" dirty="0">
+                <a:solidFill>
+                  <a:schemeClr val="tx1"/>
+                </a:solidFill>
+                <a:latin typeface="微軟正黑體" panose="020B0604030504040204" pitchFamily="34" charset="-120"/>
+                <a:ea typeface="微軟正黑體" panose="020B0604030504040204" pitchFamily="34" charset="-120"/>
+              </a:rPr>
+              <a:t>,</a:t>
+            </a:r>
+          </a:p>
+          <a:p>
+            <a:pPr marL="0" lvl="1" indent="228600">
+              <a:lnSpc>
+                <a:spcPts val="1600"/>
+              </a:lnSpc>
+            </a:pPr>
+            <a:r>
+              <a:rPr lang="zh-TW" altLang="en-US" sz="1100" dirty="0">
+                <a:solidFill>
+                  <a:schemeClr val="tx1"/>
+                </a:solidFill>
+                <a:latin typeface="微軟正黑體" panose="020B0604030504040204" pitchFamily="34" charset="-120"/>
+                <a:ea typeface="微軟正黑體" panose="020B0604030504040204" pitchFamily="34" charset="-120"/>
+              </a:rPr>
+              <a:t>取得分型結果</a:t>
+            </a:r>
+            <a:r>
+              <a:rPr lang="en-US" altLang="zh-TW" sz="1100" dirty="0">
+                <a:solidFill>
+                  <a:schemeClr val="tx1"/>
+                </a:solidFill>
+                <a:latin typeface="微軟正黑體" panose="020B0604030504040204" pitchFamily="34" charset="-120"/>
+                <a:ea typeface="微軟正黑體" panose="020B0604030504040204" pitchFamily="34" charset="-120"/>
+              </a:rPr>
+              <a:t>.</a:t>
+            </a:r>
+            <a:r>
+              <a:rPr lang="zh-TW" altLang="en-US" sz="1100" dirty="0">
+                <a:solidFill>
+                  <a:schemeClr val="tx1"/>
+                </a:solidFill>
+                <a:latin typeface="微軟正黑體" panose="020B0604030504040204" pitchFamily="34" charset="-120"/>
+                <a:ea typeface="微軟正黑體" panose="020B0604030504040204" pitchFamily="34" charset="-120"/>
+              </a:rPr>
+              <a:t> </a:t>
+            </a:r>
+            <a:r>
+              <a:rPr lang="en-US" altLang="zh-TW" sz="1100" b="1" dirty="0">
+                <a:solidFill>
+                  <a:schemeClr val="tx1"/>
+                </a:solidFill>
+                <a:latin typeface="微軟正黑體" panose="020B0604030504040204" pitchFamily="34" charset="-120"/>
+                <a:ea typeface="微軟正黑體" panose="020B0604030504040204" pitchFamily="34" charset="-120"/>
+              </a:rPr>
+              <a:t>(</a:t>
+            </a:r>
+            <a:r>
+              <a:rPr lang="en-US" altLang="zh-TW" sz="1100" b="1" dirty="0">
+                <a:solidFill>
+                  <a:srgbClr val="FF0000"/>
+                </a:solidFill>
+                <a:latin typeface="微軟正黑體" panose="020B0604030504040204" pitchFamily="34" charset="-120"/>
+                <a:ea typeface="微軟正黑體" panose="020B0604030504040204" pitchFamily="34" charset="-120"/>
+              </a:rPr>
+              <a:t>2027</a:t>
+            </a:r>
+            <a:r>
+              <a:rPr lang="en-US" altLang="zh-TW" sz="1100" b="1" dirty="0">
+                <a:solidFill>
+                  <a:schemeClr val="tx1"/>
+                </a:solidFill>
+                <a:latin typeface="微軟正黑體" panose="020B0604030504040204" pitchFamily="34" charset="-120"/>
+                <a:ea typeface="微軟正黑體" panose="020B0604030504040204" pitchFamily="34" charset="-120"/>
+              </a:rPr>
+              <a:t>)</a:t>
+            </a:r>
+          </a:p>
+          <a:p>
+            <a:pPr marL="228600" indent="-228600">
+              <a:lnSpc>
+                <a:spcPts val="1600"/>
+              </a:lnSpc>
+              <a:buAutoNum type="arabicPeriod"/>
+            </a:pPr>
+            <a:r>
+              <a:rPr lang="zh-TW" altLang="en-US" sz="1100" dirty="0">
+                <a:solidFill>
+                  <a:schemeClr val="tx1"/>
+                </a:solidFill>
+                <a:latin typeface="微軟正黑體" panose="020B0604030504040204" pitchFamily="34" charset="-120"/>
+                <a:ea typeface="微軟正黑體" panose="020B0604030504040204" pitchFamily="34" charset="-120"/>
+              </a:rPr>
+              <a:t>解讀數據</a:t>
+            </a:r>
+            <a:r>
+              <a:rPr lang="en-US" altLang="zh-TW" sz="1100" dirty="0">
+                <a:solidFill>
+                  <a:schemeClr val="tx1"/>
+                </a:solidFill>
+                <a:latin typeface="微軟正黑體" panose="020B0604030504040204" pitchFamily="34" charset="-120"/>
+                <a:ea typeface="微軟正黑體" panose="020B0604030504040204" pitchFamily="34" charset="-120"/>
+              </a:rPr>
+              <a:t>:</a:t>
+            </a:r>
+            <a:r>
+              <a:rPr lang="zh-TW" altLang="en-US" sz="1100" dirty="0">
+                <a:solidFill>
+                  <a:schemeClr val="tx1"/>
+                </a:solidFill>
+                <a:latin typeface="微軟正黑體" panose="020B0604030504040204" pitchFamily="34" charset="-120"/>
+                <a:ea typeface="微軟正黑體" panose="020B0604030504040204" pitchFamily="34" charset="-120"/>
+              </a:rPr>
+              <a:t> 解讀</a:t>
+            </a:r>
+            <a:r>
+              <a:rPr lang="en-US" altLang="zh-TW" sz="1100" dirty="0">
+                <a:solidFill>
+                  <a:schemeClr val="tx1"/>
+                </a:solidFill>
+                <a:latin typeface="微軟正黑體" panose="020B0604030504040204" pitchFamily="34" charset="-120"/>
+                <a:ea typeface="微軟正黑體" panose="020B0604030504040204" pitchFamily="34" charset="-120"/>
+              </a:rPr>
+              <a:t>summit spatial</a:t>
+            </a:r>
+            <a:r>
+              <a:rPr lang="zh-TW" altLang="en-US" sz="1100" dirty="0">
+                <a:solidFill>
+                  <a:schemeClr val="tx1"/>
+                </a:solidFill>
+                <a:latin typeface="微軟正黑體" panose="020B0604030504040204" pitchFamily="34" charset="-120"/>
+                <a:ea typeface="微軟正黑體" panose="020B0604030504040204" pitchFamily="34" charset="-120"/>
+              </a:rPr>
+              <a:t>照片</a:t>
+            </a:r>
+            <a:endParaRPr lang="en-US" altLang="zh-TW" sz="1100" dirty="0">
+              <a:solidFill>
+                <a:schemeClr val="tx1"/>
+              </a:solidFill>
+              <a:latin typeface="微軟正黑體" panose="020B0604030504040204" pitchFamily="34" charset="-120"/>
+              <a:ea typeface="微軟正黑體" panose="020B0604030504040204" pitchFamily="34" charset="-120"/>
+            </a:endParaRPr>
+          </a:p>
+          <a:p>
+            <a:pPr indent="228600">
+              <a:lnSpc>
+                <a:spcPts val="1600"/>
+              </a:lnSpc>
+            </a:pPr>
+            <a:r>
+              <a:rPr lang="zh-TW" altLang="en-US" sz="1100" dirty="0">
+                <a:solidFill>
+                  <a:schemeClr val="tx1"/>
+                </a:solidFill>
+                <a:latin typeface="微軟正黑體" panose="020B0604030504040204" pitchFamily="34" charset="-120"/>
+                <a:ea typeface="微軟正黑體" panose="020B0604030504040204" pitchFamily="34" charset="-120"/>
+              </a:rPr>
+              <a:t>與其空間定序數據</a:t>
+            </a:r>
+            <a:r>
+              <a:rPr lang="en-US" altLang="zh-TW" sz="1100" dirty="0">
+                <a:solidFill>
+                  <a:schemeClr val="tx1"/>
+                </a:solidFill>
+                <a:latin typeface="微軟正黑體" panose="020B0604030504040204" pitchFamily="34" charset="-120"/>
+                <a:ea typeface="微軟正黑體" panose="020B0604030504040204" pitchFamily="34" charset="-120"/>
+              </a:rPr>
+              <a:t>.</a:t>
+            </a:r>
+            <a:r>
+              <a:rPr lang="zh-TW" altLang="en-US" sz="1100" dirty="0">
+                <a:solidFill>
+                  <a:schemeClr val="tx1"/>
+                </a:solidFill>
+                <a:latin typeface="微軟正黑體" panose="020B0604030504040204" pitchFamily="34" charset="-120"/>
+                <a:ea typeface="微軟正黑體" panose="020B0604030504040204" pitchFamily="34" charset="-120"/>
+              </a:rPr>
+              <a:t> </a:t>
+            </a:r>
+            <a:r>
+              <a:rPr lang="en-US" altLang="zh-TW" sz="1100" b="1" dirty="0">
+                <a:solidFill>
+                  <a:schemeClr val="tx1"/>
+                </a:solidFill>
+                <a:latin typeface="微軟正黑體" panose="020B0604030504040204" pitchFamily="34" charset="-120"/>
+                <a:ea typeface="微軟正黑體" panose="020B0604030504040204" pitchFamily="34" charset="-120"/>
+              </a:rPr>
+              <a:t>(</a:t>
+            </a:r>
+            <a:r>
+              <a:rPr lang="en-US" altLang="zh-TW" sz="1100" b="1" dirty="0">
+                <a:solidFill>
+                  <a:srgbClr val="FF0000"/>
+                </a:solidFill>
+                <a:latin typeface="微軟正黑體" panose="020B0604030504040204" pitchFamily="34" charset="-120"/>
+                <a:ea typeface="微軟正黑體" panose="020B0604030504040204" pitchFamily="34" charset="-120"/>
+              </a:rPr>
+              <a:t>2028</a:t>
+            </a:r>
+            <a:r>
+              <a:rPr lang="en-US" altLang="zh-TW" sz="1100" b="1" dirty="0">
+                <a:solidFill>
+                  <a:schemeClr val="tx1"/>
+                </a:solidFill>
+                <a:latin typeface="微軟正黑體" panose="020B0604030504040204" pitchFamily="34" charset="-120"/>
+                <a:ea typeface="微軟正黑體" panose="020B0604030504040204" pitchFamily="34" charset="-120"/>
+              </a:rPr>
+              <a:t>)</a:t>
+            </a:r>
+          </a:p>
+        </p:txBody>
+      </p:sp>
     </p:spTree>
     <p:extLst>
       <p:ext uri="{BB962C8B-B14F-4D97-AF65-F5344CB8AC3E}">
@@ -1784,700 +2365,6 @@
           </a:p>
         </p:txBody>
       </p:sp>
-      <p:sp>
-        <p:nvSpPr>
-          <p:cNvPr id="4" name="文字方塊 3">
-            <a:extLst>
-              <a:ext uri="{FF2B5EF4-FFF2-40B4-BE49-F238E27FC236}">
-                <a16:creationId xmlns:a16="http://schemas.microsoft.com/office/drawing/2014/main" id="{3FBE37F5-82E5-A69A-2496-4479A9FEA39E}"/>
-              </a:ext>
-            </a:extLst>
-          </p:cNvPr>
-          <p:cNvSpPr txBox="1"/>
-          <p:nvPr/>
-        </p:nvSpPr>
-        <p:spPr>
-          <a:xfrm>
-            <a:off x="2987824" y="972945"/>
-            <a:ext cx="5760639" cy="2223686"/>
-          </a:xfrm>
-          <a:prstGeom prst="rect">
-            <a:avLst/>
-          </a:prstGeom>
-          <a:noFill/>
-        </p:spPr>
-        <p:txBody>
-          <a:bodyPr wrap="square">
-            <a:spAutoFit/>
-          </a:bodyPr>
-          <a:lstStyle/>
-          <a:p>
-            <a:pPr>
-              <a:spcBef>
-                <a:spcPts val="900"/>
-              </a:spcBef>
-              <a:spcAft>
-                <a:spcPts val="1200"/>
-              </a:spcAft>
-            </a:pPr>
-            <a:r>
-              <a:rPr lang="en-US" altLang="zh-TW" sz="1100" b="0" u="none" strike="noStrike" dirty="0">
-                <a:effectLst/>
-                <a:latin typeface="微軟正黑體" panose="020B0604030504040204" pitchFamily="34" charset="-120"/>
-                <a:ea typeface="微軟正黑體" panose="020B0604030504040204" pitchFamily="34" charset="-120"/>
-              </a:rPr>
-              <a:t>BIO-</a:t>
-            </a:r>
-            <a:r>
-              <a:rPr lang="zh-TW" altLang="zh-TW" sz="1100" b="0" u="none" strike="noStrike" dirty="0">
-                <a:effectLst/>
-                <a:latin typeface="微軟正黑體" panose="020B0604030504040204" pitchFamily="34" charset="-120"/>
-                <a:ea typeface="微軟正黑體" panose="020B0604030504040204" pitchFamily="34" charset="-120"/>
-              </a:rPr>
-              <a:t>Agent 是一個</a:t>
-            </a:r>
-            <a:r>
-              <a:rPr lang="zh-TW" altLang="en-US" sz="1100" b="0" u="none" strike="noStrike" dirty="0">
-                <a:effectLst/>
-                <a:latin typeface="微軟正黑體" panose="020B0604030504040204" pitchFamily="34" charset="-120"/>
-                <a:ea typeface="微軟正黑體" panose="020B0604030504040204" pitchFamily="34" charset="-120"/>
-              </a:rPr>
-              <a:t>多模態的生物醫學</a:t>
-            </a:r>
-            <a:r>
-              <a:rPr lang="en-US" altLang="zh-TW" sz="1100" b="0" u="none" strike="noStrike" dirty="0">
-                <a:effectLst/>
-                <a:latin typeface="微軟正黑體" panose="020B0604030504040204" pitchFamily="34" charset="-120"/>
-                <a:ea typeface="微軟正黑體" panose="020B0604030504040204" pitchFamily="34" charset="-120"/>
-              </a:rPr>
-              <a:t>AI</a:t>
-            </a:r>
-            <a:r>
-              <a:rPr lang="zh-TW" altLang="en-US" sz="1100" b="0" u="none" strike="noStrike" dirty="0">
-                <a:effectLst/>
-                <a:latin typeface="微軟正黑體" panose="020B0604030504040204" pitchFamily="34" charset="-120"/>
-                <a:ea typeface="微軟正黑體" panose="020B0604030504040204" pitchFamily="34" charset="-120"/>
-              </a:rPr>
-              <a:t> </a:t>
-            </a:r>
-            <a:r>
-              <a:rPr lang="en-US" altLang="zh-TW" sz="1100" b="0" u="none" strike="noStrike" dirty="0">
-                <a:effectLst/>
-                <a:latin typeface="微軟正黑體" panose="020B0604030504040204" pitchFamily="34" charset="-120"/>
-                <a:ea typeface="微軟正黑體" panose="020B0604030504040204" pitchFamily="34" charset="-120"/>
-              </a:rPr>
-              <a:t>Agent, </a:t>
-            </a:r>
-            <a:r>
-              <a:rPr lang="zh-TW" altLang="en-US" sz="1100" b="0" u="none" strike="noStrike" dirty="0">
-                <a:effectLst/>
-                <a:latin typeface="微軟正黑體" panose="020B0604030504040204" pitchFamily="34" charset="-120"/>
-                <a:ea typeface="微軟正黑體" panose="020B0604030504040204" pitchFamily="34" charset="-120"/>
-              </a:rPr>
-              <a:t>分析輸入的資料</a:t>
-            </a:r>
-            <a:r>
-              <a:rPr lang="en-US" altLang="zh-TW" sz="1100" b="0" u="none" strike="noStrike" dirty="0">
-                <a:effectLst/>
-                <a:latin typeface="微軟正黑體" panose="020B0604030504040204" pitchFamily="34" charset="-120"/>
-                <a:ea typeface="微軟正黑體" panose="020B0604030504040204" pitchFamily="34" charset="-120"/>
-              </a:rPr>
-              <a:t>, </a:t>
-            </a:r>
-            <a:r>
-              <a:rPr lang="zh-TW" altLang="en-US" sz="1100" dirty="0">
-                <a:latin typeface="微軟正黑體" panose="020B0604030504040204" pitchFamily="34" charset="-120"/>
-                <a:ea typeface="微軟正黑體" panose="020B0604030504040204" pitchFamily="34" charset="-120"/>
-              </a:rPr>
-              <a:t>查詢遠端文獻</a:t>
-            </a:r>
-            <a:r>
-              <a:rPr lang="en-US" altLang="zh-TW" sz="1100" dirty="0">
-                <a:latin typeface="微軟正黑體" panose="020B0604030504040204" pitchFamily="34" charset="-120"/>
-                <a:ea typeface="微軟正黑體" panose="020B0604030504040204" pitchFamily="34" charset="-120"/>
-              </a:rPr>
-              <a:t>,</a:t>
-            </a:r>
-            <a:r>
-              <a:rPr lang="zh-TW" altLang="en-US" sz="1100" dirty="0">
-                <a:latin typeface="微軟正黑體" panose="020B0604030504040204" pitchFamily="34" charset="-120"/>
-                <a:ea typeface="微軟正黑體" panose="020B0604030504040204" pitchFamily="34" charset="-120"/>
-              </a:rPr>
-              <a:t> 進而整理出對應報告</a:t>
-            </a:r>
-            <a:r>
-              <a:rPr lang="en-US" altLang="zh-TW" sz="1100" dirty="0">
-                <a:latin typeface="微軟正黑體" panose="020B0604030504040204" pitchFamily="34" charset="-120"/>
-                <a:ea typeface="微軟正黑體" panose="020B0604030504040204" pitchFamily="34" charset="-120"/>
-              </a:rPr>
-              <a:t>.</a:t>
-            </a:r>
-          </a:p>
-          <a:p>
-            <a:pPr>
-              <a:spcBef>
-                <a:spcPts val="900"/>
-              </a:spcBef>
-              <a:spcAft>
-                <a:spcPts val="1200"/>
-              </a:spcAft>
-            </a:pPr>
-            <a:r>
-              <a:rPr lang="zh-TW" altLang="en-US" sz="1100" dirty="0">
-                <a:latin typeface="微軟正黑體" panose="020B0604030504040204" pitchFamily="34" charset="-120"/>
-                <a:ea typeface="微軟正黑體" panose="020B0604030504040204" pitchFamily="34" charset="-120"/>
-              </a:rPr>
-              <a:t>解讀基因分型數據，簡單來說，就是將枯燥的「</a:t>
-            </a:r>
-            <a:r>
-              <a:rPr lang="en-US" altLang="zh-TW" sz="1100" dirty="0">
-                <a:latin typeface="微軟正黑體" panose="020B0604030504040204" pitchFamily="34" charset="-120"/>
-                <a:ea typeface="微軟正黑體" panose="020B0604030504040204" pitchFamily="34" charset="-120"/>
-              </a:rPr>
-              <a:t>DNA </a:t>
-            </a:r>
-            <a:r>
-              <a:rPr lang="zh-TW" altLang="en-US" sz="1100" dirty="0">
-                <a:latin typeface="微軟正黑體" panose="020B0604030504040204" pitchFamily="34" charset="-120"/>
-                <a:ea typeface="微軟正黑體" panose="020B0604030504040204" pitchFamily="34" charset="-120"/>
-              </a:rPr>
-              <a:t>字母組合」，翻譯成你看得懂的「健康與生理說明書」。在實驗室完成基因分型（</a:t>
-            </a:r>
-            <a:r>
-              <a:rPr lang="en-US" altLang="zh-TW" sz="1100" dirty="0">
-                <a:latin typeface="微軟正黑體" panose="020B0604030504040204" pitchFamily="34" charset="-120"/>
-                <a:ea typeface="微軟正黑體" panose="020B0604030504040204" pitchFamily="34" charset="-120"/>
-              </a:rPr>
-              <a:t>Genotyping</a:t>
-            </a:r>
-            <a:r>
-              <a:rPr lang="zh-TW" altLang="en-US" sz="1100" dirty="0">
-                <a:latin typeface="微軟正黑體" panose="020B0604030504040204" pitchFamily="34" charset="-120"/>
-                <a:ea typeface="微軟正黑體" panose="020B0604030504040204" pitchFamily="34" charset="-120"/>
-              </a:rPr>
-              <a:t>）後，你會拿到一張包含成千上萬個點位、類似「</a:t>
-            </a:r>
-            <a:r>
-              <a:rPr lang="en-US" altLang="zh-TW" sz="1100" dirty="0">
-                <a:latin typeface="微軟正黑體" panose="020B0604030504040204" pitchFamily="34" charset="-120"/>
-                <a:ea typeface="微軟正黑體" panose="020B0604030504040204" pitchFamily="34" charset="-120"/>
-              </a:rPr>
-              <a:t>rs1057910: CC</a:t>
-            </a:r>
-            <a:r>
-              <a:rPr lang="zh-TW" altLang="en-US" sz="1100" dirty="0">
-                <a:latin typeface="微軟正黑體" panose="020B0604030504040204" pitchFamily="34" charset="-120"/>
-                <a:ea typeface="微軟正黑體" panose="020B0604030504040204" pitchFamily="34" charset="-120"/>
-              </a:rPr>
-              <a:t>」或「</a:t>
-            </a:r>
-            <a:r>
-              <a:rPr lang="en-US" altLang="zh-TW" sz="1100" dirty="0">
-                <a:latin typeface="微軟正黑體" panose="020B0604030504040204" pitchFamily="34" charset="-120"/>
-                <a:ea typeface="微軟正黑體" panose="020B0604030504040204" pitchFamily="34" charset="-120"/>
-              </a:rPr>
-              <a:t>rs334: AT</a:t>
-            </a:r>
-            <a:r>
-              <a:rPr lang="zh-TW" altLang="en-US" sz="1100" dirty="0">
-                <a:latin typeface="微軟正黑體" panose="020B0604030504040204" pitchFamily="34" charset="-120"/>
-                <a:ea typeface="微軟正黑體" panose="020B0604030504040204" pitchFamily="34" charset="-120"/>
-              </a:rPr>
-              <a:t>」的基因密碼清單。這些代碼本身沒有意義，而「解讀」就是利用 </a:t>
-            </a:r>
-            <a:r>
-              <a:rPr lang="en-US" altLang="zh-TW" sz="1100" dirty="0">
-                <a:latin typeface="微軟正黑體" panose="020B0604030504040204" pitchFamily="34" charset="-120"/>
-                <a:ea typeface="微軟正黑體" panose="020B0604030504040204" pitchFamily="34" charset="-120"/>
-              </a:rPr>
-              <a:t>AI </a:t>
-            </a:r>
-            <a:r>
-              <a:rPr lang="zh-TW" altLang="en-US" sz="1100" dirty="0">
-                <a:latin typeface="微軟正黑體" panose="020B0604030504040204" pitchFamily="34" charset="-120"/>
-                <a:ea typeface="微軟正黑體" panose="020B0604030504040204" pitchFamily="34" charset="-120"/>
-              </a:rPr>
-              <a:t>或生物資訊工具，去翻閱國際醫學字典與資料庫，查明這些密碼對你的身體代表什麼：看疾病風險：查出哪些變異會增加你罹患心臟病、糖尿病或特定癌症的機率。看用藥反應：查出你的體質對某些藥物（如抗凝血劑、標靶藥）是代謝太快還是太慢，以便醫生調整精準劑量，避免過敏副作用。看調控特徵：查明這些變異是否會悄悄改變你體內某些基因的表達量。這項工作的本質，就是把冰冷的生物數據，轉化為具備臨床價值的精準醫療指引。 </a:t>
-            </a:r>
-            <a:endParaRPr lang="en-US" altLang="zh-TW" sz="1100" dirty="0">
-              <a:latin typeface="微軟正黑體" panose="020B0604030504040204" pitchFamily="34" charset="-120"/>
-              <a:ea typeface="微軟正黑體" panose="020B0604030504040204" pitchFamily="34" charset="-120"/>
-            </a:endParaRPr>
-          </a:p>
-        </p:txBody>
-      </p:sp>
-      <p:sp>
-        <p:nvSpPr>
-          <p:cNvPr id="3" name="矩形 2">
-            <a:extLst>
-              <a:ext uri="{FF2B5EF4-FFF2-40B4-BE49-F238E27FC236}">
-                <a16:creationId xmlns:a16="http://schemas.microsoft.com/office/drawing/2014/main" id="{A9193AD6-7790-74B9-25AF-6FA2590D3D97}"/>
-              </a:ext>
-            </a:extLst>
-          </p:cNvPr>
-          <p:cNvSpPr/>
-          <p:nvPr/>
-        </p:nvSpPr>
-        <p:spPr>
-          <a:xfrm>
-            <a:off x="323529" y="1304646"/>
-            <a:ext cx="1152128" cy="612186"/>
-          </a:xfrm>
-          <a:prstGeom prst="rect">
-            <a:avLst/>
-          </a:prstGeom>
-          <a:noFill/>
-          <a:ln w="38100">
-            <a:solidFill>
-              <a:schemeClr val="tx2">
-                <a:lumMod val="20000"/>
-                <a:lumOff val="80000"/>
-              </a:schemeClr>
-            </a:solidFill>
-          </a:ln>
-        </p:spPr>
-        <p:style>
-          <a:lnRef idx="2">
-            <a:schemeClr val="accent1">
-              <a:shade val="15000"/>
-            </a:schemeClr>
-          </a:lnRef>
-          <a:fillRef idx="1">
-            <a:schemeClr val="accent1"/>
-          </a:fillRef>
-          <a:effectRef idx="0">
-            <a:schemeClr val="accent1"/>
-          </a:effectRef>
-          <a:fontRef idx="minor">
-            <a:schemeClr val="lt1"/>
-          </a:fontRef>
-        </p:style>
-        <p:txBody>
-          <a:bodyPr wrap="none" lIns="36000" tIns="0" rIns="0" bIns="0" rtlCol="0" anchor="ctr" anchorCtr="0"/>
-          <a:lstStyle/>
-          <a:p>
-            <a:pPr>
-              <a:lnSpc>
-                <a:spcPts val="1200"/>
-              </a:lnSpc>
-            </a:pPr>
-            <a:r>
-              <a:rPr lang="zh-TW" altLang="en-US" sz="1200" dirty="0">
-                <a:solidFill>
-                  <a:schemeClr val="tx2"/>
-                </a:solidFill>
-                <a:latin typeface="微軟正黑體" panose="020B0604030504040204" pitchFamily="34" charset="-120"/>
-                <a:ea typeface="微軟正黑體" panose="020B0604030504040204" pitchFamily="34" charset="-120"/>
-              </a:rPr>
-              <a:t>功能摘要</a:t>
-            </a:r>
-            <a:endParaRPr lang="en-US" altLang="zh-TW" sz="1200" dirty="0">
-              <a:solidFill>
-                <a:schemeClr val="tx2"/>
-              </a:solidFill>
-              <a:latin typeface="微軟正黑體" panose="020B0604030504040204" pitchFamily="34" charset="-120"/>
-              <a:ea typeface="微軟正黑體" panose="020B0604030504040204" pitchFamily="34" charset="-120"/>
-            </a:endParaRPr>
-          </a:p>
-          <a:p>
-            <a:pPr>
-              <a:lnSpc>
-                <a:spcPts val="1200"/>
-              </a:lnSpc>
-            </a:pPr>
-            <a:r>
-              <a:rPr lang="en-US" altLang="zh-TW" sz="1200" dirty="0">
-                <a:solidFill>
-                  <a:schemeClr val="tx2"/>
-                </a:solidFill>
-                <a:latin typeface="微軟正黑體" panose="020B0604030504040204" pitchFamily="34" charset="-120"/>
-                <a:ea typeface="微軟正黑體" panose="020B0604030504040204" pitchFamily="34" charset="-120"/>
-              </a:rPr>
-              <a:t>(Agent</a:t>
-            </a:r>
-            <a:r>
-              <a:rPr lang="zh-TW" altLang="en-US" sz="1200" dirty="0">
-                <a:solidFill>
-                  <a:schemeClr val="tx2"/>
-                </a:solidFill>
-                <a:latin typeface="微軟正黑體" panose="020B0604030504040204" pitchFamily="34" charset="-120"/>
-                <a:ea typeface="微軟正黑體" panose="020B0604030504040204" pitchFamily="34" charset="-120"/>
-              </a:rPr>
-              <a:t>詢答</a:t>
-            </a:r>
-            <a:r>
-              <a:rPr lang="en-US" altLang="zh-TW" sz="1200" dirty="0">
-                <a:solidFill>
-                  <a:schemeClr val="tx2"/>
-                </a:solidFill>
-                <a:latin typeface="微軟正黑體" panose="020B0604030504040204" pitchFamily="34" charset="-120"/>
-                <a:ea typeface="微軟正黑體" panose="020B0604030504040204" pitchFamily="34" charset="-120"/>
-              </a:rPr>
-              <a:t>)</a:t>
-            </a:r>
-            <a:endParaRPr lang="zh-TW" altLang="en-US" sz="1200" dirty="0">
-              <a:solidFill>
-                <a:schemeClr val="tx2"/>
-              </a:solidFill>
-              <a:latin typeface="微軟正黑體" panose="020B0604030504040204" pitchFamily="34" charset="-120"/>
-              <a:ea typeface="微軟正黑體" panose="020B0604030504040204" pitchFamily="34" charset="-120"/>
-            </a:endParaRPr>
-          </a:p>
-        </p:txBody>
-      </p:sp>
-      <p:sp>
-        <p:nvSpPr>
-          <p:cNvPr id="5" name="矩形 4">
-            <a:extLst>
-              <a:ext uri="{FF2B5EF4-FFF2-40B4-BE49-F238E27FC236}">
-                <a16:creationId xmlns:a16="http://schemas.microsoft.com/office/drawing/2014/main" id="{A7425320-EC34-31E3-4B3E-7BE529921AA4}"/>
-              </a:ext>
-            </a:extLst>
-          </p:cNvPr>
-          <p:cNvSpPr/>
-          <p:nvPr/>
-        </p:nvSpPr>
-        <p:spPr>
-          <a:xfrm>
-            <a:off x="323529" y="2252745"/>
-            <a:ext cx="1152128" cy="960231"/>
-          </a:xfrm>
-          <a:prstGeom prst="rect">
-            <a:avLst/>
-          </a:prstGeom>
-          <a:noFill/>
-          <a:ln w="38100">
-            <a:solidFill>
-              <a:schemeClr val="tx2">
-                <a:lumMod val="20000"/>
-                <a:lumOff val="80000"/>
-              </a:schemeClr>
-            </a:solidFill>
-          </a:ln>
-        </p:spPr>
-        <p:style>
-          <a:lnRef idx="2">
-            <a:schemeClr val="accent1">
-              <a:shade val="15000"/>
-            </a:schemeClr>
-          </a:lnRef>
-          <a:fillRef idx="1">
-            <a:schemeClr val="accent1"/>
-          </a:fillRef>
-          <a:effectRef idx="0">
-            <a:schemeClr val="accent1"/>
-          </a:effectRef>
-          <a:fontRef idx="minor">
-            <a:schemeClr val="lt1"/>
-          </a:fontRef>
-        </p:style>
-        <p:txBody>
-          <a:bodyPr wrap="none" lIns="36000" tIns="0" rIns="0" bIns="0" rtlCol="0" anchor="ctr" anchorCtr="0"/>
-          <a:lstStyle/>
-          <a:p>
-            <a:pPr>
-              <a:lnSpc>
-                <a:spcPts val="1200"/>
-              </a:lnSpc>
-            </a:pPr>
-            <a:r>
-              <a:rPr lang="zh-TW" altLang="en-US" sz="1200" dirty="0">
-                <a:solidFill>
-                  <a:schemeClr val="tx2"/>
-                </a:solidFill>
-                <a:latin typeface="微軟正黑體" panose="020B0604030504040204" pitchFamily="34" charset="-120"/>
-                <a:ea typeface="微軟正黑體" panose="020B0604030504040204" pitchFamily="34" charset="-120"/>
-              </a:rPr>
-              <a:t>系統架構</a:t>
-            </a:r>
-            <a:endParaRPr lang="en-US" altLang="zh-TW" sz="1200" dirty="0">
-              <a:solidFill>
-                <a:schemeClr val="tx2"/>
-              </a:solidFill>
-              <a:latin typeface="微軟正黑體" panose="020B0604030504040204" pitchFamily="34" charset="-120"/>
-              <a:ea typeface="微軟正黑體" panose="020B0604030504040204" pitchFamily="34" charset="-120"/>
-            </a:endParaRPr>
-          </a:p>
-          <a:p>
-            <a:pPr>
-              <a:lnSpc>
-                <a:spcPts val="1200"/>
-              </a:lnSpc>
-            </a:pPr>
-            <a:r>
-              <a:rPr lang="en-US" altLang="zh-TW" sz="1200" dirty="0">
-                <a:solidFill>
-                  <a:schemeClr val="tx2"/>
-                </a:solidFill>
-                <a:latin typeface="微軟正黑體" panose="020B0604030504040204" pitchFamily="34" charset="-120"/>
-                <a:ea typeface="微軟正黑體" panose="020B0604030504040204" pitchFamily="34" charset="-120"/>
-              </a:rPr>
-              <a:t>(</a:t>
-            </a:r>
-            <a:r>
-              <a:rPr lang="zh-TW" altLang="en-US" sz="1200" dirty="0">
-                <a:solidFill>
-                  <a:schemeClr val="tx2"/>
-                </a:solidFill>
-                <a:latin typeface="微軟正黑體" panose="020B0604030504040204" pitchFamily="34" charset="-120"/>
-                <a:ea typeface="微軟正黑體" panose="020B0604030504040204" pitchFamily="34" charset="-120"/>
-              </a:rPr>
-              <a:t>方案</a:t>
-            </a:r>
-            <a:r>
-              <a:rPr lang="en-US" altLang="zh-TW" sz="1200" dirty="0">
-                <a:solidFill>
-                  <a:schemeClr val="tx2"/>
-                </a:solidFill>
-                <a:latin typeface="微軟正黑體" panose="020B0604030504040204" pitchFamily="34" charset="-120"/>
-                <a:ea typeface="微軟正黑體" panose="020B0604030504040204" pitchFamily="34" charset="-120"/>
-              </a:rPr>
-              <a:t>/</a:t>
-            </a:r>
-            <a:r>
-              <a:rPr lang="zh-TW" altLang="en-US" sz="1200" dirty="0">
-                <a:solidFill>
-                  <a:schemeClr val="tx2"/>
-                </a:solidFill>
-                <a:latin typeface="微軟正黑體" panose="020B0604030504040204" pitchFamily="34" charset="-120"/>
-                <a:ea typeface="微軟正黑體" panose="020B0604030504040204" pitchFamily="34" charset="-120"/>
-              </a:rPr>
-              <a:t>做法</a:t>
-            </a:r>
-            <a:r>
-              <a:rPr lang="en-US" altLang="zh-TW" sz="1200" dirty="0">
-                <a:solidFill>
-                  <a:schemeClr val="tx2"/>
-                </a:solidFill>
-                <a:latin typeface="微軟正黑體" panose="020B0604030504040204" pitchFamily="34" charset="-120"/>
-                <a:ea typeface="微軟正黑體" panose="020B0604030504040204" pitchFamily="34" charset="-120"/>
-              </a:rPr>
-              <a:t>)</a:t>
-            </a:r>
-          </a:p>
-          <a:p>
-            <a:pPr>
-              <a:lnSpc>
-                <a:spcPts val="1200"/>
-              </a:lnSpc>
-            </a:pPr>
-            <a:endParaRPr lang="en-US" altLang="zh-TW" sz="1200" dirty="0">
-              <a:solidFill>
-                <a:schemeClr val="tx2"/>
-              </a:solidFill>
-              <a:latin typeface="微軟正黑體" panose="020B0604030504040204" pitchFamily="34" charset="-120"/>
-              <a:ea typeface="微軟正黑體" panose="020B0604030504040204" pitchFamily="34" charset="-120"/>
-            </a:endParaRPr>
-          </a:p>
-          <a:p>
-            <a:pPr>
-              <a:lnSpc>
-                <a:spcPts val="1200"/>
-              </a:lnSpc>
-            </a:pPr>
-            <a:r>
-              <a:rPr lang="zh-TW" altLang="en-US" sz="1200" dirty="0">
-                <a:solidFill>
-                  <a:schemeClr val="tx2"/>
-                </a:solidFill>
-                <a:latin typeface="微軟正黑體" panose="020B0604030504040204" pitchFamily="34" charset="-120"/>
-                <a:ea typeface="微軟正黑體" panose="020B0604030504040204" pitchFamily="34" charset="-120"/>
-              </a:rPr>
-              <a:t>微調內容</a:t>
-            </a:r>
-            <a:endParaRPr lang="en-US" altLang="zh-TW" sz="1200" dirty="0">
-              <a:solidFill>
-                <a:schemeClr val="tx2"/>
-              </a:solidFill>
-              <a:latin typeface="微軟正黑體" panose="020B0604030504040204" pitchFamily="34" charset="-120"/>
-              <a:ea typeface="微軟正黑體" panose="020B0604030504040204" pitchFamily="34" charset="-120"/>
-            </a:endParaRPr>
-          </a:p>
-          <a:p>
-            <a:pPr>
-              <a:lnSpc>
-                <a:spcPts val="1200"/>
-              </a:lnSpc>
-            </a:pPr>
-            <a:r>
-              <a:rPr lang="en-US" altLang="zh-TW" sz="1200" dirty="0">
-                <a:solidFill>
-                  <a:schemeClr val="tx2"/>
-                </a:solidFill>
-                <a:latin typeface="微軟正黑體" panose="020B0604030504040204" pitchFamily="34" charset="-120"/>
-                <a:ea typeface="微軟正黑體" panose="020B0604030504040204" pitchFamily="34" charset="-120"/>
-              </a:rPr>
-              <a:t>(</a:t>
-            </a:r>
-            <a:r>
-              <a:rPr lang="zh-TW" altLang="en-US" sz="1200" dirty="0">
-                <a:solidFill>
-                  <a:schemeClr val="tx2"/>
-                </a:solidFill>
-                <a:latin typeface="微軟正黑體" panose="020B0604030504040204" pitchFamily="34" charset="-120"/>
-                <a:ea typeface="微軟正黑體" panose="020B0604030504040204" pitchFamily="34" charset="-120"/>
-              </a:rPr>
-              <a:t>資料</a:t>
-            </a:r>
-            <a:r>
-              <a:rPr lang="en-US" altLang="zh-TW" sz="1200" dirty="0">
-                <a:solidFill>
-                  <a:schemeClr val="tx2"/>
-                </a:solidFill>
-                <a:latin typeface="微軟正黑體" panose="020B0604030504040204" pitchFamily="34" charset="-120"/>
-                <a:ea typeface="微軟正黑體" panose="020B0604030504040204" pitchFamily="34" charset="-120"/>
-              </a:rPr>
-              <a:t>/</a:t>
-            </a:r>
-            <a:r>
-              <a:rPr lang="zh-TW" altLang="en-US" sz="1200" dirty="0">
-                <a:solidFill>
-                  <a:schemeClr val="tx2"/>
-                </a:solidFill>
-                <a:latin typeface="微軟正黑體" panose="020B0604030504040204" pitchFamily="34" charset="-120"/>
-                <a:ea typeface="微軟正黑體" panose="020B0604030504040204" pitchFamily="34" charset="-120"/>
-              </a:rPr>
-              <a:t>來源</a:t>
-            </a:r>
-            <a:r>
-              <a:rPr lang="en-US" altLang="zh-TW" sz="1200" dirty="0">
-                <a:solidFill>
-                  <a:schemeClr val="tx2"/>
-                </a:solidFill>
-                <a:latin typeface="微軟正黑體" panose="020B0604030504040204" pitchFamily="34" charset="-120"/>
-                <a:ea typeface="微軟正黑體" panose="020B0604030504040204" pitchFamily="34" charset="-120"/>
-              </a:rPr>
-              <a:t>)</a:t>
-            </a:r>
-            <a:endParaRPr lang="zh-TW" altLang="en-US" sz="1200" dirty="0">
-              <a:solidFill>
-                <a:schemeClr val="tx2"/>
-              </a:solidFill>
-              <a:latin typeface="微軟正黑體" panose="020B0604030504040204" pitchFamily="34" charset="-120"/>
-              <a:ea typeface="微軟正黑體" panose="020B0604030504040204" pitchFamily="34" charset="-120"/>
-            </a:endParaRPr>
-          </a:p>
-        </p:txBody>
-      </p:sp>
-      <p:sp>
-        <p:nvSpPr>
-          <p:cNvPr id="6" name="矩形 5">
-            <a:extLst>
-              <a:ext uri="{FF2B5EF4-FFF2-40B4-BE49-F238E27FC236}">
-                <a16:creationId xmlns:a16="http://schemas.microsoft.com/office/drawing/2014/main" id="{D8F0E374-031C-6D04-154D-D5C2744BF69D}"/>
-              </a:ext>
-            </a:extLst>
-          </p:cNvPr>
-          <p:cNvSpPr/>
-          <p:nvPr/>
-        </p:nvSpPr>
-        <p:spPr>
-          <a:xfrm>
-            <a:off x="323529" y="3581132"/>
-            <a:ext cx="1152128" cy="612187"/>
-          </a:xfrm>
-          <a:prstGeom prst="rect">
-            <a:avLst/>
-          </a:prstGeom>
-          <a:noFill/>
-          <a:ln w="38100">
-            <a:solidFill>
-              <a:schemeClr val="tx2">
-                <a:lumMod val="20000"/>
-                <a:lumOff val="80000"/>
-              </a:schemeClr>
-            </a:solidFill>
-          </a:ln>
-        </p:spPr>
-        <p:style>
-          <a:lnRef idx="2">
-            <a:schemeClr val="accent1">
-              <a:shade val="15000"/>
-            </a:schemeClr>
-          </a:lnRef>
-          <a:fillRef idx="1">
-            <a:schemeClr val="accent1"/>
-          </a:fillRef>
-          <a:effectRef idx="0">
-            <a:schemeClr val="accent1"/>
-          </a:effectRef>
-          <a:fontRef idx="minor">
-            <a:schemeClr val="lt1"/>
-          </a:fontRef>
-        </p:style>
-        <p:txBody>
-          <a:bodyPr wrap="none" lIns="36000" tIns="0" rIns="0" bIns="0" rtlCol="0" anchor="ctr" anchorCtr="0"/>
-          <a:lstStyle/>
-          <a:p>
-            <a:pPr>
-              <a:lnSpc>
-                <a:spcPts val="1200"/>
-              </a:lnSpc>
-            </a:pPr>
-            <a:r>
-              <a:rPr lang="zh-TW" altLang="en-US" sz="1200" dirty="0">
-                <a:solidFill>
-                  <a:schemeClr val="tx2"/>
-                </a:solidFill>
-                <a:latin typeface="微軟正黑體" panose="020B0604030504040204" pitchFamily="34" charset="-120"/>
-                <a:ea typeface="微軟正黑體" panose="020B0604030504040204" pitchFamily="34" charset="-120"/>
-              </a:rPr>
-              <a:t>研究方法</a:t>
-            </a:r>
-            <a:endParaRPr lang="en-US" altLang="zh-TW" sz="1200" dirty="0">
-              <a:solidFill>
-                <a:schemeClr val="tx2"/>
-              </a:solidFill>
-              <a:latin typeface="微軟正黑體" panose="020B0604030504040204" pitchFamily="34" charset="-120"/>
-              <a:ea typeface="微軟正黑體" panose="020B0604030504040204" pitchFamily="34" charset="-120"/>
-            </a:endParaRPr>
-          </a:p>
-          <a:p>
-            <a:pPr>
-              <a:lnSpc>
-                <a:spcPts val="1200"/>
-              </a:lnSpc>
-            </a:pPr>
-            <a:r>
-              <a:rPr lang="en-US" altLang="zh-TW" sz="1200" dirty="0">
-                <a:solidFill>
-                  <a:schemeClr val="tx2"/>
-                </a:solidFill>
-                <a:latin typeface="微軟正黑體" panose="020B0604030504040204" pitchFamily="34" charset="-120"/>
-                <a:ea typeface="微軟正黑體" panose="020B0604030504040204" pitchFamily="34" charset="-120"/>
-              </a:rPr>
-              <a:t>(</a:t>
-            </a:r>
-            <a:r>
-              <a:rPr lang="zh-TW" altLang="en-US" sz="1200" dirty="0">
-                <a:solidFill>
-                  <a:schemeClr val="tx2"/>
-                </a:solidFill>
-                <a:latin typeface="微軟正黑體" panose="020B0604030504040204" pitchFamily="34" charset="-120"/>
-                <a:ea typeface="微軟正黑體" panose="020B0604030504040204" pitchFamily="34" charset="-120"/>
-              </a:rPr>
-              <a:t>評估標準</a:t>
-            </a:r>
-            <a:r>
-              <a:rPr lang="en-US" altLang="zh-TW" sz="1200" dirty="0">
-                <a:solidFill>
-                  <a:schemeClr val="tx2"/>
-                </a:solidFill>
-                <a:latin typeface="微軟正黑體" panose="020B0604030504040204" pitchFamily="34" charset="-120"/>
-                <a:ea typeface="微軟正黑體" panose="020B0604030504040204" pitchFamily="34" charset="-120"/>
-              </a:rPr>
-              <a:t>) </a:t>
-            </a:r>
-            <a:endParaRPr lang="zh-TW" altLang="en-US" sz="1200" dirty="0">
-              <a:solidFill>
-                <a:schemeClr val="tx2"/>
-              </a:solidFill>
-              <a:latin typeface="微軟正黑體" panose="020B0604030504040204" pitchFamily="34" charset="-120"/>
-              <a:ea typeface="微軟正黑體" panose="020B0604030504040204" pitchFamily="34" charset="-120"/>
-            </a:endParaRPr>
-          </a:p>
-        </p:txBody>
-      </p:sp>
       <p:cxnSp>
         <p:nvCxnSpPr>
           <p:cNvPr id="7" name="直線單箭頭接點 6">
@@ -2489,25 +2376,19 @@
           </p:cNvPr>
           <p:cNvCxnSpPr>
             <a:cxnSpLocks/>
-            <a:stCxn id="3" idx="2"/>
-            <a:endCxn id="5" idx="0"/>
           </p:cNvCxnSpPr>
           <p:nvPr/>
         </p:nvCxnSpPr>
         <p:spPr>
-          <a:xfrm>
-            <a:off x="899593" y="1916832"/>
-            <a:ext cx="0" cy="335913"/>
+          <a:xfrm flipH="1">
+            <a:off x="2900724" y="5634113"/>
+            <a:ext cx="5992440" cy="2302705"/>
           </a:xfrm>
           <a:prstGeom prst="straightConnector1">
             <a:avLst/>
           </a:prstGeom>
           <a:ln w="25400">
-            <a:solidFill>
-              <a:schemeClr val="accent1">
-                <a:lumMod val="75000"/>
-              </a:schemeClr>
-            </a:solidFill>
+            <a:noFill/>
             <a:tailEnd type="triangle"/>
           </a:ln>
         </p:spPr>
@@ -2537,25 +2418,19 @@
           </p:cNvPr>
           <p:cNvCxnSpPr>
             <a:cxnSpLocks/>
-            <a:stCxn id="5" idx="2"/>
-            <a:endCxn id="6" idx="0"/>
           </p:cNvCxnSpPr>
           <p:nvPr/>
         </p:nvCxnSpPr>
         <p:spPr>
-          <a:xfrm>
-            <a:off x="899593" y="3212976"/>
-            <a:ext cx="0" cy="368156"/>
+          <a:xfrm flipV="1">
+            <a:off x="1603896" y="2816813"/>
+            <a:ext cx="6727184" cy="2669048"/>
           </a:xfrm>
           <a:prstGeom prst="straightConnector1">
             <a:avLst/>
           </a:prstGeom>
           <a:ln w="25400">
-            <a:solidFill>
-              <a:schemeClr val="accent1">
-                <a:lumMod val="75000"/>
-              </a:schemeClr>
-            </a:solidFill>
+            <a:noFill/>
             <a:tailEnd type="triangle"/>
           </a:ln>
         </p:spPr>
@@ -2576,10 +2451,10 @@
       </p:cxnSp>
       <p:sp>
         <p:nvSpPr>
-          <p:cNvPr id="9" name="矩形 8">
+          <p:cNvPr id="2" name="右大括弧 1">
             <a:extLst>
               <a:ext uri="{FF2B5EF4-FFF2-40B4-BE49-F238E27FC236}">
-                <a16:creationId xmlns:a16="http://schemas.microsoft.com/office/drawing/2014/main" id="{52AA70ED-0E51-1FA1-7862-0F92488BFF5B}"/>
+                <a16:creationId xmlns:a16="http://schemas.microsoft.com/office/drawing/2014/main" id="{07AA5869-7FE2-7031-11DD-D3AEAB9E2592}"/>
               </a:ext>
             </a:extLst>
           </p:cNvPr>
@@ -2588,22 +2463,76 @@
         </p:nvSpPr>
         <p:spPr>
           <a:xfrm>
-            <a:off x="1331641" y="2252744"/>
-            <a:ext cx="1509774" cy="960231"/>
+            <a:off x="7690340" y="557022"/>
+            <a:ext cx="202726" cy="612186"/>
+          </a:xfrm>
+          <a:prstGeom prst="rightBrace">
+            <a:avLst/>
+          </a:prstGeom>
+          <a:solidFill>
+            <a:schemeClr val="accent2">
+              <a:lumMod val="20000"/>
+              <a:lumOff val="80000"/>
+            </a:schemeClr>
+          </a:solidFill>
+          <a:ln>
+            <a:solidFill>
+              <a:schemeClr val="tx1"/>
+            </a:solidFill>
+          </a:ln>
+        </p:spPr>
+        <p:style>
+          <a:lnRef idx="1">
+            <a:schemeClr val="accent1"/>
+          </a:lnRef>
+          <a:fillRef idx="0">
+            <a:schemeClr val="accent1"/>
+          </a:fillRef>
+          <a:effectRef idx="0">
+            <a:schemeClr val="accent1"/>
+          </a:effectRef>
+          <a:fontRef idx="minor">
+            <a:schemeClr val="tx1"/>
+          </a:fontRef>
+        </p:style>
+        <p:txBody>
+          <a:bodyPr rtlCol="0" anchor="ctr"/>
+          <a:lstStyle/>
+          <a:p>
+            <a:pPr algn="ctr"/>
+            <a:endParaRPr lang="zh-TW" altLang="en-US"/>
+          </a:p>
+        </p:txBody>
+      </p:sp>
+      <p:sp>
+        <p:nvSpPr>
+          <p:cNvPr id="14" name="矩形 13">
+            <a:extLst>
+              <a:ext uri="{FF2B5EF4-FFF2-40B4-BE49-F238E27FC236}">
+                <a16:creationId xmlns:a16="http://schemas.microsoft.com/office/drawing/2014/main" id="{7156FA7E-B280-17C1-AEF2-E7F7ED3D4268}"/>
+              </a:ext>
+            </a:extLst>
+          </p:cNvPr>
+          <p:cNvSpPr/>
+          <p:nvPr/>
+        </p:nvSpPr>
+        <p:spPr>
+          <a:xfrm>
+            <a:off x="1205043" y="1289400"/>
+            <a:ext cx="3366956" cy="933525"/>
           </a:xfrm>
           <a:prstGeom prst="rect">
             <a:avLst/>
           </a:prstGeom>
           <a:solidFill>
-            <a:schemeClr val="accent3">
-              <a:lumMod val="20000"/>
-              <a:lumOff val="80000"/>
+            <a:schemeClr val="bg1">
+              <a:lumMod val="95000"/>
             </a:schemeClr>
           </a:solidFill>
-          <a:ln w="38100">
+          <a:ln w="3175">
             <a:solidFill>
-              <a:schemeClr val="accent3">
-                <a:lumMod val="75000"/>
+              <a:schemeClr val="bg1">
+                <a:lumMod val="85000"/>
               </a:schemeClr>
             </a:solidFill>
           </a:ln>
@@ -2625,55 +2554,57 @@
           </a:fontRef>
         </p:style>
         <p:txBody>
-          <a:bodyPr wrap="none" lIns="36000" tIns="0" rIns="0" bIns="0" rtlCol="0" anchor="ctr" anchorCtr="0"/>
+          <a:bodyPr wrap="none" lIns="91440" tIns="0" rIns="0" bIns="0" rtlCol="0" anchor="ctr" anchorCtr="0"/>
           <a:lstStyle/>
           <a:p>
             <a:pPr>
               <a:lnSpc>
-                <a:spcPts val="1200"/>
+                <a:spcPts val="1600"/>
               </a:lnSpc>
             </a:pPr>
             <a:r>
-              <a:rPr lang="zh-TW" altLang="en-US" sz="1200" dirty="0">
-                <a:solidFill>
-                  <a:schemeClr val="accent3">
-                    <a:lumMod val="50000"/>
-                  </a:schemeClr>
-                </a:solidFill>
-                <a:latin typeface="微軟正黑體" panose="020B0604030504040204" pitchFamily="34" charset="-120"/>
-                <a:ea typeface="微軟正黑體" panose="020B0604030504040204" pitchFamily="34" charset="-120"/>
-              </a:rPr>
-              <a:t>目標</a:t>
-            </a:r>
-            <a:r>
-              <a:rPr lang="en-US" altLang="zh-TW" sz="1200" dirty="0">
-                <a:solidFill>
-                  <a:schemeClr val="accent3">
-                    <a:lumMod val="50000"/>
-                  </a:schemeClr>
-                </a:solidFill>
-                <a:latin typeface="微軟正黑體" panose="020B0604030504040204" pitchFamily="34" charset="-120"/>
-                <a:ea typeface="微軟正黑體" panose="020B0604030504040204" pitchFamily="34" charset="-120"/>
-              </a:rPr>
-              <a:t>:</a:t>
-            </a:r>
-            <a:r>
-              <a:rPr lang="zh-TW" altLang="en-US" sz="1200" dirty="0">
-                <a:solidFill>
-                  <a:schemeClr val="accent3">
-                    <a:lumMod val="50000"/>
-                  </a:schemeClr>
-                </a:solidFill>
-                <a:latin typeface="微軟正黑體" panose="020B0604030504040204" pitchFamily="34" charset="-120"/>
-                <a:ea typeface="微軟正黑體" panose="020B0604030504040204" pitchFamily="34" charset="-120"/>
-              </a:rPr>
-              <a:t> 基因分型</a:t>
-            </a:r>
-            <a:endParaRPr lang="en-US" altLang="zh-TW" sz="1200" dirty="0">
+              <a:rPr lang="en-US" altLang="zh-TW" sz="1100" dirty="0">
+                <a:solidFill>
+                  <a:schemeClr val="tx1"/>
+                </a:solidFill>
+                <a:latin typeface="微軟正黑體" panose="020B0604030504040204" pitchFamily="34" charset="-120"/>
+                <a:ea typeface="微軟正黑體" panose="020B0604030504040204" pitchFamily="34" charset="-120"/>
+              </a:rPr>
+              <a:t>BIO-AI</a:t>
+            </a:r>
+            <a:r>
+              <a:rPr lang="zh-TW" altLang="en-US" sz="1100" dirty="0">
+                <a:solidFill>
+                  <a:schemeClr val="tx1"/>
+                </a:solidFill>
+                <a:latin typeface="微軟正黑體" panose="020B0604030504040204" pitchFamily="34" charset="-120"/>
+                <a:ea typeface="微軟正黑體" panose="020B0604030504040204" pitchFamily="34" charset="-120"/>
+              </a:rPr>
+              <a:t> </a:t>
+            </a:r>
+            <a:r>
+              <a:rPr lang="en-US" altLang="zh-TW" sz="1100" dirty="0">
+                <a:solidFill>
+                  <a:schemeClr val="tx1"/>
+                </a:solidFill>
+                <a:latin typeface="微軟正黑體" panose="020B0604030504040204" pitchFamily="34" charset="-120"/>
+                <a:ea typeface="微軟正黑體" panose="020B0604030504040204" pitchFamily="34" charset="-120"/>
+              </a:rPr>
+              <a:t>Agent</a:t>
+            </a:r>
+            <a:r>
+              <a:rPr lang="zh-TW" altLang="en-US" sz="1100" dirty="0">
+                <a:solidFill>
+                  <a:schemeClr val="tx1"/>
+                </a:solidFill>
+                <a:latin typeface="微軟正黑體" panose="020B0604030504040204" pitchFamily="34" charset="-120"/>
+                <a:ea typeface="微軟正黑體" panose="020B0604030504040204" pitchFamily="34" charset="-120"/>
+              </a:rPr>
+              <a:t>智能體</a:t>
+            </a:r>
+            <a:endParaRPr lang="en-US" altLang="zh-TW" sz="1100" dirty="0">
               <a:solidFill>
-                <a:schemeClr val="accent3">
-                  <a:lumMod val="50000"/>
-                </a:schemeClr>
+                <a:schemeClr val="tx1"/>
               </a:solidFill>
               <a:latin typeface="微軟正黑體" panose="020B0604030504040204" pitchFamily="34" charset="-120"/>
               <a:ea typeface="微軟正黑體" panose="020B0604030504040204" pitchFamily="34" charset="-120"/>
@@ -2682,14 +2613,122 @@
           <a:p>
             <a:pPr>
               <a:lnSpc>
-                <a:spcPts val="1200"/>
+                <a:spcPts val="1600"/>
               </a:lnSpc>
             </a:pPr>
-            <a:endParaRPr lang="en-US" altLang="zh-TW" sz="1200" dirty="0">
+            <a:r>
+              <a:rPr lang="zh-TW" altLang="en-US" sz="1100" dirty="0">
+                <a:solidFill>
+                  <a:schemeClr val="tx1"/>
+                </a:solidFill>
+                <a:latin typeface="微軟正黑體" panose="020B0604030504040204" pitchFamily="34" charset="-120"/>
+                <a:ea typeface="微軟正黑體" panose="020B0604030504040204" pitchFamily="34" charset="-120"/>
+              </a:rPr>
+              <a:t>目標</a:t>
+            </a:r>
+            <a:r>
+              <a:rPr lang="en-US" altLang="zh-TW" sz="1100" dirty="0">
+                <a:solidFill>
+                  <a:schemeClr val="tx1"/>
+                </a:solidFill>
+                <a:latin typeface="微軟正黑體" panose="020B0604030504040204" pitchFamily="34" charset="-120"/>
+                <a:ea typeface="微軟正黑體" panose="020B0604030504040204" pitchFamily="34" charset="-120"/>
+              </a:rPr>
+              <a:t>:</a:t>
+            </a:r>
+            <a:r>
+              <a:rPr lang="zh-TW" altLang="en-US" sz="1100" dirty="0">
+                <a:solidFill>
+                  <a:schemeClr val="tx1"/>
+                </a:solidFill>
+                <a:latin typeface="微軟正黑體" panose="020B0604030504040204" pitchFamily="34" charset="-120"/>
+                <a:ea typeface="微軟正黑體" panose="020B0604030504040204" pitchFamily="34" charset="-120"/>
+              </a:rPr>
+              <a:t> 一般解說</a:t>
+            </a:r>
+            <a:r>
+              <a:rPr lang="en-US" altLang="zh-TW" sz="1100" dirty="0">
+                <a:solidFill>
+                  <a:schemeClr val="tx1"/>
+                </a:solidFill>
+                <a:latin typeface="微軟正黑體" panose="020B0604030504040204" pitchFamily="34" charset="-120"/>
+                <a:ea typeface="微軟正黑體" panose="020B0604030504040204" pitchFamily="34" charset="-120"/>
+              </a:rPr>
+              <a:t>(</a:t>
+            </a:r>
+            <a:r>
+              <a:rPr lang="zh-TW" altLang="en-US" sz="1100" dirty="0">
+                <a:solidFill>
+                  <a:schemeClr val="tx1"/>
+                </a:solidFill>
+                <a:latin typeface="微軟正黑體" panose="020B0604030504040204" pitchFamily="34" charset="-120"/>
+                <a:ea typeface="微軟正黑體" panose="020B0604030504040204" pitchFamily="34" charset="-120"/>
+              </a:rPr>
+              <a:t>存文字</a:t>
+            </a:r>
+            <a:r>
+              <a:rPr lang="en-US" altLang="zh-TW" sz="1100" dirty="0">
+                <a:solidFill>
+                  <a:schemeClr val="tx1"/>
+                </a:solidFill>
+                <a:latin typeface="微軟正黑體" panose="020B0604030504040204" pitchFamily="34" charset="-120"/>
+                <a:ea typeface="微軟正黑體" panose="020B0604030504040204" pitchFamily="34" charset="-120"/>
+              </a:rPr>
+              <a:t>),</a:t>
+            </a:r>
+            <a:r>
+              <a:rPr lang="zh-TW" altLang="en-US" sz="1100" dirty="0">
+                <a:solidFill>
+                  <a:schemeClr val="tx1"/>
+                </a:solidFill>
+                <a:latin typeface="微軟正黑體" panose="020B0604030504040204" pitchFamily="34" charset="-120"/>
+                <a:ea typeface="微軟正黑體" panose="020B0604030504040204" pitchFamily="34" charset="-120"/>
+              </a:rPr>
+              <a:t>  查詢</a:t>
+            </a:r>
+            <a:r>
+              <a:rPr lang="en-US" altLang="zh-TW" sz="1100" dirty="0">
+                <a:solidFill>
+                  <a:schemeClr val="tx1"/>
+                </a:solidFill>
+                <a:latin typeface="微軟正黑體" panose="020B0604030504040204" pitchFamily="34" charset="-120"/>
+                <a:ea typeface="微軟正黑體" panose="020B0604030504040204" pitchFamily="34" charset="-120"/>
+              </a:rPr>
+              <a:t>[</a:t>
+            </a:r>
+            <a:r>
+              <a:rPr lang="zh-TW" altLang="en-US" sz="1100" dirty="0">
+                <a:solidFill>
+                  <a:schemeClr val="tx1"/>
+                </a:solidFill>
+                <a:latin typeface="微軟正黑體" panose="020B0604030504040204" pitchFamily="34" charset="-120"/>
+                <a:ea typeface="微軟正黑體" panose="020B0604030504040204" pitchFamily="34" charset="-120"/>
+              </a:rPr>
+              <a:t>公開資料庫</a:t>
+            </a:r>
+            <a:r>
+              <a:rPr lang="en-US" altLang="zh-TW" sz="1100" dirty="0">
+                <a:solidFill>
+                  <a:schemeClr val="tx1"/>
+                </a:solidFill>
+                <a:latin typeface="微軟正黑體" panose="020B0604030504040204" pitchFamily="34" charset="-120"/>
+                <a:ea typeface="微軟正黑體" panose="020B0604030504040204" pitchFamily="34" charset="-120"/>
+              </a:rPr>
+              <a:t>],</a:t>
+            </a:r>
+            <a:r>
+              <a:rPr lang="zh-TW" altLang="en-US" sz="1100" dirty="0">
+                <a:solidFill>
+                  <a:schemeClr val="tx1"/>
+                </a:solidFill>
+                <a:latin typeface="微軟正黑體" panose="020B0604030504040204" pitchFamily="34" charset="-120"/>
+                <a:ea typeface="微軟正黑體" panose="020B0604030504040204" pitchFamily="34" charset="-120"/>
+              </a:rPr>
+              <a:t> </a:t>
+            </a:r>
+            <a:endParaRPr lang="en-US" altLang="zh-TW" sz="1100" dirty="0">
               <a:solidFill>
-                <a:schemeClr val="accent3">
-                  <a:lumMod val="50000"/>
-                </a:schemeClr>
+                <a:schemeClr val="tx1"/>
               </a:solidFill>
               <a:latin typeface="微軟正黑體" panose="020B0604030504040204" pitchFamily="34" charset="-120"/>
               <a:ea typeface="微軟正黑體" panose="020B0604030504040204" pitchFamily="34" charset="-120"/>
@@ -2698,63 +2737,38 @@
           <a:p>
             <a:pPr>
               <a:lnSpc>
-                <a:spcPts val="1200"/>
+                <a:spcPts val="1600"/>
               </a:lnSpc>
             </a:pPr>
             <a:r>
-              <a:rPr lang="zh-TW" altLang="en-US" sz="1200" dirty="0">
-                <a:solidFill>
-                  <a:schemeClr val="accent3">
-                    <a:lumMod val="50000"/>
-                  </a:schemeClr>
-                </a:solidFill>
-                <a:latin typeface="微軟正黑體" panose="020B0604030504040204" pitchFamily="34" charset="-120"/>
-                <a:ea typeface="微軟正黑體" panose="020B0604030504040204" pitchFamily="34" charset="-120"/>
-              </a:rPr>
-              <a:t>微調</a:t>
-            </a:r>
-            <a:r>
-              <a:rPr lang="en-US" altLang="zh-TW" sz="1200" dirty="0">
-                <a:solidFill>
-                  <a:schemeClr val="accent3">
-                    <a:lumMod val="50000"/>
-                  </a:schemeClr>
-                </a:solidFill>
-                <a:latin typeface="微軟正黑體" panose="020B0604030504040204" pitchFamily="34" charset="-120"/>
-                <a:ea typeface="微軟正黑體" panose="020B0604030504040204" pitchFamily="34" charset="-120"/>
-              </a:rPr>
-              <a:t>:</a:t>
-            </a:r>
-            <a:r>
-              <a:rPr lang="zh-TW" altLang="en-US" sz="1200" dirty="0">
-                <a:solidFill>
-                  <a:schemeClr val="accent3">
-                    <a:lumMod val="50000"/>
-                  </a:schemeClr>
-                </a:solidFill>
-                <a:latin typeface="微軟正黑體" panose="020B0604030504040204" pitchFamily="34" charset="-120"/>
-                <a:ea typeface="微軟正黑體" panose="020B0604030504040204" pitchFamily="34" charset="-120"/>
-              </a:rPr>
-              <a:t> 資料來源</a:t>
-            </a:r>
-            <a:endParaRPr lang="en-US" altLang="zh-TW" sz="1200" dirty="0">
-              <a:solidFill>
-                <a:schemeClr val="accent3">
-                  <a:lumMod val="50000"/>
-                </a:schemeClr>
-              </a:solidFill>
-              <a:latin typeface="微軟正黑體" panose="020B0604030504040204" pitchFamily="34" charset="-120"/>
-              <a:ea typeface="微軟正黑體" panose="020B0604030504040204" pitchFamily="34" charset="-120"/>
-            </a:endParaRPr>
+              <a:rPr lang="zh-TW" altLang="en-US" sz="1100" dirty="0">
+                <a:solidFill>
+                  <a:schemeClr val="tx1"/>
+                </a:solidFill>
+                <a:latin typeface="微軟正黑體" panose="020B0604030504040204" pitchFamily="34" charset="-120"/>
+                <a:ea typeface="微軟正黑體" panose="020B0604030504040204" pitchFamily="34" charset="-120"/>
+              </a:rPr>
+              <a:t>回答醫學或生物資訊相關問題</a:t>
+            </a:r>
+            <a:r>
+              <a:rPr lang="en-US" altLang="zh-TW" sz="1100" dirty="0">
+                <a:solidFill>
+                  <a:schemeClr val="tx1"/>
+                </a:solidFill>
+                <a:latin typeface="微軟正黑體" panose="020B0604030504040204" pitchFamily="34" charset="-120"/>
+                <a:ea typeface="微軟正黑體" panose="020B0604030504040204" pitchFamily="34" charset="-120"/>
+              </a:rPr>
+              <a:t>.</a:t>
+            </a:r>
           </a:p>
         </p:txBody>
       </p:sp>
       <p:sp>
         <p:nvSpPr>
-          <p:cNvPr id="11" name="矩形 10">
+          <p:cNvPr id="22" name="左大括弧 21">
             <a:extLst>
               <a:ext uri="{FF2B5EF4-FFF2-40B4-BE49-F238E27FC236}">
-                <a16:creationId xmlns:a16="http://schemas.microsoft.com/office/drawing/2014/main" id="{173404AA-552F-AAA0-CDF0-7E739E907927}"/>
+                <a16:creationId xmlns:a16="http://schemas.microsoft.com/office/drawing/2014/main" id="{AE9FCB81-9066-8EE6-AE38-BD08A816BC90}"/>
               </a:ext>
             </a:extLst>
           </p:cNvPr>
@@ -2763,22 +2777,74 @@
         </p:nvSpPr>
         <p:spPr>
           <a:xfrm>
-            <a:off x="1331640" y="1304646"/>
-            <a:ext cx="1509777" cy="612186"/>
+            <a:off x="7322968" y="555881"/>
+            <a:ext cx="202726" cy="612186"/>
+          </a:xfrm>
+          <a:prstGeom prst="leftBrace">
+            <a:avLst/>
+          </a:prstGeom>
+          <a:solidFill>
+            <a:schemeClr val="accent2">
+              <a:lumMod val="20000"/>
+              <a:lumOff val="80000"/>
+            </a:schemeClr>
+          </a:solidFill>
+          <a:ln>
+            <a:solidFill>
+              <a:schemeClr val="tx1"/>
+            </a:solidFill>
+          </a:ln>
+        </p:spPr>
+        <p:style>
+          <a:lnRef idx="1">
+            <a:schemeClr val="accent1"/>
+          </a:lnRef>
+          <a:fillRef idx="0">
+            <a:schemeClr val="accent1"/>
+          </a:fillRef>
+          <a:effectRef idx="0">
+            <a:schemeClr val="accent1"/>
+          </a:effectRef>
+          <a:fontRef idx="minor">
+            <a:schemeClr val="tx1"/>
+          </a:fontRef>
+        </p:style>
+        <p:txBody>
+          <a:bodyPr rtlCol="0" anchor="ctr"/>
+          <a:lstStyle/>
+          <a:p>
+            <a:pPr algn="ctr"/>
+            <a:endParaRPr lang="zh-TW" altLang="en-US"/>
+          </a:p>
+        </p:txBody>
+      </p:sp>
+      <p:sp>
+        <p:nvSpPr>
+          <p:cNvPr id="24" name="矩形 23">
+            <a:extLst>
+              <a:ext uri="{FF2B5EF4-FFF2-40B4-BE49-F238E27FC236}">
+                <a16:creationId xmlns:a16="http://schemas.microsoft.com/office/drawing/2014/main" id="{EF723D2E-C0DA-87BC-131E-A5314F10B11D}"/>
+              </a:ext>
+            </a:extLst>
+          </p:cNvPr>
+          <p:cNvSpPr/>
+          <p:nvPr/>
+        </p:nvSpPr>
+        <p:spPr>
+          <a:xfrm>
+            <a:off x="1205042" y="2345187"/>
+            <a:ext cx="3366957" cy="632760"/>
           </a:xfrm>
           <a:prstGeom prst="rect">
             <a:avLst/>
           </a:prstGeom>
           <a:solidFill>
-            <a:schemeClr val="accent3">
-              <a:lumMod val="20000"/>
-              <a:lumOff val="80000"/>
-            </a:schemeClr>
+            <a:schemeClr val="bg1"/>
           </a:solidFill>
-          <a:ln w="38100">
+          <a:ln w="3175">
             <a:solidFill>
-              <a:schemeClr val="accent3">
-                <a:lumMod val="75000"/>
+              <a:schemeClr val="bg1">
+                <a:lumMod val="85000"/>
               </a:schemeClr>
             </a:solidFill>
           </a:ln>
@@ -2800,44 +2866,58 @@
           </a:fontRef>
         </p:style>
         <p:txBody>
-          <a:bodyPr wrap="none" lIns="36000" tIns="0" rIns="0" bIns="0" rtlCol="0" anchor="ctr" anchorCtr="0"/>
+          <a:bodyPr wrap="none" lIns="91440" tIns="0" rIns="0" bIns="0" rtlCol="0" anchor="ctr" anchorCtr="0"/>
           <a:lstStyle/>
           <a:p>
             <a:pPr>
               <a:lnSpc>
-                <a:spcPts val="1200"/>
+                <a:spcPts val="1600"/>
               </a:lnSpc>
             </a:pPr>
             <a:r>
-              <a:rPr lang="zh-TW" altLang="en-US" sz="1000" dirty="0">
-                <a:solidFill>
-                  <a:schemeClr val="accent3">
-                    <a:lumMod val="50000"/>
-                  </a:schemeClr>
-                </a:solidFill>
-                <a:latin typeface="微軟正黑體" panose="020B0604030504040204" pitchFamily="34" charset="-120"/>
-                <a:ea typeface="微軟正黑體" panose="020B0604030504040204" pitchFamily="34" charset="-120"/>
-              </a:rPr>
-              <a:t>* </a:t>
-            </a:r>
-            <a:r>
-              <a:rPr lang="en-US" altLang="zh-TW" sz="1000" dirty="0">
-                <a:solidFill>
-                  <a:schemeClr val="accent3">
-                    <a:lumMod val="50000"/>
-                  </a:schemeClr>
-                </a:solidFill>
-                <a:latin typeface="微軟正黑體" panose="020B0604030504040204" pitchFamily="34" charset="-120"/>
-                <a:ea typeface="微軟正黑體" panose="020B0604030504040204" pitchFamily="34" charset="-120"/>
-              </a:rPr>
-              <a:t>BIO-AI</a:t>
-            </a:r>
-            <a:r>
-              <a:rPr lang="zh-TW" altLang="en-US" sz="1000" dirty="0">
-                <a:solidFill>
-                  <a:schemeClr val="accent3">
-                    <a:lumMod val="50000"/>
-                  </a:schemeClr>
+              <a:rPr lang="zh-TW" altLang="en-US" sz="1200" dirty="0">
+                <a:solidFill>
+                  <a:schemeClr val="tx1"/>
+                </a:solidFill>
+                <a:latin typeface="微軟正黑體" panose="020B0604030504040204" pitchFamily="34" charset="-120"/>
+                <a:ea typeface="微軟正黑體" panose="020B0604030504040204" pitchFamily="34" charset="-120"/>
+              </a:rPr>
+              <a:t>選擇</a:t>
+            </a:r>
+            <a:r>
+              <a:rPr lang="en-US" altLang="zh-TW" sz="1200" dirty="0">
+                <a:solidFill>
+                  <a:schemeClr val="tx1"/>
+                </a:solidFill>
+                <a:latin typeface="微軟正黑體" panose="020B0604030504040204" pitchFamily="34" charset="-120"/>
+                <a:ea typeface="微軟正黑體" panose="020B0604030504040204" pitchFamily="34" charset="-120"/>
+              </a:rPr>
+              <a:t>Agent</a:t>
+            </a:r>
+            <a:r>
+              <a:rPr lang="zh-TW" altLang="en-US" sz="1200" dirty="0">
+                <a:solidFill>
+                  <a:schemeClr val="tx1"/>
+                </a:solidFill>
+                <a:latin typeface="微軟正黑體" panose="020B0604030504040204" pitchFamily="34" charset="-120"/>
+                <a:ea typeface="微軟正黑體" panose="020B0604030504040204" pitchFamily="34" charset="-120"/>
+              </a:rPr>
+              <a:t>方案</a:t>
+            </a:r>
+            <a:r>
+              <a:rPr lang="en-US" altLang="zh-TW" sz="1200" dirty="0">
+                <a:solidFill>
+                  <a:schemeClr val="tx1"/>
+                </a:solidFill>
+                <a:latin typeface="微軟正黑體" panose="020B0604030504040204" pitchFamily="34" charset="-120"/>
+                <a:ea typeface="微軟正黑體" panose="020B0604030504040204" pitchFamily="34" charset="-120"/>
+              </a:rPr>
+              <a:t>:</a:t>
+            </a:r>
+            <a:r>
+              <a:rPr lang="zh-TW" altLang="en-US" sz="1200" dirty="0">
+                <a:solidFill>
+                  <a:schemeClr val="tx1"/>
                 </a:solidFill>
                 <a:latin typeface="微軟正黑體" panose="020B0604030504040204" pitchFamily="34" charset="-120"/>
                 <a:ea typeface="微軟正黑體" panose="020B0604030504040204" pitchFamily="34" charset="-120"/>
@@ -2845,62 +2925,924 @@
               <a:t> </a:t>
             </a:r>
             <a:r>
-              <a:rPr lang="en-US" altLang="zh-TW" sz="1000" dirty="0">
-                <a:solidFill>
-                  <a:schemeClr val="accent3">
-                    <a:lumMod val="50000"/>
-                  </a:schemeClr>
-                </a:solidFill>
-                <a:latin typeface="微軟正黑體" panose="020B0604030504040204" pitchFamily="34" charset="-120"/>
-                <a:ea typeface="微軟正黑體" panose="020B0604030504040204" pitchFamily="34" charset="-120"/>
-              </a:rPr>
-              <a:t>Agent</a:t>
-            </a:r>
-            <a:r>
-              <a:rPr lang="zh-TW" altLang="en-US" sz="1000" dirty="0">
-                <a:solidFill>
-                  <a:schemeClr val="accent3">
-                    <a:lumMod val="50000"/>
-                  </a:schemeClr>
-                </a:solidFill>
-                <a:latin typeface="微軟正黑體" panose="020B0604030504040204" pitchFamily="34" charset="-120"/>
-                <a:ea typeface="微軟正黑體" panose="020B0604030504040204" pitchFamily="34" charset="-120"/>
-              </a:rPr>
-              <a:t>智能體</a:t>
-            </a:r>
-            <a:endParaRPr lang="en-US" altLang="zh-TW" sz="1000" dirty="0">
+              <a:rPr lang="en-US" altLang="zh-TW" sz="1200" dirty="0">
+                <a:solidFill>
+                  <a:schemeClr val="tx1"/>
+                </a:solidFill>
+                <a:latin typeface="微軟正黑體" panose="020B0604030504040204" pitchFamily="34" charset="-120"/>
+                <a:ea typeface="微軟正黑體" panose="020B0604030504040204" pitchFamily="34" charset="-120"/>
+              </a:rPr>
+              <a:t>OpenClaw</a:t>
+            </a:r>
+          </a:p>
+          <a:p>
+            <a:pPr>
+              <a:lnSpc>
+                <a:spcPts val="1600"/>
+              </a:lnSpc>
+            </a:pPr>
+            <a:r>
+              <a:rPr lang="zh-TW" altLang="en-US" sz="1200" dirty="0">
+                <a:solidFill>
+                  <a:schemeClr val="tx1"/>
+                </a:solidFill>
+                <a:latin typeface="微軟正黑體" panose="020B0604030504040204" pitchFamily="34" charset="-120"/>
+                <a:ea typeface="微軟正黑體" panose="020B0604030504040204" pitchFamily="34" charset="-120"/>
+              </a:rPr>
+              <a:t>模型</a:t>
+            </a:r>
+            <a:r>
+              <a:rPr lang="en-US" altLang="zh-TW" sz="1200" dirty="0">
+                <a:solidFill>
+                  <a:schemeClr val="tx1"/>
+                </a:solidFill>
+                <a:latin typeface="微軟正黑體" panose="020B0604030504040204" pitchFamily="34" charset="-120"/>
+                <a:ea typeface="微軟正黑體" panose="020B0604030504040204" pitchFamily="34" charset="-120"/>
+              </a:rPr>
+              <a:t>: </a:t>
+            </a:r>
+            <a:r>
+              <a:rPr lang="en-US" altLang="zh-TW" sz="1200" dirty="0" err="1">
+                <a:solidFill>
+                  <a:schemeClr val="tx1"/>
+                </a:solidFill>
+                <a:latin typeface="微軟正黑體" panose="020B0604030504040204" pitchFamily="34" charset="-120"/>
+                <a:ea typeface="微軟正黑體" panose="020B0604030504040204" pitchFamily="34" charset="-120"/>
+              </a:rPr>
+              <a:t>Ollama</a:t>
+            </a:r>
+            <a:r>
+              <a:rPr lang="en-US" altLang="zh-TW" sz="1200" dirty="0">
+                <a:solidFill>
+                  <a:schemeClr val="tx1"/>
+                </a:solidFill>
+                <a:latin typeface="微軟正黑體" panose="020B0604030504040204" pitchFamily="34" charset="-120"/>
+                <a:ea typeface="微軟正黑體" panose="020B0604030504040204" pitchFamily="34" charset="-120"/>
+              </a:rPr>
+              <a:t>,</a:t>
+            </a:r>
+            <a:r>
+              <a:rPr lang="zh-TW" altLang="en-US" sz="1200" dirty="0">
+                <a:solidFill>
+                  <a:schemeClr val="tx1"/>
+                </a:solidFill>
+                <a:latin typeface="微軟正黑體" panose="020B0604030504040204" pitchFamily="34" charset="-120"/>
+                <a:ea typeface="微軟正黑體" panose="020B0604030504040204" pitchFamily="34" charset="-120"/>
+              </a:rPr>
+              <a:t> </a:t>
+            </a:r>
+            <a:r>
+              <a:rPr lang="en-US" altLang="zh-TW" sz="1200" dirty="0">
+                <a:solidFill>
+                  <a:schemeClr val="tx1"/>
+                </a:solidFill>
+                <a:latin typeface="微軟正黑體" panose="020B0604030504040204" pitchFamily="34" charset="-120"/>
+                <a:ea typeface="微軟正黑體" panose="020B0604030504040204" pitchFamily="34" charset="-120"/>
+              </a:rPr>
+              <a:t>Gemma</a:t>
+            </a:r>
+          </a:p>
+          <a:p>
+            <a:pPr>
+              <a:lnSpc>
+                <a:spcPts val="1600"/>
+              </a:lnSpc>
+            </a:pPr>
+            <a:r>
+              <a:rPr lang="zh-TW" altLang="en-US" sz="1200" dirty="0">
+                <a:solidFill>
+                  <a:schemeClr val="tx1"/>
+                </a:solidFill>
+                <a:latin typeface="微軟正黑體" panose="020B0604030504040204" pitchFamily="34" charset="-120"/>
+                <a:ea typeface="微軟正黑體" panose="020B0604030504040204" pitchFamily="34" charset="-120"/>
+              </a:rPr>
+              <a:t>微調工具</a:t>
+            </a:r>
+            <a:r>
+              <a:rPr lang="en-US" altLang="zh-TW" sz="1200" dirty="0">
+                <a:solidFill>
+                  <a:schemeClr val="tx1"/>
+                </a:solidFill>
+                <a:latin typeface="微軟正黑體" panose="020B0604030504040204" pitchFamily="34" charset="-120"/>
+                <a:ea typeface="微軟正黑體" panose="020B0604030504040204" pitchFamily="34" charset="-120"/>
+              </a:rPr>
+              <a:t>,</a:t>
+            </a:r>
+            <a:r>
+              <a:rPr lang="zh-TW" altLang="en-US" sz="1200" dirty="0">
+                <a:solidFill>
+                  <a:schemeClr val="tx1"/>
+                </a:solidFill>
+                <a:latin typeface="微軟正黑體" panose="020B0604030504040204" pitchFamily="34" charset="-120"/>
+                <a:ea typeface="微軟正黑體" panose="020B0604030504040204" pitchFamily="34" charset="-120"/>
+              </a:rPr>
+              <a:t> </a:t>
+            </a:r>
+            <a:r>
+              <a:rPr lang="en-US" altLang="zh-TW" sz="1200" dirty="0">
+                <a:solidFill>
+                  <a:schemeClr val="tx1"/>
+                </a:solidFill>
+                <a:latin typeface="微軟正黑體" panose="020B0604030504040204" pitchFamily="34" charset="-120"/>
+                <a:ea typeface="微軟正黑體" panose="020B0604030504040204" pitchFamily="34" charset="-120"/>
+              </a:rPr>
+              <a:t>HF-TRL, </a:t>
+            </a:r>
+            <a:r>
+              <a:rPr lang="en-US" altLang="zh-TW" sz="1200" dirty="0" err="1">
+                <a:solidFill>
+                  <a:schemeClr val="tx1"/>
+                </a:solidFill>
+                <a:latin typeface="微軟正黑體" panose="020B0604030504040204" pitchFamily="34" charset="-120"/>
+                <a:ea typeface="微軟正黑體" panose="020B0604030504040204" pitchFamily="34" charset="-120"/>
+              </a:rPr>
+              <a:t>Unsloth</a:t>
+            </a:r>
+            <a:endParaRPr lang="en-US" altLang="zh-TW" sz="1200" dirty="0">
               <a:solidFill>
-                <a:schemeClr val="accent3">
-                  <a:lumMod val="50000"/>
-                </a:schemeClr>
+                <a:schemeClr val="tx1"/>
               </a:solidFill>
               <a:latin typeface="微軟正黑體" panose="020B0604030504040204" pitchFamily="34" charset="-120"/>
               <a:ea typeface="微軟正黑體" panose="020B0604030504040204" pitchFamily="34" charset="-120"/>
             </a:endParaRPr>
           </a:p>
+        </p:txBody>
+      </p:sp>
+      <p:sp>
+        <p:nvSpPr>
+          <p:cNvPr id="29" name="矩形 28">
+            <a:extLst>
+              <a:ext uri="{FF2B5EF4-FFF2-40B4-BE49-F238E27FC236}">
+                <a16:creationId xmlns:a16="http://schemas.microsoft.com/office/drawing/2014/main" id="{06C6E7FE-E181-D3B4-CC38-DAC92F2D7E0B}"/>
+              </a:ext>
+            </a:extLst>
+          </p:cNvPr>
+          <p:cNvSpPr/>
+          <p:nvPr/>
+        </p:nvSpPr>
+        <p:spPr>
+          <a:xfrm>
+            <a:off x="1205042" y="3043728"/>
+            <a:ext cx="3366957" cy="739084"/>
+          </a:xfrm>
+          <a:prstGeom prst="rect">
+            <a:avLst/>
+          </a:prstGeom>
+          <a:solidFill>
+            <a:schemeClr val="bg1"/>
+          </a:solidFill>
+          <a:ln w="3175">
+            <a:solidFill>
+              <a:schemeClr val="bg1">
+                <a:lumMod val="85000"/>
+              </a:schemeClr>
+            </a:solidFill>
+          </a:ln>
+        </p:spPr>
+        <p:style>
+          <a:lnRef idx="2">
+            <a:schemeClr val="accent1">
+              <a:shade val="15000"/>
+            </a:schemeClr>
+          </a:lnRef>
+          <a:fillRef idx="1">
+            <a:schemeClr val="accent1"/>
+          </a:fillRef>
+          <a:effectRef idx="0">
+            <a:schemeClr val="accent1"/>
+          </a:effectRef>
+          <a:fontRef idx="minor">
+            <a:schemeClr val="lt1"/>
+          </a:fontRef>
+        </p:style>
+        <p:txBody>
+          <a:bodyPr wrap="none" lIns="91440" tIns="0" rIns="0" bIns="0" rtlCol="0" anchor="ctr" anchorCtr="0"/>
+          <a:lstStyle/>
           <a:p>
             <a:pPr>
               <a:lnSpc>
-                <a:spcPts val="1200"/>
+                <a:spcPts val="1600"/>
               </a:lnSpc>
             </a:pPr>
             <a:r>
-              <a:rPr lang="zh-TW" altLang="en-US" sz="1000" dirty="0">
-                <a:solidFill>
-                  <a:schemeClr val="accent3">
-                    <a:lumMod val="50000"/>
-                  </a:schemeClr>
-                </a:solidFill>
-                <a:latin typeface="微軟正黑體" panose="020B0604030504040204" pitchFamily="34" charset="-120"/>
-                <a:ea typeface="微軟正黑體" panose="020B0604030504040204" pitchFamily="34" charset="-120"/>
-              </a:rPr>
-              <a:t>* 基因分型對醫學的功用</a:t>
-            </a:r>
-            <a:endParaRPr lang="en-US" altLang="zh-TW" sz="1000" dirty="0">
+              <a:rPr lang="zh-TW" altLang="en-US" sz="1200" dirty="0">
+                <a:solidFill>
+                  <a:schemeClr val="tx1"/>
+                </a:solidFill>
+                <a:latin typeface="微軟正黑體" panose="020B0604030504040204" pitchFamily="34" charset="-120"/>
+                <a:ea typeface="微軟正黑體" panose="020B0604030504040204" pitchFamily="34" charset="-120"/>
+              </a:rPr>
+              <a:t>架設</a:t>
+            </a:r>
+            <a:r>
+              <a:rPr lang="en-US" altLang="zh-TW" sz="1200" dirty="0">
+                <a:solidFill>
+                  <a:schemeClr val="tx1"/>
+                </a:solidFill>
+                <a:latin typeface="微軟正黑體" panose="020B0604030504040204" pitchFamily="34" charset="-120"/>
+                <a:ea typeface="微軟正黑體" panose="020B0604030504040204" pitchFamily="34" charset="-120"/>
+              </a:rPr>
+              <a:t>MCP</a:t>
+            </a:r>
+            <a:r>
+              <a:rPr lang="zh-TW" altLang="en-US" sz="1200" dirty="0">
+                <a:solidFill>
+                  <a:schemeClr val="tx1"/>
+                </a:solidFill>
+                <a:latin typeface="微軟正黑體" panose="020B0604030504040204" pitchFamily="34" charset="-120"/>
+                <a:ea typeface="微軟正黑體" panose="020B0604030504040204" pitchFamily="34" charset="-120"/>
+              </a:rPr>
+              <a:t> </a:t>
+            </a:r>
+            <a:r>
+              <a:rPr lang="en-US" altLang="zh-TW" sz="1200" dirty="0">
+                <a:solidFill>
+                  <a:schemeClr val="tx1"/>
+                </a:solidFill>
+                <a:latin typeface="微軟正黑體" panose="020B0604030504040204" pitchFamily="34" charset="-120"/>
+                <a:ea typeface="微軟正黑體" panose="020B0604030504040204" pitchFamily="34" charset="-120"/>
+              </a:rPr>
+              <a:t>Server</a:t>
+            </a:r>
+            <a:r>
+              <a:rPr lang="zh-TW" altLang="en-US" sz="1200" dirty="0">
+                <a:solidFill>
+                  <a:schemeClr val="tx1"/>
+                </a:solidFill>
+                <a:latin typeface="微軟正黑體" panose="020B0604030504040204" pitchFamily="34" charset="-120"/>
+                <a:ea typeface="微軟正黑體" panose="020B0604030504040204" pitchFamily="34" charset="-120"/>
+              </a:rPr>
+              <a:t>並與</a:t>
+            </a:r>
+            <a:r>
+              <a:rPr lang="en-US" altLang="zh-TW" sz="1200" dirty="0">
+                <a:solidFill>
+                  <a:schemeClr val="tx1"/>
+                </a:solidFill>
+                <a:latin typeface="微軟正黑體" panose="020B0604030504040204" pitchFamily="34" charset="-120"/>
+                <a:ea typeface="微軟正黑體" panose="020B0604030504040204" pitchFamily="34" charset="-120"/>
+              </a:rPr>
+              <a:t>Biomedical-MCP</a:t>
+            </a:r>
+            <a:r>
+              <a:rPr lang="zh-TW" altLang="en-US" sz="1200" dirty="0">
+                <a:solidFill>
+                  <a:schemeClr val="tx1"/>
+                </a:solidFill>
+                <a:latin typeface="微軟正黑體" panose="020B0604030504040204" pitchFamily="34" charset="-120"/>
+                <a:ea typeface="微軟正黑體" panose="020B0604030504040204" pitchFamily="34" charset="-120"/>
+              </a:rPr>
+              <a:t>連線</a:t>
+            </a:r>
+            <a:r>
+              <a:rPr lang="en-US" altLang="zh-TW" sz="1200" dirty="0">
+                <a:solidFill>
+                  <a:schemeClr val="tx1"/>
+                </a:solidFill>
+                <a:latin typeface="微軟正黑體" panose="020B0604030504040204" pitchFamily="34" charset="-120"/>
+                <a:ea typeface="微軟正黑體" panose="020B0604030504040204" pitchFamily="34" charset="-120"/>
+              </a:rPr>
+              <a:t>:</a:t>
+            </a:r>
+          </a:p>
+          <a:p>
+            <a:pPr>
+              <a:lnSpc>
+                <a:spcPts val="1600"/>
+              </a:lnSpc>
+            </a:pPr>
+            <a:r>
+              <a:rPr lang="zh-TW" altLang="en-US" sz="1200" dirty="0">
+                <a:solidFill>
+                  <a:schemeClr val="tx1"/>
+                </a:solidFill>
+                <a:latin typeface="微軟正黑體" panose="020B0604030504040204" pitchFamily="34" charset="-120"/>
+                <a:ea typeface="微軟正黑體" panose="020B0604030504040204" pitchFamily="34" charset="-120"/>
+              </a:rPr>
+              <a:t>呼叫</a:t>
+            </a:r>
+            <a:r>
+              <a:rPr lang="en-US" altLang="zh-TW" sz="1200" dirty="0">
+                <a:solidFill>
+                  <a:schemeClr val="tx1"/>
+                </a:solidFill>
+                <a:latin typeface="微軟正黑體" panose="020B0604030504040204" pitchFamily="34" charset="-120"/>
+                <a:ea typeface="微軟正黑體" panose="020B0604030504040204" pitchFamily="34" charset="-120"/>
+              </a:rPr>
+              <a:t>MyVariant.info API:</a:t>
+            </a:r>
+            <a:r>
+              <a:rPr lang="zh-TW" altLang="en-US" sz="1200" dirty="0">
+                <a:solidFill>
+                  <a:schemeClr val="tx1"/>
+                </a:solidFill>
+                <a:latin typeface="微軟正黑體" panose="020B0604030504040204" pitchFamily="34" charset="-120"/>
+                <a:ea typeface="微軟正黑體" panose="020B0604030504040204" pitchFamily="34" charset="-120"/>
+              </a:rPr>
+              <a:t>解讀檔案</a:t>
+            </a:r>
+            <a:r>
+              <a:rPr lang="en-US" altLang="zh-TW" sz="1200" dirty="0">
+                <a:solidFill>
+                  <a:schemeClr val="tx1"/>
+                </a:solidFill>
+                <a:latin typeface="微軟正黑體" panose="020B0604030504040204" pitchFamily="34" charset="-120"/>
+                <a:ea typeface="微軟正黑體" panose="020B0604030504040204" pitchFamily="34" charset="-120"/>
+              </a:rPr>
+              <a:t>VCF</a:t>
+            </a:r>
+            <a:r>
+              <a:rPr lang="zh-TW" altLang="en-US" sz="1200" dirty="0">
+                <a:solidFill>
+                  <a:schemeClr val="tx1"/>
+                </a:solidFill>
+                <a:latin typeface="微軟正黑體" panose="020B0604030504040204" pitchFamily="34" charset="-120"/>
+                <a:ea typeface="微軟正黑體" panose="020B0604030504040204" pitchFamily="34" charset="-120"/>
+              </a:rPr>
+              <a:t> </a:t>
+            </a:r>
+            <a:endParaRPr lang="en-US" altLang="zh-TW" sz="1200" dirty="0">
               <a:solidFill>
-                <a:schemeClr val="accent3">
-                  <a:lumMod val="50000"/>
-                </a:schemeClr>
+                <a:schemeClr val="tx1"/>
+              </a:solidFill>
+              <a:latin typeface="微軟正黑體" panose="020B0604030504040204" pitchFamily="34" charset="-120"/>
+              <a:ea typeface="微軟正黑體" panose="020B0604030504040204" pitchFamily="34" charset="-120"/>
+            </a:endParaRPr>
+          </a:p>
+          <a:p>
+            <a:pPr>
+              <a:lnSpc>
+                <a:spcPts val="1600"/>
+              </a:lnSpc>
+            </a:pPr>
+            <a:r>
+              <a:rPr lang="zh-TW" altLang="en-US" sz="1200" dirty="0">
+                <a:solidFill>
+                  <a:schemeClr val="tx1"/>
+                </a:solidFill>
+                <a:latin typeface="微軟正黑體" panose="020B0604030504040204" pitchFamily="34" charset="-120"/>
+                <a:ea typeface="微軟正黑體" panose="020B0604030504040204" pitchFamily="34" charset="-120"/>
+              </a:rPr>
+              <a:t>調用</a:t>
+            </a:r>
+            <a:r>
+              <a:rPr lang="en-US" altLang="zh-TW" sz="1200" dirty="0" err="1">
+                <a:solidFill>
+                  <a:schemeClr val="tx1"/>
+                </a:solidFill>
+                <a:latin typeface="微軟正黑體" panose="020B0604030504040204" pitchFamily="34" charset="-120"/>
+                <a:ea typeface="微軟正黑體" panose="020B0604030504040204" pitchFamily="34" charset="-120"/>
+              </a:rPr>
+              <a:t>gonoAD</a:t>
+            </a:r>
+            <a:r>
+              <a:rPr lang="en-US" altLang="zh-TW" sz="1200" dirty="0">
+                <a:solidFill>
+                  <a:schemeClr val="tx1"/>
+                </a:solidFill>
+                <a:latin typeface="微軟正黑體" panose="020B0604030504040204" pitchFamily="34" charset="-120"/>
+                <a:ea typeface="微軟正黑體" panose="020B0604030504040204" pitchFamily="34" charset="-120"/>
+              </a:rPr>
+              <a:t>:</a:t>
+            </a:r>
+            <a:r>
+              <a:rPr lang="zh-TW" altLang="en-US" sz="1200" dirty="0">
+                <a:solidFill>
+                  <a:schemeClr val="tx1"/>
+                </a:solidFill>
+                <a:latin typeface="微軟正黑體" panose="020B0604030504040204" pitchFamily="34" charset="-120"/>
+                <a:ea typeface="微軟正黑體" panose="020B0604030504040204" pitchFamily="34" charset="-120"/>
+              </a:rPr>
+              <a:t> 使用</a:t>
+            </a:r>
+            <a:r>
+              <a:rPr lang="en-US" altLang="zh-TW" sz="1200" dirty="0">
+                <a:solidFill>
+                  <a:schemeClr val="tx1"/>
+                </a:solidFill>
+                <a:latin typeface="微軟正黑體" panose="020B0604030504040204" pitchFamily="34" charset="-120"/>
+                <a:ea typeface="微軟正黑體" panose="020B0604030504040204" pitchFamily="34" charset="-120"/>
+              </a:rPr>
+              <a:t> </a:t>
+            </a:r>
+            <a:r>
+              <a:rPr lang="en-US" altLang="zh-TW" sz="1200" dirty="0" err="1">
+                <a:solidFill>
+                  <a:schemeClr val="tx1"/>
+                </a:solidFill>
+                <a:latin typeface="微軟正黑體" panose="020B0604030504040204" pitchFamily="34" charset="-120"/>
+                <a:ea typeface="微軟正黑體" panose="020B0604030504040204" pitchFamily="34" charset="-120"/>
+              </a:rPr>
+              <a:t>GraphQL</a:t>
+            </a:r>
+            <a:r>
+              <a:rPr lang="en-US" altLang="zh-TW" sz="1200" dirty="0">
+                <a:solidFill>
+                  <a:schemeClr val="tx1"/>
+                </a:solidFill>
+                <a:latin typeface="微軟正黑體" panose="020B0604030504040204" pitchFamily="34" charset="-120"/>
+                <a:ea typeface="微軟正黑體" panose="020B0604030504040204" pitchFamily="34" charset="-120"/>
+              </a:rPr>
+              <a:t> </a:t>
+            </a:r>
+          </a:p>
+        </p:txBody>
+      </p:sp>
+      <p:sp>
+        <p:nvSpPr>
+          <p:cNvPr id="33" name="矩形 32">
+            <a:extLst>
+              <a:ext uri="{FF2B5EF4-FFF2-40B4-BE49-F238E27FC236}">
+                <a16:creationId xmlns:a16="http://schemas.microsoft.com/office/drawing/2014/main" id="{0010BDAA-C79D-DF37-3CE2-38ECB3D7A907}"/>
+              </a:ext>
+            </a:extLst>
+          </p:cNvPr>
+          <p:cNvSpPr/>
+          <p:nvPr/>
+        </p:nvSpPr>
+        <p:spPr>
+          <a:xfrm>
+            <a:off x="1205042" y="4238603"/>
+            <a:ext cx="3366957" cy="912173"/>
+          </a:xfrm>
+          <a:prstGeom prst="rect">
+            <a:avLst/>
+          </a:prstGeom>
+          <a:solidFill>
+            <a:schemeClr val="bg1"/>
+          </a:solidFill>
+          <a:ln w="3175">
+            <a:solidFill>
+              <a:schemeClr val="bg1">
+                <a:lumMod val="85000"/>
+              </a:schemeClr>
+            </a:solidFill>
+          </a:ln>
+        </p:spPr>
+        <p:style>
+          <a:lnRef idx="2">
+            <a:schemeClr val="accent1">
+              <a:shade val="15000"/>
+            </a:schemeClr>
+          </a:lnRef>
+          <a:fillRef idx="1">
+            <a:schemeClr val="accent1"/>
+          </a:fillRef>
+          <a:effectRef idx="0">
+            <a:schemeClr val="accent1"/>
+          </a:effectRef>
+          <a:fontRef idx="minor">
+            <a:schemeClr val="lt1"/>
+          </a:fontRef>
+        </p:style>
+        <p:txBody>
+          <a:bodyPr wrap="none" lIns="91440" tIns="0" rIns="0" bIns="0" rtlCol="0" anchor="ctr" anchorCtr="0"/>
+          <a:lstStyle/>
+          <a:p>
+            <a:pPr>
+              <a:lnSpc>
+                <a:spcPts val="1600"/>
+              </a:lnSpc>
+            </a:pPr>
+            <a:r>
+              <a:rPr lang="zh-TW" altLang="en-US" sz="1200" dirty="0">
+                <a:solidFill>
+                  <a:schemeClr val="tx1"/>
+                </a:solidFill>
+                <a:latin typeface="微軟正黑體" panose="020B0604030504040204" pitchFamily="34" charset="-120"/>
+                <a:ea typeface="微軟正黑體" panose="020B0604030504040204" pitchFamily="34" charset="-120"/>
+              </a:rPr>
+              <a:t>微調方案</a:t>
+            </a:r>
+            <a:r>
+              <a:rPr lang="en-US" altLang="zh-TW" sz="1200" dirty="0">
+                <a:solidFill>
+                  <a:schemeClr val="tx1"/>
+                </a:solidFill>
+                <a:latin typeface="微軟正黑體" panose="020B0604030504040204" pitchFamily="34" charset="-120"/>
+                <a:ea typeface="微軟正黑體" panose="020B0604030504040204" pitchFamily="34" charset="-120"/>
+              </a:rPr>
+              <a:t>:</a:t>
+            </a:r>
+          </a:p>
+          <a:p>
+            <a:pPr>
+              <a:lnSpc>
+                <a:spcPts val="1600"/>
+              </a:lnSpc>
+            </a:pPr>
+            <a:r>
+              <a:rPr lang="zh-TW" altLang="en-US" sz="1200" dirty="0">
+                <a:solidFill>
+                  <a:schemeClr val="tx1"/>
+                </a:solidFill>
+                <a:latin typeface="微軟正黑體" panose="020B0604030504040204" pitchFamily="34" charset="-120"/>
+                <a:ea typeface="微軟正黑體" panose="020B0604030504040204" pitchFamily="34" charset="-120"/>
+              </a:rPr>
+              <a:t>針對基因分型</a:t>
+            </a:r>
+            <a:r>
+              <a:rPr lang="en-US" altLang="zh-TW" sz="1200" dirty="0">
+                <a:solidFill>
+                  <a:schemeClr val="tx1"/>
+                </a:solidFill>
+                <a:latin typeface="微軟正黑體" panose="020B0604030504040204" pitchFamily="34" charset="-120"/>
+                <a:ea typeface="微軟正黑體" panose="020B0604030504040204" pitchFamily="34" charset="-120"/>
+              </a:rPr>
+              <a:t>, </a:t>
+            </a:r>
+            <a:r>
+              <a:rPr lang="zh-TW" altLang="en-US" sz="1200" dirty="0">
+                <a:solidFill>
+                  <a:schemeClr val="tx1"/>
+                </a:solidFill>
+                <a:latin typeface="微軟正黑體" panose="020B0604030504040204" pitchFamily="34" charset="-120"/>
+                <a:ea typeface="微軟正黑體" panose="020B0604030504040204" pitchFamily="34" charset="-120"/>
+              </a:rPr>
+              <a:t>強化</a:t>
+            </a:r>
+            <a:r>
+              <a:rPr lang="en-US" altLang="zh-TW" sz="1200" dirty="0">
+                <a:solidFill>
+                  <a:schemeClr val="tx1"/>
+                </a:solidFill>
+                <a:latin typeface="微軟正黑體" panose="020B0604030504040204" pitchFamily="34" charset="-120"/>
+                <a:ea typeface="微軟正黑體" panose="020B0604030504040204" pitchFamily="34" charset="-120"/>
+              </a:rPr>
+              <a:t>BIO-AI</a:t>
+            </a:r>
+            <a:r>
+              <a:rPr lang="zh-TW" altLang="en-US" sz="1200" dirty="0">
+                <a:solidFill>
+                  <a:schemeClr val="tx1"/>
+                </a:solidFill>
+                <a:latin typeface="微軟正黑體" panose="020B0604030504040204" pitchFamily="34" charset="-120"/>
+                <a:ea typeface="微軟正黑體" panose="020B0604030504040204" pitchFamily="34" charset="-120"/>
+              </a:rPr>
+              <a:t> </a:t>
+            </a:r>
+            <a:r>
+              <a:rPr lang="en-US" altLang="zh-TW" sz="1200" dirty="0">
+                <a:solidFill>
+                  <a:schemeClr val="tx1"/>
+                </a:solidFill>
+                <a:latin typeface="微軟正黑體" panose="020B0604030504040204" pitchFamily="34" charset="-120"/>
+                <a:ea typeface="微軟正黑體" panose="020B0604030504040204" pitchFamily="34" charset="-120"/>
+              </a:rPr>
+              <a:t>Agent</a:t>
+            </a:r>
+          </a:p>
+          <a:p>
+            <a:pPr>
+              <a:lnSpc>
+                <a:spcPts val="1600"/>
+              </a:lnSpc>
+            </a:pPr>
+            <a:r>
+              <a:rPr lang="zh-TW" altLang="en-US" sz="1200" dirty="0">
+                <a:solidFill>
+                  <a:schemeClr val="tx1"/>
+                </a:solidFill>
+                <a:latin typeface="微軟正黑體" panose="020B0604030504040204" pitchFamily="34" charset="-120"/>
+                <a:ea typeface="微軟正黑體" panose="020B0604030504040204" pitchFamily="34" charset="-120"/>
+              </a:rPr>
+              <a:t>使用</a:t>
+            </a:r>
+            <a:r>
+              <a:rPr lang="en-US" altLang="zh-TW" sz="1200" dirty="0" err="1">
+                <a:solidFill>
+                  <a:schemeClr val="tx1"/>
+                </a:solidFill>
+                <a:latin typeface="微軟正黑體" panose="020B0604030504040204" pitchFamily="34" charset="-120"/>
+                <a:ea typeface="微軟正黑體" panose="020B0604030504040204" pitchFamily="34" charset="-120"/>
+              </a:rPr>
+              <a:t>Unsloth</a:t>
+            </a:r>
+            <a:r>
+              <a:rPr lang="zh-TW" altLang="en-US" sz="1200" dirty="0">
+                <a:solidFill>
+                  <a:schemeClr val="tx1"/>
+                </a:solidFill>
+                <a:latin typeface="微軟正黑體" panose="020B0604030504040204" pitchFamily="34" charset="-120"/>
+                <a:ea typeface="微軟正黑體" panose="020B0604030504040204" pitchFamily="34" charset="-120"/>
+              </a:rPr>
+              <a:t>的微調學習</a:t>
+            </a:r>
+            <a:endParaRPr lang="en-US" altLang="zh-TW" sz="1200" dirty="0">
+              <a:solidFill>
+                <a:schemeClr val="tx1"/>
+              </a:solidFill>
+              <a:latin typeface="微軟正黑體" panose="020B0604030504040204" pitchFamily="34" charset="-120"/>
+              <a:ea typeface="微軟正黑體" panose="020B0604030504040204" pitchFamily="34" charset="-120"/>
+            </a:endParaRPr>
+          </a:p>
+          <a:p>
+            <a:pPr>
+              <a:lnSpc>
+                <a:spcPts val="1600"/>
+              </a:lnSpc>
+            </a:pPr>
+            <a:r>
+              <a:rPr lang="zh-TW" altLang="en-US" sz="1200" dirty="0">
+                <a:solidFill>
+                  <a:schemeClr val="tx1"/>
+                </a:solidFill>
+                <a:latin typeface="微軟正黑體" panose="020B0604030504040204" pitchFamily="34" charset="-120"/>
+                <a:ea typeface="微軟正黑體" panose="020B0604030504040204" pitchFamily="34" charset="-120"/>
+              </a:rPr>
+              <a:t>使用開放資料庫</a:t>
+            </a:r>
+            <a:r>
+              <a:rPr lang="en-US" altLang="zh-TW" sz="1200" dirty="0">
+                <a:solidFill>
+                  <a:schemeClr val="tx1"/>
+                </a:solidFill>
+                <a:latin typeface="微軟正黑體" panose="020B0604030504040204" pitchFamily="34" charset="-120"/>
+                <a:ea typeface="微軟正黑體" panose="020B0604030504040204" pitchFamily="34" charset="-120"/>
+              </a:rPr>
+              <a:t>:</a:t>
+            </a:r>
+            <a:r>
+              <a:rPr lang="zh-TW" altLang="en-US" sz="1200" dirty="0">
+                <a:solidFill>
+                  <a:schemeClr val="tx1"/>
+                </a:solidFill>
+                <a:latin typeface="微軟正黑體" panose="020B0604030504040204" pitchFamily="34" charset="-120"/>
+                <a:ea typeface="微軟正黑體" panose="020B0604030504040204" pitchFamily="34" charset="-120"/>
+              </a:rPr>
+              <a:t> 遠端數據與資料</a:t>
+            </a:r>
+            <a:r>
+              <a:rPr lang="en-US" altLang="zh-TW" sz="1200" dirty="0">
+                <a:solidFill>
+                  <a:schemeClr val="tx1"/>
+                </a:solidFill>
+                <a:latin typeface="微軟正黑體" panose="020B0604030504040204" pitchFamily="34" charset="-120"/>
+                <a:ea typeface="微軟正黑體" panose="020B0604030504040204" pitchFamily="34" charset="-120"/>
+              </a:rPr>
+              <a:t>,</a:t>
+            </a:r>
+          </a:p>
+        </p:txBody>
+      </p:sp>
+      <p:sp>
+        <p:nvSpPr>
+          <p:cNvPr id="35" name="文字方塊 34">
+            <a:extLst>
+              <a:ext uri="{FF2B5EF4-FFF2-40B4-BE49-F238E27FC236}">
+                <a16:creationId xmlns:a16="http://schemas.microsoft.com/office/drawing/2014/main" id="{C6EEA5AB-EC13-074E-E90C-7ED275610B8B}"/>
+              </a:ext>
+            </a:extLst>
+          </p:cNvPr>
+          <p:cNvSpPr txBox="1"/>
+          <p:nvPr/>
+        </p:nvSpPr>
+        <p:spPr>
+          <a:xfrm>
+            <a:off x="5021516" y="3344585"/>
+            <a:ext cx="2504178" cy="646331"/>
+          </a:xfrm>
+          <a:prstGeom prst="rect">
+            <a:avLst/>
+          </a:prstGeom>
+          <a:solidFill>
+            <a:schemeClr val="accent2">
+              <a:lumMod val="20000"/>
+              <a:lumOff val="80000"/>
+            </a:schemeClr>
+          </a:solidFill>
+        </p:spPr>
+        <p:txBody>
+          <a:bodyPr wrap="square">
+            <a:spAutoFit/>
+          </a:bodyPr>
+          <a:lstStyle/>
+          <a:p>
+            <a:r>
+              <a:rPr lang="zh-TW" altLang="zh-TW" sz="1200" u="none" strike="noStrike" dirty="0">
+                <a:effectLst/>
+                <a:latin typeface="微軟正黑體" panose="020B0604030504040204" pitchFamily="34" charset="-120"/>
+                <a:ea typeface="微軟正黑體" panose="020B0604030504040204" pitchFamily="34" charset="-120"/>
+              </a:rPr>
+              <a:t>使用 Python / LangChain 自己架設一個可以連線 API 的 BIO-IT Agent</a:t>
+            </a:r>
+            <a:r>
+              <a:rPr lang="zh-TW" altLang="zh-TW" sz="1200" dirty="0">
+                <a:latin typeface="微軟正黑體" panose="020B0604030504040204" pitchFamily="34" charset="-120"/>
+                <a:ea typeface="微軟正黑體" panose="020B0604030504040204" pitchFamily="34" charset="-120"/>
+              </a:rPr>
+              <a:t> </a:t>
+            </a:r>
+            <a:endParaRPr lang="zh-TW" altLang="en-US" sz="1200" dirty="0">
+              <a:latin typeface="微軟正黑體" panose="020B0604030504040204" pitchFamily="34" charset="-120"/>
+              <a:ea typeface="微軟正黑體" panose="020B0604030504040204" pitchFamily="34" charset="-120"/>
+            </a:endParaRPr>
+          </a:p>
+        </p:txBody>
+      </p:sp>
+      <p:sp>
+        <p:nvSpPr>
+          <p:cNvPr id="39" name="矩形 38">
+            <a:extLst>
+              <a:ext uri="{FF2B5EF4-FFF2-40B4-BE49-F238E27FC236}">
+                <a16:creationId xmlns:a16="http://schemas.microsoft.com/office/drawing/2014/main" id="{3008A3BE-FAA8-D069-BE58-7E4850445FDF}"/>
+              </a:ext>
+            </a:extLst>
+          </p:cNvPr>
+          <p:cNvSpPr/>
+          <p:nvPr/>
+        </p:nvSpPr>
+        <p:spPr>
+          <a:xfrm>
+            <a:off x="1217246" y="5426220"/>
+            <a:ext cx="3366957" cy="739084"/>
+          </a:xfrm>
+          <a:prstGeom prst="rect">
+            <a:avLst/>
+          </a:prstGeom>
+          <a:solidFill>
+            <a:schemeClr val="bg1"/>
+          </a:solidFill>
+          <a:ln w="3175">
+            <a:solidFill>
+              <a:schemeClr val="bg1">
+                <a:lumMod val="85000"/>
+              </a:schemeClr>
+            </a:solidFill>
+          </a:ln>
+        </p:spPr>
+        <p:style>
+          <a:lnRef idx="2">
+            <a:schemeClr val="accent1">
+              <a:shade val="15000"/>
+            </a:schemeClr>
+          </a:lnRef>
+          <a:fillRef idx="1">
+            <a:schemeClr val="accent1"/>
+          </a:fillRef>
+          <a:effectRef idx="0">
+            <a:schemeClr val="accent1"/>
+          </a:effectRef>
+          <a:fontRef idx="minor">
+            <a:schemeClr val="lt1"/>
+          </a:fontRef>
+        </p:style>
+        <p:txBody>
+          <a:bodyPr wrap="none" lIns="91440" tIns="0" rIns="0" bIns="0" rtlCol="0" anchor="ctr" anchorCtr="0"/>
+          <a:lstStyle/>
+          <a:p>
+            <a:pPr>
+              <a:lnSpc>
+                <a:spcPts val="1600"/>
+              </a:lnSpc>
+            </a:pPr>
+            <a:r>
+              <a:rPr lang="zh-TW" altLang="en-US" sz="1200" dirty="0">
+                <a:solidFill>
+                  <a:schemeClr val="tx1"/>
+                </a:solidFill>
+                <a:latin typeface="微軟正黑體" panose="020B0604030504040204" pitchFamily="34" charset="-120"/>
+                <a:ea typeface="微軟正黑體" panose="020B0604030504040204" pitchFamily="34" charset="-120"/>
+              </a:rPr>
+              <a:t>評估方案</a:t>
+            </a:r>
+            <a:r>
+              <a:rPr lang="en-US" altLang="zh-TW" sz="1200" dirty="0">
+                <a:solidFill>
+                  <a:schemeClr val="tx1"/>
+                </a:solidFill>
+                <a:latin typeface="微軟正黑體" panose="020B0604030504040204" pitchFamily="34" charset="-120"/>
+                <a:ea typeface="微軟正黑體" panose="020B0604030504040204" pitchFamily="34" charset="-120"/>
+              </a:rPr>
+              <a:t>:</a:t>
+            </a:r>
+          </a:p>
+          <a:p>
+            <a:pPr>
+              <a:lnSpc>
+                <a:spcPts val="1600"/>
+              </a:lnSpc>
+            </a:pPr>
+            <a:r>
+              <a:rPr lang="zh-TW" altLang="en-US" sz="1200" dirty="0">
+                <a:solidFill>
+                  <a:schemeClr val="tx1"/>
+                </a:solidFill>
+                <a:latin typeface="微軟正黑體" panose="020B0604030504040204" pitchFamily="34" charset="-120"/>
+                <a:ea typeface="微軟正黑體" panose="020B0604030504040204" pitchFamily="34" charset="-120"/>
+              </a:rPr>
+              <a:t>使用</a:t>
+            </a:r>
+            <a:r>
+              <a:rPr lang="en-US" altLang="zh-TW" sz="1200" dirty="0" err="1">
+                <a:solidFill>
+                  <a:schemeClr val="tx1"/>
+                </a:solidFill>
+                <a:latin typeface="微軟正黑體" panose="020B0604030504040204" pitchFamily="34" charset="-120"/>
+                <a:ea typeface="微軟正黑體" panose="020B0604030504040204" pitchFamily="34" charset="-120"/>
+              </a:rPr>
+              <a:t>Unsloth</a:t>
+            </a:r>
+            <a:r>
+              <a:rPr lang="zh-TW" altLang="en-US" sz="1200" dirty="0">
+                <a:solidFill>
+                  <a:schemeClr val="tx1"/>
+                </a:solidFill>
+                <a:latin typeface="微軟正黑體" panose="020B0604030504040204" pitchFamily="34" charset="-120"/>
+                <a:ea typeface="微軟正黑體" panose="020B0604030504040204" pitchFamily="34" charset="-120"/>
+              </a:rPr>
+              <a:t>的微調學習</a:t>
+            </a:r>
+            <a:endParaRPr lang="en-US" altLang="zh-TW" sz="1200" dirty="0">
+              <a:solidFill>
+                <a:schemeClr val="tx1"/>
+              </a:solidFill>
+              <a:latin typeface="微軟正黑體" panose="020B0604030504040204" pitchFamily="34" charset="-120"/>
+              <a:ea typeface="微軟正黑體" panose="020B0604030504040204" pitchFamily="34" charset="-120"/>
+            </a:endParaRPr>
+          </a:p>
+        </p:txBody>
+      </p:sp>
+      <p:sp>
+        <p:nvSpPr>
+          <p:cNvPr id="31" name="文字方塊 30">
+            <a:extLst>
+              <a:ext uri="{FF2B5EF4-FFF2-40B4-BE49-F238E27FC236}">
+                <a16:creationId xmlns:a16="http://schemas.microsoft.com/office/drawing/2014/main" id="{A67FEAAE-5A60-5228-EC62-6C07AE54F497}"/>
+              </a:ext>
+            </a:extLst>
+          </p:cNvPr>
+          <p:cNvSpPr txBox="1"/>
+          <p:nvPr/>
+        </p:nvSpPr>
+        <p:spPr>
+          <a:xfrm>
+            <a:off x="3635896" y="4817421"/>
+            <a:ext cx="1512168" cy="483787"/>
+          </a:xfrm>
+          <a:prstGeom prst="rect">
+            <a:avLst/>
+          </a:prstGeom>
+          <a:solidFill>
+            <a:schemeClr val="accent2">
+              <a:lumMod val="20000"/>
+              <a:lumOff val="80000"/>
+            </a:schemeClr>
+          </a:solidFill>
+          <a:ln>
+            <a:solidFill>
+              <a:schemeClr val="accent2">
+                <a:lumMod val="60000"/>
+                <a:lumOff val="40000"/>
+              </a:schemeClr>
+            </a:solidFill>
+          </a:ln>
+        </p:spPr>
+        <p:txBody>
+          <a:bodyPr wrap="square">
+            <a:spAutoFit/>
+          </a:bodyPr>
+          <a:lstStyle/>
+          <a:p>
+            <a:pPr>
+              <a:lnSpc>
+                <a:spcPts val="1600"/>
+              </a:lnSpc>
+            </a:pPr>
+            <a:r>
+              <a:rPr lang="en-US" altLang="zh-TW" sz="1100" dirty="0">
+                <a:solidFill>
+                  <a:schemeClr val="tx1"/>
+                </a:solidFill>
+                <a:latin typeface="微軟正黑體" panose="020B0604030504040204" pitchFamily="34" charset="-120"/>
+                <a:ea typeface="微軟正黑體" panose="020B0604030504040204" pitchFamily="34" charset="-120"/>
+              </a:rPr>
+              <a:t>Apollo-Corpus:</a:t>
+            </a:r>
+          </a:p>
+          <a:p>
+            <a:pPr>
+              <a:lnSpc>
+                <a:spcPts val="1600"/>
+              </a:lnSpc>
+            </a:pPr>
+            <a:r>
+              <a:rPr lang="en-US" altLang="zh-TW" sz="1100" dirty="0" err="1">
+                <a:latin typeface="微軟正黑體" panose="020B0604030504040204" pitchFamily="34" charset="-120"/>
+                <a:ea typeface="微軟正黑體" panose="020B0604030504040204" pitchFamily="34" charset="-120"/>
+              </a:rPr>
+              <a:t>MedQA</a:t>
+            </a:r>
+            <a:r>
+              <a:rPr lang="en-US" altLang="zh-TW" sz="1100" dirty="0">
+                <a:latin typeface="微軟正黑體" panose="020B0604030504040204" pitchFamily="34" charset="-120"/>
+                <a:ea typeface="微軟正黑體" panose="020B0604030504040204" pitchFamily="34" charset="-120"/>
+              </a:rPr>
+              <a:t> / USMLE: </a:t>
+            </a:r>
+            <a:endParaRPr lang="en-US" altLang="zh-TW" sz="1100" dirty="0">
+              <a:solidFill>
+                <a:schemeClr val="tx1"/>
               </a:solidFill>
               <a:latin typeface="微軟正黑體" panose="020B0604030504040204" pitchFamily="34" charset="-120"/>
               <a:ea typeface="微軟正黑體" panose="020B0604030504040204" pitchFamily="34" charset="-120"/>
@@ -2948,6 +3890,186 @@
       </p:grpSpPr>
       <p:sp>
         <p:nvSpPr>
+          <p:cNvPr id="19" name="矩形 18">
+            <a:extLst>
+              <a:ext uri="{FF2B5EF4-FFF2-40B4-BE49-F238E27FC236}">
+                <a16:creationId xmlns:a16="http://schemas.microsoft.com/office/drawing/2014/main" id="{AF063FFB-DEF3-78C2-3B65-BE63A1A8E53F}"/>
+              </a:ext>
+            </a:extLst>
+          </p:cNvPr>
+          <p:cNvSpPr/>
+          <p:nvPr/>
+        </p:nvSpPr>
+        <p:spPr>
+          <a:xfrm>
+            <a:off x="5574753" y="1603184"/>
+            <a:ext cx="1229495" cy="720080"/>
+          </a:xfrm>
+          <a:prstGeom prst="rect">
+            <a:avLst/>
+          </a:prstGeom>
+          <a:solidFill>
+            <a:schemeClr val="accent3">
+              <a:lumMod val="20000"/>
+              <a:lumOff val="80000"/>
+            </a:schemeClr>
+          </a:solidFill>
+          <a:ln w="12700">
+            <a:solidFill>
+              <a:srgbClr val="92D050"/>
+            </a:solidFill>
+          </a:ln>
+        </p:spPr>
+        <p:style>
+          <a:lnRef idx="2">
+            <a:schemeClr val="accent1">
+              <a:shade val="15000"/>
+            </a:schemeClr>
+          </a:lnRef>
+          <a:fillRef idx="1">
+            <a:schemeClr val="accent1"/>
+          </a:fillRef>
+          <a:effectRef idx="0">
+            <a:schemeClr val="accent1"/>
+          </a:effectRef>
+          <a:fontRef idx="minor">
+            <a:schemeClr val="lt1"/>
+          </a:fontRef>
+        </p:style>
+        <p:txBody>
+          <a:bodyPr wrap="none" lIns="91440" tIns="0" rIns="0" bIns="0" rtlCol="0" anchor="ctr" anchorCtr="0"/>
+          <a:lstStyle/>
+          <a:p>
+            <a:pPr>
+              <a:lnSpc>
+                <a:spcPts val="1600"/>
+              </a:lnSpc>
+            </a:pPr>
+            <a:r>
+              <a:rPr lang="en-US" altLang="zh-TW" sz="1200" dirty="0">
+                <a:solidFill>
+                  <a:schemeClr val="tx1"/>
+                </a:solidFill>
+                <a:latin typeface="ADLaM Display" panose="02010000000000000000" pitchFamily="2" charset="0"/>
+                <a:ea typeface="ADLaM Display" panose="02010000000000000000" pitchFamily="2" charset="0"/>
+                <a:cs typeface="ADLaM Display" panose="02010000000000000000" pitchFamily="2" charset="0"/>
+              </a:rPr>
+              <a:t>Public</a:t>
+            </a:r>
+          </a:p>
+          <a:p>
+            <a:pPr>
+              <a:lnSpc>
+                <a:spcPts val="1600"/>
+              </a:lnSpc>
+            </a:pPr>
+            <a:r>
+              <a:rPr lang="en-US" altLang="zh-TW" sz="1200" dirty="0">
+                <a:solidFill>
+                  <a:schemeClr val="tx1"/>
+                </a:solidFill>
+                <a:latin typeface="ADLaM Display" panose="02010000000000000000" pitchFamily="2" charset="0"/>
+                <a:ea typeface="ADLaM Display" panose="02010000000000000000" pitchFamily="2" charset="0"/>
+                <a:cs typeface="ADLaM Display" panose="02010000000000000000" pitchFamily="2" charset="0"/>
+              </a:rPr>
+              <a:t>Database</a:t>
+            </a:r>
+          </a:p>
+        </p:txBody>
+      </p:sp>
+      <p:sp>
+        <p:nvSpPr>
+          <p:cNvPr id="12" name="矩形 11">
+            <a:extLst>
+              <a:ext uri="{FF2B5EF4-FFF2-40B4-BE49-F238E27FC236}">
+                <a16:creationId xmlns:a16="http://schemas.microsoft.com/office/drawing/2014/main" id="{16956821-88D8-CAE9-C436-B01965649CF4}"/>
+              </a:ext>
+            </a:extLst>
+          </p:cNvPr>
+          <p:cNvSpPr/>
+          <p:nvPr/>
+        </p:nvSpPr>
+        <p:spPr>
+          <a:xfrm>
+            <a:off x="4835732" y="1603184"/>
+            <a:ext cx="581422" cy="720080"/>
+          </a:xfrm>
+          <a:prstGeom prst="rect">
+            <a:avLst/>
+          </a:prstGeom>
+          <a:solidFill>
+            <a:schemeClr val="bg1">
+              <a:lumMod val="95000"/>
+            </a:schemeClr>
+          </a:solidFill>
+          <a:ln w="38100">
+            <a:solidFill>
+              <a:schemeClr val="accent4">
+                <a:lumMod val="40000"/>
+                <a:lumOff val="60000"/>
+              </a:schemeClr>
+            </a:solidFill>
+          </a:ln>
+        </p:spPr>
+        <p:style>
+          <a:lnRef idx="2">
+            <a:schemeClr val="accent1">
+              <a:shade val="15000"/>
+            </a:schemeClr>
+          </a:lnRef>
+          <a:fillRef idx="1">
+            <a:schemeClr val="accent1"/>
+          </a:fillRef>
+          <a:effectRef idx="0">
+            <a:schemeClr val="accent1"/>
+          </a:effectRef>
+          <a:fontRef idx="minor">
+            <a:schemeClr val="lt1"/>
+          </a:fontRef>
+        </p:style>
+        <p:txBody>
+          <a:bodyPr wrap="none" lIns="0" tIns="0" rIns="0" bIns="0" rtlCol="0" anchor="ctr" anchorCtr="1"/>
+          <a:lstStyle/>
+          <a:p>
+            <a:pPr algn="ctr">
+              <a:lnSpc>
+                <a:spcPts val="1600"/>
+              </a:lnSpc>
+            </a:pPr>
+            <a:r>
+              <a:rPr lang="en-US" altLang="zh-TW" sz="1200" dirty="0">
+                <a:solidFill>
+                  <a:srgbClr val="7030A0"/>
+                </a:solidFill>
+                <a:latin typeface="ADLaM Display" panose="02010000000000000000" pitchFamily="2" charset="0"/>
+                <a:ea typeface="ADLaM Display" panose="02010000000000000000" pitchFamily="2" charset="0"/>
+                <a:cs typeface="ADLaM Display" panose="02010000000000000000" pitchFamily="2" charset="0"/>
+              </a:rPr>
+              <a:t>MCP </a:t>
+            </a:r>
+          </a:p>
+          <a:p>
+            <a:pPr algn="ctr">
+              <a:lnSpc>
+                <a:spcPts val="1600"/>
+              </a:lnSpc>
+            </a:pPr>
+            <a:r>
+              <a:rPr lang="en-US" altLang="zh-TW" sz="1200" dirty="0">
+                <a:solidFill>
+                  <a:srgbClr val="7030A0"/>
+                </a:solidFill>
+                <a:latin typeface="ADLaM Display" panose="02010000000000000000" pitchFamily="2" charset="0"/>
+                <a:ea typeface="ADLaM Display" panose="02010000000000000000" pitchFamily="2" charset="0"/>
+                <a:cs typeface="ADLaM Display" panose="02010000000000000000" pitchFamily="2" charset="0"/>
+              </a:rPr>
+              <a:t>Server</a:t>
+            </a:r>
+          </a:p>
+        </p:txBody>
+      </p:sp>
+      <p:sp>
+        <p:nvSpPr>
           <p:cNvPr id="37" name="矩形 36">
             <a:extLst>
               <a:ext uri="{FF2B5EF4-FFF2-40B4-BE49-F238E27FC236}">
@@ -2960,7 +4082,7 @@
         </p:nvSpPr>
         <p:spPr>
           <a:xfrm>
-            <a:off x="4826476" y="1790611"/>
+            <a:off x="2281896" y="4424279"/>
             <a:ext cx="3033034" cy="1185267"/>
           </a:xfrm>
           <a:prstGeom prst="rect">
@@ -3010,7 +4132,7 @@
                 <a:ea typeface="ADLaM Display" panose="02010000000000000000" pitchFamily="2" charset="0"/>
                 <a:cs typeface="ADLaM Display" panose="02010000000000000000" pitchFamily="2" charset="0"/>
               </a:rPr>
-              <a:t>Call Function</a:t>
+              <a:t>Public Database</a:t>
             </a:r>
           </a:p>
           <a:p>
@@ -4697,6 +5819,42 @@
           </a:p>
         </p:txBody>
       </p:sp>
+      <p:pic>
+        <p:nvPicPr>
+          <p:cNvPr id="24" name="圖形 23" descr="資料庫 以實心填滿">
+            <a:extLst>
+              <a:ext uri="{FF2B5EF4-FFF2-40B4-BE49-F238E27FC236}">
+                <a16:creationId xmlns:a16="http://schemas.microsoft.com/office/drawing/2014/main" id="{B85E4695-C665-7B6B-CC37-C916F94A44E3}"/>
+              </a:ext>
+            </a:extLst>
+          </p:cNvPr>
+          <p:cNvPicPr>
+            <a:picLocks noChangeAspect="1"/>
+          </p:cNvPicPr>
+          <p:nvPr/>
+        </p:nvPicPr>
+        <p:blipFill>
+          <a:blip>
+            <a:extLst>
+              <a:ext uri="{96DAC541-7B7A-43D3-8B79-37D633B846F1}">
+                <asvg:svgBlip xmlns:asvg="http://schemas.microsoft.com/office/drawing/2016/SVG/main" r:embed="rId6"/>
+              </a:ext>
+            </a:extLst>
+          </a:blip>
+          <a:stretch>
+            <a:fillRect/>
+          </a:stretch>
+        </p:blipFill>
+        <p:spPr>
+          <a:xfrm>
+            <a:off x="6290798" y="1706499"/>
+            <a:ext cx="513450" cy="513450"/>
+          </a:xfrm>
+          <a:prstGeom prst="rect">
+            <a:avLst/>
+          </a:prstGeom>
+        </p:spPr>
+      </p:pic>
     </p:spTree>
     <p:extLst>
       <p:ext uri="{BB962C8B-B14F-4D97-AF65-F5344CB8AC3E}">
@@ -4792,15 +5950,14 @@
             </a:r>
           </a:p>
           <a:p>
-            <a:pPr marL="285750" indent="-285750">
-              <a:buFontTx/>
-              <a:buChar char="-"/>
-            </a:pPr>
-            <a:endParaRPr lang="en-US" altLang="zh-TW" sz="1400" dirty="0">
-              <a:latin typeface="Noto Sans HK" panose="020B0200000000000000" pitchFamily="34" charset="-120"/>
-              <a:ea typeface="Noto Sans HK" panose="020B0200000000000000" pitchFamily="34" charset="-120"/>
-              <a:cs typeface="Arial" panose="020B0604020202020204" pitchFamily="34" charset="0"/>
-            </a:endParaRPr>
+            <a:r>
+              <a:rPr lang="en-US" altLang="zh-TW" sz="1400" dirty="0">
+                <a:latin typeface="Noto Sans HK" panose="020B0200000000000000" pitchFamily="34" charset="-120"/>
+                <a:ea typeface="Noto Sans HK" panose="020B0200000000000000" pitchFamily="34" charset="-120"/>
+                <a:cs typeface="Arial" panose="020B0604020202020204" pitchFamily="34" charset="0"/>
+              </a:rPr>
+              <a:t>Variant Call Format</a:t>
+            </a:r>
           </a:p>
         </p:txBody>
       </p:sp>
@@ -4818,7 +5975,7 @@
         </p:nvSpPr>
         <p:spPr>
           <a:xfrm>
-            <a:off x="179512" y="764704"/>
+            <a:off x="179512" y="913944"/>
             <a:ext cx="8184624" cy="1938992"/>
           </a:xfrm>
           <a:prstGeom prst="rect">

--- a/bio-it-agent.pptx
+++ b/bio-it-agent.pptx
@@ -5,19 +5,21 @@
     <p:sldMasterId id="2147483648" r:id="rId1"/>
   </p:sldMasterIdLst>
   <p:notesMasterIdLst>
-    <p:notesMasterId r:id="rId9"/>
+    <p:notesMasterId r:id="rId11"/>
   </p:notesMasterIdLst>
   <p:handoutMasterIdLst>
-    <p:handoutMasterId r:id="rId10"/>
+    <p:handoutMasterId r:id="rId12"/>
   </p:handoutMasterIdLst>
   <p:sldIdLst>
     <p:sldId id="3459" r:id="rId2"/>
     <p:sldId id="3472" r:id="rId3"/>
     <p:sldId id="3517" r:id="rId4"/>
-    <p:sldId id="3528" r:id="rId5"/>
-    <p:sldId id="3527" r:id="rId6"/>
-    <p:sldId id="3518" r:id="rId7"/>
-    <p:sldId id="3519" r:id="rId8"/>
+    <p:sldId id="3530" r:id="rId5"/>
+    <p:sldId id="3529" r:id="rId6"/>
+    <p:sldId id="3528" r:id="rId7"/>
+    <p:sldId id="3527" r:id="rId8"/>
+    <p:sldId id="3518" r:id="rId9"/>
+    <p:sldId id="3519" r:id="rId10"/>
   </p:sldIdLst>
   <p:sldSz cx="9144000" cy="6858000" type="screen4x3"/>
   <p:notesSz cx="6797675" cy="9925050"/>
@@ -124,6 +126,8 @@
             <p14:sldId id="3459"/>
             <p14:sldId id="3472"/>
             <p14:sldId id="3517"/>
+            <p14:sldId id="3530"/>
+            <p14:sldId id="3529"/>
             <p14:sldId id="3528"/>
             <p14:sldId id="3527"/>
             <p14:sldId id="3518"/>
@@ -253,7 +257,7 @@
           <a:p>
             <a:fld id="{982F7CBC-87DD-4F69-8F50-7ED68F7FF790}" type="datetimeFigureOut">
               <a:rPr lang="zh-TW" altLang="en-US" smtClean="0"/>
-              <a:t>2026/7/27</a:t>
+              <a:t>2026/7/28</a:t>
             </a:fld>
             <a:endParaRPr lang="zh-TW" altLang="en-US"/>
           </a:p>
@@ -430,7 +434,7 @@
           <a:p>
             <a:fld id="{863167AA-796B-4B6A-95ED-1C0BCB3E5802}" type="datetimeFigureOut">
               <a:rPr lang="zh-TW" altLang="en-US" smtClean="0"/>
-              <a:t>2026/7/27</a:t>
+              <a:t>2026/7/28</a:t>
             </a:fld>
             <a:endParaRPr lang="zh-TW" altLang="en-US"/>
           </a:p>
@@ -3432,6 +3436,16 @@
               </a:lnSpc>
             </a:pPr>
             <a:r>
+              <a:rPr lang="en-US" altLang="zh-TW" sz="1200" dirty="0">
+                <a:solidFill>
+                  <a:schemeClr val="tx1"/>
+                </a:solidFill>
+                <a:latin typeface="微軟正黑體" panose="020B0604030504040204" pitchFamily="34" charset="-120"/>
+                <a:ea typeface="微軟正黑體" panose="020B0604030504040204" pitchFamily="34" charset="-120"/>
+              </a:rPr>
+              <a:t>1.</a:t>
+            </a:r>
+            <a:r>
               <a:rPr lang="zh-TW" altLang="en-US" sz="1200" dirty="0">
                 <a:solidFill>
                   <a:schemeClr val="tx1"/>
@@ -3439,7 +3453,7 @@
                 <a:latin typeface="微軟正黑體" panose="020B0604030504040204" pitchFamily="34" charset="-120"/>
                 <a:ea typeface="微軟正黑體" panose="020B0604030504040204" pitchFamily="34" charset="-120"/>
               </a:rPr>
-              <a:t>針對基因分型</a:t>
+              <a:t> 針對基因分型</a:t>
             </a:r>
             <a:r>
               <a:rPr lang="en-US" altLang="zh-TW" sz="1200" dirty="0">
@@ -3499,6 +3513,16 @@
               </a:lnSpc>
             </a:pPr>
             <a:r>
+              <a:rPr lang="en-US" altLang="zh-TW" sz="1200" dirty="0">
+                <a:solidFill>
+                  <a:schemeClr val="tx1"/>
+                </a:solidFill>
+                <a:latin typeface="微軟正黑體" panose="020B0604030504040204" pitchFamily="34" charset="-120"/>
+                <a:ea typeface="微軟正黑體" panose="020B0604030504040204" pitchFamily="34" charset="-120"/>
+              </a:rPr>
+              <a:t>2.</a:t>
+            </a:r>
+            <a:r>
               <a:rPr lang="zh-TW" altLang="en-US" sz="1200" dirty="0">
                 <a:solidFill>
                   <a:schemeClr val="tx1"/>
@@ -3506,7 +3530,7 @@
                 <a:latin typeface="微軟正黑體" panose="020B0604030504040204" pitchFamily="34" charset="-120"/>
                 <a:ea typeface="微軟正黑體" panose="020B0604030504040204" pitchFamily="34" charset="-120"/>
               </a:rPr>
-              <a:t>使用</a:t>
+              <a:t> 使用</a:t>
             </a:r>
             <a:r>
               <a:rPr lang="en-US" altLang="zh-TW" sz="1200" dirty="0" err="1">
@@ -3527,6 +3551,26 @@
                 <a:ea typeface="微軟正黑體" panose="020B0604030504040204" pitchFamily="34" charset="-120"/>
               </a:rPr>
               <a:t>的微調學習</a:t>
+            </a:r>
+            <a:r>
+              <a:rPr lang="en-US" altLang="zh-TW" sz="1200" dirty="0">
+                <a:solidFill>
+                  <a:schemeClr val="tx1"/>
+                </a:solidFill>
+                <a:latin typeface="微軟正黑體" panose="020B0604030504040204" pitchFamily="34" charset="-120"/>
+                <a:ea typeface="微軟正黑體" panose="020B0604030504040204" pitchFamily="34" charset="-120"/>
+              </a:rPr>
+              <a:t>:</a:t>
+            </a:r>
+            <a:r>
+              <a:rPr lang="zh-TW" altLang="en-US" sz="1200" dirty="0">
+                <a:solidFill>
+                  <a:schemeClr val="tx1"/>
+                </a:solidFill>
+                <a:latin typeface="微軟正黑體" panose="020B0604030504040204" pitchFamily="34" charset="-120"/>
+                <a:ea typeface="微軟正黑體" panose="020B0604030504040204" pitchFamily="34" charset="-120"/>
+              </a:rPr>
+              <a:t> </a:t>
             </a:r>
             <a:endParaRPr lang="en-US" altLang="zh-TW" sz="1200" dirty="0">
               <a:solidFill>
@@ -3550,7 +3594,7 @@
                 <a:latin typeface="微軟正黑體" panose="020B0604030504040204" pitchFamily="34" charset="-120"/>
                 <a:ea typeface="微軟正黑體" panose="020B0604030504040204" pitchFamily="34" charset="-120"/>
               </a:rPr>
-              <a:t>使用開放資料庫</a:t>
+              <a:t>調用公開資料庫</a:t>
             </a:r>
             <a:r>
               <a:rPr lang="en-US" altLang="zh-TW" sz="1200" dirty="0">
@@ -3560,7 +3604,7 @@
                 <a:latin typeface="微軟正黑體" panose="020B0604030504040204" pitchFamily="34" charset="-120"/>
                 <a:ea typeface="微軟正黑體" panose="020B0604030504040204" pitchFamily="34" charset="-120"/>
               </a:rPr>
-              <a:t>:</a:t>
+              <a:t>(</a:t>
             </a:r>
             <a:r>
               <a:rPr lang="zh-TW" altLang="en-US" sz="1200" dirty="0">
@@ -3570,7 +3614,7 @@
                 <a:latin typeface="微軟正黑體" panose="020B0604030504040204" pitchFamily="34" charset="-120"/>
                 <a:ea typeface="微軟正黑體" panose="020B0604030504040204" pitchFamily="34" charset="-120"/>
               </a:rPr>
-              <a:t> 遠端數據與資料</a:t>
+              <a:t>遠端數據與資料</a:t>
             </a:r>
             <a:r>
               <a:rPr lang="en-US" altLang="zh-TW" sz="1200" dirty="0">
@@ -3580,7 +3624,7 @@
                 <a:latin typeface="微軟正黑體" panose="020B0604030504040204" pitchFamily="34" charset="-120"/>
                 <a:ea typeface="微軟正黑體" panose="020B0604030504040204" pitchFamily="34" charset="-120"/>
               </a:rPr>
-              <a:t>,</a:t>
+              <a:t>),</a:t>
             </a:r>
           </a:p>
         </p:txBody>
@@ -3888,95 +3932,6 @@
           <a:chExt cx="0" cy="0"/>
         </a:xfrm>
       </p:grpSpPr>
-      <p:sp>
-        <p:nvSpPr>
-          <p:cNvPr id="19" name="矩形 18">
-            <a:extLst>
-              <a:ext uri="{FF2B5EF4-FFF2-40B4-BE49-F238E27FC236}">
-                <a16:creationId xmlns:a16="http://schemas.microsoft.com/office/drawing/2014/main" id="{AF063FFB-DEF3-78C2-3B65-BE63A1A8E53F}"/>
-              </a:ext>
-            </a:extLst>
-          </p:cNvPr>
-          <p:cNvSpPr/>
-          <p:nvPr/>
-        </p:nvSpPr>
-        <p:spPr>
-          <a:xfrm>
-            <a:off x="5574753" y="1603184"/>
-            <a:ext cx="1229495" cy="720080"/>
-          </a:xfrm>
-          <a:prstGeom prst="rect">
-            <a:avLst/>
-          </a:prstGeom>
-          <a:solidFill>
-            <a:schemeClr val="accent3">
-              <a:lumMod val="20000"/>
-              <a:lumOff val="80000"/>
-            </a:schemeClr>
-          </a:solidFill>
-          <a:ln w="12700">
-            <a:solidFill>
-              <a:srgbClr val="92D050"/>
-            </a:solidFill>
-          </a:ln>
-        </p:spPr>
-        <p:style>
-          <a:lnRef idx="2">
-            <a:schemeClr val="accent1">
-              <a:shade val="15000"/>
-            </a:schemeClr>
-          </a:lnRef>
-          <a:fillRef idx="1">
-            <a:schemeClr val="accent1"/>
-          </a:fillRef>
-          <a:effectRef idx="0">
-            <a:schemeClr val="accent1"/>
-          </a:effectRef>
-          <a:fontRef idx="minor">
-            <a:schemeClr val="lt1"/>
-          </a:fontRef>
-        </p:style>
-        <p:txBody>
-          <a:bodyPr wrap="none" lIns="91440" tIns="0" rIns="0" bIns="0" rtlCol="0" anchor="ctr" anchorCtr="0"/>
-          <a:lstStyle/>
-          <a:p>
-            <a:pPr>
-              <a:lnSpc>
-                <a:spcPts val="1600"/>
-              </a:lnSpc>
-            </a:pPr>
-            <a:r>
-              <a:rPr lang="en-US" altLang="zh-TW" sz="1200" dirty="0">
-                <a:solidFill>
-                  <a:schemeClr val="tx1"/>
-                </a:solidFill>
-                <a:latin typeface="ADLaM Display" panose="02010000000000000000" pitchFamily="2" charset="0"/>
-                <a:ea typeface="ADLaM Display" panose="02010000000000000000" pitchFamily="2" charset="0"/>
-                <a:cs typeface="ADLaM Display" panose="02010000000000000000" pitchFamily="2" charset="0"/>
-              </a:rPr>
-              <a:t>Public</a:t>
-            </a:r>
-          </a:p>
-          <a:p>
-            <a:pPr>
-              <a:lnSpc>
-                <a:spcPts val="1600"/>
-              </a:lnSpc>
-            </a:pPr>
-            <a:r>
-              <a:rPr lang="en-US" altLang="zh-TW" sz="1200" dirty="0">
-                <a:solidFill>
-                  <a:schemeClr val="tx1"/>
-                </a:solidFill>
-                <a:latin typeface="ADLaM Display" panose="02010000000000000000" pitchFamily="2" charset="0"/>
-                <a:ea typeface="ADLaM Display" panose="02010000000000000000" pitchFamily="2" charset="0"/>
-                <a:cs typeface="ADLaM Display" panose="02010000000000000000" pitchFamily="2" charset="0"/>
-              </a:rPr>
-              <a:t>Database</a:t>
-            </a:r>
-          </a:p>
-        </p:txBody>
-      </p:sp>
       <p:sp>
         <p:nvSpPr>
           <p:cNvPr id="12" name="矩形 11">
@@ -5847,7 +5802,7 @@
         </p:blipFill>
         <p:spPr>
           <a:xfrm>
-            <a:off x="6290798" y="1706499"/>
+            <a:off x="5459888" y="1699852"/>
             <a:ext cx="513450" cy="513450"/>
           </a:xfrm>
           <a:prstGeom prst="rect">
@@ -5855,6 +5810,56 @@
           </a:prstGeom>
         </p:spPr>
       </p:pic>
+      <p:sp>
+        <p:nvSpPr>
+          <p:cNvPr id="26" name="右大括弧 25">
+            <a:extLst>
+              <a:ext uri="{FF2B5EF4-FFF2-40B4-BE49-F238E27FC236}">
+                <a16:creationId xmlns:a16="http://schemas.microsoft.com/office/drawing/2014/main" id="{7EE880E3-65D9-4BC5-9BF9-44D219BEE23E}"/>
+              </a:ext>
+            </a:extLst>
+          </p:cNvPr>
+          <p:cNvSpPr/>
+          <p:nvPr/>
+        </p:nvSpPr>
+        <p:spPr>
+          <a:xfrm rot="16200000">
+            <a:off x="5776590" y="5515156"/>
+            <a:ext cx="85362" cy="1385657"/>
+          </a:xfrm>
+          <a:prstGeom prst="rightBrace">
+            <a:avLst/>
+          </a:prstGeom>
+          <a:noFill/>
+          <a:ln>
+            <a:solidFill>
+              <a:schemeClr val="tx1"/>
+            </a:solidFill>
+          </a:ln>
+        </p:spPr>
+        <p:style>
+          <a:lnRef idx="1">
+            <a:schemeClr val="accent1"/>
+          </a:lnRef>
+          <a:fillRef idx="0">
+            <a:schemeClr val="accent1"/>
+          </a:fillRef>
+          <a:effectRef idx="0">
+            <a:schemeClr val="accent1"/>
+          </a:effectRef>
+          <a:fontRef idx="minor">
+            <a:schemeClr val="tx1"/>
+          </a:fontRef>
+        </p:style>
+        <p:txBody>
+          <a:bodyPr rtlCol="0" anchor="ctr"/>
+          <a:lstStyle/>
+          <a:p>
+            <a:pPr algn="ctr"/>
+            <a:endParaRPr lang="zh-TW" altLang="en-US" dirty="0"/>
+          </a:p>
+        </p:txBody>
+      </p:sp>
     </p:spTree>
     <p:extLst>
       <p:ext uri="{BB962C8B-B14F-4D97-AF65-F5344CB8AC3E}">
@@ -5881,6 +5886,2150 @@
 </file>
 
 <file path=ppt/slides/slide4.xml><?xml version="1.0" encoding="utf-8"?>
+<p:sld xmlns:a="http://schemas.openxmlformats.org/drawingml/2006/main" xmlns:r="http://schemas.openxmlformats.org/officeDocument/2006/relationships" xmlns:p="http://schemas.openxmlformats.org/presentationml/2006/main">
+  <p:cSld>
+    <p:spTree>
+      <p:nvGrpSpPr>
+        <p:cNvPr id="1" name="">
+          <a:extLst>
+            <a:ext uri="{FF2B5EF4-FFF2-40B4-BE49-F238E27FC236}">
+              <a16:creationId xmlns:a16="http://schemas.microsoft.com/office/drawing/2014/main" id="{FCA01079-BD53-8815-A72F-FDC0CB2B7BD5}"/>
+            </a:ext>
+          </a:extLst>
+        </p:cNvPr>
+        <p:cNvGrpSpPr/>
+        <p:nvPr/>
+      </p:nvGrpSpPr>
+      <p:grpSpPr>
+        <a:xfrm>
+          <a:off x="0" y="0"/>
+          <a:ext cx="0" cy="0"/>
+          <a:chOff x="0" y="0"/>
+          <a:chExt cx="0" cy="0"/>
+        </a:xfrm>
+      </p:grpSpPr>
+      <p:sp>
+        <p:nvSpPr>
+          <p:cNvPr id="19" name="矩形 18">
+            <a:extLst>
+              <a:ext uri="{FF2B5EF4-FFF2-40B4-BE49-F238E27FC236}">
+                <a16:creationId xmlns:a16="http://schemas.microsoft.com/office/drawing/2014/main" id="{16A0EE13-83C7-A75B-B783-29616C77D97D}"/>
+              </a:ext>
+            </a:extLst>
+          </p:cNvPr>
+          <p:cNvSpPr/>
+          <p:nvPr/>
+        </p:nvSpPr>
+        <p:spPr>
+          <a:xfrm>
+            <a:off x="4204321" y="755419"/>
+            <a:ext cx="1844242" cy="274677"/>
+          </a:xfrm>
+          <a:prstGeom prst="rect">
+            <a:avLst/>
+          </a:prstGeom>
+          <a:noFill/>
+          <a:ln w="12700">
+            <a:noFill/>
+          </a:ln>
+        </p:spPr>
+        <p:style>
+          <a:lnRef idx="2">
+            <a:schemeClr val="accent1">
+              <a:shade val="15000"/>
+            </a:schemeClr>
+          </a:lnRef>
+          <a:fillRef idx="1">
+            <a:schemeClr val="accent1"/>
+          </a:fillRef>
+          <a:effectRef idx="0">
+            <a:schemeClr val="accent1"/>
+          </a:effectRef>
+          <a:fontRef idx="minor">
+            <a:schemeClr val="lt1"/>
+          </a:fontRef>
+        </p:style>
+        <p:txBody>
+          <a:bodyPr wrap="none" lIns="91440" tIns="0" rIns="0" bIns="0" rtlCol="0" anchor="ctr" anchorCtr="0"/>
+          <a:lstStyle/>
+          <a:p>
+            <a:pPr algn="ctr">
+              <a:lnSpc>
+                <a:spcPts val="1600"/>
+              </a:lnSpc>
+            </a:pPr>
+            <a:r>
+              <a:rPr lang="en-US" altLang="zh-TW" sz="1200" dirty="0">
+                <a:solidFill>
+                  <a:schemeClr val="tx1"/>
+                </a:solidFill>
+                <a:latin typeface="ADLaM Display" panose="02010000000000000000" pitchFamily="2" charset="0"/>
+                <a:ea typeface="ADLaM Display" panose="02010000000000000000" pitchFamily="2" charset="0"/>
+                <a:cs typeface="ADLaM Display" panose="02010000000000000000" pitchFamily="2" charset="0"/>
+              </a:rPr>
+              <a:t>Apollo-Corpus</a:t>
+            </a:r>
+          </a:p>
+        </p:txBody>
+      </p:sp>
+      <p:sp>
+        <p:nvSpPr>
+          <p:cNvPr id="37" name="矩形 36">
+            <a:extLst>
+              <a:ext uri="{FF2B5EF4-FFF2-40B4-BE49-F238E27FC236}">
+                <a16:creationId xmlns:a16="http://schemas.microsoft.com/office/drawing/2014/main" id="{A0C3C4DC-8B4F-7148-E009-134858223D4E}"/>
+              </a:ext>
+            </a:extLst>
+          </p:cNvPr>
+          <p:cNvSpPr/>
+          <p:nvPr/>
+        </p:nvSpPr>
+        <p:spPr>
+          <a:xfrm>
+            <a:off x="2281896" y="4424279"/>
+            <a:ext cx="3033034" cy="1185267"/>
+          </a:xfrm>
+          <a:prstGeom prst="rect">
+            <a:avLst/>
+          </a:prstGeom>
+          <a:noFill/>
+          <a:ln w="38100">
+            <a:solidFill>
+              <a:schemeClr val="tx2">
+                <a:lumMod val="20000"/>
+                <a:lumOff val="80000"/>
+              </a:schemeClr>
+            </a:solidFill>
+          </a:ln>
+        </p:spPr>
+        <p:style>
+          <a:lnRef idx="2">
+            <a:schemeClr val="accent1">
+              <a:shade val="15000"/>
+            </a:schemeClr>
+          </a:lnRef>
+          <a:fillRef idx="1">
+            <a:schemeClr val="accent1"/>
+          </a:fillRef>
+          <a:effectRef idx="0">
+            <a:schemeClr val="accent1"/>
+          </a:effectRef>
+          <a:fontRef idx="minor">
+            <a:schemeClr val="lt1"/>
+          </a:fontRef>
+        </p:style>
+        <p:txBody>
+          <a:bodyPr wrap="none" lIns="36000" tIns="0" rIns="0" bIns="0" rtlCol="0" anchor="ctr" anchorCtr="0"/>
+          <a:lstStyle/>
+          <a:p>
+            <a:pPr>
+              <a:lnSpc>
+                <a:spcPts val="1600"/>
+              </a:lnSpc>
+            </a:pPr>
+            <a:r>
+              <a:rPr lang="en-US" altLang="zh-TW" sz="1200" dirty="0">
+                <a:solidFill>
+                  <a:schemeClr val="tx2"/>
+                </a:solidFill>
+                <a:latin typeface="ADLaM Display" panose="02010000000000000000" pitchFamily="2" charset="0"/>
+                <a:ea typeface="ADLaM Display" panose="02010000000000000000" pitchFamily="2" charset="0"/>
+                <a:cs typeface="ADLaM Display" panose="02010000000000000000" pitchFamily="2" charset="0"/>
+              </a:rPr>
+              <a:t>Public Database</a:t>
+            </a:r>
+          </a:p>
+          <a:p>
+            <a:pPr>
+              <a:lnSpc>
+                <a:spcPts val="1600"/>
+              </a:lnSpc>
+            </a:pPr>
+            <a:r>
+              <a:rPr lang="en-US" altLang="zh-TW" sz="1200" dirty="0">
+                <a:solidFill>
+                  <a:schemeClr val="tx2"/>
+                </a:solidFill>
+                <a:ea typeface="ADLaM Display" panose="02010000000000000000" pitchFamily="2" charset="0"/>
+                <a:cs typeface="ADLaM Display" panose="02010000000000000000" pitchFamily="2" charset="0"/>
+              </a:rPr>
+              <a:t>* RegulomeDB (Stanford University)</a:t>
+            </a:r>
+          </a:p>
+          <a:p>
+            <a:pPr>
+              <a:lnSpc>
+                <a:spcPts val="1600"/>
+              </a:lnSpc>
+            </a:pPr>
+            <a:r>
+              <a:rPr lang="en-US" altLang="zh-TW" sz="1200" dirty="0">
+                <a:solidFill>
+                  <a:schemeClr val="tx2"/>
+                </a:solidFill>
+                <a:ea typeface="ADLaM Display" panose="02010000000000000000" pitchFamily="2" charset="0"/>
+                <a:cs typeface="ADLaM Display" panose="02010000000000000000" pitchFamily="2" charset="0"/>
+              </a:rPr>
+              <a:t>* GTEx Portal (Single-Cell Gene Expression Data)</a:t>
+            </a:r>
+          </a:p>
+          <a:p>
+            <a:pPr>
+              <a:lnSpc>
+                <a:spcPts val="1600"/>
+              </a:lnSpc>
+            </a:pPr>
+            <a:r>
+              <a:rPr lang="en-US" altLang="zh-TW" sz="1200" dirty="0">
+                <a:solidFill>
+                  <a:schemeClr val="tx2"/>
+                </a:solidFill>
+                <a:ea typeface="ADLaM Display" panose="02010000000000000000" pitchFamily="2" charset="0"/>
+                <a:cs typeface="ADLaM Display" panose="02010000000000000000" pitchFamily="2" charset="0"/>
+              </a:rPr>
+              <a:t>* Ensembl Regulation (EBI/Sanger)</a:t>
+            </a:r>
+          </a:p>
+        </p:txBody>
+      </p:sp>
+      <p:sp>
+        <p:nvSpPr>
+          <p:cNvPr id="6" name="標題 1">
+            <a:extLst>
+              <a:ext uri="{FF2B5EF4-FFF2-40B4-BE49-F238E27FC236}">
+                <a16:creationId xmlns:a16="http://schemas.microsoft.com/office/drawing/2014/main" id="{50FD3551-DEE5-3094-BB6E-B7F9B42C5F46}"/>
+              </a:ext>
+            </a:extLst>
+          </p:cNvPr>
+          <p:cNvSpPr txBox="1">
+            <a:spLocks/>
+          </p:cNvSpPr>
+          <p:nvPr/>
+        </p:nvSpPr>
+        <p:spPr>
+          <a:xfrm>
+            <a:off x="179512" y="116632"/>
+            <a:ext cx="7713554" cy="612186"/>
+          </a:xfrm>
+          <a:prstGeom prst="rect">
+            <a:avLst/>
+          </a:prstGeom>
+        </p:spPr>
+        <p:txBody>
+          <a:bodyPr/>
+          <a:lstStyle>
+            <a:lvl1pPr algn="l" defTabSz="914400" rtl="0" eaLnBrk="1" latinLnBrk="0" hangingPunct="1">
+              <a:spcBef>
+                <a:spcPct val="0"/>
+              </a:spcBef>
+              <a:buNone/>
+              <a:defRPr sz="2400" kern="1200">
+                <a:solidFill>
+                  <a:schemeClr val="tx1"/>
+                </a:solidFill>
+                <a:latin typeface="+mj-lt"/>
+                <a:ea typeface="+mj-ea"/>
+                <a:cs typeface="+mj-cs"/>
+              </a:defRPr>
+            </a:lvl1pPr>
+          </a:lstStyle>
+          <a:p>
+            <a:r>
+              <a:rPr lang="en-US" altLang="zh-TW" sz="2800" dirty="0">
+                <a:latin typeface="Noto Sans HK" panose="020B0200000000000000" pitchFamily="34" charset="-120"/>
+                <a:ea typeface="Noto Sans HK" panose="020B0200000000000000" pitchFamily="34" charset="-120"/>
+                <a:cs typeface="Aharoni" panose="020F0502020204030204" pitchFamily="2" charset="-79"/>
+                <a:sym typeface="Wingdings" panose="05000000000000000000" pitchFamily="2" charset="2"/>
+              </a:rPr>
+              <a:t>Fine-Tunning</a:t>
+            </a:r>
+          </a:p>
+          <a:p>
+            <a:endParaRPr lang="en-US" altLang="zh-TW" sz="1400" dirty="0">
+              <a:latin typeface="Noto Sans HK" panose="020B0200000000000000" pitchFamily="34" charset="-120"/>
+              <a:ea typeface="Noto Sans HK" panose="020B0200000000000000" pitchFamily="34" charset="-120"/>
+              <a:cs typeface="Arial" panose="020B0604020202020204" pitchFamily="34" charset="0"/>
+            </a:endParaRPr>
+          </a:p>
+        </p:txBody>
+      </p:sp>
+      <p:pic>
+        <p:nvPicPr>
+          <p:cNvPr id="24" name="圖形 23" descr="資料庫 以實心填滿">
+            <a:extLst>
+              <a:ext uri="{FF2B5EF4-FFF2-40B4-BE49-F238E27FC236}">
+                <a16:creationId xmlns:a16="http://schemas.microsoft.com/office/drawing/2014/main" id="{E1DE9328-A7AA-C920-A428-9EA723534132}"/>
+              </a:ext>
+            </a:extLst>
+          </p:cNvPr>
+          <p:cNvPicPr>
+            <a:picLocks noChangeAspect="1"/>
+          </p:cNvPicPr>
+          <p:nvPr/>
+        </p:nvPicPr>
+        <p:blipFill>
+          <a:blip>
+            <a:extLst>
+              <a:ext uri="{96DAC541-7B7A-43D3-8B79-37D633B846F1}">
+                <asvg:svgBlip xmlns:asvg="http://schemas.microsoft.com/office/drawing/2016/SVG/main" r:embed="rId2"/>
+              </a:ext>
+            </a:extLst>
+          </a:blip>
+          <a:stretch>
+            <a:fillRect/>
+          </a:stretch>
+        </p:blipFill>
+        <p:spPr>
+          <a:xfrm>
+            <a:off x="5887095" y="1827319"/>
+            <a:ext cx="513450" cy="513450"/>
+          </a:xfrm>
+          <a:prstGeom prst="rect">
+            <a:avLst/>
+          </a:prstGeom>
+        </p:spPr>
+      </p:pic>
+      <p:sp>
+        <p:nvSpPr>
+          <p:cNvPr id="27" name="矩形 26">
+            <a:extLst>
+              <a:ext uri="{FF2B5EF4-FFF2-40B4-BE49-F238E27FC236}">
+                <a16:creationId xmlns:a16="http://schemas.microsoft.com/office/drawing/2014/main" id="{E39DE903-A55C-8698-235D-E9279F6AC1C0}"/>
+              </a:ext>
+            </a:extLst>
+          </p:cNvPr>
+          <p:cNvSpPr/>
+          <p:nvPr/>
+        </p:nvSpPr>
+        <p:spPr>
+          <a:xfrm>
+            <a:off x="6189500" y="3850777"/>
+            <a:ext cx="1229495" cy="720080"/>
+          </a:xfrm>
+          <a:prstGeom prst="rect">
+            <a:avLst/>
+          </a:prstGeom>
+          <a:noFill/>
+          <a:ln w="12700">
+            <a:noFill/>
+          </a:ln>
+        </p:spPr>
+        <p:style>
+          <a:lnRef idx="2">
+            <a:schemeClr val="accent1">
+              <a:shade val="15000"/>
+            </a:schemeClr>
+          </a:lnRef>
+          <a:fillRef idx="1">
+            <a:schemeClr val="accent1"/>
+          </a:fillRef>
+          <a:effectRef idx="0">
+            <a:schemeClr val="accent1"/>
+          </a:effectRef>
+          <a:fontRef idx="minor">
+            <a:schemeClr val="lt1"/>
+          </a:fontRef>
+        </p:style>
+        <p:txBody>
+          <a:bodyPr wrap="none" lIns="91440" tIns="0" rIns="0" bIns="0" rtlCol="0" anchor="ctr" anchorCtr="0"/>
+          <a:lstStyle/>
+          <a:p>
+            <a:pPr>
+              <a:lnSpc>
+                <a:spcPts val="1600"/>
+              </a:lnSpc>
+            </a:pPr>
+            <a:endParaRPr lang="en-US" altLang="zh-TW" sz="1200" dirty="0">
+              <a:solidFill>
+                <a:schemeClr val="tx1"/>
+              </a:solidFill>
+              <a:latin typeface="ADLaM Display" panose="02010000000000000000" pitchFamily="2" charset="0"/>
+              <a:ea typeface="ADLaM Display" panose="02010000000000000000" pitchFamily="2" charset="0"/>
+              <a:cs typeface="ADLaM Display" panose="02010000000000000000" pitchFamily="2" charset="0"/>
+            </a:endParaRPr>
+          </a:p>
+          <a:p>
+            <a:pPr>
+              <a:lnSpc>
+                <a:spcPts val="1600"/>
+              </a:lnSpc>
+            </a:pPr>
+            <a:r>
+              <a:rPr lang="en-US" altLang="zh-TW" sz="1200" dirty="0">
+                <a:solidFill>
+                  <a:schemeClr val="tx1"/>
+                </a:solidFill>
+                <a:latin typeface="ADLaM Display" panose="02010000000000000000" pitchFamily="2" charset="0"/>
+                <a:ea typeface="ADLaM Display" panose="02010000000000000000" pitchFamily="2" charset="0"/>
+                <a:cs typeface="ADLaM Display" panose="02010000000000000000" pitchFamily="2" charset="0"/>
+              </a:rPr>
+              <a:t>Apollo-Corpus</a:t>
+            </a:r>
+          </a:p>
+          <a:p>
+            <a:pPr>
+              <a:lnSpc>
+                <a:spcPts val="1600"/>
+              </a:lnSpc>
+            </a:pPr>
+            <a:r>
+              <a:rPr lang="en-US" altLang="zh-TW" sz="1200" dirty="0" err="1">
+                <a:solidFill>
+                  <a:schemeClr val="tx1"/>
+                </a:solidFill>
+                <a:latin typeface="ADLaM Display" panose="02010000000000000000" pitchFamily="2" charset="0"/>
+                <a:ea typeface="ADLaM Display" panose="02010000000000000000" pitchFamily="2" charset="0"/>
+                <a:cs typeface="ADLaM Display" panose="02010000000000000000" pitchFamily="2" charset="0"/>
+              </a:rPr>
+              <a:t>MedQA</a:t>
+            </a:r>
+            <a:r>
+              <a:rPr lang="en-US" altLang="zh-TW" sz="1200" dirty="0">
+                <a:solidFill>
+                  <a:schemeClr val="tx1"/>
+                </a:solidFill>
+                <a:latin typeface="ADLaM Display" panose="02010000000000000000" pitchFamily="2" charset="0"/>
+                <a:ea typeface="ADLaM Display" panose="02010000000000000000" pitchFamily="2" charset="0"/>
+                <a:cs typeface="ADLaM Display" panose="02010000000000000000" pitchFamily="2" charset="0"/>
+              </a:rPr>
+              <a:t>/USMLE</a:t>
+            </a:r>
+          </a:p>
+        </p:txBody>
+      </p:sp>
+      <p:sp>
+        <p:nvSpPr>
+          <p:cNvPr id="30" name="右大括弧 29">
+            <a:extLst>
+              <a:ext uri="{FF2B5EF4-FFF2-40B4-BE49-F238E27FC236}">
+                <a16:creationId xmlns:a16="http://schemas.microsoft.com/office/drawing/2014/main" id="{20607DF1-B775-F356-AAE2-424FB0B3FE4C}"/>
+              </a:ext>
+            </a:extLst>
+          </p:cNvPr>
+          <p:cNvSpPr/>
+          <p:nvPr/>
+        </p:nvSpPr>
+        <p:spPr>
+          <a:xfrm rot="16200000">
+            <a:off x="5776590" y="5515156"/>
+            <a:ext cx="85362" cy="1385657"/>
+          </a:xfrm>
+          <a:prstGeom prst="rightBrace">
+            <a:avLst/>
+          </a:prstGeom>
+          <a:noFill/>
+          <a:ln>
+            <a:solidFill>
+              <a:schemeClr val="tx1"/>
+            </a:solidFill>
+          </a:ln>
+        </p:spPr>
+        <p:style>
+          <a:lnRef idx="1">
+            <a:schemeClr val="accent1"/>
+          </a:lnRef>
+          <a:fillRef idx="0">
+            <a:schemeClr val="accent1"/>
+          </a:fillRef>
+          <a:effectRef idx="0">
+            <a:schemeClr val="accent1"/>
+          </a:effectRef>
+          <a:fontRef idx="minor">
+            <a:schemeClr val="tx1"/>
+          </a:fontRef>
+        </p:style>
+        <p:txBody>
+          <a:bodyPr rtlCol="0" anchor="ctr"/>
+          <a:lstStyle/>
+          <a:p>
+            <a:pPr algn="ctr"/>
+            <a:endParaRPr lang="zh-TW" altLang="en-US" dirty="0"/>
+          </a:p>
+        </p:txBody>
+      </p:sp>
+      <p:sp>
+        <p:nvSpPr>
+          <p:cNvPr id="32" name="矩形 31">
+            <a:extLst>
+              <a:ext uri="{FF2B5EF4-FFF2-40B4-BE49-F238E27FC236}">
+                <a16:creationId xmlns:a16="http://schemas.microsoft.com/office/drawing/2014/main" id="{997F3F11-5054-FCE8-0CBC-0AF4564FB2CD}"/>
+              </a:ext>
+            </a:extLst>
+          </p:cNvPr>
+          <p:cNvSpPr/>
+          <p:nvPr/>
+        </p:nvSpPr>
+        <p:spPr>
+          <a:xfrm>
+            <a:off x="3649100" y="3288783"/>
+            <a:ext cx="1845800" cy="274677"/>
+          </a:xfrm>
+          <a:prstGeom prst="rect">
+            <a:avLst/>
+          </a:prstGeom>
+          <a:noFill/>
+          <a:ln w="12700">
+            <a:noFill/>
+          </a:ln>
+        </p:spPr>
+        <p:style>
+          <a:lnRef idx="2">
+            <a:schemeClr val="accent1">
+              <a:shade val="15000"/>
+            </a:schemeClr>
+          </a:lnRef>
+          <a:fillRef idx="1">
+            <a:schemeClr val="accent1"/>
+          </a:fillRef>
+          <a:effectRef idx="0">
+            <a:schemeClr val="accent1"/>
+          </a:effectRef>
+          <a:fontRef idx="minor">
+            <a:schemeClr val="lt1"/>
+          </a:fontRef>
+        </p:style>
+        <p:txBody>
+          <a:bodyPr wrap="none" lIns="91440" tIns="0" rIns="0" bIns="0" rtlCol="0" anchor="ctr" anchorCtr="0"/>
+          <a:lstStyle/>
+          <a:p>
+            <a:pPr>
+              <a:lnSpc>
+                <a:spcPts val="1600"/>
+              </a:lnSpc>
+            </a:pPr>
+            <a:r>
+              <a:rPr lang="en-US" altLang="zh-TW" sz="1200" dirty="0">
+                <a:solidFill>
+                  <a:schemeClr val="tx1"/>
+                </a:solidFill>
+                <a:latin typeface="ADLaM Display" panose="02010000000000000000" pitchFamily="2" charset="0"/>
+                <a:ea typeface="ADLaM Display" panose="02010000000000000000" pitchFamily="2" charset="0"/>
+                <a:cs typeface="ADLaM Display" panose="02010000000000000000" pitchFamily="2" charset="0"/>
+              </a:rPr>
+              <a:t>Genomic Variants</a:t>
+            </a:r>
+            <a:r>
+              <a:rPr lang="zh-TW" altLang="en-US" sz="1200" dirty="0">
+                <a:solidFill>
+                  <a:schemeClr val="tx1"/>
+                </a:solidFill>
+                <a:latin typeface="ADLaM Display" panose="02010000000000000000" pitchFamily="2" charset="0"/>
+                <a:ea typeface="ADLaM Display" panose="02010000000000000000" pitchFamily="2" charset="0"/>
+                <a:cs typeface="ADLaM Display" panose="02010000000000000000" pitchFamily="2" charset="0"/>
+              </a:rPr>
+              <a:t> </a:t>
+            </a:r>
+            <a:r>
+              <a:rPr lang="en-US" altLang="zh-TW" sz="1200" dirty="0">
+                <a:solidFill>
+                  <a:schemeClr val="tx1"/>
+                </a:solidFill>
+                <a:latin typeface="ADLaM Display" panose="02010000000000000000" pitchFamily="2" charset="0"/>
+                <a:ea typeface="ADLaM Display" panose="02010000000000000000" pitchFamily="2" charset="0"/>
+                <a:cs typeface="ADLaM Display" panose="02010000000000000000" pitchFamily="2" charset="0"/>
+              </a:rPr>
+              <a:t>API</a:t>
+            </a:r>
+          </a:p>
+        </p:txBody>
+      </p:sp>
+      <p:sp>
+        <p:nvSpPr>
+          <p:cNvPr id="34" name="矩形 33">
+            <a:extLst>
+              <a:ext uri="{FF2B5EF4-FFF2-40B4-BE49-F238E27FC236}">
+                <a16:creationId xmlns:a16="http://schemas.microsoft.com/office/drawing/2014/main" id="{7784ABEE-3F74-DE7B-31A6-83D584C0A7FF}"/>
+              </a:ext>
+            </a:extLst>
+          </p:cNvPr>
+          <p:cNvSpPr/>
+          <p:nvPr/>
+        </p:nvSpPr>
+        <p:spPr>
+          <a:xfrm>
+            <a:off x="3649100" y="3593845"/>
+            <a:ext cx="1845800" cy="274677"/>
+          </a:xfrm>
+          <a:prstGeom prst="rect">
+            <a:avLst/>
+          </a:prstGeom>
+          <a:noFill/>
+          <a:ln w="12700">
+            <a:noFill/>
+          </a:ln>
+        </p:spPr>
+        <p:style>
+          <a:lnRef idx="2">
+            <a:schemeClr val="accent1">
+              <a:shade val="15000"/>
+            </a:schemeClr>
+          </a:lnRef>
+          <a:fillRef idx="1">
+            <a:schemeClr val="accent1"/>
+          </a:fillRef>
+          <a:effectRef idx="0">
+            <a:schemeClr val="accent1"/>
+          </a:effectRef>
+          <a:fontRef idx="minor">
+            <a:schemeClr val="lt1"/>
+          </a:fontRef>
+        </p:style>
+        <p:txBody>
+          <a:bodyPr wrap="none" lIns="91440" tIns="0" rIns="0" bIns="0" rtlCol="0" anchor="ctr" anchorCtr="0"/>
+          <a:lstStyle/>
+          <a:p>
+            <a:pPr>
+              <a:lnSpc>
+                <a:spcPts val="1600"/>
+              </a:lnSpc>
+            </a:pPr>
+            <a:r>
+              <a:rPr lang="en-US" altLang="zh-TW" sz="1200" dirty="0">
+                <a:solidFill>
+                  <a:schemeClr val="tx1"/>
+                </a:solidFill>
+                <a:latin typeface="ADLaM Display" panose="02010000000000000000" pitchFamily="2" charset="0"/>
+                <a:ea typeface="ADLaM Display" panose="02010000000000000000" pitchFamily="2" charset="0"/>
+                <a:cs typeface="ADLaM Display" panose="02010000000000000000" pitchFamily="2" charset="0"/>
+              </a:rPr>
+              <a:t>Research Articles</a:t>
+            </a:r>
+            <a:r>
+              <a:rPr lang="zh-TW" altLang="en-US" sz="1200" dirty="0">
+                <a:solidFill>
+                  <a:schemeClr val="tx1"/>
+                </a:solidFill>
+                <a:latin typeface="ADLaM Display" panose="02010000000000000000" pitchFamily="2" charset="0"/>
+                <a:ea typeface="ADLaM Display" panose="02010000000000000000" pitchFamily="2" charset="0"/>
+                <a:cs typeface="ADLaM Display" panose="02010000000000000000" pitchFamily="2" charset="0"/>
+              </a:rPr>
+              <a:t> </a:t>
+            </a:r>
+            <a:r>
+              <a:rPr lang="en-US" altLang="zh-TW" sz="1200" dirty="0">
+                <a:solidFill>
+                  <a:schemeClr val="tx1"/>
+                </a:solidFill>
+                <a:latin typeface="ADLaM Display" panose="02010000000000000000" pitchFamily="2" charset="0"/>
+                <a:ea typeface="ADLaM Display" panose="02010000000000000000" pitchFamily="2" charset="0"/>
+                <a:cs typeface="ADLaM Display" panose="02010000000000000000" pitchFamily="2" charset="0"/>
+              </a:rPr>
+              <a:t>API</a:t>
+            </a:r>
+          </a:p>
+        </p:txBody>
+      </p:sp>
+      <p:sp>
+        <p:nvSpPr>
+          <p:cNvPr id="38" name="矩形 37">
+            <a:extLst>
+              <a:ext uri="{FF2B5EF4-FFF2-40B4-BE49-F238E27FC236}">
+                <a16:creationId xmlns:a16="http://schemas.microsoft.com/office/drawing/2014/main" id="{2543ABFA-F7AA-406F-B195-6B4AC3E3305A}"/>
+              </a:ext>
+            </a:extLst>
+          </p:cNvPr>
+          <p:cNvSpPr/>
+          <p:nvPr/>
+        </p:nvSpPr>
+        <p:spPr>
+          <a:xfrm>
+            <a:off x="1444872" y="1570781"/>
+            <a:ext cx="859919" cy="307983"/>
+          </a:xfrm>
+          <a:prstGeom prst="rect">
+            <a:avLst/>
+          </a:prstGeom>
+          <a:solidFill>
+            <a:schemeClr val="accent1">
+              <a:lumMod val="20000"/>
+              <a:lumOff val="80000"/>
+              <a:alpha val="40000"/>
+            </a:schemeClr>
+          </a:solidFill>
+          <a:ln w="38100">
+            <a:solidFill>
+              <a:schemeClr val="tx2">
+                <a:lumMod val="60000"/>
+                <a:lumOff val="40000"/>
+                <a:alpha val="40000"/>
+              </a:schemeClr>
+            </a:solidFill>
+          </a:ln>
+        </p:spPr>
+        <p:style>
+          <a:lnRef idx="2">
+            <a:schemeClr val="accent1">
+              <a:shade val="15000"/>
+            </a:schemeClr>
+          </a:lnRef>
+          <a:fillRef idx="1">
+            <a:schemeClr val="accent1"/>
+          </a:fillRef>
+          <a:effectRef idx="0">
+            <a:schemeClr val="accent1"/>
+          </a:effectRef>
+          <a:fontRef idx="minor">
+            <a:schemeClr val="lt1"/>
+          </a:fontRef>
+        </p:style>
+        <p:txBody>
+          <a:bodyPr wrap="none" lIns="0" tIns="0" rIns="0" bIns="0" rtlCol="0" anchor="ctr" anchorCtr="1"/>
+          <a:lstStyle/>
+          <a:p>
+            <a:pPr algn="ctr"/>
+            <a:r>
+              <a:rPr lang="en-US" altLang="zh-TW" sz="1400" b="1" dirty="0">
+                <a:solidFill>
+                  <a:schemeClr val="tx2"/>
+                </a:solidFill>
+              </a:rPr>
+              <a:t>Gemma 4</a:t>
+            </a:r>
+            <a:endParaRPr lang="zh-TW" altLang="en-US" dirty="0"/>
+          </a:p>
+        </p:txBody>
+      </p:sp>
+      <p:sp>
+        <p:nvSpPr>
+          <p:cNvPr id="40" name="矩形 39">
+            <a:extLst>
+              <a:ext uri="{FF2B5EF4-FFF2-40B4-BE49-F238E27FC236}">
+                <a16:creationId xmlns:a16="http://schemas.microsoft.com/office/drawing/2014/main" id="{73C9E5A5-1A4C-E1DD-BA22-A7EADD80F137}"/>
+              </a:ext>
+            </a:extLst>
+          </p:cNvPr>
+          <p:cNvSpPr/>
+          <p:nvPr/>
+        </p:nvSpPr>
+        <p:spPr>
+          <a:xfrm>
+            <a:off x="2557864" y="2708920"/>
+            <a:ext cx="645984" cy="307983"/>
+          </a:xfrm>
+          <a:prstGeom prst="rect">
+            <a:avLst/>
+          </a:prstGeom>
+          <a:noFill/>
+          <a:ln w="38100">
+            <a:noFill/>
+          </a:ln>
+        </p:spPr>
+        <p:style>
+          <a:lnRef idx="2">
+            <a:schemeClr val="accent1">
+              <a:shade val="15000"/>
+            </a:schemeClr>
+          </a:lnRef>
+          <a:fillRef idx="1">
+            <a:schemeClr val="accent1"/>
+          </a:fillRef>
+          <a:effectRef idx="0">
+            <a:schemeClr val="accent1"/>
+          </a:effectRef>
+          <a:fontRef idx="minor">
+            <a:schemeClr val="lt1"/>
+          </a:fontRef>
+        </p:style>
+        <p:txBody>
+          <a:bodyPr wrap="none" lIns="0" tIns="0" rIns="0" bIns="0" rtlCol="0" anchor="ctr" anchorCtr="1"/>
+          <a:lstStyle/>
+          <a:p>
+            <a:pPr algn="ctr"/>
+            <a:r>
+              <a:rPr lang="en-US" altLang="zh-TW" sz="1400" b="1" dirty="0">
+                <a:solidFill>
+                  <a:schemeClr val="tx1">
+                    <a:lumMod val="85000"/>
+                    <a:lumOff val="15000"/>
+                  </a:schemeClr>
+                </a:solidFill>
+              </a:rPr>
+              <a:t>Unsloth</a:t>
+            </a:r>
+            <a:endParaRPr lang="zh-TW" altLang="en-US" dirty="0">
+              <a:solidFill>
+                <a:schemeClr val="tx1">
+                  <a:lumMod val="85000"/>
+                  <a:lumOff val="15000"/>
+                </a:schemeClr>
+              </a:solidFill>
+            </a:endParaRPr>
+          </a:p>
+        </p:txBody>
+      </p:sp>
+      <p:pic>
+        <p:nvPicPr>
+          <p:cNvPr id="3" name="圖片 2">
+            <a:extLst>
+              <a:ext uri="{FF2B5EF4-FFF2-40B4-BE49-F238E27FC236}">
+                <a16:creationId xmlns:a16="http://schemas.microsoft.com/office/drawing/2014/main" id="{C9698038-0D96-CDF9-A56E-0536E5A4EDC9}"/>
+              </a:ext>
+            </a:extLst>
+          </p:cNvPr>
+          <p:cNvPicPr>
+            <a:picLocks noChangeAspect="1"/>
+          </p:cNvPicPr>
+          <p:nvPr/>
+        </p:nvPicPr>
+        <p:blipFill>
+          <a:blip r:embed="rId3" cstate="print">
+            <a:extLst>
+              <a:ext uri="{28A0092B-C50C-407E-A947-70E740481C1C}">
+                <a14:useLocalDpi xmlns:a14="http://schemas.microsoft.com/office/drawing/2010/main" val="0"/>
+              </a:ext>
+            </a:extLst>
+          </a:blip>
+          <a:stretch>
+            <a:fillRect/>
+          </a:stretch>
+        </p:blipFill>
+        <p:spPr>
+          <a:xfrm>
+            <a:off x="2699792" y="2393250"/>
+            <a:ext cx="432048" cy="366597"/>
+          </a:xfrm>
+          <a:prstGeom prst="rect">
+            <a:avLst/>
+          </a:prstGeom>
+          <a:effectLst>
+            <a:glow rad="76200">
+              <a:srgbClr val="00B050">
+                <a:alpha val="40000"/>
+              </a:srgbClr>
+            </a:glow>
+          </a:effectLst>
+        </p:spPr>
+      </p:pic>
+      <p:pic>
+        <p:nvPicPr>
+          <p:cNvPr id="4" name="圖片 3" descr="python™">
+            <a:extLst>
+              <a:ext uri="{FF2B5EF4-FFF2-40B4-BE49-F238E27FC236}">
+                <a16:creationId xmlns:a16="http://schemas.microsoft.com/office/drawing/2014/main" id="{8EB164CC-EC9D-9D61-72C6-9F751510B12E}"/>
+              </a:ext>
+            </a:extLst>
+          </p:cNvPr>
+          <p:cNvPicPr>
+            <a:picLocks noChangeAspect="1"/>
+          </p:cNvPicPr>
+          <p:nvPr/>
+        </p:nvPicPr>
+        <p:blipFill>
+          <a:blip r:embed="rId4"/>
+          <a:stretch>
+            <a:fillRect/>
+          </a:stretch>
+        </p:blipFill>
+        <p:spPr>
+          <a:xfrm>
+            <a:off x="4046839" y="1853553"/>
+            <a:ext cx="1691952" cy="478414"/>
+          </a:xfrm>
+          <a:prstGeom prst="rect">
+            <a:avLst/>
+          </a:prstGeom>
+          <a:solidFill>
+            <a:schemeClr val="accent1">
+              <a:lumMod val="50000"/>
+            </a:schemeClr>
+          </a:solidFill>
+          <a:effectLst>
+            <a:glow rad="50800">
+              <a:schemeClr val="bg1">
+                <a:lumMod val="95000"/>
+                <a:alpha val="40000"/>
+              </a:schemeClr>
+            </a:glow>
+            <a:softEdge rad="25400"/>
+          </a:effectLst>
+        </p:spPr>
+      </p:pic>
+      <p:sp>
+        <p:nvSpPr>
+          <p:cNvPr id="7" name="矩形 6">
+            <a:extLst>
+              <a:ext uri="{FF2B5EF4-FFF2-40B4-BE49-F238E27FC236}">
+                <a16:creationId xmlns:a16="http://schemas.microsoft.com/office/drawing/2014/main" id="{380A6DDE-81A5-EF82-8AD5-62E65A1B384D}"/>
+              </a:ext>
+            </a:extLst>
+          </p:cNvPr>
+          <p:cNvSpPr/>
+          <p:nvPr/>
+        </p:nvSpPr>
+        <p:spPr>
+          <a:xfrm>
+            <a:off x="3121969" y="924383"/>
+            <a:ext cx="645984" cy="307983"/>
+          </a:xfrm>
+          <a:prstGeom prst="rect">
+            <a:avLst/>
+          </a:prstGeom>
+          <a:noFill/>
+          <a:ln w="38100">
+            <a:noFill/>
+          </a:ln>
+        </p:spPr>
+        <p:style>
+          <a:lnRef idx="2">
+            <a:schemeClr val="accent1">
+              <a:shade val="15000"/>
+            </a:schemeClr>
+          </a:lnRef>
+          <a:fillRef idx="1">
+            <a:schemeClr val="accent1"/>
+          </a:fillRef>
+          <a:effectRef idx="0">
+            <a:schemeClr val="accent1"/>
+          </a:effectRef>
+          <a:fontRef idx="minor">
+            <a:schemeClr val="lt1"/>
+          </a:fontRef>
+        </p:style>
+        <p:txBody>
+          <a:bodyPr wrap="none" lIns="0" tIns="0" rIns="0" bIns="0" rtlCol="0" anchor="ctr" anchorCtr="1"/>
+          <a:lstStyle/>
+          <a:p>
+            <a:pPr algn="ctr"/>
+            <a:r>
+              <a:rPr lang="en-US" altLang="zh-TW" sz="1400" b="1" dirty="0">
+                <a:solidFill>
+                  <a:schemeClr val="tx1">
+                    <a:lumMod val="85000"/>
+                    <a:lumOff val="15000"/>
+                  </a:schemeClr>
+                </a:solidFill>
+              </a:rPr>
+              <a:t>.</a:t>
+            </a:r>
+            <a:r>
+              <a:rPr lang="en-US" altLang="zh-TW" sz="1400" b="1" dirty="0" err="1">
+                <a:solidFill>
+                  <a:schemeClr val="tx1">
+                    <a:lumMod val="85000"/>
+                    <a:lumOff val="15000"/>
+                  </a:schemeClr>
+                </a:solidFill>
+              </a:rPr>
+              <a:t>json</a:t>
+            </a:r>
+            <a:endParaRPr lang="zh-TW" altLang="en-US" dirty="0">
+              <a:solidFill>
+                <a:schemeClr val="tx1">
+                  <a:lumMod val="85000"/>
+                  <a:lumOff val="15000"/>
+                </a:schemeClr>
+              </a:solidFill>
+            </a:endParaRPr>
+          </a:p>
+        </p:txBody>
+      </p:sp>
+      <p:pic>
+        <p:nvPicPr>
+          <p:cNvPr id="8" name="圖片 7" descr="json logo">
+            <a:extLst>
+              <a:ext uri="{FF2B5EF4-FFF2-40B4-BE49-F238E27FC236}">
+                <a16:creationId xmlns:a16="http://schemas.microsoft.com/office/drawing/2014/main" id="{614D0D0A-8724-C2C7-40B5-DA4C7CF33C78}"/>
+              </a:ext>
+            </a:extLst>
+          </p:cNvPr>
+          <p:cNvPicPr>
+            <a:picLocks noChangeAspect="1"/>
+          </p:cNvPicPr>
+          <p:nvPr/>
+        </p:nvPicPr>
+        <p:blipFill>
+          <a:blip r:embed="rId5"/>
+          <a:stretch>
+            <a:fillRect/>
+          </a:stretch>
+        </p:blipFill>
+        <p:spPr>
+          <a:xfrm>
+            <a:off x="3282068" y="558318"/>
+            <a:ext cx="394321" cy="394321"/>
+          </a:xfrm>
+          <a:prstGeom prst="rect">
+            <a:avLst/>
+          </a:prstGeom>
+        </p:spPr>
+      </p:pic>
+    </p:spTree>
+    <p:extLst>
+      <p:ext uri="{BB962C8B-B14F-4D97-AF65-F5344CB8AC3E}">
+        <p14:creationId xmlns:p14="http://schemas.microsoft.com/office/powerpoint/2010/main" val="1599417021"/>
+      </p:ext>
+    </p:extLst>
+  </p:cSld>
+  <p:clrMapOvr>
+    <a:masterClrMapping/>
+  </p:clrMapOvr>
+  <mc:AlternateContent xmlns:mc="http://schemas.openxmlformats.org/markup-compatibility/2006" xmlns:p159="http://schemas.microsoft.com/office/powerpoint/2015/09/main">
+    <mc:Choice Requires="p159">
+      <p:transition xmlns:p14="http://schemas.microsoft.com/office/powerpoint/2010/main" spd="slow" p14:dur="2000" advClick="0">
+        <p159:morph option="byObject"/>
+      </p:transition>
+    </mc:Choice>
+    <mc:Fallback xmlns="">
+      <p:transition spd="slow" advClick="0">
+        <p:fade/>
+      </p:transition>
+    </mc:Fallback>
+  </mc:AlternateContent>
+</p:sld>
+</file>
+
+<file path=ppt/slides/slide5.xml><?xml version="1.0" encoding="utf-8"?>
+<p:sld xmlns:a="http://schemas.openxmlformats.org/drawingml/2006/main" xmlns:r="http://schemas.openxmlformats.org/officeDocument/2006/relationships" xmlns:p="http://schemas.openxmlformats.org/presentationml/2006/main">
+  <p:cSld>
+    <p:spTree>
+      <p:nvGrpSpPr>
+        <p:cNvPr id="1" name="">
+          <a:extLst>
+            <a:ext uri="{FF2B5EF4-FFF2-40B4-BE49-F238E27FC236}">
+              <a16:creationId xmlns:a16="http://schemas.microsoft.com/office/drawing/2014/main" id="{5EC97438-C8B0-5673-4C5F-AC6EEF8F110D}"/>
+            </a:ext>
+          </a:extLst>
+        </p:cNvPr>
+        <p:cNvGrpSpPr/>
+        <p:nvPr/>
+      </p:nvGrpSpPr>
+      <p:grpSpPr>
+        <a:xfrm>
+          <a:off x="0" y="0"/>
+          <a:ext cx="0" cy="0"/>
+          <a:chOff x="0" y="0"/>
+          <a:chExt cx="0" cy="0"/>
+        </a:xfrm>
+      </p:grpSpPr>
+      <p:sp>
+        <p:nvSpPr>
+          <p:cNvPr id="42" name="矩形 41">
+            <a:extLst>
+              <a:ext uri="{FF2B5EF4-FFF2-40B4-BE49-F238E27FC236}">
+                <a16:creationId xmlns:a16="http://schemas.microsoft.com/office/drawing/2014/main" id="{E036C336-3A04-69B3-A47E-AB6B16758771}"/>
+              </a:ext>
+            </a:extLst>
+          </p:cNvPr>
+          <p:cNvSpPr/>
+          <p:nvPr/>
+        </p:nvSpPr>
+        <p:spPr>
+          <a:xfrm>
+            <a:off x="2699792" y="1451645"/>
+            <a:ext cx="3700753" cy="1257275"/>
+          </a:xfrm>
+          <a:prstGeom prst="rect">
+            <a:avLst/>
+          </a:prstGeom>
+          <a:noFill/>
+          <a:ln w="6350">
+            <a:solidFill>
+              <a:schemeClr val="accent4">
+                <a:lumMod val="75000"/>
+              </a:schemeClr>
+            </a:solidFill>
+            <a:prstDash val="dash"/>
+          </a:ln>
+        </p:spPr>
+        <p:style>
+          <a:lnRef idx="2">
+            <a:schemeClr val="accent1">
+              <a:shade val="15000"/>
+            </a:schemeClr>
+          </a:lnRef>
+          <a:fillRef idx="1">
+            <a:schemeClr val="accent1"/>
+          </a:fillRef>
+          <a:effectRef idx="0">
+            <a:schemeClr val="accent1"/>
+          </a:effectRef>
+          <a:fontRef idx="minor">
+            <a:schemeClr val="lt1"/>
+          </a:fontRef>
+        </p:style>
+        <p:txBody>
+          <a:bodyPr wrap="none" lIns="36000" tIns="0" rIns="0" bIns="0" rtlCol="0" anchor="ctr" anchorCtr="0"/>
+          <a:lstStyle/>
+          <a:p>
+            <a:pPr>
+              <a:lnSpc>
+                <a:spcPts val="1600"/>
+              </a:lnSpc>
+            </a:pPr>
+            <a:endParaRPr lang="en-US" altLang="zh-TW" sz="1200" dirty="0">
+              <a:solidFill>
+                <a:schemeClr val="tx2"/>
+              </a:solidFill>
+              <a:ea typeface="ADLaM Display" panose="02010000000000000000" pitchFamily="2" charset="0"/>
+              <a:cs typeface="ADLaM Display" panose="02010000000000000000" pitchFamily="2" charset="0"/>
+            </a:endParaRPr>
+          </a:p>
+        </p:txBody>
+      </p:sp>
+      <p:sp>
+        <p:nvSpPr>
+          <p:cNvPr id="19" name="矩形 18">
+            <a:extLst>
+              <a:ext uri="{FF2B5EF4-FFF2-40B4-BE49-F238E27FC236}">
+                <a16:creationId xmlns:a16="http://schemas.microsoft.com/office/drawing/2014/main" id="{3DE2EA1A-CCAE-DEFA-2A4D-6F6BEF5AE898}"/>
+              </a:ext>
+            </a:extLst>
+          </p:cNvPr>
+          <p:cNvSpPr/>
+          <p:nvPr/>
+        </p:nvSpPr>
+        <p:spPr>
+          <a:xfrm>
+            <a:off x="3858745" y="1620476"/>
+            <a:ext cx="1844242" cy="274677"/>
+          </a:xfrm>
+          <a:prstGeom prst="rect">
+            <a:avLst/>
+          </a:prstGeom>
+          <a:solidFill>
+            <a:schemeClr val="accent3">
+              <a:lumMod val="20000"/>
+              <a:lumOff val="80000"/>
+            </a:schemeClr>
+          </a:solidFill>
+          <a:ln w="12700">
+            <a:solidFill>
+              <a:srgbClr val="92D050"/>
+            </a:solidFill>
+          </a:ln>
+        </p:spPr>
+        <p:style>
+          <a:lnRef idx="2">
+            <a:schemeClr val="accent1">
+              <a:shade val="15000"/>
+            </a:schemeClr>
+          </a:lnRef>
+          <a:fillRef idx="1">
+            <a:schemeClr val="accent1"/>
+          </a:fillRef>
+          <a:effectRef idx="0">
+            <a:schemeClr val="accent1"/>
+          </a:effectRef>
+          <a:fontRef idx="minor">
+            <a:schemeClr val="lt1"/>
+          </a:fontRef>
+        </p:style>
+        <p:txBody>
+          <a:bodyPr wrap="none" lIns="91440" tIns="0" rIns="0" bIns="0" rtlCol="0" anchor="ctr" anchorCtr="0"/>
+          <a:lstStyle/>
+          <a:p>
+            <a:pPr>
+              <a:lnSpc>
+                <a:spcPts val="1600"/>
+              </a:lnSpc>
+            </a:pPr>
+            <a:r>
+              <a:rPr lang="en-US" altLang="zh-TW" sz="1200" dirty="0">
+                <a:solidFill>
+                  <a:schemeClr val="tx1"/>
+                </a:solidFill>
+                <a:latin typeface="ADLaM Display" panose="02010000000000000000" pitchFamily="2" charset="0"/>
+                <a:ea typeface="ADLaM Display" panose="02010000000000000000" pitchFamily="2" charset="0"/>
+                <a:cs typeface="ADLaM Display" panose="02010000000000000000" pitchFamily="2" charset="0"/>
+              </a:rPr>
+              <a:t>Clinical Trials</a:t>
+            </a:r>
+            <a:r>
+              <a:rPr lang="zh-TW" altLang="en-US" sz="1200" dirty="0">
+                <a:solidFill>
+                  <a:schemeClr val="tx1"/>
+                </a:solidFill>
+                <a:latin typeface="ADLaM Display" panose="02010000000000000000" pitchFamily="2" charset="0"/>
+                <a:ea typeface="ADLaM Display" panose="02010000000000000000" pitchFamily="2" charset="0"/>
+                <a:cs typeface="ADLaM Display" panose="02010000000000000000" pitchFamily="2" charset="0"/>
+              </a:rPr>
+              <a:t> </a:t>
+            </a:r>
+            <a:r>
+              <a:rPr lang="en-US" altLang="zh-TW" sz="1200" dirty="0">
+                <a:solidFill>
+                  <a:schemeClr val="tx1"/>
+                </a:solidFill>
+                <a:latin typeface="ADLaM Display" panose="02010000000000000000" pitchFamily="2" charset="0"/>
+                <a:ea typeface="ADLaM Display" panose="02010000000000000000" pitchFamily="2" charset="0"/>
+                <a:cs typeface="ADLaM Display" panose="02010000000000000000" pitchFamily="2" charset="0"/>
+              </a:rPr>
+              <a:t>API</a:t>
+            </a:r>
+          </a:p>
+        </p:txBody>
+      </p:sp>
+      <p:sp>
+        <p:nvSpPr>
+          <p:cNvPr id="37" name="矩形 36">
+            <a:extLst>
+              <a:ext uri="{FF2B5EF4-FFF2-40B4-BE49-F238E27FC236}">
+                <a16:creationId xmlns:a16="http://schemas.microsoft.com/office/drawing/2014/main" id="{E8B5B681-38D2-12B5-DB86-61F191452B61}"/>
+              </a:ext>
+            </a:extLst>
+          </p:cNvPr>
+          <p:cNvSpPr/>
+          <p:nvPr/>
+        </p:nvSpPr>
+        <p:spPr>
+          <a:xfrm>
+            <a:off x="2281896" y="4424279"/>
+            <a:ext cx="3033034" cy="1185267"/>
+          </a:xfrm>
+          <a:prstGeom prst="rect">
+            <a:avLst/>
+          </a:prstGeom>
+          <a:noFill/>
+          <a:ln w="38100">
+            <a:solidFill>
+              <a:schemeClr val="tx2">
+                <a:lumMod val="20000"/>
+                <a:lumOff val="80000"/>
+              </a:schemeClr>
+            </a:solidFill>
+          </a:ln>
+        </p:spPr>
+        <p:style>
+          <a:lnRef idx="2">
+            <a:schemeClr val="accent1">
+              <a:shade val="15000"/>
+            </a:schemeClr>
+          </a:lnRef>
+          <a:fillRef idx="1">
+            <a:schemeClr val="accent1"/>
+          </a:fillRef>
+          <a:effectRef idx="0">
+            <a:schemeClr val="accent1"/>
+          </a:effectRef>
+          <a:fontRef idx="minor">
+            <a:schemeClr val="lt1"/>
+          </a:fontRef>
+        </p:style>
+        <p:txBody>
+          <a:bodyPr wrap="none" lIns="36000" tIns="0" rIns="0" bIns="0" rtlCol="0" anchor="ctr" anchorCtr="0"/>
+          <a:lstStyle/>
+          <a:p>
+            <a:pPr>
+              <a:lnSpc>
+                <a:spcPts val="1600"/>
+              </a:lnSpc>
+            </a:pPr>
+            <a:r>
+              <a:rPr lang="en-US" altLang="zh-TW" sz="1200" dirty="0">
+                <a:solidFill>
+                  <a:schemeClr val="tx2"/>
+                </a:solidFill>
+                <a:latin typeface="ADLaM Display" panose="02010000000000000000" pitchFamily="2" charset="0"/>
+                <a:ea typeface="ADLaM Display" panose="02010000000000000000" pitchFamily="2" charset="0"/>
+                <a:cs typeface="ADLaM Display" panose="02010000000000000000" pitchFamily="2" charset="0"/>
+              </a:rPr>
+              <a:t>Public Database</a:t>
+            </a:r>
+          </a:p>
+          <a:p>
+            <a:pPr>
+              <a:lnSpc>
+                <a:spcPts val="1600"/>
+              </a:lnSpc>
+            </a:pPr>
+            <a:r>
+              <a:rPr lang="en-US" altLang="zh-TW" sz="1200" dirty="0">
+                <a:solidFill>
+                  <a:schemeClr val="tx2"/>
+                </a:solidFill>
+                <a:ea typeface="ADLaM Display" panose="02010000000000000000" pitchFamily="2" charset="0"/>
+                <a:cs typeface="ADLaM Display" panose="02010000000000000000" pitchFamily="2" charset="0"/>
+              </a:rPr>
+              <a:t>* RegulomeDB (Stanford University)</a:t>
+            </a:r>
+          </a:p>
+          <a:p>
+            <a:pPr>
+              <a:lnSpc>
+                <a:spcPts val="1600"/>
+              </a:lnSpc>
+            </a:pPr>
+            <a:r>
+              <a:rPr lang="en-US" altLang="zh-TW" sz="1200" dirty="0">
+                <a:solidFill>
+                  <a:schemeClr val="tx2"/>
+                </a:solidFill>
+                <a:ea typeface="ADLaM Display" panose="02010000000000000000" pitchFamily="2" charset="0"/>
+                <a:cs typeface="ADLaM Display" panose="02010000000000000000" pitchFamily="2" charset="0"/>
+              </a:rPr>
+              <a:t>* GTEx Portal (Single-Cell Gene Expression Data)</a:t>
+            </a:r>
+          </a:p>
+          <a:p>
+            <a:pPr>
+              <a:lnSpc>
+                <a:spcPts val="1600"/>
+              </a:lnSpc>
+            </a:pPr>
+            <a:r>
+              <a:rPr lang="en-US" altLang="zh-TW" sz="1200" dirty="0">
+                <a:solidFill>
+                  <a:schemeClr val="tx2"/>
+                </a:solidFill>
+                <a:ea typeface="ADLaM Display" panose="02010000000000000000" pitchFamily="2" charset="0"/>
+                <a:cs typeface="ADLaM Display" panose="02010000000000000000" pitchFamily="2" charset="0"/>
+              </a:rPr>
+              <a:t>* Ensembl Regulation (EBI/Sanger)</a:t>
+            </a:r>
+          </a:p>
+        </p:txBody>
+      </p:sp>
+      <p:sp>
+        <p:nvSpPr>
+          <p:cNvPr id="6" name="標題 1">
+            <a:extLst>
+              <a:ext uri="{FF2B5EF4-FFF2-40B4-BE49-F238E27FC236}">
+                <a16:creationId xmlns:a16="http://schemas.microsoft.com/office/drawing/2014/main" id="{BCD88C0B-1ECB-A061-55F5-5BBF6F58DD70}"/>
+              </a:ext>
+            </a:extLst>
+          </p:cNvPr>
+          <p:cNvSpPr txBox="1">
+            <a:spLocks/>
+          </p:cNvSpPr>
+          <p:nvPr/>
+        </p:nvSpPr>
+        <p:spPr>
+          <a:xfrm>
+            <a:off x="179512" y="116632"/>
+            <a:ext cx="7713554" cy="612186"/>
+          </a:xfrm>
+          <a:prstGeom prst="rect">
+            <a:avLst/>
+          </a:prstGeom>
+        </p:spPr>
+        <p:txBody>
+          <a:bodyPr/>
+          <a:lstStyle>
+            <a:lvl1pPr algn="l" defTabSz="914400" rtl="0" eaLnBrk="1" latinLnBrk="0" hangingPunct="1">
+              <a:spcBef>
+                <a:spcPct val="0"/>
+              </a:spcBef>
+              <a:buNone/>
+              <a:defRPr sz="2400" kern="1200">
+                <a:solidFill>
+                  <a:schemeClr val="tx1"/>
+                </a:solidFill>
+                <a:latin typeface="+mj-lt"/>
+                <a:ea typeface="+mj-ea"/>
+                <a:cs typeface="+mj-cs"/>
+              </a:defRPr>
+            </a:lvl1pPr>
+          </a:lstStyle>
+          <a:p>
+            <a:r>
+              <a:rPr lang="en-US" altLang="zh-TW" sz="2800" dirty="0">
+                <a:latin typeface="Noto Sans HK" panose="020B0200000000000000" pitchFamily="34" charset="-120"/>
+                <a:ea typeface="Noto Sans HK" panose="020B0200000000000000" pitchFamily="34" charset="-120"/>
+                <a:cs typeface="Aharoni" panose="020F0502020204030204" pitchFamily="2" charset="-79"/>
+                <a:sym typeface="Wingdings" panose="05000000000000000000" pitchFamily="2" charset="2"/>
+              </a:rPr>
+              <a:t>Biomedical MCP Server</a:t>
+            </a:r>
+          </a:p>
+          <a:p>
+            <a:r>
+              <a:rPr lang="en-US" altLang="zh-TW" sz="1400" dirty="0">
+                <a:latin typeface="Noto Sans HK" panose="020B0200000000000000" pitchFamily="34" charset="-120"/>
+                <a:ea typeface="Noto Sans HK" panose="020B0200000000000000" pitchFamily="34" charset="-120"/>
+                <a:cs typeface="Aharoni" panose="020F0502020204030204" pitchFamily="2" charset="-79"/>
+                <a:sym typeface="Wingdings" panose="05000000000000000000" pitchFamily="2" charset="2"/>
+              </a:rPr>
+              <a:t>In Runtime, Agent could access public database by BioMCP</a:t>
+            </a:r>
+          </a:p>
+          <a:p>
+            <a:pPr marL="285750" indent="-285750">
+              <a:buFontTx/>
+              <a:buChar char="-"/>
+            </a:pPr>
+            <a:endParaRPr lang="en-US" altLang="zh-TW" sz="1400" dirty="0">
+              <a:latin typeface="Noto Sans HK" panose="020B0200000000000000" pitchFamily="34" charset="-120"/>
+              <a:ea typeface="Noto Sans HK" panose="020B0200000000000000" pitchFamily="34" charset="-120"/>
+              <a:cs typeface="Arial" panose="020B0604020202020204" pitchFamily="34" charset="0"/>
+            </a:endParaRPr>
+          </a:p>
+        </p:txBody>
+      </p:sp>
+      <p:pic>
+        <p:nvPicPr>
+          <p:cNvPr id="24" name="圖形 23" descr="資料庫 以實心填滿">
+            <a:extLst>
+              <a:ext uri="{FF2B5EF4-FFF2-40B4-BE49-F238E27FC236}">
+                <a16:creationId xmlns:a16="http://schemas.microsoft.com/office/drawing/2014/main" id="{1EF39786-3014-9BC9-B7AD-358326EA9ADC}"/>
+              </a:ext>
+            </a:extLst>
+          </p:cNvPr>
+          <p:cNvPicPr>
+            <a:picLocks noChangeAspect="1"/>
+          </p:cNvPicPr>
+          <p:nvPr/>
+        </p:nvPicPr>
+        <p:blipFill>
+          <a:blip>
+            <a:extLst>
+              <a:ext uri="{96DAC541-7B7A-43D3-8B79-37D633B846F1}">
+                <asvg:svgBlip xmlns:asvg="http://schemas.microsoft.com/office/drawing/2016/SVG/main" r:embed="rId2"/>
+              </a:ext>
+            </a:extLst>
+          </a:blip>
+          <a:stretch>
+            <a:fillRect/>
+          </a:stretch>
+        </p:blipFill>
+        <p:spPr>
+          <a:xfrm>
+            <a:off x="5887095" y="1827319"/>
+            <a:ext cx="513450" cy="513450"/>
+          </a:xfrm>
+          <a:prstGeom prst="rect">
+            <a:avLst/>
+          </a:prstGeom>
+        </p:spPr>
+      </p:pic>
+      <p:grpSp>
+        <p:nvGrpSpPr>
+          <p:cNvPr id="28" name="群組 27">
+            <a:extLst>
+              <a:ext uri="{FF2B5EF4-FFF2-40B4-BE49-F238E27FC236}">
+                <a16:creationId xmlns:a16="http://schemas.microsoft.com/office/drawing/2014/main" id="{65C09A8E-2299-066D-21A0-8B4DBD865351}"/>
+              </a:ext>
+            </a:extLst>
+          </p:cNvPr>
+          <p:cNvGrpSpPr/>
+          <p:nvPr/>
+        </p:nvGrpSpPr>
+        <p:grpSpPr>
+          <a:xfrm>
+            <a:off x="2880991" y="1603184"/>
+            <a:ext cx="792088" cy="961721"/>
+            <a:chOff x="5796136" y="2249217"/>
+            <a:chExt cx="792088" cy="823167"/>
+          </a:xfrm>
+          <a:solidFill>
+            <a:schemeClr val="accent4">
+              <a:lumMod val="20000"/>
+              <a:lumOff val="80000"/>
+            </a:schemeClr>
+          </a:solidFill>
+        </p:grpSpPr>
+        <p:sp>
+          <p:nvSpPr>
+            <p:cNvPr id="18" name="矩形 17">
+              <a:extLst>
+                <a:ext uri="{FF2B5EF4-FFF2-40B4-BE49-F238E27FC236}">
+                  <a16:creationId xmlns:a16="http://schemas.microsoft.com/office/drawing/2014/main" id="{DE400132-0809-AF72-370C-AFEFA6E6B6FC}"/>
+                </a:ext>
+              </a:extLst>
+            </p:cNvPr>
+            <p:cNvSpPr/>
+            <p:nvPr/>
+          </p:nvSpPr>
+          <p:spPr>
+            <a:xfrm>
+              <a:off x="5796136" y="2249217"/>
+              <a:ext cx="792088" cy="823167"/>
+            </a:xfrm>
+            <a:prstGeom prst="rect">
+              <a:avLst/>
+            </a:prstGeom>
+            <a:grpFill/>
+            <a:ln w="38100">
+              <a:solidFill>
+                <a:schemeClr val="accent4">
+                  <a:lumMod val="40000"/>
+                  <a:lumOff val="60000"/>
+                </a:schemeClr>
+              </a:solidFill>
+            </a:ln>
+          </p:spPr>
+          <p:style>
+            <a:lnRef idx="2">
+              <a:schemeClr val="accent1">
+                <a:shade val="15000"/>
+              </a:schemeClr>
+            </a:lnRef>
+            <a:fillRef idx="1">
+              <a:schemeClr val="accent1"/>
+            </a:fillRef>
+            <a:effectRef idx="0">
+              <a:schemeClr val="accent1"/>
+            </a:effectRef>
+            <a:fontRef idx="minor">
+              <a:schemeClr val="lt1"/>
+            </a:fontRef>
+          </p:style>
+          <p:txBody>
+            <a:bodyPr wrap="none" lIns="0" tIns="0" rIns="0" bIns="0" rtlCol="0" anchor="b" anchorCtr="1"/>
+            <a:lstStyle/>
+            <a:p>
+              <a:pPr algn="r">
+                <a:lnSpc>
+                  <a:spcPts val="1600"/>
+                </a:lnSpc>
+              </a:pPr>
+              <a:r>
+                <a:rPr lang="en-US" altLang="zh-TW" sz="1400" dirty="0">
+                  <a:solidFill>
+                    <a:schemeClr val="tx1"/>
+                  </a:solidFill>
+                  <a:latin typeface="ADLaM Display" panose="02010000000000000000" pitchFamily="2" charset="0"/>
+                  <a:ea typeface="ADLaM Display" panose="02010000000000000000" pitchFamily="2" charset="0"/>
+                  <a:cs typeface="ADLaM Display" panose="02010000000000000000" pitchFamily="2" charset="0"/>
+                </a:rPr>
+                <a:t>BioMCP</a:t>
+              </a:r>
+            </a:p>
+          </p:txBody>
+        </p:sp>
+        <p:pic>
+          <p:nvPicPr>
+            <p:cNvPr id="25" name="圖片 24">
+              <a:extLst>
+                <a:ext uri="{FF2B5EF4-FFF2-40B4-BE49-F238E27FC236}">
+                  <a16:creationId xmlns:a16="http://schemas.microsoft.com/office/drawing/2014/main" id="{42E9BC1C-BFC1-372E-BF18-851CBE7059E2}"/>
+                </a:ext>
+              </a:extLst>
+            </p:cNvPr>
+            <p:cNvPicPr preferRelativeResize="0">
+              <a:picLocks/>
+            </p:cNvPicPr>
+            <p:nvPr/>
+          </p:nvPicPr>
+          <p:blipFill>
+            <a:blip r:embed="rId3"/>
+            <a:stretch>
+              <a:fillRect/>
+            </a:stretch>
+          </p:blipFill>
+          <p:spPr>
+            <a:xfrm>
+              <a:off x="5980244" y="2394410"/>
+              <a:ext cx="457200" cy="391332"/>
+            </a:xfrm>
+            <a:prstGeom prst="rect">
+              <a:avLst/>
+            </a:prstGeom>
+            <a:grpFill/>
+            <a:ln w="19050">
+              <a:solidFill>
+                <a:schemeClr val="bg1">
+                  <a:lumMod val="95000"/>
+                </a:schemeClr>
+              </a:solidFill>
+            </a:ln>
+            <a:effectLst>
+              <a:glow rad="50800">
+                <a:schemeClr val="bg1">
+                  <a:lumMod val="95000"/>
+                  <a:alpha val="60000"/>
+                </a:schemeClr>
+              </a:glow>
+              <a:softEdge rad="25400"/>
+            </a:effectLst>
+          </p:spPr>
+        </p:pic>
+      </p:grpSp>
+      <p:sp>
+        <p:nvSpPr>
+          <p:cNvPr id="27" name="矩形 26">
+            <a:extLst>
+              <a:ext uri="{FF2B5EF4-FFF2-40B4-BE49-F238E27FC236}">
+                <a16:creationId xmlns:a16="http://schemas.microsoft.com/office/drawing/2014/main" id="{403EFD41-8FE5-076E-644D-A0755BFD1A56}"/>
+              </a:ext>
+            </a:extLst>
+          </p:cNvPr>
+          <p:cNvSpPr/>
+          <p:nvPr/>
+        </p:nvSpPr>
+        <p:spPr>
+          <a:xfrm>
+            <a:off x="6189500" y="3850777"/>
+            <a:ext cx="1229495" cy="720080"/>
+          </a:xfrm>
+          <a:prstGeom prst="rect">
+            <a:avLst/>
+          </a:prstGeom>
+          <a:noFill/>
+          <a:ln w="12700">
+            <a:noFill/>
+          </a:ln>
+        </p:spPr>
+        <p:style>
+          <a:lnRef idx="2">
+            <a:schemeClr val="accent1">
+              <a:shade val="15000"/>
+            </a:schemeClr>
+          </a:lnRef>
+          <a:fillRef idx="1">
+            <a:schemeClr val="accent1"/>
+          </a:fillRef>
+          <a:effectRef idx="0">
+            <a:schemeClr val="accent1"/>
+          </a:effectRef>
+          <a:fontRef idx="minor">
+            <a:schemeClr val="lt1"/>
+          </a:fontRef>
+        </p:style>
+        <p:txBody>
+          <a:bodyPr wrap="none" lIns="91440" tIns="0" rIns="0" bIns="0" rtlCol="0" anchor="ctr" anchorCtr="0"/>
+          <a:lstStyle/>
+          <a:p>
+            <a:pPr>
+              <a:lnSpc>
+                <a:spcPts val="1600"/>
+              </a:lnSpc>
+            </a:pPr>
+            <a:endParaRPr lang="en-US" altLang="zh-TW" sz="1200" dirty="0">
+              <a:solidFill>
+                <a:schemeClr val="tx1"/>
+              </a:solidFill>
+              <a:latin typeface="ADLaM Display" panose="02010000000000000000" pitchFamily="2" charset="0"/>
+              <a:ea typeface="ADLaM Display" panose="02010000000000000000" pitchFamily="2" charset="0"/>
+              <a:cs typeface="ADLaM Display" panose="02010000000000000000" pitchFamily="2" charset="0"/>
+            </a:endParaRPr>
+          </a:p>
+          <a:p>
+            <a:pPr>
+              <a:lnSpc>
+                <a:spcPts val="1600"/>
+              </a:lnSpc>
+            </a:pPr>
+            <a:r>
+              <a:rPr lang="en-US" altLang="zh-TW" sz="1200" dirty="0">
+                <a:solidFill>
+                  <a:schemeClr val="tx1"/>
+                </a:solidFill>
+                <a:latin typeface="ADLaM Display" panose="02010000000000000000" pitchFamily="2" charset="0"/>
+                <a:ea typeface="ADLaM Display" panose="02010000000000000000" pitchFamily="2" charset="0"/>
+                <a:cs typeface="ADLaM Display" panose="02010000000000000000" pitchFamily="2" charset="0"/>
+              </a:rPr>
+              <a:t>Apollo-Corpus</a:t>
+            </a:r>
+          </a:p>
+          <a:p>
+            <a:pPr>
+              <a:lnSpc>
+                <a:spcPts val="1600"/>
+              </a:lnSpc>
+            </a:pPr>
+            <a:r>
+              <a:rPr lang="en-US" altLang="zh-TW" sz="1200" dirty="0" err="1">
+                <a:solidFill>
+                  <a:schemeClr val="tx1"/>
+                </a:solidFill>
+                <a:latin typeface="ADLaM Display" panose="02010000000000000000" pitchFamily="2" charset="0"/>
+                <a:ea typeface="ADLaM Display" panose="02010000000000000000" pitchFamily="2" charset="0"/>
+                <a:cs typeface="ADLaM Display" panose="02010000000000000000" pitchFamily="2" charset="0"/>
+              </a:rPr>
+              <a:t>MedQA</a:t>
+            </a:r>
+            <a:r>
+              <a:rPr lang="en-US" altLang="zh-TW" sz="1200" dirty="0">
+                <a:solidFill>
+                  <a:schemeClr val="tx1"/>
+                </a:solidFill>
+                <a:latin typeface="ADLaM Display" panose="02010000000000000000" pitchFamily="2" charset="0"/>
+                <a:ea typeface="ADLaM Display" panose="02010000000000000000" pitchFamily="2" charset="0"/>
+                <a:cs typeface="ADLaM Display" panose="02010000000000000000" pitchFamily="2" charset="0"/>
+              </a:rPr>
+              <a:t>/USMLE</a:t>
+            </a:r>
+          </a:p>
+        </p:txBody>
+      </p:sp>
+      <p:sp>
+        <p:nvSpPr>
+          <p:cNvPr id="30" name="右大括弧 29">
+            <a:extLst>
+              <a:ext uri="{FF2B5EF4-FFF2-40B4-BE49-F238E27FC236}">
+                <a16:creationId xmlns:a16="http://schemas.microsoft.com/office/drawing/2014/main" id="{B83A3D07-2AFA-2CE6-EE68-6D15A90882C1}"/>
+              </a:ext>
+            </a:extLst>
+          </p:cNvPr>
+          <p:cNvSpPr/>
+          <p:nvPr/>
+        </p:nvSpPr>
+        <p:spPr>
+          <a:xfrm rot="16200000">
+            <a:off x="5776590" y="5515156"/>
+            <a:ext cx="85362" cy="1385657"/>
+          </a:xfrm>
+          <a:prstGeom prst="rightBrace">
+            <a:avLst/>
+          </a:prstGeom>
+          <a:noFill/>
+          <a:ln>
+            <a:solidFill>
+              <a:schemeClr val="tx1"/>
+            </a:solidFill>
+          </a:ln>
+        </p:spPr>
+        <p:style>
+          <a:lnRef idx="1">
+            <a:schemeClr val="accent1"/>
+          </a:lnRef>
+          <a:fillRef idx="0">
+            <a:schemeClr val="accent1"/>
+          </a:fillRef>
+          <a:effectRef idx="0">
+            <a:schemeClr val="accent1"/>
+          </a:effectRef>
+          <a:fontRef idx="minor">
+            <a:schemeClr val="tx1"/>
+          </a:fontRef>
+        </p:style>
+        <p:txBody>
+          <a:bodyPr rtlCol="0" anchor="ctr"/>
+          <a:lstStyle/>
+          <a:p>
+            <a:pPr algn="ctr"/>
+            <a:endParaRPr lang="zh-TW" altLang="en-US" dirty="0"/>
+          </a:p>
+        </p:txBody>
+      </p:sp>
+      <p:sp>
+        <p:nvSpPr>
+          <p:cNvPr id="32" name="矩形 31">
+            <a:extLst>
+              <a:ext uri="{FF2B5EF4-FFF2-40B4-BE49-F238E27FC236}">
+                <a16:creationId xmlns:a16="http://schemas.microsoft.com/office/drawing/2014/main" id="{64BC3F41-8024-C908-8ADC-35F66696A3CD}"/>
+              </a:ext>
+            </a:extLst>
+          </p:cNvPr>
+          <p:cNvSpPr/>
+          <p:nvPr/>
+        </p:nvSpPr>
+        <p:spPr>
+          <a:xfrm>
+            <a:off x="3857187" y="1925538"/>
+            <a:ext cx="1845800" cy="274677"/>
+          </a:xfrm>
+          <a:prstGeom prst="rect">
+            <a:avLst/>
+          </a:prstGeom>
+          <a:solidFill>
+            <a:schemeClr val="accent3">
+              <a:lumMod val="20000"/>
+              <a:lumOff val="80000"/>
+            </a:schemeClr>
+          </a:solidFill>
+          <a:ln w="12700">
+            <a:solidFill>
+              <a:srgbClr val="92D050"/>
+            </a:solidFill>
+          </a:ln>
+        </p:spPr>
+        <p:style>
+          <a:lnRef idx="2">
+            <a:schemeClr val="accent1">
+              <a:shade val="15000"/>
+            </a:schemeClr>
+          </a:lnRef>
+          <a:fillRef idx="1">
+            <a:schemeClr val="accent1"/>
+          </a:fillRef>
+          <a:effectRef idx="0">
+            <a:schemeClr val="accent1"/>
+          </a:effectRef>
+          <a:fontRef idx="minor">
+            <a:schemeClr val="lt1"/>
+          </a:fontRef>
+        </p:style>
+        <p:txBody>
+          <a:bodyPr wrap="none" lIns="91440" tIns="0" rIns="0" bIns="0" rtlCol="0" anchor="ctr" anchorCtr="0"/>
+          <a:lstStyle/>
+          <a:p>
+            <a:pPr>
+              <a:lnSpc>
+                <a:spcPts val="1600"/>
+              </a:lnSpc>
+            </a:pPr>
+            <a:r>
+              <a:rPr lang="en-US" altLang="zh-TW" sz="1200" dirty="0">
+                <a:solidFill>
+                  <a:schemeClr val="tx1"/>
+                </a:solidFill>
+                <a:latin typeface="ADLaM Display" panose="02010000000000000000" pitchFamily="2" charset="0"/>
+                <a:ea typeface="ADLaM Display" panose="02010000000000000000" pitchFamily="2" charset="0"/>
+                <a:cs typeface="ADLaM Display" panose="02010000000000000000" pitchFamily="2" charset="0"/>
+              </a:rPr>
+              <a:t>Genomic Variants</a:t>
+            </a:r>
+            <a:r>
+              <a:rPr lang="zh-TW" altLang="en-US" sz="1200" dirty="0">
+                <a:solidFill>
+                  <a:schemeClr val="tx1"/>
+                </a:solidFill>
+                <a:latin typeface="ADLaM Display" panose="02010000000000000000" pitchFamily="2" charset="0"/>
+                <a:ea typeface="ADLaM Display" panose="02010000000000000000" pitchFamily="2" charset="0"/>
+                <a:cs typeface="ADLaM Display" panose="02010000000000000000" pitchFamily="2" charset="0"/>
+              </a:rPr>
+              <a:t> </a:t>
+            </a:r>
+            <a:r>
+              <a:rPr lang="en-US" altLang="zh-TW" sz="1200" dirty="0">
+                <a:solidFill>
+                  <a:schemeClr val="tx1"/>
+                </a:solidFill>
+                <a:latin typeface="ADLaM Display" panose="02010000000000000000" pitchFamily="2" charset="0"/>
+                <a:ea typeface="ADLaM Display" panose="02010000000000000000" pitchFamily="2" charset="0"/>
+                <a:cs typeface="ADLaM Display" panose="02010000000000000000" pitchFamily="2" charset="0"/>
+              </a:rPr>
+              <a:t>API</a:t>
+            </a:r>
+          </a:p>
+        </p:txBody>
+      </p:sp>
+      <p:sp>
+        <p:nvSpPr>
+          <p:cNvPr id="34" name="矩形 33">
+            <a:extLst>
+              <a:ext uri="{FF2B5EF4-FFF2-40B4-BE49-F238E27FC236}">
+                <a16:creationId xmlns:a16="http://schemas.microsoft.com/office/drawing/2014/main" id="{9B95387A-8982-D2B1-AFA9-0B75FF57F2F8}"/>
+              </a:ext>
+            </a:extLst>
+          </p:cNvPr>
+          <p:cNvSpPr/>
+          <p:nvPr/>
+        </p:nvSpPr>
+        <p:spPr>
+          <a:xfrm>
+            <a:off x="3857187" y="2230600"/>
+            <a:ext cx="1845800" cy="274677"/>
+          </a:xfrm>
+          <a:prstGeom prst="rect">
+            <a:avLst/>
+          </a:prstGeom>
+          <a:solidFill>
+            <a:schemeClr val="accent3">
+              <a:lumMod val="20000"/>
+              <a:lumOff val="80000"/>
+            </a:schemeClr>
+          </a:solidFill>
+          <a:ln w="12700">
+            <a:solidFill>
+              <a:srgbClr val="92D050"/>
+            </a:solidFill>
+          </a:ln>
+        </p:spPr>
+        <p:style>
+          <a:lnRef idx="2">
+            <a:schemeClr val="accent1">
+              <a:shade val="15000"/>
+            </a:schemeClr>
+          </a:lnRef>
+          <a:fillRef idx="1">
+            <a:schemeClr val="accent1"/>
+          </a:fillRef>
+          <a:effectRef idx="0">
+            <a:schemeClr val="accent1"/>
+          </a:effectRef>
+          <a:fontRef idx="minor">
+            <a:schemeClr val="lt1"/>
+          </a:fontRef>
+        </p:style>
+        <p:txBody>
+          <a:bodyPr wrap="none" lIns="91440" tIns="0" rIns="0" bIns="0" rtlCol="0" anchor="ctr" anchorCtr="0"/>
+          <a:lstStyle/>
+          <a:p>
+            <a:pPr>
+              <a:lnSpc>
+                <a:spcPts val="1600"/>
+              </a:lnSpc>
+            </a:pPr>
+            <a:r>
+              <a:rPr lang="en-US" altLang="zh-TW" sz="1200" dirty="0">
+                <a:solidFill>
+                  <a:schemeClr val="tx1"/>
+                </a:solidFill>
+                <a:latin typeface="ADLaM Display" panose="02010000000000000000" pitchFamily="2" charset="0"/>
+                <a:ea typeface="ADLaM Display" panose="02010000000000000000" pitchFamily="2" charset="0"/>
+                <a:cs typeface="ADLaM Display" panose="02010000000000000000" pitchFamily="2" charset="0"/>
+              </a:rPr>
+              <a:t>Research Articles</a:t>
+            </a:r>
+            <a:r>
+              <a:rPr lang="zh-TW" altLang="en-US" sz="1200" dirty="0">
+                <a:solidFill>
+                  <a:schemeClr val="tx1"/>
+                </a:solidFill>
+                <a:latin typeface="ADLaM Display" panose="02010000000000000000" pitchFamily="2" charset="0"/>
+                <a:ea typeface="ADLaM Display" panose="02010000000000000000" pitchFamily="2" charset="0"/>
+                <a:cs typeface="ADLaM Display" panose="02010000000000000000" pitchFamily="2" charset="0"/>
+              </a:rPr>
+              <a:t> </a:t>
+            </a:r>
+            <a:r>
+              <a:rPr lang="en-US" altLang="zh-TW" sz="1200" dirty="0">
+                <a:solidFill>
+                  <a:schemeClr val="tx1"/>
+                </a:solidFill>
+                <a:latin typeface="ADLaM Display" panose="02010000000000000000" pitchFamily="2" charset="0"/>
+                <a:ea typeface="ADLaM Display" panose="02010000000000000000" pitchFamily="2" charset="0"/>
+                <a:cs typeface="ADLaM Display" panose="02010000000000000000" pitchFamily="2" charset="0"/>
+              </a:rPr>
+              <a:t>API</a:t>
+            </a:r>
+          </a:p>
+        </p:txBody>
+      </p:sp>
+      <p:sp>
+        <p:nvSpPr>
+          <p:cNvPr id="16" name="箭號: 向下 15">
+            <a:extLst>
+              <a:ext uri="{FF2B5EF4-FFF2-40B4-BE49-F238E27FC236}">
+                <a16:creationId xmlns:a16="http://schemas.microsoft.com/office/drawing/2014/main" id="{215D1878-B489-AFE3-A8C3-A6B0443A3968}"/>
+              </a:ext>
+            </a:extLst>
+          </p:cNvPr>
+          <p:cNvSpPr/>
+          <p:nvPr/>
+        </p:nvSpPr>
+        <p:spPr>
+          <a:xfrm rot="16200000">
+            <a:off x="2522781" y="1884010"/>
+            <a:ext cx="325849" cy="459874"/>
+          </a:xfrm>
+          <a:prstGeom prst="downArrow">
+            <a:avLst>
+              <a:gd name="adj1" fmla="val 62892"/>
+              <a:gd name="adj2" fmla="val 52184"/>
+            </a:avLst>
+          </a:prstGeom>
+          <a:solidFill>
+            <a:schemeClr val="accent4">
+              <a:lumMod val="20000"/>
+              <a:lumOff val="80000"/>
+            </a:schemeClr>
+          </a:solidFill>
+          <a:ln w="25400">
+            <a:solidFill>
+              <a:schemeClr val="accent4">
+                <a:lumMod val="60000"/>
+                <a:lumOff val="40000"/>
+              </a:schemeClr>
+            </a:solidFill>
+          </a:ln>
+        </p:spPr>
+        <p:style>
+          <a:lnRef idx="2">
+            <a:schemeClr val="accent1">
+              <a:shade val="15000"/>
+            </a:schemeClr>
+          </a:lnRef>
+          <a:fillRef idx="1">
+            <a:schemeClr val="accent1"/>
+          </a:fillRef>
+          <a:effectRef idx="0">
+            <a:schemeClr val="accent1"/>
+          </a:effectRef>
+          <a:fontRef idx="minor">
+            <a:schemeClr val="lt1"/>
+          </a:fontRef>
+        </p:style>
+        <p:txBody>
+          <a:bodyPr vert="eaVert" wrap="none" lIns="0" tIns="72000" rIns="0" bIns="0" rtlCol="0" anchor="ctr" anchorCtr="1"/>
+          <a:lstStyle/>
+          <a:p>
+            <a:pPr algn="ctr"/>
+            <a:r>
+              <a:rPr lang="en-US" altLang="zh-TW" sz="1200" b="1" dirty="0">
+                <a:solidFill>
+                  <a:schemeClr val="accent4">
+                    <a:lumMod val="75000"/>
+                  </a:schemeClr>
+                </a:solidFill>
+              </a:rPr>
+              <a:t>MCP</a:t>
+            </a:r>
+            <a:endParaRPr lang="zh-TW" altLang="en-US" sz="1200" b="1" dirty="0">
+              <a:solidFill>
+                <a:schemeClr val="accent4">
+                  <a:lumMod val="75000"/>
+                </a:schemeClr>
+              </a:solidFill>
+            </a:endParaRPr>
+          </a:p>
+        </p:txBody>
+      </p:sp>
+      <p:sp>
+        <p:nvSpPr>
+          <p:cNvPr id="38" name="矩形 37">
+            <a:extLst>
+              <a:ext uri="{FF2B5EF4-FFF2-40B4-BE49-F238E27FC236}">
+                <a16:creationId xmlns:a16="http://schemas.microsoft.com/office/drawing/2014/main" id="{F70D2D0B-D65D-A699-AC91-D431E8C49B8D}"/>
+              </a:ext>
+            </a:extLst>
+          </p:cNvPr>
+          <p:cNvSpPr/>
+          <p:nvPr/>
+        </p:nvSpPr>
+        <p:spPr>
+          <a:xfrm>
+            <a:off x="1444872" y="1570781"/>
+            <a:ext cx="859919" cy="307983"/>
+          </a:xfrm>
+          <a:prstGeom prst="rect">
+            <a:avLst/>
+          </a:prstGeom>
+          <a:solidFill>
+            <a:schemeClr val="accent1">
+              <a:lumMod val="20000"/>
+              <a:lumOff val="80000"/>
+              <a:alpha val="40000"/>
+            </a:schemeClr>
+          </a:solidFill>
+          <a:ln w="38100">
+            <a:solidFill>
+              <a:schemeClr val="tx2">
+                <a:lumMod val="60000"/>
+                <a:lumOff val="40000"/>
+                <a:alpha val="40000"/>
+              </a:schemeClr>
+            </a:solidFill>
+          </a:ln>
+        </p:spPr>
+        <p:style>
+          <a:lnRef idx="2">
+            <a:schemeClr val="accent1">
+              <a:shade val="15000"/>
+            </a:schemeClr>
+          </a:lnRef>
+          <a:fillRef idx="1">
+            <a:schemeClr val="accent1"/>
+          </a:fillRef>
+          <a:effectRef idx="0">
+            <a:schemeClr val="accent1"/>
+          </a:effectRef>
+          <a:fontRef idx="minor">
+            <a:schemeClr val="lt1"/>
+          </a:fontRef>
+        </p:style>
+        <p:txBody>
+          <a:bodyPr wrap="none" lIns="0" tIns="0" rIns="0" bIns="0" rtlCol="0" anchor="ctr" anchorCtr="1"/>
+          <a:lstStyle/>
+          <a:p>
+            <a:pPr algn="ctr"/>
+            <a:r>
+              <a:rPr lang="en-US" altLang="zh-TW" sz="1400" b="1" dirty="0">
+                <a:solidFill>
+                  <a:schemeClr val="tx2"/>
+                </a:solidFill>
+              </a:rPr>
+              <a:t>Gemma 4</a:t>
+            </a:r>
+            <a:endParaRPr lang="zh-TW" altLang="en-US" dirty="0"/>
+          </a:p>
+        </p:txBody>
+      </p:sp>
+      <p:sp>
+        <p:nvSpPr>
+          <p:cNvPr id="40" name="矩形 39">
+            <a:extLst>
+              <a:ext uri="{FF2B5EF4-FFF2-40B4-BE49-F238E27FC236}">
+                <a16:creationId xmlns:a16="http://schemas.microsoft.com/office/drawing/2014/main" id="{92F10185-96A3-36BA-42B0-0C7A06A7673D}"/>
+              </a:ext>
+            </a:extLst>
+          </p:cNvPr>
+          <p:cNvSpPr/>
+          <p:nvPr/>
+        </p:nvSpPr>
+        <p:spPr>
+          <a:xfrm>
+            <a:off x="1445069" y="1958534"/>
+            <a:ext cx="859919" cy="307983"/>
+          </a:xfrm>
+          <a:prstGeom prst="rect">
+            <a:avLst/>
+          </a:prstGeom>
+          <a:solidFill>
+            <a:schemeClr val="bg1">
+              <a:lumMod val="95000"/>
+            </a:schemeClr>
+          </a:solidFill>
+          <a:ln w="38100">
+            <a:solidFill>
+              <a:schemeClr val="bg1">
+                <a:lumMod val="75000"/>
+                <a:alpha val="80000"/>
+              </a:schemeClr>
+            </a:solidFill>
+          </a:ln>
+        </p:spPr>
+        <p:style>
+          <a:lnRef idx="2">
+            <a:schemeClr val="accent1">
+              <a:shade val="15000"/>
+            </a:schemeClr>
+          </a:lnRef>
+          <a:fillRef idx="1">
+            <a:schemeClr val="accent1"/>
+          </a:fillRef>
+          <a:effectRef idx="0">
+            <a:schemeClr val="accent1"/>
+          </a:effectRef>
+          <a:fontRef idx="minor">
+            <a:schemeClr val="lt1"/>
+          </a:fontRef>
+        </p:style>
+        <p:txBody>
+          <a:bodyPr wrap="none" lIns="0" tIns="0" rIns="0" bIns="0" rtlCol="0" anchor="ctr" anchorCtr="1"/>
+          <a:lstStyle/>
+          <a:p>
+            <a:pPr algn="ctr"/>
+            <a:r>
+              <a:rPr lang="en-US" altLang="zh-TW" sz="1400" b="1" dirty="0">
+                <a:solidFill>
+                  <a:schemeClr val="tx1">
+                    <a:lumMod val="85000"/>
+                    <a:lumOff val="15000"/>
+                  </a:schemeClr>
+                </a:solidFill>
+              </a:rPr>
+              <a:t>AI Agent</a:t>
+            </a:r>
+            <a:endParaRPr lang="zh-TW" altLang="en-US" dirty="0">
+              <a:solidFill>
+                <a:schemeClr val="tx1">
+                  <a:lumMod val="85000"/>
+                  <a:lumOff val="15000"/>
+                </a:schemeClr>
+              </a:solidFill>
+            </a:endParaRPr>
+          </a:p>
+        </p:txBody>
+      </p:sp>
+    </p:spTree>
+    <p:extLst>
+      <p:ext uri="{BB962C8B-B14F-4D97-AF65-F5344CB8AC3E}">
+        <p14:creationId xmlns:p14="http://schemas.microsoft.com/office/powerpoint/2010/main" val="2079404579"/>
+      </p:ext>
+    </p:extLst>
+  </p:cSld>
+  <p:clrMapOvr>
+    <a:masterClrMapping/>
+  </p:clrMapOvr>
+  <mc:AlternateContent xmlns:mc="http://schemas.openxmlformats.org/markup-compatibility/2006" xmlns:p159="http://schemas.microsoft.com/office/powerpoint/2015/09/main">
+    <mc:Choice Requires="p159">
+      <p:transition xmlns:p14="http://schemas.microsoft.com/office/powerpoint/2010/main" spd="slow" p14:dur="2000" advClick="0">
+        <p159:morph option="byObject"/>
+      </p:transition>
+    </mc:Choice>
+    <mc:Fallback xmlns="">
+      <p:transition spd="slow" advClick="0">
+        <p:fade/>
+      </p:transition>
+    </mc:Fallback>
+  </mc:AlternateContent>
+</p:sld>
+</file>
+
+<file path=ppt/slides/slide6.xml><?xml version="1.0" encoding="utf-8"?>
 <p:sld xmlns:a="http://schemas.openxmlformats.org/drawingml/2006/main" xmlns:r="http://schemas.openxmlformats.org/officeDocument/2006/relationships" xmlns:p="http://schemas.openxmlformats.org/presentationml/2006/main">
   <p:cSld>
     <p:spTree>
@@ -6719,7 +8868,7 @@
 </p:sld>
 </file>
 
-<file path=ppt/slides/slide5.xml><?xml version="1.0" encoding="utf-8"?>
+<file path=ppt/slides/slide7.xml><?xml version="1.0" encoding="utf-8"?>
 <p:sld xmlns:a="http://schemas.openxmlformats.org/drawingml/2006/main" xmlns:r="http://schemas.openxmlformats.org/officeDocument/2006/relationships" xmlns:p="http://schemas.openxmlformats.org/presentationml/2006/main">
   <p:cSld>
     <p:spTree>
@@ -7721,7 +9870,7 @@
 </p:sld>
 </file>
 
-<file path=ppt/slides/slide6.xml><?xml version="1.0" encoding="utf-8"?>
+<file path=ppt/slides/slide8.xml><?xml version="1.0" encoding="utf-8"?>
 <p:sld xmlns:a="http://schemas.openxmlformats.org/drawingml/2006/main" xmlns:r="http://schemas.openxmlformats.org/officeDocument/2006/relationships" xmlns:p="http://schemas.openxmlformats.org/presentationml/2006/main">
   <p:cSld>
     <p:spTree>
@@ -8337,7 +10486,7 @@
 </p:sld>
 </file>
 
-<file path=ppt/slides/slide7.xml><?xml version="1.0" encoding="utf-8"?>
+<file path=ppt/slides/slide9.xml><?xml version="1.0" encoding="utf-8"?>
 <p:sld xmlns:a="http://schemas.openxmlformats.org/drawingml/2006/main" xmlns:r="http://schemas.openxmlformats.org/officeDocument/2006/relationships" xmlns:p="http://schemas.openxmlformats.org/presentationml/2006/main">
   <p:cSld>
     <p:spTree>

--- a/bio-it-agent.pptx
+++ b/bio-it-agent.pptx
@@ -5,10 +5,10 @@
     <p:sldMasterId id="2147483648" r:id="rId1"/>
   </p:sldMasterIdLst>
   <p:notesMasterIdLst>
-    <p:notesMasterId r:id="rId11"/>
+    <p:notesMasterId r:id="rId10"/>
   </p:notesMasterIdLst>
   <p:handoutMasterIdLst>
-    <p:handoutMasterId r:id="rId12"/>
+    <p:handoutMasterId r:id="rId11"/>
   </p:handoutMasterIdLst>
   <p:sldIdLst>
     <p:sldId id="3459" r:id="rId2"/>
@@ -19,7 +19,6 @@
     <p:sldId id="3528" r:id="rId7"/>
     <p:sldId id="3527" r:id="rId8"/>
     <p:sldId id="3518" r:id="rId9"/>
-    <p:sldId id="3519" r:id="rId10"/>
   </p:sldIdLst>
   <p:sldSz cx="9144000" cy="6858000" type="screen4x3"/>
   <p:notesSz cx="6797675" cy="9925050"/>
@@ -131,7 +130,6 @@
             <p14:sldId id="3528"/>
             <p14:sldId id="3527"/>
             <p14:sldId id="3518"/>
-            <p14:sldId id="3519"/>
           </p14:sldIdLst>
         </p14:section>
       </p14:sectionLst>
@@ -257,7 +255,7 @@
           <a:p>
             <a:fld id="{982F7CBC-87DD-4F69-8F50-7ED68F7FF790}" type="datetimeFigureOut">
               <a:rPr lang="zh-TW" altLang="en-US" smtClean="0"/>
-              <a:t>2026/7/28</a:t>
+              <a:t>2026/7/29</a:t>
             </a:fld>
             <a:endParaRPr lang="zh-TW" altLang="en-US"/>
           </a:p>
@@ -434,7 +432,7 @@
           <a:p>
             <a:fld id="{863167AA-796B-4B6A-95ED-1C0BCB3E5802}" type="datetimeFigureOut">
               <a:rPr lang="zh-TW" altLang="en-US" smtClean="0"/>
-              <a:t>2026/7/28</a:t>
+              <a:t>2026/7/29</a:t>
             </a:fld>
             <a:endParaRPr lang="zh-TW" altLang="en-US"/>
           </a:p>
@@ -2963,27 +2961,7 @@
                 <a:latin typeface="微軟正黑體" panose="020B0604030504040204" pitchFamily="34" charset="-120"/>
                 <a:ea typeface="微軟正黑體" panose="020B0604030504040204" pitchFamily="34" charset="-120"/>
               </a:rPr>
-              <a:t>: </a:t>
-            </a:r>
-            <a:r>
-              <a:rPr lang="en-US" altLang="zh-TW" sz="1200" dirty="0" err="1">
-                <a:solidFill>
-                  <a:schemeClr val="tx1"/>
-                </a:solidFill>
-                <a:latin typeface="微軟正黑體" panose="020B0604030504040204" pitchFamily="34" charset="-120"/>
-                <a:ea typeface="微軟正黑體" panose="020B0604030504040204" pitchFamily="34" charset="-120"/>
-              </a:rPr>
-              <a:t>Ollama</a:t>
-            </a:r>
-            <a:r>
-              <a:rPr lang="en-US" altLang="zh-TW" sz="1200" dirty="0">
-                <a:solidFill>
-                  <a:schemeClr val="tx1"/>
-                </a:solidFill>
-                <a:latin typeface="微軟正黑體" panose="020B0604030504040204" pitchFamily="34" charset="-120"/>
-                <a:ea typeface="微軟正黑體" panose="020B0604030504040204" pitchFamily="34" charset="-120"/>
-              </a:rPr>
-              <a:t>,</a:t>
+              <a:t>: Ollama,</a:t>
             </a:r>
             <a:r>
               <a:rPr lang="zh-TW" altLang="en-US" sz="1200" dirty="0">
@@ -3050,25 +3028,8 @@
                 <a:latin typeface="微軟正黑體" panose="020B0604030504040204" pitchFamily="34" charset="-120"/>
                 <a:ea typeface="微軟正黑體" panose="020B0604030504040204" pitchFamily="34" charset="-120"/>
               </a:rPr>
-              <a:t>HF-TRL, </a:t>
-            </a:r>
-            <a:r>
-              <a:rPr lang="en-US" altLang="zh-TW" sz="1200" dirty="0" err="1">
-                <a:solidFill>
-                  <a:schemeClr val="tx1"/>
-                </a:solidFill>
-                <a:latin typeface="微軟正黑體" panose="020B0604030504040204" pitchFamily="34" charset="-120"/>
-                <a:ea typeface="微軟正黑體" panose="020B0604030504040204" pitchFamily="34" charset="-120"/>
-              </a:rPr>
-              <a:t>Unsloth</a:t>
-            </a:r>
-            <a:endParaRPr lang="en-US" altLang="zh-TW" sz="1200" dirty="0">
-              <a:solidFill>
-                <a:schemeClr val="tx1"/>
-              </a:solidFill>
-              <a:latin typeface="微軟正黑體" panose="020B0604030504040204" pitchFamily="34" charset="-120"/>
-              <a:ea typeface="微軟正黑體" panose="020B0604030504040204" pitchFamily="34" charset="-120"/>
-            </a:endParaRPr>
+              <a:t>HF-TRL, Unsloth</a:t>
+            </a:r>
           </a:p>
         </p:txBody>
       </p:sp>
@@ -3290,16 +3251,6 @@
               <a:t>調用</a:t>
             </a:r>
             <a:r>
-              <a:rPr lang="en-US" altLang="zh-TW" sz="1200" dirty="0" err="1">
-                <a:solidFill>
-                  <a:schemeClr val="tx1"/>
-                </a:solidFill>
-                <a:latin typeface="微軟正黑體" panose="020B0604030504040204" pitchFamily="34" charset="-120"/>
-                <a:ea typeface="微軟正黑體" panose="020B0604030504040204" pitchFamily="34" charset="-120"/>
-              </a:rPr>
-              <a:t>gonoAD</a:t>
-            </a:r>
-            <a:r>
               <a:rPr lang="en-US" altLang="zh-TW" sz="1200" dirty="0">
                 <a:solidFill>
                   <a:schemeClr val="tx1"/>
@@ -3307,7 +3258,7 @@
                 <a:latin typeface="微軟正黑體" panose="020B0604030504040204" pitchFamily="34" charset="-120"/>
                 <a:ea typeface="微軟正黑體" panose="020B0604030504040204" pitchFamily="34" charset="-120"/>
               </a:rPr>
-              <a:t>:</a:t>
+              <a:t>gonoAD:</a:t>
             </a:r>
             <a:r>
               <a:rPr lang="zh-TW" altLang="en-US" sz="1200" dirty="0">
@@ -3327,27 +3278,7 @@
                 <a:latin typeface="微軟正黑體" panose="020B0604030504040204" pitchFamily="34" charset="-120"/>
                 <a:ea typeface="微軟正黑體" panose="020B0604030504040204" pitchFamily="34" charset="-120"/>
               </a:rPr>
-              <a:t> </a:t>
-            </a:r>
-            <a:r>
-              <a:rPr lang="en-US" altLang="zh-TW" sz="1200" dirty="0" err="1">
-                <a:solidFill>
-                  <a:schemeClr val="tx1"/>
-                </a:solidFill>
-                <a:latin typeface="微軟正黑體" panose="020B0604030504040204" pitchFamily="34" charset="-120"/>
-                <a:ea typeface="微軟正黑體" panose="020B0604030504040204" pitchFamily="34" charset="-120"/>
-              </a:rPr>
-              <a:t>GraphQL</a:t>
-            </a:r>
-            <a:r>
-              <a:rPr lang="en-US" altLang="zh-TW" sz="1200" dirty="0">
-                <a:solidFill>
-                  <a:schemeClr val="tx1"/>
-                </a:solidFill>
-                <a:latin typeface="微軟正黑體" panose="020B0604030504040204" pitchFamily="34" charset="-120"/>
-                <a:ea typeface="微軟正黑體" panose="020B0604030504040204" pitchFamily="34" charset="-120"/>
-              </a:rPr>
-              <a:t> </a:t>
+              <a:t> GraphQL </a:t>
             </a:r>
           </a:p>
         </p:txBody>
@@ -3533,7 +3464,7 @@
               <a:t> 使用</a:t>
             </a:r>
             <a:r>
-              <a:rPr lang="en-US" altLang="zh-TW" sz="1200" dirty="0" err="1">
+              <a:rPr lang="en-US" altLang="zh-TW" sz="1200" dirty="0">
                 <a:solidFill>
                   <a:schemeClr val="tx1"/>
                 </a:solidFill>
@@ -3778,7 +3709,7 @@
               <a:t>使用</a:t>
             </a:r>
             <a:r>
-              <a:rPr lang="en-US" altLang="zh-TW" sz="1200" dirty="0" err="1">
+              <a:rPr lang="en-US" altLang="zh-TW" sz="1200" dirty="0">
                 <a:solidFill>
                   <a:schemeClr val="tx1"/>
                 </a:solidFill>
@@ -3871,18 +3802,11 @@
               </a:lnSpc>
             </a:pPr>
             <a:r>
-              <a:rPr lang="en-US" altLang="zh-TW" sz="1100" dirty="0" err="1">
-                <a:latin typeface="微軟正黑體" panose="020B0604030504040204" pitchFamily="34" charset="-120"/>
-                <a:ea typeface="微軟正黑體" panose="020B0604030504040204" pitchFamily="34" charset="-120"/>
-              </a:rPr>
-              <a:t>MedQA</a:t>
-            </a:r>
-            <a:r>
               <a:rPr lang="en-US" altLang="zh-TW" sz="1100" dirty="0">
                 <a:latin typeface="微軟正黑體" panose="020B0604030504040204" pitchFamily="34" charset="-120"/>
                 <a:ea typeface="微軟正黑體" panose="020B0604030504040204" pitchFamily="34" charset="-120"/>
               </a:rPr>
-              <a:t> / USMLE: </a:t>
+              <a:t>MedQA / USMLE: </a:t>
             </a:r>
             <a:endParaRPr lang="en-US" altLang="zh-TW" sz="1100" dirty="0">
               <a:solidFill>
@@ -4037,7 +3961,7 @@
         </p:nvSpPr>
         <p:spPr>
           <a:xfrm>
-            <a:off x="2281896" y="4424279"/>
+            <a:off x="5697563" y="5373216"/>
             <a:ext cx="3033034" cy="1185267"/>
           </a:xfrm>
           <a:prstGeom prst="rect">
@@ -5274,7 +5198,7 @@
         </p:nvSpPr>
         <p:spPr>
           <a:xfrm>
-            <a:off x="3583344" y="1318481"/>
+            <a:off x="3583344" y="1052736"/>
             <a:ext cx="646161" cy="284703"/>
           </a:xfrm>
           <a:prstGeom prst="rect">
@@ -5321,8 +5245,8 @@
         </p:nvCxnSpPr>
         <p:spPr>
           <a:xfrm>
-            <a:off x="3906425" y="1603184"/>
-            <a:ext cx="0" cy="137370"/>
+            <a:off x="3906425" y="1337439"/>
+            <a:ext cx="0" cy="403115"/>
           </a:xfrm>
           <a:prstGeom prst="straightConnector1">
             <a:avLst/>
@@ -5774,42 +5698,6 @@
           </a:p>
         </p:txBody>
       </p:sp>
-      <p:pic>
-        <p:nvPicPr>
-          <p:cNvPr id="24" name="圖形 23" descr="資料庫 以實心填滿">
-            <a:extLst>
-              <a:ext uri="{FF2B5EF4-FFF2-40B4-BE49-F238E27FC236}">
-                <a16:creationId xmlns:a16="http://schemas.microsoft.com/office/drawing/2014/main" id="{B85E4695-C665-7B6B-CC37-C916F94A44E3}"/>
-              </a:ext>
-            </a:extLst>
-          </p:cNvPr>
-          <p:cNvPicPr>
-            <a:picLocks noChangeAspect="1"/>
-          </p:cNvPicPr>
-          <p:nvPr/>
-        </p:nvPicPr>
-        <p:blipFill>
-          <a:blip>
-            <a:extLst>
-              <a:ext uri="{96DAC541-7B7A-43D3-8B79-37D633B846F1}">
-                <asvg:svgBlip xmlns:asvg="http://schemas.microsoft.com/office/drawing/2016/SVG/main" r:embed="rId6"/>
-              </a:ext>
-            </a:extLst>
-          </a:blip>
-          <a:stretch>
-            <a:fillRect/>
-          </a:stretch>
-        </p:blipFill>
-        <p:spPr>
-          <a:xfrm>
-            <a:off x="5459888" y="1699852"/>
-            <a:ext cx="513450" cy="513450"/>
-          </a:xfrm>
-          <a:prstGeom prst="rect">
-            <a:avLst/>
-          </a:prstGeom>
-        </p:spPr>
-      </p:pic>
       <p:sp>
         <p:nvSpPr>
           <p:cNvPr id="26" name="右大括弧 25">
@@ -5857,6 +5745,280 @@
           <a:p>
             <a:pPr algn="ctr"/>
             <a:endParaRPr lang="zh-TW" altLang="en-US" dirty="0"/>
+          </a:p>
+        </p:txBody>
+      </p:sp>
+      <p:sp>
+        <p:nvSpPr>
+          <p:cNvPr id="18" name="矩形 17">
+            <a:extLst>
+              <a:ext uri="{FF2B5EF4-FFF2-40B4-BE49-F238E27FC236}">
+                <a16:creationId xmlns:a16="http://schemas.microsoft.com/office/drawing/2014/main" id="{757D1422-5DA7-0C0B-092B-4BE535F5A53F}"/>
+              </a:ext>
+            </a:extLst>
+          </p:cNvPr>
+          <p:cNvSpPr/>
+          <p:nvPr/>
+        </p:nvSpPr>
+        <p:spPr>
+          <a:xfrm>
+            <a:off x="3119227" y="1730269"/>
+            <a:ext cx="585275" cy="398634"/>
+          </a:xfrm>
+          <a:prstGeom prst="rect">
+            <a:avLst/>
+          </a:prstGeom>
+          <a:noFill/>
+          <a:ln w="38100">
+            <a:noFill/>
+          </a:ln>
+        </p:spPr>
+        <p:style>
+          <a:lnRef idx="2">
+            <a:schemeClr val="accent1">
+              <a:shade val="15000"/>
+            </a:schemeClr>
+          </a:lnRef>
+          <a:fillRef idx="1">
+            <a:schemeClr val="accent1"/>
+          </a:fillRef>
+          <a:effectRef idx="0">
+            <a:schemeClr val="accent1"/>
+          </a:effectRef>
+          <a:fontRef idx="minor">
+            <a:schemeClr val="lt1"/>
+          </a:fontRef>
+        </p:style>
+        <p:txBody>
+          <a:bodyPr wrap="none" lIns="0" tIns="0" rIns="0" bIns="0" rtlCol="0" anchor="ctr" anchorCtr="1"/>
+          <a:lstStyle/>
+          <a:p>
+            <a:pPr algn="ctr">
+              <a:lnSpc>
+                <a:spcPts val="1200"/>
+              </a:lnSpc>
+            </a:pPr>
+            <a:r>
+              <a:rPr lang="en-US" altLang="zh-TW" sz="1000" dirty="0">
+                <a:solidFill>
+                  <a:schemeClr val="tx2"/>
+                </a:solidFill>
+                <a:latin typeface="ADLaM Display" panose="02010000000000000000" pitchFamily="2" charset="0"/>
+                <a:ea typeface="ADLaM Display" panose="02010000000000000000" pitchFamily="2" charset="0"/>
+                <a:cs typeface="ADLaM Display" panose="02010000000000000000" pitchFamily="2" charset="0"/>
+              </a:rPr>
+              <a:t>Bio-AI</a:t>
+            </a:r>
+          </a:p>
+          <a:p>
+            <a:pPr algn="ctr">
+              <a:lnSpc>
+                <a:spcPts val="1200"/>
+              </a:lnSpc>
+            </a:pPr>
+            <a:r>
+              <a:rPr lang="en-US" altLang="zh-TW" sz="1000" dirty="0">
+                <a:solidFill>
+                  <a:schemeClr val="tx2"/>
+                </a:solidFill>
+                <a:latin typeface="ADLaM Display" panose="02010000000000000000" pitchFamily="2" charset="0"/>
+                <a:ea typeface="ADLaM Display" panose="02010000000000000000" pitchFamily="2" charset="0"/>
+                <a:cs typeface="ADLaM Display" panose="02010000000000000000" pitchFamily="2" charset="0"/>
+              </a:rPr>
+              <a:t>Agent</a:t>
+            </a:r>
+          </a:p>
+        </p:txBody>
+      </p:sp>
+      <p:sp>
+        <p:nvSpPr>
+          <p:cNvPr id="23" name="矩形 22">
+            <a:extLst>
+              <a:ext uri="{FF2B5EF4-FFF2-40B4-BE49-F238E27FC236}">
+                <a16:creationId xmlns:a16="http://schemas.microsoft.com/office/drawing/2014/main" id="{C2D3571A-B004-AFB9-882A-55F61C5BF45F}"/>
+              </a:ext>
+            </a:extLst>
+          </p:cNvPr>
+          <p:cNvSpPr/>
+          <p:nvPr/>
+        </p:nvSpPr>
+        <p:spPr>
+          <a:xfrm>
+            <a:off x="4835732" y="2374101"/>
+            <a:ext cx="1959735" cy="1185267"/>
+          </a:xfrm>
+          <a:prstGeom prst="rect">
+            <a:avLst/>
+          </a:prstGeom>
+          <a:noFill/>
+          <a:ln w="12700">
+            <a:noFill/>
+          </a:ln>
+        </p:spPr>
+        <p:style>
+          <a:lnRef idx="2">
+            <a:schemeClr val="accent1">
+              <a:shade val="15000"/>
+            </a:schemeClr>
+          </a:lnRef>
+          <a:fillRef idx="1">
+            <a:schemeClr val="accent1"/>
+          </a:fillRef>
+          <a:effectRef idx="0">
+            <a:schemeClr val="accent1"/>
+          </a:effectRef>
+          <a:fontRef idx="minor">
+            <a:schemeClr val="lt1"/>
+          </a:fontRef>
+        </p:style>
+        <p:txBody>
+          <a:bodyPr wrap="none" lIns="91440" tIns="0" rIns="0" bIns="0" rtlCol="0" anchor="ctr" anchorCtr="0"/>
+          <a:lstStyle/>
+          <a:p>
+            <a:pPr>
+              <a:lnSpc>
+                <a:spcPts val="1200"/>
+              </a:lnSpc>
+            </a:pPr>
+            <a:r>
+              <a:rPr lang="en-US" altLang="zh-TW" sz="1200" dirty="0">
+                <a:solidFill>
+                  <a:schemeClr val="tx1"/>
+                </a:solidFill>
+                <a:latin typeface="ADLaM Display" panose="02010000000000000000" pitchFamily="2" charset="0"/>
+                <a:ea typeface="ADLaM Display" panose="02010000000000000000" pitchFamily="2" charset="0"/>
+                <a:cs typeface="ADLaM Display" panose="02010000000000000000" pitchFamily="2" charset="0"/>
+              </a:rPr>
+              <a:t>CPT</a:t>
+            </a:r>
+          </a:p>
+          <a:p>
+            <a:pPr>
+              <a:lnSpc>
+                <a:spcPts val="1200"/>
+              </a:lnSpc>
+            </a:pPr>
+            <a:r>
+              <a:rPr lang="en-US" altLang="zh-TW" sz="1000" dirty="0">
+                <a:solidFill>
+                  <a:schemeClr val="tx2"/>
+                </a:solidFill>
+                <a:ea typeface="ADLaM Display" panose="02010000000000000000" pitchFamily="2" charset="0"/>
+                <a:cs typeface="ADLaM Display" panose="02010000000000000000" pitchFamily="2" charset="0"/>
+              </a:rPr>
+              <a:t>(Centrillion Power Tool)</a:t>
+            </a:r>
+          </a:p>
+          <a:p>
+            <a:pPr>
+              <a:lnSpc>
+                <a:spcPts val="1600"/>
+              </a:lnSpc>
+            </a:pPr>
+            <a:r>
+              <a:rPr lang="en-US" altLang="zh-TW" sz="1200" dirty="0">
+                <a:solidFill>
+                  <a:schemeClr val="tx1"/>
+                </a:solidFill>
+                <a:ea typeface="ADLaM Display" panose="02010000000000000000" pitchFamily="2" charset="0"/>
+                <a:cs typeface="ADLaM Display" panose="02010000000000000000" pitchFamily="2" charset="0"/>
+              </a:rPr>
+              <a:t>Base on BioPython, PyVCF …</a:t>
+            </a:r>
+          </a:p>
+          <a:p>
+            <a:pPr>
+              <a:lnSpc>
+                <a:spcPts val="1600"/>
+              </a:lnSpc>
+            </a:pPr>
+            <a:endParaRPr lang="en-US" altLang="zh-TW" sz="1200" dirty="0">
+              <a:solidFill>
+                <a:schemeClr val="tx1"/>
+              </a:solidFill>
+              <a:ea typeface="ADLaM Display" panose="02010000000000000000" pitchFamily="2" charset="0"/>
+              <a:cs typeface="ADLaM Display" panose="02010000000000000000" pitchFamily="2" charset="0"/>
+            </a:endParaRPr>
+          </a:p>
+          <a:p>
+            <a:pPr marL="0" marR="0" lvl="0" indent="0" algn="l" defTabSz="914400" rtl="0" eaLnBrk="1" fontAlgn="auto" latinLnBrk="0" hangingPunct="1">
+              <a:lnSpc>
+                <a:spcPts val="1200"/>
+              </a:lnSpc>
+              <a:spcBef>
+                <a:spcPts val="0"/>
+              </a:spcBef>
+              <a:spcAft>
+                <a:spcPts val="0"/>
+              </a:spcAft>
+              <a:buClrTx/>
+              <a:buSzTx/>
+              <a:buFontTx/>
+              <a:buNone/>
+              <a:tabLst/>
+              <a:defRPr/>
+            </a:pPr>
+            <a:r>
+              <a:rPr lang="en-US" altLang="zh-TW" sz="1200" dirty="0">
+                <a:solidFill>
+                  <a:prstClr val="black"/>
+                </a:solidFill>
+                <a:latin typeface="ADLaM Display" panose="02010000000000000000" pitchFamily="2" charset="0"/>
+                <a:ea typeface="ADLaM Display" panose="02010000000000000000" pitchFamily="2" charset="0"/>
+                <a:cs typeface="ADLaM Display" panose="02010000000000000000" pitchFamily="2" charset="0"/>
+              </a:rPr>
+              <a:t>BioMCP</a:t>
+            </a:r>
+            <a:endParaRPr kumimoji="0" lang="en-US" altLang="zh-TW" sz="1200" b="0" i="0" u="none" strike="noStrike" kern="1200" cap="none" spc="0" normalizeH="0" baseline="0" noProof="0" dirty="0">
+              <a:ln>
+                <a:noFill/>
+              </a:ln>
+              <a:solidFill>
+                <a:prstClr val="black"/>
+              </a:solidFill>
+              <a:effectLst/>
+              <a:uLnTx/>
+              <a:uFillTx/>
+              <a:latin typeface="ADLaM Display" panose="02010000000000000000" pitchFamily="2" charset="0"/>
+              <a:ea typeface="ADLaM Display" panose="02010000000000000000" pitchFamily="2" charset="0"/>
+              <a:cs typeface="ADLaM Display" panose="02010000000000000000" pitchFamily="2" charset="0"/>
+            </a:endParaRPr>
+          </a:p>
+          <a:p>
+            <a:pPr marL="0" marR="0" lvl="0" indent="0" algn="l" defTabSz="914400" rtl="0" eaLnBrk="1" fontAlgn="auto" latinLnBrk="0" hangingPunct="1">
+              <a:lnSpc>
+                <a:spcPts val="1200"/>
+              </a:lnSpc>
+              <a:spcBef>
+                <a:spcPts val="0"/>
+              </a:spcBef>
+              <a:spcAft>
+                <a:spcPts val="0"/>
+              </a:spcAft>
+              <a:buClrTx/>
+              <a:buSzTx/>
+              <a:buFontTx/>
+              <a:buNone/>
+              <a:tabLst/>
+              <a:defRPr/>
+            </a:pPr>
+            <a:r>
+              <a:rPr kumimoji="0" lang="en-US" altLang="zh-TW" sz="1000" b="0" i="0" u="none" strike="noStrike" kern="1200" cap="none" spc="0" normalizeH="0" baseline="0" noProof="0" dirty="0">
+                <a:ln>
+                  <a:noFill/>
+                </a:ln>
+                <a:solidFill>
+                  <a:srgbClr val="1F497D"/>
+                </a:solidFill>
+                <a:effectLst/>
+                <a:uLnTx/>
+                <a:uFillTx/>
+                <a:latin typeface="Calibri"/>
+                <a:ea typeface="ADLaM Display" panose="02010000000000000000" pitchFamily="2" charset="0"/>
+                <a:cs typeface="ADLaM Display" panose="02010000000000000000" pitchFamily="2" charset="0"/>
+              </a:rPr>
+              <a:t>(External Database)</a:t>
+            </a:r>
           </a:p>
         </p:txBody>
       </p:sp>
@@ -5910,6 +6072,81 @@
       </p:grpSpPr>
       <p:sp>
         <p:nvSpPr>
+          <p:cNvPr id="12" name="矩形 11">
+            <a:extLst>
+              <a:ext uri="{FF2B5EF4-FFF2-40B4-BE49-F238E27FC236}">
+                <a16:creationId xmlns:a16="http://schemas.microsoft.com/office/drawing/2014/main" id="{29519B75-C16B-BC56-3A1F-B0992731039F}"/>
+              </a:ext>
+            </a:extLst>
+          </p:cNvPr>
+          <p:cNvSpPr/>
+          <p:nvPr/>
+        </p:nvSpPr>
+        <p:spPr>
+          <a:xfrm>
+            <a:off x="971600" y="1916832"/>
+            <a:ext cx="1656184" cy="1624722"/>
+          </a:xfrm>
+          <a:prstGeom prst="rect">
+            <a:avLst/>
+          </a:prstGeom>
+          <a:solidFill>
+            <a:schemeClr val="accent6">
+              <a:lumMod val="20000"/>
+              <a:lumOff val="80000"/>
+              <a:alpha val="60000"/>
+            </a:schemeClr>
+          </a:solidFill>
+          <a:ln w="38100">
+            <a:solidFill>
+              <a:schemeClr val="bg1">
+                <a:lumMod val="75000"/>
+                <a:alpha val="40000"/>
+              </a:schemeClr>
+            </a:solidFill>
+          </a:ln>
+        </p:spPr>
+        <p:style>
+          <a:lnRef idx="2">
+            <a:schemeClr val="accent1">
+              <a:shade val="15000"/>
+            </a:schemeClr>
+          </a:lnRef>
+          <a:fillRef idx="1">
+            <a:schemeClr val="accent1"/>
+          </a:fillRef>
+          <a:effectRef idx="0">
+            <a:schemeClr val="accent1"/>
+          </a:effectRef>
+          <a:fontRef idx="minor">
+            <a:schemeClr val="lt1"/>
+          </a:fontRef>
+        </p:style>
+        <p:txBody>
+          <a:bodyPr wrap="none" lIns="0" tIns="91440" rIns="91440" bIns="0" rtlCol="0" anchor="t" anchorCtr="0"/>
+          <a:lstStyle/>
+          <a:p>
+            <a:pPr algn="r">
+              <a:lnSpc>
+                <a:spcPts val="1600"/>
+              </a:lnSpc>
+            </a:pPr>
+            <a:r>
+              <a:rPr lang="en-US" altLang="zh-TW" sz="1200" dirty="0">
+                <a:solidFill>
+                  <a:schemeClr val="tx2"/>
+                </a:solidFill>
+                <a:latin typeface="ADLaM Display" panose="02010000000000000000" pitchFamily="2" charset="0"/>
+                <a:ea typeface="ADLaM Display" panose="02010000000000000000" pitchFamily="2" charset="0"/>
+                <a:cs typeface="ADLaM Display" panose="02010000000000000000" pitchFamily="2" charset="0"/>
+              </a:rPr>
+              <a:t>SFT</a:t>
+            </a:r>
+          </a:p>
+        </p:txBody>
+      </p:sp>
+      <p:sp>
+        <p:nvSpPr>
           <p:cNvPr id="19" name="矩形 18">
             <a:extLst>
               <a:ext uri="{FF2B5EF4-FFF2-40B4-BE49-F238E27FC236}">
@@ -5922,15 +6159,23 @@
         </p:nvSpPr>
         <p:spPr>
           <a:xfrm>
-            <a:off x="4204321" y="755419"/>
-            <a:ext cx="1844242" cy="274677"/>
+            <a:off x="4067945" y="2038867"/>
+            <a:ext cx="1974169" cy="427605"/>
           </a:xfrm>
           <a:prstGeom prst="rect">
             <a:avLst/>
           </a:prstGeom>
-          <a:noFill/>
+          <a:solidFill>
+            <a:schemeClr val="bg1">
+              <a:lumMod val="95000"/>
+            </a:schemeClr>
+          </a:solidFill>
           <a:ln w="12700">
-            <a:noFill/>
+            <a:solidFill>
+              <a:schemeClr val="bg1">
+                <a:lumMod val="85000"/>
+              </a:schemeClr>
+            </a:solidFill>
           </a:ln>
         </p:spPr>
         <p:style>
@@ -5953,90 +6198,21 @@
           <a:bodyPr wrap="none" lIns="91440" tIns="0" rIns="0" bIns="0" rtlCol="0" anchor="ctr" anchorCtr="0"/>
           <a:lstStyle/>
           <a:p>
-            <a:pPr algn="ctr">
-              <a:lnSpc>
-                <a:spcPts val="1600"/>
-              </a:lnSpc>
-            </a:pPr>
-            <a:r>
-              <a:rPr lang="en-US" altLang="zh-TW" sz="1200" dirty="0">
-                <a:solidFill>
-                  <a:schemeClr val="tx1"/>
-                </a:solidFill>
-                <a:latin typeface="ADLaM Display" panose="02010000000000000000" pitchFamily="2" charset="0"/>
-                <a:ea typeface="ADLaM Display" panose="02010000000000000000" pitchFamily="2" charset="0"/>
-                <a:cs typeface="ADLaM Display" panose="02010000000000000000" pitchFamily="2" charset="0"/>
-              </a:rPr>
-              <a:t>Apollo-Corpus</a:t>
-            </a:r>
-          </a:p>
-        </p:txBody>
-      </p:sp>
-      <p:sp>
-        <p:nvSpPr>
-          <p:cNvPr id="37" name="矩形 36">
-            <a:extLst>
-              <a:ext uri="{FF2B5EF4-FFF2-40B4-BE49-F238E27FC236}">
-                <a16:creationId xmlns:a16="http://schemas.microsoft.com/office/drawing/2014/main" id="{A0C3C4DC-8B4F-7148-E009-134858223D4E}"/>
-              </a:ext>
-            </a:extLst>
-          </p:cNvPr>
-          <p:cNvSpPr/>
-          <p:nvPr/>
-        </p:nvSpPr>
-        <p:spPr>
-          <a:xfrm>
-            <a:off x="2281896" y="4424279"/>
-            <a:ext cx="3033034" cy="1185267"/>
-          </a:xfrm>
-          <a:prstGeom prst="rect">
-            <a:avLst/>
-          </a:prstGeom>
-          <a:noFill/>
-          <a:ln w="38100">
-            <a:solidFill>
-              <a:schemeClr val="tx2">
-                <a:lumMod val="20000"/>
-                <a:lumOff val="80000"/>
-              </a:schemeClr>
-            </a:solidFill>
-          </a:ln>
-        </p:spPr>
-        <p:style>
-          <a:lnRef idx="2">
-            <a:schemeClr val="accent1">
-              <a:shade val="15000"/>
-            </a:schemeClr>
-          </a:lnRef>
-          <a:fillRef idx="1">
-            <a:schemeClr val="accent1"/>
-          </a:fillRef>
-          <a:effectRef idx="0">
-            <a:schemeClr val="accent1"/>
-          </a:effectRef>
-          <a:fontRef idx="minor">
-            <a:schemeClr val="lt1"/>
-          </a:fontRef>
-        </p:style>
-        <p:txBody>
-          <a:bodyPr wrap="none" lIns="36000" tIns="0" rIns="0" bIns="0" rtlCol="0" anchor="ctr" anchorCtr="0"/>
-          <a:lstStyle/>
-          <a:p>
             <a:pPr>
               <a:lnSpc>
                 <a:spcPts val="1600"/>
               </a:lnSpc>
             </a:pPr>
             <a:r>
-              <a:rPr lang="en-US" altLang="zh-TW" sz="1200" dirty="0">
-                <a:solidFill>
-                  <a:schemeClr val="tx2"/>
+              <a:rPr lang="en-US" altLang="zh-TW" sz="1000" dirty="0">
+                <a:solidFill>
+                  <a:schemeClr val="tx1"/>
                 </a:solidFill>
                 <a:latin typeface="ADLaM Display" panose="02010000000000000000" pitchFamily="2" charset="0"/>
                 <a:ea typeface="ADLaM Display" panose="02010000000000000000" pitchFamily="2" charset="0"/>
                 <a:cs typeface="ADLaM Display" panose="02010000000000000000" pitchFamily="2" charset="0"/>
               </a:rPr>
-              <a:t>Public Database</a:t>
+              <a:t>Apollo-Corpus</a:t>
             </a:r>
           </a:p>
           <a:p>
@@ -6046,48 +6222,15 @@
               </a:lnSpc>
             </a:pPr>
             <a:r>
-              <a:rPr lang="en-US" altLang="zh-TW" sz="1200" dirty="0">
-                <a:solidFill>
-                  <a:schemeClr val="tx2"/>
-                </a:solidFill>
+              <a:rPr lang="en-US" altLang="zh-TW" sz="1000" dirty="0">
+                <a:solidFill>
+                  <a:schemeClr val="tx1"/>
+                </a:solidFill>
+                <a:latin typeface="ADLaM Display" panose="02010000000000000000" pitchFamily="2" charset="0"/>
                 <a:ea typeface="ADLaM Display" panose="02010000000000000000" pitchFamily="2" charset="0"/>
                 <a:cs typeface="ADLaM Display" panose="02010000000000000000" pitchFamily="2" charset="0"/>
               </a:rPr>
-              <a:t>* RegulomeDB (Stanford University)</a:t>
-            </a:r>
-          </a:p>
-          <a:p>
-            <a:pPr>
-              <a:lnSpc>
-                <a:spcPts val="1600"/>
-              </a:lnSpc>
-            </a:pPr>
-            <a:r>
-              <a:rPr lang="en-US" altLang="zh-TW" sz="1200" dirty="0">
-                <a:solidFill>
-                  <a:schemeClr val="tx2"/>
-                </a:solidFill>
-                <a:ea typeface="ADLaM Display" panose="02010000000000000000" pitchFamily="2" charset="0"/>
-                <a:cs typeface="ADLaM Display" panose="02010000000000000000" pitchFamily="2" charset="0"/>
-              </a:rPr>
-              <a:t>* GTEx Portal (Single-Cell Gene Expression Data)</a:t>
-            </a:r>
-          </a:p>
-          <a:p>
-            <a:pPr>
-              <a:lnSpc>
-                <a:spcPts val="1600"/>
-              </a:lnSpc>
-            </a:pPr>
-            <a:r>
-              <a:rPr lang="en-US" altLang="zh-TW" sz="1200" dirty="0">
-                <a:solidFill>
-                  <a:schemeClr val="tx2"/>
-                </a:solidFill>
-                <a:ea typeface="ADLaM Display" panose="02010000000000000000" pitchFamily="2" charset="0"/>
-                <a:cs typeface="ADLaM Display" panose="02010000000000000000" pitchFamily="2" charset="0"/>
-              </a:rPr>
-              <a:t>* Ensembl Regulation (EBI/Sanger)</a:t>
+              <a:t>BioInstruct</a:t>
             </a:r>
           </a:p>
         </p:txBody>
@@ -6153,42 +6296,6 @@
           </a:p>
         </p:txBody>
       </p:sp>
-      <p:pic>
-        <p:nvPicPr>
-          <p:cNvPr id="24" name="圖形 23" descr="資料庫 以實心填滿">
-            <a:extLst>
-              <a:ext uri="{FF2B5EF4-FFF2-40B4-BE49-F238E27FC236}">
-                <a16:creationId xmlns:a16="http://schemas.microsoft.com/office/drawing/2014/main" id="{E1DE9328-A7AA-C920-A428-9EA723534132}"/>
-              </a:ext>
-            </a:extLst>
-          </p:cNvPr>
-          <p:cNvPicPr>
-            <a:picLocks noChangeAspect="1"/>
-          </p:cNvPicPr>
-          <p:nvPr/>
-        </p:nvPicPr>
-        <p:blipFill>
-          <a:blip>
-            <a:extLst>
-              <a:ext uri="{96DAC541-7B7A-43D3-8B79-37D633B846F1}">
-                <asvg:svgBlip xmlns:asvg="http://schemas.microsoft.com/office/drawing/2016/SVG/main" r:embed="rId2"/>
-              </a:ext>
-            </a:extLst>
-          </a:blip>
-          <a:stretch>
-            <a:fillRect/>
-          </a:stretch>
-        </p:blipFill>
-        <p:spPr>
-          <a:xfrm>
-            <a:off x="5887095" y="1827319"/>
-            <a:ext cx="513450" cy="513450"/>
-          </a:xfrm>
-          <a:prstGeom prst="rect">
-            <a:avLst/>
-          </a:prstGeom>
-        </p:spPr>
-      </p:pic>
       <p:sp>
         <p:nvSpPr>
           <p:cNvPr id="27" name="矩形 26">
@@ -6203,15 +6310,23 @@
         </p:nvSpPr>
         <p:spPr>
           <a:xfrm>
-            <a:off x="6189500" y="3850777"/>
-            <a:ext cx="1229495" cy="720080"/>
+            <a:off x="4067944" y="3098729"/>
+            <a:ext cx="1974170" cy="258263"/>
           </a:xfrm>
           <a:prstGeom prst="rect">
             <a:avLst/>
           </a:prstGeom>
-          <a:noFill/>
+          <a:solidFill>
+            <a:schemeClr val="bg1">
+              <a:lumMod val="95000"/>
+            </a:schemeClr>
+          </a:solidFill>
           <a:ln w="12700">
-            <a:noFill/>
+            <a:solidFill>
+              <a:schemeClr val="bg1">
+                <a:lumMod val="85000"/>
+              </a:schemeClr>
+            </a:solidFill>
           </a:ln>
         </p:spPr>
         <p:style>
@@ -6239,23 +6354,8 @@
                 <a:spcPts val="1600"/>
               </a:lnSpc>
             </a:pPr>
-            <a:endParaRPr lang="en-US" altLang="zh-TW" sz="1200" dirty="0">
-              <a:solidFill>
-                <a:schemeClr val="tx1"/>
-              </a:solidFill>
-              <a:latin typeface="ADLaM Display" panose="02010000000000000000" pitchFamily="2" charset="0"/>
-              <a:ea typeface="ADLaM Display" panose="02010000000000000000" pitchFamily="2" charset="0"/>
-              <a:cs typeface="ADLaM Display" panose="02010000000000000000" pitchFamily="2" charset="0"/>
-            </a:endParaRPr>
-          </a:p>
-          <a:p>
-            <a:pPr>
-              <a:lnSpc>
-                <a:spcPts val="1600"/>
-              </a:lnSpc>
-            </a:pPr>
-            <a:r>
-              <a:rPr lang="en-US" altLang="zh-TW" sz="1200" dirty="0">
+            <a:r>
+              <a:rPr lang="en-US" altLang="zh-TW" sz="1000" dirty="0">
                 <a:solidFill>
                   <a:schemeClr val="tx1"/>
                 </a:solidFill>
@@ -6263,36 +6363,7 @@
                 <a:ea typeface="ADLaM Display" panose="02010000000000000000" pitchFamily="2" charset="0"/>
                 <a:cs typeface="ADLaM Display" panose="02010000000000000000" pitchFamily="2" charset="0"/>
               </a:rPr>
-              <a:t>Apollo-Corpus</a:t>
-            </a:r>
-          </a:p>
-          <a:p>
-            <a:pPr>
-              <a:lnSpc>
-                <a:spcPts val="1600"/>
-              </a:lnSpc>
-            </a:pPr>
-            <a:r>
-              <a:rPr lang="en-US" altLang="zh-TW" sz="1200" dirty="0" err="1">
-                <a:solidFill>
-                  <a:schemeClr val="tx1"/>
-                </a:solidFill>
-                <a:latin typeface="ADLaM Display" panose="02010000000000000000" pitchFamily="2" charset="0"/>
-                <a:ea typeface="ADLaM Display" panose="02010000000000000000" pitchFamily="2" charset="0"/>
-                <a:cs typeface="ADLaM Display" panose="02010000000000000000" pitchFamily="2" charset="0"/>
-              </a:rPr>
-              <a:t>MedQA</a:t>
-            </a:r>
-            <a:r>
-              <a:rPr lang="en-US" altLang="zh-TW" sz="1200" dirty="0">
-                <a:solidFill>
-                  <a:schemeClr val="tx1"/>
-                </a:solidFill>
-                <a:latin typeface="ADLaM Display" panose="02010000000000000000" pitchFamily="2" charset="0"/>
-                <a:ea typeface="ADLaM Display" panose="02010000000000000000" pitchFamily="2" charset="0"/>
-                <a:cs typeface="ADLaM Display" panose="02010000000000000000" pitchFamily="2" charset="0"/>
-              </a:rPr>
-              <a:t>/USMLE</a:t>
+              <a:t>PMC Open Access Subset</a:t>
             </a:r>
           </a:p>
         </p:txBody>
@@ -6349,178 +6420,6 @@
       </p:sp>
       <p:sp>
         <p:nvSpPr>
-          <p:cNvPr id="32" name="矩形 31">
-            <a:extLst>
-              <a:ext uri="{FF2B5EF4-FFF2-40B4-BE49-F238E27FC236}">
-                <a16:creationId xmlns:a16="http://schemas.microsoft.com/office/drawing/2014/main" id="{997F3F11-5054-FCE8-0CBC-0AF4564FB2CD}"/>
-              </a:ext>
-            </a:extLst>
-          </p:cNvPr>
-          <p:cNvSpPr/>
-          <p:nvPr/>
-        </p:nvSpPr>
-        <p:spPr>
-          <a:xfrm>
-            <a:off x="3649100" y="3288783"/>
-            <a:ext cx="1845800" cy="274677"/>
-          </a:xfrm>
-          <a:prstGeom prst="rect">
-            <a:avLst/>
-          </a:prstGeom>
-          <a:noFill/>
-          <a:ln w="12700">
-            <a:noFill/>
-          </a:ln>
-        </p:spPr>
-        <p:style>
-          <a:lnRef idx="2">
-            <a:schemeClr val="accent1">
-              <a:shade val="15000"/>
-            </a:schemeClr>
-          </a:lnRef>
-          <a:fillRef idx="1">
-            <a:schemeClr val="accent1"/>
-          </a:fillRef>
-          <a:effectRef idx="0">
-            <a:schemeClr val="accent1"/>
-          </a:effectRef>
-          <a:fontRef idx="minor">
-            <a:schemeClr val="lt1"/>
-          </a:fontRef>
-        </p:style>
-        <p:txBody>
-          <a:bodyPr wrap="none" lIns="91440" tIns="0" rIns="0" bIns="0" rtlCol="0" anchor="ctr" anchorCtr="0"/>
-          <a:lstStyle/>
-          <a:p>
-            <a:pPr>
-              <a:lnSpc>
-                <a:spcPts val="1600"/>
-              </a:lnSpc>
-            </a:pPr>
-            <a:r>
-              <a:rPr lang="en-US" altLang="zh-TW" sz="1200" dirty="0">
-                <a:solidFill>
-                  <a:schemeClr val="tx1"/>
-                </a:solidFill>
-                <a:latin typeface="ADLaM Display" panose="02010000000000000000" pitchFamily="2" charset="0"/>
-                <a:ea typeface="ADLaM Display" panose="02010000000000000000" pitchFamily="2" charset="0"/>
-                <a:cs typeface="ADLaM Display" panose="02010000000000000000" pitchFamily="2" charset="0"/>
-              </a:rPr>
-              <a:t>Genomic Variants</a:t>
-            </a:r>
-            <a:r>
-              <a:rPr lang="zh-TW" altLang="en-US" sz="1200" dirty="0">
-                <a:solidFill>
-                  <a:schemeClr val="tx1"/>
-                </a:solidFill>
-                <a:latin typeface="ADLaM Display" panose="02010000000000000000" pitchFamily="2" charset="0"/>
-                <a:ea typeface="ADLaM Display" panose="02010000000000000000" pitchFamily="2" charset="0"/>
-                <a:cs typeface="ADLaM Display" panose="02010000000000000000" pitchFamily="2" charset="0"/>
-              </a:rPr>
-              <a:t> </a:t>
-            </a:r>
-            <a:r>
-              <a:rPr lang="en-US" altLang="zh-TW" sz="1200" dirty="0">
-                <a:solidFill>
-                  <a:schemeClr val="tx1"/>
-                </a:solidFill>
-                <a:latin typeface="ADLaM Display" panose="02010000000000000000" pitchFamily="2" charset="0"/>
-                <a:ea typeface="ADLaM Display" panose="02010000000000000000" pitchFamily="2" charset="0"/>
-                <a:cs typeface="ADLaM Display" panose="02010000000000000000" pitchFamily="2" charset="0"/>
-              </a:rPr>
-              <a:t>API</a:t>
-            </a:r>
-          </a:p>
-        </p:txBody>
-      </p:sp>
-      <p:sp>
-        <p:nvSpPr>
-          <p:cNvPr id="34" name="矩形 33">
-            <a:extLst>
-              <a:ext uri="{FF2B5EF4-FFF2-40B4-BE49-F238E27FC236}">
-                <a16:creationId xmlns:a16="http://schemas.microsoft.com/office/drawing/2014/main" id="{7784ABEE-3F74-DE7B-31A6-83D584C0A7FF}"/>
-              </a:ext>
-            </a:extLst>
-          </p:cNvPr>
-          <p:cNvSpPr/>
-          <p:nvPr/>
-        </p:nvSpPr>
-        <p:spPr>
-          <a:xfrm>
-            <a:off x="3649100" y="3593845"/>
-            <a:ext cx="1845800" cy="274677"/>
-          </a:xfrm>
-          <a:prstGeom prst="rect">
-            <a:avLst/>
-          </a:prstGeom>
-          <a:noFill/>
-          <a:ln w="12700">
-            <a:noFill/>
-          </a:ln>
-        </p:spPr>
-        <p:style>
-          <a:lnRef idx="2">
-            <a:schemeClr val="accent1">
-              <a:shade val="15000"/>
-            </a:schemeClr>
-          </a:lnRef>
-          <a:fillRef idx="1">
-            <a:schemeClr val="accent1"/>
-          </a:fillRef>
-          <a:effectRef idx="0">
-            <a:schemeClr val="accent1"/>
-          </a:effectRef>
-          <a:fontRef idx="minor">
-            <a:schemeClr val="lt1"/>
-          </a:fontRef>
-        </p:style>
-        <p:txBody>
-          <a:bodyPr wrap="none" lIns="91440" tIns="0" rIns="0" bIns="0" rtlCol="0" anchor="ctr" anchorCtr="0"/>
-          <a:lstStyle/>
-          <a:p>
-            <a:pPr>
-              <a:lnSpc>
-                <a:spcPts val="1600"/>
-              </a:lnSpc>
-            </a:pPr>
-            <a:r>
-              <a:rPr lang="en-US" altLang="zh-TW" sz="1200" dirty="0">
-                <a:solidFill>
-                  <a:schemeClr val="tx1"/>
-                </a:solidFill>
-                <a:latin typeface="ADLaM Display" panose="02010000000000000000" pitchFamily="2" charset="0"/>
-                <a:ea typeface="ADLaM Display" panose="02010000000000000000" pitchFamily="2" charset="0"/>
-                <a:cs typeface="ADLaM Display" panose="02010000000000000000" pitchFamily="2" charset="0"/>
-              </a:rPr>
-              <a:t>Research Articles</a:t>
-            </a:r>
-            <a:r>
-              <a:rPr lang="zh-TW" altLang="en-US" sz="1200" dirty="0">
-                <a:solidFill>
-                  <a:schemeClr val="tx1"/>
-                </a:solidFill>
-                <a:latin typeface="ADLaM Display" panose="02010000000000000000" pitchFamily="2" charset="0"/>
-                <a:ea typeface="ADLaM Display" panose="02010000000000000000" pitchFamily="2" charset="0"/>
-                <a:cs typeface="ADLaM Display" panose="02010000000000000000" pitchFamily="2" charset="0"/>
-              </a:rPr>
-              <a:t> </a:t>
-            </a:r>
-            <a:r>
-              <a:rPr lang="en-US" altLang="zh-TW" sz="1200" dirty="0">
-                <a:solidFill>
-                  <a:schemeClr val="tx1"/>
-                </a:solidFill>
-                <a:latin typeface="ADLaM Display" panose="02010000000000000000" pitchFamily="2" charset="0"/>
-                <a:ea typeface="ADLaM Display" panose="02010000000000000000" pitchFamily="2" charset="0"/>
-                <a:cs typeface="ADLaM Display" panose="02010000000000000000" pitchFamily="2" charset="0"/>
-              </a:rPr>
-              <a:t>API</a:t>
-            </a:r>
-          </a:p>
-        </p:txBody>
-      </p:sp>
-      <p:sp>
-        <p:nvSpPr>
           <p:cNvPr id="38" name="矩形 37">
             <a:extLst>
               <a:ext uri="{FF2B5EF4-FFF2-40B4-BE49-F238E27FC236}">
@@ -6533,7 +6432,7 @@
         </p:nvSpPr>
         <p:spPr>
           <a:xfrm>
-            <a:off x="1444872" y="1570781"/>
+            <a:off x="1479833" y="2276872"/>
             <a:ext cx="859919" cy="307983"/>
           </a:xfrm>
           <a:prstGeom prst="rect">
@@ -6543,7 +6442,7 @@
             <a:schemeClr val="accent1">
               <a:lumMod val="20000"/>
               <a:lumOff val="80000"/>
-              <a:alpha val="40000"/>
+              <a:alpha val="80000"/>
             </a:schemeClr>
           </a:solidFill>
           <a:ln w="38100">
@@ -6603,7 +6502,7 @@
         </p:nvSpPr>
         <p:spPr>
           <a:xfrm>
-            <a:off x="2557864" y="2708920"/>
+            <a:off x="757664" y="2852936"/>
             <a:ext cx="645984" cy="307983"/>
           </a:xfrm>
           <a:prstGeom prst="rect">
@@ -6672,7 +6571,7 @@
           <p:nvPr/>
         </p:nvPicPr>
         <p:blipFill>
-          <a:blip r:embed="rId3" cstate="print">
+          <a:blip r:embed="rId2" cstate="print">
             <a:extLst>
               <a:ext uri="{28A0092B-C50C-407E-A947-70E740481C1C}">
                 <a14:useLocalDpi xmlns:a14="http://schemas.microsoft.com/office/drawing/2010/main" val="0"/>
@@ -6685,7 +6584,7 @@
         </p:blipFill>
         <p:spPr>
           <a:xfrm>
-            <a:off x="2699792" y="2393250"/>
+            <a:off x="864378" y="2434282"/>
             <a:ext cx="432048" cy="366597"/>
           </a:xfrm>
           <a:prstGeom prst="rect">
@@ -6715,14 +6614,14 @@
           <p:nvPr/>
         </p:nvPicPr>
         <p:blipFill>
-          <a:blip r:embed="rId4"/>
+          <a:blip r:embed="rId3"/>
           <a:stretch>
             <a:fillRect/>
           </a:stretch>
         </p:blipFill>
         <p:spPr>
           <a:xfrm>
-            <a:off x="4046839" y="1853553"/>
+            <a:off x="2656012" y="1197608"/>
             <a:ext cx="1691952" cy="478414"/>
           </a:xfrm>
           <a:prstGeom prst="rect">
@@ -6744,12 +6643,212 @@
           </a:effectLst>
         </p:spPr>
       </p:pic>
+      <p:grpSp>
+        <p:nvGrpSpPr>
+          <p:cNvPr id="15" name="群組 14">
+            <a:extLst>
+              <a:ext uri="{FF2B5EF4-FFF2-40B4-BE49-F238E27FC236}">
+                <a16:creationId xmlns:a16="http://schemas.microsoft.com/office/drawing/2014/main" id="{C1EA90EB-047E-49BA-865A-387295BFECE3}"/>
+              </a:ext>
+            </a:extLst>
+          </p:cNvPr>
+          <p:cNvGrpSpPr/>
+          <p:nvPr/>
+        </p:nvGrpSpPr>
+        <p:grpSpPr>
+          <a:xfrm>
+            <a:off x="1520958" y="1088858"/>
+            <a:ext cx="856522" cy="695914"/>
+            <a:chOff x="4271804" y="324357"/>
+            <a:chExt cx="931978" cy="842197"/>
+          </a:xfrm>
+        </p:grpSpPr>
+        <p:sp>
+          <p:nvSpPr>
+            <p:cNvPr id="7" name="矩形 6">
+              <a:extLst>
+                <a:ext uri="{FF2B5EF4-FFF2-40B4-BE49-F238E27FC236}">
+                  <a16:creationId xmlns:a16="http://schemas.microsoft.com/office/drawing/2014/main" id="{380A6DDE-81A5-EF82-8AD5-62E65A1B384D}"/>
+                </a:ext>
+              </a:extLst>
+            </p:cNvPr>
+            <p:cNvSpPr/>
+            <p:nvPr/>
+          </p:nvSpPr>
+          <p:spPr>
+            <a:xfrm>
+              <a:off x="4375730" y="814722"/>
+              <a:ext cx="724129" cy="307983"/>
+            </a:xfrm>
+            <a:prstGeom prst="rect">
+              <a:avLst/>
+            </a:prstGeom>
+            <a:noFill/>
+            <a:ln w="38100">
+              <a:noFill/>
+            </a:ln>
+          </p:spPr>
+          <p:style>
+            <a:lnRef idx="2">
+              <a:schemeClr val="accent1">
+                <a:shade val="15000"/>
+              </a:schemeClr>
+            </a:lnRef>
+            <a:fillRef idx="1">
+              <a:schemeClr val="accent1"/>
+            </a:fillRef>
+            <a:effectRef idx="0">
+              <a:schemeClr val="accent1"/>
+            </a:effectRef>
+            <a:fontRef idx="minor">
+              <a:schemeClr val="lt1"/>
+            </a:fontRef>
+          </p:style>
+          <p:txBody>
+            <a:bodyPr wrap="none" lIns="0" tIns="0" rIns="0" bIns="0" rtlCol="0" anchor="ctr" anchorCtr="1"/>
+            <a:lstStyle/>
+            <a:p>
+              <a:pPr algn="ctr"/>
+              <a:r>
+                <a:rPr lang="en-US" altLang="zh-TW" sz="1400" b="1" dirty="0">
+                  <a:solidFill>
+                    <a:schemeClr val="tx1">
+                      <a:lumMod val="85000"/>
+                      <a:lumOff val="15000"/>
+                    </a:schemeClr>
+                  </a:solidFill>
+                </a:rPr>
+                <a:t>Q-A.json</a:t>
+              </a:r>
+              <a:endParaRPr lang="zh-TW" altLang="en-US" dirty="0">
+                <a:solidFill>
+                  <a:schemeClr val="tx1">
+                    <a:lumMod val="85000"/>
+                    <a:lumOff val="15000"/>
+                  </a:schemeClr>
+                </a:solidFill>
+              </a:endParaRPr>
+            </a:p>
+          </p:txBody>
+        </p:sp>
+        <p:pic>
+          <p:nvPicPr>
+            <p:cNvPr id="8" name="圖片 7" descr="json logo">
+              <a:extLst>
+                <a:ext uri="{FF2B5EF4-FFF2-40B4-BE49-F238E27FC236}">
+                  <a16:creationId xmlns:a16="http://schemas.microsoft.com/office/drawing/2014/main" id="{614D0D0A-8724-C2C7-40B5-DA4C7CF33C78}"/>
+                </a:ext>
+              </a:extLst>
+            </p:cNvPr>
+            <p:cNvPicPr>
+              <a:picLocks noChangeAspect="1"/>
+            </p:cNvPicPr>
+            <p:nvPr/>
+          </p:nvPicPr>
+          <p:blipFill>
+            <a:blip r:embed="rId4"/>
+            <a:stretch>
+              <a:fillRect/>
+            </a:stretch>
+          </p:blipFill>
+          <p:spPr>
+            <a:xfrm>
+              <a:off x="4540633" y="395698"/>
+              <a:ext cx="394320" cy="419025"/>
+            </a:xfrm>
+            <a:prstGeom prst="rect">
+              <a:avLst/>
+            </a:prstGeom>
+          </p:spPr>
+        </p:pic>
+        <p:sp>
+          <p:nvSpPr>
+            <p:cNvPr id="10" name="矩形 9">
+              <a:extLst>
+                <a:ext uri="{FF2B5EF4-FFF2-40B4-BE49-F238E27FC236}">
+                  <a16:creationId xmlns:a16="http://schemas.microsoft.com/office/drawing/2014/main" id="{9BAE93DD-61DC-729E-DF61-A00C337731CF}"/>
+                </a:ext>
+              </a:extLst>
+            </p:cNvPr>
+            <p:cNvSpPr/>
+            <p:nvPr/>
+          </p:nvSpPr>
+          <p:spPr>
+            <a:xfrm>
+              <a:off x="4271804" y="324357"/>
+              <a:ext cx="931978" cy="842197"/>
+            </a:xfrm>
+            <a:prstGeom prst="rect">
+              <a:avLst/>
+            </a:prstGeom>
+            <a:noFill/>
+            <a:ln w="38100">
+              <a:solidFill>
+                <a:schemeClr val="tx2">
+                  <a:lumMod val="20000"/>
+                  <a:lumOff val="80000"/>
+                </a:schemeClr>
+              </a:solidFill>
+            </a:ln>
+          </p:spPr>
+          <p:style>
+            <a:lnRef idx="2">
+              <a:schemeClr val="accent1">
+                <a:shade val="15000"/>
+              </a:schemeClr>
+            </a:lnRef>
+            <a:fillRef idx="1">
+              <a:schemeClr val="accent1"/>
+            </a:fillRef>
+            <a:effectRef idx="0">
+              <a:schemeClr val="accent1"/>
+            </a:effectRef>
+            <a:fontRef idx="minor">
+              <a:schemeClr val="lt1"/>
+            </a:fontRef>
+          </p:style>
+          <p:txBody>
+            <a:bodyPr wrap="none" lIns="0" tIns="0" rIns="0" bIns="0" rtlCol="0" anchor="ctr" anchorCtr="1"/>
+            <a:lstStyle/>
+            <a:p>
+              <a:pPr algn="ctr">
+                <a:lnSpc>
+                  <a:spcPts val="1600"/>
+                </a:lnSpc>
+              </a:pPr>
+              <a:endParaRPr lang="en-US" altLang="zh-TW" sz="1200" dirty="0">
+                <a:solidFill>
+                  <a:schemeClr val="tx2"/>
+                </a:solidFill>
+                <a:latin typeface="ADLaM Display" panose="02010000000000000000" pitchFamily="2" charset="0"/>
+                <a:ea typeface="ADLaM Display" panose="02010000000000000000" pitchFamily="2" charset="0"/>
+                <a:cs typeface="ADLaM Display" panose="02010000000000000000" pitchFamily="2" charset="0"/>
+              </a:endParaRPr>
+            </a:p>
+            <a:p>
+              <a:pPr algn="ctr">
+                <a:lnSpc>
+                  <a:spcPts val="1600"/>
+                </a:lnSpc>
+              </a:pPr>
+              <a:endParaRPr lang="en-US" altLang="zh-TW" sz="1200" dirty="0">
+                <a:solidFill>
+                  <a:schemeClr val="tx2"/>
+                </a:solidFill>
+                <a:latin typeface="ADLaM Display" panose="02010000000000000000" pitchFamily="2" charset="0"/>
+                <a:ea typeface="ADLaM Display" panose="02010000000000000000" pitchFamily="2" charset="0"/>
+                <a:cs typeface="ADLaM Display" panose="02010000000000000000" pitchFamily="2" charset="0"/>
+              </a:endParaRPr>
+            </a:p>
+          </p:txBody>
+        </p:sp>
+      </p:grpSp>
       <p:sp>
         <p:nvSpPr>
-          <p:cNvPr id="7" name="矩形 6">
+          <p:cNvPr id="16" name="箭號: 向下 15">
             <a:extLst>
               <a:ext uri="{FF2B5EF4-FFF2-40B4-BE49-F238E27FC236}">
-                <a16:creationId xmlns:a16="http://schemas.microsoft.com/office/drawing/2014/main" id="{380A6DDE-81A5-EF82-8AD5-62E65A1B384D}"/>
+                <a16:creationId xmlns:a16="http://schemas.microsoft.com/office/drawing/2014/main" id="{913C2FB1-8335-61DD-DE12-719E8CBBA1D9}"/>
               </a:ext>
             </a:extLst>
           </p:cNvPr>
@@ -6758,15 +6857,21 @@
         </p:nvSpPr>
         <p:spPr>
           <a:xfrm>
-            <a:off x="3121969" y="924383"/>
-            <a:ext cx="645984" cy="307983"/>
+            <a:off x="1805203" y="1718038"/>
+            <a:ext cx="288032" cy="331298"/>
           </a:xfrm>
-          <a:prstGeom prst="rect">
+          <a:prstGeom prst="downArrow">
             <a:avLst/>
           </a:prstGeom>
-          <a:noFill/>
-          <a:ln w="38100">
-            <a:noFill/>
+          <a:solidFill>
+            <a:schemeClr val="accent2">
+              <a:alpha val="70000"/>
+            </a:schemeClr>
+          </a:solidFill>
+          <a:ln w="25400">
+            <a:solidFill>
+              <a:schemeClr val="accent2"/>
+            </a:solidFill>
           </a:ln>
         </p:spPr>
         <p:style>
@@ -6786,49 +6891,194 @@
           </a:fontRef>
         </p:style>
         <p:txBody>
-          <a:bodyPr wrap="none" lIns="0" tIns="0" rIns="0" bIns="0" rtlCol="0" anchor="ctr" anchorCtr="1"/>
+          <a:bodyPr rtlCol="0" anchor="ctr"/>
           <a:lstStyle/>
           <a:p>
             <a:pPr algn="ctr"/>
-            <a:r>
-              <a:rPr lang="en-US" altLang="zh-TW" sz="1400" b="1" dirty="0">
-                <a:solidFill>
-                  <a:schemeClr val="tx1">
-                    <a:lumMod val="85000"/>
-                    <a:lumOff val="15000"/>
-                  </a:schemeClr>
-                </a:solidFill>
-              </a:rPr>
-              <a:t>.</a:t>
-            </a:r>
-            <a:r>
-              <a:rPr lang="en-US" altLang="zh-TW" sz="1400" b="1" dirty="0" err="1">
-                <a:solidFill>
-                  <a:schemeClr val="tx1">
-                    <a:lumMod val="85000"/>
-                    <a:lumOff val="15000"/>
-                  </a:schemeClr>
-                </a:solidFill>
-              </a:rPr>
-              <a:t>json</a:t>
-            </a:r>
-            <a:endParaRPr lang="zh-TW" altLang="en-US" dirty="0">
+            <a:endParaRPr lang="zh-TW" altLang="en-US"/>
+          </a:p>
+        </p:txBody>
+      </p:sp>
+      <p:sp>
+        <p:nvSpPr>
+          <p:cNvPr id="17" name="箭號: 迴轉箭號 16">
+            <a:extLst>
+              <a:ext uri="{FF2B5EF4-FFF2-40B4-BE49-F238E27FC236}">
+                <a16:creationId xmlns:a16="http://schemas.microsoft.com/office/drawing/2014/main" id="{59AB95D8-6D09-7FA4-7166-01EC53870C35}"/>
+              </a:ext>
+            </a:extLst>
+          </p:cNvPr>
+          <p:cNvSpPr/>
+          <p:nvPr/>
+        </p:nvSpPr>
+        <p:spPr>
+          <a:xfrm rot="10800000">
+            <a:off x="1475656" y="2780928"/>
+            <a:ext cx="556629" cy="671272"/>
+          </a:xfrm>
+          <a:prstGeom prst="uturnArrow">
+            <a:avLst>
+              <a:gd name="adj1" fmla="val 26770"/>
+              <a:gd name="adj2" fmla="val 25000"/>
+              <a:gd name="adj3" fmla="val 32079"/>
+              <a:gd name="adj4" fmla="val 43750"/>
+              <a:gd name="adj5" fmla="val 62630"/>
+            </a:avLst>
+          </a:prstGeom>
+          <a:solidFill>
+            <a:schemeClr val="accent2">
+              <a:alpha val="70000"/>
+            </a:schemeClr>
+          </a:solidFill>
+          <a:ln w="25400">
+            <a:solidFill>
+              <a:schemeClr val="accent2"/>
+            </a:solidFill>
+          </a:ln>
+        </p:spPr>
+        <p:style>
+          <a:lnRef idx="2">
+            <a:schemeClr val="accent1">
+              <a:shade val="15000"/>
+            </a:schemeClr>
+          </a:lnRef>
+          <a:fillRef idx="1">
+            <a:schemeClr val="accent1"/>
+          </a:fillRef>
+          <a:effectRef idx="0">
+            <a:schemeClr val="accent1"/>
+          </a:effectRef>
+          <a:fontRef idx="minor">
+            <a:schemeClr val="lt1"/>
+          </a:fontRef>
+        </p:style>
+        <p:txBody>
+          <a:bodyPr rtlCol="0" anchor="ctr"/>
+          <a:lstStyle/>
+          <a:p>
+            <a:pPr algn="ctr"/>
+            <a:endParaRPr lang="zh-TW" altLang="en-US">
               <a:solidFill>
-                <a:schemeClr val="tx1">
-                  <a:lumMod val="85000"/>
-                  <a:lumOff val="15000"/>
-                </a:schemeClr>
+                <a:schemeClr val="tx1"/>
               </a:solidFill>
             </a:endParaRPr>
+          </a:p>
+        </p:txBody>
+      </p:sp>
+      <p:sp>
+        <p:nvSpPr>
+          <p:cNvPr id="20" name="矩形 19">
+            <a:extLst>
+              <a:ext uri="{FF2B5EF4-FFF2-40B4-BE49-F238E27FC236}">
+                <a16:creationId xmlns:a16="http://schemas.microsoft.com/office/drawing/2014/main" id="{8E404EA2-E81F-60BD-20D4-80E149497416}"/>
+              </a:ext>
+            </a:extLst>
+          </p:cNvPr>
+          <p:cNvSpPr/>
+          <p:nvPr/>
+        </p:nvSpPr>
+        <p:spPr>
+          <a:xfrm>
+            <a:off x="4067946" y="2466472"/>
+            <a:ext cx="1974170" cy="632257"/>
+          </a:xfrm>
+          <a:prstGeom prst="rect">
+            <a:avLst/>
+          </a:prstGeom>
+          <a:solidFill>
+            <a:schemeClr val="bg1">
+              <a:lumMod val="95000"/>
+            </a:schemeClr>
+          </a:solidFill>
+          <a:ln w="12700">
+            <a:solidFill>
+              <a:schemeClr val="bg1">
+                <a:lumMod val="85000"/>
+              </a:schemeClr>
+            </a:solidFill>
+          </a:ln>
+        </p:spPr>
+        <p:style>
+          <a:lnRef idx="2">
+            <a:schemeClr val="accent1">
+              <a:shade val="15000"/>
+            </a:schemeClr>
+          </a:lnRef>
+          <a:fillRef idx="1">
+            <a:schemeClr val="accent1"/>
+          </a:fillRef>
+          <a:effectRef idx="0">
+            <a:schemeClr val="accent1"/>
+          </a:effectRef>
+          <a:fontRef idx="minor">
+            <a:schemeClr val="lt1"/>
+          </a:fontRef>
+        </p:style>
+        <p:txBody>
+          <a:bodyPr wrap="none" lIns="91440" tIns="0" rIns="0" bIns="0" rtlCol="0" anchor="ctr" anchorCtr="0"/>
+          <a:lstStyle/>
+          <a:p>
+            <a:pPr>
+              <a:lnSpc>
+                <a:spcPts val="1600"/>
+              </a:lnSpc>
+            </a:pPr>
+            <a:r>
+              <a:rPr lang="en-US" altLang="zh-TW" sz="1000" dirty="0">
+                <a:solidFill>
+                  <a:schemeClr val="tx1"/>
+                </a:solidFill>
+                <a:latin typeface="ADLaM Display" panose="02010000000000000000" pitchFamily="2" charset="0"/>
+                <a:ea typeface="ADLaM Display" panose="02010000000000000000" pitchFamily="2" charset="0"/>
+                <a:cs typeface="ADLaM Display" panose="02010000000000000000" pitchFamily="2" charset="0"/>
+              </a:rPr>
+              <a:t>MedQA / USMLE</a:t>
+            </a:r>
+          </a:p>
+          <a:p>
+            <a:pPr>
+              <a:lnSpc>
+                <a:spcPts val="1600"/>
+              </a:lnSpc>
+            </a:pPr>
+            <a:r>
+              <a:rPr lang="en-US" altLang="zh-TW" sz="1000" dirty="0">
+                <a:solidFill>
+                  <a:schemeClr val="tx1"/>
+                </a:solidFill>
+                <a:latin typeface="ADLaM Display" panose="02010000000000000000" pitchFamily="2" charset="0"/>
+                <a:ea typeface="ADLaM Display" panose="02010000000000000000" pitchFamily="2" charset="0"/>
+                <a:cs typeface="ADLaM Display" panose="02010000000000000000" pitchFamily="2" charset="0"/>
+              </a:rPr>
+              <a:t>PubMedQA</a:t>
+            </a:r>
+          </a:p>
+          <a:p>
+            <a:pPr>
+              <a:lnSpc>
+                <a:spcPts val="1600"/>
+              </a:lnSpc>
+            </a:pPr>
+            <a:r>
+              <a:rPr lang="en-US" altLang="zh-TW" sz="1000" dirty="0">
+                <a:solidFill>
+                  <a:schemeClr val="tx1"/>
+                </a:solidFill>
+                <a:latin typeface="ADLaM Display" panose="02010000000000000000" pitchFamily="2" charset="0"/>
+                <a:ea typeface="ADLaM Display" panose="02010000000000000000" pitchFamily="2" charset="0"/>
+                <a:cs typeface="ADLaM Display" panose="02010000000000000000" pitchFamily="2" charset="0"/>
+              </a:rPr>
+              <a:t>MedicationQA</a:t>
+            </a:r>
           </a:p>
         </p:txBody>
       </p:sp>
       <p:pic>
         <p:nvPicPr>
-          <p:cNvPr id="8" name="圖片 7" descr="json logo">
+          <p:cNvPr id="24" name="圖形 23" descr="資料庫 以實心填滿">
             <a:extLst>
               <a:ext uri="{FF2B5EF4-FFF2-40B4-BE49-F238E27FC236}">
-                <a16:creationId xmlns:a16="http://schemas.microsoft.com/office/drawing/2014/main" id="{614D0D0A-8724-C2C7-40B5-DA4C7CF33C78}"/>
+                <a16:creationId xmlns:a16="http://schemas.microsoft.com/office/drawing/2014/main" id="{E1DE9328-A7AA-C920-A428-9EA723534132}"/>
               </a:ext>
             </a:extLst>
           </p:cNvPr>
@@ -6838,21 +7088,221 @@
           <p:nvPr/>
         </p:nvPicPr>
         <p:blipFill>
-          <a:blip r:embed="rId5"/>
+          <a:blip>
+            <a:extLst>
+              <a:ext uri="{96DAC541-7B7A-43D3-8B79-37D633B846F1}">
+                <asvg:svgBlip xmlns:asvg="http://schemas.microsoft.com/office/drawing/2016/SVG/main" r:embed="rId5"/>
+              </a:ext>
+            </a:extLst>
+          </a:blip>
           <a:stretch>
             <a:fillRect/>
           </a:stretch>
         </p:blipFill>
         <p:spPr>
           <a:xfrm>
-            <a:off x="3282068" y="558318"/>
-            <a:ext cx="394321" cy="394321"/>
+            <a:off x="5369291" y="2542972"/>
+            <a:ext cx="513450" cy="513450"/>
           </a:xfrm>
           <a:prstGeom prst="rect">
             <a:avLst/>
           </a:prstGeom>
         </p:spPr>
       </p:pic>
+      <p:sp>
+        <p:nvSpPr>
+          <p:cNvPr id="22" name="文字方塊 21">
+            <a:extLst>
+              <a:ext uri="{FF2B5EF4-FFF2-40B4-BE49-F238E27FC236}">
+                <a16:creationId xmlns:a16="http://schemas.microsoft.com/office/drawing/2014/main" id="{81C59E87-C437-57D6-650E-C3343CE9BC70}"/>
+              </a:ext>
+            </a:extLst>
+          </p:cNvPr>
+          <p:cNvSpPr txBox="1"/>
+          <p:nvPr/>
+        </p:nvSpPr>
+        <p:spPr>
+          <a:xfrm>
+            <a:off x="4468972" y="1772816"/>
+            <a:ext cx="967124" cy="276999"/>
+          </a:xfrm>
+          <a:prstGeom prst="rect">
+            <a:avLst/>
+          </a:prstGeom>
+          <a:noFill/>
+        </p:spPr>
+        <p:txBody>
+          <a:bodyPr wrap="square">
+            <a:spAutoFit/>
+          </a:bodyPr>
+          <a:lstStyle/>
+          <a:p>
+            <a:r>
+              <a:rPr lang="en-US" altLang="zh-TW" sz="1200" dirty="0"/>
+              <a:t>Data Source</a:t>
+            </a:r>
+          </a:p>
+        </p:txBody>
+      </p:sp>
+      <p:sp>
+        <p:nvSpPr>
+          <p:cNvPr id="25" name="文字方塊 24">
+            <a:extLst>
+              <a:ext uri="{FF2B5EF4-FFF2-40B4-BE49-F238E27FC236}">
+                <a16:creationId xmlns:a16="http://schemas.microsoft.com/office/drawing/2014/main" id="{E2D5FF20-ADFF-AE53-E8FF-9EAA8A40C46C}"/>
+              </a:ext>
+            </a:extLst>
+          </p:cNvPr>
+          <p:cNvSpPr txBox="1"/>
+          <p:nvPr/>
+        </p:nvSpPr>
+        <p:spPr>
+          <a:xfrm>
+            <a:off x="2938998" y="1639933"/>
+            <a:ext cx="967124" cy="461665"/>
+          </a:xfrm>
+          <a:prstGeom prst="rect">
+            <a:avLst/>
+          </a:prstGeom>
+          <a:noFill/>
+        </p:spPr>
+        <p:txBody>
+          <a:bodyPr wrap="none" lIns="0" tIns="0" rIns="0" bIns="0" anchor="ctr" anchorCtr="1">
+            <a:noAutofit/>
+          </a:bodyPr>
+          <a:lstStyle/>
+          <a:p>
+            <a:pPr algn="ctr"/>
+            <a:r>
+              <a:rPr lang="en-US" altLang="zh-TW" sz="1200" dirty="0"/>
+              <a:t>Conver to </a:t>
+            </a:r>
+          </a:p>
+          <a:p>
+            <a:pPr algn="ctr"/>
+            <a:r>
+              <a:rPr lang="en-US" altLang="zh-TW" sz="1200" dirty="0"/>
+              <a:t>JSON format</a:t>
+            </a:r>
+          </a:p>
+        </p:txBody>
+      </p:sp>
+      <p:sp>
+        <p:nvSpPr>
+          <p:cNvPr id="28" name="文字方塊 27">
+            <a:extLst>
+              <a:ext uri="{FF2B5EF4-FFF2-40B4-BE49-F238E27FC236}">
+                <a16:creationId xmlns:a16="http://schemas.microsoft.com/office/drawing/2014/main" id="{A51BF641-2FAC-71F8-C4B0-676DC3E88BB7}"/>
+              </a:ext>
+            </a:extLst>
+          </p:cNvPr>
+          <p:cNvSpPr txBox="1"/>
+          <p:nvPr/>
+        </p:nvSpPr>
+        <p:spPr>
+          <a:xfrm>
+            <a:off x="814720" y="2060848"/>
+            <a:ext cx="531364" cy="309957"/>
+          </a:xfrm>
+          <a:prstGeom prst="rect">
+            <a:avLst/>
+          </a:prstGeom>
+          <a:noFill/>
+        </p:spPr>
+        <p:txBody>
+          <a:bodyPr wrap="none" lIns="0" tIns="0" rIns="0" bIns="0" anchor="ctr" anchorCtr="1">
+            <a:spAutoFit/>
+          </a:bodyPr>
+          <a:lstStyle/>
+          <a:p>
+            <a:pPr>
+              <a:lnSpc>
+                <a:spcPts val="1200"/>
+              </a:lnSpc>
+            </a:pPr>
+            <a:r>
+              <a:rPr lang="en-US" altLang="zh-TW" sz="1200" dirty="0"/>
+              <a:t>Trainer</a:t>
+            </a:r>
+          </a:p>
+          <a:p>
+            <a:pPr>
+              <a:lnSpc>
+                <a:spcPts val="1200"/>
+              </a:lnSpc>
+            </a:pPr>
+            <a:r>
+              <a:rPr lang="en-US" altLang="zh-TW" sz="1200" dirty="0"/>
+              <a:t>Program</a:t>
+            </a:r>
+          </a:p>
+        </p:txBody>
+      </p:sp>
+      <p:sp>
+        <p:nvSpPr>
+          <p:cNvPr id="29" name="箭號: 彎曲 28">
+            <a:extLst>
+              <a:ext uri="{FF2B5EF4-FFF2-40B4-BE49-F238E27FC236}">
+                <a16:creationId xmlns:a16="http://schemas.microsoft.com/office/drawing/2014/main" id="{F722EC44-A374-210E-5E5D-7441D3F02CFD}"/>
+              </a:ext>
+            </a:extLst>
+          </p:cNvPr>
+          <p:cNvSpPr/>
+          <p:nvPr/>
+        </p:nvSpPr>
+        <p:spPr>
+          <a:xfrm flipH="1">
+            <a:off x="4509786" y="1300206"/>
+            <a:ext cx="441842" cy="427605"/>
+          </a:xfrm>
+          <a:prstGeom prst="bentArrow">
+            <a:avLst>
+              <a:gd name="adj1" fmla="val 31683"/>
+              <a:gd name="adj2" fmla="val 27228"/>
+              <a:gd name="adj3" fmla="val 49503"/>
+              <a:gd name="adj4" fmla="val 30384"/>
+            </a:avLst>
+          </a:prstGeom>
+          <a:solidFill>
+            <a:schemeClr val="accent2">
+              <a:alpha val="70000"/>
+            </a:schemeClr>
+          </a:solidFill>
+          <a:ln w="25400">
+            <a:solidFill>
+              <a:schemeClr val="accent2"/>
+            </a:solidFill>
+          </a:ln>
+        </p:spPr>
+        <p:style>
+          <a:lnRef idx="2">
+            <a:schemeClr val="accent1">
+              <a:shade val="15000"/>
+            </a:schemeClr>
+          </a:lnRef>
+          <a:fillRef idx="1">
+            <a:schemeClr val="accent1"/>
+          </a:fillRef>
+          <a:effectRef idx="0">
+            <a:schemeClr val="accent1"/>
+          </a:effectRef>
+          <a:fontRef idx="minor">
+            <a:schemeClr val="lt1"/>
+          </a:fontRef>
+        </p:style>
+        <p:txBody>
+          <a:bodyPr rtlCol="0" anchor="ctr"/>
+          <a:lstStyle/>
+          <a:p>
+            <a:pPr algn="ctr"/>
+            <a:endParaRPr lang="zh-TW" altLang="en-US">
+              <a:solidFill>
+                <a:schemeClr val="tx1"/>
+              </a:solidFill>
+            </a:endParaRPr>
+          </a:p>
+        </p:txBody>
+      </p:sp>
     </p:spTree>
     <p:extLst>
       <p:ext uri="{BB962C8B-B14F-4D97-AF65-F5344CB8AC3E}">
@@ -6903,6 +7353,85 @@
       </p:grpSpPr>
       <p:sp>
         <p:nvSpPr>
+          <p:cNvPr id="16" name="箭號: 向下 15">
+            <a:extLst>
+              <a:ext uri="{FF2B5EF4-FFF2-40B4-BE49-F238E27FC236}">
+                <a16:creationId xmlns:a16="http://schemas.microsoft.com/office/drawing/2014/main" id="{215D1878-B489-AFE3-A8C3-A6B0443A3968}"/>
+              </a:ext>
+            </a:extLst>
+          </p:cNvPr>
+          <p:cNvSpPr/>
+          <p:nvPr/>
+        </p:nvSpPr>
+        <p:spPr>
+          <a:xfrm rot="16200000">
+            <a:off x="3043012" y="1900012"/>
+            <a:ext cx="325849" cy="859919"/>
+          </a:xfrm>
+          <a:prstGeom prst="downArrow">
+            <a:avLst>
+              <a:gd name="adj1" fmla="val 62892"/>
+              <a:gd name="adj2" fmla="val 52184"/>
+            </a:avLst>
+          </a:prstGeom>
+          <a:solidFill>
+            <a:schemeClr val="accent4">
+              <a:lumMod val="20000"/>
+              <a:lumOff val="80000"/>
+            </a:schemeClr>
+          </a:solidFill>
+          <a:ln w="25400">
+            <a:solidFill>
+              <a:schemeClr val="accent4">
+                <a:lumMod val="60000"/>
+                <a:lumOff val="40000"/>
+              </a:schemeClr>
+            </a:solidFill>
+          </a:ln>
+        </p:spPr>
+        <p:style>
+          <a:lnRef idx="2">
+            <a:schemeClr val="accent1">
+              <a:shade val="15000"/>
+            </a:schemeClr>
+          </a:lnRef>
+          <a:fillRef idx="1">
+            <a:schemeClr val="accent1"/>
+          </a:fillRef>
+          <a:effectRef idx="0">
+            <a:schemeClr val="accent1"/>
+          </a:effectRef>
+          <a:fontRef idx="minor">
+            <a:schemeClr val="lt1"/>
+          </a:fontRef>
+        </p:style>
+        <p:txBody>
+          <a:bodyPr vert="eaVert" wrap="none" lIns="0" tIns="72000" rIns="0" bIns="0" rtlCol="0" anchor="ctr" anchorCtr="1"/>
+          <a:lstStyle/>
+          <a:p>
+            <a:pPr algn="ctr"/>
+            <a:r>
+              <a:rPr lang="en-US" altLang="zh-TW" sz="1200" b="1" dirty="0">
+                <a:solidFill>
+                  <a:schemeClr val="accent4">
+                    <a:lumMod val="75000"/>
+                  </a:schemeClr>
+                </a:solidFill>
+              </a:rPr>
+              <a:t>MCP</a:t>
+            </a:r>
+            <a:endParaRPr lang="zh-TW" altLang="en-US" sz="1200" b="1" dirty="0">
+              <a:solidFill>
+                <a:schemeClr val="accent4">
+                  <a:lumMod val="75000"/>
+                </a:schemeClr>
+              </a:solidFill>
+            </a:endParaRPr>
+          </a:p>
+        </p:txBody>
+      </p:sp>
+      <p:sp>
+        <p:nvSpPr>
           <p:cNvPr id="42" name="矩形 41">
             <a:extLst>
               <a:ext uri="{FF2B5EF4-FFF2-40B4-BE49-F238E27FC236}">
@@ -6915,7 +7444,7 @@
         </p:nvSpPr>
         <p:spPr>
           <a:xfrm>
-            <a:off x="2699792" y="1451645"/>
+            <a:off x="4661723" y="4708100"/>
             <a:ext cx="3700753" cy="1257275"/>
           </a:xfrm>
           <a:prstGeom prst="rect">
@@ -6968,99 +7497,6 @@
       </p:sp>
       <p:sp>
         <p:nvSpPr>
-          <p:cNvPr id="19" name="矩形 18">
-            <a:extLst>
-              <a:ext uri="{FF2B5EF4-FFF2-40B4-BE49-F238E27FC236}">
-                <a16:creationId xmlns:a16="http://schemas.microsoft.com/office/drawing/2014/main" id="{3DE2EA1A-CCAE-DEFA-2A4D-6F6BEF5AE898}"/>
-              </a:ext>
-            </a:extLst>
-          </p:cNvPr>
-          <p:cNvSpPr/>
-          <p:nvPr/>
-        </p:nvSpPr>
-        <p:spPr>
-          <a:xfrm>
-            <a:off x="3858745" y="1620476"/>
-            <a:ext cx="1844242" cy="274677"/>
-          </a:xfrm>
-          <a:prstGeom prst="rect">
-            <a:avLst/>
-          </a:prstGeom>
-          <a:solidFill>
-            <a:schemeClr val="accent3">
-              <a:lumMod val="20000"/>
-              <a:lumOff val="80000"/>
-            </a:schemeClr>
-          </a:solidFill>
-          <a:ln w="12700">
-            <a:solidFill>
-              <a:srgbClr val="92D050"/>
-            </a:solidFill>
-          </a:ln>
-        </p:spPr>
-        <p:style>
-          <a:lnRef idx="2">
-            <a:schemeClr val="accent1">
-              <a:shade val="15000"/>
-            </a:schemeClr>
-          </a:lnRef>
-          <a:fillRef idx="1">
-            <a:schemeClr val="accent1"/>
-          </a:fillRef>
-          <a:effectRef idx="0">
-            <a:schemeClr val="accent1"/>
-          </a:effectRef>
-          <a:fontRef idx="minor">
-            <a:schemeClr val="lt1"/>
-          </a:fontRef>
-        </p:style>
-        <p:txBody>
-          <a:bodyPr wrap="none" lIns="91440" tIns="0" rIns="0" bIns="0" rtlCol="0" anchor="ctr" anchorCtr="0"/>
-          <a:lstStyle/>
-          <a:p>
-            <a:pPr>
-              <a:lnSpc>
-                <a:spcPts val="1600"/>
-              </a:lnSpc>
-            </a:pPr>
-            <a:r>
-              <a:rPr lang="en-US" altLang="zh-TW" sz="1200" dirty="0">
-                <a:solidFill>
-                  <a:schemeClr val="tx1"/>
-                </a:solidFill>
-                <a:latin typeface="ADLaM Display" panose="02010000000000000000" pitchFamily="2" charset="0"/>
-                <a:ea typeface="ADLaM Display" panose="02010000000000000000" pitchFamily="2" charset="0"/>
-                <a:cs typeface="ADLaM Display" panose="02010000000000000000" pitchFamily="2" charset="0"/>
-              </a:rPr>
-              <a:t>Clinical Trials</a:t>
-            </a:r>
-            <a:r>
-              <a:rPr lang="zh-TW" altLang="en-US" sz="1200" dirty="0">
-                <a:solidFill>
-                  <a:schemeClr val="tx1"/>
-                </a:solidFill>
-                <a:latin typeface="ADLaM Display" panose="02010000000000000000" pitchFamily="2" charset="0"/>
-                <a:ea typeface="ADLaM Display" panose="02010000000000000000" pitchFamily="2" charset="0"/>
-                <a:cs typeface="ADLaM Display" panose="02010000000000000000" pitchFamily="2" charset="0"/>
-              </a:rPr>
-              <a:t> </a:t>
-            </a:r>
-            <a:r>
-              <a:rPr lang="en-US" altLang="zh-TW" sz="1200" dirty="0">
-                <a:solidFill>
-                  <a:schemeClr val="tx1"/>
-                </a:solidFill>
-                <a:latin typeface="ADLaM Display" panose="02010000000000000000" pitchFamily="2" charset="0"/>
-                <a:ea typeface="ADLaM Display" panose="02010000000000000000" pitchFamily="2" charset="0"/>
-                <a:cs typeface="ADLaM Display" panose="02010000000000000000" pitchFamily="2" charset="0"/>
-              </a:rPr>
-              <a:t>API</a:t>
-            </a:r>
-          </a:p>
-        </p:txBody>
-      </p:sp>
-      <p:sp>
-        <p:nvSpPr>
           <p:cNvPr id="37" name="矩形 36">
             <a:extLst>
               <a:ext uri="{FF2B5EF4-FFF2-40B4-BE49-F238E27FC236}">
@@ -7073,7 +7509,7 @@
         </p:nvSpPr>
         <p:spPr>
           <a:xfrm>
-            <a:off x="2281896" y="4424279"/>
+            <a:off x="2281896" y="4836021"/>
             <a:ext cx="3033034" cy="1185267"/>
           </a:xfrm>
           <a:prstGeom prst="rect">
@@ -7283,7 +7719,7 @@
         </p:blipFill>
         <p:spPr>
           <a:xfrm>
-            <a:off x="5887095" y="1827319"/>
+            <a:off x="7893066" y="2461734"/>
             <a:ext cx="513450" cy="513450"/>
           </a:xfrm>
           <a:prstGeom prst="rect">
@@ -7291,155 +7727,12 @@
           </a:prstGeom>
         </p:spPr>
       </p:pic>
-      <p:grpSp>
-        <p:nvGrpSpPr>
-          <p:cNvPr id="28" name="群組 27">
+      <p:sp>
+        <p:nvSpPr>
+          <p:cNvPr id="18" name="矩形 17">
             <a:extLst>
               <a:ext uri="{FF2B5EF4-FFF2-40B4-BE49-F238E27FC236}">
-                <a16:creationId xmlns:a16="http://schemas.microsoft.com/office/drawing/2014/main" id="{65C09A8E-2299-066D-21A0-8B4DBD865351}"/>
-              </a:ext>
-            </a:extLst>
-          </p:cNvPr>
-          <p:cNvGrpSpPr/>
-          <p:nvPr/>
-        </p:nvGrpSpPr>
-        <p:grpSpPr>
-          <a:xfrm>
-            <a:off x="2880991" y="1603184"/>
-            <a:ext cx="792088" cy="961721"/>
-            <a:chOff x="5796136" y="2249217"/>
-            <a:chExt cx="792088" cy="823167"/>
-          </a:xfrm>
-          <a:solidFill>
-            <a:schemeClr val="accent4">
-              <a:lumMod val="20000"/>
-              <a:lumOff val="80000"/>
-            </a:schemeClr>
-          </a:solidFill>
-        </p:grpSpPr>
-        <p:sp>
-          <p:nvSpPr>
-            <p:cNvPr id="18" name="矩形 17">
-              <a:extLst>
-                <a:ext uri="{FF2B5EF4-FFF2-40B4-BE49-F238E27FC236}">
-                  <a16:creationId xmlns:a16="http://schemas.microsoft.com/office/drawing/2014/main" id="{DE400132-0809-AF72-370C-AFEFA6E6B6FC}"/>
-                </a:ext>
-              </a:extLst>
-            </p:cNvPr>
-            <p:cNvSpPr/>
-            <p:nvPr/>
-          </p:nvSpPr>
-          <p:spPr>
-            <a:xfrm>
-              <a:off x="5796136" y="2249217"/>
-              <a:ext cx="792088" cy="823167"/>
-            </a:xfrm>
-            <a:prstGeom prst="rect">
-              <a:avLst/>
-            </a:prstGeom>
-            <a:grpFill/>
-            <a:ln w="38100">
-              <a:solidFill>
-                <a:schemeClr val="accent4">
-                  <a:lumMod val="40000"/>
-                  <a:lumOff val="60000"/>
-                </a:schemeClr>
-              </a:solidFill>
-            </a:ln>
-          </p:spPr>
-          <p:style>
-            <a:lnRef idx="2">
-              <a:schemeClr val="accent1">
-                <a:shade val="15000"/>
-              </a:schemeClr>
-            </a:lnRef>
-            <a:fillRef idx="1">
-              <a:schemeClr val="accent1"/>
-            </a:fillRef>
-            <a:effectRef idx="0">
-              <a:schemeClr val="accent1"/>
-            </a:effectRef>
-            <a:fontRef idx="minor">
-              <a:schemeClr val="lt1"/>
-            </a:fontRef>
-          </p:style>
-          <p:txBody>
-            <a:bodyPr wrap="none" lIns="0" tIns="0" rIns="0" bIns="0" rtlCol="0" anchor="b" anchorCtr="1"/>
-            <a:lstStyle/>
-            <a:p>
-              <a:pPr algn="r">
-                <a:lnSpc>
-                  <a:spcPts val="1600"/>
-                </a:lnSpc>
-              </a:pPr>
-              <a:r>
-                <a:rPr lang="en-US" altLang="zh-TW" sz="1400" dirty="0">
-                  <a:solidFill>
-                    <a:schemeClr val="tx1"/>
-                  </a:solidFill>
-                  <a:latin typeface="ADLaM Display" panose="02010000000000000000" pitchFamily="2" charset="0"/>
-                  <a:ea typeface="ADLaM Display" panose="02010000000000000000" pitchFamily="2" charset="0"/>
-                  <a:cs typeface="ADLaM Display" panose="02010000000000000000" pitchFamily="2" charset="0"/>
-                </a:rPr>
-                <a:t>BioMCP</a:t>
-              </a:r>
-            </a:p>
-          </p:txBody>
-        </p:sp>
-        <p:pic>
-          <p:nvPicPr>
-            <p:cNvPr id="25" name="圖片 24">
-              <a:extLst>
-                <a:ext uri="{FF2B5EF4-FFF2-40B4-BE49-F238E27FC236}">
-                  <a16:creationId xmlns:a16="http://schemas.microsoft.com/office/drawing/2014/main" id="{42E9BC1C-BFC1-372E-BF18-851CBE7059E2}"/>
-                </a:ext>
-              </a:extLst>
-            </p:cNvPr>
-            <p:cNvPicPr preferRelativeResize="0">
-              <a:picLocks/>
-            </p:cNvPicPr>
-            <p:nvPr/>
-          </p:nvPicPr>
-          <p:blipFill>
-            <a:blip r:embed="rId3"/>
-            <a:stretch>
-              <a:fillRect/>
-            </a:stretch>
-          </p:blipFill>
-          <p:spPr>
-            <a:xfrm>
-              <a:off x="5980244" y="2394410"/>
-              <a:ext cx="457200" cy="391332"/>
-            </a:xfrm>
-            <a:prstGeom prst="rect">
-              <a:avLst/>
-            </a:prstGeom>
-            <a:grpFill/>
-            <a:ln w="19050">
-              <a:solidFill>
-                <a:schemeClr val="bg1">
-                  <a:lumMod val="95000"/>
-                </a:schemeClr>
-              </a:solidFill>
-            </a:ln>
-            <a:effectLst>
-              <a:glow rad="50800">
-                <a:schemeClr val="bg1">
-                  <a:lumMod val="95000"/>
-                  <a:alpha val="60000"/>
-                </a:schemeClr>
-              </a:glow>
-              <a:softEdge rad="25400"/>
-            </a:effectLst>
-          </p:spPr>
-        </p:pic>
-      </p:grpSp>
-      <p:sp>
-        <p:nvSpPr>
-          <p:cNvPr id="27" name="矩形 26">
-            <a:extLst>
-              <a:ext uri="{FF2B5EF4-FFF2-40B4-BE49-F238E27FC236}">
-                <a16:creationId xmlns:a16="http://schemas.microsoft.com/office/drawing/2014/main" id="{403EFD41-8FE5-076E-644D-A0755BFD1A56}"/>
+                <a16:creationId xmlns:a16="http://schemas.microsoft.com/office/drawing/2014/main" id="{DE400132-0809-AF72-370C-AFEFA6E6B6FC}"/>
               </a:ext>
             </a:extLst>
           </p:cNvPr>
@@ -7448,15 +7741,20 @@
         </p:nvSpPr>
         <p:spPr>
           <a:xfrm>
-            <a:off x="6189500" y="3850777"/>
-            <a:ext cx="1229495" cy="720080"/>
+            <a:off x="3959116" y="1220289"/>
+            <a:ext cx="1653476" cy="2034730"/>
           </a:xfrm>
           <a:prstGeom prst="rect">
             <a:avLst/>
           </a:prstGeom>
           <a:noFill/>
-          <a:ln w="12700">
-            <a:noFill/>
+          <a:ln w="38100">
+            <a:solidFill>
+              <a:schemeClr val="accent3">
+                <a:lumMod val="40000"/>
+                <a:lumOff val="60000"/>
+              </a:schemeClr>
+            </a:solidFill>
           </a:ln>
         </p:spPr>
         <p:style>
@@ -7476,72 +7774,97 @@
           </a:fontRef>
         </p:style>
         <p:txBody>
-          <a:bodyPr wrap="none" lIns="91440" tIns="0" rIns="0" bIns="0" rtlCol="0" anchor="ctr" anchorCtr="0"/>
+          <a:bodyPr wrap="none" lIns="0" tIns="91440" rIns="0" bIns="0" rtlCol="0" anchor="t" anchorCtr="0"/>
           <a:lstStyle/>
           <a:p>
-            <a:pPr>
+            <a:pPr algn="ctr">
               <a:lnSpc>
                 <a:spcPts val="1600"/>
               </a:lnSpc>
             </a:pPr>
-            <a:endParaRPr lang="en-US" altLang="zh-TW" sz="1200" dirty="0">
-              <a:solidFill>
-                <a:schemeClr val="tx1"/>
-              </a:solidFill>
-              <a:latin typeface="ADLaM Display" panose="02010000000000000000" pitchFamily="2" charset="0"/>
-              <a:ea typeface="ADLaM Display" panose="02010000000000000000" pitchFamily="2" charset="0"/>
-              <a:cs typeface="ADLaM Display" panose="02010000000000000000" pitchFamily="2" charset="0"/>
-            </a:endParaRPr>
-          </a:p>
-          <a:p>
-            <a:pPr>
+            <a:r>
+              <a:rPr lang="en-US" altLang="zh-TW" sz="1400" dirty="0">
+                <a:solidFill>
+                  <a:schemeClr val="tx1"/>
+                </a:solidFill>
+                <a:latin typeface="ADLaM Display" panose="02010000000000000000" pitchFamily="2" charset="0"/>
+                <a:ea typeface="ADLaM Display" panose="02010000000000000000" pitchFamily="2" charset="0"/>
+                <a:cs typeface="ADLaM Display" panose="02010000000000000000" pitchFamily="2" charset="0"/>
+              </a:rPr>
+              <a:t>BioMCP</a:t>
+            </a:r>
+          </a:p>
+          <a:p>
+            <a:pPr algn="ctr">
               <a:lnSpc>
                 <a:spcPts val="1600"/>
               </a:lnSpc>
             </a:pPr>
             <a:r>
-              <a:rPr lang="en-US" altLang="zh-TW" sz="1200" dirty="0">
-                <a:solidFill>
-                  <a:schemeClr val="tx1"/>
-                </a:solidFill>
-                <a:latin typeface="ADLaM Display" panose="02010000000000000000" pitchFamily="2" charset="0"/>
+              <a:rPr lang="en-US" altLang="zh-TW" sz="1000" dirty="0">
+                <a:solidFill>
+                  <a:schemeClr val="tx2"/>
+                </a:solidFill>
                 <a:ea typeface="ADLaM Display" panose="02010000000000000000" pitchFamily="2" charset="0"/>
                 <a:cs typeface="ADLaM Display" panose="02010000000000000000" pitchFamily="2" charset="0"/>
               </a:rPr>
-              <a:t>Apollo-Corpus</a:t>
-            </a:r>
-          </a:p>
-          <a:p>
-            <a:pPr>
-              <a:lnSpc>
-                <a:spcPts val="1600"/>
-              </a:lnSpc>
-            </a:pPr>
-            <a:r>
-              <a:rPr lang="en-US" altLang="zh-TW" sz="1200" dirty="0" err="1">
-                <a:solidFill>
-                  <a:schemeClr val="tx1"/>
-                </a:solidFill>
-                <a:latin typeface="ADLaM Display" panose="02010000000000000000" pitchFamily="2" charset="0"/>
-                <a:ea typeface="ADLaM Display" panose="02010000000000000000" pitchFamily="2" charset="0"/>
-                <a:cs typeface="ADLaM Display" panose="02010000000000000000" pitchFamily="2" charset="0"/>
-              </a:rPr>
-              <a:t>MedQA</a:t>
-            </a:r>
-            <a:r>
-              <a:rPr lang="en-US" altLang="zh-TW" sz="1200" dirty="0">
-                <a:solidFill>
-                  <a:schemeClr val="tx1"/>
-                </a:solidFill>
-                <a:latin typeface="ADLaM Display" panose="02010000000000000000" pitchFamily="2" charset="0"/>
-                <a:ea typeface="ADLaM Display" panose="02010000000000000000" pitchFamily="2" charset="0"/>
-                <a:cs typeface="ADLaM Display" panose="02010000000000000000" pitchFamily="2" charset="0"/>
-              </a:rPr>
-              <a:t>/USMLE</a:t>
+              <a:t>(GenomOncology)</a:t>
             </a:r>
           </a:p>
         </p:txBody>
       </p:sp>
+      <p:pic>
+        <p:nvPicPr>
+          <p:cNvPr id="25" name="圖片 24">
+            <a:extLst>
+              <a:ext uri="{FF2B5EF4-FFF2-40B4-BE49-F238E27FC236}">
+                <a16:creationId xmlns:a16="http://schemas.microsoft.com/office/drawing/2014/main" id="{42E9BC1C-BFC1-372E-BF18-851CBE7059E2}"/>
+              </a:ext>
+            </a:extLst>
+          </p:cNvPr>
+          <p:cNvPicPr preferRelativeResize="0">
+            <a:picLocks/>
+          </p:cNvPicPr>
+          <p:nvPr/>
+        </p:nvPicPr>
+        <p:blipFill>
+          <a:blip r:embed="rId3"/>
+          <a:stretch>
+            <a:fillRect/>
+          </a:stretch>
+        </p:blipFill>
+        <p:spPr>
+          <a:xfrm>
+            <a:off x="5405184" y="1124744"/>
+            <a:ext cx="337313" cy="341304"/>
+          </a:xfrm>
+          <a:prstGeom prst="rect">
+            <a:avLst/>
+          </a:prstGeom>
+          <a:solidFill>
+            <a:schemeClr val="accent4">
+              <a:lumMod val="20000"/>
+              <a:lumOff val="80000"/>
+            </a:schemeClr>
+          </a:solidFill>
+          <a:ln w="19050">
+            <a:solidFill>
+              <a:schemeClr val="bg1">
+                <a:lumMod val="95000"/>
+              </a:schemeClr>
+            </a:solidFill>
+          </a:ln>
+          <a:effectLst>
+            <a:glow rad="50800">
+              <a:schemeClr val="bg1">
+                <a:lumMod val="95000"/>
+                <a:alpha val="60000"/>
+              </a:schemeClr>
+            </a:glow>
+            <a:softEdge rad="25400"/>
+          </a:effectLst>
+        </p:spPr>
+      </p:pic>
       <p:sp>
         <p:nvSpPr>
           <p:cNvPr id="30" name="右大括弧 29">
@@ -7606,8 +7929,8 @@
         </p:nvSpPr>
         <p:spPr>
           <a:xfrm>
-            <a:off x="3857187" y="1925538"/>
-            <a:ext cx="1845800" cy="274677"/>
+            <a:off x="4048989" y="2707766"/>
+            <a:ext cx="1473729" cy="450859"/>
           </a:xfrm>
           <a:prstGeom prst="rect">
             <a:avLst/>
@@ -7618,198 +7941,9 @@
               <a:lumOff val="80000"/>
             </a:schemeClr>
           </a:solidFill>
-          <a:ln w="12700">
-            <a:solidFill>
-              <a:srgbClr val="92D050"/>
-            </a:solidFill>
-          </a:ln>
-        </p:spPr>
-        <p:style>
-          <a:lnRef idx="2">
-            <a:schemeClr val="accent1">
-              <a:shade val="15000"/>
-            </a:schemeClr>
-          </a:lnRef>
-          <a:fillRef idx="1">
-            <a:schemeClr val="accent1"/>
-          </a:fillRef>
-          <a:effectRef idx="0">
-            <a:schemeClr val="accent1"/>
-          </a:effectRef>
-          <a:fontRef idx="minor">
-            <a:schemeClr val="lt1"/>
-          </a:fontRef>
-        </p:style>
-        <p:txBody>
-          <a:bodyPr wrap="none" lIns="91440" tIns="0" rIns="0" bIns="0" rtlCol="0" anchor="ctr" anchorCtr="0"/>
-          <a:lstStyle/>
-          <a:p>
-            <a:pPr>
-              <a:lnSpc>
-                <a:spcPts val="1600"/>
-              </a:lnSpc>
-            </a:pPr>
-            <a:r>
-              <a:rPr lang="en-US" altLang="zh-TW" sz="1200" dirty="0">
-                <a:solidFill>
-                  <a:schemeClr val="tx1"/>
-                </a:solidFill>
-                <a:latin typeface="ADLaM Display" panose="02010000000000000000" pitchFamily="2" charset="0"/>
-                <a:ea typeface="ADLaM Display" panose="02010000000000000000" pitchFamily="2" charset="0"/>
-                <a:cs typeface="ADLaM Display" panose="02010000000000000000" pitchFamily="2" charset="0"/>
-              </a:rPr>
-              <a:t>Genomic Variants</a:t>
-            </a:r>
-            <a:r>
-              <a:rPr lang="zh-TW" altLang="en-US" sz="1200" dirty="0">
-                <a:solidFill>
-                  <a:schemeClr val="tx1"/>
-                </a:solidFill>
-                <a:latin typeface="ADLaM Display" panose="02010000000000000000" pitchFamily="2" charset="0"/>
-                <a:ea typeface="ADLaM Display" panose="02010000000000000000" pitchFamily="2" charset="0"/>
-                <a:cs typeface="ADLaM Display" panose="02010000000000000000" pitchFamily="2" charset="0"/>
-              </a:rPr>
-              <a:t> </a:t>
-            </a:r>
-            <a:r>
-              <a:rPr lang="en-US" altLang="zh-TW" sz="1200" dirty="0">
-                <a:solidFill>
-                  <a:schemeClr val="tx1"/>
-                </a:solidFill>
-                <a:latin typeface="ADLaM Display" panose="02010000000000000000" pitchFamily="2" charset="0"/>
-                <a:ea typeface="ADLaM Display" panose="02010000000000000000" pitchFamily="2" charset="0"/>
-                <a:cs typeface="ADLaM Display" panose="02010000000000000000" pitchFamily="2" charset="0"/>
-              </a:rPr>
-              <a:t>API</a:t>
-            </a:r>
-          </a:p>
-        </p:txBody>
-      </p:sp>
-      <p:sp>
-        <p:nvSpPr>
-          <p:cNvPr id="34" name="矩形 33">
-            <a:extLst>
-              <a:ext uri="{FF2B5EF4-FFF2-40B4-BE49-F238E27FC236}">
-                <a16:creationId xmlns:a16="http://schemas.microsoft.com/office/drawing/2014/main" id="{9B95387A-8982-D2B1-AFA9-0B75FF57F2F8}"/>
-              </a:ext>
-            </a:extLst>
-          </p:cNvPr>
-          <p:cNvSpPr/>
-          <p:nvPr/>
-        </p:nvSpPr>
-        <p:spPr>
-          <a:xfrm>
-            <a:off x="3857187" y="2230600"/>
-            <a:ext cx="1845800" cy="274677"/>
-          </a:xfrm>
-          <a:prstGeom prst="rect">
-            <a:avLst/>
-          </a:prstGeom>
-          <a:solidFill>
-            <a:schemeClr val="accent3">
-              <a:lumMod val="20000"/>
-              <a:lumOff val="80000"/>
-            </a:schemeClr>
-          </a:solidFill>
-          <a:ln w="12700">
-            <a:solidFill>
-              <a:srgbClr val="92D050"/>
-            </a:solidFill>
-          </a:ln>
-        </p:spPr>
-        <p:style>
-          <a:lnRef idx="2">
-            <a:schemeClr val="accent1">
-              <a:shade val="15000"/>
-            </a:schemeClr>
-          </a:lnRef>
-          <a:fillRef idx="1">
-            <a:schemeClr val="accent1"/>
-          </a:fillRef>
-          <a:effectRef idx="0">
-            <a:schemeClr val="accent1"/>
-          </a:effectRef>
-          <a:fontRef idx="minor">
-            <a:schemeClr val="lt1"/>
-          </a:fontRef>
-        </p:style>
-        <p:txBody>
-          <a:bodyPr wrap="none" lIns="91440" tIns="0" rIns="0" bIns="0" rtlCol="0" anchor="ctr" anchorCtr="0"/>
-          <a:lstStyle/>
-          <a:p>
-            <a:pPr>
-              <a:lnSpc>
-                <a:spcPts val="1600"/>
-              </a:lnSpc>
-            </a:pPr>
-            <a:r>
-              <a:rPr lang="en-US" altLang="zh-TW" sz="1200" dirty="0">
-                <a:solidFill>
-                  <a:schemeClr val="tx1"/>
-                </a:solidFill>
-                <a:latin typeface="ADLaM Display" panose="02010000000000000000" pitchFamily="2" charset="0"/>
-                <a:ea typeface="ADLaM Display" panose="02010000000000000000" pitchFamily="2" charset="0"/>
-                <a:cs typeface="ADLaM Display" panose="02010000000000000000" pitchFamily="2" charset="0"/>
-              </a:rPr>
-              <a:t>Research Articles</a:t>
-            </a:r>
-            <a:r>
-              <a:rPr lang="zh-TW" altLang="en-US" sz="1200" dirty="0">
-                <a:solidFill>
-                  <a:schemeClr val="tx1"/>
-                </a:solidFill>
-                <a:latin typeface="ADLaM Display" panose="02010000000000000000" pitchFamily="2" charset="0"/>
-                <a:ea typeface="ADLaM Display" panose="02010000000000000000" pitchFamily="2" charset="0"/>
-                <a:cs typeface="ADLaM Display" panose="02010000000000000000" pitchFamily="2" charset="0"/>
-              </a:rPr>
-              <a:t> </a:t>
-            </a:r>
-            <a:r>
-              <a:rPr lang="en-US" altLang="zh-TW" sz="1200" dirty="0">
-                <a:solidFill>
-                  <a:schemeClr val="tx1"/>
-                </a:solidFill>
-                <a:latin typeface="ADLaM Display" panose="02010000000000000000" pitchFamily="2" charset="0"/>
-                <a:ea typeface="ADLaM Display" panose="02010000000000000000" pitchFamily="2" charset="0"/>
-                <a:cs typeface="ADLaM Display" panose="02010000000000000000" pitchFamily="2" charset="0"/>
-              </a:rPr>
-              <a:t>API</a:t>
-            </a:r>
-          </a:p>
-        </p:txBody>
-      </p:sp>
-      <p:sp>
-        <p:nvSpPr>
-          <p:cNvPr id="16" name="箭號: 向下 15">
-            <a:extLst>
-              <a:ext uri="{FF2B5EF4-FFF2-40B4-BE49-F238E27FC236}">
-                <a16:creationId xmlns:a16="http://schemas.microsoft.com/office/drawing/2014/main" id="{215D1878-B489-AFE3-A8C3-A6B0443A3968}"/>
-              </a:ext>
-            </a:extLst>
-          </p:cNvPr>
-          <p:cNvSpPr/>
-          <p:nvPr/>
-        </p:nvSpPr>
-        <p:spPr>
-          <a:xfrm rot="16200000">
-            <a:off x="2522781" y="1884010"/>
-            <a:ext cx="325849" cy="459874"/>
-          </a:xfrm>
-          <a:prstGeom prst="downArrow">
-            <a:avLst>
-              <a:gd name="adj1" fmla="val 62892"/>
-              <a:gd name="adj2" fmla="val 52184"/>
-            </a:avLst>
-          </a:prstGeom>
-          <a:solidFill>
-            <a:schemeClr val="accent4">
-              <a:lumMod val="20000"/>
-              <a:lumOff val="80000"/>
-            </a:schemeClr>
-          </a:solidFill>
           <a:ln w="25400">
             <a:solidFill>
-              <a:schemeClr val="accent4">
+              <a:schemeClr val="accent3">
                 <a:lumMod val="60000"/>
                 <a:lumOff val="40000"/>
               </a:schemeClr>
@@ -7833,27 +7967,129 @@
           </a:fontRef>
         </p:style>
         <p:txBody>
-          <a:bodyPr vert="eaVert" wrap="none" lIns="0" tIns="72000" rIns="0" bIns="0" rtlCol="0" anchor="ctr" anchorCtr="1"/>
+          <a:bodyPr wrap="none" lIns="0" tIns="18288" rIns="0" bIns="0" rtlCol="0" anchor="t" anchorCtr="0"/>
           <a:lstStyle/>
           <a:p>
-            <a:pPr algn="ctr"/>
-            <a:r>
-              <a:rPr lang="en-US" altLang="zh-TW" sz="1200" b="1" dirty="0">
-                <a:solidFill>
-                  <a:schemeClr val="accent4">
-                    <a:lumMod val="75000"/>
+            <a:pPr algn="ctr">
+              <a:lnSpc>
+                <a:spcPts val="1600"/>
+              </a:lnSpc>
+            </a:pPr>
+            <a:r>
+              <a:rPr lang="en-US" altLang="zh-TW" sz="1200" dirty="0">
+                <a:solidFill>
+                  <a:schemeClr val="accent3">
+                    <a:lumMod val="50000"/>
                   </a:schemeClr>
                 </a:solidFill>
-              </a:rPr>
-              <a:t>MCP</a:t>
-            </a:r>
-            <a:endParaRPr lang="zh-TW" altLang="en-US" sz="1200" b="1" dirty="0">
-              <a:solidFill>
-                <a:schemeClr val="accent4">
-                  <a:lumMod val="75000"/>
-                </a:schemeClr>
-              </a:solidFill>
-            </a:endParaRPr>
+                <a:latin typeface="ADLaM Display" panose="02010000000000000000" pitchFamily="2" charset="0"/>
+                <a:ea typeface="ADLaM Display" panose="02010000000000000000" pitchFamily="2" charset="0"/>
+                <a:cs typeface="ADLaM Display" panose="02010000000000000000" pitchFamily="2" charset="0"/>
+              </a:rPr>
+              <a:t>MyVariant.info</a:t>
+            </a:r>
+            <a:br>
+              <a:rPr lang="en-US" altLang="zh-TW" sz="1200" dirty="0">
+                <a:solidFill>
+                  <a:schemeClr val="accent3">
+                    <a:lumMod val="50000"/>
+                  </a:schemeClr>
+                </a:solidFill>
+                <a:latin typeface="ADLaM Display" panose="02010000000000000000" pitchFamily="2" charset="0"/>
+                <a:ea typeface="ADLaM Display" panose="02010000000000000000" pitchFamily="2" charset="0"/>
+                <a:cs typeface="ADLaM Display" panose="02010000000000000000" pitchFamily="2" charset="0"/>
+              </a:rPr>
+            </a:br>
+            <a:r>
+              <a:rPr lang="en-US" altLang="zh-TW" sz="1000" dirty="0">
+                <a:solidFill>
+                  <a:schemeClr val="tx2"/>
+                </a:solidFill>
+                <a:ea typeface="ADLaM Display" panose="02010000000000000000" pitchFamily="2" charset="0"/>
+                <a:cs typeface="ADLaM Display" panose="02010000000000000000" pitchFamily="2" charset="0"/>
+              </a:rPr>
+              <a:t>(Scripps Research Institute)</a:t>
+            </a:r>
+          </a:p>
+        </p:txBody>
+      </p:sp>
+      <p:sp>
+        <p:nvSpPr>
+          <p:cNvPr id="34" name="矩形 33">
+            <a:extLst>
+              <a:ext uri="{FF2B5EF4-FFF2-40B4-BE49-F238E27FC236}">
+                <a16:creationId xmlns:a16="http://schemas.microsoft.com/office/drawing/2014/main" id="{9B95387A-8982-D2B1-AFA9-0B75FF57F2F8}"/>
+              </a:ext>
+            </a:extLst>
+          </p:cNvPr>
+          <p:cNvSpPr/>
+          <p:nvPr/>
+        </p:nvSpPr>
+        <p:spPr>
+          <a:xfrm>
+            <a:off x="1043608" y="4032509"/>
+            <a:ext cx="990731" cy="491530"/>
+          </a:xfrm>
+          <a:prstGeom prst="rect">
+            <a:avLst/>
+          </a:prstGeom>
+          <a:noFill/>
+          <a:ln w="12700">
+            <a:noFill/>
+          </a:ln>
+        </p:spPr>
+        <p:style>
+          <a:lnRef idx="2">
+            <a:schemeClr val="accent1">
+              <a:shade val="15000"/>
+            </a:schemeClr>
+          </a:lnRef>
+          <a:fillRef idx="1">
+            <a:schemeClr val="accent1"/>
+          </a:fillRef>
+          <a:effectRef idx="0">
+            <a:schemeClr val="accent1"/>
+          </a:effectRef>
+          <a:fontRef idx="minor">
+            <a:schemeClr val="lt1"/>
+          </a:fontRef>
+        </p:style>
+        <p:txBody>
+          <a:bodyPr wrap="none" lIns="0" tIns="0" rIns="0" bIns="0" rtlCol="0" anchor="ctr" anchorCtr="1"/>
+          <a:lstStyle/>
+          <a:p>
+            <a:pPr algn="ctr">
+              <a:lnSpc>
+                <a:spcPts val="1600"/>
+              </a:lnSpc>
+            </a:pPr>
+            <a:r>
+              <a:rPr lang="en-US" altLang="zh-TW" sz="1200" dirty="0">
+                <a:solidFill>
+                  <a:schemeClr val="tx1"/>
+                </a:solidFill>
+                <a:ea typeface="ADLaM Display" panose="02010000000000000000" pitchFamily="2" charset="0"/>
+                <a:cs typeface="ADLaM Display" panose="02010000000000000000" pitchFamily="2" charset="0"/>
+              </a:rPr>
+              <a:t>Cross-Server</a:t>
+            </a:r>
+          </a:p>
+          <a:p>
+            <a:pPr algn="ctr">
+              <a:lnSpc>
+                <a:spcPts val="1600"/>
+              </a:lnSpc>
+            </a:pPr>
+            <a:r>
+              <a:rPr lang="en-US" altLang="zh-TW" sz="1200" dirty="0">
+                <a:solidFill>
+                  <a:schemeClr val="tx1"/>
+                </a:solidFill>
+                <a:ea typeface="ADLaM Display" panose="02010000000000000000" pitchFamily="2" charset="0"/>
+                <a:cs typeface="ADLaM Display" panose="02010000000000000000" pitchFamily="2" charset="0"/>
+              </a:rPr>
+              <a:t>Orchestration</a:t>
+            </a:r>
           </a:p>
         </p:txBody>
       </p:sp>
@@ -7871,7 +8107,7 @@
         </p:nvSpPr>
         <p:spPr>
           <a:xfrm>
-            <a:off x="1444872" y="1570781"/>
+            <a:off x="1765081" y="1786807"/>
             <a:ext cx="859919" cy="307983"/>
           </a:xfrm>
           <a:prstGeom prst="rect">
@@ -7941,7 +8177,7 @@
         </p:nvSpPr>
         <p:spPr>
           <a:xfrm>
-            <a:off x="1445069" y="1958534"/>
+            <a:off x="1765278" y="2174560"/>
             <a:ext cx="859919" cy="307983"/>
           </a:xfrm>
           <a:prstGeom prst="rect">
@@ -8004,6 +8240,421 @@
           </a:p>
         </p:txBody>
       </p:sp>
+      <p:sp>
+        <p:nvSpPr>
+          <p:cNvPr id="3" name="文字方塊 2">
+            <a:extLst>
+              <a:ext uri="{FF2B5EF4-FFF2-40B4-BE49-F238E27FC236}">
+                <a16:creationId xmlns:a16="http://schemas.microsoft.com/office/drawing/2014/main" id="{6BA54547-1DA1-B629-4875-CC7F26099BC9}"/>
+              </a:ext>
+            </a:extLst>
+          </p:cNvPr>
+          <p:cNvSpPr txBox="1"/>
+          <p:nvPr/>
+        </p:nvSpPr>
+        <p:spPr>
+          <a:xfrm>
+            <a:off x="3959117" y="3284984"/>
+            <a:ext cx="1653476" cy="461665"/>
+          </a:xfrm>
+          <a:prstGeom prst="rect">
+            <a:avLst/>
+          </a:prstGeom>
+          <a:noFill/>
+        </p:spPr>
+        <p:txBody>
+          <a:bodyPr wrap="square">
+            <a:spAutoFit/>
+          </a:bodyPr>
+          <a:lstStyle/>
+          <a:p>
+            <a:r>
+              <a:rPr lang="zh-TW" altLang="zh-TW" sz="1200" dirty="0"/>
+              <a:t>Clinvar</a:t>
+            </a:r>
+            <a:r>
+              <a:rPr lang="en-US" altLang="zh-TW" sz="1200" dirty="0"/>
+              <a:t>, OMIM (NIH)</a:t>
+            </a:r>
+          </a:p>
+          <a:p>
+            <a:r>
+              <a:rPr lang="zh-TW" altLang="zh-TW" sz="1200" dirty="0"/>
+              <a:t>, dbGaP, ClinGen, </a:t>
+            </a:r>
+            <a:r>
+              <a:rPr lang="en-US" altLang="zh-TW" sz="1200" dirty="0"/>
+              <a:t> … </a:t>
+            </a:r>
+          </a:p>
+        </p:txBody>
+      </p:sp>
+      <p:sp>
+        <p:nvSpPr>
+          <p:cNvPr id="5" name="矩形 4">
+            <a:extLst>
+              <a:ext uri="{FF2B5EF4-FFF2-40B4-BE49-F238E27FC236}">
+                <a16:creationId xmlns:a16="http://schemas.microsoft.com/office/drawing/2014/main" id="{C0B7572B-0209-6979-6E58-2123FD8F6C70}"/>
+              </a:ext>
+            </a:extLst>
+          </p:cNvPr>
+          <p:cNvSpPr/>
+          <p:nvPr/>
+        </p:nvSpPr>
+        <p:spPr>
+          <a:xfrm>
+            <a:off x="696456" y="5092095"/>
+            <a:ext cx="990731" cy="489287"/>
+          </a:xfrm>
+          <a:prstGeom prst="rect">
+            <a:avLst/>
+          </a:prstGeom>
+          <a:noFill/>
+          <a:ln w="38100">
+            <a:solidFill>
+              <a:schemeClr val="bg1">
+                <a:lumMod val="75000"/>
+              </a:schemeClr>
+            </a:solidFill>
+          </a:ln>
+        </p:spPr>
+        <p:style>
+          <a:lnRef idx="2">
+            <a:schemeClr val="accent1">
+              <a:shade val="15000"/>
+            </a:schemeClr>
+          </a:lnRef>
+          <a:fillRef idx="1">
+            <a:schemeClr val="accent1"/>
+          </a:fillRef>
+          <a:effectRef idx="0">
+            <a:schemeClr val="accent1"/>
+          </a:effectRef>
+          <a:fontRef idx="minor">
+            <a:schemeClr val="lt1"/>
+          </a:fontRef>
+        </p:style>
+        <p:txBody>
+          <a:bodyPr wrap="none" lIns="0" tIns="0" rIns="0" bIns="0" rtlCol="0" anchor="ctr" anchorCtr="1"/>
+          <a:lstStyle/>
+          <a:p>
+            <a:pPr algn="ctr">
+              <a:lnSpc>
+                <a:spcPts val="1600"/>
+              </a:lnSpc>
+            </a:pPr>
+            <a:r>
+              <a:rPr lang="en-US" altLang="zh-TW" sz="1200" dirty="0">
+                <a:solidFill>
+                  <a:schemeClr val="tx2"/>
+                </a:solidFill>
+                <a:latin typeface="ADLaM Display" panose="02010000000000000000" pitchFamily="2" charset="0"/>
+                <a:ea typeface="ADLaM Display" panose="02010000000000000000" pitchFamily="2" charset="0"/>
+                <a:cs typeface="ADLaM Display" panose="02010000000000000000" pitchFamily="2" charset="0"/>
+              </a:rPr>
+              <a:t>Bio-AI-Agent</a:t>
+            </a:r>
+          </a:p>
+        </p:txBody>
+      </p:sp>
+      <p:sp>
+        <p:nvSpPr>
+          <p:cNvPr id="8" name="矩形 7">
+            <a:extLst>
+              <a:ext uri="{FF2B5EF4-FFF2-40B4-BE49-F238E27FC236}">
+                <a16:creationId xmlns:a16="http://schemas.microsoft.com/office/drawing/2014/main" id="{3EED13C0-1FA6-E215-AF9B-54ACA34BE12E}"/>
+              </a:ext>
+            </a:extLst>
+          </p:cNvPr>
+          <p:cNvSpPr/>
+          <p:nvPr/>
+        </p:nvSpPr>
+        <p:spPr>
+          <a:xfrm>
+            <a:off x="8023065" y="591715"/>
+            <a:ext cx="792088" cy="646044"/>
+          </a:xfrm>
+          <a:prstGeom prst="rect">
+            <a:avLst/>
+          </a:prstGeom>
+          <a:solidFill>
+            <a:schemeClr val="accent3">
+              <a:lumMod val="20000"/>
+              <a:lumOff val="80000"/>
+            </a:schemeClr>
+          </a:solidFill>
+          <a:ln w="12700">
+            <a:solidFill>
+              <a:srgbClr val="92D050"/>
+            </a:solidFill>
+          </a:ln>
+        </p:spPr>
+        <p:style>
+          <a:lnRef idx="2">
+            <a:schemeClr val="accent1">
+              <a:shade val="15000"/>
+            </a:schemeClr>
+          </a:lnRef>
+          <a:fillRef idx="1">
+            <a:schemeClr val="accent1"/>
+          </a:fillRef>
+          <a:effectRef idx="0">
+            <a:schemeClr val="accent1"/>
+          </a:effectRef>
+          <a:fontRef idx="minor">
+            <a:schemeClr val="lt1"/>
+          </a:fontRef>
+        </p:style>
+        <p:txBody>
+          <a:bodyPr wrap="none" lIns="91440" tIns="0" rIns="0" bIns="0" rtlCol="0" anchor="ctr" anchorCtr="0"/>
+          <a:lstStyle/>
+          <a:p>
+            <a:pPr>
+              <a:lnSpc>
+                <a:spcPts val="1600"/>
+              </a:lnSpc>
+            </a:pPr>
+            <a:r>
+              <a:rPr lang="en-US" altLang="zh-TW" sz="1200" dirty="0">
+                <a:solidFill>
+                  <a:schemeClr val="tx1"/>
+                </a:solidFill>
+                <a:latin typeface="ADLaM Display" panose="02010000000000000000" pitchFamily="2" charset="0"/>
+                <a:ea typeface="ADLaM Display" panose="02010000000000000000" pitchFamily="2" charset="0"/>
+                <a:cs typeface="ADLaM Display" panose="02010000000000000000" pitchFamily="2" charset="0"/>
+              </a:rPr>
+              <a:t>Research</a:t>
+            </a:r>
+          </a:p>
+          <a:p>
+            <a:pPr>
+              <a:lnSpc>
+                <a:spcPts val="1600"/>
+              </a:lnSpc>
+            </a:pPr>
+            <a:r>
+              <a:rPr lang="en-US" altLang="zh-TW" sz="1200" dirty="0">
+                <a:solidFill>
+                  <a:schemeClr val="tx1"/>
+                </a:solidFill>
+                <a:latin typeface="ADLaM Display" panose="02010000000000000000" pitchFamily="2" charset="0"/>
+                <a:ea typeface="ADLaM Display" panose="02010000000000000000" pitchFamily="2" charset="0"/>
+                <a:cs typeface="ADLaM Display" panose="02010000000000000000" pitchFamily="2" charset="0"/>
+              </a:rPr>
+              <a:t>Articles</a:t>
+            </a:r>
+          </a:p>
+        </p:txBody>
+      </p:sp>
+      <p:sp>
+        <p:nvSpPr>
+          <p:cNvPr id="19" name="矩形 18">
+            <a:extLst>
+              <a:ext uri="{FF2B5EF4-FFF2-40B4-BE49-F238E27FC236}">
+                <a16:creationId xmlns:a16="http://schemas.microsoft.com/office/drawing/2014/main" id="{3DE2EA1A-CCAE-DEFA-2A4D-6F6BEF5AE898}"/>
+              </a:ext>
+            </a:extLst>
+          </p:cNvPr>
+          <p:cNvSpPr/>
+          <p:nvPr/>
+        </p:nvSpPr>
+        <p:spPr>
+          <a:xfrm>
+            <a:off x="4111200" y="1650614"/>
+            <a:ext cx="1293984" cy="1038762"/>
+          </a:xfrm>
+          <a:prstGeom prst="rect">
+            <a:avLst/>
+          </a:prstGeom>
+          <a:noFill/>
+          <a:ln w="12700">
+            <a:noFill/>
+          </a:ln>
+        </p:spPr>
+        <p:style>
+          <a:lnRef idx="2">
+            <a:schemeClr val="accent1">
+              <a:shade val="15000"/>
+            </a:schemeClr>
+          </a:lnRef>
+          <a:fillRef idx="1">
+            <a:schemeClr val="accent1"/>
+          </a:fillRef>
+          <a:effectRef idx="0">
+            <a:schemeClr val="accent1"/>
+          </a:effectRef>
+          <a:fontRef idx="minor">
+            <a:schemeClr val="lt1"/>
+          </a:fontRef>
+        </p:style>
+        <p:txBody>
+          <a:bodyPr wrap="none" lIns="91440" tIns="0" rIns="0" bIns="0" rtlCol="0" anchor="ctr" anchorCtr="0"/>
+          <a:lstStyle/>
+          <a:p>
+            <a:pPr algn="ctr">
+              <a:lnSpc>
+                <a:spcPts val="1400"/>
+              </a:lnSpc>
+            </a:pPr>
+            <a:r>
+              <a:rPr lang="en-US" altLang="zh-TW" sz="1200" b="1" dirty="0">
+                <a:solidFill>
+                  <a:schemeClr val="tx1"/>
+                </a:solidFill>
+                <a:ea typeface="ADLaM Display" panose="02010000000000000000" pitchFamily="2" charset="0"/>
+                <a:cs typeface="ADLaM Display" panose="02010000000000000000" pitchFamily="2" charset="0"/>
+              </a:rPr>
+              <a:t>Cross-Server</a:t>
+            </a:r>
+          </a:p>
+          <a:p>
+            <a:pPr algn="ctr">
+              <a:lnSpc>
+                <a:spcPts val="1200"/>
+              </a:lnSpc>
+            </a:pPr>
+            <a:r>
+              <a:rPr lang="en-US" altLang="zh-TW" sz="1200" b="1" dirty="0">
+                <a:solidFill>
+                  <a:schemeClr val="tx1"/>
+                </a:solidFill>
+                <a:ea typeface="ADLaM Display" panose="02010000000000000000" pitchFamily="2" charset="0"/>
+                <a:cs typeface="ADLaM Display" panose="02010000000000000000" pitchFamily="2" charset="0"/>
+              </a:rPr>
+              <a:t>Orchestration</a:t>
+            </a:r>
+            <a:br>
+              <a:rPr lang="en-US" altLang="zh-TW" sz="1000" dirty="0">
+                <a:solidFill>
+                  <a:schemeClr val="tx1"/>
+                </a:solidFill>
+                <a:latin typeface="ADLaM Display" panose="02010000000000000000" pitchFamily="2" charset="0"/>
+                <a:ea typeface="ADLaM Display" panose="02010000000000000000" pitchFamily="2" charset="0"/>
+                <a:cs typeface="ADLaM Display" panose="02010000000000000000" pitchFamily="2" charset="0"/>
+              </a:rPr>
+            </a:br>
+            <a:endParaRPr lang="en-US" altLang="zh-TW" sz="1000" dirty="0">
+              <a:solidFill>
+                <a:schemeClr val="tx1"/>
+              </a:solidFill>
+              <a:latin typeface="ADLaM Display" panose="02010000000000000000" pitchFamily="2" charset="0"/>
+              <a:ea typeface="ADLaM Display" panose="02010000000000000000" pitchFamily="2" charset="0"/>
+              <a:cs typeface="ADLaM Display" panose="02010000000000000000" pitchFamily="2" charset="0"/>
+            </a:endParaRPr>
+          </a:p>
+          <a:p>
+            <a:pPr>
+              <a:lnSpc>
+                <a:spcPts val="1200"/>
+              </a:lnSpc>
+            </a:pPr>
+            <a:r>
+              <a:rPr lang="en-US" altLang="zh-TW" sz="1000" dirty="0">
+                <a:solidFill>
+                  <a:schemeClr val="tx1"/>
+                </a:solidFill>
+                <a:ea typeface="+mj-ea"/>
+                <a:cs typeface="ADLaM Display" panose="02010000000000000000" pitchFamily="2" charset="0"/>
+              </a:rPr>
+              <a:t>Clinical Trials</a:t>
+            </a:r>
+            <a:r>
+              <a:rPr lang="zh-TW" altLang="en-US" sz="1000" dirty="0">
+                <a:solidFill>
+                  <a:schemeClr val="tx1"/>
+                </a:solidFill>
+                <a:ea typeface="+mj-ea"/>
+                <a:cs typeface="ADLaM Display" panose="02010000000000000000" pitchFamily="2" charset="0"/>
+              </a:rPr>
+              <a:t> </a:t>
+            </a:r>
+            <a:r>
+              <a:rPr lang="en-US" altLang="zh-TW" sz="1000" dirty="0">
+                <a:solidFill>
+                  <a:schemeClr val="tx1"/>
+                </a:solidFill>
+                <a:ea typeface="+mj-ea"/>
+                <a:cs typeface="ADLaM Display" panose="02010000000000000000" pitchFamily="2" charset="0"/>
+              </a:rPr>
+              <a:t>API</a:t>
+            </a:r>
+          </a:p>
+          <a:p>
+            <a:pPr>
+              <a:lnSpc>
+                <a:spcPts val="1200"/>
+              </a:lnSpc>
+            </a:pPr>
+            <a:r>
+              <a:rPr lang="en-US" altLang="zh-TW" sz="1000" dirty="0">
+                <a:solidFill>
+                  <a:schemeClr val="tx1"/>
+                </a:solidFill>
+                <a:ea typeface="+mj-ea"/>
+                <a:cs typeface="ADLaM Display" panose="02010000000000000000" pitchFamily="2" charset="0"/>
+              </a:rPr>
+              <a:t>Genomic Variants API</a:t>
+            </a:r>
+          </a:p>
+          <a:p>
+            <a:pPr>
+              <a:lnSpc>
+                <a:spcPts val="1200"/>
+              </a:lnSpc>
+            </a:pPr>
+            <a:r>
+              <a:rPr lang="en-US" altLang="zh-TW" sz="1000" dirty="0">
+                <a:solidFill>
+                  <a:schemeClr val="tx1"/>
+                </a:solidFill>
+                <a:ea typeface="+mj-ea"/>
+                <a:cs typeface="ADLaM Display" panose="02010000000000000000" pitchFamily="2" charset="0"/>
+              </a:rPr>
+              <a:t>Research Articles API</a:t>
+            </a:r>
+          </a:p>
+        </p:txBody>
+      </p:sp>
+      <p:pic>
+        <p:nvPicPr>
+          <p:cNvPr id="10" name="圖片 9">
+            <a:extLst>
+              <a:ext uri="{FF2B5EF4-FFF2-40B4-BE49-F238E27FC236}">
+                <a16:creationId xmlns:a16="http://schemas.microsoft.com/office/drawing/2014/main" id="{45359853-F7FF-59F6-3C87-91009F8F42E2}"/>
+              </a:ext>
+            </a:extLst>
+          </p:cNvPr>
+          <p:cNvPicPr>
+            <a:picLocks noChangeAspect="1"/>
+          </p:cNvPicPr>
+          <p:nvPr/>
+        </p:nvPicPr>
+        <p:blipFill>
+          <a:blip r:embed="rId4"/>
+          <a:stretch>
+            <a:fillRect/>
+          </a:stretch>
+        </p:blipFill>
+        <p:spPr>
+          <a:xfrm>
+            <a:off x="5427886" y="2561755"/>
+            <a:ext cx="314611" cy="341305"/>
+          </a:xfrm>
+          <a:prstGeom prst="rect">
+            <a:avLst/>
+          </a:prstGeom>
+          <a:effectLst>
+            <a:glow rad="50800">
+              <a:schemeClr val="tx1">
+                <a:lumMod val="95000"/>
+                <a:lumOff val="5000"/>
+                <a:alpha val="60000"/>
+              </a:schemeClr>
+            </a:glow>
+            <a:softEdge rad="25400"/>
+          </a:effectLst>
+        </p:spPr>
+      </p:pic>
     </p:spTree>
     <p:extLst>
       <p:ext uri="{BB962C8B-B14F-4D97-AF65-F5344CB8AC3E}">
@@ -8843,6 +9494,73 @@
           </a:p>
         </p:txBody>
       </p:sp>
+      <p:sp>
+        <p:nvSpPr>
+          <p:cNvPr id="4" name="文字方塊 3">
+            <a:extLst>
+              <a:ext uri="{FF2B5EF4-FFF2-40B4-BE49-F238E27FC236}">
+                <a16:creationId xmlns:a16="http://schemas.microsoft.com/office/drawing/2014/main" id="{EDFB809C-200F-DA0F-5FD8-179FC2E41BC6}"/>
+              </a:ext>
+            </a:extLst>
+          </p:cNvPr>
+          <p:cNvSpPr txBox="1"/>
+          <p:nvPr/>
+        </p:nvSpPr>
+        <p:spPr>
+          <a:xfrm>
+            <a:off x="467544" y="5157192"/>
+            <a:ext cx="4572000" cy="1038746"/>
+          </a:xfrm>
+          <a:prstGeom prst="rect">
+            <a:avLst/>
+          </a:prstGeom>
+          <a:noFill/>
+        </p:spPr>
+        <p:txBody>
+          <a:bodyPr wrap="square">
+            <a:spAutoFit/>
+          </a:bodyPr>
+          <a:lstStyle/>
+          <a:p>
+            <a:pPr marL="0" marR="0">
+              <a:spcBef>
+                <a:spcPts val="900"/>
+              </a:spcBef>
+              <a:spcAft>
+                <a:spcPts val="1200"/>
+              </a:spcAft>
+              <a:buNone/>
+            </a:pPr>
+            <a:r>
+              <a:rPr lang="zh-TW" altLang="zh-TW" sz="1100" u="none" strike="noStrike" dirty="0">
+                <a:effectLst/>
+                <a:latin typeface="微軟正黑體" panose="020B0604030504040204" pitchFamily="34" charset="-120"/>
+                <a:ea typeface="微軟正黑體" panose="020B0604030504040204" pitchFamily="34" charset="-120"/>
+              </a:rPr>
+              <a:t>在醫學、生物資訊與基因分型（Genotyping / Variant Calling）領域，有非常多國際頂尖、具備權威公信力且公開開放的資料庫。</a:t>
+            </a:r>
+          </a:p>
+          <a:p>
+            <a:pPr marL="0" marR="0">
+              <a:spcBef>
+                <a:spcPts val="900"/>
+              </a:spcBef>
+              <a:spcAft>
+                <a:spcPts val="1200"/>
+              </a:spcAft>
+              <a:buNone/>
+            </a:pPr>
+            <a:r>
+              <a:rPr lang="zh-TW" altLang="zh-TW" sz="1100" u="none" strike="noStrike" dirty="0">
+                <a:effectLst/>
+                <a:latin typeface="微軟正黑體" panose="020B0604030504040204" pitchFamily="34" charset="-120"/>
+                <a:ea typeface="微軟正黑體" panose="020B0604030504040204" pitchFamily="34" charset="-120"/>
+              </a:rPr>
+              <a:t>這些資料庫可以分為「變異與疾病臨床解讀」、「群體基因頻率（背景控制組）」、「癌症專屬」以及「本土/特定群體資源」</a:t>
+            </a:r>
+          </a:p>
+        </p:txBody>
+      </p:sp>
     </p:spTree>
     <p:extLst>
       <p:ext uri="{BB962C8B-B14F-4D97-AF65-F5344CB8AC3E}">
@@ -8906,7 +9624,7 @@
         <p:spPr>
           <a:xfrm>
             <a:off x="179512" y="1196752"/>
-            <a:ext cx="8184624" cy="4248472"/>
+            <a:ext cx="6768752" cy="4248472"/>
           </a:xfrm>
           <a:prstGeom prst="rect">
             <a:avLst/>
@@ -9655,53 +10373,6 @@
                   <a:lumOff val="50000"/>
                 </a:schemeClr>
               </a:solidFill>
-              <a:latin typeface="Consolas" panose="020B0609020204030204" pitchFamily="49" charset="0"/>
-            </a:endParaRPr>
-          </a:p>
-        </p:txBody>
-      </p:sp>
-      <p:sp>
-        <p:nvSpPr>
-          <p:cNvPr id="15" name="文字方塊 14">
-            <a:extLst>
-              <a:ext uri="{FF2B5EF4-FFF2-40B4-BE49-F238E27FC236}">
-                <a16:creationId xmlns:a16="http://schemas.microsoft.com/office/drawing/2014/main" id="{F9FB3898-6948-1341-6B2F-D89FBC6C2750}"/>
-              </a:ext>
-            </a:extLst>
-          </p:cNvPr>
-          <p:cNvSpPr txBox="1"/>
-          <p:nvPr/>
-        </p:nvSpPr>
-        <p:spPr>
-          <a:xfrm>
-            <a:off x="179512" y="980728"/>
-            <a:ext cx="2304256" cy="247312"/>
-          </a:xfrm>
-          <a:prstGeom prst="rect">
-            <a:avLst/>
-          </a:prstGeom>
-          <a:noFill/>
-        </p:spPr>
-        <p:txBody>
-          <a:bodyPr wrap="square">
-            <a:spAutoFit/>
-          </a:bodyPr>
-          <a:lstStyle/>
-          <a:p>
-            <a:pPr marL="0" marR="0">
-              <a:lnSpc>
-                <a:spcPts val="1200"/>
-              </a:lnSpc>
-              <a:buNone/>
-            </a:pPr>
-            <a:r>
-              <a:rPr lang="en-US" altLang="zh-TW" sz="1200" b="1" dirty="0">
-                <a:latin typeface="Consolas" panose="020B0609020204030204" pitchFamily="49" charset="0"/>
-              </a:rPr>
-              <a:t>Python and MyVariant.info</a:t>
-            </a:r>
-            <a:endParaRPr lang="zh-TW" altLang="zh-TW" sz="1200" b="1" u="none" strike="noStrike" dirty="0">
-              <a:effectLst/>
               <a:latin typeface="Consolas" panose="020B0609020204030204" pitchFamily="49" charset="0"/>
             </a:endParaRPr>
           </a:p>
@@ -9766,7 +10437,7 @@
                 <a:ea typeface="Noto Sans HK" panose="020B0200000000000000" pitchFamily="34" charset="-120"/>
                 <a:cs typeface="Arial" panose="020B0604020202020204" pitchFamily="34" charset="0"/>
               </a:rPr>
-              <a:t>RegulomeDB</a:t>
+              <a:t>Connect to MyVariant.info and RegulomeDB</a:t>
             </a:r>
           </a:p>
         </p:txBody>
@@ -9793,7 +10464,7 @@
         </p:blipFill>
         <p:spPr>
           <a:xfrm>
-            <a:off x="7754483" y="501948"/>
+            <a:off x="5076056" y="188640"/>
             <a:ext cx="609653" cy="586791"/>
           </a:xfrm>
           <a:prstGeom prst="rect">
@@ -9831,7 +10502,7 @@
         </p:blipFill>
         <p:spPr>
           <a:xfrm>
-            <a:off x="7034403" y="501949"/>
+            <a:off x="5868144" y="190203"/>
             <a:ext cx="540897" cy="586791"/>
           </a:xfrm>
           <a:prstGeom prst="rect">
@@ -9847,6 +10518,36 @@
             </a:glow>
             <a:softEdge rad="25400"/>
           </a:effectLst>
+        </p:spPr>
+      </p:pic>
+      <p:pic>
+        <p:nvPicPr>
+          <p:cNvPr id="2" name="圖片 1" descr="Regulome logo">
+            <a:extLst>
+              <a:ext uri="{FF2B5EF4-FFF2-40B4-BE49-F238E27FC236}">
+                <a16:creationId xmlns:a16="http://schemas.microsoft.com/office/drawing/2014/main" id="{7F155CD2-267D-7331-150A-369EC507F98C}"/>
+              </a:ext>
+            </a:extLst>
+          </p:cNvPr>
+          <p:cNvPicPr>
+            <a:picLocks noChangeAspect="1"/>
+          </p:cNvPicPr>
+          <p:nvPr/>
+        </p:nvPicPr>
+        <p:blipFill>
+          <a:blip r:embed="rId4"/>
+          <a:stretch>
+            <a:fillRect/>
+          </a:stretch>
+        </p:blipFill>
+        <p:spPr>
+          <a:xfrm>
+            <a:off x="6591476" y="255296"/>
+            <a:ext cx="1707864" cy="453477"/>
+          </a:xfrm>
+          <a:prstGeom prst="rect">
+            <a:avLst/>
+          </a:prstGeom>
         </p:spPr>
       </p:pic>
     </p:spTree>
@@ -10465,533 +11166,6 @@
     <p:extLst>
       <p:ext uri="{BB962C8B-B14F-4D97-AF65-F5344CB8AC3E}">
         <p14:creationId xmlns:p14="http://schemas.microsoft.com/office/powerpoint/2010/main" val="2359596451"/>
-      </p:ext>
-    </p:extLst>
-  </p:cSld>
-  <p:clrMapOvr>
-    <a:masterClrMapping/>
-  </p:clrMapOvr>
-  <mc:AlternateContent xmlns:mc="http://schemas.openxmlformats.org/markup-compatibility/2006" xmlns:p159="http://schemas.microsoft.com/office/powerpoint/2015/09/main">
-    <mc:Choice Requires="p159">
-      <p:transition xmlns:p14="http://schemas.microsoft.com/office/powerpoint/2010/main" spd="slow" p14:dur="2000" advClick="0">
-        <p159:morph option="byObject"/>
-      </p:transition>
-    </mc:Choice>
-    <mc:Fallback xmlns="">
-      <p:transition spd="slow" advClick="0">
-        <p:fade/>
-      </p:transition>
-    </mc:Fallback>
-  </mc:AlternateContent>
-</p:sld>
-</file>
-
-<file path=ppt/slides/slide9.xml><?xml version="1.0" encoding="utf-8"?>
-<p:sld xmlns:a="http://schemas.openxmlformats.org/drawingml/2006/main" xmlns:r="http://schemas.openxmlformats.org/officeDocument/2006/relationships" xmlns:p="http://schemas.openxmlformats.org/presentationml/2006/main">
-  <p:cSld>
-    <p:spTree>
-      <p:nvGrpSpPr>
-        <p:cNvPr id="1" name=""/>
-        <p:cNvGrpSpPr/>
-        <p:nvPr/>
-      </p:nvGrpSpPr>
-      <p:grpSpPr>
-        <a:xfrm>
-          <a:off x="0" y="0"/>
-          <a:ext cx="0" cy="0"/>
-          <a:chOff x="0" y="0"/>
-          <a:chExt cx="0" cy="0"/>
-        </a:xfrm>
-      </p:grpSpPr>
-      <p:sp>
-        <p:nvSpPr>
-          <p:cNvPr id="5" name="文字方塊 4">
-            <a:extLst>
-              <a:ext uri="{FF2B5EF4-FFF2-40B4-BE49-F238E27FC236}">
-                <a16:creationId xmlns:a16="http://schemas.microsoft.com/office/drawing/2014/main" id="{D783C646-7188-2C96-2E02-2B55441A6242}"/>
-              </a:ext>
-            </a:extLst>
-          </p:cNvPr>
-          <p:cNvSpPr txBox="1"/>
-          <p:nvPr/>
-        </p:nvSpPr>
-        <p:spPr>
-          <a:xfrm>
-            <a:off x="539552" y="980728"/>
-            <a:ext cx="8424936" cy="4247317"/>
-          </a:xfrm>
-          <a:prstGeom prst="rect">
-            <a:avLst/>
-          </a:prstGeom>
-          <a:noFill/>
-        </p:spPr>
-        <p:txBody>
-          <a:bodyPr wrap="square">
-            <a:spAutoFit/>
-          </a:bodyPr>
-          <a:lstStyle/>
-          <a:p>
-            <a:r>
-              <a:rPr lang="en-US" altLang="zh-TW" sz="1000" dirty="0">
-                <a:latin typeface="Consolas" panose="020B0609020204030204" pitchFamily="49" charset="0"/>
-              </a:rPr>
-              <a:t>Python</a:t>
-            </a:r>
-          </a:p>
-          <a:p>
-            <a:r>
-              <a:rPr lang="en-US" altLang="zh-TW" sz="1000" dirty="0">
-                <a:latin typeface="Consolas" panose="020B0609020204030204" pitchFamily="49" charset="0"/>
-              </a:rPr>
-              <a:t>import requests</a:t>
-            </a:r>
-          </a:p>
-          <a:p>
-            <a:r>
-              <a:rPr lang="en-US" altLang="zh-TW" sz="1000" dirty="0">
-                <a:latin typeface="Consolas" panose="020B0609020204030204" pitchFamily="49" charset="0"/>
-              </a:rPr>
-              <a:t>def query_regulatory_features(rsid: str):</a:t>
-            </a:r>
-          </a:p>
-          <a:p>
-            <a:r>
-              <a:rPr lang="en-US" altLang="zh-TW" sz="1000" dirty="0">
-                <a:latin typeface="Consolas" panose="020B0609020204030204" pitchFamily="49" charset="0"/>
-              </a:rPr>
-              <a:t>    ""“</a:t>
-            </a:r>
-          </a:p>
-          <a:p>
-            <a:r>
-              <a:rPr lang="en-US" altLang="zh-TW" sz="1000" dirty="0">
-                <a:latin typeface="Consolas" panose="020B0609020204030204" pitchFamily="49" charset="0"/>
-              </a:rPr>
-              <a:t>    </a:t>
-            </a:r>
-            <a:r>
-              <a:rPr lang="zh-TW" altLang="en-US" sz="1000" dirty="0">
-                <a:latin typeface="Consolas" panose="020B0609020204030204" pitchFamily="49" charset="0"/>
-              </a:rPr>
-              <a:t>透過公開 </a:t>
-            </a:r>
-            <a:r>
-              <a:rPr lang="en-US" altLang="zh-TW" sz="1000" dirty="0">
-                <a:latin typeface="Consolas" panose="020B0609020204030204" pitchFamily="49" charset="0"/>
-              </a:rPr>
-              <a:t>API</a:t>
-            </a:r>
-            <a:r>
-              <a:rPr lang="zh-TW" altLang="en-US" sz="1000" dirty="0">
-                <a:latin typeface="Consolas" panose="020B0609020204030204" pitchFamily="49" charset="0"/>
-              </a:rPr>
-              <a:t>，輸入 </a:t>
-            </a:r>
-            <a:r>
-              <a:rPr lang="en-US" altLang="zh-TW" sz="1000" dirty="0">
-                <a:latin typeface="Consolas" panose="020B0609020204030204" pitchFamily="49" charset="0"/>
-              </a:rPr>
-              <a:t>SNP </a:t>
-            </a:r>
-            <a:r>
-              <a:rPr lang="zh-TW" altLang="en-US" sz="1000" dirty="0">
-                <a:latin typeface="Consolas" panose="020B0609020204030204" pitchFamily="49" charset="0"/>
-              </a:rPr>
-              <a:t>的 </a:t>
-            </a:r>
-            <a:r>
-              <a:rPr lang="en-US" altLang="zh-TW" sz="1000" dirty="0">
-                <a:latin typeface="Consolas" panose="020B0609020204030204" pitchFamily="49" charset="0"/>
-              </a:rPr>
-              <a:t>rsID</a:t>
-            </a:r>
-            <a:r>
-              <a:rPr lang="zh-TW" altLang="en-US" sz="1000" dirty="0">
-                <a:latin typeface="Consolas" panose="020B0609020204030204" pitchFamily="49" charset="0"/>
-              </a:rPr>
-              <a:t>，查詢其在 </a:t>
-            </a:r>
-            <a:r>
-              <a:rPr lang="en-US" altLang="zh-TW" sz="1000" dirty="0">
-                <a:latin typeface="Consolas" panose="020B0609020204030204" pitchFamily="49" charset="0"/>
-              </a:rPr>
-              <a:t>RegulomeDB </a:t>
-            </a:r>
-            <a:r>
-              <a:rPr lang="zh-TW" altLang="en-US" sz="1000" dirty="0">
-                <a:latin typeface="Consolas" panose="020B0609020204030204" pitchFamily="49" charset="0"/>
-              </a:rPr>
-              <a:t>的調控特徵評分與細節</a:t>
-            </a:r>
-            <a:endParaRPr lang="en-US" altLang="zh-TW" sz="1000" dirty="0">
-              <a:latin typeface="Consolas" panose="020B0609020204030204" pitchFamily="49" charset="0"/>
-            </a:endParaRPr>
-          </a:p>
-          <a:p>
-            <a:r>
-              <a:rPr lang="zh-TW" altLang="en-US" sz="1000" dirty="0">
-                <a:latin typeface="Consolas" panose="020B0609020204030204" pitchFamily="49" charset="0"/>
-              </a:rPr>
-              <a:t>    </a:t>
-            </a:r>
-            <a:r>
-              <a:rPr lang="en-US" altLang="zh-TW" sz="1000" dirty="0">
-                <a:latin typeface="Consolas" panose="020B0609020204030204" pitchFamily="49" charset="0"/>
-              </a:rPr>
-              <a:t>"""    # </a:t>
-            </a:r>
-            <a:r>
-              <a:rPr lang="zh-TW" altLang="en-US" sz="1000" dirty="0">
-                <a:latin typeface="Consolas" panose="020B0609020204030204" pitchFamily="49" charset="0"/>
-              </a:rPr>
-              <a:t>使用 </a:t>
-            </a:r>
-            <a:r>
-              <a:rPr lang="en-US" altLang="zh-TW" sz="1000" dirty="0">
-                <a:latin typeface="Consolas" panose="020B0609020204030204" pitchFamily="49" charset="0"/>
-              </a:rPr>
-              <a:t>MyVariant.info </a:t>
-            </a:r>
-            <a:r>
-              <a:rPr lang="zh-TW" altLang="en-US" sz="1000" dirty="0">
-                <a:latin typeface="Consolas" panose="020B0609020204030204" pitchFamily="49" charset="0"/>
-              </a:rPr>
-              <a:t>的公開 </a:t>
-            </a:r>
-            <a:r>
-              <a:rPr lang="en-US" altLang="zh-TW" sz="1000" dirty="0">
-                <a:latin typeface="Consolas" panose="020B0609020204030204" pitchFamily="49" charset="0"/>
-              </a:rPr>
-              <a:t>API</a:t>
-            </a:r>
-          </a:p>
-          <a:p>
-            <a:r>
-              <a:rPr lang="en-US" altLang="zh-TW" sz="1000" dirty="0">
-                <a:latin typeface="Consolas" panose="020B0609020204030204" pitchFamily="49" charset="0"/>
-              </a:rPr>
-              <a:t>    url = f"https://myvariant.info{rsid}“</a:t>
-            </a:r>
-          </a:p>
-          <a:p>
-            <a:r>
-              <a:rPr lang="en-US" altLang="zh-TW" sz="1000" dirty="0">
-                <a:latin typeface="Consolas" panose="020B0609020204030204" pitchFamily="49" charset="0"/>
-              </a:rPr>
-              <a:t>    response = requests.get(url)</a:t>
-            </a:r>
-          </a:p>
-          <a:p>
-            <a:r>
-              <a:rPr lang="en-US" altLang="zh-TW" sz="1000" dirty="0">
-                <a:latin typeface="Consolas" panose="020B0609020204030204" pitchFamily="49" charset="0"/>
-              </a:rPr>
-              <a:t>    </a:t>
-            </a:r>
-          </a:p>
-          <a:p>
-            <a:r>
-              <a:rPr lang="en-US" altLang="zh-TW" sz="1000" dirty="0">
-                <a:latin typeface="Consolas" panose="020B0609020204030204" pitchFamily="49" charset="0"/>
-              </a:rPr>
-              <a:t>    if response.status_code == 200:</a:t>
-            </a:r>
-          </a:p>
-          <a:p>
-            <a:r>
-              <a:rPr lang="en-US" altLang="zh-TW" sz="1000" dirty="0">
-                <a:latin typeface="Consolas" panose="020B0609020204030204" pitchFamily="49" charset="0"/>
-              </a:rPr>
-              <a:t>        data = response.json()</a:t>
-            </a:r>
-          </a:p>
-          <a:p>
-            <a:r>
-              <a:rPr lang="en-US" altLang="zh-TW" sz="1000" dirty="0">
-                <a:latin typeface="Consolas" panose="020B0609020204030204" pitchFamily="49" charset="0"/>
-              </a:rPr>
-              <a:t>        # </a:t>
-            </a:r>
-            <a:r>
-              <a:rPr lang="zh-TW" altLang="en-US" sz="1000" dirty="0">
-                <a:latin typeface="Consolas" panose="020B0609020204030204" pitchFamily="49" charset="0"/>
-              </a:rPr>
-              <a:t>提取 </a:t>
-            </a:r>
-            <a:r>
-              <a:rPr lang="en-US" altLang="zh-TW" sz="1000" dirty="0">
-                <a:latin typeface="Consolas" panose="020B0609020204030204" pitchFamily="49" charset="0"/>
-              </a:rPr>
-              <a:t>RegulomeDB </a:t>
-            </a:r>
-            <a:r>
-              <a:rPr lang="zh-TW" altLang="en-US" sz="1000" dirty="0">
-                <a:latin typeface="Consolas" panose="020B0609020204030204" pitchFamily="49" charset="0"/>
-              </a:rPr>
-              <a:t>的調控特徵數據</a:t>
-            </a:r>
-            <a:endParaRPr lang="en-US" altLang="zh-TW" sz="1000" dirty="0">
-              <a:latin typeface="Consolas" panose="020B0609020204030204" pitchFamily="49" charset="0"/>
-            </a:endParaRPr>
-          </a:p>
-          <a:p>
-            <a:r>
-              <a:rPr lang="zh-TW" altLang="en-US" sz="1000" dirty="0">
-                <a:latin typeface="Consolas" panose="020B0609020204030204" pitchFamily="49" charset="0"/>
-              </a:rPr>
-              <a:t>        </a:t>
-            </a:r>
-            <a:r>
-              <a:rPr lang="en-US" altLang="zh-TW" sz="1000" dirty="0">
-                <a:latin typeface="Consolas" panose="020B0609020204030204" pitchFamily="49" charset="0"/>
-              </a:rPr>
-              <a:t>regulomedb_info = data.get("regulomedb", {})</a:t>
-            </a:r>
-          </a:p>
-          <a:p>
-            <a:r>
-              <a:rPr lang="en-US" altLang="zh-TW" sz="1000" dirty="0">
-                <a:latin typeface="Consolas" panose="020B0609020204030204" pitchFamily="49" charset="0"/>
-              </a:rPr>
-              <a:t>        score = regulomedb_info.get("score", "</a:t>
-            </a:r>
-            <a:r>
-              <a:rPr lang="zh-TW" altLang="en-US" sz="1000" dirty="0">
-                <a:latin typeface="Consolas" panose="020B0609020204030204" pitchFamily="49" charset="0"/>
-              </a:rPr>
-              <a:t>無評分</a:t>
-            </a:r>
-            <a:r>
-              <a:rPr lang="en-US" altLang="zh-TW" sz="1000" dirty="0">
-                <a:latin typeface="Consolas" panose="020B0609020204030204" pitchFamily="49" charset="0"/>
-              </a:rPr>
-              <a:t>")</a:t>
-            </a:r>
-          </a:p>
-          <a:p>
-            <a:r>
-              <a:rPr lang="en-US" altLang="zh-TW" sz="1000" dirty="0">
-                <a:latin typeface="Consolas" panose="020B0609020204030204" pitchFamily="49" charset="0"/>
-              </a:rPr>
-              <a:t>        evidence = regulomedb_info.get("evidence", [])</a:t>
-            </a:r>
-          </a:p>
-          <a:p>
-            <a:r>
-              <a:rPr lang="en-US" altLang="zh-TW" sz="1000" dirty="0">
-                <a:latin typeface="Consolas" panose="020B0609020204030204" pitchFamily="49" charset="0"/>
-              </a:rPr>
-              <a:t>        </a:t>
-            </a:r>
-          </a:p>
-          <a:p>
-            <a:r>
-              <a:rPr lang="en-US" altLang="zh-TW" sz="1000" dirty="0">
-                <a:latin typeface="Consolas" panose="020B0609020204030204" pitchFamily="49" charset="0"/>
-              </a:rPr>
-              <a:t>        return {</a:t>
-            </a:r>
-          </a:p>
-          <a:p>
-            <a:r>
-              <a:rPr lang="en-US" altLang="zh-TW" sz="1000" dirty="0">
-                <a:latin typeface="Consolas" panose="020B0609020204030204" pitchFamily="49" charset="0"/>
-              </a:rPr>
-              <a:t>            "rsID": rsid,</a:t>
-            </a:r>
-          </a:p>
-          <a:p>
-            <a:r>
-              <a:rPr lang="en-US" altLang="zh-TW" sz="1000" dirty="0">
-                <a:latin typeface="Consolas" panose="020B0609020204030204" pitchFamily="49" charset="0"/>
-              </a:rPr>
-              <a:t>            "RegulomeDB_Score": score,</a:t>
-            </a:r>
-          </a:p>
-          <a:p>
-            <a:r>
-              <a:rPr lang="en-US" altLang="zh-TW" sz="1000" dirty="0">
-                <a:latin typeface="Consolas" panose="020B0609020204030204" pitchFamily="49" charset="0"/>
-              </a:rPr>
-              <a:t>            "Description": f"</a:t>
-            </a:r>
-            <a:r>
-              <a:rPr lang="zh-TW" altLang="en-US" sz="1000" dirty="0">
-                <a:latin typeface="Consolas" panose="020B0609020204030204" pitchFamily="49" charset="0"/>
-              </a:rPr>
-              <a:t>該 </a:t>
-            </a:r>
-            <a:r>
-              <a:rPr lang="en-US" altLang="zh-TW" sz="1000" dirty="0">
-                <a:latin typeface="Consolas" panose="020B0609020204030204" pitchFamily="49" charset="0"/>
-              </a:rPr>
-              <a:t>SNP </a:t>
-            </a:r>
-            <a:r>
-              <a:rPr lang="zh-TW" altLang="en-US" sz="1000" dirty="0">
-                <a:latin typeface="Consolas" panose="020B0609020204030204" pitchFamily="49" charset="0"/>
-              </a:rPr>
-              <a:t>的調控潛力分數為 </a:t>
-            </a:r>
-            <a:r>
-              <a:rPr lang="en-US" altLang="zh-TW" sz="1000" dirty="0">
-                <a:latin typeface="Consolas" panose="020B0609020204030204" pitchFamily="49" charset="0"/>
-              </a:rPr>
-              <a:t>{score}</a:t>
-            </a:r>
-            <a:r>
-              <a:rPr lang="zh-TW" altLang="en-US" sz="1000" dirty="0">
-                <a:latin typeface="Consolas" panose="020B0609020204030204" pitchFamily="49" charset="0"/>
-              </a:rPr>
-              <a:t>。</a:t>
-            </a:r>
-            <a:endParaRPr lang="en-US" altLang="zh-TW" sz="1000" dirty="0">
-              <a:latin typeface="Consolas" panose="020B0609020204030204" pitchFamily="49" charset="0"/>
-            </a:endParaRPr>
-          </a:p>
-          <a:p>
-            <a:r>
-              <a:rPr lang="en-US" altLang="zh-TW" sz="1000" dirty="0">
-                <a:latin typeface="Consolas" panose="020B0609020204030204" pitchFamily="49" charset="0"/>
-              </a:rPr>
-              <a:t>		</a:t>
-            </a:r>
-            <a:r>
-              <a:rPr lang="zh-TW" altLang="en-US" sz="1000" dirty="0">
-                <a:latin typeface="Consolas" panose="020B0609020204030204" pitchFamily="49" charset="0"/>
-              </a:rPr>
-              <a:t>分數越低（如 </a:t>
-            </a:r>
-            <a:r>
-              <a:rPr lang="en-US" altLang="zh-TW" sz="1000" dirty="0">
-                <a:latin typeface="Consolas" panose="020B0609020204030204" pitchFamily="49" charset="0"/>
-              </a:rPr>
-              <a:t>1a, 1b</a:t>
-            </a:r>
-            <a:r>
-              <a:rPr lang="zh-TW" altLang="en-US" sz="1000" dirty="0">
-                <a:latin typeface="Consolas" panose="020B0609020204030204" pitchFamily="49" charset="0"/>
-              </a:rPr>
-              <a:t>）代表有越強的轉錄因子結合或 </a:t>
-            </a:r>
-            <a:r>
-              <a:rPr lang="en-US" altLang="zh-TW" sz="1000" dirty="0">
-                <a:latin typeface="Consolas" panose="020B0609020204030204" pitchFamily="49" charset="0"/>
-              </a:rPr>
-              <a:t>eQTL </a:t>
-            </a:r>
-            <a:r>
-              <a:rPr lang="zh-TW" altLang="en-US" sz="1000" dirty="0">
-                <a:latin typeface="Consolas" panose="020B0609020204030204" pitchFamily="49" charset="0"/>
-              </a:rPr>
-              <a:t>實驗證據支撑。</a:t>
-            </a:r>
-            <a:r>
-              <a:rPr lang="en-US" altLang="zh-TW" sz="1000" dirty="0">
-                <a:latin typeface="Consolas" panose="020B0609020204030204" pitchFamily="49" charset="0"/>
-              </a:rPr>
-              <a:t>“</a:t>
-            </a:r>
-          </a:p>
-          <a:p>
-            <a:r>
-              <a:rPr lang="en-US" altLang="zh-TW" sz="1000" dirty="0">
-                <a:latin typeface="Consolas" panose="020B0609020204030204" pitchFamily="49" charset="0"/>
-              </a:rPr>
-              <a:t>        }</a:t>
-            </a:r>
-          </a:p>
-          <a:p>
-            <a:r>
-              <a:rPr lang="en-US" altLang="zh-TW" sz="1000" dirty="0">
-                <a:latin typeface="Consolas" panose="020B0609020204030204" pitchFamily="49" charset="0"/>
-              </a:rPr>
-              <a:t>    else:</a:t>
-            </a:r>
-          </a:p>
-          <a:p>
-            <a:r>
-              <a:rPr lang="en-US" altLang="zh-TW" sz="1000" dirty="0">
-                <a:latin typeface="Consolas" panose="020B0609020204030204" pitchFamily="49" charset="0"/>
-              </a:rPr>
-              <a:t>        return {"error": "</a:t>
-            </a:r>
-            <a:r>
-              <a:rPr lang="zh-TW" altLang="en-US" sz="1000" dirty="0">
-                <a:latin typeface="Consolas" panose="020B0609020204030204" pitchFamily="49" charset="0"/>
-              </a:rPr>
-              <a:t>無法連線至公開資料庫或找不到該 </a:t>
-            </a:r>
-            <a:r>
-              <a:rPr lang="en-US" altLang="zh-TW" sz="1000" dirty="0">
-                <a:latin typeface="Consolas" panose="020B0609020204030204" pitchFamily="49" charset="0"/>
-              </a:rPr>
-              <a:t>SNP"}</a:t>
-            </a:r>
-          </a:p>
-          <a:p>
-            <a:endParaRPr lang="en-US" altLang="zh-TW" sz="1000" dirty="0">
-              <a:latin typeface="Consolas" panose="020B0609020204030204" pitchFamily="49" charset="0"/>
-            </a:endParaRPr>
-          </a:p>
-          <a:p>
-            <a:r>
-              <a:rPr lang="en-US" altLang="zh-TW" sz="1000" dirty="0">
-                <a:latin typeface="Consolas" panose="020B0609020204030204" pitchFamily="49" charset="0"/>
-              </a:rPr>
-              <a:t># AI Agent </a:t>
-            </a:r>
-            <a:r>
-              <a:rPr lang="zh-TW" altLang="en-US" sz="1000" dirty="0">
-                <a:latin typeface="Consolas" panose="020B0609020204030204" pitchFamily="49" charset="0"/>
-              </a:rPr>
-              <a:t>在思考時，若發現使用者問：「</a:t>
-            </a:r>
-            <a:r>
-              <a:rPr lang="en-US" altLang="zh-TW" sz="1000" dirty="0">
-                <a:latin typeface="Consolas" panose="020B0609020204030204" pitchFamily="49" charset="0"/>
-              </a:rPr>
-              <a:t>rs334 </a:t>
-            </a:r>
-            <a:r>
-              <a:rPr lang="zh-TW" altLang="en-US" sz="1000" dirty="0">
-                <a:latin typeface="Consolas" panose="020B0609020204030204" pitchFamily="49" charset="0"/>
-              </a:rPr>
-              <a:t>這個突變有什麼調控功能？」</a:t>
-            </a:r>
-            <a:endParaRPr lang="en-US" altLang="zh-TW" sz="1000" dirty="0">
-              <a:latin typeface="Consolas" panose="020B0609020204030204" pitchFamily="49" charset="0"/>
-            </a:endParaRPr>
-          </a:p>
-          <a:p>
-            <a:r>
-              <a:rPr lang="en-US" altLang="zh-TW" sz="1000" dirty="0">
-                <a:latin typeface="Consolas" panose="020B0609020204030204" pitchFamily="49" charset="0"/>
-              </a:rPr>
-              <a:t># </a:t>
-            </a:r>
-            <a:r>
-              <a:rPr lang="zh-TW" altLang="en-US" sz="1000" dirty="0">
-                <a:latin typeface="Consolas" panose="020B0609020204030204" pitchFamily="49" charset="0"/>
-              </a:rPr>
-              <a:t>就會自動執行：</a:t>
-            </a:r>
-            <a:r>
-              <a:rPr lang="en-US" altLang="zh-TW" sz="1000" dirty="0">
-                <a:latin typeface="Consolas" panose="020B0609020204030204" pitchFamily="49" charset="0"/>
-              </a:rPr>
-              <a:t>query_regulatory_features("rs334")</a:t>
-            </a:r>
-            <a:endParaRPr lang="zh-TW" altLang="en-US" sz="1000" dirty="0">
-              <a:latin typeface="Consolas" panose="020B0609020204030204" pitchFamily="49" charset="0"/>
-            </a:endParaRPr>
-          </a:p>
-        </p:txBody>
-      </p:sp>
-    </p:spTree>
-    <p:extLst>
-      <p:ext uri="{BB962C8B-B14F-4D97-AF65-F5344CB8AC3E}">
-        <p14:creationId xmlns:p14="http://schemas.microsoft.com/office/powerpoint/2010/main" val="2551416804"/>
       </p:ext>
     </p:extLst>
   </p:cSld>

--- a/bio-it-agent.pptx
+++ b/bio-it-agent.pptx
@@ -255,7 +255,7 @@
           <a:p>
             <a:fld id="{982F7CBC-87DD-4F69-8F50-7ED68F7FF790}" type="datetimeFigureOut">
               <a:rPr lang="zh-TW" altLang="en-US" smtClean="0"/>
-              <a:t>2026/7/29</a:t>
+              <a:t>2026/7/30</a:t>
             </a:fld>
             <a:endParaRPr lang="zh-TW" altLang="en-US"/>
           </a:p>
@@ -432,7 +432,7 @@
           <a:p>
             <a:fld id="{863167AA-796B-4B6A-95ED-1C0BCB3E5802}" type="datetimeFigureOut">
               <a:rPr lang="zh-TW" altLang="en-US" smtClean="0"/>
-              <a:t>2026/7/29</a:t>
+              <a:t>2026/7/30</a:t>
             </a:fld>
             <a:endParaRPr lang="zh-TW" altLang="en-US"/>
           </a:p>
@@ -5712,7 +5712,7 @@
         </p:nvSpPr>
         <p:spPr>
           <a:xfrm rot="16200000">
-            <a:off x="5776590" y="5515156"/>
+            <a:off x="2383718" y="4373639"/>
             <a:ext cx="85362" cy="1385657"/>
           </a:xfrm>
           <a:prstGeom prst="rightBrace">
@@ -5906,7 +5906,27 @@
                 <a:ea typeface="ADLaM Display" panose="02010000000000000000" pitchFamily="2" charset="0"/>
                 <a:cs typeface="ADLaM Display" panose="02010000000000000000" pitchFamily="2" charset="0"/>
               </a:rPr>
-              <a:t>(Centrillion Power Tool)</a:t>
+              <a:t>(</a:t>
+            </a:r>
+            <a:r>
+              <a:rPr lang="en-US" altLang="zh-TW" sz="1000" dirty="0" err="1">
+                <a:solidFill>
+                  <a:schemeClr val="tx2"/>
+                </a:solidFill>
+                <a:ea typeface="ADLaM Display" panose="02010000000000000000" pitchFamily="2" charset="0"/>
+                <a:cs typeface="ADLaM Display" panose="02010000000000000000" pitchFamily="2" charset="0"/>
+              </a:rPr>
+              <a:t>Centrillion</a:t>
+            </a:r>
+            <a:r>
+              <a:rPr lang="en-US" altLang="zh-TW" sz="1000" dirty="0">
+                <a:solidFill>
+                  <a:schemeClr val="tx2"/>
+                </a:solidFill>
+                <a:ea typeface="ADLaM Display" panose="02010000000000000000" pitchFamily="2" charset="0"/>
+                <a:cs typeface="ADLaM Display" panose="02010000000000000000" pitchFamily="2" charset="0"/>
+              </a:rPr>
+              <a:t> Power Tool)</a:t>
             </a:r>
           </a:p>
           <a:p>
@@ -5923,7 +5943,7 @@
                 <a:ea typeface="ADLaM Display" panose="02010000000000000000" pitchFamily="2" charset="0"/>
                 <a:cs typeface="ADLaM Display" panose="02010000000000000000" pitchFamily="2" charset="0"/>
               </a:rPr>
-              <a:t>Base on BioPython, PyVCF …</a:t>
+              <a:t>Based on BioPython, PyVCF …</a:t>
             </a:r>
           </a:p>
           <a:p>

--- a/bio-it-agent.pptx
+++ b/bio-it-agent.pptx
@@ -255,7 +255,7 @@
           <a:p>
             <a:fld id="{982F7CBC-87DD-4F69-8F50-7ED68F7FF790}" type="datetimeFigureOut">
               <a:rPr lang="zh-TW" altLang="en-US" smtClean="0"/>
-              <a:t>2026/7/30</a:t>
+              <a:t>2026/7/31</a:t>
             </a:fld>
             <a:endParaRPr lang="zh-TW" altLang="en-US"/>
           </a:p>
@@ -432,7 +432,7 @@
           <a:p>
             <a:fld id="{863167AA-796B-4B6A-95ED-1C0BCB3E5802}" type="datetimeFigureOut">
               <a:rPr lang="zh-TW" altLang="en-US" smtClean="0"/>
-              <a:t>2026/7/30</a:t>
+              <a:t>2026/7/31</a:t>
             </a:fld>
             <a:endParaRPr lang="zh-TW" altLang="en-US"/>
           </a:p>
@@ -1691,8 +1691,8 @@
         </p:nvSpPr>
         <p:spPr>
           <a:xfrm>
-            <a:off x="6228184" y="4800246"/>
-            <a:ext cx="2808311" cy="1467069"/>
+            <a:off x="107504" y="116633"/>
+            <a:ext cx="4968552" cy="936104"/>
           </a:xfrm>
           <a:prstGeom prst="rect">
             <a:avLst/>
@@ -1744,7 +1744,7 @@
                 <a:latin typeface="微軟正黑體" panose="020B0604030504040204" pitchFamily="34" charset="-120"/>
                 <a:ea typeface="微軟正黑體" panose="020B0604030504040204" pitchFamily="34" charset="-120"/>
               </a:rPr>
-              <a:t>三階段目標</a:t>
+              <a:t>總體來說</a:t>
             </a:r>
             <a:r>
               <a:rPr lang="en-US" altLang="zh-TW" sz="1100" dirty="0">
@@ -1754,16 +1754,8 @@
                 <a:latin typeface="微軟正黑體" panose="020B0604030504040204" pitchFamily="34" charset="-120"/>
                 <a:ea typeface="微軟正黑體" panose="020B0604030504040204" pitchFamily="34" charset="-120"/>
               </a:rPr>
-              <a:t>:</a:t>
-            </a:r>
-          </a:p>
-          <a:p>
-            <a:pPr marL="228600" indent="-228600">
-              <a:lnSpc>
-                <a:spcPts val="1600"/>
-              </a:lnSpc>
-              <a:buAutoNum type="arabicPeriod"/>
-            </a:pPr>
+              <a:t>, </a:t>
+            </a:r>
             <a:r>
               <a:rPr lang="zh-TW" altLang="en-US" sz="1100" dirty="0">
                 <a:solidFill>
@@ -1772,7 +1764,7 @@
                 <a:latin typeface="微軟正黑體" panose="020B0604030504040204" pitchFamily="34" charset="-120"/>
                 <a:ea typeface="微軟正黑體" panose="020B0604030504040204" pitchFamily="34" charset="-120"/>
               </a:rPr>
-              <a:t>一般解說</a:t>
+              <a:t>此</a:t>
             </a:r>
             <a:r>
               <a:rPr lang="en-US" altLang="zh-TW" sz="1100" dirty="0">
@@ -1782,7 +1774,7 @@
                 <a:latin typeface="微軟正黑體" panose="020B0604030504040204" pitchFamily="34" charset="-120"/>
                 <a:ea typeface="微軟正黑體" panose="020B0604030504040204" pitchFamily="34" charset="-120"/>
               </a:rPr>
-              <a:t>(</a:t>
+              <a:t>Bio-IT AI </a:t>
             </a:r>
             <a:r>
               <a:rPr lang="zh-TW" altLang="en-US" sz="1100" dirty="0">
@@ -1792,7 +1784,7 @@
                 <a:latin typeface="微軟正黑體" panose="020B0604030504040204" pitchFamily="34" charset="-120"/>
                 <a:ea typeface="微軟正黑體" panose="020B0604030504040204" pitchFamily="34" charset="-120"/>
               </a:rPr>
-              <a:t>存文字</a:t>
+              <a:t>智能體的開發有</a:t>
             </a:r>
             <a:r>
               <a:rPr lang="en-US" altLang="zh-TW" sz="1100" dirty="0">
@@ -1802,7 +1794,7 @@
                 <a:latin typeface="微軟正黑體" panose="020B0604030504040204" pitchFamily="34" charset="-120"/>
                 <a:ea typeface="微軟正黑體" panose="020B0604030504040204" pitchFamily="34" charset="-120"/>
               </a:rPr>
-              <a:t>):</a:t>
+              <a:t>3</a:t>
             </a:r>
             <a:r>
               <a:rPr lang="zh-TW" altLang="en-US" sz="1100" dirty="0">
@@ -1812,7 +1804,7 @@
                 <a:latin typeface="微軟正黑體" panose="020B0604030504040204" pitchFamily="34" charset="-120"/>
                 <a:ea typeface="微軟正黑體" panose="020B0604030504040204" pitchFamily="34" charset="-120"/>
               </a:rPr>
-              <a:t> 查詢</a:t>
+              <a:t>個階段</a:t>
             </a:r>
             <a:r>
               <a:rPr lang="en-US" altLang="zh-TW" sz="1100" dirty="0">
@@ -1822,48 +1814,11 @@
                 <a:latin typeface="微軟正黑體" panose="020B0604030504040204" pitchFamily="34" charset="-120"/>
                 <a:ea typeface="微軟正黑體" panose="020B0604030504040204" pitchFamily="34" charset="-120"/>
               </a:rPr>
-              <a:t>[</a:t>
-            </a:r>
-            <a:r>
-              <a:rPr lang="zh-TW" altLang="en-US" sz="1100" dirty="0">
-                <a:solidFill>
-                  <a:schemeClr val="tx1"/>
-                </a:solidFill>
-                <a:latin typeface="微軟正黑體" panose="020B0604030504040204" pitchFamily="34" charset="-120"/>
-                <a:ea typeface="微軟正黑體" panose="020B0604030504040204" pitchFamily="34" charset="-120"/>
-              </a:rPr>
-              <a:t>公開資料庫</a:t>
-            </a:r>
-            <a:r>
-              <a:rPr lang="en-US" altLang="zh-TW" sz="1100" dirty="0">
-                <a:solidFill>
-                  <a:schemeClr val="tx1"/>
-                </a:solidFill>
-                <a:latin typeface="微軟正黑體" panose="020B0604030504040204" pitchFamily="34" charset="-120"/>
-                <a:ea typeface="微軟正黑體" panose="020B0604030504040204" pitchFamily="34" charset="-120"/>
-              </a:rPr>
-              <a:t>],</a:t>
-            </a:r>
-            <a:r>
-              <a:rPr lang="zh-TW" altLang="en-US" sz="1100" dirty="0">
-                <a:solidFill>
-                  <a:schemeClr val="tx1"/>
-                </a:solidFill>
-                <a:latin typeface="微軟正黑體" panose="020B0604030504040204" pitchFamily="34" charset="-120"/>
-                <a:ea typeface="微軟正黑體" panose="020B0604030504040204" pitchFamily="34" charset="-120"/>
-              </a:rPr>
-              <a:t> </a:t>
-            </a:r>
-            <a:endParaRPr lang="en-US" altLang="zh-TW" sz="1100" dirty="0">
-              <a:solidFill>
-                <a:schemeClr val="tx1"/>
-              </a:solidFill>
-              <a:latin typeface="微軟正黑體" panose="020B0604030504040204" pitchFamily="34" charset="-120"/>
-              <a:ea typeface="微軟正黑體" panose="020B0604030504040204" pitchFamily="34" charset="-120"/>
-            </a:endParaRPr>
-          </a:p>
-          <a:p>
-            <a:pPr marL="0" lvl="1" indent="228600">
+              <a:t>: </a:t>
+            </a:r>
+          </a:p>
+          <a:p>
+            <a:pPr>
               <a:lnSpc>
                 <a:spcPts val="1600"/>
               </a:lnSpc>
@@ -1876,7 +1831,7 @@
                 <a:latin typeface="微軟正黑體" panose="020B0604030504040204" pitchFamily="34" charset="-120"/>
                 <a:ea typeface="微軟正黑體" panose="020B0604030504040204" pitchFamily="34" charset="-120"/>
               </a:rPr>
-              <a:t>回答醫學</a:t>
+              <a:t>第一階段</a:t>
             </a:r>
             <a:r>
               <a:rPr lang="en-US" altLang="zh-TW" sz="1100" dirty="0">
@@ -1886,7 +1841,7 @@
                 <a:latin typeface="微軟正黑體" panose="020B0604030504040204" pitchFamily="34" charset="-120"/>
                 <a:ea typeface="微軟正黑體" panose="020B0604030504040204" pitchFamily="34" charset="-120"/>
               </a:rPr>
-              <a:t>,</a:t>
+              <a:t>: </a:t>
             </a:r>
             <a:r>
               <a:rPr lang="zh-TW" altLang="en-US" sz="1100" dirty="0">
@@ -1896,7 +1851,7 @@
                 <a:latin typeface="微軟正黑體" panose="020B0604030504040204" pitchFamily="34" charset="-120"/>
                 <a:ea typeface="微軟正黑體" panose="020B0604030504040204" pitchFamily="34" charset="-120"/>
               </a:rPr>
-              <a:t> 基因</a:t>
+              <a:t>透過資料庫系統</a:t>
             </a:r>
             <a:r>
               <a:rPr lang="en-US" altLang="zh-TW" sz="1100" dirty="0">
@@ -1906,7 +1861,7 @@
                 <a:latin typeface="微軟正黑體" panose="020B0604030504040204" pitchFamily="34" charset="-120"/>
                 <a:ea typeface="微軟正黑體" panose="020B0604030504040204" pitchFamily="34" charset="-120"/>
               </a:rPr>
-              <a:t>,</a:t>
+              <a:t>, </a:t>
             </a:r>
             <a:r>
               <a:rPr lang="zh-TW" altLang="en-US" sz="1100" dirty="0">
@@ -1916,7 +1871,7 @@
                 <a:latin typeface="微軟正黑體" panose="020B0604030504040204" pitchFamily="34" charset="-120"/>
                 <a:ea typeface="微軟正黑體" panose="020B0604030504040204" pitchFamily="34" charset="-120"/>
               </a:rPr>
-              <a:t> 生物資訊關問題</a:t>
+              <a:t>查詢並回答一般人對健康</a:t>
             </a:r>
             <a:r>
               <a:rPr lang="en-US" altLang="zh-TW" sz="1100" dirty="0">
@@ -1926,6 +1881,26 @@
                 <a:latin typeface="微軟正黑體" panose="020B0604030504040204" pitchFamily="34" charset="-120"/>
                 <a:ea typeface="微軟正黑體" panose="020B0604030504040204" pitchFamily="34" charset="-120"/>
               </a:rPr>
+              <a:t>, </a:t>
+            </a:r>
+            <a:r>
+              <a:rPr lang="zh-TW" altLang="en-US" sz="1100" dirty="0">
+                <a:solidFill>
+                  <a:schemeClr val="tx1"/>
+                </a:solidFill>
+                <a:latin typeface="微軟正黑體" panose="020B0604030504040204" pitchFamily="34" charset="-120"/>
+                <a:ea typeface="微軟正黑體" panose="020B0604030504040204" pitchFamily="34" charset="-120"/>
+              </a:rPr>
+              <a:t>醫學或生物相關的疑問</a:t>
+            </a:r>
+            <a:r>
+              <a:rPr lang="en-US" altLang="zh-TW" sz="1100" dirty="0">
+                <a:solidFill>
+                  <a:schemeClr val="tx1"/>
+                </a:solidFill>
+                <a:latin typeface="微軟正黑體" panose="020B0604030504040204" pitchFamily="34" charset="-120"/>
+                <a:ea typeface="微軟正黑體" panose="020B0604030504040204" pitchFamily="34" charset="-120"/>
+              </a:rPr>
               <a:t>.</a:t>
             </a:r>
             <a:r>
@@ -1936,129 +1911,11 @@
                 <a:latin typeface="微軟正黑體" panose="020B0604030504040204" pitchFamily="34" charset="-120"/>
                 <a:ea typeface="微軟正黑體" panose="020B0604030504040204" pitchFamily="34" charset="-120"/>
               </a:rPr>
-              <a:t>  </a:t>
-            </a:r>
-            <a:r>
-              <a:rPr lang="en-US" altLang="zh-TW" sz="1100" b="1" dirty="0">
-                <a:solidFill>
-                  <a:schemeClr val="tx1"/>
-                </a:solidFill>
-                <a:latin typeface="微軟正黑體" panose="020B0604030504040204" pitchFamily="34" charset="-120"/>
-                <a:ea typeface="微軟正黑體" panose="020B0604030504040204" pitchFamily="34" charset="-120"/>
-              </a:rPr>
-              <a:t>(</a:t>
-            </a:r>
-            <a:r>
-              <a:rPr lang="en-US" altLang="zh-TW" sz="1100" b="1" dirty="0">
-                <a:solidFill>
-                  <a:srgbClr val="FF0000"/>
-                </a:solidFill>
-                <a:latin typeface="微軟正黑體" panose="020B0604030504040204" pitchFamily="34" charset="-120"/>
-                <a:ea typeface="微軟正黑體" panose="020B0604030504040204" pitchFamily="34" charset="-120"/>
-              </a:rPr>
-              <a:t>2026</a:t>
-            </a:r>
-            <a:r>
-              <a:rPr lang="en-US" altLang="zh-TW" sz="1100" b="1" dirty="0">
-                <a:solidFill>
-                  <a:schemeClr val="tx1"/>
-                </a:solidFill>
-                <a:latin typeface="微軟正黑體" panose="020B0604030504040204" pitchFamily="34" charset="-120"/>
-                <a:ea typeface="微軟正黑體" panose="020B0604030504040204" pitchFamily="34" charset="-120"/>
-              </a:rPr>
-              <a:t>)</a:t>
-            </a:r>
-          </a:p>
-          <a:p>
-            <a:pPr marL="228600" indent="-228600">
-              <a:lnSpc>
-                <a:spcPts val="1600"/>
-              </a:lnSpc>
-              <a:buAutoNum type="arabicPeriod"/>
-            </a:pPr>
-            <a:r>
-              <a:rPr lang="zh-TW" altLang="en-US" sz="1100" dirty="0">
-                <a:solidFill>
-                  <a:schemeClr val="tx1"/>
-                </a:solidFill>
-                <a:latin typeface="微軟正黑體" panose="020B0604030504040204" pitchFamily="34" charset="-120"/>
-                <a:ea typeface="微軟正黑體" panose="020B0604030504040204" pitchFamily="34" charset="-120"/>
-              </a:rPr>
-              <a:t>讀取照片</a:t>
-            </a:r>
-            <a:r>
-              <a:rPr lang="en-US" altLang="zh-TW" sz="1100" dirty="0">
-                <a:solidFill>
-                  <a:schemeClr val="tx1"/>
-                </a:solidFill>
-                <a:latin typeface="微軟正黑體" panose="020B0604030504040204" pitchFamily="34" charset="-120"/>
-                <a:ea typeface="微軟正黑體" panose="020B0604030504040204" pitchFamily="34" charset="-120"/>
-              </a:rPr>
-              <a:t>(</a:t>
-            </a:r>
-            <a:r>
-              <a:rPr lang="zh-TW" altLang="en-US" sz="1100" dirty="0">
-                <a:solidFill>
-                  <a:schemeClr val="tx1"/>
-                </a:solidFill>
-                <a:latin typeface="微軟正黑體" panose="020B0604030504040204" pitchFamily="34" charset="-120"/>
-                <a:ea typeface="微軟正黑體" panose="020B0604030504040204" pitchFamily="34" charset="-120"/>
-              </a:rPr>
-              <a:t>多模態</a:t>
-            </a:r>
-            <a:r>
-              <a:rPr lang="en-US" altLang="zh-TW" sz="1100" dirty="0">
-                <a:solidFill>
-                  <a:schemeClr val="tx1"/>
-                </a:solidFill>
-                <a:latin typeface="微軟正黑體" panose="020B0604030504040204" pitchFamily="34" charset="-120"/>
-                <a:ea typeface="微軟正黑體" panose="020B0604030504040204" pitchFamily="34" charset="-120"/>
-              </a:rPr>
-              <a:t>) :</a:t>
-            </a:r>
-            <a:r>
-              <a:rPr lang="zh-TW" altLang="en-US" sz="1100" dirty="0">
-                <a:solidFill>
-                  <a:schemeClr val="tx1"/>
-                </a:solidFill>
-                <a:latin typeface="微軟正黑體" panose="020B0604030504040204" pitchFamily="34" charset="-120"/>
-                <a:ea typeface="微軟正黑體" panose="020B0604030504040204" pitchFamily="34" charset="-120"/>
-              </a:rPr>
-              <a:t> 分析</a:t>
-            </a:r>
-            <a:r>
-              <a:rPr lang="en-US" altLang="zh-TW" sz="1100" dirty="0">
-                <a:solidFill>
-                  <a:schemeClr val="tx1"/>
-                </a:solidFill>
-                <a:latin typeface="微軟正黑體" panose="020B0604030504040204" pitchFamily="34" charset="-120"/>
-                <a:ea typeface="微軟正黑體" panose="020B0604030504040204" pitchFamily="34" charset="-120"/>
-              </a:rPr>
-              <a:t>summit2</a:t>
-            </a:r>
-            <a:r>
-              <a:rPr lang="zh-TW" altLang="en-US" sz="1100" dirty="0">
-                <a:solidFill>
-                  <a:schemeClr val="tx1"/>
-                </a:solidFill>
-                <a:latin typeface="微軟正黑體" panose="020B0604030504040204" pitchFamily="34" charset="-120"/>
-                <a:ea typeface="微軟正黑體" panose="020B0604030504040204" pitchFamily="34" charset="-120"/>
-              </a:rPr>
-              <a:t>的照片</a:t>
-            </a:r>
-            <a:r>
-              <a:rPr lang="en-US" altLang="zh-TW" sz="1100" dirty="0">
-                <a:solidFill>
-                  <a:schemeClr val="tx1"/>
-                </a:solidFill>
-                <a:latin typeface="微軟正黑體" panose="020B0604030504040204" pitchFamily="34" charset="-120"/>
-                <a:ea typeface="微軟正黑體" panose="020B0604030504040204" pitchFamily="34" charset="-120"/>
-              </a:rPr>
-              <a:t>,</a:t>
-            </a:r>
-          </a:p>
-          <a:p>
-            <a:pPr marL="0" lvl="1" indent="228600">
+              <a:t>。</a:t>
+            </a:r>
+          </a:p>
+          <a:p>
+            <a:pPr>
               <a:lnSpc>
                 <a:spcPts val="1600"/>
               </a:lnSpc>
@@ -2071,7 +1928,7 @@
                 <a:latin typeface="微軟正黑體" panose="020B0604030504040204" pitchFamily="34" charset="-120"/>
                 <a:ea typeface="微軟正黑體" panose="020B0604030504040204" pitchFamily="34" charset="-120"/>
               </a:rPr>
-              <a:t>取得分型結果</a:t>
+              <a:t>第二階段</a:t>
             </a:r>
             <a:r>
               <a:rPr lang="en-US" altLang="zh-TW" sz="1100" dirty="0">
@@ -2081,7 +1938,7 @@
                 <a:latin typeface="微軟正黑體" panose="020B0604030504040204" pitchFamily="34" charset="-120"/>
                 <a:ea typeface="微軟正黑體" panose="020B0604030504040204" pitchFamily="34" charset="-120"/>
               </a:rPr>
-              <a:t>.</a:t>
+              <a:t>: </a:t>
             </a:r>
             <a:r>
               <a:rPr lang="zh-TW" altLang="en-US" sz="1100" dirty="0">
@@ -2091,46 +1948,18 @@
                 <a:latin typeface="微軟正黑體" panose="020B0604030504040204" pitchFamily="34" charset="-120"/>
                 <a:ea typeface="微軟正黑體" panose="020B0604030504040204" pitchFamily="34" charset="-120"/>
               </a:rPr>
-              <a:t> </a:t>
-            </a:r>
-            <a:r>
-              <a:rPr lang="en-US" altLang="zh-TW" sz="1100" b="1" dirty="0">
-                <a:solidFill>
-                  <a:schemeClr val="tx1"/>
-                </a:solidFill>
-                <a:latin typeface="微軟正黑體" panose="020B0604030504040204" pitchFamily="34" charset="-120"/>
-                <a:ea typeface="微軟正黑體" panose="020B0604030504040204" pitchFamily="34" charset="-120"/>
-              </a:rPr>
-              <a:t>(</a:t>
-            </a:r>
-            <a:r>
-              <a:rPr lang="en-US" altLang="zh-TW" sz="1100" b="1" dirty="0">
-                <a:solidFill>
-                  <a:srgbClr val="FF0000"/>
-                </a:solidFill>
-                <a:latin typeface="微軟正黑體" panose="020B0604030504040204" pitchFamily="34" charset="-120"/>
-                <a:ea typeface="微軟正黑體" panose="020B0604030504040204" pitchFamily="34" charset="-120"/>
-              </a:rPr>
-              <a:t>2027</a:t>
-            </a:r>
-            <a:r>
-              <a:rPr lang="en-US" altLang="zh-TW" sz="1100" b="1" dirty="0">
-                <a:solidFill>
-                  <a:schemeClr val="tx1"/>
-                </a:solidFill>
-                <a:latin typeface="微軟正黑體" panose="020B0604030504040204" pitchFamily="34" charset="-120"/>
-                <a:ea typeface="微軟正黑體" panose="020B0604030504040204" pitchFamily="34" charset="-120"/>
-              </a:rPr>
-              <a:t>)</a:t>
-            </a:r>
-          </a:p>
-          <a:p>
-            <a:pPr marL="228600" indent="-228600">
-              <a:lnSpc>
-                <a:spcPts val="1600"/>
-              </a:lnSpc>
-              <a:buAutoNum type="arabicPeriod"/>
-            </a:pPr>
+              <a:t>解讀基因數據</a:t>
+            </a:r>
+            <a:r>
+              <a:rPr lang="en-US" altLang="zh-TW" sz="1100" dirty="0">
+                <a:solidFill>
+                  <a:schemeClr val="tx1"/>
+                </a:solidFill>
+                <a:latin typeface="微軟正黑體" panose="020B0604030504040204" pitchFamily="34" charset="-120"/>
+                <a:ea typeface="微軟正黑體" panose="020B0604030504040204" pitchFamily="34" charset="-120"/>
+              </a:rPr>
+              <a:t>, </a:t>
+            </a:r>
             <a:r>
               <a:rPr lang="zh-TW" altLang="en-US" sz="1100" dirty="0">
                 <a:solidFill>
@@ -2139,58 +1968,11 @@
                 <a:latin typeface="微軟正黑體" panose="020B0604030504040204" pitchFamily="34" charset="-120"/>
                 <a:ea typeface="微軟正黑體" panose="020B0604030504040204" pitchFamily="34" charset="-120"/>
               </a:rPr>
-              <a:t>解讀數據</a:t>
-            </a:r>
-            <a:r>
-              <a:rPr lang="en-US" altLang="zh-TW" sz="1100" dirty="0">
-                <a:solidFill>
-                  <a:schemeClr val="tx1"/>
-                </a:solidFill>
-                <a:latin typeface="微軟正黑體" panose="020B0604030504040204" pitchFamily="34" charset="-120"/>
-                <a:ea typeface="微軟正黑體" panose="020B0604030504040204" pitchFamily="34" charset="-120"/>
-              </a:rPr>
-              <a:t>:</a:t>
-            </a:r>
-            <a:r>
-              <a:rPr lang="zh-TW" altLang="en-US" sz="1100" dirty="0">
-                <a:solidFill>
-                  <a:schemeClr val="tx1"/>
-                </a:solidFill>
-                <a:latin typeface="微軟正黑體" panose="020B0604030504040204" pitchFamily="34" charset="-120"/>
-                <a:ea typeface="微軟正黑體" panose="020B0604030504040204" pitchFamily="34" charset="-120"/>
-              </a:rPr>
-              <a:t> 解讀</a:t>
-            </a:r>
-            <a:r>
-              <a:rPr lang="en-US" altLang="zh-TW" sz="1100" dirty="0">
-                <a:solidFill>
-                  <a:schemeClr val="tx1"/>
-                </a:solidFill>
-                <a:latin typeface="微軟正黑體" panose="020B0604030504040204" pitchFamily="34" charset="-120"/>
-                <a:ea typeface="微軟正黑體" panose="020B0604030504040204" pitchFamily="34" charset="-120"/>
-              </a:rPr>
-              <a:t>summit spatial</a:t>
-            </a:r>
-            <a:r>
-              <a:rPr lang="zh-TW" altLang="en-US" sz="1100" dirty="0">
-                <a:solidFill>
-                  <a:schemeClr val="tx1"/>
-                </a:solidFill>
-                <a:latin typeface="微軟正黑體" panose="020B0604030504040204" pitchFamily="34" charset="-120"/>
-                <a:ea typeface="微軟正黑體" panose="020B0604030504040204" pitchFamily="34" charset="-120"/>
-              </a:rPr>
-              <a:t>照片</a:t>
-            </a:r>
-            <a:endParaRPr lang="en-US" altLang="zh-TW" sz="1100" dirty="0">
-              <a:solidFill>
-                <a:schemeClr val="tx1"/>
-              </a:solidFill>
-              <a:latin typeface="微軟正黑體" panose="020B0604030504040204" pitchFamily="34" charset="-120"/>
-              <a:ea typeface="微軟正黑體" panose="020B0604030504040204" pitchFamily="34" charset="-120"/>
-            </a:endParaRPr>
-          </a:p>
-          <a:p>
-            <a:pPr indent="228600">
+              <a:t>分析基因分型照片並說明其意義。 </a:t>
+            </a:r>
+          </a:p>
+          <a:p>
+            <a:pPr>
               <a:lnSpc>
                 <a:spcPts val="1600"/>
               </a:lnSpc>
@@ -2203,7 +1985,7 @@
                 <a:latin typeface="微軟正黑體" panose="020B0604030504040204" pitchFamily="34" charset="-120"/>
                 <a:ea typeface="微軟正黑體" panose="020B0604030504040204" pitchFamily="34" charset="-120"/>
               </a:rPr>
-              <a:t>與其空間定序數據</a:t>
+              <a:t>第三階段</a:t>
             </a:r>
             <a:r>
               <a:rPr lang="en-US" altLang="zh-TW" sz="1100" dirty="0">
@@ -2213,7 +1995,7 @@
                 <a:latin typeface="微軟正黑體" panose="020B0604030504040204" pitchFamily="34" charset="-120"/>
                 <a:ea typeface="微軟正黑體" panose="020B0604030504040204" pitchFamily="34" charset="-120"/>
               </a:rPr>
-              <a:t>.</a:t>
+              <a:t>: </a:t>
             </a:r>
             <a:r>
               <a:rPr lang="zh-TW" altLang="en-US" sz="1100" dirty="0">
@@ -2223,37 +2005,7 @@
                 <a:latin typeface="微軟正黑體" panose="020B0604030504040204" pitchFamily="34" charset="-120"/>
                 <a:ea typeface="微軟正黑體" panose="020B0604030504040204" pitchFamily="34" charset="-120"/>
               </a:rPr>
-              <a:t> </a:t>
-            </a:r>
-            <a:r>
-              <a:rPr lang="en-US" altLang="zh-TW" sz="1100" b="1" dirty="0">
-                <a:solidFill>
-                  <a:schemeClr val="tx1"/>
-                </a:solidFill>
-                <a:latin typeface="微軟正黑體" panose="020B0604030504040204" pitchFamily="34" charset="-120"/>
-                <a:ea typeface="微軟正黑體" panose="020B0604030504040204" pitchFamily="34" charset="-120"/>
-              </a:rPr>
-              <a:t>(</a:t>
-            </a:r>
-            <a:r>
-              <a:rPr lang="en-US" altLang="zh-TW" sz="1100" b="1" dirty="0">
-                <a:solidFill>
-                  <a:srgbClr val="FF0000"/>
-                </a:solidFill>
-                <a:latin typeface="微軟正黑體" panose="020B0604030504040204" pitchFamily="34" charset="-120"/>
-                <a:ea typeface="微軟正黑體" panose="020B0604030504040204" pitchFamily="34" charset="-120"/>
-              </a:rPr>
-              <a:t>2028</a:t>
-            </a:r>
-            <a:r>
-              <a:rPr lang="en-US" altLang="zh-TW" sz="1100" b="1" dirty="0">
-                <a:solidFill>
-                  <a:schemeClr val="tx1"/>
-                </a:solidFill>
-                <a:latin typeface="微軟正黑體" panose="020B0604030504040204" pitchFamily="34" charset="-120"/>
-                <a:ea typeface="微軟正黑體" panose="020B0604030504040204" pitchFamily="34" charset="-120"/>
-              </a:rPr>
-              <a:t>)</a:t>
+              <a:t>分析臨床組織照片以及分析其空間定序數據。</a:t>
             </a:r>
           </a:p>
         </p:txBody>
@@ -6104,7 +5856,7 @@
         </p:nvSpPr>
         <p:spPr>
           <a:xfrm>
-            <a:off x="971600" y="1916832"/>
+            <a:off x="2678766" y="3424753"/>
             <a:ext cx="1656184" cy="1624722"/>
           </a:xfrm>
           <a:prstGeom prst="rect">
@@ -6112,8 +5864,8 @@
           </a:prstGeom>
           <a:solidFill>
             <a:schemeClr val="accent6">
-              <a:lumMod val="20000"/>
-              <a:lumOff val="80000"/>
+              <a:lumMod val="40000"/>
+              <a:lumOff val="60000"/>
               <a:alpha val="60000"/>
             </a:schemeClr>
           </a:solidFill>
@@ -6161,96 +5913,6 @@
                 <a:cs typeface="ADLaM Display" panose="02010000000000000000" pitchFamily="2" charset="0"/>
               </a:rPr>
               <a:t>SFT</a:t>
-            </a:r>
-          </a:p>
-        </p:txBody>
-      </p:sp>
-      <p:sp>
-        <p:nvSpPr>
-          <p:cNvPr id="19" name="矩形 18">
-            <a:extLst>
-              <a:ext uri="{FF2B5EF4-FFF2-40B4-BE49-F238E27FC236}">
-                <a16:creationId xmlns:a16="http://schemas.microsoft.com/office/drawing/2014/main" id="{16A0EE13-83C7-A75B-B783-29616C77D97D}"/>
-              </a:ext>
-            </a:extLst>
-          </p:cNvPr>
-          <p:cNvSpPr/>
-          <p:nvPr/>
-        </p:nvSpPr>
-        <p:spPr>
-          <a:xfrm>
-            <a:off x="4067945" y="2038867"/>
-            <a:ext cx="1974169" cy="427605"/>
-          </a:xfrm>
-          <a:prstGeom prst="rect">
-            <a:avLst/>
-          </a:prstGeom>
-          <a:solidFill>
-            <a:schemeClr val="bg1">
-              <a:lumMod val="95000"/>
-            </a:schemeClr>
-          </a:solidFill>
-          <a:ln w="12700">
-            <a:solidFill>
-              <a:schemeClr val="bg1">
-                <a:lumMod val="85000"/>
-              </a:schemeClr>
-            </a:solidFill>
-          </a:ln>
-        </p:spPr>
-        <p:style>
-          <a:lnRef idx="2">
-            <a:schemeClr val="accent1">
-              <a:shade val="15000"/>
-            </a:schemeClr>
-          </a:lnRef>
-          <a:fillRef idx="1">
-            <a:schemeClr val="accent1"/>
-          </a:fillRef>
-          <a:effectRef idx="0">
-            <a:schemeClr val="accent1"/>
-          </a:effectRef>
-          <a:fontRef idx="minor">
-            <a:schemeClr val="lt1"/>
-          </a:fontRef>
-        </p:style>
-        <p:txBody>
-          <a:bodyPr wrap="none" lIns="91440" tIns="0" rIns="0" bIns="0" rtlCol="0" anchor="ctr" anchorCtr="0"/>
-          <a:lstStyle/>
-          <a:p>
-            <a:pPr>
-              <a:lnSpc>
-                <a:spcPts val="1600"/>
-              </a:lnSpc>
-            </a:pPr>
-            <a:r>
-              <a:rPr lang="en-US" altLang="zh-TW" sz="1000" dirty="0">
-                <a:solidFill>
-                  <a:schemeClr val="tx1"/>
-                </a:solidFill>
-                <a:latin typeface="ADLaM Display" panose="02010000000000000000" pitchFamily="2" charset="0"/>
-                <a:ea typeface="ADLaM Display" panose="02010000000000000000" pitchFamily="2" charset="0"/>
-                <a:cs typeface="ADLaM Display" panose="02010000000000000000" pitchFamily="2" charset="0"/>
-              </a:rPr>
-              <a:t>Apollo-Corpus</a:t>
-            </a:r>
-          </a:p>
-          <a:p>
-            <a:pPr>
-              <a:lnSpc>
-                <a:spcPts val="1600"/>
-              </a:lnSpc>
-            </a:pPr>
-            <a:r>
-              <a:rPr lang="en-US" altLang="zh-TW" sz="1000" dirty="0">
-                <a:solidFill>
-                  <a:schemeClr val="tx1"/>
-                </a:solidFill>
-                <a:latin typeface="ADLaM Display" panose="02010000000000000000" pitchFamily="2" charset="0"/>
-                <a:ea typeface="ADLaM Display" panose="02010000000000000000" pitchFamily="2" charset="0"/>
-                <a:cs typeface="ADLaM Display" panose="02010000000000000000" pitchFamily="2" charset="0"/>
-              </a:rPr>
-              <a:t>BioInstruct</a:t>
             </a:r>
           </a:p>
         </p:txBody>
@@ -6313,78 +5975,6 @@
               <a:ea typeface="Noto Sans HK" panose="020B0200000000000000" pitchFamily="34" charset="-120"/>
               <a:cs typeface="Arial" panose="020B0604020202020204" pitchFamily="34" charset="0"/>
             </a:endParaRPr>
-          </a:p>
-        </p:txBody>
-      </p:sp>
-      <p:sp>
-        <p:nvSpPr>
-          <p:cNvPr id="27" name="矩形 26">
-            <a:extLst>
-              <a:ext uri="{FF2B5EF4-FFF2-40B4-BE49-F238E27FC236}">
-                <a16:creationId xmlns:a16="http://schemas.microsoft.com/office/drawing/2014/main" id="{E39DE903-A55C-8698-235D-E9279F6AC1C0}"/>
-              </a:ext>
-            </a:extLst>
-          </p:cNvPr>
-          <p:cNvSpPr/>
-          <p:nvPr/>
-        </p:nvSpPr>
-        <p:spPr>
-          <a:xfrm>
-            <a:off x="4067944" y="3098729"/>
-            <a:ext cx="1974170" cy="258263"/>
-          </a:xfrm>
-          <a:prstGeom prst="rect">
-            <a:avLst/>
-          </a:prstGeom>
-          <a:solidFill>
-            <a:schemeClr val="bg1">
-              <a:lumMod val="95000"/>
-            </a:schemeClr>
-          </a:solidFill>
-          <a:ln w="12700">
-            <a:solidFill>
-              <a:schemeClr val="bg1">
-                <a:lumMod val="85000"/>
-              </a:schemeClr>
-            </a:solidFill>
-          </a:ln>
-        </p:spPr>
-        <p:style>
-          <a:lnRef idx="2">
-            <a:schemeClr val="accent1">
-              <a:shade val="15000"/>
-            </a:schemeClr>
-          </a:lnRef>
-          <a:fillRef idx="1">
-            <a:schemeClr val="accent1"/>
-          </a:fillRef>
-          <a:effectRef idx="0">
-            <a:schemeClr val="accent1"/>
-          </a:effectRef>
-          <a:fontRef idx="minor">
-            <a:schemeClr val="lt1"/>
-          </a:fontRef>
-        </p:style>
-        <p:txBody>
-          <a:bodyPr wrap="none" lIns="91440" tIns="0" rIns="0" bIns="0" rtlCol="0" anchor="ctr" anchorCtr="0"/>
-          <a:lstStyle/>
-          <a:p>
-            <a:pPr>
-              <a:lnSpc>
-                <a:spcPts val="1600"/>
-              </a:lnSpc>
-            </a:pPr>
-            <a:r>
-              <a:rPr lang="en-US" altLang="zh-TW" sz="1000" dirty="0">
-                <a:solidFill>
-                  <a:schemeClr val="tx1"/>
-                </a:solidFill>
-                <a:latin typeface="ADLaM Display" panose="02010000000000000000" pitchFamily="2" charset="0"/>
-                <a:ea typeface="ADLaM Display" panose="02010000000000000000" pitchFamily="2" charset="0"/>
-                <a:cs typeface="ADLaM Display" panose="02010000000000000000" pitchFamily="2" charset="0"/>
-              </a:rPr>
-              <a:t>PMC Open Access Subset</a:t>
-            </a:r>
           </a:p>
         </p:txBody>
       </p:sp>
@@ -6452,7 +6042,7 @@
         </p:nvSpPr>
         <p:spPr>
           <a:xfrm>
-            <a:off x="1479833" y="2276872"/>
+            <a:off x="3186999" y="3784793"/>
             <a:ext cx="859919" cy="307983"/>
           </a:xfrm>
           <a:prstGeom prst="rect">
@@ -6522,7 +6112,7 @@
         </p:nvSpPr>
         <p:spPr>
           <a:xfrm>
-            <a:off x="757664" y="2852936"/>
+            <a:off x="2390734" y="4381452"/>
             <a:ext cx="645984" cy="307983"/>
           </a:xfrm>
           <a:prstGeom prst="rect">
@@ -6604,7 +6194,7 @@
         </p:blipFill>
         <p:spPr>
           <a:xfrm>
-            <a:off x="864378" y="2434282"/>
+            <a:off x="2497448" y="3962798"/>
             <a:ext cx="432048" cy="366597"/>
           </a:xfrm>
           <a:prstGeom prst="rect">
@@ -6641,7 +6231,7 @@
         </p:blipFill>
         <p:spPr>
           <a:xfrm>
-            <a:off x="2656012" y="1197608"/>
+            <a:off x="2822782" y="1978773"/>
             <a:ext cx="1691952" cy="478414"/>
           </a:xfrm>
           <a:prstGeom prst="rect">
@@ -6677,12 +6267,96 @@
         </p:nvGrpSpPr>
         <p:grpSpPr>
           <a:xfrm>
-            <a:off x="1520958" y="1088858"/>
+            <a:off x="3228124" y="2596779"/>
             <a:ext cx="856522" cy="695914"/>
             <a:chOff x="4271804" y="324357"/>
             <a:chExt cx="931978" cy="842197"/>
           </a:xfrm>
         </p:grpSpPr>
+        <p:sp>
+          <p:nvSpPr>
+            <p:cNvPr id="10" name="矩形 9">
+              <a:extLst>
+                <a:ext uri="{FF2B5EF4-FFF2-40B4-BE49-F238E27FC236}">
+                  <a16:creationId xmlns:a16="http://schemas.microsoft.com/office/drawing/2014/main" id="{9BAE93DD-61DC-729E-DF61-A00C337731CF}"/>
+                </a:ext>
+              </a:extLst>
+            </p:cNvPr>
+            <p:cNvSpPr/>
+            <p:nvPr/>
+          </p:nvSpPr>
+          <p:spPr>
+            <a:xfrm>
+              <a:off x="4271804" y="324357"/>
+              <a:ext cx="931978" cy="842197"/>
+            </a:xfrm>
+            <a:prstGeom prst="rect">
+              <a:avLst/>
+            </a:prstGeom>
+            <a:solidFill>
+              <a:schemeClr val="bg1">
+                <a:lumMod val="95000"/>
+              </a:schemeClr>
+            </a:solidFill>
+            <a:ln w="38100">
+              <a:solidFill>
+                <a:schemeClr val="bg1">
+                  <a:lumMod val="85000"/>
+                </a:schemeClr>
+              </a:solidFill>
+            </a:ln>
+          </p:spPr>
+          <p:style>
+            <a:lnRef idx="2">
+              <a:schemeClr val="accent1">
+                <a:shade val="15000"/>
+              </a:schemeClr>
+            </a:lnRef>
+            <a:fillRef idx="1">
+              <a:schemeClr val="accent1"/>
+            </a:fillRef>
+            <a:effectRef idx="0">
+              <a:schemeClr val="accent1"/>
+            </a:effectRef>
+            <a:fontRef idx="minor">
+              <a:schemeClr val="lt1"/>
+            </a:fontRef>
+          </p:style>
+          <p:txBody>
+            <a:bodyPr wrap="none" lIns="0" tIns="0" rIns="0" bIns="0" rtlCol="0" anchor="ctr" anchorCtr="1"/>
+            <a:lstStyle/>
+            <a:p>
+              <a:pPr algn="ctr">
+                <a:lnSpc>
+                  <a:spcPts val="1600"/>
+                </a:lnSpc>
+              </a:pPr>
+              <a:endParaRPr lang="en-US" altLang="zh-TW" sz="1200" dirty="0">
+                <a:solidFill>
+                  <a:schemeClr val="tx2"/>
+                </a:solidFill>
+                <a:latin typeface="ADLaM Display" panose="02010000000000000000" pitchFamily="2" charset="0"/>
+                <a:ea typeface="ADLaM Display" panose="02010000000000000000" pitchFamily="2" charset="0"/>
+                <a:cs typeface="ADLaM Display" panose="02010000000000000000" pitchFamily="2" charset="0"/>
+              </a:endParaRPr>
+            </a:p>
+            <a:p>
+              <a:pPr algn="ctr">
+                <a:lnSpc>
+                  <a:spcPts val="1600"/>
+                </a:lnSpc>
+              </a:pPr>
+              <a:endParaRPr lang="en-US" altLang="zh-TW" sz="1200" dirty="0">
+                <a:solidFill>
+                  <a:schemeClr val="tx2"/>
+                </a:solidFill>
+                <a:latin typeface="ADLaM Display" panose="02010000000000000000" pitchFamily="2" charset="0"/>
+                <a:ea typeface="ADLaM Display" panose="02010000000000000000" pitchFamily="2" charset="0"/>
+                <a:cs typeface="ADLaM Display" panose="02010000000000000000" pitchFamily="2" charset="0"/>
+              </a:endParaRPr>
+            </a:p>
+          </p:txBody>
+        </p:sp>
         <p:sp>
           <p:nvSpPr>
             <p:cNvPr id="7" name="矩形 6">
@@ -6781,87 +6455,6 @@
             </a:prstGeom>
           </p:spPr>
         </p:pic>
-        <p:sp>
-          <p:nvSpPr>
-            <p:cNvPr id="10" name="矩形 9">
-              <a:extLst>
-                <a:ext uri="{FF2B5EF4-FFF2-40B4-BE49-F238E27FC236}">
-                  <a16:creationId xmlns:a16="http://schemas.microsoft.com/office/drawing/2014/main" id="{9BAE93DD-61DC-729E-DF61-A00C337731CF}"/>
-                </a:ext>
-              </a:extLst>
-            </p:cNvPr>
-            <p:cNvSpPr/>
-            <p:nvPr/>
-          </p:nvSpPr>
-          <p:spPr>
-            <a:xfrm>
-              <a:off x="4271804" y="324357"/>
-              <a:ext cx="931978" cy="842197"/>
-            </a:xfrm>
-            <a:prstGeom prst="rect">
-              <a:avLst/>
-            </a:prstGeom>
-            <a:noFill/>
-            <a:ln w="38100">
-              <a:solidFill>
-                <a:schemeClr val="tx2">
-                  <a:lumMod val="20000"/>
-                  <a:lumOff val="80000"/>
-                </a:schemeClr>
-              </a:solidFill>
-            </a:ln>
-          </p:spPr>
-          <p:style>
-            <a:lnRef idx="2">
-              <a:schemeClr val="accent1">
-                <a:shade val="15000"/>
-              </a:schemeClr>
-            </a:lnRef>
-            <a:fillRef idx="1">
-              <a:schemeClr val="accent1"/>
-            </a:fillRef>
-            <a:effectRef idx="0">
-              <a:schemeClr val="accent1"/>
-            </a:effectRef>
-            <a:fontRef idx="minor">
-              <a:schemeClr val="lt1"/>
-            </a:fontRef>
-          </p:style>
-          <p:txBody>
-            <a:bodyPr wrap="none" lIns="0" tIns="0" rIns="0" bIns="0" rtlCol="0" anchor="ctr" anchorCtr="1"/>
-            <a:lstStyle/>
-            <a:p>
-              <a:pPr algn="ctr">
-                <a:lnSpc>
-                  <a:spcPts val="1600"/>
-                </a:lnSpc>
-              </a:pPr>
-              <a:endParaRPr lang="en-US" altLang="zh-TW" sz="1200" dirty="0">
-                <a:solidFill>
-                  <a:schemeClr val="tx2"/>
-                </a:solidFill>
-                <a:latin typeface="ADLaM Display" panose="02010000000000000000" pitchFamily="2" charset="0"/>
-                <a:ea typeface="ADLaM Display" panose="02010000000000000000" pitchFamily="2" charset="0"/>
-                <a:cs typeface="ADLaM Display" panose="02010000000000000000" pitchFamily="2" charset="0"/>
-              </a:endParaRPr>
-            </a:p>
-            <a:p>
-              <a:pPr algn="ctr">
-                <a:lnSpc>
-                  <a:spcPts val="1600"/>
-                </a:lnSpc>
-              </a:pPr>
-              <a:endParaRPr lang="en-US" altLang="zh-TW" sz="1200" dirty="0">
-                <a:solidFill>
-                  <a:schemeClr val="tx2"/>
-                </a:solidFill>
-                <a:latin typeface="ADLaM Display" panose="02010000000000000000" pitchFamily="2" charset="0"/>
-                <a:ea typeface="ADLaM Display" panose="02010000000000000000" pitchFamily="2" charset="0"/>
-                <a:cs typeface="ADLaM Display" panose="02010000000000000000" pitchFamily="2" charset="0"/>
-              </a:endParaRPr>
-            </a:p>
-          </p:txBody>
-        </p:sp>
       </p:grpSp>
       <p:sp>
         <p:nvSpPr>
@@ -6877,7 +6470,7 @@
         </p:nvSpPr>
         <p:spPr>
           <a:xfrm>
-            <a:off x="1805203" y="1718038"/>
+            <a:off x="3512369" y="3225959"/>
             <a:ext cx="288032" cy="331298"/>
           </a:xfrm>
           <a:prstGeom prst="downArrow">
@@ -6933,7 +6526,7 @@
         </p:nvSpPr>
         <p:spPr>
           <a:xfrm rot="10800000">
-            <a:off x="1475656" y="2780928"/>
+            <a:off x="3182822" y="4288849"/>
             <a:ext cx="556629" cy="671272"/>
           </a:xfrm>
           <a:prstGeom prst="uturnArrow">
@@ -6987,185 +6580,6 @@
       </p:sp>
       <p:sp>
         <p:nvSpPr>
-          <p:cNvPr id="20" name="矩形 19">
-            <a:extLst>
-              <a:ext uri="{FF2B5EF4-FFF2-40B4-BE49-F238E27FC236}">
-                <a16:creationId xmlns:a16="http://schemas.microsoft.com/office/drawing/2014/main" id="{8E404EA2-E81F-60BD-20D4-80E149497416}"/>
-              </a:ext>
-            </a:extLst>
-          </p:cNvPr>
-          <p:cNvSpPr/>
-          <p:nvPr/>
-        </p:nvSpPr>
-        <p:spPr>
-          <a:xfrm>
-            <a:off x="4067946" y="2466472"/>
-            <a:ext cx="1974170" cy="632257"/>
-          </a:xfrm>
-          <a:prstGeom prst="rect">
-            <a:avLst/>
-          </a:prstGeom>
-          <a:solidFill>
-            <a:schemeClr val="bg1">
-              <a:lumMod val="95000"/>
-            </a:schemeClr>
-          </a:solidFill>
-          <a:ln w="12700">
-            <a:solidFill>
-              <a:schemeClr val="bg1">
-                <a:lumMod val="85000"/>
-              </a:schemeClr>
-            </a:solidFill>
-          </a:ln>
-        </p:spPr>
-        <p:style>
-          <a:lnRef idx="2">
-            <a:schemeClr val="accent1">
-              <a:shade val="15000"/>
-            </a:schemeClr>
-          </a:lnRef>
-          <a:fillRef idx="1">
-            <a:schemeClr val="accent1"/>
-          </a:fillRef>
-          <a:effectRef idx="0">
-            <a:schemeClr val="accent1"/>
-          </a:effectRef>
-          <a:fontRef idx="minor">
-            <a:schemeClr val="lt1"/>
-          </a:fontRef>
-        </p:style>
-        <p:txBody>
-          <a:bodyPr wrap="none" lIns="91440" tIns="0" rIns="0" bIns="0" rtlCol="0" anchor="ctr" anchorCtr="0"/>
-          <a:lstStyle/>
-          <a:p>
-            <a:pPr>
-              <a:lnSpc>
-                <a:spcPts val="1600"/>
-              </a:lnSpc>
-            </a:pPr>
-            <a:r>
-              <a:rPr lang="en-US" altLang="zh-TW" sz="1000" dirty="0">
-                <a:solidFill>
-                  <a:schemeClr val="tx1"/>
-                </a:solidFill>
-                <a:latin typeface="ADLaM Display" panose="02010000000000000000" pitchFamily="2" charset="0"/>
-                <a:ea typeface="ADLaM Display" panose="02010000000000000000" pitchFamily="2" charset="0"/>
-                <a:cs typeface="ADLaM Display" panose="02010000000000000000" pitchFamily="2" charset="0"/>
-              </a:rPr>
-              <a:t>MedQA / USMLE</a:t>
-            </a:r>
-          </a:p>
-          <a:p>
-            <a:pPr>
-              <a:lnSpc>
-                <a:spcPts val="1600"/>
-              </a:lnSpc>
-            </a:pPr>
-            <a:r>
-              <a:rPr lang="en-US" altLang="zh-TW" sz="1000" dirty="0">
-                <a:solidFill>
-                  <a:schemeClr val="tx1"/>
-                </a:solidFill>
-                <a:latin typeface="ADLaM Display" panose="02010000000000000000" pitchFamily="2" charset="0"/>
-                <a:ea typeface="ADLaM Display" panose="02010000000000000000" pitchFamily="2" charset="0"/>
-                <a:cs typeface="ADLaM Display" panose="02010000000000000000" pitchFamily="2" charset="0"/>
-              </a:rPr>
-              <a:t>PubMedQA</a:t>
-            </a:r>
-          </a:p>
-          <a:p>
-            <a:pPr>
-              <a:lnSpc>
-                <a:spcPts val="1600"/>
-              </a:lnSpc>
-            </a:pPr>
-            <a:r>
-              <a:rPr lang="en-US" altLang="zh-TW" sz="1000" dirty="0">
-                <a:solidFill>
-                  <a:schemeClr val="tx1"/>
-                </a:solidFill>
-                <a:latin typeface="ADLaM Display" panose="02010000000000000000" pitchFamily="2" charset="0"/>
-                <a:ea typeface="ADLaM Display" panose="02010000000000000000" pitchFamily="2" charset="0"/>
-                <a:cs typeface="ADLaM Display" panose="02010000000000000000" pitchFamily="2" charset="0"/>
-              </a:rPr>
-              <a:t>MedicationQA</a:t>
-            </a:r>
-          </a:p>
-        </p:txBody>
-      </p:sp>
-      <p:pic>
-        <p:nvPicPr>
-          <p:cNvPr id="24" name="圖形 23" descr="資料庫 以實心填滿">
-            <a:extLst>
-              <a:ext uri="{FF2B5EF4-FFF2-40B4-BE49-F238E27FC236}">
-                <a16:creationId xmlns:a16="http://schemas.microsoft.com/office/drawing/2014/main" id="{E1DE9328-A7AA-C920-A428-9EA723534132}"/>
-              </a:ext>
-            </a:extLst>
-          </p:cNvPr>
-          <p:cNvPicPr>
-            <a:picLocks noChangeAspect="1"/>
-          </p:cNvPicPr>
-          <p:nvPr/>
-        </p:nvPicPr>
-        <p:blipFill>
-          <a:blip>
-            <a:extLst>
-              <a:ext uri="{96DAC541-7B7A-43D3-8B79-37D633B846F1}">
-                <asvg:svgBlip xmlns:asvg="http://schemas.microsoft.com/office/drawing/2016/SVG/main" r:embed="rId5"/>
-              </a:ext>
-            </a:extLst>
-          </a:blip>
-          <a:stretch>
-            <a:fillRect/>
-          </a:stretch>
-        </p:blipFill>
-        <p:spPr>
-          <a:xfrm>
-            <a:off x="5369291" y="2542972"/>
-            <a:ext cx="513450" cy="513450"/>
-          </a:xfrm>
-          <a:prstGeom prst="rect">
-            <a:avLst/>
-          </a:prstGeom>
-        </p:spPr>
-      </p:pic>
-      <p:sp>
-        <p:nvSpPr>
-          <p:cNvPr id="22" name="文字方塊 21">
-            <a:extLst>
-              <a:ext uri="{FF2B5EF4-FFF2-40B4-BE49-F238E27FC236}">
-                <a16:creationId xmlns:a16="http://schemas.microsoft.com/office/drawing/2014/main" id="{81C59E87-C437-57D6-650E-C3343CE9BC70}"/>
-              </a:ext>
-            </a:extLst>
-          </p:cNvPr>
-          <p:cNvSpPr txBox="1"/>
-          <p:nvPr/>
-        </p:nvSpPr>
-        <p:spPr>
-          <a:xfrm>
-            <a:off x="4468972" y="1772816"/>
-            <a:ext cx="967124" cy="276999"/>
-          </a:xfrm>
-          <a:prstGeom prst="rect">
-            <a:avLst/>
-          </a:prstGeom>
-          <a:noFill/>
-        </p:spPr>
-        <p:txBody>
-          <a:bodyPr wrap="square">
-            <a:spAutoFit/>
-          </a:bodyPr>
-          <a:lstStyle/>
-          <a:p>
-            <a:r>
-              <a:rPr lang="en-US" altLang="zh-TW" sz="1200" dirty="0"/>
-              <a:t>Data Source</a:t>
-            </a:r>
-          </a:p>
-        </p:txBody>
-      </p:sp>
-      <p:sp>
-        <p:nvSpPr>
           <p:cNvPr id="25" name="文字方塊 24">
             <a:extLst>
               <a:ext uri="{FF2B5EF4-FFF2-40B4-BE49-F238E27FC236}">
@@ -7178,7 +6592,7 @@
         </p:nvSpPr>
         <p:spPr>
           <a:xfrm>
-            <a:off x="2938998" y="1639933"/>
+            <a:off x="2439918" y="2457187"/>
             <a:ext cx="967124" cy="461665"/>
           </a:xfrm>
           <a:prstGeom prst="rect">
@@ -7221,7 +6635,7 @@
         </p:nvSpPr>
         <p:spPr>
           <a:xfrm>
-            <a:off x="814720" y="2060848"/>
+            <a:off x="2447790" y="3589364"/>
             <a:ext cx="531364" cy="309957"/>
           </a:xfrm>
           <a:prstGeom prst="rect">
@@ -7242,7 +6656,7 @@
             </a:pPr>
             <a:r>
               <a:rPr lang="en-US" altLang="zh-TW" sz="1200" dirty="0"/>
-              <a:t>Trainer</a:t>
+              <a:t>Training</a:t>
             </a:r>
           </a:p>
           <a:p>
@@ -7272,8 +6686,8 @@
         </p:nvSpPr>
         <p:spPr>
           <a:xfrm flipH="1">
-            <a:off x="4509786" y="1300206"/>
-            <a:ext cx="441842" cy="427605"/>
+            <a:off x="4347526" y="2108724"/>
+            <a:ext cx="1499592" cy="371652"/>
           </a:xfrm>
           <a:prstGeom prst="bentArrow">
             <a:avLst>
@@ -7323,6 +6737,379 @@
           </a:p>
         </p:txBody>
       </p:sp>
+      <p:grpSp>
+        <p:nvGrpSpPr>
+          <p:cNvPr id="2" name="群組 1">
+            <a:extLst>
+              <a:ext uri="{FF2B5EF4-FFF2-40B4-BE49-F238E27FC236}">
+                <a16:creationId xmlns:a16="http://schemas.microsoft.com/office/drawing/2014/main" id="{05994014-0DA6-0EAA-33A0-99676B315FD3}"/>
+              </a:ext>
+            </a:extLst>
+          </p:cNvPr>
+          <p:cNvGrpSpPr/>
+          <p:nvPr/>
+        </p:nvGrpSpPr>
+        <p:grpSpPr>
+          <a:xfrm>
+            <a:off x="4788024" y="2508175"/>
+            <a:ext cx="1974172" cy="1841650"/>
+            <a:chOff x="3874744" y="2043016"/>
+            <a:chExt cx="1974172" cy="1841650"/>
+          </a:xfrm>
+        </p:grpSpPr>
+        <p:sp>
+          <p:nvSpPr>
+            <p:cNvPr id="19" name="矩形 18">
+              <a:extLst>
+                <a:ext uri="{FF2B5EF4-FFF2-40B4-BE49-F238E27FC236}">
+                  <a16:creationId xmlns:a16="http://schemas.microsoft.com/office/drawing/2014/main" id="{16A0EE13-83C7-A75B-B783-29616C77D97D}"/>
+                </a:ext>
+              </a:extLst>
+            </p:cNvPr>
+            <p:cNvSpPr/>
+            <p:nvPr/>
+          </p:nvSpPr>
+          <p:spPr>
+            <a:xfrm>
+              <a:off x="3874745" y="2566541"/>
+              <a:ext cx="1974169" cy="427605"/>
+            </a:xfrm>
+            <a:prstGeom prst="rect">
+              <a:avLst/>
+            </a:prstGeom>
+            <a:solidFill>
+              <a:schemeClr val="accent6">
+                <a:lumMod val="40000"/>
+                <a:lumOff val="60000"/>
+              </a:schemeClr>
+            </a:solidFill>
+            <a:ln w="12700">
+              <a:solidFill>
+                <a:schemeClr val="accent6">
+                  <a:lumMod val="75000"/>
+                </a:schemeClr>
+              </a:solidFill>
+            </a:ln>
+          </p:spPr>
+          <p:style>
+            <a:lnRef idx="2">
+              <a:schemeClr val="accent1">
+                <a:shade val="15000"/>
+              </a:schemeClr>
+            </a:lnRef>
+            <a:fillRef idx="1">
+              <a:schemeClr val="accent1"/>
+            </a:fillRef>
+            <a:effectRef idx="0">
+              <a:schemeClr val="accent1"/>
+            </a:effectRef>
+            <a:fontRef idx="minor">
+              <a:schemeClr val="lt1"/>
+            </a:fontRef>
+          </p:style>
+          <p:txBody>
+            <a:bodyPr wrap="none" lIns="91440" tIns="0" rIns="0" bIns="0" rtlCol="0" anchor="ctr" anchorCtr="0"/>
+            <a:lstStyle/>
+            <a:p>
+              <a:pPr>
+                <a:lnSpc>
+                  <a:spcPts val="1600"/>
+                </a:lnSpc>
+              </a:pPr>
+              <a:r>
+                <a:rPr lang="en-US" altLang="zh-TW" sz="1000" dirty="0">
+                  <a:solidFill>
+                    <a:schemeClr val="tx1"/>
+                  </a:solidFill>
+                  <a:latin typeface="ADLaM Display" panose="02010000000000000000" pitchFamily="2" charset="0"/>
+                  <a:ea typeface="ADLaM Display" panose="02010000000000000000" pitchFamily="2" charset="0"/>
+                  <a:cs typeface="ADLaM Display" panose="02010000000000000000" pitchFamily="2" charset="0"/>
+                </a:rPr>
+                <a:t>Apollo-Corpus</a:t>
+              </a:r>
+            </a:p>
+            <a:p>
+              <a:pPr>
+                <a:lnSpc>
+                  <a:spcPts val="1600"/>
+                </a:lnSpc>
+              </a:pPr>
+              <a:r>
+                <a:rPr lang="en-US" altLang="zh-TW" sz="1000" dirty="0">
+                  <a:solidFill>
+                    <a:schemeClr val="tx1"/>
+                  </a:solidFill>
+                  <a:latin typeface="ADLaM Display" panose="02010000000000000000" pitchFamily="2" charset="0"/>
+                  <a:ea typeface="ADLaM Display" panose="02010000000000000000" pitchFamily="2" charset="0"/>
+                  <a:cs typeface="ADLaM Display" panose="02010000000000000000" pitchFamily="2" charset="0"/>
+                </a:rPr>
+                <a:t>BioInstruct</a:t>
+              </a:r>
+            </a:p>
+          </p:txBody>
+        </p:sp>
+        <p:sp>
+          <p:nvSpPr>
+            <p:cNvPr id="27" name="矩形 26">
+              <a:extLst>
+                <a:ext uri="{FF2B5EF4-FFF2-40B4-BE49-F238E27FC236}">
+                  <a16:creationId xmlns:a16="http://schemas.microsoft.com/office/drawing/2014/main" id="{E39DE903-A55C-8698-235D-E9279F6AC1C0}"/>
+                </a:ext>
+              </a:extLst>
+            </p:cNvPr>
+            <p:cNvSpPr/>
+            <p:nvPr/>
+          </p:nvSpPr>
+          <p:spPr>
+            <a:xfrm>
+              <a:off x="3874744" y="3626403"/>
+              <a:ext cx="1974170" cy="258263"/>
+            </a:xfrm>
+            <a:prstGeom prst="rect">
+              <a:avLst/>
+            </a:prstGeom>
+            <a:solidFill>
+              <a:schemeClr val="accent6">
+                <a:lumMod val="40000"/>
+                <a:lumOff val="60000"/>
+              </a:schemeClr>
+            </a:solidFill>
+            <a:ln w="12700">
+              <a:solidFill>
+                <a:schemeClr val="accent6">
+                  <a:lumMod val="75000"/>
+                </a:schemeClr>
+              </a:solidFill>
+            </a:ln>
+          </p:spPr>
+          <p:style>
+            <a:lnRef idx="2">
+              <a:schemeClr val="accent1">
+                <a:shade val="15000"/>
+              </a:schemeClr>
+            </a:lnRef>
+            <a:fillRef idx="1">
+              <a:schemeClr val="accent1"/>
+            </a:fillRef>
+            <a:effectRef idx="0">
+              <a:schemeClr val="accent1"/>
+            </a:effectRef>
+            <a:fontRef idx="minor">
+              <a:schemeClr val="lt1"/>
+            </a:fontRef>
+          </p:style>
+          <p:txBody>
+            <a:bodyPr wrap="none" lIns="91440" tIns="0" rIns="0" bIns="0" rtlCol="0" anchor="ctr" anchorCtr="0"/>
+            <a:lstStyle/>
+            <a:p>
+              <a:pPr>
+                <a:lnSpc>
+                  <a:spcPts val="1600"/>
+                </a:lnSpc>
+              </a:pPr>
+              <a:r>
+                <a:rPr lang="en-US" altLang="zh-TW" sz="1000" dirty="0">
+                  <a:solidFill>
+                    <a:schemeClr val="tx1"/>
+                  </a:solidFill>
+                  <a:latin typeface="ADLaM Display" panose="02010000000000000000" pitchFamily="2" charset="0"/>
+                  <a:ea typeface="ADLaM Display" panose="02010000000000000000" pitchFamily="2" charset="0"/>
+                  <a:cs typeface="ADLaM Display" panose="02010000000000000000" pitchFamily="2" charset="0"/>
+                </a:rPr>
+                <a:t>PMC Open Access Subset</a:t>
+              </a:r>
+            </a:p>
+          </p:txBody>
+        </p:sp>
+        <p:sp>
+          <p:nvSpPr>
+            <p:cNvPr id="20" name="矩形 19">
+              <a:extLst>
+                <a:ext uri="{FF2B5EF4-FFF2-40B4-BE49-F238E27FC236}">
+                  <a16:creationId xmlns:a16="http://schemas.microsoft.com/office/drawing/2014/main" id="{8E404EA2-E81F-60BD-20D4-80E149497416}"/>
+                </a:ext>
+              </a:extLst>
+            </p:cNvPr>
+            <p:cNvSpPr/>
+            <p:nvPr/>
+          </p:nvSpPr>
+          <p:spPr>
+            <a:xfrm>
+              <a:off x="3874746" y="2994146"/>
+              <a:ext cx="1974170" cy="632257"/>
+            </a:xfrm>
+            <a:prstGeom prst="rect">
+              <a:avLst/>
+            </a:prstGeom>
+            <a:solidFill>
+              <a:schemeClr val="accent6">
+                <a:lumMod val="40000"/>
+                <a:lumOff val="60000"/>
+              </a:schemeClr>
+            </a:solidFill>
+            <a:ln w="12700">
+              <a:solidFill>
+                <a:schemeClr val="accent6">
+                  <a:lumMod val="75000"/>
+                </a:schemeClr>
+              </a:solidFill>
+            </a:ln>
+          </p:spPr>
+          <p:style>
+            <a:lnRef idx="2">
+              <a:schemeClr val="accent1">
+                <a:shade val="15000"/>
+              </a:schemeClr>
+            </a:lnRef>
+            <a:fillRef idx="1">
+              <a:schemeClr val="accent1"/>
+            </a:fillRef>
+            <a:effectRef idx="0">
+              <a:schemeClr val="accent1"/>
+            </a:effectRef>
+            <a:fontRef idx="minor">
+              <a:schemeClr val="lt1"/>
+            </a:fontRef>
+          </p:style>
+          <p:txBody>
+            <a:bodyPr wrap="none" lIns="91440" tIns="0" rIns="0" bIns="0" rtlCol="0" anchor="ctr" anchorCtr="0"/>
+            <a:lstStyle/>
+            <a:p>
+              <a:pPr>
+                <a:lnSpc>
+                  <a:spcPts val="1600"/>
+                </a:lnSpc>
+              </a:pPr>
+              <a:r>
+                <a:rPr lang="en-US" altLang="zh-TW" sz="1000" dirty="0">
+                  <a:solidFill>
+                    <a:schemeClr val="tx1"/>
+                  </a:solidFill>
+                  <a:latin typeface="ADLaM Display" panose="02010000000000000000" pitchFamily="2" charset="0"/>
+                  <a:ea typeface="ADLaM Display" panose="02010000000000000000" pitchFamily="2" charset="0"/>
+                  <a:cs typeface="ADLaM Display" panose="02010000000000000000" pitchFamily="2" charset="0"/>
+                </a:rPr>
+                <a:t>MedQA / USMLE</a:t>
+              </a:r>
+            </a:p>
+            <a:p>
+              <a:pPr>
+                <a:lnSpc>
+                  <a:spcPts val="1600"/>
+                </a:lnSpc>
+              </a:pPr>
+              <a:r>
+                <a:rPr lang="en-US" altLang="zh-TW" sz="1000" dirty="0">
+                  <a:solidFill>
+                    <a:schemeClr val="tx1"/>
+                  </a:solidFill>
+                  <a:latin typeface="ADLaM Display" panose="02010000000000000000" pitchFamily="2" charset="0"/>
+                  <a:ea typeface="ADLaM Display" panose="02010000000000000000" pitchFamily="2" charset="0"/>
+                  <a:cs typeface="ADLaM Display" panose="02010000000000000000" pitchFamily="2" charset="0"/>
+                </a:rPr>
+                <a:t>PubMedQA</a:t>
+              </a:r>
+            </a:p>
+            <a:p>
+              <a:pPr>
+                <a:lnSpc>
+                  <a:spcPts val="1600"/>
+                </a:lnSpc>
+              </a:pPr>
+              <a:r>
+                <a:rPr lang="en-US" altLang="zh-TW" sz="1000" dirty="0">
+                  <a:solidFill>
+                    <a:schemeClr val="tx1"/>
+                  </a:solidFill>
+                  <a:latin typeface="ADLaM Display" panose="02010000000000000000" pitchFamily="2" charset="0"/>
+                  <a:ea typeface="ADLaM Display" panose="02010000000000000000" pitchFamily="2" charset="0"/>
+                  <a:cs typeface="ADLaM Display" panose="02010000000000000000" pitchFamily="2" charset="0"/>
+                </a:rPr>
+                <a:t>MedicationQA</a:t>
+              </a:r>
+            </a:p>
+          </p:txBody>
+        </p:sp>
+        <p:sp>
+          <p:nvSpPr>
+            <p:cNvPr id="22" name="文字方塊 21">
+              <a:extLst>
+                <a:ext uri="{FF2B5EF4-FFF2-40B4-BE49-F238E27FC236}">
+                  <a16:creationId xmlns:a16="http://schemas.microsoft.com/office/drawing/2014/main" id="{81C59E87-C437-57D6-650E-C3343CE9BC70}"/>
+                </a:ext>
+              </a:extLst>
+            </p:cNvPr>
+            <p:cNvSpPr txBox="1"/>
+            <p:nvPr/>
+          </p:nvSpPr>
+          <p:spPr>
+            <a:xfrm>
+              <a:off x="4378267" y="2043016"/>
+              <a:ext cx="967124" cy="461665"/>
+            </a:xfrm>
+            <a:prstGeom prst="rect">
+              <a:avLst/>
+            </a:prstGeom>
+            <a:noFill/>
+          </p:spPr>
+          <p:txBody>
+            <a:bodyPr wrap="square">
+              <a:spAutoFit/>
+            </a:bodyPr>
+            <a:lstStyle/>
+            <a:p>
+              <a:pPr algn="ctr"/>
+              <a:r>
+                <a:rPr lang="en-US" altLang="zh-TW" sz="1200" dirty="0"/>
+                <a:t>Data</a:t>
+              </a:r>
+            </a:p>
+            <a:p>
+              <a:pPr algn="ctr"/>
+              <a:r>
+                <a:rPr lang="en-US" altLang="zh-TW" sz="1200" dirty="0"/>
+                <a:t>Source</a:t>
+              </a:r>
+            </a:p>
+          </p:txBody>
+        </p:sp>
+        <p:pic>
+          <p:nvPicPr>
+            <p:cNvPr id="24" name="圖形 23" descr="資料庫 以實心填滿">
+              <a:extLst>
+                <a:ext uri="{FF2B5EF4-FFF2-40B4-BE49-F238E27FC236}">
+                  <a16:creationId xmlns:a16="http://schemas.microsoft.com/office/drawing/2014/main" id="{E1DE9328-A7AA-C920-A428-9EA723534132}"/>
+                </a:ext>
+              </a:extLst>
+            </p:cNvPr>
+            <p:cNvPicPr>
+              <a:picLocks noChangeAspect="1"/>
+            </p:cNvPicPr>
+            <p:nvPr/>
+          </p:nvPicPr>
+          <p:blipFill>
+            <a:blip>
+              <a:extLst>
+                <a:ext uri="{96DAC541-7B7A-43D3-8B79-37D633B846F1}">
+                  <asvg:svgBlip xmlns:asvg="http://schemas.microsoft.com/office/drawing/2016/SVG/main" r:embed="rId5"/>
+                </a:ext>
+              </a:extLst>
+            </a:blip>
+            <a:stretch>
+              <a:fillRect/>
+            </a:stretch>
+          </p:blipFill>
+          <p:spPr>
+            <a:xfrm>
+              <a:off x="5176091" y="3070646"/>
+              <a:ext cx="513450" cy="513450"/>
+            </a:xfrm>
+            <a:prstGeom prst="rect">
+              <a:avLst/>
+            </a:prstGeom>
+          </p:spPr>
+        </p:pic>
+      </p:grpSp>
     </p:spTree>
     <p:extLst>
       <p:ext uri="{BB962C8B-B14F-4D97-AF65-F5344CB8AC3E}">
@@ -7464,7 +7251,7 @@
         </p:nvSpPr>
         <p:spPr>
           <a:xfrm>
-            <a:off x="4661723" y="4708100"/>
+            <a:off x="2100559" y="4728291"/>
             <a:ext cx="3700753" cy="1257275"/>
           </a:xfrm>
           <a:prstGeom prst="rect">
@@ -8035,86 +7822,6 @@
       </p:sp>
       <p:sp>
         <p:nvSpPr>
-          <p:cNvPr id="34" name="矩形 33">
-            <a:extLst>
-              <a:ext uri="{FF2B5EF4-FFF2-40B4-BE49-F238E27FC236}">
-                <a16:creationId xmlns:a16="http://schemas.microsoft.com/office/drawing/2014/main" id="{9B95387A-8982-D2B1-AFA9-0B75FF57F2F8}"/>
-              </a:ext>
-            </a:extLst>
-          </p:cNvPr>
-          <p:cNvSpPr/>
-          <p:nvPr/>
-        </p:nvSpPr>
-        <p:spPr>
-          <a:xfrm>
-            <a:off x="1043608" y="4032509"/>
-            <a:ext cx="990731" cy="491530"/>
-          </a:xfrm>
-          <a:prstGeom prst="rect">
-            <a:avLst/>
-          </a:prstGeom>
-          <a:noFill/>
-          <a:ln w="12700">
-            <a:noFill/>
-          </a:ln>
-        </p:spPr>
-        <p:style>
-          <a:lnRef idx="2">
-            <a:schemeClr val="accent1">
-              <a:shade val="15000"/>
-            </a:schemeClr>
-          </a:lnRef>
-          <a:fillRef idx="1">
-            <a:schemeClr val="accent1"/>
-          </a:fillRef>
-          <a:effectRef idx="0">
-            <a:schemeClr val="accent1"/>
-          </a:effectRef>
-          <a:fontRef idx="minor">
-            <a:schemeClr val="lt1"/>
-          </a:fontRef>
-        </p:style>
-        <p:txBody>
-          <a:bodyPr wrap="none" lIns="0" tIns="0" rIns="0" bIns="0" rtlCol="0" anchor="ctr" anchorCtr="1"/>
-          <a:lstStyle/>
-          <a:p>
-            <a:pPr algn="ctr">
-              <a:lnSpc>
-                <a:spcPts val="1600"/>
-              </a:lnSpc>
-            </a:pPr>
-            <a:r>
-              <a:rPr lang="en-US" altLang="zh-TW" sz="1200" dirty="0">
-                <a:solidFill>
-                  <a:schemeClr val="tx1"/>
-                </a:solidFill>
-                <a:ea typeface="ADLaM Display" panose="02010000000000000000" pitchFamily="2" charset="0"/>
-                <a:cs typeface="ADLaM Display" panose="02010000000000000000" pitchFamily="2" charset="0"/>
-              </a:rPr>
-              <a:t>Cross-Server</a:t>
-            </a:r>
-          </a:p>
-          <a:p>
-            <a:pPr algn="ctr">
-              <a:lnSpc>
-                <a:spcPts val="1600"/>
-              </a:lnSpc>
-            </a:pPr>
-            <a:r>
-              <a:rPr lang="en-US" altLang="zh-TW" sz="1200" dirty="0">
-                <a:solidFill>
-                  <a:schemeClr val="tx1"/>
-                </a:solidFill>
-                <a:ea typeface="ADLaM Display" panose="02010000000000000000" pitchFamily="2" charset="0"/>
-                <a:cs typeface="ADLaM Display" panose="02010000000000000000" pitchFamily="2" charset="0"/>
-              </a:rPr>
-              <a:t>Orchestration</a:t>
-            </a:r>
-          </a:p>
-        </p:txBody>
-      </p:sp>
-      <p:sp>
-        <p:nvSpPr>
           <p:cNvPr id="38" name="矩形 37">
             <a:extLst>
               <a:ext uri="{FF2B5EF4-FFF2-40B4-BE49-F238E27FC236}">
@@ -8127,8 +7834,8 @@
         </p:nvSpPr>
         <p:spPr>
           <a:xfrm>
-            <a:off x="1765081" y="1786807"/>
-            <a:ext cx="859919" cy="307983"/>
+            <a:off x="1703433" y="1657113"/>
+            <a:ext cx="990731" cy="307983"/>
           </a:xfrm>
           <a:prstGeom prst="rect">
             <a:avLst/>
@@ -8185,83 +7892,6 @@
       </p:sp>
       <p:sp>
         <p:nvSpPr>
-          <p:cNvPr id="40" name="矩形 39">
-            <a:extLst>
-              <a:ext uri="{FF2B5EF4-FFF2-40B4-BE49-F238E27FC236}">
-                <a16:creationId xmlns:a16="http://schemas.microsoft.com/office/drawing/2014/main" id="{92F10185-96A3-36BA-42B0-0C7A06A7673D}"/>
-              </a:ext>
-            </a:extLst>
-          </p:cNvPr>
-          <p:cNvSpPr/>
-          <p:nvPr/>
-        </p:nvSpPr>
-        <p:spPr>
-          <a:xfrm>
-            <a:off x="1765278" y="2174560"/>
-            <a:ext cx="859919" cy="307983"/>
-          </a:xfrm>
-          <a:prstGeom prst="rect">
-            <a:avLst/>
-          </a:prstGeom>
-          <a:solidFill>
-            <a:schemeClr val="bg1">
-              <a:lumMod val="95000"/>
-            </a:schemeClr>
-          </a:solidFill>
-          <a:ln w="38100">
-            <a:solidFill>
-              <a:schemeClr val="bg1">
-                <a:lumMod val="75000"/>
-                <a:alpha val="80000"/>
-              </a:schemeClr>
-            </a:solidFill>
-          </a:ln>
-        </p:spPr>
-        <p:style>
-          <a:lnRef idx="2">
-            <a:schemeClr val="accent1">
-              <a:shade val="15000"/>
-            </a:schemeClr>
-          </a:lnRef>
-          <a:fillRef idx="1">
-            <a:schemeClr val="accent1"/>
-          </a:fillRef>
-          <a:effectRef idx="0">
-            <a:schemeClr val="accent1"/>
-          </a:effectRef>
-          <a:fontRef idx="minor">
-            <a:schemeClr val="lt1"/>
-          </a:fontRef>
-        </p:style>
-        <p:txBody>
-          <a:bodyPr wrap="none" lIns="0" tIns="0" rIns="0" bIns="0" rtlCol="0" anchor="ctr" anchorCtr="1"/>
-          <a:lstStyle/>
-          <a:p>
-            <a:pPr algn="ctr"/>
-            <a:r>
-              <a:rPr lang="en-US" altLang="zh-TW" sz="1400" b="1" dirty="0">
-                <a:solidFill>
-                  <a:schemeClr val="tx1">
-                    <a:lumMod val="85000"/>
-                    <a:lumOff val="15000"/>
-                  </a:schemeClr>
-                </a:solidFill>
-              </a:rPr>
-              <a:t>AI Agent</a:t>
-            </a:r>
-            <a:endParaRPr lang="zh-TW" altLang="en-US" dirty="0">
-              <a:solidFill>
-                <a:schemeClr val="tx1">
-                  <a:lumMod val="85000"/>
-                  <a:lumOff val="15000"/>
-                </a:schemeClr>
-              </a:solidFill>
-            </a:endParaRPr>
-          </a:p>
-        </p:txBody>
-      </p:sp>
-      <p:sp>
-        <p:nvSpPr>
           <p:cNvPr id="3" name="文字方塊 2">
             <a:extLst>
               <a:ext uri="{FF2B5EF4-FFF2-40B4-BE49-F238E27FC236}">
@@ -8323,7 +7953,7 @@
         </p:nvSpPr>
         <p:spPr>
           <a:xfrm>
-            <a:off x="696456" y="5092095"/>
+            <a:off x="1703433" y="2085327"/>
             <a:ext cx="990731" cy="489287"/>
           </a:xfrm>
           <a:prstGeom prst="rect">
@@ -8372,7 +8002,25 @@
                 <a:ea typeface="ADLaM Display" panose="02010000000000000000" pitchFamily="2" charset="0"/>
                 <a:cs typeface="ADLaM Display" panose="02010000000000000000" pitchFamily="2" charset="0"/>
               </a:rPr>
-              <a:t>Bio-AI-Agent</a:t>
+              <a:t>Bio-AI</a:t>
+            </a:r>
+          </a:p>
+          <a:p>
+            <a:pPr algn="ctr">
+              <a:lnSpc>
+                <a:spcPts val="1600"/>
+              </a:lnSpc>
+            </a:pPr>
+            <a:r>
+              <a:rPr lang="en-US" altLang="zh-TW" sz="1200" dirty="0">
+                <a:solidFill>
+                  <a:schemeClr val="tx2"/>
+                </a:solidFill>
+                <a:latin typeface="ADLaM Display" panose="02010000000000000000" pitchFamily="2" charset="0"/>
+                <a:ea typeface="ADLaM Display" panose="02010000000000000000" pitchFamily="2" charset="0"/>
+                <a:cs typeface="ADLaM Display" panose="02010000000000000000" pitchFamily="2" charset="0"/>
+              </a:rPr>
+              <a:t>Agent</a:t>
             </a:r>
           </a:p>
         </p:txBody>
